--- a/The 15-Minute City in Practice.pptx
+++ b/The 15-Minute City in Practice.pptx
@@ -6,12 +6,16 @@
   </p:sldMasterIdLst>
   <p:sldIdLst>
     <p:sldId id="256" r:id="rId2"/>
-    <p:sldId id="257" r:id="rId3"/>
-    <p:sldId id="258" r:id="rId4"/>
-    <p:sldId id="259" r:id="rId5"/>
-    <p:sldId id="263" r:id="rId6"/>
-    <p:sldId id="261" r:id="rId7"/>
-    <p:sldId id="262" r:id="rId8"/>
+    <p:sldId id="258" r:id="rId3"/>
+    <p:sldId id="257" r:id="rId4"/>
+    <p:sldId id="266" r:id="rId5"/>
+    <p:sldId id="259" r:id="rId6"/>
+    <p:sldId id="265" r:id="rId7"/>
+    <p:sldId id="263" r:id="rId8"/>
+    <p:sldId id="261" r:id="rId9"/>
+    <p:sldId id="267" r:id="rId10"/>
+    <p:sldId id="268" r:id="rId11"/>
+    <p:sldId id="262" r:id="rId12"/>
   </p:sldIdLst>
   <p:sldSz cx="12192000" cy="6858000"/>
   <p:notesSz cx="6858000" cy="9144000"/>
@@ -120,392 +124,35 @@
 
 <file path=ppt/authors.xml><?xml version="1.0" encoding="utf-8"?>
 <p188:authorLst xmlns:a="http://schemas.openxmlformats.org/drawingml/2006/main" xmlns:r="http://schemas.openxmlformats.org/officeDocument/2006/relationships" xmlns:p188="http://schemas.microsoft.com/office/powerpoint/2018/8/main">
+  <p188:author id="{DE3E4DB8-4E12-F18C-200B-095F2E882368}" name="Kern  Lucie" initials="KL" userId="S::kernlu@ethz.ch::73957d06-79f2-4001-a218-8bdcb8f96aaa" providerId="AD"/>
   <p188:author id="{C91F3CF6-149F-06F0-0291-18BB8A7035EF}" name="Noémie Simon" initials="NS" userId="bcf751ccc0c63cc4" providerId="Windows Live"/>
 </p188:authorLst>
 </file>
 
-<file path=ppt/revisionInfo.xml><?xml version="1.0" encoding="utf-8"?>
-<p1510:revInfo xmlns:a="http://schemas.openxmlformats.org/drawingml/2006/main" xmlns:r="http://schemas.openxmlformats.org/officeDocument/2006/relationships" xmlns:p1510="http://schemas.microsoft.com/office/powerpoint/2015/10/main">
-  <p1510:revLst>
-    <p1510:client id="{5E255A67-A6A9-4968-8E92-A1C96BA15CA7}" v="33" dt="2026-05-31T09:33:59.745"/>
-  </p1510:revLst>
-</p1510:revInfo>
-</file>
-
-<file path=ppt/changesInfos/changesInfo1.xml><?xml version="1.0" encoding="utf-8"?>
-<pc:chgInfo xmlns:a="http://schemas.openxmlformats.org/drawingml/2006/main" xmlns:r="http://schemas.openxmlformats.org/officeDocument/2006/relationships" xmlns:ac="http://schemas.microsoft.com/office/drawing/2013/main/command" xmlns:pc="http://schemas.microsoft.com/office/powerpoint/2013/main/command">
-  <pc:docChgLst>
-    <pc:chgData name="Noémie Simon" userId="bcf751ccc0c63cc4" providerId="LiveId" clId="{D8646A5F-B639-4467-90AE-53976C914447}"/>
-    <pc:docChg chg="undo custSel addSld delSld modSld">
-      <pc:chgData name="Noémie Simon" userId="bcf751ccc0c63cc4" providerId="LiveId" clId="{D8646A5F-B639-4467-90AE-53976C914447}" dt="2026-06-01T06:50:06.186" v="1529" actId="20577"/>
-      <pc:docMkLst>
-        <pc:docMk/>
-      </pc:docMkLst>
-      <pc:sldChg chg="addSp delSp modSp mod setBg addAnim delAnim">
-        <pc:chgData name="Noémie Simon" userId="bcf751ccc0c63cc4" providerId="LiveId" clId="{D8646A5F-B639-4467-90AE-53976C914447}" dt="2026-05-31T09:28:34.135" v="1149" actId="20577"/>
-        <pc:sldMkLst>
-          <pc:docMk/>
-          <pc:sldMk cId="3359249337" sldId="256"/>
-        </pc:sldMkLst>
-        <pc:spChg chg="mod">
-          <ac:chgData name="Noémie Simon" userId="bcf751ccc0c63cc4" providerId="LiveId" clId="{D8646A5F-B639-4467-90AE-53976C914447}" dt="2026-05-31T09:28:34.135" v="1149" actId="20577"/>
-          <ac:spMkLst>
-            <pc:docMk/>
-            <pc:sldMk cId="3359249337" sldId="256"/>
-            <ac:spMk id="2" creationId="{55269C2F-6BFD-EFC2-398D-9FE490AB97CC}"/>
-          </ac:spMkLst>
-        </pc:spChg>
-        <pc:spChg chg="mod">
-          <ac:chgData name="Noémie Simon" userId="bcf751ccc0c63cc4" providerId="LiveId" clId="{D8646A5F-B639-4467-90AE-53976C914447}" dt="2026-05-31T09:27:57.969" v="1144" actId="26606"/>
-          <ac:spMkLst>
-            <pc:docMk/>
-            <pc:sldMk cId="3359249337" sldId="256"/>
-            <ac:spMk id="3" creationId="{F45A3335-A6F0-3BBD-83BD-6F6034AF78D0}"/>
-          </ac:spMkLst>
-        </pc:spChg>
-        <pc:spChg chg="add del">
-          <ac:chgData name="Noémie Simon" userId="bcf751ccc0c63cc4" providerId="LiveId" clId="{D8646A5F-B639-4467-90AE-53976C914447}" dt="2026-05-31T09:27:57.969" v="1144" actId="26606"/>
-          <ac:spMkLst>
-            <pc:docMk/>
-            <pc:sldMk cId="3359249337" sldId="256"/>
-            <ac:spMk id="1045" creationId="{22A397E7-BF60-45B2-84C7-B074B76C37A7}"/>
-          </ac:spMkLst>
-        </pc:spChg>
-        <pc:spChg chg="add del">
-          <ac:chgData name="Noémie Simon" userId="bcf751ccc0c63cc4" providerId="LiveId" clId="{D8646A5F-B639-4467-90AE-53976C914447}" dt="2026-05-31T09:27:57.969" v="1144" actId="26606"/>
-          <ac:spMkLst>
-            <pc:docMk/>
-            <pc:sldMk cId="3359249337" sldId="256"/>
-            <ac:spMk id="1046" creationId="{890DEF05-784E-4B61-89E4-04C4ECF4E5A0}"/>
-          </ac:spMkLst>
-        </pc:spChg>
-        <pc:spChg chg="add">
-          <ac:chgData name="Noémie Simon" userId="bcf751ccc0c63cc4" providerId="LiveId" clId="{D8646A5F-B639-4467-90AE-53976C914447}" dt="2026-05-31T09:27:57.969" v="1144" actId="26606"/>
-          <ac:spMkLst>
-            <pc:docMk/>
-            <pc:sldMk cId="3359249337" sldId="256"/>
-            <ac:spMk id="1052" creationId="{06DA9DF9-31F7-4056-B42E-878CC92417B8}"/>
-          </ac:spMkLst>
-        </pc:spChg>
-        <pc:picChg chg="add mod ord">
-          <ac:chgData name="Noémie Simon" userId="bcf751ccc0c63cc4" providerId="LiveId" clId="{D8646A5F-B639-4467-90AE-53976C914447}" dt="2026-05-31T09:27:57.969" v="1144" actId="26606"/>
-          <ac:picMkLst>
-            <pc:docMk/>
-            <pc:sldMk cId="3359249337" sldId="256"/>
-            <ac:picMk id="1026" creationId="{CD7F0A5B-B055-F6EE-B9F3-822F30A08950}"/>
-          </ac:picMkLst>
-        </pc:picChg>
-        <pc:cxnChg chg="add del">
-          <ac:chgData name="Noémie Simon" userId="bcf751ccc0c63cc4" providerId="LiveId" clId="{D8646A5F-B639-4467-90AE-53976C914447}" dt="2026-05-31T09:27:57.969" v="1144" actId="26606"/>
-          <ac:cxnSpMkLst>
-            <pc:docMk/>
-            <pc:sldMk cId="3359249337" sldId="256"/>
-            <ac:cxnSpMk id="1047" creationId="{C41BAEC7-F7B0-4224-8B18-8F74B7D87F0B}"/>
-          </ac:cxnSpMkLst>
-        </pc:cxnChg>
-      </pc:sldChg>
-      <pc:sldChg chg="addSp modSp mod setBg">
-        <pc:chgData name="Noémie Simon" userId="bcf751ccc0c63cc4" providerId="LiveId" clId="{D8646A5F-B639-4467-90AE-53976C914447}" dt="2026-05-31T09:29:44.839" v="1151" actId="26606"/>
-        <pc:sldMkLst>
-          <pc:docMk/>
-          <pc:sldMk cId="3526247385" sldId="257"/>
-        </pc:sldMkLst>
-        <pc:spChg chg="mod">
-          <ac:chgData name="Noémie Simon" userId="bcf751ccc0c63cc4" providerId="LiveId" clId="{D8646A5F-B639-4467-90AE-53976C914447}" dt="2026-05-31T09:29:44.839" v="1151" actId="26606"/>
-          <ac:spMkLst>
-            <pc:docMk/>
-            <pc:sldMk cId="3526247385" sldId="257"/>
-            <ac:spMk id="2" creationId="{13FC2779-AD61-AFF4-CEE5-9F53C2E97AC6}"/>
-          </ac:spMkLst>
-        </pc:spChg>
-        <pc:spChg chg="mod">
-          <ac:chgData name="Noémie Simon" userId="bcf751ccc0c63cc4" providerId="LiveId" clId="{D8646A5F-B639-4467-90AE-53976C914447}" dt="2026-05-31T09:29:44.839" v="1151" actId="26606"/>
-          <ac:spMkLst>
-            <pc:docMk/>
-            <pc:sldMk cId="3526247385" sldId="257"/>
-            <ac:spMk id="3" creationId="{8935F94C-1BC8-885B-BEF5-2A25234FC7EF}"/>
-          </ac:spMkLst>
-        </pc:spChg>
-        <pc:spChg chg="add">
-          <ac:chgData name="Noémie Simon" userId="bcf751ccc0c63cc4" providerId="LiveId" clId="{D8646A5F-B639-4467-90AE-53976C914447}" dt="2026-05-31T09:29:44.839" v="1151" actId="26606"/>
-          <ac:spMkLst>
-            <pc:docMk/>
-            <pc:sldMk cId="3526247385" sldId="257"/>
-            <ac:spMk id="8" creationId="{17718681-A12E-49D6-9925-DD7C68176D61}"/>
-          </ac:spMkLst>
-        </pc:spChg>
-        <pc:spChg chg="add">
-          <ac:chgData name="Noémie Simon" userId="bcf751ccc0c63cc4" providerId="LiveId" clId="{D8646A5F-B639-4467-90AE-53976C914447}" dt="2026-05-31T09:29:44.839" v="1151" actId="26606"/>
-          <ac:spMkLst>
-            <pc:docMk/>
-            <pc:sldMk cId="3526247385" sldId="257"/>
-            <ac:spMk id="10" creationId="{FBD77573-9EF2-4C35-8285-A1CF6FBB0EA5}"/>
-          </ac:spMkLst>
-        </pc:spChg>
-      </pc:sldChg>
-      <pc:sldChg chg="addSp delSp modSp mod setBg">
-        <pc:chgData name="Noémie Simon" userId="bcf751ccc0c63cc4" providerId="LiveId" clId="{D8646A5F-B639-4467-90AE-53976C914447}" dt="2026-05-31T09:29:34.728" v="1150" actId="26606"/>
-        <pc:sldMkLst>
-          <pc:docMk/>
-          <pc:sldMk cId="3809305011" sldId="259"/>
-        </pc:sldMkLst>
-        <pc:spChg chg="mod">
-          <ac:chgData name="Noémie Simon" userId="bcf751ccc0c63cc4" providerId="LiveId" clId="{D8646A5F-B639-4467-90AE-53976C914447}" dt="2026-05-31T09:29:34.728" v="1150" actId="26606"/>
-          <ac:spMkLst>
-            <pc:docMk/>
-            <pc:sldMk cId="3809305011" sldId="259"/>
-            <ac:spMk id="2" creationId="{3ED5FDDA-FB89-7C42-000C-DFB890DC4FCA}"/>
-          </ac:spMkLst>
-        </pc:spChg>
-        <pc:spChg chg="add del">
-          <ac:chgData name="Noémie Simon" userId="bcf751ccc0c63cc4" providerId="LiveId" clId="{D8646A5F-B639-4467-90AE-53976C914447}" dt="2026-05-31T09:29:34.728" v="1150" actId="26606"/>
-          <ac:spMkLst>
-            <pc:docMk/>
-            <pc:sldMk cId="3809305011" sldId="259"/>
-            <ac:spMk id="8" creationId="{E8A8EAB8-D2FF-444D-B34B-7D32F106AD0E}"/>
-          </ac:spMkLst>
-        </pc:spChg>
-        <pc:spChg chg="add mod">
-          <ac:chgData name="Noémie Simon" userId="bcf751ccc0c63cc4" providerId="LiveId" clId="{D8646A5F-B639-4467-90AE-53976C914447}" dt="2026-05-31T09:29:34.728" v="1150" actId="26606"/>
-          <ac:spMkLst>
-            <pc:docMk/>
-            <pc:sldMk cId="3809305011" sldId="259"/>
-            <ac:spMk id="24" creationId="{D7FDF29B-A281-F3CF-760D-321759BA8581}"/>
-          </ac:spMkLst>
-        </pc:spChg>
-        <pc:spChg chg="add">
-          <ac:chgData name="Noémie Simon" userId="bcf751ccc0c63cc4" providerId="LiveId" clId="{D8646A5F-B639-4467-90AE-53976C914447}" dt="2026-05-31T09:29:34.728" v="1150" actId="26606"/>
-          <ac:spMkLst>
-            <pc:docMk/>
-            <pc:sldMk cId="3809305011" sldId="259"/>
-            <ac:spMk id="29" creationId="{17718681-A12E-49D6-9925-DD7C68176D61}"/>
-          </ac:spMkLst>
-        </pc:spChg>
-        <pc:spChg chg="add">
-          <ac:chgData name="Noémie Simon" userId="bcf751ccc0c63cc4" providerId="LiveId" clId="{D8646A5F-B639-4467-90AE-53976C914447}" dt="2026-05-31T09:29:34.728" v="1150" actId="26606"/>
-          <ac:spMkLst>
-            <pc:docMk/>
-            <pc:sldMk cId="3809305011" sldId="259"/>
-            <ac:spMk id="31" creationId="{FBD77573-9EF2-4C35-8285-A1CF6FBB0EA5}"/>
-          </ac:spMkLst>
-        </pc:spChg>
-        <pc:cxnChg chg="add del">
-          <ac:chgData name="Noémie Simon" userId="bcf751ccc0c63cc4" providerId="LiveId" clId="{D8646A5F-B639-4467-90AE-53976C914447}" dt="2026-05-31T09:29:34.728" v="1150" actId="26606"/>
-          <ac:cxnSpMkLst>
-            <pc:docMk/>
-            <pc:sldMk cId="3809305011" sldId="259"/>
-            <ac:cxnSpMk id="10" creationId="{067633D1-6EE6-4118-B9F0-B363477BEE7A}"/>
-          </ac:cxnSpMkLst>
-        </pc:cxnChg>
-        <pc:cxnChg chg="add del">
-          <ac:chgData name="Noémie Simon" userId="bcf751ccc0c63cc4" providerId="LiveId" clId="{D8646A5F-B639-4467-90AE-53976C914447}" dt="2026-05-31T09:29:34.728" v="1150" actId="26606"/>
-          <ac:cxnSpMkLst>
-            <pc:docMk/>
-            <pc:sldMk cId="3809305011" sldId="259"/>
-            <ac:cxnSpMk id="23" creationId="{4AD7FFC6-42A9-49CB-B5E9-B3F6B038331B}"/>
-          </ac:cxnSpMkLst>
-        </pc:cxnChg>
-      </pc:sldChg>
-      <pc:sldChg chg="addSp delSp modSp del mod setBg">
-        <pc:chgData name="Noémie Simon" userId="bcf751ccc0c63cc4" providerId="LiveId" clId="{D8646A5F-B639-4467-90AE-53976C914447}" dt="2026-05-31T09:34:59.117" v="1203" actId="2696"/>
-        <pc:sldMkLst>
-          <pc:docMk/>
-          <pc:sldMk cId="4275413977" sldId="260"/>
-        </pc:sldMkLst>
-        <pc:spChg chg="mod">
-          <ac:chgData name="Noémie Simon" userId="bcf751ccc0c63cc4" providerId="LiveId" clId="{D8646A5F-B639-4467-90AE-53976C914447}" dt="2026-05-31T09:30:27.244" v="1152" actId="26606"/>
-          <ac:spMkLst>
-            <pc:docMk/>
-            <pc:sldMk cId="4275413977" sldId="260"/>
-            <ac:spMk id="2" creationId="{5D1B4BA3-9DD0-C0AB-9C5D-69A77D076275}"/>
-          </ac:spMkLst>
-        </pc:spChg>
-        <pc:spChg chg="add mod">
-          <ac:chgData name="Noémie Simon" userId="bcf751ccc0c63cc4" providerId="LiveId" clId="{D8646A5F-B639-4467-90AE-53976C914447}" dt="2026-05-31T09:32:24.091" v="1171" actId="21"/>
-          <ac:spMkLst>
-            <pc:docMk/>
-            <pc:sldMk cId="4275413977" sldId="260"/>
-            <ac:spMk id="19" creationId="{9E093EC3-4481-35A7-6E42-24C61CD6A052}"/>
-          </ac:spMkLst>
-        </pc:spChg>
-        <pc:grpChg chg="add">
-          <ac:chgData name="Noémie Simon" userId="bcf751ccc0c63cc4" providerId="LiveId" clId="{D8646A5F-B639-4467-90AE-53976C914447}" dt="2026-05-31T09:30:27.244" v="1152" actId="26606"/>
-          <ac:grpSpMkLst>
-            <pc:docMk/>
-            <pc:sldMk cId="4275413977" sldId="260"/>
-            <ac:grpSpMk id="16" creationId="{445B6E89-4255-F247-3C60-C1015C515A97}"/>
-          </ac:grpSpMkLst>
-        </pc:grpChg>
-        <pc:graphicFrameChg chg="add del mod ord modGraphic">
-          <ac:chgData name="Noémie Simon" userId="bcf751ccc0c63cc4" providerId="LiveId" clId="{D8646A5F-B639-4467-90AE-53976C914447}" dt="2026-05-31T09:32:24.091" v="1171" actId="21"/>
-          <ac:graphicFrameMkLst>
-            <pc:docMk/>
-            <pc:sldMk cId="4275413977" sldId="260"/>
-            <ac:graphicFrameMk id="10" creationId="{F0AF24CE-C5D3-D1BD-30C2-C0EACACE23B1}"/>
-          </ac:graphicFrameMkLst>
-        </pc:graphicFrameChg>
-        <pc:picChg chg="add del mod">
-          <ac:chgData name="Noémie Simon" userId="bcf751ccc0c63cc4" providerId="LiveId" clId="{D8646A5F-B639-4467-90AE-53976C914447}" dt="2026-05-31T09:32:07.286" v="1169" actId="478"/>
-          <ac:picMkLst>
-            <pc:docMk/>
-            <pc:sldMk cId="4275413977" sldId="260"/>
-            <ac:picMk id="6" creationId="{85630027-68BA-211F-50C2-307DDD5CAD79}"/>
-          </ac:picMkLst>
-        </pc:picChg>
-        <pc:picChg chg="add del mod ord">
-          <ac:chgData name="Noémie Simon" userId="bcf751ccc0c63cc4" providerId="LiveId" clId="{D8646A5F-B639-4467-90AE-53976C914447}" dt="2026-05-31T09:32:05.672" v="1168" actId="478"/>
-          <ac:picMkLst>
-            <pc:docMk/>
-            <pc:sldMk cId="4275413977" sldId="260"/>
-            <ac:picMk id="8" creationId="{47A0FA92-F9CD-33D7-85DC-C36EBCF52706}"/>
-          </ac:picMkLst>
-        </pc:picChg>
-        <pc:picChg chg="add mod ord">
-          <ac:chgData name="Noémie Simon" userId="bcf751ccc0c63cc4" providerId="LiveId" clId="{D8646A5F-B639-4467-90AE-53976C914447}" dt="2026-05-31T09:31:18.300" v="1162" actId="1076"/>
-          <ac:picMkLst>
-            <pc:docMk/>
-            <pc:sldMk cId="4275413977" sldId="260"/>
-            <ac:picMk id="9" creationId="{E8734107-0AE7-F570-0164-5E5E8ED87B76}"/>
-          </ac:picMkLst>
-        </pc:picChg>
-        <pc:picChg chg="add del mod">
-          <ac:chgData name="Noémie Simon" userId="bcf751ccc0c63cc4" providerId="LiveId" clId="{D8646A5F-B639-4467-90AE-53976C914447}" dt="2026-05-31T09:32:03.870" v="1167" actId="478"/>
-          <ac:picMkLst>
-            <pc:docMk/>
-            <pc:sldMk cId="4275413977" sldId="260"/>
-            <ac:picMk id="11" creationId="{B33404FD-35B8-784F-1BC2-E3D96512C067}"/>
-          </ac:picMkLst>
-        </pc:picChg>
-        <pc:picChg chg="add del mod">
-          <ac:chgData name="Noémie Simon" userId="bcf751ccc0c63cc4" providerId="LiveId" clId="{D8646A5F-B639-4467-90AE-53976C914447}" dt="2026-05-31T09:33:19.666" v="1191" actId="21"/>
-          <ac:picMkLst>
-            <pc:docMk/>
-            <pc:sldMk cId="4275413977" sldId="260"/>
-            <ac:picMk id="12" creationId="{A3023F9A-E358-3DBF-913D-70EF311A1529}"/>
-          </ac:picMkLst>
-        </pc:picChg>
-        <pc:picChg chg="add mod">
-          <ac:chgData name="Noémie Simon" userId="bcf751ccc0c63cc4" providerId="LiveId" clId="{D8646A5F-B639-4467-90AE-53976C914447}" dt="2026-05-31T09:31:09.912" v="1160" actId="1076"/>
-          <ac:picMkLst>
-            <pc:docMk/>
-            <pc:sldMk cId="4275413977" sldId="260"/>
-            <ac:picMk id="13" creationId="{1B8DA84F-AF25-61C9-02C5-E2D9420D0096}"/>
-          </ac:picMkLst>
-        </pc:picChg>
-        <pc:picChg chg="add mod">
-          <ac:chgData name="Noémie Simon" userId="bcf751ccc0c63cc4" providerId="LiveId" clId="{D8646A5F-B639-4467-90AE-53976C914447}" dt="2026-05-31T09:31:14.562" v="1161" actId="1076"/>
-          <ac:picMkLst>
-            <pc:docMk/>
-            <pc:sldMk cId="4275413977" sldId="260"/>
-            <ac:picMk id="14" creationId="{145A1C8D-DCE4-8575-9003-D3333A2190A5}"/>
-          </ac:picMkLst>
-        </pc:picChg>
-      </pc:sldChg>
-      <pc:sldChg chg="modSp mod">
-        <pc:chgData name="Noémie Simon" userId="bcf751ccc0c63cc4" providerId="LiveId" clId="{D8646A5F-B639-4467-90AE-53976C914447}" dt="2026-06-01T06:50:06.186" v="1529" actId="20577"/>
-        <pc:sldMkLst>
-          <pc:docMk/>
-          <pc:sldMk cId="2357305363" sldId="262"/>
-        </pc:sldMkLst>
-        <pc:spChg chg="mod">
-          <ac:chgData name="Noémie Simon" userId="bcf751ccc0c63cc4" providerId="LiveId" clId="{D8646A5F-B639-4467-90AE-53976C914447}" dt="2026-06-01T06:50:06.186" v="1529" actId="20577"/>
-          <ac:spMkLst>
-            <pc:docMk/>
-            <pc:sldMk cId="2357305363" sldId="262"/>
-            <ac:spMk id="3" creationId="{DBAEEBF5-C3D9-FA63-1735-E9C2F5C42998}"/>
-          </ac:spMkLst>
-        </pc:spChg>
-      </pc:sldChg>
-      <pc:sldChg chg="addSp delSp modSp new mod setBg">
-        <pc:chgData name="Noémie Simon" userId="bcf751ccc0c63cc4" providerId="LiveId" clId="{D8646A5F-B639-4467-90AE-53976C914447}" dt="2026-05-31T09:37:24.741" v="1219" actId="478"/>
-        <pc:sldMkLst>
-          <pc:docMk/>
-          <pc:sldMk cId="1534447552" sldId="263"/>
-        </pc:sldMkLst>
-        <pc:spChg chg="mod">
-          <ac:chgData name="Noémie Simon" userId="bcf751ccc0c63cc4" providerId="LiveId" clId="{D8646A5F-B639-4467-90AE-53976C914447}" dt="2026-05-31T09:36:01.073" v="1205" actId="26606"/>
-          <ac:spMkLst>
-            <pc:docMk/>
-            <pc:sldMk cId="1534447552" sldId="263"/>
-            <ac:spMk id="2" creationId="{FDAE109C-6D34-3899-2236-59C7379E8D40}"/>
-          </ac:spMkLst>
-        </pc:spChg>
-        <pc:spChg chg="del">
-          <ac:chgData name="Noémie Simon" userId="bcf751ccc0c63cc4" providerId="LiveId" clId="{D8646A5F-B639-4467-90AE-53976C914447}" dt="2026-05-31T09:32:33.829" v="1173"/>
-          <ac:spMkLst>
-            <pc:docMk/>
-            <pc:sldMk cId="1534447552" sldId="263"/>
-            <ac:spMk id="3" creationId="{E42DAFD5-E437-3C18-46C7-B787B587B5A7}"/>
-          </ac:spMkLst>
-        </pc:spChg>
-        <pc:spChg chg="add del">
-          <ac:chgData name="Noémie Simon" userId="bcf751ccc0c63cc4" providerId="LiveId" clId="{D8646A5F-B639-4467-90AE-53976C914447}" dt="2026-05-31T09:37:24.741" v="1219" actId="478"/>
-          <ac:spMkLst>
-            <pc:docMk/>
-            <pc:sldMk cId="1534447552" sldId="263"/>
-            <ac:spMk id="16" creationId="{55DEFD2D-AF23-B8C6-B4BF-96A1F090F3ED}"/>
-          </ac:spMkLst>
-        </pc:spChg>
-        <pc:grpChg chg="add del">
-          <ac:chgData name="Noémie Simon" userId="bcf751ccc0c63cc4" providerId="LiveId" clId="{D8646A5F-B639-4467-90AE-53976C914447}" dt="2026-05-31T09:36:01.073" v="1205" actId="26606"/>
-          <ac:grpSpMkLst>
-            <pc:docMk/>
-            <pc:sldMk cId="1534447552" sldId="263"/>
-            <ac:grpSpMk id="17" creationId="{445B6E89-4255-F247-3C60-C1015C515A97}"/>
-          </ac:grpSpMkLst>
-        </pc:grpChg>
-        <pc:graphicFrameChg chg="add mod ord modGraphic">
-          <ac:chgData name="Noémie Simon" userId="bcf751ccc0c63cc4" providerId="LiveId" clId="{D8646A5F-B639-4467-90AE-53976C914447}" dt="2026-05-31T09:36:01.073" v="1205" actId="26606"/>
-          <ac:graphicFrameMkLst>
-            <pc:docMk/>
-            <pc:sldMk cId="1534447552" sldId="263"/>
-            <ac:graphicFrameMk id="10" creationId="{F0AF24CE-C5D3-D1BD-30C2-C0EACACE23B1}"/>
-          </ac:graphicFrameMkLst>
-        </pc:graphicFrameChg>
-        <pc:picChg chg="add mod ord">
-          <ac:chgData name="Noémie Simon" userId="bcf751ccc0c63cc4" providerId="LiveId" clId="{D8646A5F-B639-4467-90AE-53976C914447}" dt="2026-05-31T09:36:01.073" v="1205" actId="26606"/>
-          <ac:picMkLst>
-            <pc:docMk/>
-            <pc:sldMk cId="1534447552" sldId="263"/>
-            <ac:picMk id="4" creationId="{38B915E9-9DD5-D0F4-8165-7A9E5BCA0203}"/>
-          </ac:picMkLst>
-        </pc:picChg>
-        <pc:picChg chg="add mod">
-          <ac:chgData name="Noémie Simon" userId="bcf751ccc0c63cc4" providerId="LiveId" clId="{D8646A5F-B639-4467-90AE-53976C914447}" dt="2026-05-31T09:36:01.073" v="1205" actId="26606"/>
-          <ac:picMkLst>
-            <pc:docMk/>
-            <pc:sldMk cId="1534447552" sldId="263"/>
-            <ac:picMk id="5" creationId="{65FA58BF-3231-B8D6-4E08-A8E836ED05BD}"/>
-          </ac:picMkLst>
-        </pc:picChg>
-        <pc:picChg chg="add mod">
-          <ac:chgData name="Noémie Simon" userId="bcf751ccc0c63cc4" providerId="LiveId" clId="{D8646A5F-B639-4467-90AE-53976C914447}" dt="2026-05-31T09:36:01.073" v="1205" actId="26606"/>
-          <ac:picMkLst>
-            <pc:docMk/>
-            <pc:sldMk cId="1534447552" sldId="263"/>
-            <ac:picMk id="6" creationId="{68B16695-A7DE-7F0A-7798-7A04FB9C77BE}"/>
-          </ac:picMkLst>
-        </pc:picChg>
-        <pc:picChg chg="add mod">
-          <ac:chgData name="Noémie Simon" userId="bcf751ccc0c63cc4" providerId="LiveId" clId="{D8646A5F-B639-4467-90AE-53976C914447}" dt="2026-05-31T09:36:01.073" v="1205" actId="26606"/>
-          <ac:picMkLst>
-            <pc:docMk/>
-            <pc:sldMk cId="1534447552" sldId="263"/>
-            <ac:picMk id="12" creationId="{A3023F9A-E358-3DBF-913D-70EF311A1529}"/>
-          </ac:picMkLst>
-        </pc:picChg>
-        <pc:cxnChg chg="add del mod">
-          <ac:chgData name="Noémie Simon" userId="bcf751ccc0c63cc4" providerId="LiveId" clId="{D8646A5F-B639-4467-90AE-53976C914447}" dt="2026-05-31T09:37:00.148" v="1217" actId="11529"/>
-          <ac:cxnSpMkLst>
-            <pc:docMk/>
-            <pc:sldMk cId="1534447552" sldId="263"/>
-            <ac:cxnSpMk id="8" creationId="{C1E85F7E-FD0D-8E69-60B8-68348D9D1CC8}"/>
-          </ac:cxnSpMkLst>
-        </pc:cxnChg>
-      </pc:sldChg>
-    </pc:docChg>
-  </pc:docChgLst>
-</pc:chgInfo>
+<file path=ppt/comments/modernComment_100_C83A13B9.xml><?xml version="1.0" encoding="utf-8"?>
+<p188:cmLst xmlns:a="http://schemas.openxmlformats.org/drawingml/2006/main" xmlns:r="http://schemas.openxmlformats.org/officeDocument/2006/relationships" xmlns:p188="http://schemas.microsoft.com/office/powerpoint/2018/8/main">
+  <p188:cm id="{D96A257B-1C8E-E748-A2DE-938E634E31F0}" authorId="{DE3E4DB8-4E12-F18C-200B-095F2E882368}" created="2026-06-01T12:49:13.102">
+    <pc:sldMkLst xmlns:pc="http://schemas.microsoft.com/office/powerpoint/2013/main/command">
+      <pc:docMk/>
+      <pc:sldMk cId="3359249337" sldId="256"/>
+    </pc:sldMkLst>
+    <p188:txBody>
+      <a:bodyPr/>
+      <a:lstStyle/>
+      <a:p>
+        <a:r>
+          <a:rPr lang="en-001"/>
+          <a:t>new suggestion for poetic and attention grabbing title how Patrick loves them : Close Enough to Reach, Far Enough to Go
+Exploring the Gap Between Accessibility and Mobility in Zurich 
+The Places We Could Go and the Places We Do
+Comparing Theoretical Accessibility and Real Mobility Patterns in Zurich
+Between Opportunity and Movement
+Testing the 15-Minute City Through GPS Trajectories in Zurich </a:t>
+        </a:r>
+      </a:p>
+    </p188:txBody>
+  </p188:cm>
+</p188:cmLst>
 </file>
 
 <file path=ppt/comments/modernComment_102_88E6931F.xml><?xml version="1.0" encoding="utf-8"?>
@@ -522,6 +169,27 @@
         <a:r>
           <a:rPr lang="fr-CH"/>
           <a:t>Not sure what we want to say about the context!?</a:t>
+        </a:r>
+      </a:p>
+    </p188:txBody>
+  </p188:cm>
+</p188:cmLst>
+</file>
+
+<file path=ppt/comments/modernComment_10A_7D0C916.xml><?xml version="1.0" encoding="utf-8"?>
+<p188:cmLst xmlns:a="http://schemas.openxmlformats.org/drawingml/2006/main" xmlns:r="http://schemas.openxmlformats.org/officeDocument/2006/relationships" xmlns:p188="http://schemas.microsoft.com/office/powerpoint/2018/8/main">
+  <p188:cm id="{2741BC7A-6D15-D840-B712-6623240A656C}" authorId="{DE3E4DB8-4E12-F18C-200B-095F2E882368}" created="2026-06-01T12:46:54.639">
+    <pc:sldMkLst xmlns:pc="http://schemas.microsoft.com/office/powerpoint/2013/main/command">
+      <pc:docMk/>
+      <pc:sldMk cId="131123478" sldId="266"/>
+    </pc:sldMkLst>
+    <p188:txBody>
+      <a:bodyPr/>
+      <a:lstStyle/>
+      <a:p>
+        <a:r>
+          <a:rPr lang="en-001"/>
+          <a:t>soit on garde slide 2-3, soit juste slide 4</a:t>
         </a:r>
       </a:p>
     </p188:txBody>
@@ -1470,8 +1138,24 @@
         <a:lstStyle/>
         <a:p>
           <a:r>
-            <a:rPr lang="fr-CH" sz="2000"/>
-            <a:t>Collection of data of  trajectory  (google maps) </a:t>
+            <a:rPr lang="fr-CH" sz="2000" dirty="0"/>
+            <a:t>Collection of data of  </a:t>
+          </a:r>
+          <a:r>
+            <a:rPr lang="fr-CH" sz="2000" dirty="0" err="1"/>
+            <a:t>trajectory</a:t>
+          </a:r>
+          <a:r>
+            <a:rPr lang="fr-CH" sz="2000" dirty="0"/>
+            <a:t>  (google </a:t>
+          </a:r>
+          <a:r>
+            <a:rPr lang="fr-CH" sz="2000" dirty="0" err="1"/>
+            <a:t>maps</a:t>
+          </a:r>
+          <a:r>
+            <a:rPr lang="fr-CH" sz="2000" dirty="0"/>
+            <a:t>) </a:t>
           </a:r>
           <a:endParaRPr lang="en-US" sz="2000" dirty="0"/>
         </a:p>
@@ -1507,10 +1191,22 @@
         <a:lstStyle/>
         <a:p>
           <a:r>
-            <a:rPr lang="fr-CH" sz="2000"/>
-            <a:t>Creation of isochrones</a:t>
+            <a:rPr lang="fr-CH" sz="2000" dirty="0" err="1"/>
+            <a:t>Creation</a:t>
           </a:r>
-          <a:endParaRPr lang="en-US" sz="2000"/>
+          <a:r>
+            <a:rPr lang="fr-CH" sz="2000" dirty="0"/>
+            <a:t> of isochrones (15-minute </a:t>
+          </a:r>
+          <a:r>
+            <a:rPr lang="fr-CH" sz="2000" dirty="0" err="1"/>
+            <a:t>accesibility</a:t>
+          </a:r>
+          <a:r>
+            <a:rPr lang="fr-CH" sz="2000" dirty="0"/>
+            <a:t> zones)</a:t>
+          </a:r>
+          <a:endParaRPr lang="en-US" sz="2000" dirty="0"/>
         </a:p>
       </dgm:t>
     </dgm:pt>
@@ -1544,10 +1240,22 @@
         <a:lstStyle/>
         <a:p>
           <a:r>
-            <a:rPr lang="fr-CH" sz="2000"/>
-            <a:t>Detection of point of interests (POI) </a:t>
+            <a:rPr lang="fr-CH" sz="2000" dirty="0" err="1"/>
+            <a:t>Detection</a:t>
           </a:r>
-          <a:endParaRPr lang="en-US" sz="2000"/>
+          <a:r>
+            <a:rPr lang="fr-CH" sz="2000" dirty="0"/>
+            <a:t> of point of </a:t>
+          </a:r>
+          <a:r>
+            <a:rPr lang="fr-CH" sz="2000" dirty="0" err="1"/>
+            <a:t>interests</a:t>
+          </a:r>
+          <a:r>
+            <a:rPr lang="fr-CH" sz="2000" dirty="0"/>
+            <a:t> (POI) </a:t>
+          </a:r>
+          <a:endParaRPr lang="en-US" sz="2000" dirty="0"/>
         </a:p>
       </dgm:t>
     </dgm:pt>
@@ -1581,10 +1289,54 @@
         <a:lstStyle/>
         <a:p>
           <a:r>
-            <a:rPr lang="fr-CH" sz="2000"/>
-            <a:t>Labellisation of the trajectories of Lucie </a:t>
+            <a:rPr lang="fr-CH" sz="2000" dirty="0" err="1"/>
+            <a:t>Preprocessing</a:t>
           </a:r>
-          <a:endParaRPr lang="en-US" sz="2000"/>
+          <a:r>
+            <a:rPr lang="fr-CH" sz="2000" dirty="0"/>
+            <a:t> of </a:t>
+          </a:r>
+          <a:r>
+            <a:rPr lang="fr-CH" sz="2000" dirty="0" err="1"/>
+            <a:t>collected</a:t>
+          </a:r>
+          <a:r>
+            <a:rPr lang="fr-CH" sz="2000" dirty="0"/>
+            <a:t> data (segmentation, </a:t>
+          </a:r>
+          <a:r>
+            <a:rPr lang="fr-CH" sz="2000" dirty="0" err="1"/>
+            <a:t>categorization</a:t>
+          </a:r>
+          <a:r>
+            <a:rPr lang="fr-CH" sz="2000" dirty="0"/>
+            <a:t> of </a:t>
+          </a:r>
+          <a:r>
+            <a:rPr lang="fr-CH" sz="2000" dirty="0" err="1"/>
+            <a:t>visited</a:t>
+          </a:r>
+          <a:r>
+            <a:rPr lang="fr-CH" sz="2000" dirty="0"/>
+            <a:t> points, </a:t>
+          </a:r>
+          <a:r>
+            <a:rPr lang="fr-CH" sz="2000" dirty="0" err="1"/>
+            <a:t>mobility</a:t>
+          </a:r>
+          <a:r>
+            <a:rPr lang="fr-CH" sz="2000" dirty="0"/>
+            <a:t> </a:t>
+          </a:r>
+          <a:r>
+            <a:rPr lang="fr-CH" sz="2000" dirty="0" err="1"/>
+            <a:t>shapes</a:t>
+          </a:r>
+          <a:r>
+            <a:rPr lang="fr-CH" sz="2000" dirty="0"/>
+            <a:t>)</a:t>
+          </a:r>
+          <a:endParaRPr lang="en-US" sz="2000" dirty="0"/>
         </a:p>
       </dgm:t>
     </dgm:pt>
@@ -1618,10 +1370,26 @@
         <a:lstStyle/>
         <a:p>
           <a:r>
-            <a:rPr lang="fr-CH" sz="2000"/>
-            <a:t>Join of the both maps</a:t>
+            <a:rPr lang="fr-CH" sz="2000" dirty="0" err="1"/>
+            <a:t>Join</a:t>
           </a:r>
-          <a:endParaRPr lang="en-US" sz="2000"/>
+          <a:r>
+            <a:rPr lang="fr-CH" sz="2000" dirty="0"/>
+            <a:t> </a:t>
+          </a:r>
+          <a:r>
+            <a:rPr lang="fr-CH" sz="2000" dirty="0" err="1"/>
+            <a:t>both</a:t>
+          </a:r>
+          <a:r>
+            <a:rPr lang="fr-CH" sz="2000" dirty="0"/>
+            <a:t> </a:t>
+          </a:r>
+          <a:r>
+            <a:rPr lang="fr-CH" sz="2000" dirty="0" err="1"/>
+            <a:t>maps</a:t>
+          </a:r>
+          <a:endParaRPr lang="en-US" sz="2000" dirty="0"/>
         </a:p>
       </dgm:t>
     </dgm:pt>
@@ -1655,10 +1423,42 @@
         <a:lstStyle/>
         <a:p>
           <a:r>
-            <a:rPr lang="fr-CH" sz="2000"/>
-            <a:t>Analysis of the completed map</a:t>
+            <a:rPr lang="fr-CH" sz="2000" dirty="0" err="1"/>
+            <a:t>Analysis</a:t>
           </a:r>
-          <a:endParaRPr lang="en-US" sz="2000"/>
+          <a:r>
+            <a:rPr lang="fr-CH" sz="2000" dirty="0"/>
+            <a:t> and computation of </a:t>
+          </a:r>
+          <a:r>
+            <a:rPr lang="fr-CH" sz="2000" dirty="0" err="1"/>
+            <a:t>theoretical</a:t>
+          </a:r>
+          <a:r>
+            <a:rPr lang="fr-CH" sz="2000" dirty="0"/>
+            <a:t> </a:t>
+          </a:r>
+          <a:r>
+            <a:rPr lang="fr-CH" sz="2000" dirty="0" err="1"/>
+            <a:t>accessibility</a:t>
+          </a:r>
+          <a:r>
+            <a:rPr lang="fr-CH" sz="2000" dirty="0"/>
+            <a:t> and </a:t>
+          </a:r>
+          <a:r>
+            <a:rPr lang="fr-CH" sz="2000" dirty="0" err="1"/>
+            <a:t>practical</a:t>
+          </a:r>
+          <a:r>
+            <a:rPr lang="fr-CH" sz="2000" dirty="0"/>
+            <a:t> </a:t>
+          </a:r>
+          <a:r>
+            <a:rPr lang="fr-CH" sz="2000" dirty="0" err="1"/>
+            <a:t>mobility</a:t>
+          </a:r>
+          <a:endParaRPr lang="en-US" sz="2000" dirty="0"/>
         </a:p>
       </dgm:t>
     </dgm:pt>
@@ -1692,10 +1492,14 @@
         <a:lstStyle/>
         <a:p>
           <a:r>
-            <a:rPr lang="fr-CH" sz="2000"/>
-            <a:t>Creation of visualisation</a:t>
+            <a:rPr lang="fr-CH" sz="2000" dirty="0" err="1"/>
+            <a:t>Results</a:t>
           </a:r>
-          <a:endParaRPr lang="en-US" sz="2000"/>
+          <a:r>
+            <a:rPr lang="fr-CH" sz="2000" dirty="0"/>
+            <a:t> visualisation</a:t>
+          </a:r>
+          <a:endParaRPr lang="en-US" sz="2000" dirty="0"/>
         </a:p>
       </dgm:t>
     </dgm:pt>
@@ -1821,10 +1625,10 @@
   <dgm:cxnLst>
     <dgm:cxn modelId="{1ECB5511-AEE1-4BBA-B91B-D516215FE7D6}" srcId="{72C74514-7E59-43DD-81F2-44D5759C1824}" destId="{A40C8A38-7AAB-4A1C-B39A-DBED66B60A11}" srcOrd="5" destOrd="0" parTransId="{E5A7B580-C647-42C1-94EA-2AD96FD66632}" sibTransId="{30FCC906-E4C0-41AD-A5E6-88449F9BC921}"/>
     <dgm:cxn modelId="{B039D11B-C065-4DB7-9C3F-9C1F1452DDD1}" srcId="{72C74514-7E59-43DD-81F2-44D5759C1824}" destId="{12C6A796-E05E-4109-83A5-CA6732F07DCC}" srcOrd="0" destOrd="0" parTransId="{A758E241-A4DE-442B-90CA-0C9C5F9396E7}" sibTransId="{13D06279-7FFC-4E91-975B-C5F631451C36}"/>
+    <dgm:cxn modelId="{E5A2F242-6C0F-452E-9348-36AAA3844FB6}" type="presOf" srcId="{59572103-8EAB-4A50-AB21-192D24EA143A}" destId="{97E83598-7549-4D53-BBE1-0E6AEBC831C5}" srcOrd="0" destOrd="0" presId="urn:microsoft.com/office/officeart/2005/8/layout/vList2"/>
+    <dgm:cxn modelId="{95C9FA46-ECF1-4D14-8548-452CDC7D2175}" srcId="{72C74514-7E59-43DD-81F2-44D5759C1824}" destId="{41B0F318-681F-480C-ACBE-4C24B27636D0}" srcOrd="1" destOrd="0" parTransId="{0D659330-D588-4B5E-A5C6-35292AF1DC95}" sibTransId="{207A3D5B-4122-4CE8-B141-67DFCED8E158}"/>
     <dgm:cxn modelId="{F3787362-5CE9-48E2-99AE-A2FA95701E60}" srcId="{72C74514-7E59-43DD-81F2-44D5759C1824}" destId="{7157FA5E-C5A4-4039-9621-57EE8A1E448F}" srcOrd="2" destOrd="0" parTransId="{874C9894-94B6-42CC-B8D0-400E1D54079E}" sibTransId="{1E46E158-B5CD-4F93-9646-8137B2D6040A}"/>
-    <dgm:cxn modelId="{E5A2F242-6C0F-452E-9348-36AAA3844FB6}" type="presOf" srcId="{59572103-8EAB-4A50-AB21-192D24EA143A}" destId="{97E83598-7549-4D53-BBE1-0E6AEBC831C5}" srcOrd="0" destOrd="0" presId="urn:microsoft.com/office/officeart/2005/8/layout/vList2"/>
     <dgm:cxn modelId="{CE80F663-3A3B-4D24-B6E6-0C77D0FB47EC}" type="presOf" srcId="{A40C8A38-7AAB-4A1C-B39A-DBED66B60A11}" destId="{4600E2F4-4816-42E1-84E1-9746CD5EE6E1}" srcOrd="0" destOrd="0" presId="urn:microsoft.com/office/officeart/2005/8/layout/vList2"/>
-    <dgm:cxn modelId="{95C9FA46-ECF1-4D14-8548-452CDC7D2175}" srcId="{72C74514-7E59-43DD-81F2-44D5759C1824}" destId="{41B0F318-681F-480C-ACBE-4C24B27636D0}" srcOrd="1" destOrd="0" parTransId="{0D659330-D588-4B5E-A5C6-35292AF1DC95}" sibTransId="{207A3D5B-4122-4CE8-B141-67DFCED8E158}"/>
     <dgm:cxn modelId="{E714E36B-BA29-4B1C-A5A6-DC818E048543}" type="presOf" srcId="{72C74514-7E59-43DD-81F2-44D5759C1824}" destId="{2DC07872-A69E-402A-96DD-C56028D57122}" srcOrd="0" destOrd="0" presId="urn:microsoft.com/office/officeart/2005/8/layout/vList2"/>
     <dgm:cxn modelId="{676CAB7E-46F8-4503-A039-13561D369C78}" type="presOf" srcId="{12C6A796-E05E-4109-83A5-CA6732F07DCC}" destId="{246B3F6D-7E01-4EA4-AD38-6D0AD826CB2B}" srcOrd="0" destOrd="0" presId="urn:microsoft.com/office/officeart/2005/8/layout/vList2"/>
     <dgm:cxn modelId="{98AFD998-7383-4817-8CB5-6E3ABE5884B8}" type="presOf" srcId="{7157FA5E-C5A4-4039-9621-57EE8A1E448F}" destId="{0226B3E9-17B7-42EC-B955-CDCAEF4B2B67}" srcOrd="0" destOrd="0" presId="urn:microsoft.com/office/officeart/2005/8/layout/vList2"/>
@@ -1873,8 +1677,8 @@
       </dsp:nvSpPr>
       <dsp:spPr>
         <a:xfrm>
-          <a:off x="0" y="48751"/>
-          <a:ext cx="10515600" cy="542880"/>
+          <a:off x="0" y="5923"/>
+          <a:ext cx="10515600" cy="608851"/>
         </a:xfrm>
         <a:prstGeom prst="roundRect">
           <a:avLst/>
@@ -1955,15 +1759,31 @@
             <a:buNone/>
           </a:pPr>
           <a:r>
-            <a:rPr lang="fr-CH" sz="2000" kern="1200"/>
-            <a:t>Collection of data of  trajectory  (google maps) </a:t>
+            <a:rPr lang="fr-CH" sz="2000" kern="1200" dirty="0"/>
+            <a:t>Collection of data of  </a:t>
+          </a:r>
+          <a:r>
+            <a:rPr lang="fr-CH" sz="2000" kern="1200" dirty="0" err="1"/>
+            <a:t>trajectory</a:t>
+          </a:r>
+          <a:r>
+            <a:rPr lang="fr-CH" sz="2000" kern="1200" dirty="0"/>
+            <a:t>  (google </a:t>
+          </a:r>
+          <a:r>
+            <a:rPr lang="fr-CH" sz="2000" kern="1200" dirty="0" err="1"/>
+            <a:t>maps</a:t>
+          </a:r>
+          <a:r>
+            <a:rPr lang="fr-CH" sz="2000" kern="1200" dirty="0"/>
+            <a:t>) </a:t>
           </a:r>
           <a:endParaRPr lang="en-US" sz="2000" kern="1200" dirty="0"/>
         </a:p>
       </dsp:txBody>
       <dsp:txXfrm>
-        <a:off x="26501" y="75252"/>
-        <a:ext cx="10462598" cy="489878"/>
+        <a:off x="29722" y="35645"/>
+        <a:ext cx="10456156" cy="549407"/>
       </dsp:txXfrm>
     </dsp:sp>
     <dsp:sp modelId="{1492B98B-63EB-43A1-8A5D-476D085DE6CB}">
@@ -1973,8 +1793,8 @@
       </dsp:nvSpPr>
       <dsp:spPr>
         <a:xfrm>
-          <a:off x="0" y="651429"/>
-          <a:ext cx="10515600" cy="542880"/>
+          <a:off x="0" y="624993"/>
+          <a:ext cx="10515600" cy="608851"/>
         </a:xfrm>
         <a:prstGeom prst="roundRect">
           <a:avLst/>
@@ -2055,15 +1875,27 @@
             <a:buNone/>
           </a:pPr>
           <a:r>
-            <a:rPr lang="fr-CH" sz="2000" kern="1200"/>
-            <a:t>Creation of isochrones</a:t>
+            <a:rPr lang="fr-CH" sz="2000" kern="1200" dirty="0" err="1"/>
+            <a:t>Creation</a:t>
           </a:r>
-          <a:endParaRPr lang="en-US" sz="2000" kern="1200"/>
+          <a:r>
+            <a:rPr lang="fr-CH" sz="2000" kern="1200" dirty="0"/>
+            <a:t> of isochrones (15-minute </a:t>
+          </a:r>
+          <a:r>
+            <a:rPr lang="fr-CH" sz="2000" kern="1200" dirty="0" err="1"/>
+            <a:t>accesibility</a:t>
+          </a:r>
+          <a:r>
+            <a:rPr lang="fr-CH" sz="2000" kern="1200" dirty="0"/>
+            <a:t> zones)</a:t>
+          </a:r>
+          <a:endParaRPr lang="en-US" sz="2000" kern="1200" dirty="0"/>
         </a:p>
       </dsp:txBody>
       <dsp:txXfrm>
-        <a:off x="26501" y="677930"/>
-        <a:ext cx="10462598" cy="489878"/>
+        <a:off x="29722" y="654715"/>
+        <a:ext cx="10456156" cy="549407"/>
       </dsp:txXfrm>
     </dsp:sp>
     <dsp:sp modelId="{0226B3E9-17B7-42EC-B955-CDCAEF4B2B67}">
@@ -2073,8 +1905,8 @@
       </dsp:nvSpPr>
       <dsp:spPr>
         <a:xfrm>
-          <a:off x="0" y="1277829"/>
-          <a:ext cx="10515600" cy="542880"/>
+          <a:off x="0" y="1248118"/>
+          <a:ext cx="10515600" cy="608851"/>
         </a:xfrm>
         <a:prstGeom prst="roundRect">
           <a:avLst/>
@@ -2155,15 +1987,27 @@
             <a:buNone/>
           </a:pPr>
           <a:r>
-            <a:rPr lang="fr-CH" sz="2000" kern="1200"/>
-            <a:t>Detection of point of interests (POI) </a:t>
+            <a:rPr lang="fr-CH" sz="2000" kern="1200" dirty="0" err="1"/>
+            <a:t>Detection</a:t>
           </a:r>
-          <a:endParaRPr lang="en-US" sz="2000" kern="1200"/>
+          <a:r>
+            <a:rPr lang="fr-CH" sz="2000" kern="1200" dirty="0"/>
+            <a:t> of point of </a:t>
+          </a:r>
+          <a:r>
+            <a:rPr lang="fr-CH" sz="2000" kern="1200" dirty="0" err="1"/>
+            <a:t>interests</a:t>
+          </a:r>
+          <a:r>
+            <a:rPr lang="fr-CH" sz="2000" kern="1200" dirty="0"/>
+            <a:t> (POI) </a:t>
+          </a:r>
+          <a:endParaRPr lang="en-US" sz="2000" kern="1200" dirty="0"/>
         </a:p>
       </dsp:txBody>
       <dsp:txXfrm>
-        <a:off x="26501" y="1304330"/>
-        <a:ext cx="10462598" cy="489878"/>
+        <a:off x="29722" y="1277840"/>
+        <a:ext cx="10456156" cy="549407"/>
       </dsp:txXfrm>
     </dsp:sp>
     <dsp:sp modelId="{97E83598-7549-4D53-BBE1-0E6AEBC831C5}">
@@ -2173,8 +2017,8 @@
       </dsp:nvSpPr>
       <dsp:spPr>
         <a:xfrm>
-          <a:off x="0" y="1904229"/>
-          <a:ext cx="10515600" cy="542880"/>
+          <a:off x="0" y="1871243"/>
+          <a:ext cx="10515600" cy="608851"/>
         </a:xfrm>
         <a:prstGeom prst="roundRect">
           <a:avLst/>
@@ -2255,15 +2099,59 @@
             <a:buNone/>
           </a:pPr>
           <a:r>
-            <a:rPr lang="fr-CH" sz="2000" kern="1200"/>
-            <a:t>Labellisation of the trajectories of Lucie </a:t>
+            <a:rPr lang="fr-CH" sz="2000" kern="1200" dirty="0" err="1"/>
+            <a:t>Preprocessing</a:t>
           </a:r>
-          <a:endParaRPr lang="en-US" sz="2000" kern="1200"/>
+          <a:r>
+            <a:rPr lang="fr-CH" sz="2000" kern="1200" dirty="0"/>
+            <a:t> of </a:t>
+          </a:r>
+          <a:r>
+            <a:rPr lang="fr-CH" sz="2000" kern="1200" dirty="0" err="1"/>
+            <a:t>collected</a:t>
+          </a:r>
+          <a:r>
+            <a:rPr lang="fr-CH" sz="2000" kern="1200" dirty="0"/>
+            <a:t> data (segmentation, </a:t>
+          </a:r>
+          <a:r>
+            <a:rPr lang="fr-CH" sz="2000" kern="1200" dirty="0" err="1"/>
+            <a:t>categorization</a:t>
+          </a:r>
+          <a:r>
+            <a:rPr lang="fr-CH" sz="2000" kern="1200" dirty="0"/>
+            <a:t> of </a:t>
+          </a:r>
+          <a:r>
+            <a:rPr lang="fr-CH" sz="2000" kern="1200" dirty="0" err="1"/>
+            <a:t>visited</a:t>
+          </a:r>
+          <a:r>
+            <a:rPr lang="fr-CH" sz="2000" kern="1200" dirty="0"/>
+            <a:t> points, </a:t>
+          </a:r>
+          <a:r>
+            <a:rPr lang="fr-CH" sz="2000" kern="1200" dirty="0" err="1"/>
+            <a:t>mobility</a:t>
+          </a:r>
+          <a:r>
+            <a:rPr lang="fr-CH" sz="2000" kern="1200" dirty="0"/>
+            <a:t> </a:t>
+          </a:r>
+          <a:r>
+            <a:rPr lang="fr-CH" sz="2000" kern="1200" dirty="0" err="1"/>
+            <a:t>shapes</a:t>
+          </a:r>
+          <a:r>
+            <a:rPr lang="fr-CH" sz="2000" kern="1200" dirty="0"/>
+            <a:t>)</a:t>
+          </a:r>
+          <a:endParaRPr lang="en-US" sz="2000" kern="1200" dirty="0"/>
         </a:p>
       </dsp:txBody>
       <dsp:txXfrm>
-        <a:off x="26501" y="1930730"/>
-        <a:ext cx="10462598" cy="489878"/>
+        <a:off x="29722" y="1900965"/>
+        <a:ext cx="10456156" cy="549407"/>
       </dsp:txXfrm>
     </dsp:sp>
     <dsp:sp modelId="{ED8365DF-6489-4474-AD72-A519E8BD5BF3}">
@@ -2273,8 +2161,8 @@
       </dsp:nvSpPr>
       <dsp:spPr>
         <a:xfrm>
-          <a:off x="0" y="2530629"/>
-          <a:ext cx="10515600" cy="542880"/>
+          <a:off x="0" y="2494368"/>
+          <a:ext cx="10515600" cy="608851"/>
         </a:xfrm>
         <a:prstGeom prst="roundRect">
           <a:avLst/>
@@ -2355,15 +2243,31 @@
             <a:buNone/>
           </a:pPr>
           <a:r>
-            <a:rPr lang="fr-CH" sz="2000" kern="1200"/>
-            <a:t>Join of the both maps</a:t>
+            <a:rPr lang="fr-CH" sz="2000" kern="1200" dirty="0" err="1"/>
+            <a:t>Join</a:t>
           </a:r>
-          <a:endParaRPr lang="en-US" sz="2000" kern="1200"/>
+          <a:r>
+            <a:rPr lang="fr-CH" sz="2000" kern="1200" dirty="0"/>
+            <a:t> </a:t>
+          </a:r>
+          <a:r>
+            <a:rPr lang="fr-CH" sz="2000" kern="1200" dirty="0" err="1"/>
+            <a:t>both</a:t>
+          </a:r>
+          <a:r>
+            <a:rPr lang="fr-CH" sz="2000" kern="1200" dirty="0"/>
+            <a:t> </a:t>
+          </a:r>
+          <a:r>
+            <a:rPr lang="fr-CH" sz="2000" kern="1200" dirty="0" err="1"/>
+            <a:t>maps</a:t>
+          </a:r>
+          <a:endParaRPr lang="en-US" sz="2000" kern="1200" dirty="0"/>
         </a:p>
       </dsp:txBody>
       <dsp:txXfrm>
-        <a:off x="26501" y="2557130"/>
-        <a:ext cx="10462598" cy="489878"/>
+        <a:off x="29722" y="2524090"/>
+        <a:ext cx="10456156" cy="549407"/>
       </dsp:txXfrm>
     </dsp:sp>
     <dsp:sp modelId="{4600E2F4-4816-42E1-84E1-9746CD5EE6E1}">
@@ -2373,8 +2277,8 @@
       </dsp:nvSpPr>
       <dsp:spPr>
         <a:xfrm>
-          <a:off x="0" y="3157029"/>
-          <a:ext cx="10515600" cy="542880"/>
+          <a:off x="0" y="3117492"/>
+          <a:ext cx="10515600" cy="608851"/>
         </a:xfrm>
         <a:prstGeom prst="roundRect">
           <a:avLst/>
@@ -2455,15 +2359,47 @@
             <a:buNone/>
           </a:pPr>
           <a:r>
-            <a:rPr lang="fr-CH" sz="2000" kern="1200"/>
-            <a:t>Analysis of the completed map</a:t>
+            <a:rPr lang="fr-CH" sz="2000" kern="1200" dirty="0" err="1"/>
+            <a:t>Analysis</a:t>
           </a:r>
-          <a:endParaRPr lang="en-US" sz="2000" kern="1200"/>
+          <a:r>
+            <a:rPr lang="fr-CH" sz="2000" kern="1200" dirty="0"/>
+            <a:t> and computation of </a:t>
+          </a:r>
+          <a:r>
+            <a:rPr lang="fr-CH" sz="2000" kern="1200" dirty="0" err="1"/>
+            <a:t>theoretical</a:t>
+          </a:r>
+          <a:r>
+            <a:rPr lang="fr-CH" sz="2000" kern="1200" dirty="0"/>
+            <a:t> </a:t>
+          </a:r>
+          <a:r>
+            <a:rPr lang="fr-CH" sz="2000" kern="1200" dirty="0" err="1"/>
+            <a:t>accessibility</a:t>
+          </a:r>
+          <a:r>
+            <a:rPr lang="fr-CH" sz="2000" kern="1200" dirty="0"/>
+            <a:t> and </a:t>
+          </a:r>
+          <a:r>
+            <a:rPr lang="fr-CH" sz="2000" kern="1200" dirty="0" err="1"/>
+            <a:t>practical</a:t>
+          </a:r>
+          <a:r>
+            <a:rPr lang="fr-CH" sz="2000" kern="1200" dirty="0"/>
+            <a:t> </a:t>
+          </a:r>
+          <a:r>
+            <a:rPr lang="fr-CH" sz="2000" kern="1200" dirty="0" err="1"/>
+            <a:t>mobility</a:t>
+          </a:r>
+          <a:endParaRPr lang="en-US" sz="2000" kern="1200" dirty="0"/>
         </a:p>
       </dsp:txBody>
       <dsp:txXfrm>
-        <a:off x="26501" y="3183530"/>
-        <a:ext cx="10462598" cy="489878"/>
+        <a:off x="29722" y="3147214"/>
+        <a:ext cx="10456156" cy="549407"/>
       </dsp:txXfrm>
     </dsp:sp>
     <dsp:sp modelId="{3DD9623C-BD4B-4DD5-BA45-58C18A024881}">
@@ -2473,8 +2409,8 @@
       </dsp:nvSpPr>
       <dsp:spPr>
         <a:xfrm>
-          <a:off x="0" y="3783429"/>
-          <a:ext cx="10515600" cy="542880"/>
+          <a:off x="0" y="3740617"/>
+          <a:ext cx="10515600" cy="608851"/>
         </a:xfrm>
         <a:prstGeom prst="roundRect">
           <a:avLst/>
@@ -2555,15 +2491,19 @@
             <a:buNone/>
           </a:pPr>
           <a:r>
-            <a:rPr lang="fr-CH" sz="2000" kern="1200"/>
-            <a:t>Creation of visualisation</a:t>
+            <a:rPr lang="fr-CH" sz="2000" kern="1200" dirty="0" err="1"/>
+            <a:t>Results</a:t>
           </a:r>
-          <a:endParaRPr lang="en-US" sz="2000" kern="1200"/>
+          <a:r>
+            <a:rPr lang="fr-CH" sz="2000" kern="1200" dirty="0"/>
+            <a:t> visualisation</a:t>
+          </a:r>
+          <a:endParaRPr lang="en-US" sz="2000" kern="1200" dirty="0"/>
         </a:p>
       </dsp:txBody>
       <dsp:txXfrm>
-        <a:off x="26501" y="3809930"/>
-        <a:ext cx="10462598" cy="489878"/>
+        <a:off x="29722" y="3770339"/>
+        <a:ext cx="10456156" cy="549407"/>
       </dsp:txXfrm>
     </dsp:sp>
   </dsp:spTree>
@@ -3920,7 +3860,7 @@
           <a:p>
             <a:fld id="{6DABDDBB-0918-4A38-BFF3-738DBDB6A6F7}" type="datetimeFigureOut">
               <a:rPr lang="fr-CH" smtClean="0"/>
-              <a:t>01.06.2026</a:t>
+              <a:t>01.06.26</a:t>
             </a:fld>
             <a:endParaRPr lang="fr-CH"/>
           </a:p>
@@ -4120,7 +4060,7 @@
           <a:p>
             <a:fld id="{6DABDDBB-0918-4A38-BFF3-738DBDB6A6F7}" type="datetimeFigureOut">
               <a:rPr lang="fr-CH" smtClean="0"/>
-              <a:t>01.06.2026</a:t>
+              <a:t>01.06.26</a:t>
             </a:fld>
             <a:endParaRPr lang="fr-CH"/>
           </a:p>
@@ -4330,7 +4270,7 @@
           <a:p>
             <a:fld id="{6DABDDBB-0918-4A38-BFF3-738DBDB6A6F7}" type="datetimeFigureOut">
               <a:rPr lang="fr-CH" smtClean="0"/>
-              <a:t>01.06.2026</a:t>
+              <a:t>01.06.26</a:t>
             </a:fld>
             <a:endParaRPr lang="fr-CH"/>
           </a:p>
@@ -4530,7 +4470,7 @@
           <a:p>
             <a:fld id="{6DABDDBB-0918-4A38-BFF3-738DBDB6A6F7}" type="datetimeFigureOut">
               <a:rPr lang="fr-CH" smtClean="0"/>
-              <a:t>01.06.2026</a:t>
+              <a:t>01.06.26</a:t>
             </a:fld>
             <a:endParaRPr lang="fr-CH"/>
           </a:p>
@@ -4806,7 +4746,7 @@
           <a:p>
             <a:fld id="{6DABDDBB-0918-4A38-BFF3-738DBDB6A6F7}" type="datetimeFigureOut">
               <a:rPr lang="fr-CH" smtClean="0"/>
-              <a:t>01.06.2026</a:t>
+              <a:t>01.06.26</a:t>
             </a:fld>
             <a:endParaRPr lang="fr-CH"/>
           </a:p>
@@ -5074,7 +5014,7 @@
           <a:p>
             <a:fld id="{6DABDDBB-0918-4A38-BFF3-738DBDB6A6F7}" type="datetimeFigureOut">
               <a:rPr lang="fr-CH" smtClean="0"/>
-              <a:t>01.06.2026</a:t>
+              <a:t>01.06.26</a:t>
             </a:fld>
             <a:endParaRPr lang="fr-CH"/>
           </a:p>
@@ -5489,7 +5429,7 @@
           <a:p>
             <a:fld id="{6DABDDBB-0918-4A38-BFF3-738DBDB6A6F7}" type="datetimeFigureOut">
               <a:rPr lang="fr-CH" smtClean="0"/>
-              <a:t>01.06.2026</a:t>
+              <a:t>01.06.26</a:t>
             </a:fld>
             <a:endParaRPr lang="fr-CH"/>
           </a:p>
@@ -5631,7 +5571,7 @@
           <a:p>
             <a:fld id="{6DABDDBB-0918-4A38-BFF3-738DBDB6A6F7}" type="datetimeFigureOut">
               <a:rPr lang="fr-CH" smtClean="0"/>
-              <a:t>01.06.2026</a:t>
+              <a:t>01.06.26</a:t>
             </a:fld>
             <a:endParaRPr lang="fr-CH"/>
           </a:p>
@@ -5744,7 +5684,7 @@
           <a:p>
             <a:fld id="{6DABDDBB-0918-4A38-BFF3-738DBDB6A6F7}" type="datetimeFigureOut">
               <a:rPr lang="fr-CH" smtClean="0"/>
-              <a:t>01.06.2026</a:t>
+              <a:t>01.06.26</a:t>
             </a:fld>
             <a:endParaRPr lang="fr-CH"/>
           </a:p>
@@ -6057,7 +5997,7 @@
           <a:p>
             <a:fld id="{6DABDDBB-0918-4A38-BFF3-738DBDB6A6F7}" type="datetimeFigureOut">
               <a:rPr lang="fr-CH" smtClean="0"/>
-              <a:t>01.06.2026</a:t>
+              <a:t>01.06.26</a:t>
             </a:fld>
             <a:endParaRPr lang="fr-CH"/>
           </a:p>
@@ -6346,7 +6286,7 @@
           <a:p>
             <a:fld id="{6DABDDBB-0918-4A38-BFF3-738DBDB6A6F7}" type="datetimeFigureOut">
               <a:rPr lang="fr-CH" smtClean="0"/>
-              <a:t>01.06.2026</a:t>
+              <a:t>01.06.26</a:t>
             </a:fld>
             <a:endParaRPr lang="fr-CH"/>
           </a:p>
@@ -6589,7 +6529,7 @@
           <a:p>
             <a:fld id="{6DABDDBB-0918-4A38-BFF3-738DBDB6A6F7}" type="datetimeFigureOut">
               <a:rPr lang="fr-CH" smtClean="0"/>
-              <a:t>01.06.2026</a:t>
+              <a:t>01.06.26</a:t>
             </a:fld>
             <a:endParaRPr lang="fr-CH"/>
           </a:p>
@@ -7188,27 +7128,35 @@
         </p:spPr>
         <p:txBody>
           <a:bodyPr>
-            <a:normAutofit/>
+            <a:normAutofit fontScale="92500" lnSpcReduction="10000"/>
           </a:bodyPr>
           <a:lstStyle/>
           <a:p>
             <a:pPr algn="l"/>
             <a:r>
-              <a:rPr lang="fr-CH" sz="1000"/>
+              <a:rPr lang="fr-CH" sz="1200" dirty="0"/>
               <a:t>Lucie Kern and Noémie Simon </a:t>
             </a:r>
           </a:p>
           <a:p>
             <a:pPr algn="l"/>
             <a:r>
-              <a:rPr lang="fr-CH" sz="1000"/>
-              <a:t>Patterns and Trends in Environmental Data</a:t>
+              <a:rPr lang="fr-CH" sz="1200" dirty="0"/>
+              <a:t>Patterns and Trends in </a:t>
+            </a:r>
+            <a:r>
+              <a:rPr lang="fr-CH" sz="1200" dirty="0" err="1"/>
+              <a:t>Environmental</a:t>
+            </a:r>
+            <a:r>
+              <a:rPr lang="fr-CH" sz="1200" dirty="0"/>
+              <a:t> Data</a:t>
             </a:r>
           </a:p>
           <a:p>
             <a:pPr algn="l"/>
             <a:r>
-              <a:rPr lang="fr-CH" sz="1000"/>
+              <a:rPr lang="fr-CH" sz="1200" dirty="0"/>
               <a:t>03.06.2026</a:t>
             </a:r>
           </a:p>
@@ -7229,7 +7177,7 @@
           <p:nvPr/>
         </p:nvPicPr>
         <p:blipFill>
-          <a:blip r:embed="rId2">
+          <a:blip r:embed="rId3">
             <a:extLst>
               <a:ext uri="{28A0092B-C50C-407E-A947-70E740481C1C}">
                 <a14:useLocalDpi xmlns:a14="http://schemas.microsoft.com/office/drawing/2010/main" val="0"/>
@@ -7735,10 +7683,2007 @@
   <p:clrMapOvr>
     <a:masterClrMapping/>
   </p:clrMapOvr>
+  <p:extLst>
+    <p:ext uri="{6950BFC3-D8DA-4A85-94F7-54DA5524770B}">
+      <p188:commentRel xmlns:p188="http://schemas.microsoft.com/office/powerpoint/2018/8/main" r:id="rId2"/>
+    </p:ext>
+  </p:extLst>
+</p:sld>
+</file>
+
+<file path=ppt/slides/slide10.xml><?xml version="1.0" encoding="utf-8"?>
+<p:sld xmlns:a="http://schemas.openxmlformats.org/drawingml/2006/main" xmlns:r="http://schemas.openxmlformats.org/officeDocument/2006/relationships" xmlns:p="http://schemas.openxmlformats.org/presentationml/2006/main">
+  <p:cSld>
+    <p:spTree>
+      <p:nvGrpSpPr>
+        <p:cNvPr id="1" name=""/>
+        <p:cNvGrpSpPr/>
+        <p:nvPr/>
+      </p:nvGrpSpPr>
+      <p:grpSpPr>
+        <a:xfrm>
+          <a:off x="0" y="0"/>
+          <a:ext cx="0" cy="0"/>
+          <a:chOff x="0" y="0"/>
+          <a:chExt cx="0" cy="0"/>
+        </a:xfrm>
+      </p:grpSpPr>
+      <p:sp>
+        <p:nvSpPr>
+          <p:cNvPr id="2" name="Title 1">
+            <a:extLst>
+              <a:ext uri="{FF2B5EF4-FFF2-40B4-BE49-F238E27FC236}">
+                <a16:creationId xmlns:a16="http://schemas.microsoft.com/office/drawing/2014/main" id="{8B6FD0A6-936D-1217-2307-54883D928515}"/>
+              </a:ext>
+            </a:extLst>
+          </p:cNvPr>
+          <p:cNvSpPr>
+            <a:spLocks noGrp="1"/>
+          </p:cNvSpPr>
+          <p:nvPr>
+            <p:ph type="title"/>
+          </p:nvPr>
+        </p:nvSpPr>
+        <p:spPr/>
+        <p:txBody>
+          <a:bodyPr>
+            <a:normAutofit/>
+          </a:bodyPr>
+          <a:lstStyle/>
+          <a:p>
+            <a:r>
+              <a:rPr lang="en-001" sz="4000" b="1" dirty="0"/>
+              <a:t>Activities occurring beyond the 15-minute city</a:t>
+            </a:r>
+            <a:endParaRPr lang="en-001" sz="4000" dirty="0"/>
+          </a:p>
+        </p:txBody>
+      </p:sp>
+      <p:pic>
+        <p:nvPicPr>
+          <p:cNvPr id="5" name="Content Placeholder 4">
+            <a:extLst>
+              <a:ext uri="{FF2B5EF4-FFF2-40B4-BE49-F238E27FC236}">
+                <a16:creationId xmlns:a16="http://schemas.microsoft.com/office/drawing/2014/main" id="{0A24CC37-D9A8-59DF-A14B-5BF03F157956}"/>
+              </a:ext>
+            </a:extLst>
+          </p:cNvPr>
+          <p:cNvPicPr>
+            <a:picLocks noGrp="1" noChangeAspect="1"/>
+          </p:cNvPicPr>
+          <p:nvPr>
+            <p:ph idx="1"/>
+          </p:nvPr>
+        </p:nvPicPr>
+        <p:blipFill>
+          <a:blip r:embed="rId2">
+            <a:extLst>
+              <a:ext uri="{28A0092B-C50C-407E-A947-70E740481C1C}">
+                <a14:useLocalDpi xmlns:a14="http://schemas.microsoft.com/office/drawing/2010/main" val="0"/>
+              </a:ext>
+            </a:extLst>
+          </a:blip>
+          <a:srcRect t="11781"/>
+          <a:stretch>
+            <a:fillRect/>
+          </a:stretch>
+        </p:blipFill>
+        <p:spPr>
+          <a:xfrm>
+            <a:off x="1431183" y="1470991"/>
+            <a:ext cx="8726608" cy="5281533"/>
+          </a:xfrm>
+          <a:prstGeom prst="rect">
+            <a:avLst/>
+          </a:prstGeom>
+        </p:spPr>
+      </p:pic>
+    </p:spTree>
+    <p:extLst>
+      <p:ext uri="{BB962C8B-B14F-4D97-AF65-F5344CB8AC3E}">
+        <p14:creationId xmlns:p14="http://schemas.microsoft.com/office/powerpoint/2010/main" val="3855054443"/>
+      </p:ext>
+    </p:extLst>
+  </p:cSld>
+  <p:clrMapOvr>
+    <a:masterClrMapping/>
+  </p:clrMapOvr>
+</p:sld>
+</file>
+
+<file path=ppt/slides/slide11.xml><?xml version="1.0" encoding="utf-8"?>
+<p:sld xmlns:a="http://schemas.openxmlformats.org/drawingml/2006/main" xmlns:r="http://schemas.openxmlformats.org/officeDocument/2006/relationships" xmlns:p="http://schemas.openxmlformats.org/presentationml/2006/main">
+  <p:cSld>
+    <p:spTree>
+      <p:nvGrpSpPr>
+        <p:cNvPr id="1" name=""/>
+        <p:cNvGrpSpPr/>
+        <p:nvPr/>
+      </p:nvGrpSpPr>
+      <p:grpSpPr>
+        <a:xfrm>
+          <a:off x="0" y="0"/>
+          <a:ext cx="0" cy="0"/>
+          <a:chOff x="0" y="0"/>
+          <a:chExt cx="0" cy="0"/>
+        </a:xfrm>
+      </p:grpSpPr>
+      <p:sp>
+        <p:nvSpPr>
+          <p:cNvPr id="2" name="Title 1">
+            <a:extLst>
+              <a:ext uri="{FF2B5EF4-FFF2-40B4-BE49-F238E27FC236}">
+                <a16:creationId xmlns:a16="http://schemas.microsoft.com/office/drawing/2014/main" id="{229A9C5E-D113-F410-1D52-CFEDFDD68709}"/>
+              </a:ext>
+            </a:extLst>
+          </p:cNvPr>
+          <p:cNvSpPr>
+            <a:spLocks noGrp="1"/>
+          </p:cNvSpPr>
+          <p:nvPr>
+            <p:ph type="title"/>
+          </p:nvPr>
+        </p:nvSpPr>
+        <p:spPr/>
+        <p:txBody>
+          <a:bodyPr/>
+          <a:lstStyle/>
+          <a:p>
+            <a:r>
+              <a:rPr lang="fr-CH" dirty="0"/>
+              <a:t>Challenges and Plan B</a:t>
+            </a:r>
+          </a:p>
+        </p:txBody>
+      </p:sp>
+      <p:sp>
+        <p:nvSpPr>
+          <p:cNvPr id="3" name="Content Placeholder 2">
+            <a:extLst>
+              <a:ext uri="{FF2B5EF4-FFF2-40B4-BE49-F238E27FC236}">
+                <a16:creationId xmlns:a16="http://schemas.microsoft.com/office/drawing/2014/main" id="{DBAEEBF5-C3D9-FA63-1735-E9C2F5C42998}"/>
+              </a:ext>
+            </a:extLst>
+          </p:cNvPr>
+          <p:cNvSpPr>
+            <a:spLocks noGrp="1"/>
+          </p:cNvSpPr>
+          <p:nvPr>
+            <p:ph idx="1"/>
+          </p:nvPr>
+        </p:nvSpPr>
+        <p:spPr/>
+        <p:txBody>
+          <a:bodyPr/>
+          <a:lstStyle/>
+          <a:p>
+            <a:r>
+              <a:rPr lang="fr-CH" dirty="0" err="1"/>
+              <a:t>Integration</a:t>
+            </a:r>
+            <a:r>
+              <a:rPr lang="fr-CH" dirty="0"/>
+              <a:t> of the ZVV time plan </a:t>
+            </a:r>
+          </a:p>
+          <a:p>
+            <a:pPr lvl="1"/>
+            <a:r>
+              <a:rPr lang="fr-CH" dirty="0"/>
+              <a:t>Heavy data set </a:t>
+            </a:r>
+          </a:p>
+          <a:p>
+            <a:pPr lvl="1"/>
+            <a:r>
+              <a:rPr lang="fr-CH" dirty="0"/>
+              <a:t>Add </a:t>
+            </a:r>
+            <a:r>
+              <a:rPr lang="fr-CH" dirty="0" err="1"/>
+              <a:t>unusefull</a:t>
+            </a:r>
+            <a:r>
+              <a:rPr lang="fr-CH" dirty="0"/>
+              <a:t> complication</a:t>
+            </a:r>
+            <a:endParaRPr lang="fr-CH" dirty="0">
+              <a:sym typeface="Wingdings" panose="05000000000000000000" pitchFamily="2" charset="2"/>
+            </a:endParaRPr>
+          </a:p>
+          <a:p>
+            <a:pPr>
+              <a:buFont typeface="Wingdings" panose="05000000000000000000" pitchFamily="2" charset="2"/>
+              <a:buChar char="à"/>
+            </a:pPr>
+            <a:r>
+              <a:rPr lang="fr-CH" dirty="0">
+                <a:sym typeface="Wingdings" panose="05000000000000000000" pitchFamily="2" charset="2"/>
+              </a:rPr>
+              <a:t> Use an estimation of the speed of the public transports (bus and tram) of 15 km/h </a:t>
+            </a:r>
+          </a:p>
+          <a:p>
+            <a:r>
+              <a:rPr lang="fr-CH" dirty="0">
+                <a:sym typeface="Wingdings" panose="05000000000000000000" pitchFamily="2" charset="2"/>
+              </a:rPr>
+              <a:t>Anonymisation of the data</a:t>
+            </a:r>
+          </a:p>
+          <a:p>
+            <a:pPr lvl="1"/>
+            <a:r>
+              <a:rPr lang="fr-CH" dirty="0">
+                <a:sym typeface="Wingdings" panose="05000000000000000000" pitchFamily="2" charset="2"/>
+              </a:rPr>
+              <a:t>With </a:t>
+            </a:r>
+            <a:r>
+              <a:rPr lang="fr-CH" dirty="0" err="1">
+                <a:sym typeface="Wingdings" panose="05000000000000000000" pitchFamily="2" charset="2"/>
+              </a:rPr>
+              <a:t>only</a:t>
+            </a:r>
+            <a:r>
+              <a:rPr lang="fr-CH" dirty="0">
+                <a:sym typeface="Wingdings" panose="05000000000000000000" pitchFamily="2" charset="2"/>
+              </a:rPr>
+              <a:t> a few </a:t>
+            </a:r>
+            <a:r>
+              <a:rPr lang="fr-CH" dirty="0" err="1">
+                <a:sym typeface="Wingdings" panose="05000000000000000000" pitchFamily="2" charset="2"/>
+              </a:rPr>
+              <a:t>visited</a:t>
+            </a:r>
+            <a:r>
+              <a:rPr lang="fr-CH" dirty="0">
+                <a:sym typeface="Wingdings" panose="05000000000000000000" pitchFamily="2" charset="2"/>
+              </a:rPr>
+              <a:t> points, </a:t>
+            </a:r>
+            <a:r>
+              <a:rPr lang="fr-CH" dirty="0" err="1">
+                <a:sym typeface="Wingdings" panose="05000000000000000000" pitchFamily="2" charset="2"/>
+              </a:rPr>
+              <a:t>it</a:t>
+            </a:r>
+            <a:r>
+              <a:rPr lang="fr-CH" dirty="0">
+                <a:sym typeface="Wingdings" panose="05000000000000000000" pitchFamily="2" charset="2"/>
+              </a:rPr>
+              <a:t> </a:t>
+            </a:r>
+            <a:r>
+              <a:rPr lang="fr-CH" dirty="0" err="1">
+                <a:sym typeface="Wingdings" panose="05000000000000000000" pitchFamily="2" charset="2"/>
+              </a:rPr>
+              <a:t>is</a:t>
+            </a:r>
+            <a:r>
+              <a:rPr lang="fr-CH" dirty="0">
+                <a:sym typeface="Wingdings" panose="05000000000000000000" pitchFamily="2" charset="2"/>
+              </a:rPr>
+              <a:t> possible to </a:t>
+            </a:r>
+            <a:r>
+              <a:rPr lang="fr-CH" dirty="0" err="1">
+                <a:sym typeface="Wingdings" panose="05000000000000000000" pitchFamily="2" charset="2"/>
+              </a:rPr>
+              <a:t>find</a:t>
+            </a:r>
+            <a:r>
+              <a:rPr lang="fr-CH" dirty="0">
+                <a:sym typeface="Wingdings" panose="05000000000000000000" pitchFamily="2" charset="2"/>
+              </a:rPr>
+              <a:t> out </a:t>
+            </a:r>
+            <a:r>
+              <a:rPr lang="fr-CH" dirty="0" err="1">
+                <a:sym typeface="Wingdings" panose="05000000000000000000" pitchFamily="2" charset="2"/>
+              </a:rPr>
+              <a:t>where</a:t>
+            </a:r>
+            <a:r>
+              <a:rPr lang="fr-CH" dirty="0">
+                <a:sym typeface="Wingdings" panose="05000000000000000000" pitchFamily="2" charset="2"/>
+              </a:rPr>
+              <a:t> the </a:t>
+            </a:r>
+            <a:r>
+              <a:rPr lang="fr-CH" dirty="0" err="1">
+                <a:sym typeface="Wingdings" panose="05000000000000000000" pitchFamily="2" charset="2"/>
+              </a:rPr>
+              <a:t>person</a:t>
+            </a:r>
+            <a:r>
+              <a:rPr lang="fr-CH" dirty="0">
+                <a:sym typeface="Wingdings" panose="05000000000000000000" pitchFamily="2" charset="2"/>
+              </a:rPr>
+              <a:t> </a:t>
+            </a:r>
+            <a:r>
+              <a:rPr lang="fr-CH" dirty="0" err="1">
+                <a:sym typeface="Wingdings" panose="05000000000000000000" pitchFamily="2" charset="2"/>
+              </a:rPr>
+              <a:t>lives</a:t>
+            </a:r>
+            <a:r>
+              <a:rPr lang="fr-CH" dirty="0">
+                <a:sym typeface="Wingdings" panose="05000000000000000000" pitchFamily="2" charset="2"/>
+              </a:rPr>
+              <a:t>/</a:t>
+            </a:r>
+            <a:r>
+              <a:rPr lang="fr-CH" dirty="0" err="1">
+                <a:sym typeface="Wingdings" panose="05000000000000000000" pitchFamily="2" charset="2"/>
+              </a:rPr>
+              <a:t>who</a:t>
+            </a:r>
+            <a:r>
+              <a:rPr lang="fr-CH" dirty="0">
+                <a:sym typeface="Wingdings" panose="05000000000000000000" pitchFamily="2" charset="2"/>
+              </a:rPr>
+              <a:t> </a:t>
+            </a:r>
+            <a:r>
+              <a:rPr lang="fr-CH" dirty="0" err="1">
+                <a:sym typeface="Wingdings" panose="05000000000000000000" pitchFamily="2" charset="2"/>
+              </a:rPr>
+              <a:t>they</a:t>
+            </a:r>
+            <a:r>
+              <a:rPr lang="fr-CH" dirty="0">
+                <a:sym typeface="Wingdings" panose="05000000000000000000" pitchFamily="2" charset="2"/>
+              </a:rPr>
+              <a:t> are</a:t>
+            </a:r>
+          </a:p>
+          <a:p>
+            <a:pPr marL="0" indent="0">
+              <a:buNone/>
+            </a:pPr>
+            <a:r>
+              <a:rPr lang="fr-CH" dirty="0">
+                <a:sym typeface="Wingdings" panose="05000000000000000000" pitchFamily="2" charset="2"/>
+              </a:rPr>
+              <a:t> Change the </a:t>
+            </a:r>
+            <a:r>
+              <a:rPr lang="fr-CH" dirty="0" err="1">
+                <a:sym typeface="Wingdings" panose="05000000000000000000" pitchFamily="2" charset="2"/>
+              </a:rPr>
+              <a:t>adress</a:t>
+            </a:r>
+            <a:r>
+              <a:rPr lang="fr-CH" dirty="0">
+                <a:sym typeface="Wingdings" panose="05000000000000000000" pitchFamily="2" charset="2"/>
+              </a:rPr>
+              <a:t> by a few blocks/</a:t>
+            </a:r>
+            <a:r>
+              <a:rPr lang="fr-CH" dirty="0" err="1">
+                <a:sym typeface="Wingdings" panose="05000000000000000000" pitchFamily="2" charset="2"/>
+              </a:rPr>
+              <a:t>streets</a:t>
+            </a:r>
+            <a:r>
+              <a:rPr lang="fr-CH" dirty="0">
+                <a:sym typeface="Wingdings" panose="05000000000000000000" pitchFamily="2" charset="2"/>
+              </a:rPr>
+              <a:t> (but </a:t>
+            </a:r>
+            <a:r>
+              <a:rPr lang="fr-CH" dirty="0" err="1">
+                <a:sym typeface="Wingdings" panose="05000000000000000000" pitchFamily="2" charset="2"/>
+              </a:rPr>
+              <a:t>still</a:t>
+            </a:r>
+            <a:r>
+              <a:rPr lang="fr-CH" dirty="0">
+                <a:sym typeface="Wingdings" panose="05000000000000000000" pitchFamily="2" charset="2"/>
+              </a:rPr>
+              <a:t> not </a:t>
+            </a:r>
+            <a:r>
+              <a:rPr lang="fr-CH" dirty="0" err="1">
+                <a:sym typeface="Wingdings" panose="05000000000000000000" pitchFamily="2" charset="2"/>
+              </a:rPr>
+              <a:t>ideal</a:t>
+            </a:r>
+            <a:r>
+              <a:rPr lang="fr-CH" dirty="0">
+                <a:sym typeface="Wingdings" panose="05000000000000000000" pitchFamily="2" charset="2"/>
+              </a:rPr>
+              <a:t>) </a:t>
+            </a:r>
+          </a:p>
+          <a:p>
+            <a:pPr marL="0" indent="0">
+              <a:buNone/>
+            </a:pPr>
+            <a:endParaRPr lang="fr-CH" dirty="0"/>
+          </a:p>
+        </p:txBody>
+      </p:sp>
+    </p:spTree>
+    <p:extLst>
+      <p:ext uri="{BB962C8B-B14F-4D97-AF65-F5344CB8AC3E}">
+        <p14:creationId xmlns:p14="http://schemas.microsoft.com/office/powerpoint/2010/main" val="2357305363"/>
+      </p:ext>
+    </p:extLst>
+  </p:cSld>
+  <p:clrMapOvr>
+    <a:masterClrMapping/>
+  </p:clrMapOvr>
 </p:sld>
 </file>
 
 <file path=ppt/slides/slide2.xml><?xml version="1.0" encoding="utf-8"?>
+<p:sld xmlns:a="http://schemas.openxmlformats.org/drawingml/2006/main" xmlns:r="http://schemas.openxmlformats.org/officeDocument/2006/relationships" xmlns:p="http://schemas.openxmlformats.org/presentationml/2006/main">
+  <p:cSld>
+    <p:spTree>
+      <p:nvGrpSpPr>
+        <p:cNvPr id="1" name=""/>
+        <p:cNvGrpSpPr/>
+        <p:nvPr/>
+      </p:nvGrpSpPr>
+      <p:grpSpPr>
+        <a:xfrm>
+          <a:off x="0" y="0"/>
+          <a:ext cx="0" cy="0"/>
+          <a:chOff x="0" y="0"/>
+          <a:chExt cx="0" cy="0"/>
+        </a:xfrm>
+      </p:grpSpPr>
+      <p:sp>
+        <p:nvSpPr>
+          <p:cNvPr id="14" name="Rectangle 13">
+            <a:extLst>
+              <a:ext uri="{FF2B5EF4-FFF2-40B4-BE49-F238E27FC236}">
+                <a16:creationId xmlns:a16="http://schemas.microsoft.com/office/drawing/2014/main" id="{225CAFF8-284D-397B-D783-884EB45FFFFB}"/>
+              </a:ext>
+            </a:extLst>
+          </p:cNvPr>
+          <p:cNvSpPr/>
+          <p:nvPr/>
+        </p:nvSpPr>
+        <p:spPr>
+          <a:xfrm>
+            <a:off x="-798286" y="5544457"/>
+            <a:ext cx="14427200" cy="812800"/>
+          </a:xfrm>
+          <a:prstGeom prst="rect">
+            <a:avLst/>
+          </a:prstGeom>
+          <a:solidFill>
+            <a:srgbClr val="F4F4F4"/>
+          </a:solidFill>
+          <a:ln>
+            <a:noFill/>
+          </a:ln>
+        </p:spPr>
+        <p:style>
+          <a:lnRef idx="2">
+            <a:schemeClr val="accent1">
+              <a:shade val="15000"/>
+            </a:schemeClr>
+          </a:lnRef>
+          <a:fillRef idx="1">
+            <a:schemeClr val="accent1"/>
+          </a:fillRef>
+          <a:effectRef idx="0">
+            <a:schemeClr val="accent1"/>
+          </a:effectRef>
+          <a:fontRef idx="minor">
+            <a:schemeClr val="lt1"/>
+          </a:fontRef>
+        </p:style>
+        <p:txBody>
+          <a:bodyPr rtlCol="0" anchor="ctr"/>
+          <a:lstStyle/>
+          <a:p>
+            <a:pPr algn="ctr"/>
+            <a:endParaRPr lang="en-001"/>
+          </a:p>
+        </p:txBody>
+      </p:sp>
+      <p:sp>
+        <p:nvSpPr>
+          <p:cNvPr id="2" name="Title 1">
+            <a:extLst>
+              <a:ext uri="{FF2B5EF4-FFF2-40B4-BE49-F238E27FC236}">
+                <a16:creationId xmlns:a16="http://schemas.microsoft.com/office/drawing/2014/main" id="{691DDAAE-2B35-42E0-7B02-6460B37FCB88}"/>
+              </a:ext>
+            </a:extLst>
+          </p:cNvPr>
+          <p:cNvSpPr>
+            <a:spLocks noGrp="1"/>
+          </p:cNvSpPr>
+          <p:nvPr>
+            <p:ph type="title"/>
+          </p:nvPr>
+        </p:nvSpPr>
+        <p:spPr>
+          <a:xfrm>
+            <a:off x="838200" y="365125"/>
+            <a:ext cx="4221480" cy="1325563"/>
+          </a:xfrm>
+        </p:spPr>
+        <p:txBody>
+          <a:bodyPr/>
+          <a:lstStyle/>
+          <a:p>
+            <a:r>
+              <a:rPr lang="fr-CH" dirty="0" err="1"/>
+              <a:t>Context</a:t>
+            </a:r>
+            <a:r>
+              <a:rPr lang="fr-CH" dirty="0"/>
+              <a:t> </a:t>
+            </a:r>
+          </a:p>
+        </p:txBody>
+      </p:sp>
+      <p:sp>
+        <p:nvSpPr>
+          <p:cNvPr id="3" name="Content Placeholder 2">
+            <a:extLst>
+              <a:ext uri="{FF2B5EF4-FFF2-40B4-BE49-F238E27FC236}">
+                <a16:creationId xmlns:a16="http://schemas.microsoft.com/office/drawing/2014/main" id="{FFD8EEBF-806F-63F6-BEF0-7ECC5BC92C92}"/>
+              </a:ext>
+            </a:extLst>
+          </p:cNvPr>
+          <p:cNvSpPr>
+            <a:spLocks noGrp="1"/>
+          </p:cNvSpPr>
+          <p:nvPr>
+            <p:ph idx="1"/>
+          </p:nvPr>
+        </p:nvSpPr>
+        <p:spPr>
+          <a:xfrm>
+            <a:off x="620486" y="3841749"/>
+            <a:ext cx="3040743" cy="1325563"/>
+          </a:xfrm>
+        </p:spPr>
+        <p:txBody>
+          <a:bodyPr>
+            <a:normAutofit/>
+          </a:bodyPr>
+          <a:lstStyle/>
+          <a:p>
+            <a:r>
+              <a:rPr lang="en-001" sz="2200" dirty="0"/>
+              <a:t>urban planning</a:t>
+            </a:r>
+          </a:p>
+          <a:p>
+            <a:r>
+              <a:rPr lang="en-001" sz="2200" dirty="0"/>
+              <a:t>mobility analysis </a:t>
+            </a:r>
+          </a:p>
+          <a:p>
+            <a:r>
+              <a:rPr lang="en-001" sz="2200" dirty="0"/>
+              <a:t>accessibility</a:t>
+            </a:r>
+          </a:p>
+        </p:txBody>
+      </p:sp>
+      <p:sp>
+        <p:nvSpPr>
+          <p:cNvPr id="4" name="Content Placeholder 2">
+            <a:extLst>
+              <a:ext uri="{FF2B5EF4-FFF2-40B4-BE49-F238E27FC236}">
+                <a16:creationId xmlns:a16="http://schemas.microsoft.com/office/drawing/2014/main" id="{8F17A50C-4B6B-BB7A-B7F8-811966543622}"/>
+              </a:ext>
+            </a:extLst>
+          </p:cNvPr>
+          <p:cNvSpPr txBox="1">
+            <a:spLocks/>
+          </p:cNvSpPr>
+          <p:nvPr/>
+        </p:nvSpPr>
+        <p:spPr>
+          <a:xfrm>
+            <a:off x="3617686" y="3841749"/>
+            <a:ext cx="3305629" cy="1325563"/>
+          </a:xfrm>
+          <a:prstGeom prst="rect">
+            <a:avLst/>
+          </a:prstGeom>
+        </p:spPr>
+        <p:txBody>
+          <a:bodyPr vert="horz" lIns="91440" tIns="45720" rIns="91440" bIns="45720" rtlCol="0">
+            <a:normAutofit/>
+          </a:bodyPr>
+          <a:lstStyle>
+            <a:lvl1pPr marL="228600" indent="-228600">
+              <a:lnSpc>
+                <a:spcPct val="90000"/>
+              </a:lnSpc>
+              <a:spcBef>
+                <a:spcPts val="1000"/>
+              </a:spcBef>
+              <a:buFont typeface="Arial" panose="020B0604020202020204" pitchFamily="34" charset="0"/>
+              <a:buChar char="•"/>
+              <a:defRPr sz="2200"/>
+            </a:lvl1pPr>
+            <a:lvl2pPr marL="685800" indent="-228600">
+              <a:lnSpc>
+                <a:spcPct val="90000"/>
+              </a:lnSpc>
+              <a:spcBef>
+                <a:spcPts val="500"/>
+              </a:spcBef>
+              <a:buFont typeface="Arial" panose="020B0604020202020204" pitchFamily="34" charset="0"/>
+              <a:buChar char="•"/>
+              <a:defRPr sz="2400"/>
+            </a:lvl2pPr>
+            <a:lvl3pPr marL="1143000" indent="-228600">
+              <a:lnSpc>
+                <a:spcPct val="90000"/>
+              </a:lnSpc>
+              <a:spcBef>
+                <a:spcPts val="500"/>
+              </a:spcBef>
+              <a:buFont typeface="Arial" panose="020B0604020202020204" pitchFamily="34" charset="0"/>
+              <a:buChar char="•"/>
+              <a:defRPr sz="2000"/>
+            </a:lvl3pPr>
+            <a:lvl4pPr marL="1600200" indent="-228600">
+              <a:lnSpc>
+                <a:spcPct val="90000"/>
+              </a:lnSpc>
+              <a:spcBef>
+                <a:spcPts val="500"/>
+              </a:spcBef>
+              <a:buFont typeface="Arial" panose="020B0604020202020204" pitchFamily="34" charset="0"/>
+              <a:buChar char="•"/>
+            </a:lvl4pPr>
+            <a:lvl5pPr marL="2057400" indent="-228600">
+              <a:lnSpc>
+                <a:spcPct val="90000"/>
+              </a:lnSpc>
+              <a:spcBef>
+                <a:spcPts val="500"/>
+              </a:spcBef>
+              <a:buFont typeface="Arial" panose="020B0604020202020204" pitchFamily="34" charset="0"/>
+              <a:buChar char="•"/>
+            </a:lvl5pPr>
+            <a:lvl6pPr marL="2514600" indent="-228600">
+              <a:lnSpc>
+                <a:spcPct val="90000"/>
+              </a:lnSpc>
+              <a:spcBef>
+                <a:spcPts val="500"/>
+              </a:spcBef>
+              <a:buFont typeface="Arial" panose="020B0604020202020204" pitchFamily="34" charset="0"/>
+              <a:buChar char="•"/>
+            </a:lvl6pPr>
+            <a:lvl7pPr marL="2971800" indent="-228600">
+              <a:lnSpc>
+                <a:spcPct val="90000"/>
+              </a:lnSpc>
+              <a:spcBef>
+                <a:spcPts val="500"/>
+              </a:spcBef>
+              <a:buFont typeface="Arial" panose="020B0604020202020204" pitchFamily="34" charset="0"/>
+              <a:buChar char="•"/>
+            </a:lvl7pPr>
+            <a:lvl8pPr marL="3429000" indent="-228600">
+              <a:lnSpc>
+                <a:spcPct val="90000"/>
+              </a:lnSpc>
+              <a:spcBef>
+                <a:spcPts val="500"/>
+              </a:spcBef>
+              <a:buFont typeface="Arial" panose="020B0604020202020204" pitchFamily="34" charset="0"/>
+              <a:buChar char="•"/>
+            </a:lvl8pPr>
+            <a:lvl9pPr marL="3886200" indent="-228600">
+              <a:lnSpc>
+                <a:spcPct val="90000"/>
+              </a:lnSpc>
+              <a:spcBef>
+                <a:spcPts val="500"/>
+              </a:spcBef>
+              <a:buFont typeface="Arial" panose="020B0604020202020204" pitchFamily="34" charset="0"/>
+              <a:buChar char="•"/>
+            </a:lvl9pPr>
+          </a:lstStyle>
+          <a:p>
+            <a:r>
+              <a:rPr lang="en-001" dirty="0"/>
+              <a:t>Activity Space</a:t>
+            </a:r>
+          </a:p>
+          <a:p>
+            <a:r>
+              <a:rPr lang="en-001" dirty="0"/>
+              <a:t>Space - Time Prism </a:t>
+            </a:r>
+          </a:p>
+          <a:p>
+            <a:endParaRPr lang="fr-CH" dirty="0"/>
+          </a:p>
+        </p:txBody>
+      </p:sp>
+      <p:sp>
+        <p:nvSpPr>
+          <p:cNvPr id="7" name="Content Placeholder 2">
+            <a:extLst>
+              <a:ext uri="{FF2B5EF4-FFF2-40B4-BE49-F238E27FC236}">
+                <a16:creationId xmlns:a16="http://schemas.microsoft.com/office/drawing/2014/main" id="{E3304064-5C43-872E-EC72-D291FDAAB208}"/>
+              </a:ext>
+            </a:extLst>
+          </p:cNvPr>
+          <p:cNvSpPr txBox="1">
+            <a:spLocks/>
+          </p:cNvSpPr>
+          <p:nvPr/>
+        </p:nvSpPr>
+        <p:spPr>
+          <a:xfrm>
+            <a:off x="620486" y="1574936"/>
+            <a:ext cx="7333343" cy="587693"/>
+          </a:xfrm>
+          <a:prstGeom prst="rect">
+            <a:avLst/>
+          </a:prstGeom>
+        </p:spPr>
+        <p:txBody>
+          <a:bodyPr vert="horz" lIns="91440" tIns="45720" rIns="91440" bIns="45720" rtlCol="0">
+            <a:normAutofit/>
+          </a:bodyPr>
+          <a:lstStyle>
+            <a:lvl1pPr marL="228600" indent="-228600" algn="l" defTabSz="914400" rtl="0" eaLnBrk="1" latinLnBrk="0" hangingPunct="1">
+              <a:lnSpc>
+                <a:spcPct val="90000"/>
+              </a:lnSpc>
+              <a:spcBef>
+                <a:spcPts val="1000"/>
+              </a:spcBef>
+              <a:buFont typeface="Arial" panose="020B0604020202020204" pitchFamily="34" charset="0"/>
+              <a:buChar char="•"/>
+              <a:defRPr sz="2800" kern="1200">
+                <a:solidFill>
+                  <a:schemeClr val="tx1"/>
+                </a:solidFill>
+                <a:latin typeface="+mn-lt"/>
+                <a:ea typeface="+mn-ea"/>
+                <a:cs typeface="+mn-cs"/>
+              </a:defRPr>
+            </a:lvl1pPr>
+            <a:lvl2pPr marL="685800" indent="-228600" algn="l" defTabSz="914400" rtl="0" eaLnBrk="1" latinLnBrk="0" hangingPunct="1">
+              <a:lnSpc>
+                <a:spcPct val="90000"/>
+              </a:lnSpc>
+              <a:spcBef>
+                <a:spcPts val="500"/>
+              </a:spcBef>
+              <a:buFont typeface="Arial" panose="020B0604020202020204" pitchFamily="34" charset="0"/>
+              <a:buChar char="•"/>
+              <a:defRPr sz="2400" kern="1200">
+                <a:solidFill>
+                  <a:schemeClr val="tx1"/>
+                </a:solidFill>
+                <a:latin typeface="+mn-lt"/>
+                <a:ea typeface="+mn-ea"/>
+                <a:cs typeface="+mn-cs"/>
+              </a:defRPr>
+            </a:lvl2pPr>
+            <a:lvl3pPr marL="1143000" indent="-228600" algn="l" defTabSz="914400" rtl="0" eaLnBrk="1" latinLnBrk="0" hangingPunct="1">
+              <a:lnSpc>
+                <a:spcPct val="90000"/>
+              </a:lnSpc>
+              <a:spcBef>
+                <a:spcPts val="500"/>
+              </a:spcBef>
+              <a:buFont typeface="Arial" panose="020B0604020202020204" pitchFamily="34" charset="0"/>
+              <a:buChar char="•"/>
+              <a:defRPr sz="2000" kern="1200">
+                <a:solidFill>
+                  <a:schemeClr val="tx1"/>
+                </a:solidFill>
+                <a:latin typeface="+mn-lt"/>
+                <a:ea typeface="+mn-ea"/>
+                <a:cs typeface="+mn-cs"/>
+              </a:defRPr>
+            </a:lvl3pPr>
+            <a:lvl4pPr marL="1600200" indent="-228600" algn="l" defTabSz="914400" rtl="0" eaLnBrk="1" latinLnBrk="0" hangingPunct="1">
+              <a:lnSpc>
+                <a:spcPct val="90000"/>
+              </a:lnSpc>
+              <a:spcBef>
+                <a:spcPts val="500"/>
+              </a:spcBef>
+              <a:buFont typeface="Arial" panose="020B0604020202020204" pitchFamily="34" charset="0"/>
+              <a:buChar char="•"/>
+              <a:defRPr sz="1800" kern="1200">
+                <a:solidFill>
+                  <a:schemeClr val="tx1"/>
+                </a:solidFill>
+                <a:latin typeface="+mn-lt"/>
+                <a:ea typeface="+mn-ea"/>
+                <a:cs typeface="+mn-cs"/>
+              </a:defRPr>
+            </a:lvl4pPr>
+            <a:lvl5pPr marL="2057400" indent="-228600" algn="l" defTabSz="914400" rtl="0" eaLnBrk="1" latinLnBrk="0" hangingPunct="1">
+              <a:lnSpc>
+                <a:spcPct val="90000"/>
+              </a:lnSpc>
+              <a:spcBef>
+                <a:spcPts val="500"/>
+              </a:spcBef>
+              <a:buFont typeface="Arial" panose="020B0604020202020204" pitchFamily="34" charset="0"/>
+              <a:buChar char="•"/>
+              <a:defRPr sz="1800" kern="1200">
+                <a:solidFill>
+                  <a:schemeClr val="tx1"/>
+                </a:solidFill>
+                <a:latin typeface="+mn-lt"/>
+                <a:ea typeface="+mn-ea"/>
+                <a:cs typeface="+mn-cs"/>
+              </a:defRPr>
+            </a:lvl5pPr>
+            <a:lvl6pPr marL="2514600" indent="-228600" algn="l" defTabSz="914400" rtl="0" eaLnBrk="1" latinLnBrk="0" hangingPunct="1">
+              <a:lnSpc>
+                <a:spcPct val="90000"/>
+              </a:lnSpc>
+              <a:spcBef>
+                <a:spcPts val="500"/>
+              </a:spcBef>
+              <a:buFont typeface="Arial" panose="020B0604020202020204" pitchFamily="34" charset="0"/>
+              <a:buChar char="•"/>
+              <a:defRPr sz="1800" kern="1200">
+                <a:solidFill>
+                  <a:schemeClr val="tx1"/>
+                </a:solidFill>
+                <a:latin typeface="+mn-lt"/>
+                <a:ea typeface="+mn-ea"/>
+                <a:cs typeface="+mn-cs"/>
+              </a:defRPr>
+            </a:lvl6pPr>
+            <a:lvl7pPr marL="2971800" indent="-228600" algn="l" defTabSz="914400" rtl="0" eaLnBrk="1" latinLnBrk="0" hangingPunct="1">
+              <a:lnSpc>
+                <a:spcPct val="90000"/>
+              </a:lnSpc>
+              <a:spcBef>
+                <a:spcPts val="500"/>
+              </a:spcBef>
+              <a:buFont typeface="Arial" panose="020B0604020202020204" pitchFamily="34" charset="0"/>
+              <a:buChar char="•"/>
+              <a:defRPr sz="1800" kern="1200">
+                <a:solidFill>
+                  <a:schemeClr val="tx1"/>
+                </a:solidFill>
+                <a:latin typeface="+mn-lt"/>
+                <a:ea typeface="+mn-ea"/>
+                <a:cs typeface="+mn-cs"/>
+              </a:defRPr>
+            </a:lvl7pPr>
+            <a:lvl8pPr marL="3429000" indent="-228600" algn="l" defTabSz="914400" rtl="0" eaLnBrk="1" latinLnBrk="0" hangingPunct="1">
+              <a:lnSpc>
+                <a:spcPct val="90000"/>
+              </a:lnSpc>
+              <a:spcBef>
+                <a:spcPts val="500"/>
+              </a:spcBef>
+              <a:buFont typeface="Arial" panose="020B0604020202020204" pitchFamily="34" charset="0"/>
+              <a:buChar char="•"/>
+              <a:defRPr sz="1800" kern="1200">
+                <a:solidFill>
+                  <a:schemeClr val="tx1"/>
+                </a:solidFill>
+                <a:latin typeface="+mn-lt"/>
+                <a:ea typeface="+mn-ea"/>
+                <a:cs typeface="+mn-cs"/>
+              </a:defRPr>
+            </a:lvl8pPr>
+            <a:lvl9pPr marL="3886200" indent="-228600" algn="l" defTabSz="914400" rtl="0" eaLnBrk="1" latinLnBrk="0" hangingPunct="1">
+              <a:lnSpc>
+                <a:spcPct val="90000"/>
+              </a:lnSpc>
+              <a:spcBef>
+                <a:spcPts val="500"/>
+              </a:spcBef>
+              <a:buFont typeface="Arial" panose="020B0604020202020204" pitchFamily="34" charset="0"/>
+              <a:buChar char="•"/>
+              <a:defRPr sz="1800" kern="1200">
+                <a:solidFill>
+                  <a:schemeClr val="tx1"/>
+                </a:solidFill>
+                <a:latin typeface="+mn-lt"/>
+                <a:ea typeface="+mn-ea"/>
+                <a:cs typeface="+mn-cs"/>
+              </a:defRPr>
+            </a:lvl9pPr>
+          </a:lstStyle>
+          <a:p>
+            <a:pPr marL="0" indent="0">
+              <a:buNone/>
+            </a:pPr>
+            <a:r>
+              <a:rPr lang="en-001" dirty="0"/>
+              <a:t>What is a 15-minute city ? </a:t>
+            </a:r>
+          </a:p>
+        </p:txBody>
+      </p:sp>
+      <p:sp>
+        <p:nvSpPr>
+          <p:cNvPr id="9" name="TextBox 8">
+            <a:extLst>
+              <a:ext uri="{FF2B5EF4-FFF2-40B4-BE49-F238E27FC236}">
+                <a16:creationId xmlns:a16="http://schemas.microsoft.com/office/drawing/2014/main" id="{CB528F5E-CAB4-ACCF-A3C1-CA0902706B8C}"/>
+              </a:ext>
+            </a:extLst>
+          </p:cNvPr>
+          <p:cNvSpPr txBox="1"/>
+          <p:nvPr/>
+        </p:nvSpPr>
+        <p:spPr>
+          <a:xfrm>
+            <a:off x="602343" y="5663095"/>
+            <a:ext cx="11056257" cy="584775"/>
+          </a:xfrm>
+          <a:prstGeom prst="rect">
+            <a:avLst/>
+          </a:prstGeom>
+          <a:noFill/>
+        </p:spPr>
+        <p:txBody>
+          <a:bodyPr wrap="square">
+            <a:spAutoFit/>
+          </a:bodyPr>
+          <a:lstStyle/>
+          <a:p>
+            <a:r>
+              <a:rPr lang="en-001" sz="1600" dirty="0"/>
+              <a:t>Moreno, C., Allam, Z., Chabaud, D., Gall, C., &amp; Pratlong, F. (2021). Introducing the “15-Minute City”: Sustainability, resilience and place identity in future post-pandemic cities. </a:t>
+            </a:r>
+            <a:r>
+              <a:rPr lang="en-001" sz="1600" i="1" dirty="0"/>
+              <a:t>Smart Cities, 4</a:t>
+            </a:r>
+            <a:r>
+              <a:rPr lang="en-001" sz="1600" dirty="0"/>
+              <a:t>(1), 93–111. </a:t>
+            </a:r>
+            <a:r>
+              <a:rPr lang="en-001" sz="1600" dirty="0">
+                <a:hlinkClick r:id="rId3"/>
+              </a:rPr>
+              <a:t>https://doi.org/10.3390/smartcities4010006</a:t>
+            </a:r>
+            <a:endParaRPr lang="en-001" sz="1600" dirty="0"/>
+          </a:p>
+        </p:txBody>
+      </p:sp>
+      <p:sp>
+        <p:nvSpPr>
+          <p:cNvPr id="10" name="Content Placeholder 2">
+            <a:extLst>
+              <a:ext uri="{FF2B5EF4-FFF2-40B4-BE49-F238E27FC236}">
+                <a16:creationId xmlns:a16="http://schemas.microsoft.com/office/drawing/2014/main" id="{915FE583-7C3C-9CF1-0E8F-21011874179B}"/>
+              </a:ext>
+            </a:extLst>
+          </p:cNvPr>
+          <p:cNvSpPr txBox="1">
+            <a:spLocks/>
+          </p:cNvSpPr>
+          <p:nvPr/>
+        </p:nvSpPr>
+        <p:spPr>
+          <a:xfrm>
+            <a:off x="620486" y="2069681"/>
+            <a:ext cx="10969171" cy="1151383"/>
+          </a:xfrm>
+          <a:prstGeom prst="rect">
+            <a:avLst/>
+          </a:prstGeom>
+        </p:spPr>
+        <p:txBody>
+          <a:bodyPr vert="horz" lIns="91440" tIns="45720" rIns="91440" bIns="45720" rtlCol="0">
+            <a:normAutofit/>
+          </a:bodyPr>
+          <a:lstStyle>
+            <a:lvl1pPr marL="228600" indent="-228600" algn="l" defTabSz="914400" rtl="0" eaLnBrk="1" latinLnBrk="0" hangingPunct="1">
+              <a:lnSpc>
+                <a:spcPct val="90000"/>
+              </a:lnSpc>
+              <a:spcBef>
+                <a:spcPts val="1000"/>
+              </a:spcBef>
+              <a:buFont typeface="Arial" panose="020B0604020202020204" pitchFamily="34" charset="0"/>
+              <a:buChar char="•"/>
+              <a:defRPr sz="2800" kern="1200">
+                <a:solidFill>
+                  <a:schemeClr val="tx1"/>
+                </a:solidFill>
+                <a:latin typeface="+mn-lt"/>
+                <a:ea typeface="+mn-ea"/>
+                <a:cs typeface="+mn-cs"/>
+              </a:defRPr>
+            </a:lvl1pPr>
+            <a:lvl2pPr marL="685800" indent="-228600" algn="l" defTabSz="914400" rtl="0" eaLnBrk="1" latinLnBrk="0" hangingPunct="1">
+              <a:lnSpc>
+                <a:spcPct val="90000"/>
+              </a:lnSpc>
+              <a:spcBef>
+                <a:spcPts val="500"/>
+              </a:spcBef>
+              <a:buFont typeface="Arial" panose="020B0604020202020204" pitchFamily="34" charset="0"/>
+              <a:buChar char="•"/>
+              <a:defRPr sz="2400" kern="1200">
+                <a:solidFill>
+                  <a:schemeClr val="tx1"/>
+                </a:solidFill>
+                <a:latin typeface="+mn-lt"/>
+                <a:ea typeface="+mn-ea"/>
+                <a:cs typeface="+mn-cs"/>
+              </a:defRPr>
+            </a:lvl2pPr>
+            <a:lvl3pPr marL="1143000" indent="-228600" algn="l" defTabSz="914400" rtl="0" eaLnBrk="1" latinLnBrk="0" hangingPunct="1">
+              <a:lnSpc>
+                <a:spcPct val="90000"/>
+              </a:lnSpc>
+              <a:spcBef>
+                <a:spcPts val="500"/>
+              </a:spcBef>
+              <a:buFont typeface="Arial" panose="020B0604020202020204" pitchFamily="34" charset="0"/>
+              <a:buChar char="•"/>
+              <a:defRPr sz="2000" kern="1200">
+                <a:solidFill>
+                  <a:schemeClr val="tx1"/>
+                </a:solidFill>
+                <a:latin typeface="+mn-lt"/>
+                <a:ea typeface="+mn-ea"/>
+                <a:cs typeface="+mn-cs"/>
+              </a:defRPr>
+            </a:lvl3pPr>
+            <a:lvl4pPr marL="1600200" indent="-228600" algn="l" defTabSz="914400" rtl="0" eaLnBrk="1" latinLnBrk="0" hangingPunct="1">
+              <a:lnSpc>
+                <a:spcPct val="90000"/>
+              </a:lnSpc>
+              <a:spcBef>
+                <a:spcPts val="500"/>
+              </a:spcBef>
+              <a:buFont typeface="Arial" panose="020B0604020202020204" pitchFamily="34" charset="0"/>
+              <a:buChar char="•"/>
+              <a:defRPr sz="1800" kern="1200">
+                <a:solidFill>
+                  <a:schemeClr val="tx1"/>
+                </a:solidFill>
+                <a:latin typeface="+mn-lt"/>
+                <a:ea typeface="+mn-ea"/>
+                <a:cs typeface="+mn-cs"/>
+              </a:defRPr>
+            </a:lvl4pPr>
+            <a:lvl5pPr marL="2057400" indent="-228600" algn="l" defTabSz="914400" rtl="0" eaLnBrk="1" latinLnBrk="0" hangingPunct="1">
+              <a:lnSpc>
+                <a:spcPct val="90000"/>
+              </a:lnSpc>
+              <a:spcBef>
+                <a:spcPts val="500"/>
+              </a:spcBef>
+              <a:buFont typeface="Arial" panose="020B0604020202020204" pitchFamily="34" charset="0"/>
+              <a:buChar char="•"/>
+              <a:defRPr sz="1800" kern="1200">
+                <a:solidFill>
+                  <a:schemeClr val="tx1"/>
+                </a:solidFill>
+                <a:latin typeface="+mn-lt"/>
+                <a:ea typeface="+mn-ea"/>
+                <a:cs typeface="+mn-cs"/>
+              </a:defRPr>
+            </a:lvl5pPr>
+            <a:lvl6pPr marL="2514600" indent="-228600" algn="l" defTabSz="914400" rtl="0" eaLnBrk="1" latinLnBrk="0" hangingPunct="1">
+              <a:lnSpc>
+                <a:spcPct val="90000"/>
+              </a:lnSpc>
+              <a:spcBef>
+                <a:spcPts val="500"/>
+              </a:spcBef>
+              <a:buFont typeface="Arial" panose="020B0604020202020204" pitchFamily="34" charset="0"/>
+              <a:buChar char="•"/>
+              <a:defRPr sz="1800" kern="1200">
+                <a:solidFill>
+                  <a:schemeClr val="tx1"/>
+                </a:solidFill>
+                <a:latin typeface="+mn-lt"/>
+                <a:ea typeface="+mn-ea"/>
+                <a:cs typeface="+mn-cs"/>
+              </a:defRPr>
+            </a:lvl6pPr>
+            <a:lvl7pPr marL="2971800" indent="-228600" algn="l" defTabSz="914400" rtl="0" eaLnBrk="1" latinLnBrk="0" hangingPunct="1">
+              <a:lnSpc>
+                <a:spcPct val="90000"/>
+              </a:lnSpc>
+              <a:spcBef>
+                <a:spcPts val="500"/>
+              </a:spcBef>
+              <a:buFont typeface="Arial" panose="020B0604020202020204" pitchFamily="34" charset="0"/>
+              <a:buChar char="•"/>
+              <a:defRPr sz="1800" kern="1200">
+                <a:solidFill>
+                  <a:schemeClr val="tx1"/>
+                </a:solidFill>
+                <a:latin typeface="+mn-lt"/>
+                <a:ea typeface="+mn-ea"/>
+                <a:cs typeface="+mn-cs"/>
+              </a:defRPr>
+            </a:lvl7pPr>
+            <a:lvl8pPr marL="3429000" indent="-228600" algn="l" defTabSz="914400" rtl="0" eaLnBrk="1" latinLnBrk="0" hangingPunct="1">
+              <a:lnSpc>
+                <a:spcPct val="90000"/>
+              </a:lnSpc>
+              <a:spcBef>
+                <a:spcPts val="500"/>
+              </a:spcBef>
+              <a:buFont typeface="Arial" panose="020B0604020202020204" pitchFamily="34" charset="0"/>
+              <a:buChar char="•"/>
+              <a:defRPr sz="1800" kern="1200">
+                <a:solidFill>
+                  <a:schemeClr val="tx1"/>
+                </a:solidFill>
+                <a:latin typeface="+mn-lt"/>
+                <a:ea typeface="+mn-ea"/>
+                <a:cs typeface="+mn-cs"/>
+              </a:defRPr>
+            </a:lvl8pPr>
+            <a:lvl9pPr marL="3886200" indent="-228600" algn="l" defTabSz="914400" rtl="0" eaLnBrk="1" latinLnBrk="0" hangingPunct="1">
+              <a:lnSpc>
+                <a:spcPct val="90000"/>
+              </a:lnSpc>
+              <a:spcBef>
+                <a:spcPts val="500"/>
+              </a:spcBef>
+              <a:buFont typeface="Arial" panose="020B0604020202020204" pitchFamily="34" charset="0"/>
+              <a:buChar char="•"/>
+              <a:defRPr sz="1800" kern="1200">
+                <a:solidFill>
+                  <a:schemeClr val="tx1"/>
+                </a:solidFill>
+                <a:latin typeface="+mn-lt"/>
+                <a:ea typeface="+mn-ea"/>
+                <a:cs typeface="+mn-cs"/>
+              </a:defRPr>
+            </a:lvl9pPr>
+          </a:lstStyle>
+          <a:p>
+            <a:pPr marL="0" indent="0">
+              <a:buNone/>
+            </a:pPr>
+            <a:r>
+              <a:rPr lang="en-001" sz="2200" dirty="0"/>
+              <a:t>A city where residents can meet most of their everyday needs within a 15-minute walk or bike ride from their home, reducing dependence on cars and improving urban sustainability and quality of life.</a:t>
+            </a:r>
+            <a:r>
+              <a:rPr lang="fr-CH" sz="2200" dirty="0"/>
+              <a:t> </a:t>
+            </a:r>
+          </a:p>
+        </p:txBody>
+      </p:sp>
+      <p:sp>
+        <p:nvSpPr>
+          <p:cNvPr id="12" name="Content Placeholder 2">
+            <a:extLst>
+              <a:ext uri="{FF2B5EF4-FFF2-40B4-BE49-F238E27FC236}">
+                <a16:creationId xmlns:a16="http://schemas.microsoft.com/office/drawing/2014/main" id="{CCA93583-4939-AC40-A60F-37B5F7DB288E}"/>
+              </a:ext>
+            </a:extLst>
+          </p:cNvPr>
+          <p:cNvSpPr txBox="1">
+            <a:spLocks/>
+          </p:cNvSpPr>
+          <p:nvPr/>
+        </p:nvSpPr>
+        <p:spPr>
+          <a:xfrm>
+            <a:off x="602343" y="3187654"/>
+            <a:ext cx="3015343" cy="587693"/>
+          </a:xfrm>
+          <a:prstGeom prst="rect">
+            <a:avLst/>
+          </a:prstGeom>
+        </p:spPr>
+        <p:txBody>
+          <a:bodyPr vert="horz" lIns="91440" tIns="45720" rIns="91440" bIns="45720" rtlCol="0">
+            <a:normAutofit/>
+          </a:bodyPr>
+          <a:lstStyle>
+            <a:lvl1pPr marL="228600" indent="-228600" algn="l" defTabSz="914400" rtl="0" eaLnBrk="1" latinLnBrk="0" hangingPunct="1">
+              <a:lnSpc>
+                <a:spcPct val="90000"/>
+              </a:lnSpc>
+              <a:spcBef>
+                <a:spcPts val="1000"/>
+              </a:spcBef>
+              <a:buFont typeface="Arial" panose="020B0604020202020204" pitchFamily="34" charset="0"/>
+              <a:buChar char="•"/>
+              <a:defRPr sz="2800" kern="1200">
+                <a:solidFill>
+                  <a:schemeClr val="tx1"/>
+                </a:solidFill>
+                <a:latin typeface="+mn-lt"/>
+                <a:ea typeface="+mn-ea"/>
+                <a:cs typeface="+mn-cs"/>
+              </a:defRPr>
+            </a:lvl1pPr>
+            <a:lvl2pPr marL="685800" indent="-228600" algn="l" defTabSz="914400" rtl="0" eaLnBrk="1" latinLnBrk="0" hangingPunct="1">
+              <a:lnSpc>
+                <a:spcPct val="90000"/>
+              </a:lnSpc>
+              <a:spcBef>
+                <a:spcPts val="500"/>
+              </a:spcBef>
+              <a:buFont typeface="Arial" panose="020B0604020202020204" pitchFamily="34" charset="0"/>
+              <a:buChar char="•"/>
+              <a:defRPr sz="2400" kern="1200">
+                <a:solidFill>
+                  <a:schemeClr val="tx1"/>
+                </a:solidFill>
+                <a:latin typeface="+mn-lt"/>
+                <a:ea typeface="+mn-ea"/>
+                <a:cs typeface="+mn-cs"/>
+              </a:defRPr>
+            </a:lvl2pPr>
+            <a:lvl3pPr marL="1143000" indent="-228600" algn="l" defTabSz="914400" rtl="0" eaLnBrk="1" latinLnBrk="0" hangingPunct="1">
+              <a:lnSpc>
+                <a:spcPct val="90000"/>
+              </a:lnSpc>
+              <a:spcBef>
+                <a:spcPts val="500"/>
+              </a:spcBef>
+              <a:buFont typeface="Arial" panose="020B0604020202020204" pitchFamily="34" charset="0"/>
+              <a:buChar char="•"/>
+              <a:defRPr sz="2000" kern="1200">
+                <a:solidFill>
+                  <a:schemeClr val="tx1"/>
+                </a:solidFill>
+                <a:latin typeface="+mn-lt"/>
+                <a:ea typeface="+mn-ea"/>
+                <a:cs typeface="+mn-cs"/>
+              </a:defRPr>
+            </a:lvl3pPr>
+            <a:lvl4pPr marL="1600200" indent="-228600" algn="l" defTabSz="914400" rtl="0" eaLnBrk="1" latinLnBrk="0" hangingPunct="1">
+              <a:lnSpc>
+                <a:spcPct val="90000"/>
+              </a:lnSpc>
+              <a:spcBef>
+                <a:spcPts val="500"/>
+              </a:spcBef>
+              <a:buFont typeface="Arial" panose="020B0604020202020204" pitchFamily="34" charset="0"/>
+              <a:buChar char="•"/>
+              <a:defRPr sz="1800" kern="1200">
+                <a:solidFill>
+                  <a:schemeClr val="tx1"/>
+                </a:solidFill>
+                <a:latin typeface="+mn-lt"/>
+                <a:ea typeface="+mn-ea"/>
+                <a:cs typeface="+mn-cs"/>
+              </a:defRPr>
+            </a:lvl4pPr>
+            <a:lvl5pPr marL="2057400" indent="-228600" algn="l" defTabSz="914400" rtl="0" eaLnBrk="1" latinLnBrk="0" hangingPunct="1">
+              <a:lnSpc>
+                <a:spcPct val="90000"/>
+              </a:lnSpc>
+              <a:spcBef>
+                <a:spcPts val="500"/>
+              </a:spcBef>
+              <a:buFont typeface="Arial" panose="020B0604020202020204" pitchFamily="34" charset="0"/>
+              <a:buChar char="•"/>
+              <a:defRPr sz="1800" kern="1200">
+                <a:solidFill>
+                  <a:schemeClr val="tx1"/>
+                </a:solidFill>
+                <a:latin typeface="+mn-lt"/>
+                <a:ea typeface="+mn-ea"/>
+                <a:cs typeface="+mn-cs"/>
+              </a:defRPr>
+            </a:lvl5pPr>
+            <a:lvl6pPr marL="2514600" indent="-228600" algn="l" defTabSz="914400" rtl="0" eaLnBrk="1" latinLnBrk="0" hangingPunct="1">
+              <a:lnSpc>
+                <a:spcPct val="90000"/>
+              </a:lnSpc>
+              <a:spcBef>
+                <a:spcPts val="500"/>
+              </a:spcBef>
+              <a:buFont typeface="Arial" panose="020B0604020202020204" pitchFamily="34" charset="0"/>
+              <a:buChar char="•"/>
+              <a:defRPr sz="1800" kern="1200">
+                <a:solidFill>
+                  <a:schemeClr val="tx1"/>
+                </a:solidFill>
+                <a:latin typeface="+mn-lt"/>
+                <a:ea typeface="+mn-ea"/>
+                <a:cs typeface="+mn-cs"/>
+              </a:defRPr>
+            </a:lvl6pPr>
+            <a:lvl7pPr marL="2971800" indent="-228600" algn="l" defTabSz="914400" rtl="0" eaLnBrk="1" latinLnBrk="0" hangingPunct="1">
+              <a:lnSpc>
+                <a:spcPct val="90000"/>
+              </a:lnSpc>
+              <a:spcBef>
+                <a:spcPts val="500"/>
+              </a:spcBef>
+              <a:buFont typeface="Arial" panose="020B0604020202020204" pitchFamily="34" charset="0"/>
+              <a:buChar char="•"/>
+              <a:defRPr sz="1800" kern="1200">
+                <a:solidFill>
+                  <a:schemeClr val="tx1"/>
+                </a:solidFill>
+                <a:latin typeface="+mn-lt"/>
+                <a:ea typeface="+mn-ea"/>
+                <a:cs typeface="+mn-cs"/>
+              </a:defRPr>
+            </a:lvl7pPr>
+            <a:lvl8pPr marL="3429000" indent="-228600" algn="l" defTabSz="914400" rtl="0" eaLnBrk="1" latinLnBrk="0" hangingPunct="1">
+              <a:lnSpc>
+                <a:spcPct val="90000"/>
+              </a:lnSpc>
+              <a:spcBef>
+                <a:spcPts val="500"/>
+              </a:spcBef>
+              <a:buFont typeface="Arial" panose="020B0604020202020204" pitchFamily="34" charset="0"/>
+              <a:buChar char="•"/>
+              <a:defRPr sz="1800" kern="1200">
+                <a:solidFill>
+                  <a:schemeClr val="tx1"/>
+                </a:solidFill>
+                <a:latin typeface="+mn-lt"/>
+                <a:ea typeface="+mn-ea"/>
+                <a:cs typeface="+mn-cs"/>
+              </a:defRPr>
+            </a:lvl8pPr>
+            <a:lvl9pPr marL="3886200" indent="-228600" algn="l" defTabSz="914400" rtl="0" eaLnBrk="1" latinLnBrk="0" hangingPunct="1">
+              <a:lnSpc>
+                <a:spcPct val="90000"/>
+              </a:lnSpc>
+              <a:spcBef>
+                <a:spcPts val="500"/>
+              </a:spcBef>
+              <a:buFont typeface="Arial" panose="020B0604020202020204" pitchFamily="34" charset="0"/>
+              <a:buChar char="•"/>
+              <a:defRPr sz="1800" kern="1200">
+                <a:solidFill>
+                  <a:schemeClr val="tx1"/>
+                </a:solidFill>
+                <a:latin typeface="+mn-lt"/>
+                <a:ea typeface="+mn-ea"/>
+                <a:cs typeface="+mn-cs"/>
+              </a:defRPr>
+            </a:lvl9pPr>
+          </a:lstStyle>
+          <a:p>
+            <a:pPr marL="0" indent="0">
+              <a:buNone/>
+            </a:pPr>
+            <a:r>
+              <a:rPr lang="en-001" dirty="0"/>
+              <a:t>Application Area</a:t>
+            </a:r>
+          </a:p>
+        </p:txBody>
+      </p:sp>
+      <p:sp>
+        <p:nvSpPr>
+          <p:cNvPr id="13" name="Content Placeholder 2">
+            <a:extLst>
+              <a:ext uri="{FF2B5EF4-FFF2-40B4-BE49-F238E27FC236}">
+                <a16:creationId xmlns:a16="http://schemas.microsoft.com/office/drawing/2014/main" id="{4644C598-C82E-CEBD-C9E8-A04B079A8484}"/>
+              </a:ext>
+            </a:extLst>
+          </p:cNvPr>
+          <p:cNvSpPr txBox="1">
+            <a:spLocks/>
+          </p:cNvSpPr>
+          <p:nvPr/>
+        </p:nvSpPr>
+        <p:spPr>
+          <a:xfrm>
+            <a:off x="3661229" y="3195883"/>
+            <a:ext cx="3305628" cy="587693"/>
+          </a:xfrm>
+          <a:prstGeom prst="rect">
+            <a:avLst/>
+          </a:prstGeom>
+        </p:spPr>
+        <p:txBody>
+          <a:bodyPr vert="horz" lIns="91440" tIns="45720" rIns="91440" bIns="45720" rtlCol="0">
+            <a:normAutofit/>
+          </a:bodyPr>
+          <a:lstStyle>
+            <a:lvl1pPr marL="228600" indent="-228600" algn="l" defTabSz="914400" rtl="0" eaLnBrk="1" latinLnBrk="0" hangingPunct="1">
+              <a:lnSpc>
+                <a:spcPct val="90000"/>
+              </a:lnSpc>
+              <a:spcBef>
+                <a:spcPts val="1000"/>
+              </a:spcBef>
+              <a:buFont typeface="Arial" panose="020B0604020202020204" pitchFamily="34" charset="0"/>
+              <a:buChar char="•"/>
+              <a:defRPr sz="2800" kern="1200">
+                <a:solidFill>
+                  <a:schemeClr val="tx1"/>
+                </a:solidFill>
+                <a:latin typeface="+mn-lt"/>
+                <a:ea typeface="+mn-ea"/>
+                <a:cs typeface="+mn-cs"/>
+              </a:defRPr>
+            </a:lvl1pPr>
+            <a:lvl2pPr marL="685800" indent="-228600" algn="l" defTabSz="914400" rtl="0" eaLnBrk="1" latinLnBrk="0" hangingPunct="1">
+              <a:lnSpc>
+                <a:spcPct val="90000"/>
+              </a:lnSpc>
+              <a:spcBef>
+                <a:spcPts val="500"/>
+              </a:spcBef>
+              <a:buFont typeface="Arial" panose="020B0604020202020204" pitchFamily="34" charset="0"/>
+              <a:buChar char="•"/>
+              <a:defRPr sz="2400" kern="1200">
+                <a:solidFill>
+                  <a:schemeClr val="tx1"/>
+                </a:solidFill>
+                <a:latin typeface="+mn-lt"/>
+                <a:ea typeface="+mn-ea"/>
+                <a:cs typeface="+mn-cs"/>
+              </a:defRPr>
+            </a:lvl2pPr>
+            <a:lvl3pPr marL="1143000" indent="-228600" algn="l" defTabSz="914400" rtl="0" eaLnBrk="1" latinLnBrk="0" hangingPunct="1">
+              <a:lnSpc>
+                <a:spcPct val="90000"/>
+              </a:lnSpc>
+              <a:spcBef>
+                <a:spcPts val="500"/>
+              </a:spcBef>
+              <a:buFont typeface="Arial" panose="020B0604020202020204" pitchFamily="34" charset="0"/>
+              <a:buChar char="•"/>
+              <a:defRPr sz="2000" kern="1200">
+                <a:solidFill>
+                  <a:schemeClr val="tx1"/>
+                </a:solidFill>
+                <a:latin typeface="+mn-lt"/>
+                <a:ea typeface="+mn-ea"/>
+                <a:cs typeface="+mn-cs"/>
+              </a:defRPr>
+            </a:lvl3pPr>
+            <a:lvl4pPr marL="1600200" indent="-228600" algn="l" defTabSz="914400" rtl="0" eaLnBrk="1" latinLnBrk="0" hangingPunct="1">
+              <a:lnSpc>
+                <a:spcPct val="90000"/>
+              </a:lnSpc>
+              <a:spcBef>
+                <a:spcPts val="500"/>
+              </a:spcBef>
+              <a:buFont typeface="Arial" panose="020B0604020202020204" pitchFamily="34" charset="0"/>
+              <a:buChar char="•"/>
+              <a:defRPr sz="1800" kern="1200">
+                <a:solidFill>
+                  <a:schemeClr val="tx1"/>
+                </a:solidFill>
+                <a:latin typeface="+mn-lt"/>
+                <a:ea typeface="+mn-ea"/>
+                <a:cs typeface="+mn-cs"/>
+              </a:defRPr>
+            </a:lvl4pPr>
+            <a:lvl5pPr marL="2057400" indent="-228600" algn="l" defTabSz="914400" rtl="0" eaLnBrk="1" latinLnBrk="0" hangingPunct="1">
+              <a:lnSpc>
+                <a:spcPct val="90000"/>
+              </a:lnSpc>
+              <a:spcBef>
+                <a:spcPts val="500"/>
+              </a:spcBef>
+              <a:buFont typeface="Arial" panose="020B0604020202020204" pitchFamily="34" charset="0"/>
+              <a:buChar char="•"/>
+              <a:defRPr sz="1800" kern="1200">
+                <a:solidFill>
+                  <a:schemeClr val="tx1"/>
+                </a:solidFill>
+                <a:latin typeface="+mn-lt"/>
+                <a:ea typeface="+mn-ea"/>
+                <a:cs typeface="+mn-cs"/>
+              </a:defRPr>
+            </a:lvl5pPr>
+            <a:lvl6pPr marL="2514600" indent="-228600" algn="l" defTabSz="914400" rtl="0" eaLnBrk="1" latinLnBrk="0" hangingPunct="1">
+              <a:lnSpc>
+                <a:spcPct val="90000"/>
+              </a:lnSpc>
+              <a:spcBef>
+                <a:spcPts val="500"/>
+              </a:spcBef>
+              <a:buFont typeface="Arial" panose="020B0604020202020204" pitchFamily="34" charset="0"/>
+              <a:buChar char="•"/>
+              <a:defRPr sz="1800" kern="1200">
+                <a:solidFill>
+                  <a:schemeClr val="tx1"/>
+                </a:solidFill>
+                <a:latin typeface="+mn-lt"/>
+                <a:ea typeface="+mn-ea"/>
+                <a:cs typeface="+mn-cs"/>
+              </a:defRPr>
+            </a:lvl6pPr>
+            <a:lvl7pPr marL="2971800" indent="-228600" algn="l" defTabSz="914400" rtl="0" eaLnBrk="1" latinLnBrk="0" hangingPunct="1">
+              <a:lnSpc>
+                <a:spcPct val="90000"/>
+              </a:lnSpc>
+              <a:spcBef>
+                <a:spcPts val="500"/>
+              </a:spcBef>
+              <a:buFont typeface="Arial" panose="020B0604020202020204" pitchFamily="34" charset="0"/>
+              <a:buChar char="•"/>
+              <a:defRPr sz="1800" kern="1200">
+                <a:solidFill>
+                  <a:schemeClr val="tx1"/>
+                </a:solidFill>
+                <a:latin typeface="+mn-lt"/>
+                <a:ea typeface="+mn-ea"/>
+                <a:cs typeface="+mn-cs"/>
+              </a:defRPr>
+            </a:lvl7pPr>
+            <a:lvl8pPr marL="3429000" indent="-228600" algn="l" defTabSz="914400" rtl="0" eaLnBrk="1" latinLnBrk="0" hangingPunct="1">
+              <a:lnSpc>
+                <a:spcPct val="90000"/>
+              </a:lnSpc>
+              <a:spcBef>
+                <a:spcPts val="500"/>
+              </a:spcBef>
+              <a:buFont typeface="Arial" panose="020B0604020202020204" pitchFamily="34" charset="0"/>
+              <a:buChar char="•"/>
+              <a:defRPr sz="1800" kern="1200">
+                <a:solidFill>
+                  <a:schemeClr val="tx1"/>
+                </a:solidFill>
+                <a:latin typeface="+mn-lt"/>
+                <a:ea typeface="+mn-ea"/>
+                <a:cs typeface="+mn-cs"/>
+              </a:defRPr>
+            </a:lvl8pPr>
+            <a:lvl9pPr marL="3886200" indent="-228600" algn="l" defTabSz="914400" rtl="0" eaLnBrk="1" latinLnBrk="0" hangingPunct="1">
+              <a:lnSpc>
+                <a:spcPct val="90000"/>
+              </a:lnSpc>
+              <a:spcBef>
+                <a:spcPts val="500"/>
+              </a:spcBef>
+              <a:buFont typeface="Arial" panose="020B0604020202020204" pitchFamily="34" charset="0"/>
+              <a:buChar char="•"/>
+              <a:defRPr sz="1800" kern="1200">
+                <a:solidFill>
+                  <a:schemeClr val="tx1"/>
+                </a:solidFill>
+                <a:latin typeface="+mn-lt"/>
+                <a:ea typeface="+mn-ea"/>
+                <a:cs typeface="+mn-cs"/>
+              </a:defRPr>
+            </a:lvl9pPr>
+          </a:lstStyle>
+          <a:p>
+            <a:pPr marL="0" indent="0">
+              <a:buNone/>
+            </a:pPr>
+            <a:r>
+              <a:rPr lang="en-001" dirty="0"/>
+              <a:t>Conceptual Model</a:t>
+            </a:r>
+          </a:p>
+        </p:txBody>
+      </p:sp>
+      <p:sp>
+        <p:nvSpPr>
+          <p:cNvPr id="15" name="Content Placeholder 2">
+            <a:extLst>
+              <a:ext uri="{FF2B5EF4-FFF2-40B4-BE49-F238E27FC236}">
+                <a16:creationId xmlns:a16="http://schemas.microsoft.com/office/drawing/2014/main" id="{92AF249F-0D57-F629-B590-655159CD6D7F}"/>
+              </a:ext>
+            </a:extLst>
+          </p:cNvPr>
+          <p:cNvSpPr txBox="1">
+            <a:spLocks/>
+          </p:cNvSpPr>
+          <p:nvPr/>
+        </p:nvSpPr>
+        <p:spPr>
+          <a:xfrm>
+            <a:off x="6966857" y="3191230"/>
+            <a:ext cx="5083953" cy="587693"/>
+          </a:xfrm>
+          <a:prstGeom prst="rect">
+            <a:avLst/>
+          </a:prstGeom>
+        </p:spPr>
+        <p:txBody>
+          <a:bodyPr vert="horz" lIns="91440" tIns="45720" rIns="91440" bIns="45720" rtlCol="0">
+            <a:noAutofit/>
+          </a:bodyPr>
+          <a:lstStyle>
+            <a:lvl1pPr marL="228600" indent="-228600" algn="l" defTabSz="914400" rtl="0" eaLnBrk="1" latinLnBrk="0" hangingPunct="1">
+              <a:lnSpc>
+                <a:spcPct val="90000"/>
+              </a:lnSpc>
+              <a:spcBef>
+                <a:spcPts val="1000"/>
+              </a:spcBef>
+              <a:buFont typeface="Arial" panose="020B0604020202020204" pitchFamily="34" charset="0"/>
+              <a:buChar char="•"/>
+              <a:defRPr sz="2800" kern="1200">
+                <a:solidFill>
+                  <a:schemeClr val="tx1"/>
+                </a:solidFill>
+                <a:latin typeface="+mn-lt"/>
+                <a:ea typeface="+mn-ea"/>
+                <a:cs typeface="+mn-cs"/>
+              </a:defRPr>
+            </a:lvl1pPr>
+            <a:lvl2pPr marL="685800" indent="-228600" algn="l" defTabSz="914400" rtl="0" eaLnBrk="1" latinLnBrk="0" hangingPunct="1">
+              <a:lnSpc>
+                <a:spcPct val="90000"/>
+              </a:lnSpc>
+              <a:spcBef>
+                <a:spcPts val="500"/>
+              </a:spcBef>
+              <a:buFont typeface="Arial" panose="020B0604020202020204" pitchFamily="34" charset="0"/>
+              <a:buChar char="•"/>
+              <a:defRPr sz="2400" kern="1200">
+                <a:solidFill>
+                  <a:schemeClr val="tx1"/>
+                </a:solidFill>
+                <a:latin typeface="+mn-lt"/>
+                <a:ea typeface="+mn-ea"/>
+                <a:cs typeface="+mn-cs"/>
+              </a:defRPr>
+            </a:lvl2pPr>
+            <a:lvl3pPr marL="1143000" indent="-228600" algn="l" defTabSz="914400" rtl="0" eaLnBrk="1" latinLnBrk="0" hangingPunct="1">
+              <a:lnSpc>
+                <a:spcPct val="90000"/>
+              </a:lnSpc>
+              <a:spcBef>
+                <a:spcPts val="500"/>
+              </a:spcBef>
+              <a:buFont typeface="Arial" panose="020B0604020202020204" pitchFamily="34" charset="0"/>
+              <a:buChar char="•"/>
+              <a:defRPr sz="2000" kern="1200">
+                <a:solidFill>
+                  <a:schemeClr val="tx1"/>
+                </a:solidFill>
+                <a:latin typeface="+mn-lt"/>
+                <a:ea typeface="+mn-ea"/>
+                <a:cs typeface="+mn-cs"/>
+              </a:defRPr>
+            </a:lvl3pPr>
+            <a:lvl4pPr marL="1600200" indent="-228600" algn="l" defTabSz="914400" rtl="0" eaLnBrk="1" latinLnBrk="0" hangingPunct="1">
+              <a:lnSpc>
+                <a:spcPct val="90000"/>
+              </a:lnSpc>
+              <a:spcBef>
+                <a:spcPts val="500"/>
+              </a:spcBef>
+              <a:buFont typeface="Arial" panose="020B0604020202020204" pitchFamily="34" charset="0"/>
+              <a:buChar char="•"/>
+              <a:defRPr sz="1800" kern="1200">
+                <a:solidFill>
+                  <a:schemeClr val="tx1"/>
+                </a:solidFill>
+                <a:latin typeface="+mn-lt"/>
+                <a:ea typeface="+mn-ea"/>
+                <a:cs typeface="+mn-cs"/>
+              </a:defRPr>
+            </a:lvl4pPr>
+            <a:lvl5pPr marL="2057400" indent="-228600" algn="l" defTabSz="914400" rtl="0" eaLnBrk="1" latinLnBrk="0" hangingPunct="1">
+              <a:lnSpc>
+                <a:spcPct val="90000"/>
+              </a:lnSpc>
+              <a:spcBef>
+                <a:spcPts val="500"/>
+              </a:spcBef>
+              <a:buFont typeface="Arial" panose="020B0604020202020204" pitchFamily="34" charset="0"/>
+              <a:buChar char="•"/>
+              <a:defRPr sz="1800" kern="1200">
+                <a:solidFill>
+                  <a:schemeClr val="tx1"/>
+                </a:solidFill>
+                <a:latin typeface="+mn-lt"/>
+                <a:ea typeface="+mn-ea"/>
+                <a:cs typeface="+mn-cs"/>
+              </a:defRPr>
+            </a:lvl5pPr>
+            <a:lvl6pPr marL="2514600" indent="-228600" algn="l" defTabSz="914400" rtl="0" eaLnBrk="1" latinLnBrk="0" hangingPunct="1">
+              <a:lnSpc>
+                <a:spcPct val="90000"/>
+              </a:lnSpc>
+              <a:spcBef>
+                <a:spcPts val="500"/>
+              </a:spcBef>
+              <a:buFont typeface="Arial" panose="020B0604020202020204" pitchFamily="34" charset="0"/>
+              <a:buChar char="•"/>
+              <a:defRPr sz="1800" kern="1200">
+                <a:solidFill>
+                  <a:schemeClr val="tx1"/>
+                </a:solidFill>
+                <a:latin typeface="+mn-lt"/>
+                <a:ea typeface="+mn-ea"/>
+                <a:cs typeface="+mn-cs"/>
+              </a:defRPr>
+            </a:lvl6pPr>
+            <a:lvl7pPr marL="2971800" indent="-228600" algn="l" defTabSz="914400" rtl="0" eaLnBrk="1" latinLnBrk="0" hangingPunct="1">
+              <a:lnSpc>
+                <a:spcPct val="90000"/>
+              </a:lnSpc>
+              <a:spcBef>
+                <a:spcPts val="500"/>
+              </a:spcBef>
+              <a:buFont typeface="Arial" panose="020B0604020202020204" pitchFamily="34" charset="0"/>
+              <a:buChar char="•"/>
+              <a:defRPr sz="1800" kern="1200">
+                <a:solidFill>
+                  <a:schemeClr val="tx1"/>
+                </a:solidFill>
+                <a:latin typeface="+mn-lt"/>
+                <a:ea typeface="+mn-ea"/>
+                <a:cs typeface="+mn-cs"/>
+              </a:defRPr>
+            </a:lvl7pPr>
+            <a:lvl8pPr marL="3429000" indent="-228600" algn="l" defTabSz="914400" rtl="0" eaLnBrk="1" latinLnBrk="0" hangingPunct="1">
+              <a:lnSpc>
+                <a:spcPct val="90000"/>
+              </a:lnSpc>
+              <a:spcBef>
+                <a:spcPts val="500"/>
+              </a:spcBef>
+              <a:buFont typeface="Arial" panose="020B0604020202020204" pitchFamily="34" charset="0"/>
+              <a:buChar char="•"/>
+              <a:defRPr sz="1800" kern="1200">
+                <a:solidFill>
+                  <a:schemeClr val="tx1"/>
+                </a:solidFill>
+                <a:latin typeface="+mn-lt"/>
+                <a:ea typeface="+mn-ea"/>
+                <a:cs typeface="+mn-cs"/>
+              </a:defRPr>
+            </a:lvl8pPr>
+            <a:lvl9pPr marL="3886200" indent="-228600" algn="l" defTabSz="914400" rtl="0" eaLnBrk="1" latinLnBrk="0" hangingPunct="1">
+              <a:lnSpc>
+                <a:spcPct val="90000"/>
+              </a:lnSpc>
+              <a:spcBef>
+                <a:spcPts val="500"/>
+              </a:spcBef>
+              <a:buFont typeface="Arial" panose="020B0604020202020204" pitchFamily="34" charset="0"/>
+              <a:buChar char="•"/>
+              <a:defRPr sz="1800" kern="1200">
+                <a:solidFill>
+                  <a:schemeClr val="tx1"/>
+                </a:solidFill>
+                <a:latin typeface="+mn-lt"/>
+                <a:ea typeface="+mn-ea"/>
+                <a:cs typeface="+mn-cs"/>
+              </a:defRPr>
+            </a:lvl9pPr>
+          </a:lstStyle>
+          <a:p>
+            <a:pPr marL="0" indent="0">
+              <a:buNone/>
+            </a:pPr>
+            <a:r>
+              <a:rPr lang="en-001" dirty="0"/>
+              <a:t>Data Structure and Availability</a:t>
+            </a:r>
+          </a:p>
+        </p:txBody>
+      </p:sp>
+      <p:sp>
+        <p:nvSpPr>
+          <p:cNvPr id="18" name="Content Placeholder 2">
+            <a:extLst>
+              <a:ext uri="{FF2B5EF4-FFF2-40B4-BE49-F238E27FC236}">
+                <a16:creationId xmlns:a16="http://schemas.microsoft.com/office/drawing/2014/main" id="{B5319FEE-07F5-C94C-6D34-66DCEFBAC18C}"/>
+              </a:ext>
+            </a:extLst>
+          </p:cNvPr>
+          <p:cNvSpPr txBox="1">
+            <a:spLocks/>
+          </p:cNvSpPr>
+          <p:nvPr/>
+        </p:nvSpPr>
+        <p:spPr>
+          <a:xfrm>
+            <a:off x="6966857" y="3841748"/>
+            <a:ext cx="4622800" cy="1325563"/>
+          </a:xfrm>
+          <a:prstGeom prst="rect">
+            <a:avLst/>
+          </a:prstGeom>
+        </p:spPr>
+        <p:txBody>
+          <a:bodyPr vert="horz" lIns="91440" tIns="45720" rIns="91440" bIns="45720" rtlCol="0">
+            <a:noAutofit/>
+          </a:bodyPr>
+          <a:lstStyle>
+            <a:lvl1pPr marL="228600" indent="-228600">
+              <a:lnSpc>
+                <a:spcPct val="90000"/>
+              </a:lnSpc>
+              <a:spcBef>
+                <a:spcPts val="1000"/>
+              </a:spcBef>
+              <a:buFont typeface="Arial" panose="020B0604020202020204" pitchFamily="34" charset="0"/>
+              <a:buChar char="•"/>
+              <a:defRPr sz="2200"/>
+            </a:lvl1pPr>
+            <a:lvl2pPr marL="685800" indent="-228600">
+              <a:lnSpc>
+                <a:spcPct val="90000"/>
+              </a:lnSpc>
+              <a:spcBef>
+                <a:spcPts val="500"/>
+              </a:spcBef>
+              <a:buFont typeface="Arial" panose="020B0604020202020204" pitchFamily="34" charset="0"/>
+              <a:buChar char="•"/>
+              <a:defRPr sz="2400"/>
+            </a:lvl2pPr>
+            <a:lvl3pPr marL="1143000" indent="-228600">
+              <a:lnSpc>
+                <a:spcPct val="90000"/>
+              </a:lnSpc>
+              <a:spcBef>
+                <a:spcPts val="500"/>
+              </a:spcBef>
+              <a:buFont typeface="Arial" panose="020B0604020202020204" pitchFamily="34" charset="0"/>
+              <a:buChar char="•"/>
+              <a:defRPr sz="2000"/>
+            </a:lvl3pPr>
+            <a:lvl4pPr marL="1600200" indent="-228600">
+              <a:lnSpc>
+                <a:spcPct val="90000"/>
+              </a:lnSpc>
+              <a:spcBef>
+                <a:spcPts val="500"/>
+              </a:spcBef>
+              <a:buFont typeface="Arial" panose="020B0604020202020204" pitchFamily="34" charset="0"/>
+              <a:buChar char="•"/>
+            </a:lvl4pPr>
+            <a:lvl5pPr marL="2057400" indent="-228600">
+              <a:lnSpc>
+                <a:spcPct val="90000"/>
+              </a:lnSpc>
+              <a:spcBef>
+                <a:spcPts val="500"/>
+              </a:spcBef>
+              <a:buFont typeface="Arial" panose="020B0604020202020204" pitchFamily="34" charset="0"/>
+              <a:buChar char="•"/>
+            </a:lvl5pPr>
+            <a:lvl6pPr marL="2514600" indent="-228600">
+              <a:lnSpc>
+                <a:spcPct val="90000"/>
+              </a:lnSpc>
+              <a:spcBef>
+                <a:spcPts val="500"/>
+              </a:spcBef>
+              <a:buFont typeface="Arial" panose="020B0604020202020204" pitchFamily="34" charset="0"/>
+              <a:buChar char="•"/>
+            </a:lvl6pPr>
+            <a:lvl7pPr marL="2971800" indent="-228600">
+              <a:lnSpc>
+                <a:spcPct val="90000"/>
+              </a:lnSpc>
+              <a:spcBef>
+                <a:spcPts val="500"/>
+              </a:spcBef>
+              <a:buFont typeface="Arial" panose="020B0604020202020204" pitchFamily="34" charset="0"/>
+              <a:buChar char="•"/>
+            </a:lvl7pPr>
+            <a:lvl8pPr marL="3429000" indent="-228600">
+              <a:lnSpc>
+                <a:spcPct val="90000"/>
+              </a:lnSpc>
+              <a:spcBef>
+                <a:spcPts val="500"/>
+              </a:spcBef>
+              <a:buFont typeface="Arial" panose="020B0604020202020204" pitchFamily="34" charset="0"/>
+              <a:buChar char="•"/>
+            </a:lvl8pPr>
+            <a:lvl9pPr marL="3886200" indent="-228600">
+              <a:lnSpc>
+                <a:spcPct val="90000"/>
+              </a:lnSpc>
+              <a:spcBef>
+                <a:spcPts val="500"/>
+              </a:spcBef>
+              <a:buFont typeface="Arial" panose="020B0604020202020204" pitchFamily="34" charset="0"/>
+              <a:buChar char="•"/>
+            </a:lvl9pPr>
+          </a:lstStyle>
+          <a:p>
+            <a:r>
+              <a:rPr lang="en-001" dirty="0"/>
+              <a:t>Individual Mobility Data</a:t>
+            </a:r>
+          </a:p>
+          <a:p>
+            <a:pPr lvl="1"/>
+            <a:r>
+              <a:rPr lang="en-US" sz="2200" dirty="0"/>
+              <a:t>G</a:t>
+            </a:r>
+            <a:r>
+              <a:rPr lang="en-001" sz="2200" dirty="0"/>
+              <a:t>oogle timeline</a:t>
+            </a:r>
+          </a:p>
+          <a:p>
+            <a:r>
+              <a:rPr lang="en-001" dirty="0"/>
+              <a:t>Urban context Data</a:t>
+            </a:r>
+          </a:p>
+          <a:p>
+            <a:pPr lvl="1"/>
+            <a:r>
+              <a:rPr lang="en-001" sz="2200" dirty="0"/>
+              <a:t>OpenStreetMap</a:t>
+            </a:r>
+          </a:p>
+        </p:txBody>
+      </p:sp>
+      <p:sp>
+        <p:nvSpPr>
+          <p:cNvPr id="22" name="TextBox 21">
+            <a:extLst>
+              <a:ext uri="{FF2B5EF4-FFF2-40B4-BE49-F238E27FC236}">
+                <a16:creationId xmlns:a16="http://schemas.microsoft.com/office/drawing/2014/main" id="{C047BF9C-7A29-B9BC-5A4E-64513C37ED3E}"/>
+              </a:ext>
+            </a:extLst>
+          </p:cNvPr>
+          <p:cNvSpPr txBox="1"/>
+          <p:nvPr/>
+        </p:nvSpPr>
+        <p:spPr>
+          <a:xfrm>
+            <a:off x="5730982" y="1759118"/>
+            <a:ext cx="3179554" cy="369332"/>
+          </a:xfrm>
+          <a:prstGeom prst="rect">
+            <a:avLst/>
+          </a:prstGeom>
+          <a:noFill/>
+        </p:spPr>
+        <p:txBody>
+          <a:bodyPr wrap="square" rtlCol="0">
+            <a:spAutoFit/>
+          </a:bodyPr>
+          <a:lstStyle/>
+          <a:p>
+            <a:r>
+              <a:rPr lang="en-001" dirty="0"/>
+              <a:t>🏠 🛒🎓 💼🌳 🍽️ 🚉  🏥</a:t>
+            </a:r>
+          </a:p>
+        </p:txBody>
+      </p:sp>
+    </p:spTree>
+    <p:extLst>
+      <p:ext uri="{BB962C8B-B14F-4D97-AF65-F5344CB8AC3E}">
+        <p14:creationId xmlns:p14="http://schemas.microsoft.com/office/powerpoint/2010/main" val="2296812319"/>
+      </p:ext>
+    </p:extLst>
+  </p:cSld>
+  <p:clrMapOvr>
+    <a:masterClrMapping/>
+  </p:clrMapOvr>
+  <p:extLst>
+    <p:ext uri="{6950BFC3-D8DA-4A85-94F7-54DA5524770B}">
+      <p188:commentRel xmlns:p188="http://schemas.microsoft.com/office/powerpoint/2018/8/main" r:id="rId2"/>
+    </p:ext>
+  </p:extLst>
+</p:sld>
+</file>
+
+<file path=ppt/slides/slide3.xml><?xml version="1.0" encoding="utf-8"?>
 <p:sld xmlns:a="http://schemas.openxmlformats.org/drawingml/2006/main" xmlns:r="http://schemas.openxmlformats.org/officeDocument/2006/relationships" xmlns:p="http://schemas.openxmlformats.org/presentationml/2006/main">
   <p:cSld>
     <p:bg>
@@ -9183,12 +11128,18 @@
 </p:sld>
 </file>
 
-<file path=ppt/slides/slide3.xml><?xml version="1.0" encoding="utf-8"?>
+<file path=ppt/slides/slide4.xml><?xml version="1.0" encoding="utf-8"?>
 <p:sld xmlns:a="http://schemas.openxmlformats.org/drawingml/2006/main" xmlns:r="http://schemas.openxmlformats.org/officeDocument/2006/relationships" xmlns:p="http://schemas.openxmlformats.org/presentationml/2006/main">
   <p:cSld>
     <p:spTree>
       <p:nvGrpSpPr>
-        <p:cNvPr id="1" name=""/>
+        <p:cNvPr id="1" name="">
+          <a:extLst>
+            <a:ext uri="{FF2B5EF4-FFF2-40B4-BE49-F238E27FC236}">
+              <a16:creationId xmlns:a16="http://schemas.microsoft.com/office/drawing/2014/main" id="{D454DA82-47D2-51C6-A3D6-11A74E9A9A07}"/>
+            </a:ext>
+          </a:extLst>
+        </p:cNvPr>
         <p:cNvGrpSpPr/>
         <p:nvPr/>
       </p:nvGrpSpPr>
@@ -9202,10 +11153,62 @@
       </p:grpSpPr>
       <p:sp>
         <p:nvSpPr>
+          <p:cNvPr id="14" name="Rectangle 13">
+            <a:extLst>
+              <a:ext uri="{FF2B5EF4-FFF2-40B4-BE49-F238E27FC236}">
+                <a16:creationId xmlns:a16="http://schemas.microsoft.com/office/drawing/2014/main" id="{DEFCDC17-11EB-2D2C-FFDB-30F3F578D798}"/>
+              </a:ext>
+            </a:extLst>
+          </p:cNvPr>
+          <p:cNvSpPr/>
+          <p:nvPr/>
+        </p:nvSpPr>
+        <p:spPr>
+          <a:xfrm>
+            <a:off x="0" y="6098413"/>
+            <a:ext cx="12192000" cy="759587"/>
+          </a:xfrm>
+          <a:prstGeom prst="rect">
+            <a:avLst/>
+          </a:prstGeom>
+          <a:solidFill>
+            <a:srgbClr val="F4F4F4"/>
+          </a:solidFill>
+          <a:ln>
+            <a:noFill/>
+          </a:ln>
+        </p:spPr>
+        <p:style>
+          <a:lnRef idx="2">
+            <a:schemeClr val="accent1">
+              <a:shade val="15000"/>
+            </a:schemeClr>
+          </a:lnRef>
+          <a:fillRef idx="1">
+            <a:schemeClr val="accent1"/>
+          </a:fillRef>
+          <a:effectRef idx="0">
+            <a:schemeClr val="accent1"/>
+          </a:effectRef>
+          <a:fontRef idx="minor">
+            <a:schemeClr val="lt1"/>
+          </a:fontRef>
+        </p:style>
+        <p:txBody>
+          <a:bodyPr rtlCol="0" anchor="ctr"/>
+          <a:lstStyle/>
+          <a:p>
+            <a:pPr algn="ctr"/>
+            <a:endParaRPr lang="en-001"/>
+          </a:p>
+        </p:txBody>
+      </p:sp>
+      <p:sp>
+        <p:nvSpPr>
           <p:cNvPr id="2" name="Title 1">
             <a:extLst>
               <a:ext uri="{FF2B5EF4-FFF2-40B4-BE49-F238E27FC236}">
-                <a16:creationId xmlns:a16="http://schemas.microsoft.com/office/drawing/2014/main" id="{691DDAAE-2B35-42E0-7B02-6460B37FCB88}"/>
+                <a16:creationId xmlns:a16="http://schemas.microsoft.com/office/drawing/2014/main" id="{72FCEE1F-FE97-034F-EF16-9CE410CFD77C}"/>
               </a:ext>
             </a:extLst>
           </p:cNvPr>
@@ -9216,7 +11219,12 @@
             <p:ph type="title"/>
           </p:nvPr>
         </p:nvSpPr>
-        <p:spPr/>
+        <p:spPr>
+          <a:xfrm>
+            <a:off x="778198" y="281213"/>
+            <a:ext cx="7333342" cy="1325563"/>
+          </a:xfrm>
+        </p:spPr>
         <p:txBody>
           <a:bodyPr/>
           <a:lstStyle/>
@@ -9227,7 +11235,7 @@
             </a:r>
             <a:r>
               <a:rPr lang="fr-CH" dirty="0"/>
-              <a:t> </a:t>
+              <a:t> &amp; Project Intro</a:t>
             </a:r>
           </a:p>
         </p:txBody>
@@ -9237,7 +11245,7 @@
           <p:cNvPr id="3" name="Content Placeholder 2">
             <a:extLst>
               <a:ext uri="{FF2B5EF4-FFF2-40B4-BE49-F238E27FC236}">
-                <a16:creationId xmlns:a16="http://schemas.microsoft.com/office/drawing/2014/main" id="{FFD8EEBF-806F-63F6-BEF0-7ECC5BC92C92}"/>
+                <a16:creationId xmlns:a16="http://schemas.microsoft.com/office/drawing/2014/main" id="{77CF91B7-20C0-64E3-3C39-24123B078096}"/>
               </a:ext>
             </a:extLst>
           </p:cNvPr>
@@ -9248,19 +11256,2001 @@
             <p:ph idx="1"/>
           </p:nvPr>
         </p:nvSpPr>
-        <p:spPr/>
+        <p:spPr>
+          <a:xfrm>
+            <a:off x="367004" y="3429877"/>
+            <a:ext cx="3040743" cy="1325563"/>
+          </a:xfrm>
+        </p:spPr>
         <p:txBody>
-          <a:bodyPr/>
+          <a:bodyPr>
+            <a:normAutofit/>
+          </a:bodyPr>
           <a:lstStyle/>
           <a:p>
+            <a:r>
+              <a:rPr lang="en-001" sz="2200" dirty="0"/>
+              <a:t>urban planning</a:t>
+            </a:r>
+          </a:p>
+          <a:p>
+            <a:r>
+              <a:rPr lang="en-001" sz="2200" dirty="0"/>
+              <a:t>mobility analysis </a:t>
+            </a:r>
+          </a:p>
+          <a:p>
+            <a:r>
+              <a:rPr lang="en-001" sz="2200" dirty="0"/>
+              <a:t>accessibility</a:t>
+            </a:r>
+          </a:p>
+        </p:txBody>
+      </p:sp>
+      <p:sp>
+        <p:nvSpPr>
+          <p:cNvPr id="4" name="Content Placeholder 2">
+            <a:extLst>
+              <a:ext uri="{FF2B5EF4-FFF2-40B4-BE49-F238E27FC236}">
+                <a16:creationId xmlns:a16="http://schemas.microsoft.com/office/drawing/2014/main" id="{1CB79621-C30B-B1DE-1D8B-A8B276FF255C}"/>
+              </a:ext>
+            </a:extLst>
+          </p:cNvPr>
+          <p:cNvSpPr txBox="1">
+            <a:spLocks/>
+          </p:cNvSpPr>
+          <p:nvPr/>
+        </p:nvSpPr>
+        <p:spPr>
+          <a:xfrm>
+            <a:off x="3420446" y="3395637"/>
+            <a:ext cx="4298044" cy="2198491"/>
+          </a:xfrm>
+          <a:prstGeom prst="rect">
+            <a:avLst/>
+          </a:prstGeom>
+        </p:spPr>
+        <p:txBody>
+          <a:bodyPr vert="horz" lIns="91440" tIns="45720" rIns="91440" bIns="45720" rtlCol="0">
+            <a:normAutofit/>
+          </a:bodyPr>
+          <a:lstStyle>
+            <a:lvl1pPr marL="228600" indent="-228600">
+              <a:lnSpc>
+                <a:spcPct val="90000"/>
+              </a:lnSpc>
+              <a:spcBef>
+                <a:spcPts val="1000"/>
+              </a:spcBef>
+              <a:buFont typeface="Arial" panose="020B0604020202020204" pitchFamily="34" charset="0"/>
+              <a:buChar char="•"/>
+              <a:defRPr sz="2200"/>
+            </a:lvl1pPr>
+            <a:lvl2pPr marL="685800" indent="-228600">
+              <a:lnSpc>
+                <a:spcPct val="90000"/>
+              </a:lnSpc>
+              <a:spcBef>
+                <a:spcPts val="500"/>
+              </a:spcBef>
+              <a:buFont typeface="Arial" panose="020B0604020202020204" pitchFamily="34" charset="0"/>
+              <a:buChar char="•"/>
+              <a:defRPr sz="2400"/>
+            </a:lvl2pPr>
+            <a:lvl3pPr marL="1143000" indent="-228600">
+              <a:lnSpc>
+                <a:spcPct val="90000"/>
+              </a:lnSpc>
+              <a:spcBef>
+                <a:spcPts val="500"/>
+              </a:spcBef>
+              <a:buFont typeface="Arial" panose="020B0604020202020204" pitchFamily="34" charset="0"/>
+              <a:buChar char="•"/>
+              <a:defRPr sz="2000"/>
+            </a:lvl3pPr>
+            <a:lvl4pPr marL="1600200" indent="-228600">
+              <a:lnSpc>
+                <a:spcPct val="90000"/>
+              </a:lnSpc>
+              <a:spcBef>
+                <a:spcPts val="500"/>
+              </a:spcBef>
+              <a:buFont typeface="Arial" panose="020B0604020202020204" pitchFamily="34" charset="0"/>
+              <a:buChar char="•"/>
+            </a:lvl4pPr>
+            <a:lvl5pPr marL="2057400" indent="-228600">
+              <a:lnSpc>
+                <a:spcPct val="90000"/>
+              </a:lnSpc>
+              <a:spcBef>
+                <a:spcPts val="500"/>
+              </a:spcBef>
+              <a:buFont typeface="Arial" panose="020B0604020202020204" pitchFamily="34" charset="0"/>
+              <a:buChar char="•"/>
+            </a:lvl5pPr>
+            <a:lvl6pPr marL="2514600" indent="-228600">
+              <a:lnSpc>
+                <a:spcPct val="90000"/>
+              </a:lnSpc>
+              <a:spcBef>
+                <a:spcPts val="500"/>
+              </a:spcBef>
+              <a:buFont typeface="Arial" panose="020B0604020202020204" pitchFamily="34" charset="0"/>
+              <a:buChar char="•"/>
+            </a:lvl6pPr>
+            <a:lvl7pPr marL="2971800" indent="-228600">
+              <a:lnSpc>
+                <a:spcPct val="90000"/>
+              </a:lnSpc>
+              <a:spcBef>
+                <a:spcPts val="500"/>
+              </a:spcBef>
+              <a:buFont typeface="Arial" panose="020B0604020202020204" pitchFamily="34" charset="0"/>
+              <a:buChar char="•"/>
+            </a:lvl7pPr>
+            <a:lvl8pPr marL="3429000" indent="-228600">
+              <a:lnSpc>
+                <a:spcPct val="90000"/>
+              </a:lnSpc>
+              <a:spcBef>
+                <a:spcPts val="500"/>
+              </a:spcBef>
+              <a:buFont typeface="Arial" panose="020B0604020202020204" pitchFamily="34" charset="0"/>
+              <a:buChar char="•"/>
+            </a:lvl8pPr>
+            <a:lvl9pPr marL="3886200" indent="-228600">
+              <a:lnSpc>
+                <a:spcPct val="90000"/>
+              </a:lnSpc>
+              <a:spcBef>
+                <a:spcPts val="500"/>
+              </a:spcBef>
+              <a:buFont typeface="Arial" panose="020B0604020202020204" pitchFamily="34" charset="0"/>
+              <a:buChar char="•"/>
+            </a:lvl9pPr>
+          </a:lstStyle>
+          <a:p>
+            <a:pPr marL="0" indent="0">
+              <a:buNone/>
+            </a:pPr>
+            <a:r>
+              <a:rPr lang="fr-CH" dirty="0" err="1"/>
+              <a:t>We</a:t>
+            </a:r>
+            <a:r>
+              <a:rPr lang="fr-CH" dirty="0"/>
+              <a:t>  use </a:t>
+            </a:r>
+            <a:r>
+              <a:rPr lang="fr-CH" dirty="0" err="1"/>
+              <a:t>activity</a:t>
+            </a:r>
+            <a:r>
+              <a:rPr lang="fr-CH" dirty="0"/>
+              <a:t> </a:t>
+            </a:r>
+            <a:r>
+              <a:rPr lang="fr-CH" dirty="0" err="1"/>
+              <a:t>space</a:t>
+            </a:r>
+            <a:r>
+              <a:rPr lang="fr-CH" dirty="0"/>
+              <a:t> to  compare </a:t>
+            </a:r>
+            <a:r>
+              <a:rPr lang="fr-CH" dirty="0" err="1"/>
+              <a:t>theoretical</a:t>
+            </a:r>
+            <a:r>
+              <a:rPr lang="fr-CH" dirty="0"/>
+              <a:t> </a:t>
+            </a:r>
+            <a:r>
+              <a:rPr lang="fr-CH" dirty="0" err="1"/>
+              <a:t>accessibility</a:t>
+            </a:r>
+            <a:r>
+              <a:rPr lang="fr-CH" dirty="0"/>
+              <a:t> </a:t>
+            </a:r>
+            <a:r>
+              <a:rPr lang="fr-CH" dirty="0" err="1"/>
+              <a:t>with</a:t>
+            </a:r>
+            <a:r>
+              <a:rPr lang="fr-CH" dirty="0"/>
+              <a:t> </a:t>
+            </a:r>
+            <a:r>
+              <a:rPr lang="fr-CH" dirty="0" err="1"/>
+              <a:t>actual</a:t>
+            </a:r>
+            <a:r>
+              <a:rPr lang="fr-CH" dirty="0"/>
+              <a:t> </a:t>
+            </a:r>
+            <a:r>
+              <a:rPr lang="fr-CH" dirty="0" err="1"/>
+              <a:t>mobility</a:t>
+            </a:r>
+            <a:r>
+              <a:rPr lang="fr-CH" dirty="0"/>
+              <a:t> </a:t>
+            </a:r>
+            <a:r>
+              <a:rPr lang="fr-CH" dirty="0" err="1"/>
+              <a:t>behavior</a:t>
+            </a:r>
+            <a:r>
+              <a:rPr lang="fr-CH" dirty="0"/>
+              <a:t> </a:t>
+            </a:r>
+            <a:r>
+              <a:rPr lang="fr-CH" dirty="0" err="1"/>
+              <a:t>based</a:t>
+            </a:r>
+            <a:r>
+              <a:rPr lang="fr-CH" dirty="0"/>
+              <a:t> on the data </a:t>
+            </a:r>
+            <a:r>
+              <a:rPr lang="fr-CH" dirty="0" err="1"/>
+              <a:t>collected</a:t>
+            </a:r>
+            <a:r>
+              <a:rPr lang="fr-CH" dirty="0"/>
+              <a:t> </a:t>
+            </a:r>
+            <a:r>
+              <a:rPr lang="fr-CH" dirty="0" err="1"/>
+              <a:t>from</a:t>
+            </a:r>
+            <a:r>
+              <a:rPr lang="fr-CH" dirty="0"/>
+              <a:t> one </a:t>
+            </a:r>
+            <a:r>
+              <a:rPr lang="fr-CH" dirty="0" err="1"/>
+              <a:t>individual</a:t>
+            </a:r>
+            <a:r>
+              <a:rPr lang="fr-CH" dirty="0"/>
+              <a:t> living in Zurich</a:t>
+            </a:r>
+          </a:p>
+          <a:p>
+            <a:endParaRPr lang="en-001" dirty="0"/>
+          </a:p>
+          <a:p>
             <a:endParaRPr lang="fr-CH" dirty="0"/>
+          </a:p>
+        </p:txBody>
+      </p:sp>
+      <p:sp>
+        <p:nvSpPr>
+          <p:cNvPr id="7" name="Content Placeholder 2">
+            <a:extLst>
+              <a:ext uri="{FF2B5EF4-FFF2-40B4-BE49-F238E27FC236}">
+                <a16:creationId xmlns:a16="http://schemas.microsoft.com/office/drawing/2014/main" id="{C9A5FF8E-7674-3AE6-41C1-310DD46EEAF3}"/>
+              </a:ext>
+            </a:extLst>
+          </p:cNvPr>
+          <p:cNvSpPr txBox="1">
+            <a:spLocks/>
+          </p:cNvSpPr>
+          <p:nvPr/>
+        </p:nvSpPr>
+        <p:spPr>
+          <a:xfrm>
+            <a:off x="367004" y="1398190"/>
+            <a:ext cx="7333343" cy="587693"/>
+          </a:xfrm>
+          <a:prstGeom prst="rect">
+            <a:avLst/>
+          </a:prstGeom>
+        </p:spPr>
+        <p:txBody>
+          <a:bodyPr vert="horz" lIns="91440" tIns="45720" rIns="91440" bIns="45720" rtlCol="0">
+            <a:normAutofit/>
+          </a:bodyPr>
+          <a:lstStyle>
+            <a:lvl1pPr marL="228600" indent="-228600" algn="l" defTabSz="914400" rtl="0" eaLnBrk="1" latinLnBrk="0" hangingPunct="1">
+              <a:lnSpc>
+                <a:spcPct val="90000"/>
+              </a:lnSpc>
+              <a:spcBef>
+                <a:spcPts val="1000"/>
+              </a:spcBef>
+              <a:buFont typeface="Arial" panose="020B0604020202020204" pitchFamily="34" charset="0"/>
+              <a:buChar char="•"/>
+              <a:defRPr sz="2800" kern="1200">
+                <a:solidFill>
+                  <a:schemeClr val="tx1"/>
+                </a:solidFill>
+                <a:latin typeface="+mn-lt"/>
+                <a:ea typeface="+mn-ea"/>
+                <a:cs typeface="+mn-cs"/>
+              </a:defRPr>
+            </a:lvl1pPr>
+            <a:lvl2pPr marL="685800" indent="-228600" algn="l" defTabSz="914400" rtl="0" eaLnBrk="1" latinLnBrk="0" hangingPunct="1">
+              <a:lnSpc>
+                <a:spcPct val="90000"/>
+              </a:lnSpc>
+              <a:spcBef>
+                <a:spcPts val="500"/>
+              </a:spcBef>
+              <a:buFont typeface="Arial" panose="020B0604020202020204" pitchFamily="34" charset="0"/>
+              <a:buChar char="•"/>
+              <a:defRPr sz="2400" kern="1200">
+                <a:solidFill>
+                  <a:schemeClr val="tx1"/>
+                </a:solidFill>
+                <a:latin typeface="+mn-lt"/>
+                <a:ea typeface="+mn-ea"/>
+                <a:cs typeface="+mn-cs"/>
+              </a:defRPr>
+            </a:lvl2pPr>
+            <a:lvl3pPr marL="1143000" indent="-228600" algn="l" defTabSz="914400" rtl="0" eaLnBrk="1" latinLnBrk="0" hangingPunct="1">
+              <a:lnSpc>
+                <a:spcPct val="90000"/>
+              </a:lnSpc>
+              <a:spcBef>
+                <a:spcPts val="500"/>
+              </a:spcBef>
+              <a:buFont typeface="Arial" panose="020B0604020202020204" pitchFamily="34" charset="0"/>
+              <a:buChar char="•"/>
+              <a:defRPr sz="2000" kern="1200">
+                <a:solidFill>
+                  <a:schemeClr val="tx1"/>
+                </a:solidFill>
+                <a:latin typeface="+mn-lt"/>
+                <a:ea typeface="+mn-ea"/>
+                <a:cs typeface="+mn-cs"/>
+              </a:defRPr>
+            </a:lvl3pPr>
+            <a:lvl4pPr marL="1600200" indent="-228600" algn="l" defTabSz="914400" rtl="0" eaLnBrk="1" latinLnBrk="0" hangingPunct="1">
+              <a:lnSpc>
+                <a:spcPct val="90000"/>
+              </a:lnSpc>
+              <a:spcBef>
+                <a:spcPts val="500"/>
+              </a:spcBef>
+              <a:buFont typeface="Arial" panose="020B0604020202020204" pitchFamily="34" charset="0"/>
+              <a:buChar char="•"/>
+              <a:defRPr sz="1800" kern="1200">
+                <a:solidFill>
+                  <a:schemeClr val="tx1"/>
+                </a:solidFill>
+                <a:latin typeface="+mn-lt"/>
+                <a:ea typeface="+mn-ea"/>
+                <a:cs typeface="+mn-cs"/>
+              </a:defRPr>
+            </a:lvl4pPr>
+            <a:lvl5pPr marL="2057400" indent="-228600" algn="l" defTabSz="914400" rtl="0" eaLnBrk="1" latinLnBrk="0" hangingPunct="1">
+              <a:lnSpc>
+                <a:spcPct val="90000"/>
+              </a:lnSpc>
+              <a:spcBef>
+                <a:spcPts val="500"/>
+              </a:spcBef>
+              <a:buFont typeface="Arial" panose="020B0604020202020204" pitchFamily="34" charset="0"/>
+              <a:buChar char="•"/>
+              <a:defRPr sz="1800" kern="1200">
+                <a:solidFill>
+                  <a:schemeClr val="tx1"/>
+                </a:solidFill>
+                <a:latin typeface="+mn-lt"/>
+                <a:ea typeface="+mn-ea"/>
+                <a:cs typeface="+mn-cs"/>
+              </a:defRPr>
+            </a:lvl5pPr>
+            <a:lvl6pPr marL="2514600" indent="-228600" algn="l" defTabSz="914400" rtl="0" eaLnBrk="1" latinLnBrk="0" hangingPunct="1">
+              <a:lnSpc>
+                <a:spcPct val="90000"/>
+              </a:lnSpc>
+              <a:spcBef>
+                <a:spcPts val="500"/>
+              </a:spcBef>
+              <a:buFont typeface="Arial" panose="020B0604020202020204" pitchFamily="34" charset="0"/>
+              <a:buChar char="•"/>
+              <a:defRPr sz="1800" kern="1200">
+                <a:solidFill>
+                  <a:schemeClr val="tx1"/>
+                </a:solidFill>
+                <a:latin typeface="+mn-lt"/>
+                <a:ea typeface="+mn-ea"/>
+                <a:cs typeface="+mn-cs"/>
+              </a:defRPr>
+            </a:lvl6pPr>
+            <a:lvl7pPr marL="2971800" indent="-228600" algn="l" defTabSz="914400" rtl="0" eaLnBrk="1" latinLnBrk="0" hangingPunct="1">
+              <a:lnSpc>
+                <a:spcPct val="90000"/>
+              </a:lnSpc>
+              <a:spcBef>
+                <a:spcPts val="500"/>
+              </a:spcBef>
+              <a:buFont typeface="Arial" panose="020B0604020202020204" pitchFamily="34" charset="0"/>
+              <a:buChar char="•"/>
+              <a:defRPr sz="1800" kern="1200">
+                <a:solidFill>
+                  <a:schemeClr val="tx1"/>
+                </a:solidFill>
+                <a:latin typeface="+mn-lt"/>
+                <a:ea typeface="+mn-ea"/>
+                <a:cs typeface="+mn-cs"/>
+              </a:defRPr>
+            </a:lvl7pPr>
+            <a:lvl8pPr marL="3429000" indent="-228600" algn="l" defTabSz="914400" rtl="0" eaLnBrk="1" latinLnBrk="0" hangingPunct="1">
+              <a:lnSpc>
+                <a:spcPct val="90000"/>
+              </a:lnSpc>
+              <a:spcBef>
+                <a:spcPts val="500"/>
+              </a:spcBef>
+              <a:buFont typeface="Arial" panose="020B0604020202020204" pitchFamily="34" charset="0"/>
+              <a:buChar char="•"/>
+              <a:defRPr sz="1800" kern="1200">
+                <a:solidFill>
+                  <a:schemeClr val="tx1"/>
+                </a:solidFill>
+                <a:latin typeface="+mn-lt"/>
+                <a:ea typeface="+mn-ea"/>
+                <a:cs typeface="+mn-cs"/>
+              </a:defRPr>
+            </a:lvl8pPr>
+            <a:lvl9pPr marL="3886200" indent="-228600" algn="l" defTabSz="914400" rtl="0" eaLnBrk="1" latinLnBrk="0" hangingPunct="1">
+              <a:lnSpc>
+                <a:spcPct val="90000"/>
+              </a:lnSpc>
+              <a:spcBef>
+                <a:spcPts val="500"/>
+              </a:spcBef>
+              <a:buFont typeface="Arial" panose="020B0604020202020204" pitchFamily="34" charset="0"/>
+              <a:buChar char="•"/>
+              <a:defRPr sz="1800" kern="1200">
+                <a:solidFill>
+                  <a:schemeClr val="tx1"/>
+                </a:solidFill>
+                <a:latin typeface="+mn-lt"/>
+                <a:ea typeface="+mn-ea"/>
+                <a:cs typeface="+mn-cs"/>
+              </a:defRPr>
+            </a:lvl9pPr>
+          </a:lstStyle>
+          <a:p>
+            <a:pPr marL="0" indent="0">
+              <a:buNone/>
+            </a:pPr>
+            <a:r>
+              <a:rPr lang="en-001" dirty="0">
+                <a:solidFill>
+                  <a:srgbClr val="98B2CB"/>
+                </a:solidFill>
+              </a:rPr>
+              <a:t>What is a 15-minute city ? </a:t>
+            </a:r>
+          </a:p>
+        </p:txBody>
+      </p:sp>
+      <p:sp>
+        <p:nvSpPr>
+          <p:cNvPr id="9" name="TextBox 8">
+            <a:extLst>
+              <a:ext uri="{FF2B5EF4-FFF2-40B4-BE49-F238E27FC236}">
+                <a16:creationId xmlns:a16="http://schemas.microsoft.com/office/drawing/2014/main" id="{4AE62CEF-6E98-95BB-232D-F5395E72B50E}"/>
+              </a:ext>
+            </a:extLst>
+          </p:cNvPr>
+          <p:cNvSpPr txBox="1"/>
+          <p:nvPr/>
+        </p:nvSpPr>
+        <p:spPr>
+          <a:xfrm>
+            <a:off x="567871" y="6185818"/>
+            <a:ext cx="11056257" cy="523220"/>
+          </a:xfrm>
+          <a:prstGeom prst="rect">
+            <a:avLst/>
+          </a:prstGeom>
+          <a:noFill/>
+        </p:spPr>
+        <p:txBody>
+          <a:bodyPr wrap="square">
+            <a:spAutoFit/>
+          </a:bodyPr>
+          <a:lstStyle/>
+          <a:p>
+            <a:r>
+              <a:rPr lang="en-001" sz="1400" dirty="0"/>
+              <a:t>Moreno, C., Allam, Z., Chabaud, D., Gall, C., &amp; Pratlong, F. (2021). Introducing the “15-Minute City”: Sustainability, resilience and place identity in future post-pandemic cities. </a:t>
+            </a:r>
+            <a:r>
+              <a:rPr lang="en-001" sz="1400" i="1" dirty="0"/>
+              <a:t>Smart Cities, 4</a:t>
+            </a:r>
+            <a:r>
+              <a:rPr lang="en-001" sz="1400" dirty="0"/>
+              <a:t>(1), 93–111. </a:t>
+            </a:r>
+            <a:r>
+              <a:rPr lang="en-001" sz="1400" dirty="0">
+                <a:hlinkClick r:id="rId3"/>
+              </a:rPr>
+              <a:t>https://doi.org/10.3390/smartcities4010006</a:t>
+            </a:r>
+            <a:endParaRPr lang="en-001" sz="1400" dirty="0"/>
+          </a:p>
+        </p:txBody>
+      </p:sp>
+      <p:sp>
+        <p:nvSpPr>
+          <p:cNvPr id="10" name="Content Placeholder 2">
+            <a:extLst>
+              <a:ext uri="{FF2B5EF4-FFF2-40B4-BE49-F238E27FC236}">
+                <a16:creationId xmlns:a16="http://schemas.microsoft.com/office/drawing/2014/main" id="{7A66A455-70CD-000A-B3F6-D11802F3E145}"/>
+              </a:ext>
+            </a:extLst>
+          </p:cNvPr>
+          <p:cNvSpPr txBox="1">
+            <a:spLocks/>
+          </p:cNvSpPr>
+          <p:nvPr/>
+        </p:nvSpPr>
+        <p:spPr>
+          <a:xfrm>
+            <a:off x="348213" y="1871007"/>
+            <a:ext cx="11328529" cy="1151383"/>
+          </a:xfrm>
+          <a:prstGeom prst="rect">
+            <a:avLst/>
+          </a:prstGeom>
+        </p:spPr>
+        <p:txBody>
+          <a:bodyPr vert="horz" lIns="91440" tIns="45720" rIns="91440" bIns="45720" rtlCol="0">
+            <a:normAutofit/>
+          </a:bodyPr>
+          <a:lstStyle>
+            <a:lvl1pPr marL="228600" indent="-228600" algn="l" defTabSz="914400" rtl="0" eaLnBrk="1" latinLnBrk="0" hangingPunct="1">
+              <a:lnSpc>
+                <a:spcPct val="90000"/>
+              </a:lnSpc>
+              <a:spcBef>
+                <a:spcPts val="1000"/>
+              </a:spcBef>
+              <a:buFont typeface="Arial" panose="020B0604020202020204" pitchFamily="34" charset="0"/>
+              <a:buChar char="•"/>
+              <a:defRPr sz="2800" kern="1200">
+                <a:solidFill>
+                  <a:schemeClr val="tx1"/>
+                </a:solidFill>
+                <a:latin typeface="+mn-lt"/>
+                <a:ea typeface="+mn-ea"/>
+                <a:cs typeface="+mn-cs"/>
+              </a:defRPr>
+            </a:lvl1pPr>
+            <a:lvl2pPr marL="685800" indent="-228600" algn="l" defTabSz="914400" rtl="0" eaLnBrk="1" latinLnBrk="0" hangingPunct="1">
+              <a:lnSpc>
+                <a:spcPct val="90000"/>
+              </a:lnSpc>
+              <a:spcBef>
+                <a:spcPts val="500"/>
+              </a:spcBef>
+              <a:buFont typeface="Arial" panose="020B0604020202020204" pitchFamily="34" charset="0"/>
+              <a:buChar char="•"/>
+              <a:defRPr sz="2400" kern="1200">
+                <a:solidFill>
+                  <a:schemeClr val="tx1"/>
+                </a:solidFill>
+                <a:latin typeface="+mn-lt"/>
+                <a:ea typeface="+mn-ea"/>
+                <a:cs typeface="+mn-cs"/>
+              </a:defRPr>
+            </a:lvl2pPr>
+            <a:lvl3pPr marL="1143000" indent="-228600" algn="l" defTabSz="914400" rtl="0" eaLnBrk="1" latinLnBrk="0" hangingPunct="1">
+              <a:lnSpc>
+                <a:spcPct val="90000"/>
+              </a:lnSpc>
+              <a:spcBef>
+                <a:spcPts val="500"/>
+              </a:spcBef>
+              <a:buFont typeface="Arial" panose="020B0604020202020204" pitchFamily="34" charset="0"/>
+              <a:buChar char="•"/>
+              <a:defRPr sz="2000" kern="1200">
+                <a:solidFill>
+                  <a:schemeClr val="tx1"/>
+                </a:solidFill>
+                <a:latin typeface="+mn-lt"/>
+                <a:ea typeface="+mn-ea"/>
+                <a:cs typeface="+mn-cs"/>
+              </a:defRPr>
+            </a:lvl3pPr>
+            <a:lvl4pPr marL="1600200" indent="-228600" algn="l" defTabSz="914400" rtl="0" eaLnBrk="1" latinLnBrk="0" hangingPunct="1">
+              <a:lnSpc>
+                <a:spcPct val="90000"/>
+              </a:lnSpc>
+              <a:spcBef>
+                <a:spcPts val="500"/>
+              </a:spcBef>
+              <a:buFont typeface="Arial" panose="020B0604020202020204" pitchFamily="34" charset="0"/>
+              <a:buChar char="•"/>
+              <a:defRPr sz="1800" kern="1200">
+                <a:solidFill>
+                  <a:schemeClr val="tx1"/>
+                </a:solidFill>
+                <a:latin typeface="+mn-lt"/>
+                <a:ea typeface="+mn-ea"/>
+                <a:cs typeface="+mn-cs"/>
+              </a:defRPr>
+            </a:lvl4pPr>
+            <a:lvl5pPr marL="2057400" indent="-228600" algn="l" defTabSz="914400" rtl="0" eaLnBrk="1" latinLnBrk="0" hangingPunct="1">
+              <a:lnSpc>
+                <a:spcPct val="90000"/>
+              </a:lnSpc>
+              <a:spcBef>
+                <a:spcPts val="500"/>
+              </a:spcBef>
+              <a:buFont typeface="Arial" panose="020B0604020202020204" pitchFamily="34" charset="0"/>
+              <a:buChar char="•"/>
+              <a:defRPr sz="1800" kern="1200">
+                <a:solidFill>
+                  <a:schemeClr val="tx1"/>
+                </a:solidFill>
+                <a:latin typeface="+mn-lt"/>
+                <a:ea typeface="+mn-ea"/>
+                <a:cs typeface="+mn-cs"/>
+              </a:defRPr>
+            </a:lvl5pPr>
+            <a:lvl6pPr marL="2514600" indent="-228600" algn="l" defTabSz="914400" rtl="0" eaLnBrk="1" latinLnBrk="0" hangingPunct="1">
+              <a:lnSpc>
+                <a:spcPct val="90000"/>
+              </a:lnSpc>
+              <a:spcBef>
+                <a:spcPts val="500"/>
+              </a:spcBef>
+              <a:buFont typeface="Arial" panose="020B0604020202020204" pitchFamily="34" charset="0"/>
+              <a:buChar char="•"/>
+              <a:defRPr sz="1800" kern="1200">
+                <a:solidFill>
+                  <a:schemeClr val="tx1"/>
+                </a:solidFill>
+                <a:latin typeface="+mn-lt"/>
+                <a:ea typeface="+mn-ea"/>
+                <a:cs typeface="+mn-cs"/>
+              </a:defRPr>
+            </a:lvl6pPr>
+            <a:lvl7pPr marL="2971800" indent="-228600" algn="l" defTabSz="914400" rtl="0" eaLnBrk="1" latinLnBrk="0" hangingPunct="1">
+              <a:lnSpc>
+                <a:spcPct val="90000"/>
+              </a:lnSpc>
+              <a:spcBef>
+                <a:spcPts val="500"/>
+              </a:spcBef>
+              <a:buFont typeface="Arial" panose="020B0604020202020204" pitchFamily="34" charset="0"/>
+              <a:buChar char="•"/>
+              <a:defRPr sz="1800" kern="1200">
+                <a:solidFill>
+                  <a:schemeClr val="tx1"/>
+                </a:solidFill>
+                <a:latin typeface="+mn-lt"/>
+                <a:ea typeface="+mn-ea"/>
+                <a:cs typeface="+mn-cs"/>
+              </a:defRPr>
+            </a:lvl7pPr>
+            <a:lvl8pPr marL="3429000" indent="-228600" algn="l" defTabSz="914400" rtl="0" eaLnBrk="1" latinLnBrk="0" hangingPunct="1">
+              <a:lnSpc>
+                <a:spcPct val="90000"/>
+              </a:lnSpc>
+              <a:spcBef>
+                <a:spcPts val="500"/>
+              </a:spcBef>
+              <a:buFont typeface="Arial" panose="020B0604020202020204" pitchFamily="34" charset="0"/>
+              <a:buChar char="•"/>
+              <a:defRPr sz="1800" kern="1200">
+                <a:solidFill>
+                  <a:schemeClr val="tx1"/>
+                </a:solidFill>
+                <a:latin typeface="+mn-lt"/>
+                <a:ea typeface="+mn-ea"/>
+                <a:cs typeface="+mn-cs"/>
+              </a:defRPr>
+            </a:lvl8pPr>
+            <a:lvl9pPr marL="3886200" indent="-228600" algn="l" defTabSz="914400" rtl="0" eaLnBrk="1" latinLnBrk="0" hangingPunct="1">
+              <a:lnSpc>
+                <a:spcPct val="90000"/>
+              </a:lnSpc>
+              <a:spcBef>
+                <a:spcPts val="500"/>
+              </a:spcBef>
+              <a:buFont typeface="Arial" panose="020B0604020202020204" pitchFamily="34" charset="0"/>
+              <a:buChar char="•"/>
+              <a:defRPr sz="1800" kern="1200">
+                <a:solidFill>
+                  <a:schemeClr val="tx1"/>
+                </a:solidFill>
+                <a:latin typeface="+mn-lt"/>
+                <a:ea typeface="+mn-ea"/>
+                <a:cs typeface="+mn-cs"/>
+              </a:defRPr>
+            </a:lvl9pPr>
+          </a:lstStyle>
+          <a:p>
+            <a:pPr marL="0" indent="0">
+              <a:buNone/>
+            </a:pPr>
+            <a:r>
+              <a:rPr lang="en-001" sz="2200" dirty="0"/>
+              <a:t>A city where residents can meet most of their everyday needs within a 15-minute walk or bike ride from their home, reducing dependence on cars and improving urban sustainability and quality of life.</a:t>
+            </a:r>
+            <a:r>
+              <a:rPr lang="fr-CH" sz="2200" dirty="0"/>
+              <a:t> </a:t>
+            </a:r>
+          </a:p>
+        </p:txBody>
+      </p:sp>
+      <p:sp>
+        <p:nvSpPr>
+          <p:cNvPr id="12" name="Content Placeholder 2">
+            <a:extLst>
+              <a:ext uri="{FF2B5EF4-FFF2-40B4-BE49-F238E27FC236}">
+                <a16:creationId xmlns:a16="http://schemas.microsoft.com/office/drawing/2014/main" id="{FBE16033-5143-5AF8-D8E5-E6C66C35CF34}"/>
+              </a:ext>
+            </a:extLst>
+          </p:cNvPr>
+          <p:cNvSpPr txBox="1">
+            <a:spLocks/>
+          </p:cNvSpPr>
+          <p:nvPr/>
+        </p:nvSpPr>
+        <p:spPr>
+          <a:xfrm>
+            <a:off x="302710" y="2964574"/>
+            <a:ext cx="3135248" cy="587693"/>
+          </a:xfrm>
+          <a:prstGeom prst="rect">
+            <a:avLst/>
+          </a:prstGeom>
+        </p:spPr>
+        <p:txBody>
+          <a:bodyPr vert="horz" lIns="91440" tIns="45720" rIns="91440" bIns="45720" rtlCol="0">
+            <a:normAutofit/>
+          </a:bodyPr>
+          <a:lstStyle>
+            <a:lvl1pPr marL="228600" indent="-228600" algn="l" defTabSz="914400" rtl="0" eaLnBrk="1" latinLnBrk="0" hangingPunct="1">
+              <a:lnSpc>
+                <a:spcPct val="90000"/>
+              </a:lnSpc>
+              <a:spcBef>
+                <a:spcPts val="1000"/>
+              </a:spcBef>
+              <a:buFont typeface="Arial" panose="020B0604020202020204" pitchFamily="34" charset="0"/>
+              <a:buChar char="•"/>
+              <a:defRPr sz="2800" kern="1200">
+                <a:solidFill>
+                  <a:schemeClr val="tx1"/>
+                </a:solidFill>
+                <a:latin typeface="+mn-lt"/>
+                <a:ea typeface="+mn-ea"/>
+                <a:cs typeface="+mn-cs"/>
+              </a:defRPr>
+            </a:lvl1pPr>
+            <a:lvl2pPr marL="685800" indent="-228600" algn="l" defTabSz="914400" rtl="0" eaLnBrk="1" latinLnBrk="0" hangingPunct="1">
+              <a:lnSpc>
+                <a:spcPct val="90000"/>
+              </a:lnSpc>
+              <a:spcBef>
+                <a:spcPts val="500"/>
+              </a:spcBef>
+              <a:buFont typeface="Arial" panose="020B0604020202020204" pitchFamily="34" charset="0"/>
+              <a:buChar char="•"/>
+              <a:defRPr sz="2400" kern="1200">
+                <a:solidFill>
+                  <a:schemeClr val="tx1"/>
+                </a:solidFill>
+                <a:latin typeface="+mn-lt"/>
+                <a:ea typeface="+mn-ea"/>
+                <a:cs typeface="+mn-cs"/>
+              </a:defRPr>
+            </a:lvl2pPr>
+            <a:lvl3pPr marL="1143000" indent="-228600" algn="l" defTabSz="914400" rtl="0" eaLnBrk="1" latinLnBrk="0" hangingPunct="1">
+              <a:lnSpc>
+                <a:spcPct val="90000"/>
+              </a:lnSpc>
+              <a:spcBef>
+                <a:spcPts val="500"/>
+              </a:spcBef>
+              <a:buFont typeface="Arial" panose="020B0604020202020204" pitchFamily="34" charset="0"/>
+              <a:buChar char="•"/>
+              <a:defRPr sz="2000" kern="1200">
+                <a:solidFill>
+                  <a:schemeClr val="tx1"/>
+                </a:solidFill>
+                <a:latin typeface="+mn-lt"/>
+                <a:ea typeface="+mn-ea"/>
+                <a:cs typeface="+mn-cs"/>
+              </a:defRPr>
+            </a:lvl3pPr>
+            <a:lvl4pPr marL="1600200" indent="-228600" algn="l" defTabSz="914400" rtl="0" eaLnBrk="1" latinLnBrk="0" hangingPunct="1">
+              <a:lnSpc>
+                <a:spcPct val="90000"/>
+              </a:lnSpc>
+              <a:spcBef>
+                <a:spcPts val="500"/>
+              </a:spcBef>
+              <a:buFont typeface="Arial" panose="020B0604020202020204" pitchFamily="34" charset="0"/>
+              <a:buChar char="•"/>
+              <a:defRPr sz="1800" kern="1200">
+                <a:solidFill>
+                  <a:schemeClr val="tx1"/>
+                </a:solidFill>
+                <a:latin typeface="+mn-lt"/>
+                <a:ea typeface="+mn-ea"/>
+                <a:cs typeface="+mn-cs"/>
+              </a:defRPr>
+            </a:lvl4pPr>
+            <a:lvl5pPr marL="2057400" indent="-228600" algn="l" defTabSz="914400" rtl="0" eaLnBrk="1" latinLnBrk="0" hangingPunct="1">
+              <a:lnSpc>
+                <a:spcPct val="90000"/>
+              </a:lnSpc>
+              <a:spcBef>
+                <a:spcPts val="500"/>
+              </a:spcBef>
+              <a:buFont typeface="Arial" panose="020B0604020202020204" pitchFamily="34" charset="0"/>
+              <a:buChar char="•"/>
+              <a:defRPr sz="1800" kern="1200">
+                <a:solidFill>
+                  <a:schemeClr val="tx1"/>
+                </a:solidFill>
+                <a:latin typeface="+mn-lt"/>
+                <a:ea typeface="+mn-ea"/>
+                <a:cs typeface="+mn-cs"/>
+              </a:defRPr>
+            </a:lvl5pPr>
+            <a:lvl6pPr marL="2514600" indent="-228600" algn="l" defTabSz="914400" rtl="0" eaLnBrk="1" latinLnBrk="0" hangingPunct="1">
+              <a:lnSpc>
+                <a:spcPct val="90000"/>
+              </a:lnSpc>
+              <a:spcBef>
+                <a:spcPts val="500"/>
+              </a:spcBef>
+              <a:buFont typeface="Arial" panose="020B0604020202020204" pitchFamily="34" charset="0"/>
+              <a:buChar char="•"/>
+              <a:defRPr sz="1800" kern="1200">
+                <a:solidFill>
+                  <a:schemeClr val="tx1"/>
+                </a:solidFill>
+                <a:latin typeface="+mn-lt"/>
+                <a:ea typeface="+mn-ea"/>
+                <a:cs typeface="+mn-cs"/>
+              </a:defRPr>
+            </a:lvl6pPr>
+            <a:lvl7pPr marL="2971800" indent="-228600" algn="l" defTabSz="914400" rtl="0" eaLnBrk="1" latinLnBrk="0" hangingPunct="1">
+              <a:lnSpc>
+                <a:spcPct val="90000"/>
+              </a:lnSpc>
+              <a:spcBef>
+                <a:spcPts val="500"/>
+              </a:spcBef>
+              <a:buFont typeface="Arial" panose="020B0604020202020204" pitchFamily="34" charset="0"/>
+              <a:buChar char="•"/>
+              <a:defRPr sz="1800" kern="1200">
+                <a:solidFill>
+                  <a:schemeClr val="tx1"/>
+                </a:solidFill>
+                <a:latin typeface="+mn-lt"/>
+                <a:ea typeface="+mn-ea"/>
+                <a:cs typeface="+mn-cs"/>
+              </a:defRPr>
+            </a:lvl7pPr>
+            <a:lvl8pPr marL="3429000" indent="-228600" algn="l" defTabSz="914400" rtl="0" eaLnBrk="1" latinLnBrk="0" hangingPunct="1">
+              <a:lnSpc>
+                <a:spcPct val="90000"/>
+              </a:lnSpc>
+              <a:spcBef>
+                <a:spcPts val="500"/>
+              </a:spcBef>
+              <a:buFont typeface="Arial" panose="020B0604020202020204" pitchFamily="34" charset="0"/>
+              <a:buChar char="•"/>
+              <a:defRPr sz="1800" kern="1200">
+                <a:solidFill>
+                  <a:schemeClr val="tx1"/>
+                </a:solidFill>
+                <a:latin typeface="+mn-lt"/>
+                <a:ea typeface="+mn-ea"/>
+                <a:cs typeface="+mn-cs"/>
+              </a:defRPr>
+            </a:lvl8pPr>
+            <a:lvl9pPr marL="3886200" indent="-228600" algn="l" defTabSz="914400" rtl="0" eaLnBrk="1" latinLnBrk="0" hangingPunct="1">
+              <a:lnSpc>
+                <a:spcPct val="90000"/>
+              </a:lnSpc>
+              <a:spcBef>
+                <a:spcPts val="500"/>
+              </a:spcBef>
+              <a:buFont typeface="Arial" panose="020B0604020202020204" pitchFamily="34" charset="0"/>
+              <a:buChar char="•"/>
+              <a:defRPr sz="1800" kern="1200">
+                <a:solidFill>
+                  <a:schemeClr val="tx1"/>
+                </a:solidFill>
+                <a:latin typeface="+mn-lt"/>
+                <a:ea typeface="+mn-ea"/>
+                <a:cs typeface="+mn-cs"/>
+              </a:defRPr>
+            </a:lvl9pPr>
+          </a:lstStyle>
+          <a:p>
+            <a:pPr marL="0" indent="0">
+              <a:buNone/>
+            </a:pPr>
+            <a:r>
+              <a:rPr lang="en-001" dirty="0">
+                <a:solidFill>
+                  <a:srgbClr val="98B2CB"/>
+                </a:solidFill>
+              </a:rPr>
+              <a:t>Application Area</a:t>
+            </a:r>
+          </a:p>
+        </p:txBody>
+      </p:sp>
+      <p:sp>
+        <p:nvSpPr>
+          <p:cNvPr id="13" name="Content Placeholder 2">
+            <a:extLst>
+              <a:ext uri="{FF2B5EF4-FFF2-40B4-BE49-F238E27FC236}">
+                <a16:creationId xmlns:a16="http://schemas.microsoft.com/office/drawing/2014/main" id="{E24C2CE8-7351-DBCA-1961-356E8BF63419}"/>
+              </a:ext>
+            </a:extLst>
+          </p:cNvPr>
+          <p:cNvSpPr txBox="1">
+            <a:spLocks/>
+          </p:cNvSpPr>
+          <p:nvPr/>
+        </p:nvSpPr>
+        <p:spPr>
+          <a:xfrm>
+            <a:off x="3420446" y="2967270"/>
+            <a:ext cx="3437076" cy="587693"/>
+          </a:xfrm>
+          <a:prstGeom prst="rect">
+            <a:avLst/>
+          </a:prstGeom>
+        </p:spPr>
+        <p:txBody>
+          <a:bodyPr vert="horz" lIns="91440" tIns="45720" rIns="91440" bIns="45720" rtlCol="0">
+            <a:normAutofit/>
+          </a:bodyPr>
+          <a:lstStyle>
+            <a:lvl1pPr marL="228600" indent="-228600" algn="l" defTabSz="914400" rtl="0" eaLnBrk="1" latinLnBrk="0" hangingPunct="1">
+              <a:lnSpc>
+                <a:spcPct val="90000"/>
+              </a:lnSpc>
+              <a:spcBef>
+                <a:spcPts val="1000"/>
+              </a:spcBef>
+              <a:buFont typeface="Arial" panose="020B0604020202020204" pitchFamily="34" charset="0"/>
+              <a:buChar char="•"/>
+              <a:defRPr sz="2800" kern="1200">
+                <a:solidFill>
+                  <a:schemeClr val="tx1"/>
+                </a:solidFill>
+                <a:latin typeface="+mn-lt"/>
+                <a:ea typeface="+mn-ea"/>
+                <a:cs typeface="+mn-cs"/>
+              </a:defRPr>
+            </a:lvl1pPr>
+            <a:lvl2pPr marL="685800" indent="-228600" algn="l" defTabSz="914400" rtl="0" eaLnBrk="1" latinLnBrk="0" hangingPunct="1">
+              <a:lnSpc>
+                <a:spcPct val="90000"/>
+              </a:lnSpc>
+              <a:spcBef>
+                <a:spcPts val="500"/>
+              </a:spcBef>
+              <a:buFont typeface="Arial" panose="020B0604020202020204" pitchFamily="34" charset="0"/>
+              <a:buChar char="•"/>
+              <a:defRPr sz="2400" kern="1200">
+                <a:solidFill>
+                  <a:schemeClr val="tx1"/>
+                </a:solidFill>
+                <a:latin typeface="+mn-lt"/>
+                <a:ea typeface="+mn-ea"/>
+                <a:cs typeface="+mn-cs"/>
+              </a:defRPr>
+            </a:lvl2pPr>
+            <a:lvl3pPr marL="1143000" indent="-228600" algn="l" defTabSz="914400" rtl="0" eaLnBrk="1" latinLnBrk="0" hangingPunct="1">
+              <a:lnSpc>
+                <a:spcPct val="90000"/>
+              </a:lnSpc>
+              <a:spcBef>
+                <a:spcPts val="500"/>
+              </a:spcBef>
+              <a:buFont typeface="Arial" panose="020B0604020202020204" pitchFamily="34" charset="0"/>
+              <a:buChar char="•"/>
+              <a:defRPr sz="2000" kern="1200">
+                <a:solidFill>
+                  <a:schemeClr val="tx1"/>
+                </a:solidFill>
+                <a:latin typeface="+mn-lt"/>
+                <a:ea typeface="+mn-ea"/>
+                <a:cs typeface="+mn-cs"/>
+              </a:defRPr>
+            </a:lvl3pPr>
+            <a:lvl4pPr marL="1600200" indent="-228600" algn="l" defTabSz="914400" rtl="0" eaLnBrk="1" latinLnBrk="0" hangingPunct="1">
+              <a:lnSpc>
+                <a:spcPct val="90000"/>
+              </a:lnSpc>
+              <a:spcBef>
+                <a:spcPts val="500"/>
+              </a:spcBef>
+              <a:buFont typeface="Arial" panose="020B0604020202020204" pitchFamily="34" charset="0"/>
+              <a:buChar char="•"/>
+              <a:defRPr sz="1800" kern="1200">
+                <a:solidFill>
+                  <a:schemeClr val="tx1"/>
+                </a:solidFill>
+                <a:latin typeface="+mn-lt"/>
+                <a:ea typeface="+mn-ea"/>
+                <a:cs typeface="+mn-cs"/>
+              </a:defRPr>
+            </a:lvl4pPr>
+            <a:lvl5pPr marL="2057400" indent="-228600" algn="l" defTabSz="914400" rtl="0" eaLnBrk="1" latinLnBrk="0" hangingPunct="1">
+              <a:lnSpc>
+                <a:spcPct val="90000"/>
+              </a:lnSpc>
+              <a:spcBef>
+                <a:spcPts val="500"/>
+              </a:spcBef>
+              <a:buFont typeface="Arial" panose="020B0604020202020204" pitchFamily="34" charset="0"/>
+              <a:buChar char="•"/>
+              <a:defRPr sz="1800" kern="1200">
+                <a:solidFill>
+                  <a:schemeClr val="tx1"/>
+                </a:solidFill>
+                <a:latin typeface="+mn-lt"/>
+                <a:ea typeface="+mn-ea"/>
+                <a:cs typeface="+mn-cs"/>
+              </a:defRPr>
+            </a:lvl5pPr>
+            <a:lvl6pPr marL="2514600" indent="-228600" algn="l" defTabSz="914400" rtl="0" eaLnBrk="1" latinLnBrk="0" hangingPunct="1">
+              <a:lnSpc>
+                <a:spcPct val="90000"/>
+              </a:lnSpc>
+              <a:spcBef>
+                <a:spcPts val="500"/>
+              </a:spcBef>
+              <a:buFont typeface="Arial" panose="020B0604020202020204" pitchFamily="34" charset="0"/>
+              <a:buChar char="•"/>
+              <a:defRPr sz="1800" kern="1200">
+                <a:solidFill>
+                  <a:schemeClr val="tx1"/>
+                </a:solidFill>
+                <a:latin typeface="+mn-lt"/>
+                <a:ea typeface="+mn-ea"/>
+                <a:cs typeface="+mn-cs"/>
+              </a:defRPr>
+            </a:lvl6pPr>
+            <a:lvl7pPr marL="2971800" indent="-228600" algn="l" defTabSz="914400" rtl="0" eaLnBrk="1" latinLnBrk="0" hangingPunct="1">
+              <a:lnSpc>
+                <a:spcPct val="90000"/>
+              </a:lnSpc>
+              <a:spcBef>
+                <a:spcPts val="500"/>
+              </a:spcBef>
+              <a:buFont typeface="Arial" panose="020B0604020202020204" pitchFamily="34" charset="0"/>
+              <a:buChar char="•"/>
+              <a:defRPr sz="1800" kern="1200">
+                <a:solidFill>
+                  <a:schemeClr val="tx1"/>
+                </a:solidFill>
+                <a:latin typeface="+mn-lt"/>
+                <a:ea typeface="+mn-ea"/>
+                <a:cs typeface="+mn-cs"/>
+              </a:defRPr>
+            </a:lvl7pPr>
+            <a:lvl8pPr marL="3429000" indent="-228600" algn="l" defTabSz="914400" rtl="0" eaLnBrk="1" latinLnBrk="0" hangingPunct="1">
+              <a:lnSpc>
+                <a:spcPct val="90000"/>
+              </a:lnSpc>
+              <a:spcBef>
+                <a:spcPts val="500"/>
+              </a:spcBef>
+              <a:buFont typeface="Arial" panose="020B0604020202020204" pitchFamily="34" charset="0"/>
+              <a:buChar char="•"/>
+              <a:defRPr sz="1800" kern="1200">
+                <a:solidFill>
+                  <a:schemeClr val="tx1"/>
+                </a:solidFill>
+                <a:latin typeface="+mn-lt"/>
+                <a:ea typeface="+mn-ea"/>
+                <a:cs typeface="+mn-cs"/>
+              </a:defRPr>
+            </a:lvl8pPr>
+            <a:lvl9pPr marL="3886200" indent="-228600" algn="l" defTabSz="914400" rtl="0" eaLnBrk="1" latinLnBrk="0" hangingPunct="1">
+              <a:lnSpc>
+                <a:spcPct val="90000"/>
+              </a:lnSpc>
+              <a:spcBef>
+                <a:spcPts val="500"/>
+              </a:spcBef>
+              <a:buFont typeface="Arial" panose="020B0604020202020204" pitchFamily="34" charset="0"/>
+              <a:buChar char="•"/>
+              <a:defRPr sz="1800" kern="1200">
+                <a:solidFill>
+                  <a:schemeClr val="tx1"/>
+                </a:solidFill>
+                <a:latin typeface="+mn-lt"/>
+                <a:ea typeface="+mn-ea"/>
+                <a:cs typeface="+mn-cs"/>
+              </a:defRPr>
+            </a:lvl9pPr>
+          </a:lstStyle>
+          <a:p>
+            <a:pPr marL="0" indent="0">
+              <a:buNone/>
+            </a:pPr>
+            <a:r>
+              <a:rPr lang="en-001" dirty="0">
+                <a:solidFill>
+                  <a:srgbClr val="98B2CB"/>
+                </a:solidFill>
+              </a:rPr>
+              <a:t>Conceptual Model</a:t>
+            </a:r>
+          </a:p>
+        </p:txBody>
+      </p:sp>
+      <p:sp>
+        <p:nvSpPr>
+          <p:cNvPr id="15" name="Content Placeholder 2">
+            <a:extLst>
+              <a:ext uri="{FF2B5EF4-FFF2-40B4-BE49-F238E27FC236}">
+                <a16:creationId xmlns:a16="http://schemas.microsoft.com/office/drawing/2014/main" id="{211A4EE2-6988-06E5-97B5-3583CEABF439}"/>
+              </a:ext>
+            </a:extLst>
+          </p:cNvPr>
+          <p:cNvSpPr txBox="1">
+            <a:spLocks/>
+          </p:cNvSpPr>
+          <p:nvPr/>
+        </p:nvSpPr>
+        <p:spPr>
+          <a:xfrm>
+            <a:off x="7731189" y="2968951"/>
+            <a:ext cx="2085716" cy="587693"/>
+          </a:xfrm>
+          <a:prstGeom prst="rect">
+            <a:avLst/>
+          </a:prstGeom>
+        </p:spPr>
+        <p:txBody>
+          <a:bodyPr vert="horz" lIns="91440" tIns="45720" rIns="91440" bIns="45720" rtlCol="0">
+            <a:noAutofit/>
+          </a:bodyPr>
+          <a:lstStyle>
+            <a:lvl1pPr marL="228600" indent="-228600" algn="l" defTabSz="914400" rtl="0" eaLnBrk="1" latinLnBrk="0" hangingPunct="1">
+              <a:lnSpc>
+                <a:spcPct val="90000"/>
+              </a:lnSpc>
+              <a:spcBef>
+                <a:spcPts val="1000"/>
+              </a:spcBef>
+              <a:buFont typeface="Arial" panose="020B0604020202020204" pitchFamily="34" charset="0"/>
+              <a:buChar char="•"/>
+              <a:defRPr sz="2800" kern="1200">
+                <a:solidFill>
+                  <a:schemeClr val="tx1"/>
+                </a:solidFill>
+                <a:latin typeface="+mn-lt"/>
+                <a:ea typeface="+mn-ea"/>
+                <a:cs typeface="+mn-cs"/>
+              </a:defRPr>
+            </a:lvl1pPr>
+            <a:lvl2pPr marL="685800" indent="-228600" algn="l" defTabSz="914400" rtl="0" eaLnBrk="1" latinLnBrk="0" hangingPunct="1">
+              <a:lnSpc>
+                <a:spcPct val="90000"/>
+              </a:lnSpc>
+              <a:spcBef>
+                <a:spcPts val="500"/>
+              </a:spcBef>
+              <a:buFont typeface="Arial" panose="020B0604020202020204" pitchFamily="34" charset="0"/>
+              <a:buChar char="•"/>
+              <a:defRPr sz="2400" kern="1200">
+                <a:solidFill>
+                  <a:schemeClr val="tx1"/>
+                </a:solidFill>
+                <a:latin typeface="+mn-lt"/>
+                <a:ea typeface="+mn-ea"/>
+                <a:cs typeface="+mn-cs"/>
+              </a:defRPr>
+            </a:lvl2pPr>
+            <a:lvl3pPr marL="1143000" indent="-228600" algn="l" defTabSz="914400" rtl="0" eaLnBrk="1" latinLnBrk="0" hangingPunct="1">
+              <a:lnSpc>
+                <a:spcPct val="90000"/>
+              </a:lnSpc>
+              <a:spcBef>
+                <a:spcPts val="500"/>
+              </a:spcBef>
+              <a:buFont typeface="Arial" panose="020B0604020202020204" pitchFamily="34" charset="0"/>
+              <a:buChar char="•"/>
+              <a:defRPr sz="2000" kern="1200">
+                <a:solidFill>
+                  <a:schemeClr val="tx1"/>
+                </a:solidFill>
+                <a:latin typeface="+mn-lt"/>
+                <a:ea typeface="+mn-ea"/>
+                <a:cs typeface="+mn-cs"/>
+              </a:defRPr>
+            </a:lvl3pPr>
+            <a:lvl4pPr marL="1600200" indent="-228600" algn="l" defTabSz="914400" rtl="0" eaLnBrk="1" latinLnBrk="0" hangingPunct="1">
+              <a:lnSpc>
+                <a:spcPct val="90000"/>
+              </a:lnSpc>
+              <a:spcBef>
+                <a:spcPts val="500"/>
+              </a:spcBef>
+              <a:buFont typeface="Arial" panose="020B0604020202020204" pitchFamily="34" charset="0"/>
+              <a:buChar char="•"/>
+              <a:defRPr sz="1800" kern="1200">
+                <a:solidFill>
+                  <a:schemeClr val="tx1"/>
+                </a:solidFill>
+                <a:latin typeface="+mn-lt"/>
+                <a:ea typeface="+mn-ea"/>
+                <a:cs typeface="+mn-cs"/>
+              </a:defRPr>
+            </a:lvl4pPr>
+            <a:lvl5pPr marL="2057400" indent="-228600" algn="l" defTabSz="914400" rtl="0" eaLnBrk="1" latinLnBrk="0" hangingPunct="1">
+              <a:lnSpc>
+                <a:spcPct val="90000"/>
+              </a:lnSpc>
+              <a:spcBef>
+                <a:spcPts val="500"/>
+              </a:spcBef>
+              <a:buFont typeface="Arial" panose="020B0604020202020204" pitchFamily="34" charset="0"/>
+              <a:buChar char="•"/>
+              <a:defRPr sz="1800" kern="1200">
+                <a:solidFill>
+                  <a:schemeClr val="tx1"/>
+                </a:solidFill>
+                <a:latin typeface="+mn-lt"/>
+                <a:ea typeface="+mn-ea"/>
+                <a:cs typeface="+mn-cs"/>
+              </a:defRPr>
+            </a:lvl5pPr>
+            <a:lvl6pPr marL="2514600" indent="-228600" algn="l" defTabSz="914400" rtl="0" eaLnBrk="1" latinLnBrk="0" hangingPunct="1">
+              <a:lnSpc>
+                <a:spcPct val="90000"/>
+              </a:lnSpc>
+              <a:spcBef>
+                <a:spcPts val="500"/>
+              </a:spcBef>
+              <a:buFont typeface="Arial" panose="020B0604020202020204" pitchFamily="34" charset="0"/>
+              <a:buChar char="•"/>
+              <a:defRPr sz="1800" kern="1200">
+                <a:solidFill>
+                  <a:schemeClr val="tx1"/>
+                </a:solidFill>
+                <a:latin typeface="+mn-lt"/>
+                <a:ea typeface="+mn-ea"/>
+                <a:cs typeface="+mn-cs"/>
+              </a:defRPr>
+            </a:lvl6pPr>
+            <a:lvl7pPr marL="2971800" indent="-228600" algn="l" defTabSz="914400" rtl="0" eaLnBrk="1" latinLnBrk="0" hangingPunct="1">
+              <a:lnSpc>
+                <a:spcPct val="90000"/>
+              </a:lnSpc>
+              <a:spcBef>
+                <a:spcPts val="500"/>
+              </a:spcBef>
+              <a:buFont typeface="Arial" panose="020B0604020202020204" pitchFamily="34" charset="0"/>
+              <a:buChar char="•"/>
+              <a:defRPr sz="1800" kern="1200">
+                <a:solidFill>
+                  <a:schemeClr val="tx1"/>
+                </a:solidFill>
+                <a:latin typeface="+mn-lt"/>
+                <a:ea typeface="+mn-ea"/>
+                <a:cs typeface="+mn-cs"/>
+              </a:defRPr>
+            </a:lvl7pPr>
+            <a:lvl8pPr marL="3429000" indent="-228600" algn="l" defTabSz="914400" rtl="0" eaLnBrk="1" latinLnBrk="0" hangingPunct="1">
+              <a:lnSpc>
+                <a:spcPct val="90000"/>
+              </a:lnSpc>
+              <a:spcBef>
+                <a:spcPts val="500"/>
+              </a:spcBef>
+              <a:buFont typeface="Arial" panose="020B0604020202020204" pitchFamily="34" charset="0"/>
+              <a:buChar char="•"/>
+              <a:defRPr sz="1800" kern="1200">
+                <a:solidFill>
+                  <a:schemeClr val="tx1"/>
+                </a:solidFill>
+                <a:latin typeface="+mn-lt"/>
+                <a:ea typeface="+mn-ea"/>
+                <a:cs typeface="+mn-cs"/>
+              </a:defRPr>
+            </a:lvl8pPr>
+            <a:lvl9pPr marL="3886200" indent="-228600" algn="l" defTabSz="914400" rtl="0" eaLnBrk="1" latinLnBrk="0" hangingPunct="1">
+              <a:lnSpc>
+                <a:spcPct val="90000"/>
+              </a:lnSpc>
+              <a:spcBef>
+                <a:spcPts val="500"/>
+              </a:spcBef>
+              <a:buFont typeface="Arial" panose="020B0604020202020204" pitchFamily="34" charset="0"/>
+              <a:buChar char="•"/>
+              <a:defRPr sz="1800" kern="1200">
+                <a:solidFill>
+                  <a:schemeClr val="tx1"/>
+                </a:solidFill>
+                <a:latin typeface="+mn-lt"/>
+                <a:ea typeface="+mn-ea"/>
+                <a:cs typeface="+mn-cs"/>
+              </a:defRPr>
+            </a:lvl9pPr>
+          </a:lstStyle>
+          <a:p>
+            <a:pPr marL="0" indent="0">
+              <a:buNone/>
+            </a:pPr>
+            <a:r>
+              <a:rPr lang="en-001" dirty="0">
+                <a:solidFill>
+                  <a:srgbClr val="98B2CB"/>
+                </a:solidFill>
+              </a:rPr>
+              <a:t>Data</a:t>
+            </a:r>
+          </a:p>
+        </p:txBody>
+      </p:sp>
+      <p:sp>
+        <p:nvSpPr>
+          <p:cNvPr id="18" name="Content Placeholder 2">
+            <a:extLst>
+              <a:ext uri="{FF2B5EF4-FFF2-40B4-BE49-F238E27FC236}">
+                <a16:creationId xmlns:a16="http://schemas.microsoft.com/office/drawing/2014/main" id="{214E7150-6D34-BA9C-1FC7-E2FD88FAB998}"/>
+              </a:ext>
+            </a:extLst>
+          </p:cNvPr>
+          <p:cNvSpPr txBox="1">
+            <a:spLocks/>
+          </p:cNvSpPr>
+          <p:nvPr/>
+        </p:nvSpPr>
+        <p:spPr>
+          <a:xfrm>
+            <a:off x="7743890" y="3429877"/>
+            <a:ext cx="4212771" cy="1821347"/>
+          </a:xfrm>
+          <a:prstGeom prst="rect">
+            <a:avLst/>
+          </a:prstGeom>
+        </p:spPr>
+        <p:txBody>
+          <a:bodyPr vert="horz" lIns="91440" tIns="45720" rIns="91440" bIns="45720" rtlCol="0">
+            <a:noAutofit/>
+          </a:bodyPr>
+          <a:lstStyle>
+            <a:lvl1pPr marL="228600" indent="-228600">
+              <a:lnSpc>
+                <a:spcPct val="90000"/>
+              </a:lnSpc>
+              <a:spcBef>
+                <a:spcPts val="1000"/>
+              </a:spcBef>
+              <a:buFont typeface="Arial" panose="020B0604020202020204" pitchFamily="34" charset="0"/>
+              <a:buChar char="•"/>
+              <a:defRPr sz="2200"/>
+            </a:lvl1pPr>
+            <a:lvl2pPr marL="685800" indent="-228600">
+              <a:lnSpc>
+                <a:spcPct val="90000"/>
+              </a:lnSpc>
+              <a:spcBef>
+                <a:spcPts val="500"/>
+              </a:spcBef>
+              <a:buFont typeface="Arial" panose="020B0604020202020204" pitchFamily="34" charset="0"/>
+              <a:buChar char="•"/>
+              <a:defRPr sz="2400"/>
+            </a:lvl2pPr>
+            <a:lvl3pPr marL="1143000" indent="-228600">
+              <a:lnSpc>
+                <a:spcPct val="90000"/>
+              </a:lnSpc>
+              <a:spcBef>
+                <a:spcPts val="500"/>
+              </a:spcBef>
+              <a:buFont typeface="Arial" panose="020B0604020202020204" pitchFamily="34" charset="0"/>
+              <a:buChar char="•"/>
+              <a:defRPr sz="2000"/>
+            </a:lvl3pPr>
+            <a:lvl4pPr marL="1600200" indent="-228600">
+              <a:lnSpc>
+                <a:spcPct val="90000"/>
+              </a:lnSpc>
+              <a:spcBef>
+                <a:spcPts val="500"/>
+              </a:spcBef>
+              <a:buFont typeface="Arial" panose="020B0604020202020204" pitchFamily="34" charset="0"/>
+              <a:buChar char="•"/>
+            </a:lvl4pPr>
+            <a:lvl5pPr marL="2057400" indent="-228600">
+              <a:lnSpc>
+                <a:spcPct val="90000"/>
+              </a:lnSpc>
+              <a:spcBef>
+                <a:spcPts val="500"/>
+              </a:spcBef>
+              <a:buFont typeface="Arial" panose="020B0604020202020204" pitchFamily="34" charset="0"/>
+              <a:buChar char="•"/>
+            </a:lvl5pPr>
+            <a:lvl6pPr marL="2514600" indent="-228600">
+              <a:lnSpc>
+                <a:spcPct val="90000"/>
+              </a:lnSpc>
+              <a:spcBef>
+                <a:spcPts val="500"/>
+              </a:spcBef>
+              <a:buFont typeface="Arial" panose="020B0604020202020204" pitchFamily="34" charset="0"/>
+              <a:buChar char="•"/>
+            </a:lvl6pPr>
+            <a:lvl7pPr marL="2971800" indent="-228600">
+              <a:lnSpc>
+                <a:spcPct val="90000"/>
+              </a:lnSpc>
+              <a:spcBef>
+                <a:spcPts val="500"/>
+              </a:spcBef>
+              <a:buFont typeface="Arial" panose="020B0604020202020204" pitchFamily="34" charset="0"/>
+              <a:buChar char="•"/>
+            </a:lvl7pPr>
+            <a:lvl8pPr marL="3429000" indent="-228600">
+              <a:lnSpc>
+                <a:spcPct val="90000"/>
+              </a:lnSpc>
+              <a:spcBef>
+                <a:spcPts val="500"/>
+              </a:spcBef>
+              <a:buFont typeface="Arial" panose="020B0604020202020204" pitchFamily="34" charset="0"/>
+              <a:buChar char="•"/>
+            </a:lvl8pPr>
+            <a:lvl9pPr marL="3886200" indent="-228600">
+              <a:lnSpc>
+                <a:spcPct val="90000"/>
+              </a:lnSpc>
+              <a:spcBef>
+                <a:spcPts val="500"/>
+              </a:spcBef>
+              <a:buFont typeface="Arial" panose="020B0604020202020204" pitchFamily="34" charset="0"/>
+              <a:buChar char="•"/>
+            </a:lvl9pPr>
+          </a:lstStyle>
+          <a:p>
+            <a:r>
+              <a:rPr lang="en-US" sz="2200" dirty="0"/>
+              <a:t>G</a:t>
+            </a:r>
+            <a:r>
+              <a:rPr lang="en-001" sz="2200" dirty="0"/>
+              <a:t>oogle timeline for individual mobility</a:t>
+            </a:r>
+          </a:p>
+          <a:p>
+            <a:r>
+              <a:rPr lang="en-001" sz="2200" dirty="0"/>
+              <a:t>OpenStreetMap for </a:t>
+            </a:r>
+            <a:r>
+              <a:rPr lang="fr-CH" sz="2200" dirty="0"/>
+              <a:t>Points of </a:t>
+            </a:r>
+            <a:r>
+              <a:rPr lang="fr-CH" sz="2200" dirty="0" err="1"/>
+              <a:t>Interest</a:t>
+            </a:r>
+            <a:r>
+              <a:rPr lang="fr-CH" sz="2200" dirty="0"/>
+              <a:t> and transport infrastructure for </a:t>
+            </a:r>
+            <a:r>
+              <a:rPr lang="fr-CH" sz="2200" dirty="0" err="1"/>
+              <a:t>urban</a:t>
+            </a:r>
+            <a:r>
+              <a:rPr lang="fr-CH" sz="2200" dirty="0"/>
+              <a:t> </a:t>
+            </a:r>
+            <a:r>
+              <a:rPr lang="fr-CH" sz="2200" dirty="0" err="1"/>
+              <a:t>context</a:t>
+            </a:r>
+            <a:r>
+              <a:rPr lang="fr-CH" sz="2200" dirty="0"/>
+              <a:t> </a:t>
+            </a:r>
+          </a:p>
+          <a:p>
+            <a:pPr lvl="1"/>
+            <a:endParaRPr lang="en-001" sz="2200" dirty="0"/>
+          </a:p>
+        </p:txBody>
+      </p:sp>
+      <p:sp>
+        <p:nvSpPr>
+          <p:cNvPr id="22" name="TextBox 21">
+            <a:extLst>
+              <a:ext uri="{FF2B5EF4-FFF2-40B4-BE49-F238E27FC236}">
+                <a16:creationId xmlns:a16="http://schemas.microsoft.com/office/drawing/2014/main" id="{4C50DE4D-9766-DAB7-AB84-B23FAE884ECD}"/>
+              </a:ext>
+            </a:extLst>
+          </p:cNvPr>
+          <p:cNvSpPr txBox="1"/>
+          <p:nvPr/>
+        </p:nvSpPr>
+        <p:spPr>
+          <a:xfrm>
+            <a:off x="5730982" y="1560444"/>
+            <a:ext cx="3179554" cy="369332"/>
+          </a:xfrm>
+          <a:prstGeom prst="rect">
+            <a:avLst/>
+          </a:prstGeom>
+          <a:noFill/>
+        </p:spPr>
+        <p:txBody>
+          <a:bodyPr wrap="square" rtlCol="0">
+            <a:spAutoFit/>
+          </a:bodyPr>
+          <a:lstStyle/>
+          <a:p>
+            <a:r>
+              <a:rPr lang="en-001" dirty="0"/>
+              <a:t>🏠 🛒🎓 💼🌳 🍽️ 🚉  🏥</a:t>
+            </a:r>
+          </a:p>
+        </p:txBody>
+      </p:sp>
+      <p:sp>
+        <p:nvSpPr>
+          <p:cNvPr id="5" name="Content Placeholder 2">
+            <a:extLst>
+              <a:ext uri="{FF2B5EF4-FFF2-40B4-BE49-F238E27FC236}">
+                <a16:creationId xmlns:a16="http://schemas.microsoft.com/office/drawing/2014/main" id="{E0E1577B-0FC5-7ADD-8D00-CE43A480C513}"/>
+              </a:ext>
+            </a:extLst>
+          </p:cNvPr>
+          <p:cNvSpPr txBox="1">
+            <a:spLocks/>
+          </p:cNvSpPr>
+          <p:nvPr/>
+        </p:nvSpPr>
+        <p:spPr>
+          <a:xfrm>
+            <a:off x="348213" y="5076912"/>
+            <a:ext cx="3015343" cy="587693"/>
+          </a:xfrm>
+          <a:prstGeom prst="rect">
+            <a:avLst/>
+          </a:prstGeom>
+        </p:spPr>
+        <p:txBody>
+          <a:bodyPr vert="horz" lIns="91440" tIns="45720" rIns="91440" bIns="45720" rtlCol="0">
+            <a:normAutofit/>
+          </a:bodyPr>
+          <a:lstStyle>
+            <a:lvl1pPr marL="228600" indent="-228600" algn="l" defTabSz="914400" rtl="0" eaLnBrk="1" latinLnBrk="0" hangingPunct="1">
+              <a:lnSpc>
+                <a:spcPct val="90000"/>
+              </a:lnSpc>
+              <a:spcBef>
+                <a:spcPts val="1000"/>
+              </a:spcBef>
+              <a:buFont typeface="Arial" panose="020B0604020202020204" pitchFamily="34" charset="0"/>
+              <a:buChar char="•"/>
+              <a:defRPr sz="2800" kern="1200">
+                <a:solidFill>
+                  <a:schemeClr val="tx1"/>
+                </a:solidFill>
+                <a:latin typeface="+mn-lt"/>
+                <a:ea typeface="+mn-ea"/>
+                <a:cs typeface="+mn-cs"/>
+              </a:defRPr>
+            </a:lvl1pPr>
+            <a:lvl2pPr marL="685800" indent="-228600" algn="l" defTabSz="914400" rtl="0" eaLnBrk="1" latinLnBrk="0" hangingPunct="1">
+              <a:lnSpc>
+                <a:spcPct val="90000"/>
+              </a:lnSpc>
+              <a:spcBef>
+                <a:spcPts val="500"/>
+              </a:spcBef>
+              <a:buFont typeface="Arial" panose="020B0604020202020204" pitchFamily="34" charset="0"/>
+              <a:buChar char="•"/>
+              <a:defRPr sz="2400" kern="1200">
+                <a:solidFill>
+                  <a:schemeClr val="tx1"/>
+                </a:solidFill>
+                <a:latin typeface="+mn-lt"/>
+                <a:ea typeface="+mn-ea"/>
+                <a:cs typeface="+mn-cs"/>
+              </a:defRPr>
+            </a:lvl2pPr>
+            <a:lvl3pPr marL="1143000" indent="-228600" algn="l" defTabSz="914400" rtl="0" eaLnBrk="1" latinLnBrk="0" hangingPunct="1">
+              <a:lnSpc>
+                <a:spcPct val="90000"/>
+              </a:lnSpc>
+              <a:spcBef>
+                <a:spcPts val="500"/>
+              </a:spcBef>
+              <a:buFont typeface="Arial" panose="020B0604020202020204" pitchFamily="34" charset="0"/>
+              <a:buChar char="•"/>
+              <a:defRPr sz="2000" kern="1200">
+                <a:solidFill>
+                  <a:schemeClr val="tx1"/>
+                </a:solidFill>
+                <a:latin typeface="+mn-lt"/>
+                <a:ea typeface="+mn-ea"/>
+                <a:cs typeface="+mn-cs"/>
+              </a:defRPr>
+            </a:lvl3pPr>
+            <a:lvl4pPr marL="1600200" indent="-228600" algn="l" defTabSz="914400" rtl="0" eaLnBrk="1" latinLnBrk="0" hangingPunct="1">
+              <a:lnSpc>
+                <a:spcPct val="90000"/>
+              </a:lnSpc>
+              <a:spcBef>
+                <a:spcPts val="500"/>
+              </a:spcBef>
+              <a:buFont typeface="Arial" panose="020B0604020202020204" pitchFamily="34" charset="0"/>
+              <a:buChar char="•"/>
+              <a:defRPr sz="1800" kern="1200">
+                <a:solidFill>
+                  <a:schemeClr val="tx1"/>
+                </a:solidFill>
+                <a:latin typeface="+mn-lt"/>
+                <a:ea typeface="+mn-ea"/>
+                <a:cs typeface="+mn-cs"/>
+              </a:defRPr>
+            </a:lvl4pPr>
+            <a:lvl5pPr marL="2057400" indent="-228600" algn="l" defTabSz="914400" rtl="0" eaLnBrk="1" latinLnBrk="0" hangingPunct="1">
+              <a:lnSpc>
+                <a:spcPct val="90000"/>
+              </a:lnSpc>
+              <a:spcBef>
+                <a:spcPts val="500"/>
+              </a:spcBef>
+              <a:buFont typeface="Arial" panose="020B0604020202020204" pitchFamily="34" charset="0"/>
+              <a:buChar char="•"/>
+              <a:defRPr sz="1800" kern="1200">
+                <a:solidFill>
+                  <a:schemeClr val="tx1"/>
+                </a:solidFill>
+                <a:latin typeface="+mn-lt"/>
+                <a:ea typeface="+mn-ea"/>
+                <a:cs typeface="+mn-cs"/>
+              </a:defRPr>
+            </a:lvl5pPr>
+            <a:lvl6pPr marL="2514600" indent="-228600" algn="l" defTabSz="914400" rtl="0" eaLnBrk="1" latinLnBrk="0" hangingPunct="1">
+              <a:lnSpc>
+                <a:spcPct val="90000"/>
+              </a:lnSpc>
+              <a:spcBef>
+                <a:spcPts val="500"/>
+              </a:spcBef>
+              <a:buFont typeface="Arial" panose="020B0604020202020204" pitchFamily="34" charset="0"/>
+              <a:buChar char="•"/>
+              <a:defRPr sz="1800" kern="1200">
+                <a:solidFill>
+                  <a:schemeClr val="tx1"/>
+                </a:solidFill>
+                <a:latin typeface="+mn-lt"/>
+                <a:ea typeface="+mn-ea"/>
+                <a:cs typeface="+mn-cs"/>
+              </a:defRPr>
+            </a:lvl6pPr>
+            <a:lvl7pPr marL="2971800" indent="-228600" algn="l" defTabSz="914400" rtl="0" eaLnBrk="1" latinLnBrk="0" hangingPunct="1">
+              <a:lnSpc>
+                <a:spcPct val="90000"/>
+              </a:lnSpc>
+              <a:spcBef>
+                <a:spcPts val="500"/>
+              </a:spcBef>
+              <a:buFont typeface="Arial" panose="020B0604020202020204" pitchFamily="34" charset="0"/>
+              <a:buChar char="•"/>
+              <a:defRPr sz="1800" kern="1200">
+                <a:solidFill>
+                  <a:schemeClr val="tx1"/>
+                </a:solidFill>
+                <a:latin typeface="+mn-lt"/>
+                <a:ea typeface="+mn-ea"/>
+                <a:cs typeface="+mn-cs"/>
+              </a:defRPr>
+            </a:lvl7pPr>
+            <a:lvl8pPr marL="3429000" indent="-228600" algn="l" defTabSz="914400" rtl="0" eaLnBrk="1" latinLnBrk="0" hangingPunct="1">
+              <a:lnSpc>
+                <a:spcPct val="90000"/>
+              </a:lnSpc>
+              <a:spcBef>
+                <a:spcPts val="500"/>
+              </a:spcBef>
+              <a:buFont typeface="Arial" panose="020B0604020202020204" pitchFamily="34" charset="0"/>
+              <a:buChar char="•"/>
+              <a:defRPr sz="1800" kern="1200">
+                <a:solidFill>
+                  <a:schemeClr val="tx1"/>
+                </a:solidFill>
+                <a:latin typeface="+mn-lt"/>
+                <a:ea typeface="+mn-ea"/>
+                <a:cs typeface="+mn-cs"/>
+              </a:defRPr>
+            </a:lvl8pPr>
+            <a:lvl9pPr marL="3886200" indent="-228600" algn="l" defTabSz="914400" rtl="0" eaLnBrk="1" latinLnBrk="0" hangingPunct="1">
+              <a:lnSpc>
+                <a:spcPct val="90000"/>
+              </a:lnSpc>
+              <a:spcBef>
+                <a:spcPts val="500"/>
+              </a:spcBef>
+              <a:buFont typeface="Arial" panose="020B0604020202020204" pitchFamily="34" charset="0"/>
+              <a:buChar char="•"/>
+              <a:defRPr sz="1800" kern="1200">
+                <a:solidFill>
+                  <a:schemeClr val="tx1"/>
+                </a:solidFill>
+                <a:latin typeface="+mn-lt"/>
+                <a:ea typeface="+mn-ea"/>
+                <a:cs typeface="+mn-cs"/>
+              </a:defRPr>
+            </a:lvl9pPr>
+          </a:lstStyle>
+          <a:p>
+            <a:pPr marL="0" indent="0">
+              <a:buNone/>
+            </a:pPr>
+            <a:r>
+              <a:rPr lang="en-001" dirty="0">
+                <a:solidFill>
+                  <a:srgbClr val="98B2CB"/>
+                </a:solidFill>
+              </a:rPr>
+              <a:t>Goal</a:t>
+            </a:r>
+          </a:p>
+        </p:txBody>
+      </p:sp>
+      <p:sp>
+        <p:nvSpPr>
+          <p:cNvPr id="6" name="Content Placeholder 2">
+            <a:extLst>
+              <a:ext uri="{FF2B5EF4-FFF2-40B4-BE49-F238E27FC236}">
+                <a16:creationId xmlns:a16="http://schemas.microsoft.com/office/drawing/2014/main" id="{DC9BDEC1-11A3-FC9A-47DA-9997664BD104}"/>
+              </a:ext>
+            </a:extLst>
+          </p:cNvPr>
+          <p:cNvSpPr txBox="1">
+            <a:spLocks/>
+          </p:cNvSpPr>
+          <p:nvPr/>
+        </p:nvSpPr>
+        <p:spPr>
+          <a:xfrm>
+            <a:off x="615042" y="5544529"/>
+            <a:ext cx="3829021" cy="2198491"/>
+          </a:xfrm>
+          <a:prstGeom prst="rect">
+            <a:avLst/>
+          </a:prstGeom>
+        </p:spPr>
+        <p:txBody>
+          <a:bodyPr vert="horz" lIns="91440" tIns="45720" rIns="91440" bIns="45720" rtlCol="0">
+            <a:normAutofit/>
+          </a:bodyPr>
+          <a:lstStyle>
+            <a:lvl1pPr marL="228600" indent="-228600">
+              <a:lnSpc>
+                <a:spcPct val="90000"/>
+              </a:lnSpc>
+              <a:spcBef>
+                <a:spcPts val="1000"/>
+              </a:spcBef>
+              <a:buFont typeface="Arial" panose="020B0604020202020204" pitchFamily="34" charset="0"/>
+              <a:buChar char="•"/>
+              <a:defRPr sz="2200"/>
+            </a:lvl1pPr>
+            <a:lvl2pPr marL="685800" indent="-228600">
+              <a:lnSpc>
+                <a:spcPct val="90000"/>
+              </a:lnSpc>
+              <a:spcBef>
+                <a:spcPts val="500"/>
+              </a:spcBef>
+              <a:buFont typeface="Arial" panose="020B0604020202020204" pitchFamily="34" charset="0"/>
+              <a:buChar char="•"/>
+              <a:defRPr sz="2400"/>
+            </a:lvl2pPr>
+            <a:lvl3pPr marL="1143000" indent="-228600">
+              <a:lnSpc>
+                <a:spcPct val="90000"/>
+              </a:lnSpc>
+              <a:spcBef>
+                <a:spcPts val="500"/>
+              </a:spcBef>
+              <a:buFont typeface="Arial" panose="020B0604020202020204" pitchFamily="34" charset="0"/>
+              <a:buChar char="•"/>
+              <a:defRPr sz="2000"/>
+            </a:lvl3pPr>
+            <a:lvl4pPr marL="1600200" indent="-228600">
+              <a:lnSpc>
+                <a:spcPct val="90000"/>
+              </a:lnSpc>
+              <a:spcBef>
+                <a:spcPts val="500"/>
+              </a:spcBef>
+              <a:buFont typeface="Arial" panose="020B0604020202020204" pitchFamily="34" charset="0"/>
+              <a:buChar char="•"/>
+            </a:lvl4pPr>
+            <a:lvl5pPr marL="2057400" indent="-228600">
+              <a:lnSpc>
+                <a:spcPct val="90000"/>
+              </a:lnSpc>
+              <a:spcBef>
+                <a:spcPts val="500"/>
+              </a:spcBef>
+              <a:buFont typeface="Arial" panose="020B0604020202020204" pitchFamily="34" charset="0"/>
+              <a:buChar char="•"/>
+            </a:lvl5pPr>
+            <a:lvl6pPr marL="2514600" indent="-228600">
+              <a:lnSpc>
+                <a:spcPct val="90000"/>
+              </a:lnSpc>
+              <a:spcBef>
+                <a:spcPts val="500"/>
+              </a:spcBef>
+              <a:buFont typeface="Arial" panose="020B0604020202020204" pitchFamily="34" charset="0"/>
+              <a:buChar char="•"/>
+            </a:lvl6pPr>
+            <a:lvl7pPr marL="2971800" indent="-228600">
+              <a:lnSpc>
+                <a:spcPct val="90000"/>
+              </a:lnSpc>
+              <a:spcBef>
+                <a:spcPts val="500"/>
+              </a:spcBef>
+              <a:buFont typeface="Arial" panose="020B0604020202020204" pitchFamily="34" charset="0"/>
+              <a:buChar char="•"/>
+            </a:lvl7pPr>
+            <a:lvl8pPr marL="3429000" indent="-228600">
+              <a:lnSpc>
+                <a:spcPct val="90000"/>
+              </a:lnSpc>
+              <a:spcBef>
+                <a:spcPts val="500"/>
+              </a:spcBef>
+              <a:buFont typeface="Arial" panose="020B0604020202020204" pitchFamily="34" charset="0"/>
+              <a:buChar char="•"/>
+            </a:lvl8pPr>
+            <a:lvl9pPr marL="3886200" indent="-228600">
+              <a:lnSpc>
+                <a:spcPct val="90000"/>
+              </a:lnSpc>
+              <a:spcBef>
+                <a:spcPts val="500"/>
+              </a:spcBef>
+              <a:buFont typeface="Arial" panose="020B0604020202020204" pitchFamily="34" charset="0"/>
+              <a:buChar char="•"/>
+            </a:lvl9pPr>
+          </a:lstStyle>
+          <a:p>
+            <a:pPr marL="0" indent="0">
+              <a:buNone/>
+            </a:pPr>
+            <a:endParaRPr lang="fr-CH" sz="4600" dirty="0"/>
+          </a:p>
+          <a:p>
+            <a:endParaRPr lang="en-001" dirty="0"/>
+          </a:p>
+          <a:p>
+            <a:endParaRPr lang="fr-CH" dirty="0"/>
+          </a:p>
+        </p:txBody>
+      </p:sp>
+      <p:sp>
+        <p:nvSpPr>
+          <p:cNvPr id="11" name="TextBox 10">
+            <a:extLst>
+              <a:ext uri="{FF2B5EF4-FFF2-40B4-BE49-F238E27FC236}">
+                <a16:creationId xmlns:a16="http://schemas.microsoft.com/office/drawing/2014/main" id="{1721DAEC-0A82-6021-A4E5-89B28C221F2F}"/>
+              </a:ext>
+            </a:extLst>
+          </p:cNvPr>
+          <p:cNvSpPr txBox="1"/>
+          <p:nvPr/>
+        </p:nvSpPr>
+        <p:spPr>
+          <a:xfrm>
+            <a:off x="291322" y="5524491"/>
+            <a:ext cx="11900678" cy="430887"/>
+          </a:xfrm>
+          <a:prstGeom prst="rect">
+            <a:avLst/>
+          </a:prstGeom>
+          <a:noFill/>
+        </p:spPr>
+        <p:txBody>
+          <a:bodyPr wrap="square">
+            <a:spAutoFit/>
+          </a:bodyPr>
+          <a:lstStyle/>
+          <a:p>
+            <a:r>
+              <a:rPr lang="fr-CH" sz="2200" dirty="0" err="1"/>
+              <a:t>understand</a:t>
+            </a:r>
+            <a:r>
+              <a:rPr lang="fr-CH" sz="2200" dirty="0"/>
+              <a:t> </a:t>
+            </a:r>
+            <a:r>
+              <a:rPr lang="fr-CH" sz="2200" dirty="0" err="1"/>
+              <a:t>whether</a:t>
+            </a:r>
+            <a:r>
+              <a:rPr lang="fr-CH" sz="2200" dirty="0"/>
+              <a:t> accessible infrastructure </a:t>
+            </a:r>
+            <a:r>
+              <a:rPr lang="fr-CH" sz="2200" dirty="0" err="1"/>
+              <a:t>is</a:t>
+            </a:r>
+            <a:r>
+              <a:rPr lang="fr-CH" sz="2200" dirty="0"/>
+              <a:t> </a:t>
+            </a:r>
+            <a:r>
+              <a:rPr lang="fr-CH" sz="2200" dirty="0" err="1"/>
+              <a:t>actually</a:t>
+            </a:r>
+            <a:r>
+              <a:rPr lang="fr-CH" sz="2200" dirty="0"/>
+              <a:t> </a:t>
+            </a:r>
+            <a:r>
+              <a:rPr lang="fr-CH" sz="2200" dirty="0" err="1"/>
+              <a:t>reflected</a:t>
+            </a:r>
+            <a:r>
+              <a:rPr lang="fr-CH" sz="2200" dirty="0"/>
+              <a:t> in </a:t>
+            </a:r>
+            <a:r>
+              <a:rPr lang="fr-CH" sz="2200" dirty="0" err="1"/>
+              <a:t>everyday</a:t>
+            </a:r>
+            <a:r>
+              <a:rPr lang="fr-CH" sz="2200" dirty="0"/>
+              <a:t> </a:t>
+            </a:r>
+            <a:r>
+              <a:rPr lang="fr-CH" sz="2200" dirty="0" err="1"/>
+              <a:t>mobility</a:t>
+            </a:r>
+            <a:r>
+              <a:rPr lang="fr-CH" sz="2200" dirty="0"/>
+              <a:t> </a:t>
+            </a:r>
+            <a:r>
+              <a:rPr lang="fr-CH" sz="2200" dirty="0" err="1"/>
+              <a:t>behavior</a:t>
+            </a:r>
+            <a:endParaRPr lang="fr-CH" sz="2200" dirty="0"/>
           </a:p>
         </p:txBody>
       </p:sp>
     </p:spTree>
     <p:extLst>
       <p:ext uri="{BB962C8B-B14F-4D97-AF65-F5344CB8AC3E}">
-        <p14:creationId xmlns:p14="http://schemas.microsoft.com/office/powerpoint/2010/main" val="2296812319"/>
+        <p14:creationId xmlns:p14="http://schemas.microsoft.com/office/powerpoint/2010/main" val="131123478"/>
       </p:ext>
     </p:extLst>
   </p:cSld>
@@ -9275,7 +13265,7 @@
 </p:sld>
 </file>
 
-<file path=ppt/slides/slide4.xml><?xml version="1.0" encoding="utf-8"?>
+<file path=ppt/slides/slide5.xml><?xml version="1.0" encoding="utf-8"?>
 <p:sld xmlns:a="http://schemas.openxmlformats.org/drawingml/2006/main" xmlns:r="http://schemas.openxmlformats.org/officeDocument/2006/relationships" xmlns:p="http://schemas.openxmlformats.org/presentationml/2006/main">
   <p:cSld>
     <p:bg>
@@ -10354,8 +14344,12 @@
           <a:lstStyle/>
           <a:p>
             <a:r>
-              <a:rPr lang="fr-CH"/>
-              <a:t>Research questions </a:t>
+              <a:rPr lang="fr-CH" dirty="0" err="1"/>
+              <a:t>Research</a:t>
+            </a:r>
+            <a:r>
+              <a:rPr lang="fr-CH" dirty="0"/>
+              <a:t> questions </a:t>
             </a:r>
           </a:p>
         </p:txBody>
@@ -10392,8 +14386,72 @@
               <a:buNone/>
             </a:pPr>
             <a:r>
-              <a:rPr lang="fr-CH" sz="2000"/>
-              <a:t>1. What proportion of an individual’s daily activities in Zurich occurs within 15 minutes from home, walking, cycling, or by public transport? </a:t>
+              <a:rPr lang="fr-CH" sz="3200" dirty="0"/>
+              <a:t>1. </a:t>
+            </a:r>
+            <a:r>
+              <a:rPr lang="fr-CH" sz="3200" dirty="0" err="1"/>
+              <a:t>What</a:t>
+            </a:r>
+            <a:r>
+              <a:rPr lang="fr-CH" sz="3200" dirty="0"/>
+              <a:t> </a:t>
+            </a:r>
+            <a:r>
+              <a:rPr lang="fr-CH" sz="3200" dirty="0" err="1"/>
+              <a:t>share</a:t>
+            </a:r>
+            <a:r>
+              <a:rPr lang="fr-CH" sz="3200" dirty="0"/>
+              <a:t> of </a:t>
+            </a:r>
+            <a:r>
+              <a:rPr lang="fr-CH" sz="3200" dirty="0" err="1"/>
+              <a:t>daily</a:t>
+            </a:r>
+            <a:r>
+              <a:rPr lang="fr-CH" sz="3200" dirty="0"/>
+              <a:t> </a:t>
+            </a:r>
+            <a:r>
+              <a:rPr lang="fr-CH" sz="3200" dirty="0" err="1"/>
+              <a:t>activities</a:t>
+            </a:r>
+            <a:r>
+              <a:rPr lang="fr-CH" sz="3200" dirty="0"/>
+              <a:t> </a:t>
+            </a:r>
+            <a:r>
+              <a:rPr lang="fr-CH" sz="3200" dirty="0" err="1"/>
+              <a:t>occurs</a:t>
+            </a:r>
+            <a:r>
+              <a:rPr lang="fr-CH" sz="3200" dirty="0"/>
+              <a:t> </a:t>
+            </a:r>
+            <a:r>
+              <a:rPr lang="fr-CH" sz="3200" dirty="0" err="1"/>
+              <a:t>within</a:t>
+            </a:r>
+            <a:r>
+              <a:rPr lang="fr-CH" sz="3200" dirty="0"/>
+              <a:t> 15 minutes </a:t>
+            </a:r>
+            <a:r>
+              <a:rPr lang="fr-CH" sz="3200" dirty="0" err="1"/>
+              <a:t>from</a:t>
+            </a:r>
+            <a:r>
+              <a:rPr lang="fr-CH" sz="3200" dirty="0"/>
+              <a:t> home ? (per </a:t>
+            </a:r>
+            <a:r>
+              <a:rPr lang="fr-CH" sz="3200" dirty="0" err="1"/>
+              <a:t>means</a:t>
+            </a:r>
+            <a:r>
+              <a:rPr lang="fr-CH" sz="3200" dirty="0"/>
+              <a:t> of transportation)</a:t>
             </a:r>
           </a:p>
           <a:p>
@@ -10401,8 +14459,64 @@
               <a:buNone/>
             </a:pPr>
             <a:r>
-              <a:rPr lang="fr-CH" sz="2000"/>
-              <a:t>2. How does actual mobility behavior differ from the theoretical accessibility provided by services and infrastructure? </a:t>
+              <a:rPr lang="fr-CH" sz="3200" dirty="0"/>
+              <a:t>2. How </a:t>
+            </a:r>
+            <a:r>
+              <a:rPr lang="fr-CH" sz="3200" dirty="0" err="1"/>
+              <a:t>does</a:t>
+            </a:r>
+            <a:r>
+              <a:rPr lang="fr-CH" sz="3200" dirty="0"/>
+              <a:t> </a:t>
+            </a:r>
+            <a:r>
+              <a:rPr lang="fr-CH" sz="3200" dirty="0" err="1"/>
+              <a:t>actual</a:t>
+            </a:r>
+            <a:r>
+              <a:rPr lang="fr-CH" sz="3200" dirty="0"/>
+              <a:t> </a:t>
+            </a:r>
+            <a:r>
+              <a:rPr lang="fr-CH" sz="3200" dirty="0" err="1"/>
+              <a:t>mobility</a:t>
+            </a:r>
+            <a:r>
+              <a:rPr lang="fr-CH" sz="3200" dirty="0"/>
+              <a:t> </a:t>
+            </a:r>
+            <a:r>
+              <a:rPr lang="fr-CH" sz="3200" dirty="0" err="1"/>
+              <a:t>differ</a:t>
+            </a:r>
+            <a:r>
+              <a:rPr lang="fr-CH" sz="3200" dirty="0"/>
+              <a:t> </a:t>
+            </a:r>
+            <a:r>
+              <a:rPr lang="fr-CH" sz="3200" dirty="0" err="1"/>
+              <a:t>from</a:t>
+            </a:r>
+            <a:r>
+              <a:rPr lang="fr-CH" sz="3200" dirty="0"/>
+              <a:t> the </a:t>
+            </a:r>
+            <a:r>
+              <a:rPr lang="fr-CH" sz="3200" dirty="0" err="1"/>
+              <a:t>theoretical</a:t>
+            </a:r>
+            <a:r>
+              <a:rPr lang="fr-CH" sz="3200" dirty="0"/>
+              <a:t> </a:t>
+            </a:r>
+            <a:r>
+              <a:rPr lang="fr-CH" sz="3200" dirty="0" err="1"/>
+              <a:t>accessibility</a:t>
+            </a:r>
+            <a:r>
+              <a:rPr lang="fr-CH" sz="3200" dirty="0"/>
+              <a:t>? </a:t>
             </a:r>
           </a:p>
           <a:p>
@@ -10410,8 +14524,56 @@
               <a:buNone/>
             </a:pPr>
             <a:r>
-              <a:rPr lang="fr-CH" sz="2000"/>
-              <a:t>3. Which types of activities (work, entertainment, groceries, sport, leisure, social visits) most frequently occur beyond a 15‑minute travel time from home?</a:t>
+              <a:rPr lang="fr-CH" sz="3200" dirty="0"/>
+              <a:t>3. </a:t>
+            </a:r>
+            <a:r>
+              <a:rPr lang="fr-CH" sz="3200" dirty="0" err="1"/>
+              <a:t>Which</a:t>
+            </a:r>
+            <a:r>
+              <a:rPr lang="fr-CH" sz="3200" dirty="0"/>
+              <a:t> types of </a:t>
+            </a:r>
+            <a:r>
+              <a:rPr lang="fr-CH" sz="3200" dirty="0" err="1"/>
+              <a:t>activities</a:t>
+            </a:r>
+            <a:r>
+              <a:rPr lang="fr-CH" sz="3200" dirty="0"/>
+              <a:t> </a:t>
+            </a:r>
+            <a:r>
+              <a:rPr lang="fr-CH" sz="3200" dirty="0" err="1"/>
+              <a:t>most</a:t>
+            </a:r>
+            <a:r>
+              <a:rPr lang="fr-CH" sz="3200" dirty="0"/>
+              <a:t> </a:t>
+            </a:r>
+            <a:r>
+              <a:rPr lang="fr-CH" sz="3200" dirty="0" err="1"/>
+              <a:t>often</a:t>
+            </a:r>
+            <a:r>
+              <a:rPr lang="fr-CH" sz="3200" dirty="0"/>
+              <a:t> </a:t>
+            </a:r>
+            <a:r>
+              <a:rPr lang="fr-CH" sz="3200" dirty="0" err="1"/>
+              <a:t>occur</a:t>
+            </a:r>
+            <a:r>
+              <a:rPr lang="fr-CH" sz="3200" dirty="0"/>
+              <a:t> </a:t>
+            </a:r>
+            <a:r>
+              <a:rPr lang="fr-CH" sz="3200" dirty="0" err="1"/>
+              <a:t>beyond</a:t>
+            </a:r>
+            <a:r>
+              <a:rPr lang="fr-CH" sz="3200" dirty="0"/>
+              <a:t> a 15‑minute radius?</a:t>
             </a:r>
           </a:p>
         </p:txBody>
@@ -10429,7 +14591,212 @@
 </p:sld>
 </file>
 
-<file path=ppt/slides/slide5.xml><?xml version="1.0" encoding="utf-8"?>
+<file path=ppt/slides/slide6.xml><?xml version="1.0" encoding="utf-8"?>
+<p:sld xmlns:a="http://schemas.openxmlformats.org/drawingml/2006/main" xmlns:r="http://schemas.openxmlformats.org/officeDocument/2006/relationships" xmlns:p="http://schemas.openxmlformats.org/presentationml/2006/main">
+  <p:cSld>
+    <p:spTree>
+      <p:nvGrpSpPr>
+        <p:cNvPr id="1" name="">
+          <a:extLst>
+            <a:ext uri="{FF2B5EF4-FFF2-40B4-BE49-F238E27FC236}">
+              <a16:creationId xmlns:a16="http://schemas.microsoft.com/office/drawing/2014/main" id="{3D423E1E-BDBE-7890-99F7-75EB4E2501C1}"/>
+            </a:ext>
+          </a:extLst>
+        </p:cNvPr>
+        <p:cNvGrpSpPr/>
+        <p:nvPr/>
+      </p:nvGrpSpPr>
+      <p:grpSpPr>
+        <a:xfrm>
+          <a:off x="0" y="0"/>
+          <a:ext cx="0" cy="0"/>
+          <a:chOff x="0" y="0"/>
+          <a:chExt cx="0" cy="0"/>
+        </a:xfrm>
+      </p:grpSpPr>
+      <p:sp>
+        <p:nvSpPr>
+          <p:cNvPr id="2" name="Title 1">
+            <a:extLst>
+              <a:ext uri="{FF2B5EF4-FFF2-40B4-BE49-F238E27FC236}">
+                <a16:creationId xmlns:a16="http://schemas.microsoft.com/office/drawing/2014/main" id="{F68A396A-E78B-8B83-BCD1-2000A3ACC94E}"/>
+              </a:ext>
+            </a:extLst>
+          </p:cNvPr>
+          <p:cNvSpPr>
+            <a:spLocks noGrp="1"/>
+          </p:cNvSpPr>
+          <p:nvPr>
+            <p:ph type="title"/>
+          </p:nvPr>
+        </p:nvSpPr>
+        <p:spPr>
+          <a:xfrm>
+            <a:off x="838200" y="713312"/>
+            <a:ext cx="4038600" cy="3472607"/>
+          </a:xfrm>
+        </p:spPr>
+        <p:txBody>
+          <a:bodyPr>
+            <a:normAutofit/>
+          </a:bodyPr>
+          <a:lstStyle/>
+          <a:p>
+            <a:r>
+              <a:rPr lang="en-001" dirty="0"/>
+              <a:t>Best Possible Outcome</a:t>
+            </a:r>
+          </a:p>
+        </p:txBody>
+      </p:sp>
+      <p:sp>
+        <p:nvSpPr>
+          <p:cNvPr id="24" name="Content Placeholder 2">
+            <a:extLst>
+              <a:ext uri="{FF2B5EF4-FFF2-40B4-BE49-F238E27FC236}">
+                <a16:creationId xmlns:a16="http://schemas.microsoft.com/office/drawing/2014/main" id="{220A022F-93D1-8C5A-87A5-E8C8242FA292}"/>
+              </a:ext>
+            </a:extLst>
+          </p:cNvPr>
+          <p:cNvSpPr>
+            <a:spLocks noGrp="1"/>
+          </p:cNvSpPr>
+          <p:nvPr>
+            <p:ph idx="1"/>
+          </p:nvPr>
+        </p:nvSpPr>
+        <p:spPr>
+          <a:xfrm>
+            <a:off x="4876801" y="713313"/>
+            <a:ext cx="6477000" cy="3472607"/>
+          </a:xfrm>
+        </p:spPr>
+        <p:txBody>
+          <a:bodyPr anchor="ctr">
+            <a:normAutofit fontScale="92500" lnSpcReduction="10000"/>
+          </a:bodyPr>
+          <a:lstStyle/>
+          <a:p>
+            <a:pPr marL="0" indent="0">
+              <a:buNone/>
+            </a:pPr>
+            <a:r>
+              <a:rPr lang="en-001" sz="3200" dirty="0"/>
+              <a:t>We expect to:</a:t>
+            </a:r>
+          </a:p>
+          <a:p>
+            <a:r>
+              <a:rPr lang="en-001" sz="3200" dirty="0"/>
+              <a:t>Quantify the proportion of local vs non-local activities </a:t>
+            </a:r>
+          </a:p>
+          <a:p>
+            <a:r>
+              <a:rPr lang="en-001" sz="3200" dirty="0"/>
+              <a:t>Identify activity types that exceed the 15-minute threshold </a:t>
+            </a:r>
+          </a:p>
+          <a:p>
+            <a:r>
+              <a:rPr lang="en-001" sz="3200" dirty="0"/>
+              <a:t>Evaluate whether mobility is driven more by accessibility or by personal preferences and habits</a:t>
+            </a:r>
+          </a:p>
+        </p:txBody>
+      </p:sp>
+      <p:sp>
+        <p:nvSpPr>
+          <p:cNvPr id="3" name="Rectangle 2">
+            <a:extLst>
+              <a:ext uri="{FF2B5EF4-FFF2-40B4-BE49-F238E27FC236}">
+                <a16:creationId xmlns:a16="http://schemas.microsoft.com/office/drawing/2014/main" id="{7054B78A-D08B-EF49-5DCE-3E78CEFBEEF3}"/>
+              </a:ext>
+            </a:extLst>
+          </p:cNvPr>
+          <p:cNvSpPr/>
+          <p:nvPr/>
+        </p:nvSpPr>
+        <p:spPr>
+          <a:xfrm>
+            <a:off x="0" y="4795520"/>
+            <a:ext cx="12192000" cy="1561737"/>
+          </a:xfrm>
+          <a:prstGeom prst="rect">
+            <a:avLst/>
+          </a:prstGeom>
+          <a:solidFill>
+            <a:srgbClr val="F4F4F4"/>
+          </a:solidFill>
+          <a:ln>
+            <a:noFill/>
+          </a:ln>
+        </p:spPr>
+        <p:style>
+          <a:lnRef idx="2">
+            <a:schemeClr val="accent1">
+              <a:shade val="15000"/>
+            </a:schemeClr>
+          </a:lnRef>
+          <a:fillRef idx="1">
+            <a:schemeClr val="accent1"/>
+          </a:fillRef>
+          <a:effectRef idx="0">
+            <a:schemeClr val="accent1"/>
+          </a:effectRef>
+          <a:fontRef idx="minor">
+            <a:schemeClr val="lt1"/>
+          </a:fontRef>
+        </p:style>
+        <p:txBody>
+          <a:bodyPr rtlCol="0" anchor="ctr"/>
+          <a:lstStyle/>
+          <a:p>
+            <a:pPr algn="ctr"/>
+            <a:r>
+              <a:rPr lang="en-001" sz="2200" b="1" dirty="0">
+                <a:solidFill>
+                  <a:schemeClr val="tx1"/>
+                </a:solidFill>
+              </a:rPr>
+              <a:t>Hypothesis:</a:t>
+            </a:r>
+            <a:r>
+              <a:rPr lang="en-001" sz="2200" dirty="0">
+                <a:solidFill>
+                  <a:schemeClr val="tx1"/>
+                </a:solidFill>
+              </a:rPr>
+              <a:t> Even in Zurich, many social and professional activities </a:t>
+            </a:r>
+          </a:p>
+          <a:p>
+            <a:pPr algn="ctr"/>
+            <a:r>
+              <a:rPr lang="en-001" sz="2200" dirty="0">
+                <a:solidFill>
+                  <a:schemeClr val="tx1"/>
+                </a:solidFill>
+              </a:rPr>
+              <a:t>occur beyond the theoretically accessible area</a:t>
+            </a:r>
+          </a:p>
+        </p:txBody>
+      </p:sp>
+    </p:spTree>
+    <p:extLst>
+      <p:ext uri="{BB962C8B-B14F-4D97-AF65-F5344CB8AC3E}">
+        <p14:creationId xmlns:p14="http://schemas.microsoft.com/office/powerpoint/2010/main" val="2129016569"/>
+      </p:ext>
+    </p:extLst>
+  </p:cSld>
+  <p:clrMapOvr>
+    <a:masterClrMapping/>
+  </p:clrMapOvr>
+</p:sld>
+</file>
+
+<file path=ppt/slides/slide7.xml><?xml version="1.0" encoding="utf-8"?>
 <p:sld xmlns:a="http://schemas.openxmlformats.org/drawingml/2006/main" xmlns:r="http://schemas.openxmlformats.org/officeDocument/2006/relationships" xmlns:p="http://schemas.openxmlformats.org/presentationml/2006/main">
   <p:cSld>
     <p:spTree>
@@ -10468,10 +14835,13 @@
           <a:lstStyle/>
           <a:p>
             <a:r>
-              <a:rPr lang="fr-CH"/>
-              <a:t>Research plan</a:t>
-            </a:r>
-            <a:endParaRPr lang="fr-CH" dirty="0"/>
+              <a:rPr lang="fr-CH" dirty="0" err="1"/>
+              <a:t>Research</a:t>
+            </a:r>
+            <a:r>
+              <a:rPr lang="fr-CH" dirty="0"/>
+              <a:t> plan</a:t>
+            </a:r>
           </a:p>
         </p:txBody>
       </p:sp>
@@ -10491,7 +14861,7 @@
             <p:ph idx="1"/>
             <p:extLst>
               <p:ext uri="{D42A27DB-BD31-4B8C-83A1-F6EECF244321}">
-                <p14:modId xmlns:p14="http://schemas.microsoft.com/office/powerpoint/2010/main" val="3509146303"/>
+                <p14:modId xmlns:p14="http://schemas.microsoft.com/office/powerpoint/2010/main" val="3875943756"/>
               </p:ext>
             </p:extLst>
           </p:nvPr>
@@ -10663,7 +15033,2774 @@
 </p:sld>
 </file>
 
-<file path=ppt/slides/slide6.xml><?xml version="1.0" encoding="utf-8"?>
+<file path=ppt/slides/slide8.xml><?xml version="1.0" encoding="utf-8"?>
+<p:sld xmlns:a="http://schemas.openxmlformats.org/drawingml/2006/main" xmlns:r="http://schemas.openxmlformats.org/officeDocument/2006/relationships" xmlns:p="http://schemas.openxmlformats.org/presentationml/2006/main">
+  <p:cSld>
+    <p:bg>
+      <p:bgPr>
+        <a:solidFill>
+          <a:schemeClr val="bg1"/>
+        </a:solidFill>
+        <a:effectLst/>
+      </p:bgPr>
+    </p:bg>
+    <p:spTree>
+      <p:nvGrpSpPr>
+        <p:cNvPr id="1" name=""/>
+        <p:cNvGrpSpPr/>
+        <p:nvPr/>
+      </p:nvGrpSpPr>
+      <p:grpSpPr>
+        <a:xfrm>
+          <a:off x="0" y="0"/>
+          <a:ext cx="0" cy="0"/>
+          <a:chOff x="0" y="0"/>
+          <a:chExt cx="0" cy="0"/>
+        </a:xfrm>
+      </p:grpSpPr>
+      <p:sp useBgFill="1">
+        <p:nvSpPr>
+          <p:cNvPr id="10" name="Rectangle 9">
+            <a:extLst>
+              <a:ext uri="{FF2B5EF4-FFF2-40B4-BE49-F238E27FC236}">
+                <a16:creationId xmlns:a16="http://schemas.microsoft.com/office/drawing/2014/main" id="{3C54F4CE-85F0-46ED-80DA-9518C9251AD1}"/>
+              </a:ext>
+              <a:ext uri="{C183D7F6-B498-43B3-948B-1728B52AA6E4}">
+                <adec:decorative xmlns:adec="http://schemas.microsoft.com/office/drawing/2017/decorative" val="1"/>
+              </a:ext>
+            </a:extLst>
+          </p:cNvPr>
+          <p:cNvSpPr>
+            <a:spLocks noGrp="1" noRot="1" noChangeAspect="1" noMove="1" noResize="1" noEditPoints="1" noAdjustHandles="1" noChangeArrowheads="1" noChangeShapeType="1" noTextEdit="1"/>
+          </p:cNvSpPr>
+          <p:nvPr>
+            <p:extLst>
+              <p:ext uri="{386F3935-93C4-4BCD-93E2-E3B085C9AB24}">
+                <p16:designElem xmlns:p16="http://schemas.microsoft.com/office/powerpoint/2015/main" val="1"/>
+              </p:ext>
+            </p:extLst>
+          </p:nvPr>
+        </p:nvSpPr>
+        <p:spPr>
+          <a:xfrm>
+            <a:off x="0" y="0"/>
+            <a:ext cx="12192000" cy="6858000"/>
+          </a:xfrm>
+          <a:prstGeom prst="rect">
+            <a:avLst/>
+          </a:prstGeom>
+          <a:ln w="12700" cap="flat" cmpd="sng" algn="ctr">
+            <a:noFill/>
+            <a:prstDash val="solid"/>
+            <a:miter lim="800000"/>
+          </a:ln>
+          <a:effectLst/>
+          <a:extLst>
+            <a:ext uri="{91240B29-F687-4F45-9708-019B960494DF}">
+              <a14:hiddenLine xmlns:a14="http://schemas.microsoft.com/office/drawing/2010/main" w="12700" cap="flat" cmpd="sng" algn="ctr">
+                <a:solidFill>
+                  <a:schemeClr val="accent1">
+                    <a:shade val="50000"/>
+                  </a:schemeClr>
+                </a:solidFill>
+                <a:prstDash val="solid"/>
+                <a:miter lim="800000"/>
+              </a14:hiddenLine>
+            </a:ext>
+          </a:extLst>
+        </p:spPr>
+        <p:style>
+          <a:lnRef idx="2">
+            <a:schemeClr val="accent1">
+              <a:shade val="50000"/>
+            </a:schemeClr>
+          </a:lnRef>
+          <a:fillRef idx="1">
+            <a:schemeClr val="accent1"/>
+          </a:fillRef>
+          <a:effectRef idx="0">
+            <a:schemeClr val="accent1"/>
+          </a:effectRef>
+          <a:fontRef idx="minor">
+            <a:schemeClr val="lt1"/>
+          </a:fontRef>
+        </p:style>
+        <p:txBody>
+          <a:bodyPr rtlCol="0" anchor="ctr"/>
+          <a:lstStyle/>
+          <a:p>
+            <a:pPr algn="ctr"/>
+            <a:endParaRPr lang="en-US"/>
+          </a:p>
+        </p:txBody>
+      </p:sp>
+      <p:sp>
+        <p:nvSpPr>
+          <p:cNvPr id="12" name="Freeform: Shape 11">
+            <a:extLst>
+              <a:ext uri="{FF2B5EF4-FFF2-40B4-BE49-F238E27FC236}">
+                <a16:creationId xmlns:a16="http://schemas.microsoft.com/office/drawing/2014/main" id="{DADD1FCA-8ACB-4958-81DD-4CDD6D3E1921}"/>
+              </a:ext>
+              <a:ext uri="{C183D7F6-B498-43B3-948B-1728B52AA6E4}">
+                <adec:decorative xmlns:adec="http://schemas.microsoft.com/office/drawing/2017/decorative" val="1"/>
+              </a:ext>
+            </a:extLst>
+          </p:cNvPr>
+          <p:cNvSpPr>
+            <a:spLocks noGrp="1" noRot="1" noChangeAspect="1" noMove="1" noResize="1" noEditPoints="1" noAdjustHandles="1" noChangeArrowheads="1" noChangeShapeType="1" noTextEdit="1"/>
+          </p:cNvSpPr>
+          <p:nvPr>
+            <p:extLst>
+              <p:ext uri="{386F3935-93C4-4BCD-93E2-E3B085C9AB24}">
+                <p16:designElem xmlns:p16="http://schemas.microsoft.com/office/powerpoint/2015/main" val="1"/>
+              </p:ext>
+            </p:extLst>
+          </p:nvPr>
+        </p:nvSpPr>
+        <p:spPr>
+          <a:xfrm flipH="1">
+            <a:off x="0" y="0"/>
+            <a:ext cx="5802086" cy="6858000"/>
+          </a:xfrm>
+          <a:custGeom>
+            <a:avLst/>
+            <a:gdLst>
+              <a:gd name="connsiteX0" fmla="*/ 5734864 w 5734864"/>
+              <a:gd name="connsiteY0" fmla="*/ 0 h 6858000"/>
+              <a:gd name="connsiteX1" fmla="*/ 771611 w 5734864"/>
+              <a:gd name="connsiteY1" fmla="*/ 0 h 6858000"/>
+              <a:gd name="connsiteX2" fmla="*/ 771679 w 5734864"/>
+              <a:gd name="connsiteY2" fmla="*/ 49108 h 6858000"/>
+              <a:gd name="connsiteX3" fmla="*/ 794248 w 5734864"/>
+              <a:gd name="connsiteY3" fmla="*/ 200968 h 6858000"/>
+              <a:gd name="connsiteX4" fmla="*/ 801749 w 5734864"/>
+              <a:gd name="connsiteY4" fmla="*/ 414071 h 6858000"/>
+              <a:gd name="connsiteX5" fmla="*/ 818548 w 5734864"/>
+              <a:gd name="connsiteY5" fmla="*/ 585467 h 6858000"/>
+              <a:gd name="connsiteX6" fmla="*/ 857476 w 5734864"/>
+              <a:gd name="connsiteY6" fmla="*/ 800623 h 6858000"/>
+              <a:gd name="connsiteX7" fmla="*/ 851083 w 5734864"/>
+              <a:gd name="connsiteY7" fmla="*/ 878903 h 6858000"/>
+              <a:gd name="connsiteX8" fmla="*/ 873564 w 5734864"/>
+              <a:gd name="connsiteY8" fmla="*/ 943826 h 6858000"/>
+              <a:gd name="connsiteX9" fmla="*/ 864705 w 5734864"/>
+              <a:gd name="connsiteY9" fmla="*/ 973328 h 6858000"/>
+              <a:gd name="connsiteX10" fmla="*/ 862869 w 5734864"/>
+              <a:gd name="connsiteY10" fmla="*/ 978457 h 6858000"/>
+              <a:gd name="connsiteX11" fmla="*/ 862233 w 5734864"/>
+              <a:gd name="connsiteY11" fmla="*/ 998041 h 6858000"/>
+              <a:gd name="connsiteX12" fmla="*/ 853665 w 5734864"/>
+              <a:gd name="connsiteY12" fmla="*/ 1004750 h 6858000"/>
+              <a:gd name="connsiteX13" fmla="*/ 846695 w 5734864"/>
+              <a:gd name="connsiteY13" fmla="*/ 1035077 h 6858000"/>
+              <a:gd name="connsiteX14" fmla="*/ 847865 w 5734864"/>
+              <a:gd name="connsiteY14" fmla="*/ 1070795 h 6858000"/>
+              <a:gd name="connsiteX15" fmla="*/ 862786 w 5734864"/>
+              <a:gd name="connsiteY15" fmla="*/ 1238994 h 6858000"/>
+              <a:gd name="connsiteX16" fmla="*/ 859345 w 5734864"/>
+              <a:gd name="connsiteY16" fmla="*/ 1380427 h 6858000"/>
+              <a:gd name="connsiteX17" fmla="*/ 855172 w 5734864"/>
+              <a:gd name="connsiteY17" fmla="*/ 1435262 h 6858000"/>
+              <a:gd name="connsiteX18" fmla="*/ 860494 w 5734864"/>
+              <a:gd name="connsiteY18" fmla="*/ 1453861 h 6858000"/>
+              <a:gd name="connsiteX19" fmla="*/ 853731 w 5734864"/>
+              <a:gd name="connsiteY19" fmla="*/ 1467047 h 6858000"/>
+              <a:gd name="connsiteX20" fmla="*/ 845847 w 5734864"/>
+              <a:gd name="connsiteY20" fmla="*/ 1502307 h 6858000"/>
+              <a:gd name="connsiteX21" fmla="*/ 817613 w 5734864"/>
+              <a:gd name="connsiteY21" fmla="*/ 1565166 h 6858000"/>
+              <a:gd name="connsiteX22" fmla="*/ 804223 w 5734864"/>
+              <a:gd name="connsiteY22" fmla="*/ 1601941 h 6858000"/>
+              <a:gd name="connsiteX23" fmla="*/ 791773 w 5734864"/>
+              <a:gd name="connsiteY23" fmla="*/ 1627005 h 6858000"/>
+              <a:gd name="connsiteX24" fmla="*/ 774645 w 5734864"/>
+              <a:gd name="connsiteY24" fmla="*/ 1699922 h 6858000"/>
+              <a:gd name="connsiteX25" fmla="*/ 752343 w 5734864"/>
+              <a:gd name="connsiteY25" fmla="*/ 1824604 h 6858000"/>
+              <a:gd name="connsiteX26" fmla="*/ 746254 w 5734864"/>
+              <a:gd name="connsiteY26" fmla="*/ 1850222 h 6858000"/>
+              <a:gd name="connsiteX27" fmla="*/ 728600 w 5734864"/>
+              <a:gd name="connsiteY27" fmla="*/ 1869603 h 6858000"/>
+              <a:gd name="connsiteX28" fmla="*/ 724396 w 5734864"/>
+              <a:gd name="connsiteY28" fmla="*/ 1883104 h 6858000"/>
+              <a:gd name="connsiteX29" fmla="*/ 722165 w 5734864"/>
+              <a:gd name="connsiteY29" fmla="*/ 1885924 h 6858000"/>
+              <a:gd name="connsiteX30" fmla="*/ 721338 w 5734864"/>
+              <a:gd name="connsiteY30" fmla="*/ 1887123 h 6858000"/>
+              <a:gd name="connsiteX31" fmla="*/ 714840 w 5734864"/>
+              <a:gd name="connsiteY31" fmla="*/ 1902274 h 6858000"/>
+              <a:gd name="connsiteX32" fmla="*/ 722847 w 5734864"/>
+              <a:gd name="connsiteY32" fmla="*/ 1929891 h 6858000"/>
+              <a:gd name="connsiteX33" fmla="*/ 719647 w 5734864"/>
+              <a:gd name="connsiteY33" fmla="*/ 1936120 h 6858000"/>
+              <a:gd name="connsiteX34" fmla="*/ 714660 w 5734864"/>
+              <a:gd name="connsiteY34" fmla="*/ 1982709 h 6858000"/>
+              <a:gd name="connsiteX35" fmla="*/ 710759 w 5734864"/>
+              <a:gd name="connsiteY35" fmla="*/ 2013010 h 6858000"/>
+              <a:gd name="connsiteX36" fmla="*/ 697927 w 5734864"/>
+              <a:gd name="connsiteY36" fmla="*/ 2069833 h 6858000"/>
+              <a:gd name="connsiteX37" fmla="*/ 693594 w 5734864"/>
+              <a:gd name="connsiteY37" fmla="*/ 2103731 h 6858000"/>
+              <a:gd name="connsiteX38" fmla="*/ 691109 w 5734864"/>
+              <a:gd name="connsiteY38" fmla="*/ 2124027 h 6858000"/>
+              <a:gd name="connsiteX39" fmla="*/ 676593 w 5734864"/>
+              <a:gd name="connsiteY39" fmla="*/ 2176182 h 6858000"/>
+              <a:gd name="connsiteX40" fmla="*/ 633227 w 5734864"/>
+              <a:gd name="connsiteY40" fmla="*/ 2258036 h 6858000"/>
+              <a:gd name="connsiteX41" fmla="*/ 625564 w 5734864"/>
+              <a:gd name="connsiteY41" fmla="*/ 2284567 h 6858000"/>
+              <a:gd name="connsiteX42" fmla="*/ 627074 w 5734864"/>
+              <a:gd name="connsiteY42" fmla="*/ 2289605 h 6858000"/>
+              <a:gd name="connsiteX43" fmla="*/ 614574 w 5734864"/>
+              <a:gd name="connsiteY43" fmla="*/ 2308717 h 6858000"/>
+              <a:gd name="connsiteX44" fmla="*/ 606890 w 5734864"/>
+              <a:gd name="connsiteY44" fmla="*/ 2320662 h 6858000"/>
+              <a:gd name="connsiteX45" fmla="*/ 605558 w 5734864"/>
+              <a:gd name="connsiteY45" fmla="*/ 2327897 h 6858000"/>
+              <a:gd name="connsiteX46" fmla="*/ 602202 w 5734864"/>
+              <a:gd name="connsiteY46" fmla="*/ 2357749 h 6858000"/>
+              <a:gd name="connsiteX47" fmla="*/ 600213 w 5734864"/>
+              <a:gd name="connsiteY47" fmla="*/ 2364905 h 6858000"/>
+              <a:gd name="connsiteX48" fmla="*/ 597160 w 5734864"/>
+              <a:gd name="connsiteY48" fmla="*/ 2388351 h 6858000"/>
+              <a:gd name="connsiteX49" fmla="*/ 597982 w 5734864"/>
+              <a:gd name="connsiteY49" fmla="*/ 2402296 h 6858000"/>
+              <a:gd name="connsiteX50" fmla="*/ 593150 w 5734864"/>
+              <a:gd name="connsiteY50" fmla="*/ 2420015 h 6858000"/>
+              <a:gd name="connsiteX51" fmla="*/ 592833 w 5734864"/>
+              <a:gd name="connsiteY51" fmla="*/ 2422749 h 6858000"/>
+              <a:gd name="connsiteX52" fmla="*/ 594479 w 5734864"/>
+              <a:gd name="connsiteY52" fmla="*/ 2426002 h 6858000"/>
+              <a:gd name="connsiteX53" fmla="*/ 591963 w 5734864"/>
+              <a:gd name="connsiteY53" fmla="*/ 2431950 h 6858000"/>
+              <a:gd name="connsiteX54" fmla="*/ 591544 w 5734864"/>
+              <a:gd name="connsiteY54" fmla="*/ 2433897 h 6858000"/>
+              <a:gd name="connsiteX55" fmla="*/ 589519 w 5734864"/>
+              <a:gd name="connsiteY55" fmla="*/ 2451398 h 6858000"/>
+              <a:gd name="connsiteX56" fmla="*/ 590037 w 5734864"/>
+              <a:gd name="connsiteY56" fmla="*/ 2455536 h 6858000"/>
+              <a:gd name="connsiteX57" fmla="*/ 588179 w 5734864"/>
+              <a:gd name="connsiteY57" fmla="*/ 2462981 h 6858000"/>
+              <a:gd name="connsiteX58" fmla="*/ 583434 w 5734864"/>
+              <a:gd name="connsiteY58" fmla="*/ 2503991 h 6858000"/>
+              <a:gd name="connsiteX59" fmla="*/ 567942 w 5734864"/>
+              <a:gd name="connsiteY59" fmla="*/ 2652936 h 6858000"/>
+              <a:gd name="connsiteX60" fmla="*/ 573869 w 5734864"/>
+              <a:gd name="connsiteY60" fmla="*/ 2670188 h 6858000"/>
+              <a:gd name="connsiteX61" fmla="*/ 575243 w 5734864"/>
+              <a:gd name="connsiteY61" fmla="*/ 2688114 h 6858000"/>
+              <a:gd name="connsiteX62" fmla="*/ 573824 w 5734864"/>
+              <a:gd name="connsiteY62" fmla="*/ 2689856 h 6858000"/>
+              <a:gd name="connsiteX63" fmla="*/ 570699 w 5734864"/>
+              <a:gd name="connsiteY63" fmla="*/ 2709353 h 6858000"/>
+              <a:gd name="connsiteX64" fmla="*/ 573192 w 5734864"/>
+              <a:gd name="connsiteY64" fmla="*/ 2714527 h 6858000"/>
+              <a:gd name="connsiteX65" fmla="*/ 572044 w 5734864"/>
+              <a:gd name="connsiteY65" fmla="*/ 2728187 h 6858000"/>
+              <a:gd name="connsiteX66" fmla="*/ 572465 w 5734864"/>
+              <a:gd name="connsiteY66" fmla="*/ 2755863 h 6858000"/>
+              <a:gd name="connsiteX67" fmla="*/ 570028 w 5734864"/>
+              <a:gd name="connsiteY67" fmla="*/ 2760324 h 6858000"/>
+              <a:gd name="connsiteX68" fmla="*/ 566748 w 5734864"/>
+              <a:gd name="connsiteY68" fmla="*/ 2800948 h 6858000"/>
+              <a:gd name="connsiteX69" fmla="*/ 565509 w 5734864"/>
+              <a:gd name="connsiteY69" fmla="*/ 2801167 h 6858000"/>
+              <a:gd name="connsiteX70" fmla="*/ 559367 w 5734864"/>
+              <a:gd name="connsiteY70" fmla="*/ 2811129 h 6858000"/>
+              <a:gd name="connsiteX71" fmla="*/ 550354 w 5734864"/>
+              <a:gd name="connsiteY71" fmla="*/ 2830949 h 6858000"/>
+              <a:gd name="connsiteX72" fmla="*/ 514795 w 5734864"/>
+              <a:gd name="connsiteY72" fmla="*/ 2872433 h 6858000"/>
+              <a:gd name="connsiteX73" fmla="*/ 509875 w 5734864"/>
+              <a:gd name="connsiteY73" fmla="*/ 2923099 h 6858000"/>
+              <a:gd name="connsiteX74" fmla="*/ 509577 w 5734864"/>
+              <a:gd name="connsiteY74" fmla="*/ 2923197 h 6858000"/>
+              <a:gd name="connsiteX75" fmla="*/ 507597 w 5734864"/>
+              <a:gd name="connsiteY75" fmla="*/ 2931868 h 6858000"/>
+              <a:gd name="connsiteX76" fmla="*/ 507379 w 5734864"/>
+              <a:gd name="connsiteY76" fmla="*/ 2938322 h 6858000"/>
+              <a:gd name="connsiteX77" fmla="*/ 504725 w 5734864"/>
+              <a:gd name="connsiteY77" fmla="*/ 2954519 h 6858000"/>
+              <a:gd name="connsiteX78" fmla="*/ 502018 w 5734864"/>
+              <a:gd name="connsiteY78" fmla="*/ 2959643 h 6858000"/>
+              <a:gd name="connsiteX79" fmla="*/ 498360 w 5734864"/>
+              <a:gd name="connsiteY79" fmla="*/ 2961019 h 6858000"/>
+              <a:gd name="connsiteX80" fmla="*/ 498483 w 5734864"/>
+              <a:gd name="connsiteY80" fmla="*/ 2962590 h 6858000"/>
+              <a:gd name="connsiteX81" fmla="*/ 484403 w 5734864"/>
+              <a:gd name="connsiteY81" fmla="*/ 2990538 h 6858000"/>
+              <a:gd name="connsiteX82" fmla="*/ 463075 w 5734864"/>
+              <a:gd name="connsiteY82" fmla="*/ 3055956 h 6858000"/>
+              <a:gd name="connsiteX83" fmla="*/ 455013 w 5734864"/>
+              <a:gd name="connsiteY83" fmla="*/ 3094482 h 6858000"/>
+              <a:gd name="connsiteX84" fmla="*/ 428391 w 5734864"/>
+              <a:gd name="connsiteY84" fmla="*/ 3198850 h 6858000"/>
+              <a:gd name="connsiteX85" fmla="*/ 401440 w 5734864"/>
+              <a:gd name="connsiteY85" fmla="*/ 3307560 h 6858000"/>
+              <a:gd name="connsiteX86" fmla="*/ 386076 w 5734864"/>
+              <a:gd name="connsiteY86" fmla="*/ 3373943 h 6858000"/>
+              <a:gd name="connsiteX87" fmla="*/ 374726 w 5734864"/>
+              <a:gd name="connsiteY87" fmla="*/ 3381364 h 6858000"/>
+              <a:gd name="connsiteX88" fmla="*/ 369145 w 5734864"/>
+              <a:gd name="connsiteY88" fmla="*/ 3383729 h 6858000"/>
+              <a:gd name="connsiteX89" fmla="*/ 364294 w 5734864"/>
+              <a:gd name="connsiteY89" fmla="*/ 3414159 h 6858000"/>
+              <a:gd name="connsiteX90" fmla="*/ 366450 w 5734864"/>
+              <a:gd name="connsiteY90" fmla="*/ 3436925 h 6858000"/>
+              <a:gd name="connsiteX91" fmla="*/ 351743 w 5734864"/>
+              <a:gd name="connsiteY91" fmla="*/ 3521619 h 6858000"/>
+              <a:gd name="connsiteX92" fmla="*/ 345784 w 5734864"/>
+              <a:gd name="connsiteY92" fmla="*/ 3603757 h 6858000"/>
+              <a:gd name="connsiteX93" fmla="*/ 344198 w 5734864"/>
+              <a:gd name="connsiteY93" fmla="*/ 3652424 h 6858000"/>
+              <a:gd name="connsiteX94" fmla="*/ 352450 w 5734864"/>
+              <a:gd name="connsiteY94" fmla="*/ 3665222 h 6858000"/>
+              <a:gd name="connsiteX95" fmla="*/ 342621 w 5734864"/>
+              <a:gd name="connsiteY95" fmla="*/ 3700804 h 6858000"/>
+              <a:gd name="connsiteX96" fmla="*/ 341514 w 5734864"/>
+              <a:gd name="connsiteY96" fmla="*/ 3734774 h 6858000"/>
+              <a:gd name="connsiteX97" fmla="*/ 340607 w 5734864"/>
+              <a:gd name="connsiteY97" fmla="*/ 3785153 h 6858000"/>
+              <a:gd name="connsiteX98" fmla="*/ 340707 w 5734864"/>
+              <a:gd name="connsiteY98" fmla="*/ 3788177 h 6858000"/>
+              <a:gd name="connsiteX99" fmla="*/ 340361 w 5734864"/>
+              <a:gd name="connsiteY99" fmla="*/ 3798803 h 6858000"/>
+              <a:gd name="connsiteX100" fmla="*/ 339642 w 5734864"/>
+              <a:gd name="connsiteY100" fmla="*/ 3838750 h 6858000"/>
+              <a:gd name="connsiteX101" fmla="*/ 360295 w 5734864"/>
+              <a:gd name="connsiteY101" fmla="*/ 4015196 h 6858000"/>
+              <a:gd name="connsiteX102" fmla="*/ 339043 w 5734864"/>
+              <a:gd name="connsiteY102" fmla="*/ 4052778 h 6858000"/>
+              <a:gd name="connsiteX103" fmla="*/ 339343 w 5734864"/>
+              <a:gd name="connsiteY103" fmla="*/ 4096257 h 6858000"/>
+              <a:gd name="connsiteX104" fmla="*/ 340786 w 5734864"/>
+              <a:gd name="connsiteY104" fmla="*/ 4321136 h 6858000"/>
+              <a:gd name="connsiteX105" fmla="*/ 343158 w 5734864"/>
+              <a:gd name="connsiteY105" fmla="*/ 4429174 h 6858000"/>
+              <a:gd name="connsiteX106" fmla="*/ 334599 w 5734864"/>
+              <a:gd name="connsiteY106" fmla="*/ 4449938 h 6858000"/>
+              <a:gd name="connsiteX107" fmla="*/ 332890 w 5734864"/>
+              <a:gd name="connsiteY107" fmla="*/ 4453515 h 6858000"/>
+              <a:gd name="connsiteX108" fmla="*/ 331105 w 5734864"/>
+              <a:gd name="connsiteY108" fmla="*/ 4467941 h 6858000"/>
+              <a:gd name="connsiteX109" fmla="*/ 324289 w 5734864"/>
+              <a:gd name="connsiteY109" fmla="*/ 4471861 h 6858000"/>
+              <a:gd name="connsiteX110" fmla="*/ 317079 w 5734864"/>
+              <a:gd name="connsiteY110" fmla="*/ 4493468 h 6858000"/>
+              <a:gd name="connsiteX111" fmla="*/ 315557 w 5734864"/>
+              <a:gd name="connsiteY111" fmla="*/ 4520067 h 6858000"/>
+              <a:gd name="connsiteX112" fmla="*/ 315240 w 5734864"/>
+              <a:gd name="connsiteY112" fmla="*/ 4536872 h 6858000"/>
+              <a:gd name="connsiteX113" fmla="*/ 316200 w 5734864"/>
+              <a:gd name="connsiteY113" fmla="*/ 4538297 h 6858000"/>
+              <a:gd name="connsiteX114" fmla="*/ 317507 w 5734864"/>
+              <a:gd name="connsiteY114" fmla="*/ 4547582 h 6858000"/>
+              <a:gd name="connsiteX115" fmla="*/ 323078 w 5734864"/>
+              <a:gd name="connsiteY115" fmla="*/ 4592102 h 6858000"/>
+              <a:gd name="connsiteX116" fmla="*/ 328722 w 5734864"/>
+              <a:gd name="connsiteY116" fmla="*/ 4667914 h 6858000"/>
+              <a:gd name="connsiteX117" fmla="*/ 335597 w 5734864"/>
+              <a:gd name="connsiteY117" fmla="*/ 4695035 h 6858000"/>
+              <a:gd name="connsiteX118" fmla="*/ 339485 w 5734864"/>
+              <a:gd name="connsiteY118" fmla="*/ 4695979 h 6858000"/>
+              <a:gd name="connsiteX119" fmla="*/ 341089 w 5734864"/>
+              <a:gd name="connsiteY119" fmla="*/ 4704268 h 6858000"/>
+              <a:gd name="connsiteX120" fmla="*/ 342177 w 5734864"/>
+              <a:gd name="connsiteY120" fmla="*/ 4706060 h 6858000"/>
+              <a:gd name="connsiteX121" fmla="*/ 347751 w 5734864"/>
+              <a:gd name="connsiteY121" fmla="*/ 4716754 h 6858000"/>
+              <a:gd name="connsiteX122" fmla="*/ 344125 w 5734864"/>
+              <a:gd name="connsiteY122" fmla="*/ 4764669 h 6858000"/>
+              <a:gd name="connsiteX123" fmla="*/ 340188 w 5734864"/>
+              <a:gd name="connsiteY123" fmla="*/ 4779386 h 6858000"/>
+              <a:gd name="connsiteX124" fmla="*/ 335146 w 5734864"/>
+              <a:gd name="connsiteY124" fmla="*/ 4787491 h 6858000"/>
+              <a:gd name="connsiteX125" fmla="*/ 319124 w 5734864"/>
+              <a:gd name="connsiteY125" fmla="*/ 4843514 h 6858000"/>
+              <a:gd name="connsiteX126" fmla="*/ 305956 w 5734864"/>
+              <a:gd name="connsiteY126" fmla="*/ 4881505 h 6858000"/>
+              <a:gd name="connsiteX127" fmla="*/ 301062 w 5734864"/>
+              <a:gd name="connsiteY127" fmla="*/ 4889332 h 6858000"/>
+              <a:gd name="connsiteX128" fmla="*/ 302141 w 5734864"/>
+              <a:gd name="connsiteY128" fmla="*/ 4899400 h 6858000"/>
+              <a:gd name="connsiteX129" fmla="*/ 304424 w 5734864"/>
+              <a:gd name="connsiteY129" fmla="*/ 4902664 h 6858000"/>
+              <a:gd name="connsiteX130" fmla="*/ 293123 w 5734864"/>
+              <a:gd name="connsiteY130" fmla="*/ 4932769 h 6858000"/>
+              <a:gd name="connsiteX131" fmla="*/ 292275 w 5734864"/>
+              <a:gd name="connsiteY131" fmla="*/ 4936482 h 6858000"/>
+              <a:gd name="connsiteX132" fmla="*/ 288304 w 5734864"/>
+              <a:gd name="connsiteY132" fmla="*/ 4962325 h 6858000"/>
+              <a:gd name="connsiteX133" fmla="*/ 287420 w 5734864"/>
+              <a:gd name="connsiteY133" fmla="*/ 5042193 h 6858000"/>
+              <a:gd name="connsiteX134" fmla="*/ 287020 w 5734864"/>
+              <a:gd name="connsiteY134" fmla="*/ 5065655 h 6858000"/>
+              <a:gd name="connsiteX135" fmla="*/ 288488 w 5734864"/>
+              <a:gd name="connsiteY135" fmla="*/ 5082216 h 6858000"/>
+              <a:gd name="connsiteX136" fmla="*/ 282763 w 5734864"/>
+              <a:gd name="connsiteY136" fmla="*/ 5127114 h 6858000"/>
+              <a:gd name="connsiteX137" fmla="*/ 269316 w 5734864"/>
+              <a:gd name="connsiteY137" fmla="*/ 5202682 h 6858000"/>
+              <a:gd name="connsiteX138" fmla="*/ 269174 w 5734864"/>
+              <a:gd name="connsiteY138" fmla="*/ 5230835 h 6858000"/>
+              <a:gd name="connsiteX139" fmla="*/ 272679 w 5734864"/>
+              <a:gd name="connsiteY139" fmla="*/ 5232660 h 6858000"/>
+              <a:gd name="connsiteX140" fmla="*/ 272160 w 5734864"/>
+              <a:gd name="connsiteY140" fmla="*/ 5241150 h 6858000"/>
+              <a:gd name="connsiteX141" fmla="*/ 272760 w 5734864"/>
+              <a:gd name="connsiteY141" fmla="*/ 5243156 h 6858000"/>
+              <a:gd name="connsiteX142" fmla="*/ 275462 w 5734864"/>
+              <a:gd name="connsiteY142" fmla="*/ 5254919 h 6858000"/>
+              <a:gd name="connsiteX143" fmla="*/ 262897 w 5734864"/>
+              <a:gd name="connsiteY143" fmla="*/ 5286259 h 6858000"/>
+              <a:gd name="connsiteX144" fmla="*/ 252761 w 5734864"/>
+              <a:gd name="connsiteY144" fmla="*/ 5357801 h 6858000"/>
+              <a:gd name="connsiteX145" fmla="*/ 242360 w 5734864"/>
+              <a:gd name="connsiteY145" fmla="*/ 5460080 h 6858000"/>
+              <a:gd name="connsiteX146" fmla="*/ 229880 w 5734864"/>
+              <a:gd name="connsiteY146" fmla="*/ 5539714 h 6858000"/>
+              <a:gd name="connsiteX147" fmla="*/ 204283 w 5734864"/>
+              <a:gd name="connsiteY147" fmla="*/ 5639080 h 6858000"/>
+              <a:gd name="connsiteX148" fmla="*/ 198948 w 5734864"/>
+              <a:gd name="connsiteY148" fmla="*/ 5710958 h 6858000"/>
+              <a:gd name="connsiteX149" fmla="*/ 192367 w 5734864"/>
+              <a:gd name="connsiteY149" fmla="*/ 5719859 h 6858000"/>
+              <a:gd name="connsiteX150" fmla="*/ 188035 w 5734864"/>
+              <a:gd name="connsiteY150" fmla="*/ 5729935 h 6858000"/>
+              <a:gd name="connsiteX151" fmla="*/ 188428 w 5734864"/>
+              <a:gd name="connsiteY151" fmla="*/ 5731182 h 6858000"/>
+              <a:gd name="connsiteX152" fmla="*/ 181635 w 5734864"/>
+              <a:gd name="connsiteY152" fmla="*/ 5753538 h 6858000"/>
+              <a:gd name="connsiteX153" fmla="*/ 169744 w 5734864"/>
+              <a:gd name="connsiteY153" fmla="*/ 5796307 h 6858000"/>
+              <a:gd name="connsiteX154" fmla="*/ 170351 w 5734864"/>
+              <a:gd name="connsiteY154" fmla="*/ 5796644 h 6858000"/>
+              <a:gd name="connsiteX155" fmla="*/ 171559 w 5734864"/>
+              <a:gd name="connsiteY155" fmla="*/ 5803435 h 6858000"/>
+              <a:gd name="connsiteX156" fmla="*/ 172284 w 5734864"/>
+              <a:gd name="connsiteY156" fmla="*/ 5816391 h 6858000"/>
+              <a:gd name="connsiteX157" fmla="*/ 182542 w 5734864"/>
+              <a:gd name="connsiteY157" fmla="*/ 5846382 h 6858000"/>
+              <a:gd name="connsiteX158" fmla="*/ 175877 w 5734864"/>
+              <a:gd name="connsiteY158" fmla="*/ 5871336 h 6858000"/>
+              <a:gd name="connsiteX159" fmla="*/ 174910 w 5734864"/>
+              <a:gd name="connsiteY159" fmla="*/ 5876376 h 6858000"/>
+              <a:gd name="connsiteX160" fmla="*/ 175047 w 5734864"/>
+              <a:gd name="connsiteY160" fmla="*/ 5876483 h 6858000"/>
+              <a:gd name="connsiteX161" fmla="*/ 174335 w 5734864"/>
+              <a:gd name="connsiteY161" fmla="*/ 5881814 h 6858000"/>
+              <a:gd name="connsiteX162" fmla="*/ 171273 w 5734864"/>
+              <a:gd name="connsiteY162" fmla="*/ 5895339 h 6858000"/>
+              <a:gd name="connsiteX163" fmla="*/ 171658 w 5734864"/>
+              <a:gd name="connsiteY163" fmla="*/ 5898749 h 6858000"/>
+              <a:gd name="connsiteX164" fmla="*/ 174658 w 5734864"/>
+              <a:gd name="connsiteY164" fmla="*/ 5919558 h 6858000"/>
+              <a:gd name="connsiteX165" fmla="*/ 169099 w 5734864"/>
+              <a:gd name="connsiteY165" fmla="*/ 5984417 h 6858000"/>
+              <a:gd name="connsiteX166" fmla="*/ 162007 w 5734864"/>
+              <a:gd name="connsiteY166" fmla="*/ 6049043 h 6858000"/>
+              <a:gd name="connsiteX167" fmla="*/ 156875 w 5734864"/>
+              <a:gd name="connsiteY167" fmla="*/ 6114000 h 6858000"/>
+              <a:gd name="connsiteX168" fmla="*/ 165441 w 5734864"/>
+              <a:gd name="connsiteY168" fmla="*/ 6146938 h 6858000"/>
+              <a:gd name="connsiteX169" fmla="*/ 165177 w 5734864"/>
+              <a:gd name="connsiteY169" fmla="*/ 6150658 h 6858000"/>
+              <a:gd name="connsiteX170" fmla="*/ 161772 w 5734864"/>
+              <a:gd name="connsiteY170" fmla="*/ 6160011 h 6858000"/>
+              <a:gd name="connsiteX171" fmla="*/ 160051 w 5734864"/>
+              <a:gd name="connsiteY171" fmla="*/ 6163393 h 6858000"/>
+              <a:gd name="connsiteX172" fmla="*/ 158473 w 5734864"/>
+              <a:gd name="connsiteY172" fmla="*/ 6168628 h 6858000"/>
+              <a:gd name="connsiteX173" fmla="*/ 158573 w 5734864"/>
+              <a:gd name="connsiteY173" fmla="*/ 6168799 h 6858000"/>
+              <a:gd name="connsiteX174" fmla="*/ 146463 w 5734864"/>
+              <a:gd name="connsiteY174" fmla="*/ 6196671 h 6858000"/>
+              <a:gd name="connsiteX175" fmla="*/ 150209 w 5734864"/>
+              <a:gd name="connsiteY175" fmla="*/ 6232365 h 6858000"/>
+              <a:gd name="connsiteX176" fmla="*/ 148544 w 5734864"/>
+              <a:gd name="connsiteY176" fmla="*/ 6246162 h 6858000"/>
+              <a:gd name="connsiteX177" fmla="*/ 148403 w 5734864"/>
+              <a:gd name="connsiteY177" fmla="*/ 6253754 h 6858000"/>
+              <a:gd name="connsiteX178" fmla="*/ 138880 w 5734864"/>
+              <a:gd name="connsiteY178" fmla="*/ 6276449 h 6858000"/>
+              <a:gd name="connsiteX179" fmla="*/ 138683 w 5734864"/>
+              <a:gd name="connsiteY179" fmla="*/ 6279721 h 6858000"/>
+              <a:gd name="connsiteX180" fmla="*/ 130721 w 5734864"/>
+              <a:gd name="connsiteY180" fmla="*/ 6293675 h 6858000"/>
+              <a:gd name="connsiteX181" fmla="*/ 120717 w 5734864"/>
+              <a:gd name="connsiteY181" fmla="*/ 6313967 h 6858000"/>
+              <a:gd name="connsiteX182" fmla="*/ 120841 w 5734864"/>
+              <a:gd name="connsiteY182" fmla="*/ 6315437 h 6858000"/>
+              <a:gd name="connsiteX183" fmla="*/ 115208 w 5734864"/>
+              <a:gd name="connsiteY183" fmla="*/ 6324024 h 6858000"/>
+              <a:gd name="connsiteX184" fmla="*/ 101217 w 5734864"/>
+              <a:gd name="connsiteY184" fmla="*/ 6365923 h 6858000"/>
+              <a:gd name="connsiteX185" fmla="*/ 74946 w 5734864"/>
+              <a:gd name="connsiteY185" fmla="*/ 6556817 h 6858000"/>
+              <a:gd name="connsiteX186" fmla="*/ 16001 w 5734864"/>
+              <a:gd name="connsiteY186" fmla="*/ 6808678 h 6858000"/>
+              <a:gd name="connsiteX187" fmla="*/ 0 w 5734864"/>
+              <a:gd name="connsiteY187" fmla="*/ 6858000 h 6858000"/>
+              <a:gd name="connsiteX188" fmla="*/ 5734864 w 5734864"/>
+              <a:gd name="connsiteY188" fmla="*/ 6858000 h 6858000"/>
+              <a:gd name="connsiteX0" fmla="*/ 5734864 w 5734864"/>
+              <a:gd name="connsiteY0" fmla="*/ 0 h 6858000"/>
+              <a:gd name="connsiteX1" fmla="*/ 771611 w 5734864"/>
+              <a:gd name="connsiteY1" fmla="*/ 0 h 6858000"/>
+              <a:gd name="connsiteX2" fmla="*/ 771679 w 5734864"/>
+              <a:gd name="connsiteY2" fmla="*/ 49108 h 6858000"/>
+              <a:gd name="connsiteX3" fmla="*/ 794248 w 5734864"/>
+              <a:gd name="connsiteY3" fmla="*/ 200968 h 6858000"/>
+              <a:gd name="connsiteX4" fmla="*/ 801749 w 5734864"/>
+              <a:gd name="connsiteY4" fmla="*/ 414071 h 6858000"/>
+              <a:gd name="connsiteX5" fmla="*/ 818548 w 5734864"/>
+              <a:gd name="connsiteY5" fmla="*/ 585467 h 6858000"/>
+              <a:gd name="connsiteX6" fmla="*/ 857476 w 5734864"/>
+              <a:gd name="connsiteY6" fmla="*/ 800623 h 6858000"/>
+              <a:gd name="connsiteX7" fmla="*/ 851083 w 5734864"/>
+              <a:gd name="connsiteY7" fmla="*/ 878903 h 6858000"/>
+              <a:gd name="connsiteX8" fmla="*/ 873564 w 5734864"/>
+              <a:gd name="connsiteY8" fmla="*/ 943826 h 6858000"/>
+              <a:gd name="connsiteX9" fmla="*/ 864705 w 5734864"/>
+              <a:gd name="connsiteY9" fmla="*/ 973328 h 6858000"/>
+              <a:gd name="connsiteX10" fmla="*/ 862869 w 5734864"/>
+              <a:gd name="connsiteY10" fmla="*/ 978457 h 6858000"/>
+              <a:gd name="connsiteX11" fmla="*/ 862233 w 5734864"/>
+              <a:gd name="connsiteY11" fmla="*/ 998041 h 6858000"/>
+              <a:gd name="connsiteX12" fmla="*/ 853665 w 5734864"/>
+              <a:gd name="connsiteY12" fmla="*/ 1004750 h 6858000"/>
+              <a:gd name="connsiteX13" fmla="*/ 846695 w 5734864"/>
+              <a:gd name="connsiteY13" fmla="*/ 1035077 h 6858000"/>
+              <a:gd name="connsiteX14" fmla="*/ 847865 w 5734864"/>
+              <a:gd name="connsiteY14" fmla="*/ 1070795 h 6858000"/>
+              <a:gd name="connsiteX15" fmla="*/ 862786 w 5734864"/>
+              <a:gd name="connsiteY15" fmla="*/ 1238994 h 6858000"/>
+              <a:gd name="connsiteX16" fmla="*/ 859345 w 5734864"/>
+              <a:gd name="connsiteY16" fmla="*/ 1380427 h 6858000"/>
+              <a:gd name="connsiteX17" fmla="*/ 855172 w 5734864"/>
+              <a:gd name="connsiteY17" fmla="*/ 1435262 h 6858000"/>
+              <a:gd name="connsiteX18" fmla="*/ 860494 w 5734864"/>
+              <a:gd name="connsiteY18" fmla="*/ 1453861 h 6858000"/>
+              <a:gd name="connsiteX19" fmla="*/ 853731 w 5734864"/>
+              <a:gd name="connsiteY19" fmla="*/ 1467047 h 6858000"/>
+              <a:gd name="connsiteX20" fmla="*/ 845847 w 5734864"/>
+              <a:gd name="connsiteY20" fmla="*/ 1502307 h 6858000"/>
+              <a:gd name="connsiteX21" fmla="*/ 817613 w 5734864"/>
+              <a:gd name="connsiteY21" fmla="*/ 1565166 h 6858000"/>
+              <a:gd name="connsiteX22" fmla="*/ 804223 w 5734864"/>
+              <a:gd name="connsiteY22" fmla="*/ 1601941 h 6858000"/>
+              <a:gd name="connsiteX23" fmla="*/ 791773 w 5734864"/>
+              <a:gd name="connsiteY23" fmla="*/ 1627005 h 6858000"/>
+              <a:gd name="connsiteX24" fmla="*/ 774645 w 5734864"/>
+              <a:gd name="connsiteY24" fmla="*/ 1699922 h 6858000"/>
+              <a:gd name="connsiteX25" fmla="*/ 752343 w 5734864"/>
+              <a:gd name="connsiteY25" fmla="*/ 1824604 h 6858000"/>
+              <a:gd name="connsiteX26" fmla="*/ 746254 w 5734864"/>
+              <a:gd name="connsiteY26" fmla="*/ 1850222 h 6858000"/>
+              <a:gd name="connsiteX27" fmla="*/ 728600 w 5734864"/>
+              <a:gd name="connsiteY27" fmla="*/ 1869603 h 6858000"/>
+              <a:gd name="connsiteX28" fmla="*/ 724396 w 5734864"/>
+              <a:gd name="connsiteY28" fmla="*/ 1883104 h 6858000"/>
+              <a:gd name="connsiteX29" fmla="*/ 722165 w 5734864"/>
+              <a:gd name="connsiteY29" fmla="*/ 1885924 h 6858000"/>
+              <a:gd name="connsiteX30" fmla="*/ 721338 w 5734864"/>
+              <a:gd name="connsiteY30" fmla="*/ 1887123 h 6858000"/>
+              <a:gd name="connsiteX31" fmla="*/ 714840 w 5734864"/>
+              <a:gd name="connsiteY31" fmla="*/ 1902274 h 6858000"/>
+              <a:gd name="connsiteX32" fmla="*/ 722847 w 5734864"/>
+              <a:gd name="connsiteY32" fmla="*/ 1929891 h 6858000"/>
+              <a:gd name="connsiteX33" fmla="*/ 714660 w 5734864"/>
+              <a:gd name="connsiteY33" fmla="*/ 1982709 h 6858000"/>
+              <a:gd name="connsiteX34" fmla="*/ 710759 w 5734864"/>
+              <a:gd name="connsiteY34" fmla="*/ 2013010 h 6858000"/>
+              <a:gd name="connsiteX35" fmla="*/ 697927 w 5734864"/>
+              <a:gd name="connsiteY35" fmla="*/ 2069833 h 6858000"/>
+              <a:gd name="connsiteX36" fmla="*/ 693594 w 5734864"/>
+              <a:gd name="connsiteY36" fmla="*/ 2103731 h 6858000"/>
+              <a:gd name="connsiteX37" fmla="*/ 691109 w 5734864"/>
+              <a:gd name="connsiteY37" fmla="*/ 2124027 h 6858000"/>
+              <a:gd name="connsiteX38" fmla="*/ 676593 w 5734864"/>
+              <a:gd name="connsiteY38" fmla="*/ 2176182 h 6858000"/>
+              <a:gd name="connsiteX39" fmla="*/ 633227 w 5734864"/>
+              <a:gd name="connsiteY39" fmla="*/ 2258036 h 6858000"/>
+              <a:gd name="connsiteX40" fmla="*/ 625564 w 5734864"/>
+              <a:gd name="connsiteY40" fmla="*/ 2284567 h 6858000"/>
+              <a:gd name="connsiteX41" fmla="*/ 627074 w 5734864"/>
+              <a:gd name="connsiteY41" fmla="*/ 2289605 h 6858000"/>
+              <a:gd name="connsiteX42" fmla="*/ 614574 w 5734864"/>
+              <a:gd name="connsiteY42" fmla="*/ 2308717 h 6858000"/>
+              <a:gd name="connsiteX43" fmla="*/ 606890 w 5734864"/>
+              <a:gd name="connsiteY43" fmla="*/ 2320662 h 6858000"/>
+              <a:gd name="connsiteX44" fmla="*/ 605558 w 5734864"/>
+              <a:gd name="connsiteY44" fmla="*/ 2327897 h 6858000"/>
+              <a:gd name="connsiteX45" fmla="*/ 602202 w 5734864"/>
+              <a:gd name="connsiteY45" fmla="*/ 2357749 h 6858000"/>
+              <a:gd name="connsiteX46" fmla="*/ 600213 w 5734864"/>
+              <a:gd name="connsiteY46" fmla="*/ 2364905 h 6858000"/>
+              <a:gd name="connsiteX47" fmla="*/ 597160 w 5734864"/>
+              <a:gd name="connsiteY47" fmla="*/ 2388351 h 6858000"/>
+              <a:gd name="connsiteX48" fmla="*/ 597982 w 5734864"/>
+              <a:gd name="connsiteY48" fmla="*/ 2402296 h 6858000"/>
+              <a:gd name="connsiteX49" fmla="*/ 593150 w 5734864"/>
+              <a:gd name="connsiteY49" fmla="*/ 2420015 h 6858000"/>
+              <a:gd name="connsiteX50" fmla="*/ 592833 w 5734864"/>
+              <a:gd name="connsiteY50" fmla="*/ 2422749 h 6858000"/>
+              <a:gd name="connsiteX51" fmla="*/ 594479 w 5734864"/>
+              <a:gd name="connsiteY51" fmla="*/ 2426002 h 6858000"/>
+              <a:gd name="connsiteX52" fmla="*/ 591963 w 5734864"/>
+              <a:gd name="connsiteY52" fmla="*/ 2431950 h 6858000"/>
+              <a:gd name="connsiteX53" fmla="*/ 591544 w 5734864"/>
+              <a:gd name="connsiteY53" fmla="*/ 2433897 h 6858000"/>
+              <a:gd name="connsiteX54" fmla="*/ 589519 w 5734864"/>
+              <a:gd name="connsiteY54" fmla="*/ 2451398 h 6858000"/>
+              <a:gd name="connsiteX55" fmla="*/ 590037 w 5734864"/>
+              <a:gd name="connsiteY55" fmla="*/ 2455536 h 6858000"/>
+              <a:gd name="connsiteX56" fmla="*/ 588179 w 5734864"/>
+              <a:gd name="connsiteY56" fmla="*/ 2462981 h 6858000"/>
+              <a:gd name="connsiteX57" fmla="*/ 583434 w 5734864"/>
+              <a:gd name="connsiteY57" fmla="*/ 2503991 h 6858000"/>
+              <a:gd name="connsiteX58" fmla="*/ 567942 w 5734864"/>
+              <a:gd name="connsiteY58" fmla="*/ 2652936 h 6858000"/>
+              <a:gd name="connsiteX59" fmla="*/ 573869 w 5734864"/>
+              <a:gd name="connsiteY59" fmla="*/ 2670188 h 6858000"/>
+              <a:gd name="connsiteX60" fmla="*/ 575243 w 5734864"/>
+              <a:gd name="connsiteY60" fmla="*/ 2688114 h 6858000"/>
+              <a:gd name="connsiteX61" fmla="*/ 573824 w 5734864"/>
+              <a:gd name="connsiteY61" fmla="*/ 2689856 h 6858000"/>
+              <a:gd name="connsiteX62" fmla="*/ 570699 w 5734864"/>
+              <a:gd name="connsiteY62" fmla="*/ 2709353 h 6858000"/>
+              <a:gd name="connsiteX63" fmla="*/ 573192 w 5734864"/>
+              <a:gd name="connsiteY63" fmla="*/ 2714527 h 6858000"/>
+              <a:gd name="connsiteX64" fmla="*/ 572044 w 5734864"/>
+              <a:gd name="connsiteY64" fmla="*/ 2728187 h 6858000"/>
+              <a:gd name="connsiteX65" fmla="*/ 572465 w 5734864"/>
+              <a:gd name="connsiteY65" fmla="*/ 2755863 h 6858000"/>
+              <a:gd name="connsiteX66" fmla="*/ 570028 w 5734864"/>
+              <a:gd name="connsiteY66" fmla="*/ 2760324 h 6858000"/>
+              <a:gd name="connsiteX67" fmla="*/ 566748 w 5734864"/>
+              <a:gd name="connsiteY67" fmla="*/ 2800948 h 6858000"/>
+              <a:gd name="connsiteX68" fmla="*/ 565509 w 5734864"/>
+              <a:gd name="connsiteY68" fmla="*/ 2801167 h 6858000"/>
+              <a:gd name="connsiteX69" fmla="*/ 559367 w 5734864"/>
+              <a:gd name="connsiteY69" fmla="*/ 2811129 h 6858000"/>
+              <a:gd name="connsiteX70" fmla="*/ 550354 w 5734864"/>
+              <a:gd name="connsiteY70" fmla="*/ 2830949 h 6858000"/>
+              <a:gd name="connsiteX71" fmla="*/ 514795 w 5734864"/>
+              <a:gd name="connsiteY71" fmla="*/ 2872433 h 6858000"/>
+              <a:gd name="connsiteX72" fmla="*/ 509875 w 5734864"/>
+              <a:gd name="connsiteY72" fmla="*/ 2923099 h 6858000"/>
+              <a:gd name="connsiteX73" fmla="*/ 509577 w 5734864"/>
+              <a:gd name="connsiteY73" fmla="*/ 2923197 h 6858000"/>
+              <a:gd name="connsiteX74" fmla="*/ 507597 w 5734864"/>
+              <a:gd name="connsiteY74" fmla="*/ 2931868 h 6858000"/>
+              <a:gd name="connsiteX75" fmla="*/ 507379 w 5734864"/>
+              <a:gd name="connsiteY75" fmla="*/ 2938322 h 6858000"/>
+              <a:gd name="connsiteX76" fmla="*/ 504725 w 5734864"/>
+              <a:gd name="connsiteY76" fmla="*/ 2954519 h 6858000"/>
+              <a:gd name="connsiteX77" fmla="*/ 502018 w 5734864"/>
+              <a:gd name="connsiteY77" fmla="*/ 2959643 h 6858000"/>
+              <a:gd name="connsiteX78" fmla="*/ 498360 w 5734864"/>
+              <a:gd name="connsiteY78" fmla="*/ 2961019 h 6858000"/>
+              <a:gd name="connsiteX79" fmla="*/ 498483 w 5734864"/>
+              <a:gd name="connsiteY79" fmla="*/ 2962590 h 6858000"/>
+              <a:gd name="connsiteX80" fmla="*/ 484403 w 5734864"/>
+              <a:gd name="connsiteY80" fmla="*/ 2990538 h 6858000"/>
+              <a:gd name="connsiteX81" fmla="*/ 463075 w 5734864"/>
+              <a:gd name="connsiteY81" fmla="*/ 3055956 h 6858000"/>
+              <a:gd name="connsiteX82" fmla="*/ 455013 w 5734864"/>
+              <a:gd name="connsiteY82" fmla="*/ 3094482 h 6858000"/>
+              <a:gd name="connsiteX83" fmla="*/ 428391 w 5734864"/>
+              <a:gd name="connsiteY83" fmla="*/ 3198850 h 6858000"/>
+              <a:gd name="connsiteX84" fmla="*/ 401440 w 5734864"/>
+              <a:gd name="connsiteY84" fmla="*/ 3307560 h 6858000"/>
+              <a:gd name="connsiteX85" fmla="*/ 386076 w 5734864"/>
+              <a:gd name="connsiteY85" fmla="*/ 3373943 h 6858000"/>
+              <a:gd name="connsiteX86" fmla="*/ 374726 w 5734864"/>
+              <a:gd name="connsiteY86" fmla="*/ 3381364 h 6858000"/>
+              <a:gd name="connsiteX87" fmla="*/ 369145 w 5734864"/>
+              <a:gd name="connsiteY87" fmla="*/ 3383729 h 6858000"/>
+              <a:gd name="connsiteX88" fmla="*/ 364294 w 5734864"/>
+              <a:gd name="connsiteY88" fmla="*/ 3414159 h 6858000"/>
+              <a:gd name="connsiteX89" fmla="*/ 366450 w 5734864"/>
+              <a:gd name="connsiteY89" fmla="*/ 3436925 h 6858000"/>
+              <a:gd name="connsiteX90" fmla="*/ 351743 w 5734864"/>
+              <a:gd name="connsiteY90" fmla="*/ 3521619 h 6858000"/>
+              <a:gd name="connsiteX91" fmla="*/ 345784 w 5734864"/>
+              <a:gd name="connsiteY91" fmla="*/ 3603757 h 6858000"/>
+              <a:gd name="connsiteX92" fmla="*/ 344198 w 5734864"/>
+              <a:gd name="connsiteY92" fmla="*/ 3652424 h 6858000"/>
+              <a:gd name="connsiteX93" fmla="*/ 352450 w 5734864"/>
+              <a:gd name="connsiteY93" fmla="*/ 3665222 h 6858000"/>
+              <a:gd name="connsiteX94" fmla="*/ 342621 w 5734864"/>
+              <a:gd name="connsiteY94" fmla="*/ 3700804 h 6858000"/>
+              <a:gd name="connsiteX95" fmla="*/ 341514 w 5734864"/>
+              <a:gd name="connsiteY95" fmla="*/ 3734774 h 6858000"/>
+              <a:gd name="connsiteX96" fmla="*/ 340607 w 5734864"/>
+              <a:gd name="connsiteY96" fmla="*/ 3785153 h 6858000"/>
+              <a:gd name="connsiteX97" fmla="*/ 340707 w 5734864"/>
+              <a:gd name="connsiteY97" fmla="*/ 3788177 h 6858000"/>
+              <a:gd name="connsiteX98" fmla="*/ 340361 w 5734864"/>
+              <a:gd name="connsiteY98" fmla="*/ 3798803 h 6858000"/>
+              <a:gd name="connsiteX99" fmla="*/ 339642 w 5734864"/>
+              <a:gd name="connsiteY99" fmla="*/ 3838750 h 6858000"/>
+              <a:gd name="connsiteX100" fmla="*/ 360295 w 5734864"/>
+              <a:gd name="connsiteY100" fmla="*/ 4015196 h 6858000"/>
+              <a:gd name="connsiteX101" fmla="*/ 339043 w 5734864"/>
+              <a:gd name="connsiteY101" fmla="*/ 4052778 h 6858000"/>
+              <a:gd name="connsiteX102" fmla="*/ 339343 w 5734864"/>
+              <a:gd name="connsiteY102" fmla="*/ 4096257 h 6858000"/>
+              <a:gd name="connsiteX103" fmla="*/ 340786 w 5734864"/>
+              <a:gd name="connsiteY103" fmla="*/ 4321136 h 6858000"/>
+              <a:gd name="connsiteX104" fmla="*/ 343158 w 5734864"/>
+              <a:gd name="connsiteY104" fmla="*/ 4429174 h 6858000"/>
+              <a:gd name="connsiteX105" fmla="*/ 334599 w 5734864"/>
+              <a:gd name="connsiteY105" fmla="*/ 4449938 h 6858000"/>
+              <a:gd name="connsiteX106" fmla="*/ 332890 w 5734864"/>
+              <a:gd name="connsiteY106" fmla="*/ 4453515 h 6858000"/>
+              <a:gd name="connsiteX107" fmla="*/ 331105 w 5734864"/>
+              <a:gd name="connsiteY107" fmla="*/ 4467941 h 6858000"/>
+              <a:gd name="connsiteX108" fmla="*/ 324289 w 5734864"/>
+              <a:gd name="connsiteY108" fmla="*/ 4471861 h 6858000"/>
+              <a:gd name="connsiteX109" fmla="*/ 317079 w 5734864"/>
+              <a:gd name="connsiteY109" fmla="*/ 4493468 h 6858000"/>
+              <a:gd name="connsiteX110" fmla="*/ 315557 w 5734864"/>
+              <a:gd name="connsiteY110" fmla="*/ 4520067 h 6858000"/>
+              <a:gd name="connsiteX111" fmla="*/ 315240 w 5734864"/>
+              <a:gd name="connsiteY111" fmla="*/ 4536872 h 6858000"/>
+              <a:gd name="connsiteX112" fmla="*/ 316200 w 5734864"/>
+              <a:gd name="connsiteY112" fmla="*/ 4538297 h 6858000"/>
+              <a:gd name="connsiteX113" fmla="*/ 317507 w 5734864"/>
+              <a:gd name="connsiteY113" fmla="*/ 4547582 h 6858000"/>
+              <a:gd name="connsiteX114" fmla="*/ 323078 w 5734864"/>
+              <a:gd name="connsiteY114" fmla="*/ 4592102 h 6858000"/>
+              <a:gd name="connsiteX115" fmla="*/ 328722 w 5734864"/>
+              <a:gd name="connsiteY115" fmla="*/ 4667914 h 6858000"/>
+              <a:gd name="connsiteX116" fmla="*/ 335597 w 5734864"/>
+              <a:gd name="connsiteY116" fmla="*/ 4695035 h 6858000"/>
+              <a:gd name="connsiteX117" fmla="*/ 339485 w 5734864"/>
+              <a:gd name="connsiteY117" fmla="*/ 4695979 h 6858000"/>
+              <a:gd name="connsiteX118" fmla="*/ 341089 w 5734864"/>
+              <a:gd name="connsiteY118" fmla="*/ 4704268 h 6858000"/>
+              <a:gd name="connsiteX119" fmla="*/ 342177 w 5734864"/>
+              <a:gd name="connsiteY119" fmla="*/ 4706060 h 6858000"/>
+              <a:gd name="connsiteX120" fmla="*/ 347751 w 5734864"/>
+              <a:gd name="connsiteY120" fmla="*/ 4716754 h 6858000"/>
+              <a:gd name="connsiteX121" fmla="*/ 344125 w 5734864"/>
+              <a:gd name="connsiteY121" fmla="*/ 4764669 h 6858000"/>
+              <a:gd name="connsiteX122" fmla="*/ 340188 w 5734864"/>
+              <a:gd name="connsiteY122" fmla="*/ 4779386 h 6858000"/>
+              <a:gd name="connsiteX123" fmla="*/ 335146 w 5734864"/>
+              <a:gd name="connsiteY123" fmla="*/ 4787491 h 6858000"/>
+              <a:gd name="connsiteX124" fmla="*/ 319124 w 5734864"/>
+              <a:gd name="connsiteY124" fmla="*/ 4843514 h 6858000"/>
+              <a:gd name="connsiteX125" fmla="*/ 305956 w 5734864"/>
+              <a:gd name="connsiteY125" fmla="*/ 4881505 h 6858000"/>
+              <a:gd name="connsiteX126" fmla="*/ 301062 w 5734864"/>
+              <a:gd name="connsiteY126" fmla="*/ 4889332 h 6858000"/>
+              <a:gd name="connsiteX127" fmla="*/ 302141 w 5734864"/>
+              <a:gd name="connsiteY127" fmla="*/ 4899400 h 6858000"/>
+              <a:gd name="connsiteX128" fmla="*/ 304424 w 5734864"/>
+              <a:gd name="connsiteY128" fmla="*/ 4902664 h 6858000"/>
+              <a:gd name="connsiteX129" fmla="*/ 293123 w 5734864"/>
+              <a:gd name="connsiteY129" fmla="*/ 4932769 h 6858000"/>
+              <a:gd name="connsiteX130" fmla="*/ 292275 w 5734864"/>
+              <a:gd name="connsiteY130" fmla="*/ 4936482 h 6858000"/>
+              <a:gd name="connsiteX131" fmla="*/ 288304 w 5734864"/>
+              <a:gd name="connsiteY131" fmla="*/ 4962325 h 6858000"/>
+              <a:gd name="connsiteX132" fmla="*/ 287420 w 5734864"/>
+              <a:gd name="connsiteY132" fmla="*/ 5042193 h 6858000"/>
+              <a:gd name="connsiteX133" fmla="*/ 287020 w 5734864"/>
+              <a:gd name="connsiteY133" fmla="*/ 5065655 h 6858000"/>
+              <a:gd name="connsiteX134" fmla="*/ 288488 w 5734864"/>
+              <a:gd name="connsiteY134" fmla="*/ 5082216 h 6858000"/>
+              <a:gd name="connsiteX135" fmla="*/ 282763 w 5734864"/>
+              <a:gd name="connsiteY135" fmla="*/ 5127114 h 6858000"/>
+              <a:gd name="connsiteX136" fmla="*/ 269316 w 5734864"/>
+              <a:gd name="connsiteY136" fmla="*/ 5202682 h 6858000"/>
+              <a:gd name="connsiteX137" fmla="*/ 269174 w 5734864"/>
+              <a:gd name="connsiteY137" fmla="*/ 5230835 h 6858000"/>
+              <a:gd name="connsiteX138" fmla="*/ 272679 w 5734864"/>
+              <a:gd name="connsiteY138" fmla="*/ 5232660 h 6858000"/>
+              <a:gd name="connsiteX139" fmla="*/ 272160 w 5734864"/>
+              <a:gd name="connsiteY139" fmla="*/ 5241150 h 6858000"/>
+              <a:gd name="connsiteX140" fmla="*/ 272760 w 5734864"/>
+              <a:gd name="connsiteY140" fmla="*/ 5243156 h 6858000"/>
+              <a:gd name="connsiteX141" fmla="*/ 275462 w 5734864"/>
+              <a:gd name="connsiteY141" fmla="*/ 5254919 h 6858000"/>
+              <a:gd name="connsiteX142" fmla="*/ 262897 w 5734864"/>
+              <a:gd name="connsiteY142" fmla="*/ 5286259 h 6858000"/>
+              <a:gd name="connsiteX143" fmla="*/ 252761 w 5734864"/>
+              <a:gd name="connsiteY143" fmla="*/ 5357801 h 6858000"/>
+              <a:gd name="connsiteX144" fmla="*/ 242360 w 5734864"/>
+              <a:gd name="connsiteY144" fmla="*/ 5460080 h 6858000"/>
+              <a:gd name="connsiteX145" fmla="*/ 229880 w 5734864"/>
+              <a:gd name="connsiteY145" fmla="*/ 5539714 h 6858000"/>
+              <a:gd name="connsiteX146" fmla="*/ 204283 w 5734864"/>
+              <a:gd name="connsiteY146" fmla="*/ 5639080 h 6858000"/>
+              <a:gd name="connsiteX147" fmla="*/ 198948 w 5734864"/>
+              <a:gd name="connsiteY147" fmla="*/ 5710958 h 6858000"/>
+              <a:gd name="connsiteX148" fmla="*/ 192367 w 5734864"/>
+              <a:gd name="connsiteY148" fmla="*/ 5719859 h 6858000"/>
+              <a:gd name="connsiteX149" fmla="*/ 188035 w 5734864"/>
+              <a:gd name="connsiteY149" fmla="*/ 5729935 h 6858000"/>
+              <a:gd name="connsiteX150" fmla="*/ 188428 w 5734864"/>
+              <a:gd name="connsiteY150" fmla="*/ 5731182 h 6858000"/>
+              <a:gd name="connsiteX151" fmla="*/ 181635 w 5734864"/>
+              <a:gd name="connsiteY151" fmla="*/ 5753538 h 6858000"/>
+              <a:gd name="connsiteX152" fmla="*/ 169744 w 5734864"/>
+              <a:gd name="connsiteY152" fmla="*/ 5796307 h 6858000"/>
+              <a:gd name="connsiteX153" fmla="*/ 170351 w 5734864"/>
+              <a:gd name="connsiteY153" fmla="*/ 5796644 h 6858000"/>
+              <a:gd name="connsiteX154" fmla="*/ 171559 w 5734864"/>
+              <a:gd name="connsiteY154" fmla="*/ 5803435 h 6858000"/>
+              <a:gd name="connsiteX155" fmla="*/ 172284 w 5734864"/>
+              <a:gd name="connsiteY155" fmla="*/ 5816391 h 6858000"/>
+              <a:gd name="connsiteX156" fmla="*/ 182542 w 5734864"/>
+              <a:gd name="connsiteY156" fmla="*/ 5846382 h 6858000"/>
+              <a:gd name="connsiteX157" fmla="*/ 175877 w 5734864"/>
+              <a:gd name="connsiteY157" fmla="*/ 5871336 h 6858000"/>
+              <a:gd name="connsiteX158" fmla="*/ 174910 w 5734864"/>
+              <a:gd name="connsiteY158" fmla="*/ 5876376 h 6858000"/>
+              <a:gd name="connsiteX159" fmla="*/ 175047 w 5734864"/>
+              <a:gd name="connsiteY159" fmla="*/ 5876483 h 6858000"/>
+              <a:gd name="connsiteX160" fmla="*/ 174335 w 5734864"/>
+              <a:gd name="connsiteY160" fmla="*/ 5881814 h 6858000"/>
+              <a:gd name="connsiteX161" fmla="*/ 171273 w 5734864"/>
+              <a:gd name="connsiteY161" fmla="*/ 5895339 h 6858000"/>
+              <a:gd name="connsiteX162" fmla="*/ 171658 w 5734864"/>
+              <a:gd name="connsiteY162" fmla="*/ 5898749 h 6858000"/>
+              <a:gd name="connsiteX163" fmla="*/ 174658 w 5734864"/>
+              <a:gd name="connsiteY163" fmla="*/ 5919558 h 6858000"/>
+              <a:gd name="connsiteX164" fmla="*/ 169099 w 5734864"/>
+              <a:gd name="connsiteY164" fmla="*/ 5984417 h 6858000"/>
+              <a:gd name="connsiteX165" fmla="*/ 162007 w 5734864"/>
+              <a:gd name="connsiteY165" fmla="*/ 6049043 h 6858000"/>
+              <a:gd name="connsiteX166" fmla="*/ 156875 w 5734864"/>
+              <a:gd name="connsiteY166" fmla="*/ 6114000 h 6858000"/>
+              <a:gd name="connsiteX167" fmla="*/ 165441 w 5734864"/>
+              <a:gd name="connsiteY167" fmla="*/ 6146938 h 6858000"/>
+              <a:gd name="connsiteX168" fmla="*/ 165177 w 5734864"/>
+              <a:gd name="connsiteY168" fmla="*/ 6150658 h 6858000"/>
+              <a:gd name="connsiteX169" fmla="*/ 161772 w 5734864"/>
+              <a:gd name="connsiteY169" fmla="*/ 6160011 h 6858000"/>
+              <a:gd name="connsiteX170" fmla="*/ 160051 w 5734864"/>
+              <a:gd name="connsiteY170" fmla="*/ 6163393 h 6858000"/>
+              <a:gd name="connsiteX171" fmla="*/ 158473 w 5734864"/>
+              <a:gd name="connsiteY171" fmla="*/ 6168628 h 6858000"/>
+              <a:gd name="connsiteX172" fmla="*/ 158573 w 5734864"/>
+              <a:gd name="connsiteY172" fmla="*/ 6168799 h 6858000"/>
+              <a:gd name="connsiteX173" fmla="*/ 146463 w 5734864"/>
+              <a:gd name="connsiteY173" fmla="*/ 6196671 h 6858000"/>
+              <a:gd name="connsiteX174" fmla="*/ 150209 w 5734864"/>
+              <a:gd name="connsiteY174" fmla="*/ 6232365 h 6858000"/>
+              <a:gd name="connsiteX175" fmla="*/ 148544 w 5734864"/>
+              <a:gd name="connsiteY175" fmla="*/ 6246162 h 6858000"/>
+              <a:gd name="connsiteX176" fmla="*/ 148403 w 5734864"/>
+              <a:gd name="connsiteY176" fmla="*/ 6253754 h 6858000"/>
+              <a:gd name="connsiteX177" fmla="*/ 138880 w 5734864"/>
+              <a:gd name="connsiteY177" fmla="*/ 6276449 h 6858000"/>
+              <a:gd name="connsiteX178" fmla="*/ 138683 w 5734864"/>
+              <a:gd name="connsiteY178" fmla="*/ 6279721 h 6858000"/>
+              <a:gd name="connsiteX179" fmla="*/ 130721 w 5734864"/>
+              <a:gd name="connsiteY179" fmla="*/ 6293675 h 6858000"/>
+              <a:gd name="connsiteX180" fmla="*/ 120717 w 5734864"/>
+              <a:gd name="connsiteY180" fmla="*/ 6313967 h 6858000"/>
+              <a:gd name="connsiteX181" fmla="*/ 120841 w 5734864"/>
+              <a:gd name="connsiteY181" fmla="*/ 6315437 h 6858000"/>
+              <a:gd name="connsiteX182" fmla="*/ 115208 w 5734864"/>
+              <a:gd name="connsiteY182" fmla="*/ 6324024 h 6858000"/>
+              <a:gd name="connsiteX183" fmla="*/ 101217 w 5734864"/>
+              <a:gd name="connsiteY183" fmla="*/ 6365923 h 6858000"/>
+              <a:gd name="connsiteX184" fmla="*/ 74946 w 5734864"/>
+              <a:gd name="connsiteY184" fmla="*/ 6556817 h 6858000"/>
+              <a:gd name="connsiteX185" fmla="*/ 16001 w 5734864"/>
+              <a:gd name="connsiteY185" fmla="*/ 6808678 h 6858000"/>
+              <a:gd name="connsiteX186" fmla="*/ 0 w 5734864"/>
+              <a:gd name="connsiteY186" fmla="*/ 6858000 h 6858000"/>
+              <a:gd name="connsiteX187" fmla="*/ 5734864 w 5734864"/>
+              <a:gd name="connsiteY187" fmla="*/ 6858000 h 6858000"/>
+              <a:gd name="connsiteX188" fmla="*/ 5734864 w 5734864"/>
+              <a:gd name="connsiteY188" fmla="*/ 0 h 6858000"/>
+              <a:gd name="connsiteX0" fmla="*/ 5734864 w 5734864"/>
+              <a:gd name="connsiteY0" fmla="*/ 0 h 6858000"/>
+              <a:gd name="connsiteX1" fmla="*/ 771611 w 5734864"/>
+              <a:gd name="connsiteY1" fmla="*/ 0 h 6858000"/>
+              <a:gd name="connsiteX2" fmla="*/ 771679 w 5734864"/>
+              <a:gd name="connsiteY2" fmla="*/ 49108 h 6858000"/>
+              <a:gd name="connsiteX3" fmla="*/ 794248 w 5734864"/>
+              <a:gd name="connsiteY3" fmla="*/ 200968 h 6858000"/>
+              <a:gd name="connsiteX4" fmla="*/ 801749 w 5734864"/>
+              <a:gd name="connsiteY4" fmla="*/ 414071 h 6858000"/>
+              <a:gd name="connsiteX5" fmla="*/ 818548 w 5734864"/>
+              <a:gd name="connsiteY5" fmla="*/ 585467 h 6858000"/>
+              <a:gd name="connsiteX6" fmla="*/ 857476 w 5734864"/>
+              <a:gd name="connsiteY6" fmla="*/ 800623 h 6858000"/>
+              <a:gd name="connsiteX7" fmla="*/ 851083 w 5734864"/>
+              <a:gd name="connsiteY7" fmla="*/ 878903 h 6858000"/>
+              <a:gd name="connsiteX8" fmla="*/ 873564 w 5734864"/>
+              <a:gd name="connsiteY8" fmla="*/ 943826 h 6858000"/>
+              <a:gd name="connsiteX9" fmla="*/ 864705 w 5734864"/>
+              <a:gd name="connsiteY9" fmla="*/ 973328 h 6858000"/>
+              <a:gd name="connsiteX10" fmla="*/ 862869 w 5734864"/>
+              <a:gd name="connsiteY10" fmla="*/ 978457 h 6858000"/>
+              <a:gd name="connsiteX11" fmla="*/ 862233 w 5734864"/>
+              <a:gd name="connsiteY11" fmla="*/ 998041 h 6858000"/>
+              <a:gd name="connsiteX12" fmla="*/ 853665 w 5734864"/>
+              <a:gd name="connsiteY12" fmla="*/ 1004750 h 6858000"/>
+              <a:gd name="connsiteX13" fmla="*/ 847865 w 5734864"/>
+              <a:gd name="connsiteY13" fmla="*/ 1070795 h 6858000"/>
+              <a:gd name="connsiteX14" fmla="*/ 862786 w 5734864"/>
+              <a:gd name="connsiteY14" fmla="*/ 1238994 h 6858000"/>
+              <a:gd name="connsiteX15" fmla="*/ 859345 w 5734864"/>
+              <a:gd name="connsiteY15" fmla="*/ 1380427 h 6858000"/>
+              <a:gd name="connsiteX16" fmla="*/ 855172 w 5734864"/>
+              <a:gd name="connsiteY16" fmla="*/ 1435262 h 6858000"/>
+              <a:gd name="connsiteX17" fmla="*/ 860494 w 5734864"/>
+              <a:gd name="connsiteY17" fmla="*/ 1453861 h 6858000"/>
+              <a:gd name="connsiteX18" fmla="*/ 853731 w 5734864"/>
+              <a:gd name="connsiteY18" fmla="*/ 1467047 h 6858000"/>
+              <a:gd name="connsiteX19" fmla="*/ 845847 w 5734864"/>
+              <a:gd name="connsiteY19" fmla="*/ 1502307 h 6858000"/>
+              <a:gd name="connsiteX20" fmla="*/ 817613 w 5734864"/>
+              <a:gd name="connsiteY20" fmla="*/ 1565166 h 6858000"/>
+              <a:gd name="connsiteX21" fmla="*/ 804223 w 5734864"/>
+              <a:gd name="connsiteY21" fmla="*/ 1601941 h 6858000"/>
+              <a:gd name="connsiteX22" fmla="*/ 791773 w 5734864"/>
+              <a:gd name="connsiteY22" fmla="*/ 1627005 h 6858000"/>
+              <a:gd name="connsiteX23" fmla="*/ 774645 w 5734864"/>
+              <a:gd name="connsiteY23" fmla="*/ 1699922 h 6858000"/>
+              <a:gd name="connsiteX24" fmla="*/ 752343 w 5734864"/>
+              <a:gd name="connsiteY24" fmla="*/ 1824604 h 6858000"/>
+              <a:gd name="connsiteX25" fmla="*/ 746254 w 5734864"/>
+              <a:gd name="connsiteY25" fmla="*/ 1850222 h 6858000"/>
+              <a:gd name="connsiteX26" fmla="*/ 728600 w 5734864"/>
+              <a:gd name="connsiteY26" fmla="*/ 1869603 h 6858000"/>
+              <a:gd name="connsiteX27" fmla="*/ 724396 w 5734864"/>
+              <a:gd name="connsiteY27" fmla="*/ 1883104 h 6858000"/>
+              <a:gd name="connsiteX28" fmla="*/ 722165 w 5734864"/>
+              <a:gd name="connsiteY28" fmla="*/ 1885924 h 6858000"/>
+              <a:gd name="connsiteX29" fmla="*/ 721338 w 5734864"/>
+              <a:gd name="connsiteY29" fmla="*/ 1887123 h 6858000"/>
+              <a:gd name="connsiteX30" fmla="*/ 714840 w 5734864"/>
+              <a:gd name="connsiteY30" fmla="*/ 1902274 h 6858000"/>
+              <a:gd name="connsiteX31" fmla="*/ 722847 w 5734864"/>
+              <a:gd name="connsiteY31" fmla="*/ 1929891 h 6858000"/>
+              <a:gd name="connsiteX32" fmla="*/ 714660 w 5734864"/>
+              <a:gd name="connsiteY32" fmla="*/ 1982709 h 6858000"/>
+              <a:gd name="connsiteX33" fmla="*/ 710759 w 5734864"/>
+              <a:gd name="connsiteY33" fmla="*/ 2013010 h 6858000"/>
+              <a:gd name="connsiteX34" fmla="*/ 697927 w 5734864"/>
+              <a:gd name="connsiteY34" fmla="*/ 2069833 h 6858000"/>
+              <a:gd name="connsiteX35" fmla="*/ 693594 w 5734864"/>
+              <a:gd name="connsiteY35" fmla="*/ 2103731 h 6858000"/>
+              <a:gd name="connsiteX36" fmla="*/ 691109 w 5734864"/>
+              <a:gd name="connsiteY36" fmla="*/ 2124027 h 6858000"/>
+              <a:gd name="connsiteX37" fmla="*/ 676593 w 5734864"/>
+              <a:gd name="connsiteY37" fmla="*/ 2176182 h 6858000"/>
+              <a:gd name="connsiteX38" fmla="*/ 633227 w 5734864"/>
+              <a:gd name="connsiteY38" fmla="*/ 2258036 h 6858000"/>
+              <a:gd name="connsiteX39" fmla="*/ 625564 w 5734864"/>
+              <a:gd name="connsiteY39" fmla="*/ 2284567 h 6858000"/>
+              <a:gd name="connsiteX40" fmla="*/ 627074 w 5734864"/>
+              <a:gd name="connsiteY40" fmla="*/ 2289605 h 6858000"/>
+              <a:gd name="connsiteX41" fmla="*/ 614574 w 5734864"/>
+              <a:gd name="connsiteY41" fmla="*/ 2308717 h 6858000"/>
+              <a:gd name="connsiteX42" fmla="*/ 606890 w 5734864"/>
+              <a:gd name="connsiteY42" fmla="*/ 2320662 h 6858000"/>
+              <a:gd name="connsiteX43" fmla="*/ 605558 w 5734864"/>
+              <a:gd name="connsiteY43" fmla="*/ 2327897 h 6858000"/>
+              <a:gd name="connsiteX44" fmla="*/ 602202 w 5734864"/>
+              <a:gd name="connsiteY44" fmla="*/ 2357749 h 6858000"/>
+              <a:gd name="connsiteX45" fmla="*/ 600213 w 5734864"/>
+              <a:gd name="connsiteY45" fmla="*/ 2364905 h 6858000"/>
+              <a:gd name="connsiteX46" fmla="*/ 597160 w 5734864"/>
+              <a:gd name="connsiteY46" fmla="*/ 2388351 h 6858000"/>
+              <a:gd name="connsiteX47" fmla="*/ 597982 w 5734864"/>
+              <a:gd name="connsiteY47" fmla="*/ 2402296 h 6858000"/>
+              <a:gd name="connsiteX48" fmla="*/ 593150 w 5734864"/>
+              <a:gd name="connsiteY48" fmla="*/ 2420015 h 6858000"/>
+              <a:gd name="connsiteX49" fmla="*/ 592833 w 5734864"/>
+              <a:gd name="connsiteY49" fmla="*/ 2422749 h 6858000"/>
+              <a:gd name="connsiteX50" fmla="*/ 594479 w 5734864"/>
+              <a:gd name="connsiteY50" fmla="*/ 2426002 h 6858000"/>
+              <a:gd name="connsiteX51" fmla="*/ 591963 w 5734864"/>
+              <a:gd name="connsiteY51" fmla="*/ 2431950 h 6858000"/>
+              <a:gd name="connsiteX52" fmla="*/ 591544 w 5734864"/>
+              <a:gd name="connsiteY52" fmla="*/ 2433897 h 6858000"/>
+              <a:gd name="connsiteX53" fmla="*/ 589519 w 5734864"/>
+              <a:gd name="connsiteY53" fmla="*/ 2451398 h 6858000"/>
+              <a:gd name="connsiteX54" fmla="*/ 590037 w 5734864"/>
+              <a:gd name="connsiteY54" fmla="*/ 2455536 h 6858000"/>
+              <a:gd name="connsiteX55" fmla="*/ 588179 w 5734864"/>
+              <a:gd name="connsiteY55" fmla="*/ 2462981 h 6858000"/>
+              <a:gd name="connsiteX56" fmla="*/ 583434 w 5734864"/>
+              <a:gd name="connsiteY56" fmla="*/ 2503991 h 6858000"/>
+              <a:gd name="connsiteX57" fmla="*/ 567942 w 5734864"/>
+              <a:gd name="connsiteY57" fmla="*/ 2652936 h 6858000"/>
+              <a:gd name="connsiteX58" fmla="*/ 573869 w 5734864"/>
+              <a:gd name="connsiteY58" fmla="*/ 2670188 h 6858000"/>
+              <a:gd name="connsiteX59" fmla="*/ 575243 w 5734864"/>
+              <a:gd name="connsiteY59" fmla="*/ 2688114 h 6858000"/>
+              <a:gd name="connsiteX60" fmla="*/ 573824 w 5734864"/>
+              <a:gd name="connsiteY60" fmla="*/ 2689856 h 6858000"/>
+              <a:gd name="connsiteX61" fmla="*/ 570699 w 5734864"/>
+              <a:gd name="connsiteY61" fmla="*/ 2709353 h 6858000"/>
+              <a:gd name="connsiteX62" fmla="*/ 573192 w 5734864"/>
+              <a:gd name="connsiteY62" fmla="*/ 2714527 h 6858000"/>
+              <a:gd name="connsiteX63" fmla="*/ 572044 w 5734864"/>
+              <a:gd name="connsiteY63" fmla="*/ 2728187 h 6858000"/>
+              <a:gd name="connsiteX64" fmla="*/ 572465 w 5734864"/>
+              <a:gd name="connsiteY64" fmla="*/ 2755863 h 6858000"/>
+              <a:gd name="connsiteX65" fmla="*/ 570028 w 5734864"/>
+              <a:gd name="connsiteY65" fmla="*/ 2760324 h 6858000"/>
+              <a:gd name="connsiteX66" fmla="*/ 566748 w 5734864"/>
+              <a:gd name="connsiteY66" fmla="*/ 2800948 h 6858000"/>
+              <a:gd name="connsiteX67" fmla="*/ 565509 w 5734864"/>
+              <a:gd name="connsiteY67" fmla="*/ 2801167 h 6858000"/>
+              <a:gd name="connsiteX68" fmla="*/ 559367 w 5734864"/>
+              <a:gd name="connsiteY68" fmla="*/ 2811129 h 6858000"/>
+              <a:gd name="connsiteX69" fmla="*/ 550354 w 5734864"/>
+              <a:gd name="connsiteY69" fmla="*/ 2830949 h 6858000"/>
+              <a:gd name="connsiteX70" fmla="*/ 514795 w 5734864"/>
+              <a:gd name="connsiteY70" fmla="*/ 2872433 h 6858000"/>
+              <a:gd name="connsiteX71" fmla="*/ 509875 w 5734864"/>
+              <a:gd name="connsiteY71" fmla="*/ 2923099 h 6858000"/>
+              <a:gd name="connsiteX72" fmla="*/ 509577 w 5734864"/>
+              <a:gd name="connsiteY72" fmla="*/ 2923197 h 6858000"/>
+              <a:gd name="connsiteX73" fmla="*/ 507597 w 5734864"/>
+              <a:gd name="connsiteY73" fmla="*/ 2931868 h 6858000"/>
+              <a:gd name="connsiteX74" fmla="*/ 507379 w 5734864"/>
+              <a:gd name="connsiteY74" fmla="*/ 2938322 h 6858000"/>
+              <a:gd name="connsiteX75" fmla="*/ 504725 w 5734864"/>
+              <a:gd name="connsiteY75" fmla="*/ 2954519 h 6858000"/>
+              <a:gd name="connsiteX76" fmla="*/ 502018 w 5734864"/>
+              <a:gd name="connsiteY76" fmla="*/ 2959643 h 6858000"/>
+              <a:gd name="connsiteX77" fmla="*/ 498360 w 5734864"/>
+              <a:gd name="connsiteY77" fmla="*/ 2961019 h 6858000"/>
+              <a:gd name="connsiteX78" fmla="*/ 498483 w 5734864"/>
+              <a:gd name="connsiteY78" fmla="*/ 2962590 h 6858000"/>
+              <a:gd name="connsiteX79" fmla="*/ 484403 w 5734864"/>
+              <a:gd name="connsiteY79" fmla="*/ 2990538 h 6858000"/>
+              <a:gd name="connsiteX80" fmla="*/ 463075 w 5734864"/>
+              <a:gd name="connsiteY80" fmla="*/ 3055956 h 6858000"/>
+              <a:gd name="connsiteX81" fmla="*/ 455013 w 5734864"/>
+              <a:gd name="connsiteY81" fmla="*/ 3094482 h 6858000"/>
+              <a:gd name="connsiteX82" fmla="*/ 428391 w 5734864"/>
+              <a:gd name="connsiteY82" fmla="*/ 3198850 h 6858000"/>
+              <a:gd name="connsiteX83" fmla="*/ 401440 w 5734864"/>
+              <a:gd name="connsiteY83" fmla="*/ 3307560 h 6858000"/>
+              <a:gd name="connsiteX84" fmla="*/ 386076 w 5734864"/>
+              <a:gd name="connsiteY84" fmla="*/ 3373943 h 6858000"/>
+              <a:gd name="connsiteX85" fmla="*/ 374726 w 5734864"/>
+              <a:gd name="connsiteY85" fmla="*/ 3381364 h 6858000"/>
+              <a:gd name="connsiteX86" fmla="*/ 369145 w 5734864"/>
+              <a:gd name="connsiteY86" fmla="*/ 3383729 h 6858000"/>
+              <a:gd name="connsiteX87" fmla="*/ 364294 w 5734864"/>
+              <a:gd name="connsiteY87" fmla="*/ 3414159 h 6858000"/>
+              <a:gd name="connsiteX88" fmla="*/ 366450 w 5734864"/>
+              <a:gd name="connsiteY88" fmla="*/ 3436925 h 6858000"/>
+              <a:gd name="connsiteX89" fmla="*/ 351743 w 5734864"/>
+              <a:gd name="connsiteY89" fmla="*/ 3521619 h 6858000"/>
+              <a:gd name="connsiteX90" fmla="*/ 345784 w 5734864"/>
+              <a:gd name="connsiteY90" fmla="*/ 3603757 h 6858000"/>
+              <a:gd name="connsiteX91" fmla="*/ 344198 w 5734864"/>
+              <a:gd name="connsiteY91" fmla="*/ 3652424 h 6858000"/>
+              <a:gd name="connsiteX92" fmla="*/ 352450 w 5734864"/>
+              <a:gd name="connsiteY92" fmla="*/ 3665222 h 6858000"/>
+              <a:gd name="connsiteX93" fmla="*/ 342621 w 5734864"/>
+              <a:gd name="connsiteY93" fmla="*/ 3700804 h 6858000"/>
+              <a:gd name="connsiteX94" fmla="*/ 341514 w 5734864"/>
+              <a:gd name="connsiteY94" fmla="*/ 3734774 h 6858000"/>
+              <a:gd name="connsiteX95" fmla="*/ 340607 w 5734864"/>
+              <a:gd name="connsiteY95" fmla="*/ 3785153 h 6858000"/>
+              <a:gd name="connsiteX96" fmla="*/ 340707 w 5734864"/>
+              <a:gd name="connsiteY96" fmla="*/ 3788177 h 6858000"/>
+              <a:gd name="connsiteX97" fmla="*/ 340361 w 5734864"/>
+              <a:gd name="connsiteY97" fmla="*/ 3798803 h 6858000"/>
+              <a:gd name="connsiteX98" fmla="*/ 339642 w 5734864"/>
+              <a:gd name="connsiteY98" fmla="*/ 3838750 h 6858000"/>
+              <a:gd name="connsiteX99" fmla="*/ 360295 w 5734864"/>
+              <a:gd name="connsiteY99" fmla="*/ 4015196 h 6858000"/>
+              <a:gd name="connsiteX100" fmla="*/ 339043 w 5734864"/>
+              <a:gd name="connsiteY100" fmla="*/ 4052778 h 6858000"/>
+              <a:gd name="connsiteX101" fmla="*/ 339343 w 5734864"/>
+              <a:gd name="connsiteY101" fmla="*/ 4096257 h 6858000"/>
+              <a:gd name="connsiteX102" fmla="*/ 340786 w 5734864"/>
+              <a:gd name="connsiteY102" fmla="*/ 4321136 h 6858000"/>
+              <a:gd name="connsiteX103" fmla="*/ 343158 w 5734864"/>
+              <a:gd name="connsiteY103" fmla="*/ 4429174 h 6858000"/>
+              <a:gd name="connsiteX104" fmla="*/ 334599 w 5734864"/>
+              <a:gd name="connsiteY104" fmla="*/ 4449938 h 6858000"/>
+              <a:gd name="connsiteX105" fmla="*/ 332890 w 5734864"/>
+              <a:gd name="connsiteY105" fmla="*/ 4453515 h 6858000"/>
+              <a:gd name="connsiteX106" fmla="*/ 331105 w 5734864"/>
+              <a:gd name="connsiteY106" fmla="*/ 4467941 h 6858000"/>
+              <a:gd name="connsiteX107" fmla="*/ 324289 w 5734864"/>
+              <a:gd name="connsiteY107" fmla="*/ 4471861 h 6858000"/>
+              <a:gd name="connsiteX108" fmla="*/ 317079 w 5734864"/>
+              <a:gd name="connsiteY108" fmla="*/ 4493468 h 6858000"/>
+              <a:gd name="connsiteX109" fmla="*/ 315557 w 5734864"/>
+              <a:gd name="connsiteY109" fmla="*/ 4520067 h 6858000"/>
+              <a:gd name="connsiteX110" fmla="*/ 315240 w 5734864"/>
+              <a:gd name="connsiteY110" fmla="*/ 4536872 h 6858000"/>
+              <a:gd name="connsiteX111" fmla="*/ 316200 w 5734864"/>
+              <a:gd name="connsiteY111" fmla="*/ 4538297 h 6858000"/>
+              <a:gd name="connsiteX112" fmla="*/ 317507 w 5734864"/>
+              <a:gd name="connsiteY112" fmla="*/ 4547582 h 6858000"/>
+              <a:gd name="connsiteX113" fmla="*/ 323078 w 5734864"/>
+              <a:gd name="connsiteY113" fmla="*/ 4592102 h 6858000"/>
+              <a:gd name="connsiteX114" fmla="*/ 328722 w 5734864"/>
+              <a:gd name="connsiteY114" fmla="*/ 4667914 h 6858000"/>
+              <a:gd name="connsiteX115" fmla="*/ 335597 w 5734864"/>
+              <a:gd name="connsiteY115" fmla="*/ 4695035 h 6858000"/>
+              <a:gd name="connsiteX116" fmla="*/ 339485 w 5734864"/>
+              <a:gd name="connsiteY116" fmla="*/ 4695979 h 6858000"/>
+              <a:gd name="connsiteX117" fmla="*/ 341089 w 5734864"/>
+              <a:gd name="connsiteY117" fmla="*/ 4704268 h 6858000"/>
+              <a:gd name="connsiteX118" fmla="*/ 342177 w 5734864"/>
+              <a:gd name="connsiteY118" fmla="*/ 4706060 h 6858000"/>
+              <a:gd name="connsiteX119" fmla="*/ 347751 w 5734864"/>
+              <a:gd name="connsiteY119" fmla="*/ 4716754 h 6858000"/>
+              <a:gd name="connsiteX120" fmla="*/ 344125 w 5734864"/>
+              <a:gd name="connsiteY120" fmla="*/ 4764669 h 6858000"/>
+              <a:gd name="connsiteX121" fmla="*/ 340188 w 5734864"/>
+              <a:gd name="connsiteY121" fmla="*/ 4779386 h 6858000"/>
+              <a:gd name="connsiteX122" fmla="*/ 335146 w 5734864"/>
+              <a:gd name="connsiteY122" fmla="*/ 4787491 h 6858000"/>
+              <a:gd name="connsiteX123" fmla="*/ 319124 w 5734864"/>
+              <a:gd name="connsiteY123" fmla="*/ 4843514 h 6858000"/>
+              <a:gd name="connsiteX124" fmla="*/ 305956 w 5734864"/>
+              <a:gd name="connsiteY124" fmla="*/ 4881505 h 6858000"/>
+              <a:gd name="connsiteX125" fmla="*/ 301062 w 5734864"/>
+              <a:gd name="connsiteY125" fmla="*/ 4889332 h 6858000"/>
+              <a:gd name="connsiteX126" fmla="*/ 302141 w 5734864"/>
+              <a:gd name="connsiteY126" fmla="*/ 4899400 h 6858000"/>
+              <a:gd name="connsiteX127" fmla="*/ 304424 w 5734864"/>
+              <a:gd name="connsiteY127" fmla="*/ 4902664 h 6858000"/>
+              <a:gd name="connsiteX128" fmla="*/ 293123 w 5734864"/>
+              <a:gd name="connsiteY128" fmla="*/ 4932769 h 6858000"/>
+              <a:gd name="connsiteX129" fmla="*/ 292275 w 5734864"/>
+              <a:gd name="connsiteY129" fmla="*/ 4936482 h 6858000"/>
+              <a:gd name="connsiteX130" fmla="*/ 288304 w 5734864"/>
+              <a:gd name="connsiteY130" fmla="*/ 4962325 h 6858000"/>
+              <a:gd name="connsiteX131" fmla="*/ 287420 w 5734864"/>
+              <a:gd name="connsiteY131" fmla="*/ 5042193 h 6858000"/>
+              <a:gd name="connsiteX132" fmla="*/ 287020 w 5734864"/>
+              <a:gd name="connsiteY132" fmla="*/ 5065655 h 6858000"/>
+              <a:gd name="connsiteX133" fmla="*/ 288488 w 5734864"/>
+              <a:gd name="connsiteY133" fmla="*/ 5082216 h 6858000"/>
+              <a:gd name="connsiteX134" fmla="*/ 282763 w 5734864"/>
+              <a:gd name="connsiteY134" fmla="*/ 5127114 h 6858000"/>
+              <a:gd name="connsiteX135" fmla="*/ 269316 w 5734864"/>
+              <a:gd name="connsiteY135" fmla="*/ 5202682 h 6858000"/>
+              <a:gd name="connsiteX136" fmla="*/ 269174 w 5734864"/>
+              <a:gd name="connsiteY136" fmla="*/ 5230835 h 6858000"/>
+              <a:gd name="connsiteX137" fmla="*/ 272679 w 5734864"/>
+              <a:gd name="connsiteY137" fmla="*/ 5232660 h 6858000"/>
+              <a:gd name="connsiteX138" fmla="*/ 272160 w 5734864"/>
+              <a:gd name="connsiteY138" fmla="*/ 5241150 h 6858000"/>
+              <a:gd name="connsiteX139" fmla="*/ 272760 w 5734864"/>
+              <a:gd name="connsiteY139" fmla="*/ 5243156 h 6858000"/>
+              <a:gd name="connsiteX140" fmla="*/ 275462 w 5734864"/>
+              <a:gd name="connsiteY140" fmla="*/ 5254919 h 6858000"/>
+              <a:gd name="connsiteX141" fmla="*/ 262897 w 5734864"/>
+              <a:gd name="connsiteY141" fmla="*/ 5286259 h 6858000"/>
+              <a:gd name="connsiteX142" fmla="*/ 252761 w 5734864"/>
+              <a:gd name="connsiteY142" fmla="*/ 5357801 h 6858000"/>
+              <a:gd name="connsiteX143" fmla="*/ 242360 w 5734864"/>
+              <a:gd name="connsiteY143" fmla="*/ 5460080 h 6858000"/>
+              <a:gd name="connsiteX144" fmla="*/ 229880 w 5734864"/>
+              <a:gd name="connsiteY144" fmla="*/ 5539714 h 6858000"/>
+              <a:gd name="connsiteX145" fmla="*/ 204283 w 5734864"/>
+              <a:gd name="connsiteY145" fmla="*/ 5639080 h 6858000"/>
+              <a:gd name="connsiteX146" fmla="*/ 198948 w 5734864"/>
+              <a:gd name="connsiteY146" fmla="*/ 5710958 h 6858000"/>
+              <a:gd name="connsiteX147" fmla="*/ 192367 w 5734864"/>
+              <a:gd name="connsiteY147" fmla="*/ 5719859 h 6858000"/>
+              <a:gd name="connsiteX148" fmla="*/ 188035 w 5734864"/>
+              <a:gd name="connsiteY148" fmla="*/ 5729935 h 6858000"/>
+              <a:gd name="connsiteX149" fmla="*/ 188428 w 5734864"/>
+              <a:gd name="connsiteY149" fmla="*/ 5731182 h 6858000"/>
+              <a:gd name="connsiteX150" fmla="*/ 181635 w 5734864"/>
+              <a:gd name="connsiteY150" fmla="*/ 5753538 h 6858000"/>
+              <a:gd name="connsiteX151" fmla="*/ 169744 w 5734864"/>
+              <a:gd name="connsiteY151" fmla="*/ 5796307 h 6858000"/>
+              <a:gd name="connsiteX152" fmla="*/ 170351 w 5734864"/>
+              <a:gd name="connsiteY152" fmla="*/ 5796644 h 6858000"/>
+              <a:gd name="connsiteX153" fmla="*/ 171559 w 5734864"/>
+              <a:gd name="connsiteY153" fmla="*/ 5803435 h 6858000"/>
+              <a:gd name="connsiteX154" fmla="*/ 172284 w 5734864"/>
+              <a:gd name="connsiteY154" fmla="*/ 5816391 h 6858000"/>
+              <a:gd name="connsiteX155" fmla="*/ 182542 w 5734864"/>
+              <a:gd name="connsiteY155" fmla="*/ 5846382 h 6858000"/>
+              <a:gd name="connsiteX156" fmla="*/ 175877 w 5734864"/>
+              <a:gd name="connsiteY156" fmla="*/ 5871336 h 6858000"/>
+              <a:gd name="connsiteX157" fmla="*/ 174910 w 5734864"/>
+              <a:gd name="connsiteY157" fmla="*/ 5876376 h 6858000"/>
+              <a:gd name="connsiteX158" fmla="*/ 175047 w 5734864"/>
+              <a:gd name="connsiteY158" fmla="*/ 5876483 h 6858000"/>
+              <a:gd name="connsiteX159" fmla="*/ 174335 w 5734864"/>
+              <a:gd name="connsiteY159" fmla="*/ 5881814 h 6858000"/>
+              <a:gd name="connsiteX160" fmla="*/ 171273 w 5734864"/>
+              <a:gd name="connsiteY160" fmla="*/ 5895339 h 6858000"/>
+              <a:gd name="connsiteX161" fmla="*/ 171658 w 5734864"/>
+              <a:gd name="connsiteY161" fmla="*/ 5898749 h 6858000"/>
+              <a:gd name="connsiteX162" fmla="*/ 174658 w 5734864"/>
+              <a:gd name="connsiteY162" fmla="*/ 5919558 h 6858000"/>
+              <a:gd name="connsiteX163" fmla="*/ 169099 w 5734864"/>
+              <a:gd name="connsiteY163" fmla="*/ 5984417 h 6858000"/>
+              <a:gd name="connsiteX164" fmla="*/ 162007 w 5734864"/>
+              <a:gd name="connsiteY164" fmla="*/ 6049043 h 6858000"/>
+              <a:gd name="connsiteX165" fmla="*/ 156875 w 5734864"/>
+              <a:gd name="connsiteY165" fmla="*/ 6114000 h 6858000"/>
+              <a:gd name="connsiteX166" fmla="*/ 165441 w 5734864"/>
+              <a:gd name="connsiteY166" fmla="*/ 6146938 h 6858000"/>
+              <a:gd name="connsiteX167" fmla="*/ 165177 w 5734864"/>
+              <a:gd name="connsiteY167" fmla="*/ 6150658 h 6858000"/>
+              <a:gd name="connsiteX168" fmla="*/ 161772 w 5734864"/>
+              <a:gd name="connsiteY168" fmla="*/ 6160011 h 6858000"/>
+              <a:gd name="connsiteX169" fmla="*/ 160051 w 5734864"/>
+              <a:gd name="connsiteY169" fmla="*/ 6163393 h 6858000"/>
+              <a:gd name="connsiteX170" fmla="*/ 158473 w 5734864"/>
+              <a:gd name="connsiteY170" fmla="*/ 6168628 h 6858000"/>
+              <a:gd name="connsiteX171" fmla="*/ 158573 w 5734864"/>
+              <a:gd name="connsiteY171" fmla="*/ 6168799 h 6858000"/>
+              <a:gd name="connsiteX172" fmla="*/ 146463 w 5734864"/>
+              <a:gd name="connsiteY172" fmla="*/ 6196671 h 6858000"/>
+              <a:gd name="connsiteX173" fmla="*/ 150209 w 5734864"/>
+              <a:gd name="connsiteY173" fmla="*/ 6232365 h 6858000"/>
+              <a:gd name="connsiteX174" fmla="*/ 148544 w 5734864"/>
+              <a:gd name="connsiteY174" fmla="*/ 6246162 h 6858000"/>
+              <a:gd name="connsiteX175" fmla="*/ 148403 w 5734864"/>
+              <a:gd name="connsiteY175" fmla="*/ 6253754 h 6858000"/>
+              <a:gd name="connsiteX176" fmla="*/ 138880 w 5734864"/>
+              <a:gd name="connsiteY176" fmla="*/ 6276449 h 6858000"/>
+              <a:gd name="connsiteX177" fmla="*/ 138683 w 5734864"/>
+              <a:gd name="connsiteY177" fmla="*/ 6279721 h 6858000"/>
+              <a:gd name="connsiteX178" fmla="*/ 130721 w 5734864"/>
+              <a:gd name="connsiteY178" fmla="*/ 6293675 h 6858000"/>
+              <a:gd name="connsiteX179" fmla="*/ 120717 w 5734864"/>
+              <a:gd name="connsiteY179" fmla="*/ 6313967 h 6858000"/>
+              <a:gd name="connsiteX180" fmla="*/ 120841 w 5734864"/>
+              <a:gd name="connsiteY180" fmla="*/ 6315437 h 6858000"/>
+              <a:gd name="connsiteX181" fmla="*/ 115208 w 5734864"/>
+              <a:gd name="connsiteY181" fmla="*/ 6324024 h 6858000"/>
+              <a:gd name="connsiteX182" fmla="*/ 101217 w 5734864"/>
+              <a:gd name="connsiteY182" fmla="*/ 6365923 h 6858000"/>
+              <a:gd name="connsiteX183" fmla="*/ 74946 w 5734864"/>
+              <a:gd name="connsiteY183" fmla="*/ 6556817 h 6858000"/>
+              <a:gd name="connsiteX184" fmla="*/ 16001 w 5734864"/>
+              <a:gd name="connsiteY184" fmla="*/ 6808678 h 6858000"/>
+              <a:gd name="connsiteX185" fmla="*/ 0 w 5734864"/>
+              <a:gd name="connsiteY185" fmla="*/ 6858000 h 6858000"/>
+              <a:gd name="connsiteX186" fmla="*/ 5734864 w 5734864"/>
+              <a:gd name="connsiteY186" fmla="*/ 6858000 h 6858000"/>
+              <a:gd name="connsiteX187" fmla="*/ 5734864 w 5734864"/>
+              <a:gd name="connsiteY187" fmla="*/ 0 h 6858000"/>
+            </a:gdLst>
+            <a:ahLst/>
+            <a:cxnLst>
+              <a:cxn ang="0">
+                <a:pos x="connsiteX0" y="connsiteY0"/>
+              </a:cxn>
+              <a:cxn ang="0">
+                <a:pos x="connsiteX1" y="connsiteY1"/>
+              </a:cxn>
+              <a:cxn ang="0">
+                <a:pos x="connsiteX2" y="connsiteY2"/>
+              </a:cxn>
+              <a:cxn ang="0">
+                <a:pos x="connsiteX3" y="connsiteY3"/>
+              </a:cxn>
+              <a:cxn ang="0">
+                <a:pos x="connsiteX4" y="connsiteY4"/>
+              </a:cxn>
+              <a:cxn ang="0">
+                <a:pos x="connsiteX5" y="connsiteY5"/>
+              </a:cxn>
+              <a:cxn ang="0">
+                <a:pos x="connsiteX6" y="connsiteY6"/>
+              </a:cxn>
+              <a:cxn ang="0">
+                <a:pos x="connsiteX7" y="connsiteY7"/>
+              </a:cxn>
+              <a:cxn ang="0">
+                <a:pos x="connsiteX8" y="connsiteY8"/>
+              </a:cxn>
+              <a:cxn ang="0">
+                <a:pos x="connsiteX9" y="connsiteY9"/>
+              </a:cxn>
+              <a:cxn ang="0">
+                <a:pos x="connsiteX10" y="connsiteY10"/>
+              </a:cxn>
+              <a:cxn ang="0">
+                <a:pos x="connsiteX11" y="connsiteY11"/>
+              </a:cxn>
+              <a:cxn ang="0">
+                <a:pos x="connsiteX12" y="connsiteY12"/>
+              </a:cxn>
+              <a:cxn ang="0">
+                <a:pos x="connsiteX13" y="connsiteY13"/>
+              </a:cxn>
+              <a:cxn ang="0">
+                <a:pos x="connsiteX14" y="connsiteY14"/>
+              </a:cxn>
+              <a:cxn ang="0">
+                <a:pos x="connsiteX15" y="connsiteY15"/>
+              </a:cxn>
+              <a:cxn ang="0">
+                <a:pos x="connsiteX16" y="connsiteY16"/>
+              </a:cxn>
+              <a:cxn ang="0">
+                <a:pos x="connsiteX17" y="connsiteY17"/>
+              </a:cxn>
+              <a:cxn ang="0">
+                <a:pos x="connsiteX18" y="connsiteY18"/>
+              </a:cxn>
+              <a:cxn ang="0">
+                <a:pos x="connsiteX19" y="connsiteY19"/>
+              </a:cxn>
+              <a:cxn ang="0">
+                <a:pos x="connsiteX20" y="connsiteY20"/>
+              </a:cxn>
+              <a:cxn ang="0">
+                <a:pos x="connsiteX21" y="connsiteY21"/>
+              </a:cxn>
+              <a:cxn ang="0">
+                <a:pos x="connsiteX22" y="connsiteY22"/>
+              </a:cxn>
+              <a:cxn ang="0">
+                <a:pos x="connsiteX23" y="connsiteY23"/>
+              </a:cxn>
+              <a:cxn ang="0">
+                <a:pos x="connsiteX24" y="connsiteY24"/>
+              </a:cxn>
+              <a:cxn ang="0">
+                <a:pos x="connsiteX25" y="connsiteY25"/>
+              </a:cxn>
+              <a:cxn ang="0">
+                <a:pos x="connsiteX26" y="connsiteY26"/>
+              </a:cxn>
+              <a:cxn ang="0">
+                <a:pos x="connsiteX27" y="connsiteY27"/>
+              </a:cxn>
+              <a:cxn ang="0">
+                <a:pos x="connsiteX28" y="connsiteY28"/>
+              </a:cxn>
+              <a:cxn ang="0">
+                <a:pos x="connsiteX29" y="connsiteY29"/>
+              </a:cxn>
+              <a:cxn ang="0">
+                <a:pos x="connsiteX30" y="connsiteY30"/>
+              </a:cxn>
+              <a:cxn ang="0">
+                <a:pos x="connsiteX31" y="connsiteY31"/>
+              </a:cxn>
+              <a:cxn ang="0">
+                <a:pos x="connsiteX32" y="connsiteY32"/>
+              </a:cxn>
+              <a:cxn ang="0">
+                <a:pos x="connsiteX33" y="connsiteY33"/>
+              </a:cxn>
+              <a:cxn ang="0">
+                <a:pos x="connsiteX34" y="connsiteY34"/>
+              </a:cxn>
+              <a:cxn ang="0">
+                <a:pos x="connsiteX35" y="connsiteY35"/>
+              </a:cxn>
+              <a:cxn ang="0">
+                <a:pos x="connsiteX36" y="connsiteY36"/>
+              </a:cxn>
+              <a:cxn ang="0">
+                <a:pos x="connsiteX37" y="connsiteY37"/>
+              </a:cxn>
+              <a:cxn ang="0">
+                <a:pos x="connsiteX38" y="connsiteY38"/>
+              </a:cxn>
+              <a:cxn ang="0">
+                <a:pos x="connsiteX39" y="connsiteY39"/>
+              </a:cxn>
+              <a:cxn ang="0">
+                <a:pos x="connsiteX40" y="connsiteY40"/>
+              </a:cxn>
+              <a:cxn ang="0">
+                <a:pos x="connsiteX41" y="connsiteY41"/>
+              </a:cxn>
+              <a:cxn ang="0">
+                <a:pos x="connsiteX42" y="connsiteY42"/>
+              </a:cxn>
+              <a:cxn ang="0">
+                <a:pos x="connsiteX43" y="connsiteY43"/>
+              </a:cxn>
+              <a:cxn ang="0">
+                <a:pos x="connsiteX44" y="connsiteY44"/>
+              </a:cxn>
+              <a:cxn ang="0">
+                <a:pos x="connsiteX45" y="connsiteY45"/>
+              </a:cxn>
+              <a:cxn ang="0">
+                <a:pos x="connsiteX46" y="connsiteY46"/>
+              </a:cxn>
+              <a:cxn ang="0">
+                <a:pos x="connsiteX47" y="connsiteY47"/>
+              </a:cxn>
+              <a:cxn ang="0">
+                <a:pos x="connsiteX48" y="connsiteY48"/>
+              </a:cxn>
+              <a:cxn ang="0">
+                <a:pos x="connsiteX49" y="connsiteY49"/>
+              </a:cxn>
+              <a:cxn ang="0">
+                <a:pos x="connsiteX50" y="connsiteY50"/>
+              </a:cxn>
+              <a:cxn ang="0">
+                <a:pos x="connsiteX51" y="connsiteY51"/>
+              </a:cxn>
+              <a:cxn ang="0">
+                <a:pos x="connsiteX52" y="connsiteY52"/>
+              </a:cxn>
+              <a:cxn ang="0">
+                <a:pos x="connsiteX53" y="connsiteY53"/>
+              </a:cxn>
+              <a:cxn ang="0">
+                <a:pos x="connsiteX54" y="connsiteY54"/>
+              </a:cxn>
+              <a:cxn ang="0">
+                <a:pos x="connsiteX55" y="connsiteY55"/>
+              </a:cxn>
+              <a:cxn ang="0">
+                <a:pos x="connsiteX56" y="connsiteY56"/>
+              </a:cxn>
+              <a:cxn ang="0">
+                <a:pos x="connsiteX57" y="connsiteY57"/>
+              </a:cxn>
+              <a:cxn ang="0">
+                <a:pos x="connsiteX58" y="connsiteY58"/>
+              </a:cxn>
+              <a:cxn ang="0">
+                <a:pos x="connsiteX59" y="connsiteY59"/>
+              </a:cxn>
+              <a:cxn ang="0">
+                <a:pos x="connsiteX60" y="connsiteY60"/>
+              </a:cxn>
+              <a:cxn ang="0">
+                <a:pos x="connsiteX61" y="connsiteY61"/>
+              </a:cxn>
+              <a:cxn ang="0">
+                <a:pos x="connsiteX62" y="connsiteY62"/>
+              </a:cxn>
+              <a:cxn ang="0">
+                <a:pos x="connsiteX63" y="connsiteY63"/>
+              </a:cxn>
+              <a:cxn ang="0">
+                <a:pos x="connsiteX64" y="connsiteY64"/>
+              </a:cxn>
+              <a:cxn ang="0">
+                <a:pos x="connsiteX65" y="connsiteY65"/>
+              </a:cxn>
+              <a:cxn ang="0">
+                <a:pos x="connsiteX66" y="connsiteY66"/>
+              </a:cxn>
+              <a:cxn ang="0">
+                <a:pos x="connsiteX67" y="connsiteY67"/>
+              </a:cxn>
+              <a:cxn ang="0">
+                <a:pos x="connsiteX68" y="connsiteY68"/>
+              </a:cxn>
+              <a:cxn ang="0">
+                <a:pos x="connsiteX69" y="connsiteY69"/>
+              </a:cxn>
+              <a:cxn ang="0">
+                <a:pos x="connsiteX70" y="connsiteY70"/>
+              </a:cxn>
+              <a:cxn ang="0">
+                <a:pos x="connsiteX71" y="connsiteY71"/>
+              </a:cxn>
+              <a:cxn ang="0">
+                <a:pos x="connsiteX72" y="connsiteY72"/>
+              </a:cxn>
+              <a:cxn ang="0">
+                <a:pos x="connsiteX73" y="connsiteY73"/>
+              </a:cxn>
+              <a:cxn ang="0">
+                <a:pos x="connsiteX74" y="connsiteY74"/>
+              </a:cxn>
+              <a:cxn ang="0">
+                <a:pos x="connsiteX75" y="connsiteY75"/>
+              </a:cxn>
+              <a:cxn ang="0">
+                <a:pos x="connsiteX76" y="connsiteY76"/>
+              </a:cxn>
+              <a:cxn ang="0">
+                <a:pos x="connsiteX77" y="connsiteY77"/>
+              </a:cxn>
+              <a:cxn ang="0">
+                <a:pos x="connsiteX78" y="connsiteY78"/>
+              </a:cxn>
+              <a:cxn ang="0">
+                <a:pos x="connsiteX79" y="connsiteY79"/>
+              </a:cxn>
+              <a:cxn ang="0">
+                <a:pos x="connsiteX80" y="connsiteY80"/>
+              </a:cxn>
+              <a:cxn ang="0">
+                <a:pos x="connsiteX81" y="connsiteY81"/>
+              </a:cxn>
+              <a:cxn ang="0">
+                <a:pos x="connsiteX82" y="connsiteY82"/>
+              </a:cxn>
+              <a:cxn ang="0">
+                <a:pos x="connsiteX83" y="connsiteY83"/>
+              </a:cxn>
+              <a:cxn ang="0">
+                <a:pos x="connsiteX84" y="connsiteY84"/>
+              </a:cxn>
+              <a:cxn ang="0">
+                <a:pos x="connsiteX85" y="connsiteY85"/>
+              </a:cxn>
+              <a:cxn ang="0">
+                <a:pos x="connsiteX86" y="connsiteY86"/>
+              </a:cxn>
+              <a:cxn ang="0">
+                <a:pos x="connsiteX87" y="connsiteY87"/>
+              </a:cxn>
+              <a:cxn ang="0">
+                <a:pos x="connsiteX88" y="connsiteY88"/>
+              </a:cxn>
+              <a:cxn ang="0">
+                <a:pos x="connsiteX89" y="connsiteY89"/>
+              </a:cxn>
+              <a:cxn ang="0">
+                <a:pos x="connsiteX90" y="connsiteY90"/>
+              </a:cxn>
+              <a:cxn ang="0">
+                <a:pos x="connsiteX91" y="connsiteY91"/>
+              </a:cxn>
+              <a:cxn ang="0">
+                <a:pos x="connsiteX92" y="connsiteY92"/>
+              </a:cxn>
+              <a:cxn ang="0">
+                <a:pos x="connsiteX93" y="connsiteY93"/>
+              </a:cxn>
+              <a:cxn ang="0">
+                <a:pos x="connsiteX94" y="connsiteY94"/>
+              </a:cxn>
+              <a:cxn ang="0">
+                <a:pos x="connsiteX95" y="connsiteY95"/>
+              </a:cxn>
+              <a:cxn ang="0">
+                <a:pos x="connsiteX96" y="connsiteY96"/>
+              </a:cxn>
+              <a:cxn ang="0">
+                <a:pos x="connsiteX97" y="connsiteY97"/>
+              </a:cxn>
+              <a:cxn ang="0">
+                <a:pos x="connsiteX98" y="connsiteY98"/>
+              </a:cxn>
+              <a:cxn ang="0">
+                <a:pos x="connsiteX99" y="connsiteY99"/>
+              </a:cxn>
+              <a:cxn ang="0">
+                <a:pos x="connsiteX100" y="connsiteY100"/>
+              </a:cxn>
+              <a:cxn ang="0">
+                <a:pos x="connsiteX101" y="connsiteY101"/>
+              </a:cxn>
+              <a:cxn ang="0">
+                <a:pos x="connsiteX102" y="connsiteY102"/>
+              </a:cxn>
+              <a:cxn ang="0">
+                <a:pos x="connsiteX103" y="connsiteY103"/>
+              </a:cxn>
+              <a:cxn ang="0">
+                <a:pos x="connsiteX104" y="connsiteY104"/>
+              </a:cxn>
+              <a:cxn ang="0">
+                <a:pos x="connsiteX105" y="connsiteY105"/>
+              </a:cxn>
+              <a:cxn ang="0">
+                <a:pos x="connsiteX106" y="connsiteY106"/>
+              </a:cxn>
+              <a:cxn ang="0">
+                <a:pos x="connsiteX107" y="connsiteY107"/>
+              </a:cxn>
+              <a:cxn ang="0">
+                <a:pos x="connsiteX108" y="connsiteY108"/>
+              </a:cxn>
+              <a:cxn ang="0">
+                <a:pos x="connsiteX109" y="connsiteY109"/>
+              </a:cxn>
+              <a:cxn ang="0">
+                <a:pos x="connsiteX110" y="connsiteY110"/>
+              </a:cxn>
+              <a:cxn ang="0">
+                <a:pos x="connsiteX111" y="connsiteY111"/>
+              </a:cxn>
+              <a:cxn ang="0">
+                <a:pos x="connsiteX112" y="connsiteY112"/>
+              </a:cxn>
+              <a:cxn ang="0">
+                <a:pos x="connsiteX113" y="connsiteY113"/>
+              </a:cxn>
+              <a:cxn ang="0">
+                <a:pos x="connsiteX114" y="connsiteY114"/>
+              </a:cxn>
+              <a:cxn ang="0">
+                <a:pos x="connsiteX115" y="connsiteY115"/>
+              </a:cxn>
+              <a:cxn ang="0">
+                <a:pos x="connsiteX116" y="connsiteY116"/>
+              </a:cxn>
+              <a:cxn ang="0">
+                <a:pos x="connsiteX117" y="connsiteY117"/>
+              </a:cxn>
+              <a:cxn ang="0">
+                <a:pos x="connsiteX118" y="connsiteY118"/>
+              </a:cxn>
+              <a:cxn ang="0">
+                <a:pos x="connsiteX119" y="connsiteY119"/>
+              </a:cxn>
+              <a:cxn ang="0">
+                <a:pos x="connsiteX120" y="connsiteY120"/>
+              </a:cxn>
+              <a:cxn ang="0">
+                <a:pos x="connsiteX121" y="connsiteY121"/>
+              </a:cxn>
+              <a:cxn ang="0">
+                <a:pos x="connsiteX122" y="connsiteY122"/>
+              </a:cxn>
+              <a:cxn ang="0">
+                <a:pos x="connsiteX123" y="connsiteY123"/>
+              </a:cxn>
+              <a:cxn ang="0">
+                <a:pos x="connsiteX124" y="connsiteY124"/>
+              </a:cxn>
+              <a:cxn ang="0">
+                <a:pos x="connsiteX125" y="connsiteY125"/>
+              </a:cxn>
+              <a:cxn ang="0">
+                <a:pos x="connsiteX126" y="connsiteY126"/>
+              </a:cxn>
+              <a:cxn ang="0">
+                <a:pos x="connsiteX127" y="connsiteY127"/>
+              </a:cxn>
+              <a:cxn ang="0">
+                <a:pos x="connsiteX128" y="connsiteY128"/>
+              </a:cxn>
+              <a:cxn ang="0">
+                <a:pos x="connsiteX129" y="connsiteY129"/>
+              </a:cxn>
+              <a:cxn ang="0">
+                <a:pos x="connsiteX130" y="connsiteY130"/>
+              </a:cxn>
+              <a:cxn ang="0">
+                <a:pos x="connsiteX131" y="connsiteY131"/>
+              </a:cxn>
+              <a:cxn ang="0">
+                <a:pos x="connsiteX132" y="connsiteY132"/>
+              </a:cxn>
+              <a:cxn ang="0">
+                <a:pos x="connsiteX133" y="connsiteY133"/>
+              </a:cxn>
+              <a:cxn ang="0">
+                <a:pos x="connsiteX134" y="connsiteY134"/>
+              </a:cxn>
+              <a:cxn ang="0">
+                <a:pos x="connsiteX135" y="connsiteY135"/>
+              </a:cxn>
+              <a:cxn ang="0">
+                <a:pos x="connsiteX136" y="connsiteY136"/>
+              </a:cxn>
+              <a:cxn ang="0">
+                <a:pos x="connsiteX137" y="connsiteY137"/>
+              </a:cxn>
+              <a:cxn ang="0">
+                <a:pos x="connsiteX138" y="connsiteY138"/>
+              </a:cxn>
+              <a:cxn ang="0">
+                <a:pos x="connsiteX139" y="connsiteY139"/>
+              </a:cxn>
+              <a:cxn ang="0">
+                <a:pos x="connsiteX140" y="connsiteY140"/>
+              </a:cxn>
+              <a:cxn ang="0">
+                <a:pos x="connsiteX141" y="connsiteY141"/>
+              </a:cxn>
+              <a:cxn ang="0">
+                <a:pos x="connsiteX142" y="connsiteY142"/>
+              </a:cxn>
+              <a:cxn ang="0">
+                <a:pos x="connsiteX143" y="connsiteY143"/>
+              </a:cxn>
+              <a:cxn ang="0">
+                <a:pos x="connsiteX144" y="connsiteY144"/>
+              </a:cxn>
+              <a:cxn ang="0">
+                <a:pos x="connsiteX145" y="connsiteY145"/>
+              </a:cxn>
+              <a:cxn ang="0">
+                <a:pos x="connsiteX146" y="connsiteY146"/>
+              </a:cxn>
+              <a:cxn ang="0">
+                <a:pos x="connsiteX147" y="connsiteY147"/>
+              </a:cxn>
+              <a:cxn ang="0">
+                <a:pos x="connsiteX148" y="connsiteY148"/>
+              </a:cxn>
+              <a:cxn ang="0">
+                <a:pos x="connsiteX149" y="connsiteY149"/>
+              </a:cxn>
+              <a:cxn ang="0">
+                <a:pos x="connsiteX150" y="connsiteY150"/>
+              </a:cxn>
+              <a:cxn ang="0">
+                <a:pos x="connsiteX151" y="connsiteY151"/>
+              </a:cxn>
+              <a:cxn ang="0">
+                <a:pos x="connsiteX152" y="connsiteY152"/>
+              </a:cxn>
+              <a:cxn ang="0">
+                <a:pos x="connsiteX153" y="connsiteY153"/>
+              </a:cxn>
+              <a:cxn ang="0">
+                <a:pos x="connsiteX154" y="connsiteY154"/>
+              </a:cxn>
+              <a:cxn ang="0">
+                <a:pos x="connsiteX155" y="connsiteY155"/>
+              </a:cxn>
+              <a:cxn ang="0">
+                <a:pos x="connsiteX156" y="connsiteY156"/>
+              </a:cxn>
+              <a:cxn ang="0">
+                <a:pos x="connsiteX157" y="connsiteY157"/>
+              </a:cxn>
+              <a:cxn ang="0">
+                <a:pos x="connsiteX158" y="connsiteY158"/>
+              </a:cxn>
+              <a:cxn ang="0">
+                <a:pos x="connsiteX159" y="connsiteY159"/>
+              </a:cxn>
+              <a:cxn ang="0">
+                <a:pos x="connsiteX160" y="connsiteY160"/>
+              </a:cxn>
+              <a:cxn ang="0">
+                <a:pos x="connsiteX161" y="connsiteY161"/>
+              </a:cxn>
+              <a:cxn ang="0">
+                <a:pos x="connsiteX162" y="connsiteY162"/>
+              </a:cxn>
+              <a:cxn ang="0">
+                <a:pos x="connsiteX163" y="connsiteY163"/>
+              </a:cxn>
+              <a:cxn ang="0">
+                <a:pos x="connsiteX164" y="connsiteY164"/>
+              </a:cxn>
+              <a:cxn ang="0">
+                <a:pos x="connsiteX165" y="connsiteY165"/>
+              </a:cxn>
+              <a:cxn ang="0">
+                <a:pos x="connsiteX166" y="connsiteY166"/>
+              </a:cxn>
+              <a:cxn ang="0">
+                <a:pos x="connsiteX167" y="connsiteY167"/>
+              </a:cxn>
+              <a:cxn ang="0">
+                <a:pos x="connsiteX168" y="connsiteY168"/>
+              </a:cxn>
+              <a:cxn ang="0">
+                <a:pos x="connsiteX169" y="connsiteY169"/>
+              </a:cxn>
+              <a:cxn ang="0">
+                <a:pos x="connsiteX170" y="connsiteY170"/>
+              </a:cxn>
+              <a:cxn ang="0">
+                <a:pos x="connsiteX171" y="connsiteY171"/>
+              </a:cxn>
+              <a:cxn ang="0">
+                <a:pos x="connsiteX172" y="connsiteY172"/>
+              </a:cxn>
+              <a:cxn ang="0">
+                <a:pos x="connsiteX173" y="connsiteY173"/>
+              </a:cxn>
+              <a:cxn ang="0">
+                <a:pos x="connsiteX174" y="connsiteY174"/>
+              </a:cxn>
+              <a:cxn ang="0">
+                <a:pos x="connsiteX175" y="connsiteY175"/>
+              </a:cxn>
+              <a:cxn ang="0">
+                <a:pos x="connsiteX176" y="connsiteY176"/>
+              </a:cxn>
+              <a:cxn ang="0">
+                <a:pos x="connsiteX177" y="connsiteY177"/>
+              </a:cxn>
+              <a:cxn ang="0">
+                <a:pos x="connsiteX178" y="connsiteY178"/>
+              </a:cxn>
+              <a:cxn ang="0">
+                <a:pos x="connsiteX179" y="connsiteY179"/>
+              </a:cxn>
+              <a:cxn ang="0">
+                <a:pos x="connsiteX180" y="connsiteY180"/>
+              </a:cxn>
+              <a:cxn ang="0">
+                <a:pos x="connsiteX181" y="connsiteY181"/>
+              </a:cxn>
+              <a:cxn ang="0">
+                <a:pos x="connsiteX182" y="connsiteY182"/>
+              </a:cxn>
+              <a:cxn ang="0">
+                <a:pos x="connsiteX183" y="connsiteY183"/>
+              </a:cxn>
+              <a:cxn ang="0">
+                <a:pos x="connsiteX184" y="connsiteY184"/>
+              </a:cxn>
+              <a:cxn ang="0">
+                <a:pos x="connsiteX185" y="connsiteY185"/>
+              </a:cxn>
+              <a:cxn ang="0">
+                <a:pos x="connsiteX186" y="connsiteY186"/>
+              </a:cxn>
+              <a:cxn ang="0">
+                <a:pos x="connsiteX187" y="connsiteY187"/>
+              </a:cxn>
+            </a:cxnLst>
+            <a:rect l="l" t="t" r="r" b="b"/>
+            <a:pathLst>
+              <a:path w="5734864" h="6858000">
+                <a:moveTo>
+                  <a:pt x="5734864" y="0"/>
+                </a:moveTo>
+                <a:lnTo>
+                  <a:pt x="771611" y="0"/>
+                </a:lnTo>
+                <a:cubicBezTo>
+                  <a:pt x="771634" y="16369"/>
+                  <a:pt x="771656" y="32739"/>
+                  <a:pt x="771679" y="49108"/>
+                </a:cubicBezTo>
+                <a:cubicBezTo>
+                  <a:pt x="775201" y="55622"/>
+                  <a:pt x="788724" y="196721"/>
+                  <a:pt x="794248" y="200968"/>
+                </a:cubicBezTo>
+                <a:lnTo>
+                  <a:pt x="801749" y="414071"/>
+                </a:lnTo>
+                <a:cubicBezTo>
+                  <a:pt x="807329" y="440933"/>
+                  <a:pt x="835107" y="598697"/>
+                  <a:pt x="818548" y="585467"/>
+                </a:cubicBezTo>
+                <a:cubicBezTo>
+                  <a:pt x="856197" y="664140"/>
+                  <a:pt x="837895" y="708473"/>
+                  <a:pt x="857476" y="800623"/>
+                </a:cubicBezTo>
+                <a:cubicBezTo>
+                  <a:pt x="822401" y="857344"/>
+                  <a:pt x="855723" y="824571"/>
+                  <a:pt x="851083" y="878903"/>
+                </a:cubicBezTo>
+                <a:cubicBezTo>
+                  <a:pt x="884811" y="859448"/>
+                  <a:pt x="834648" y="946397"/>
+                  <a:pt x="873564" y="943826"/>
+                </a:cubicBezTo>
+                <a:cubicBezTo>
+                  <a:pt x="871487" y="953795"/>
+                  <a:pt x="868248" y="963533"/>
+                  <a:pt x="864705" y="973328"/>
+                </a:cubicBezTo>
+                <a:lnTo>
+                  <a:pt x="862869" y="978457"/>
+                </a:lnTo>
+                <a:lnTo>
+                  <a:pt x="862233" y="998041"/>
+                </a:lnTo>
+                <a:lnTo>
+                  <a:pt x="853665" y="1004750"/>
+                </a:lnTo>
+                <a:lnTo>
+                  <a:pt x="847865" y="1070795"/>
+                </a:lnTo>
+                <a:cubicBezTo>
+                  <a:pt x="870234" y="1110486"/>
+                  <a:pt x="833172" y="1190441"/>
+                  <a:pt x="862786" y="1238994"/>
+                </a:cubicBezTo>
+                <a:cubicBezTo>
+                  <a:pt x="864699" y="1290599"/>
+                  <a:pt x="860615" y="1347716"/>
+                  <a:pt x="859345" y="1380427"/>
+                </a:cubicBezTo>
+                <a:cubicBezTo>
+                  <a:pt x="845703" y="1396391"/>
+                  <a:pt x="873184" y="1435525"/>
+                  <a:pt x="855172" y="1435262"/>
+                </a:cubicBezTo>
+                <a:lnTo>
+                  <a:pt x="860494" y="1453861"/>
+                </a:lnTo>
+                <a:lnTo>
+                  <a:pt x="853731" y="1467047"/>
+                </a:lnTo>
+                <a:cubicBezTo>
+                  <a:pt x="846549" y="1480528"/>
+                  <a:pt x="841728" y="1491093"/>
+                  <a:pt x="845847" y="1502307"/>
+                </a:cubicBezTo>
+                <a:lnTo>
+                  <a:pt x="817613" y="1565166"/>
+                </a:lnTo>
+                <a:cubicBezTo>
+                  <a:pt x="805468" y="1557258"/>
+                  <a:pt x="816534" y="1596564"/>
+                  <a:pt x="804223" y="1601941"/>
+                </a:cubicBezTo>
+                <a:cubicBezTo>
+                  <a:pt x="794287" y="1604654"/>
+                  <a:pt x="795328" y="1617209"/>
+                  <a:pt x="791773" y="1627005"/>
+                </a:cubicBezTo>
+                <a:cubicBezTo>
+                  <a:pt x="781684" y="1634393"/>
+                  <a:pt x="772978" y="1683187"/>
+                  <a:pt x="774645" y="1699922"/>
+                </a:cubicBezTo>
+                <a:cubicBezTo>
+                  <a:pt x="785341" y="1746767"/>
+                  <a:pt x="744845" y="1787099"/>
+                  <a:pt x="752343" y="1824604"/>
+                </a:cubicBezTo>
+                <a:cubicBezTo>
+                  <a:pt x="751502" y="1834578"/>
+                  <a:pt x="749297" y="1842929"/>
+                  <a:pt x="746254" y="1850222"/>
+                </a:cubicBezTo>
+                <a:lnTo>
+                  <a:pt x="728600" y="1869603"/>
+                </a:lnTo>
+                <a:lnTo>
+                  <a:pt x="724396" y="1883104"/>
+                </a:lnTo>
+                <a:lnTo>
+                  <a:pt x="722165" y="1885924"/>
+                </a:lnTo>
+                <a:lnTo>
+                  <a:pt x="721338" y="1887123"/>
+                </a:lnTo>
+                <a:lnTo>
+                  <a:pt x="714840" y="1902274"/>
+                </a:lnTo>
+                <a:lnTo>
+                  <a:pt x="722847" y="1929891"/>
+                </a:lnTo>
+                <a:lnTo>
+                  <a:pt x="714660" y="1982709"/>
+                </a:lnTo>
+                <a:cubicBezTo>
+                  <a:pt x="727725" y="2006201"/>
+                  <a:pt x="714739" y="1997091"/>
+                  <a:pt x="710759" y="2013010"/>
+                </a:cubicBezTo>
+                <a:cubicBezTo>
+                  <a:pt x="707970" y="2027531"/>
+                  <a:pt x="700788" y="2054714"/>
+                  <a:pt x="697927" y="2069833"/>
+                </a:cubicBezTo>
+                <a:cubicBezTo>
+                  <a:pt x="685211" y="2080229"/>
+                  <a:pt x="698762" y="2088241"/>
+                  <a:pt x="693594" y="2103731"/>
+                </a:cubicBezTo>
+                <a:cubicBezTo>
+                  <a:pt x="688481" y="2110649"/>
+                  <a:pt x="687183" y="2115973"/>
+                  <a:pt x="691109" y="2124027"/>
+                </a:cubicBezTo>
+                <a:cubicBezTo>
+                  <a:pt x="666413" y="2155740"/>
+                  <a:pt x="688031" y="2144874"/>
+                  <a:pt x="676593" y="2176182"/>
+                </a:cubicBezTo>
+                <a:cubicBezTo>
+                  <a:pt x="665190" y="2202944"/>
+                  <a:pt x="656416" y="2233857"/>
+                  <a:pt x="633227" y="2258036"/>
+                </a:cubicBezTo>
+                <a:cubicBezTo>
+                  <a:pt x="626930" y="2262191"/>
+                  <a:pt x="623498" y="2274069"/>
+                  <a:pt x="625564" y="2284567"/>
+                </a:cubicBezTo>
+                <a:cubicBezTo>
+                  <a:pt x="625918" y="2286374"/>
+                  <a:pt x="626427" y="2288071"/>
+                  <a:pt x="627074" y="2289605"/>
+                </a:cubicBezTo>
+                <a:cubicBezTo>
+                  <a:pt x="619029" y="2296628"/>
+                  <a:pt x="616453" y="2303188"/>
+                  <a:pt x="614574" y="2308717"/>
+                </a:cubicBezTo>
+                <a:lnTo>
+                  <a:pt x="606890" y="2320662"/>
+                </a:lnTo>
+                <a:lnTo>
+                  <a:pt x="605558" y="2327897"/>
+                </a:lnTo>
+                <a:lnTo>
+                  <a:pt x="602202" y="2357749"/>
+                </a:lnTo>
+                <a:lnTo>
+                  <a:pt x="600213" y="2364905"/>
+                </a:lnTo>
+                <a:lnTo>
+                  <a:pt x="597160" y="2388351"/>
+                </a:lnTo>
+                <a:lnTo>
+                  <a:pt x="597982" y="2402296"/>
+                </a:lnTo>
+                <a:lnTo>
+                  <a:pt x="593150" y="2420015"/>
+                </a:lnTo>
+                <a:cubicBezTo>
+                  <a:pt x="593044" y="2420926"/>
+                  <a:pt x="592939" y="2421838"/>
+                  <a:pt x="592833" y="2422749"/>
+                </a:cubicBezTo>
+                <a:lnTo>
+                  <a:pt x="594479" y="2426002"/>
+                </a:lnTo>
+                <a:cubicBezTo>
+                  <a:pt x="594168" y="2427683"/>
+                  <a:pt x="593118" y="2429721"/>
+                  <a:pt x="591963" y="2431950"/>
+                </a:cubicBezTo>
+                <a:cubicBezTo>
+                  <a:pt x="591823" y="2432599"/>
+                  <a:pt x="591684" y="2433248"/>
+                  <a:pt x="591544" y="2433897"/>
+                </a:cubicBezTo>
+                <a:lnTo>
+                  <a:pt x="589519" y="2451398"/>
+                </a:lnTo>
+                <a:cubicBezTo>
+                  <a:pt x="589692" y="2452777"/>
+                  <a:pt x="589864" y="2454157"/>
+                  <a:pt x="590037" y="2455536"/>
+                </a:cubicBezTo>
+                <a:lnTo>
+                  <a:pt x="588179" y="2462981"/>
+                </a:lnTo>
+                <a:lnTo>
+                  <a:pt x="583434" y="2503991"/>
+                </a:lnTo>
+                <a:cubicBezTo>
+                  <a:pt x="576530" y="2566058"/>
+                  <a:pt x="570433" y="2625224"/>
+                  <a:pt x="567942" y="2652936"/>
+                </a:cubicBezTo>
+                <a:cubicBezTo>
+                  <a:pt x="570864" y="2658290"/>
+                  <a:pt x="572739" y="2664095"/>
+                  <a:pt x="573869" y="2670188"/>
+                </a:cubicBezTo>
+                <a:lnTo>
+                  <a:pt x="575243" y="2688114"/>
+                </a:lnTo>
+                <a:lnTo>
+                  <a:pt x="573824" y="2689856"/>
+                </a:lnTo>
+                <a:cubicBezTo>
+                  <a:pt x="569972" y="2698471"/>
+                  <a:pt x="569572" y="2704494"/>
+                  <a:pt x="570699" y="2709353"/>
+                </a:cubicBezTo>
+                <a:lnTo>
+                  <a:pt x="573192" y="2714527"/>
+                </a:lnTo>
+                <a:cubicBezTo>
+                  <a:pt x="572809" y="2719080"/>
+                  <a:pt x="572427" y="2723634"/>
+                  <a:pt x="572044" y="2728187"/>
+                </a:cubicBezTo>
+                <a:cubicBezTo>
+                  <a:pt x="572184" y="2737412"/>
+                  <a:pt x="572325" y="2746638"/>
+                  <a:pt x="572465" y="2755863"/>
+                </a:cubicBezTo>
+                <a:lnTo>
+                  <a:pt x="570028" y="2760324"/>
+                </a:lnTo>
+                <a:lnTo>
+                  <a:pt x="566748" y="2800948"/>
+                </a:lnTo>
+                <a:lnTo>
+                  <a:pt x="565509" y="2801167"/>
+                </a:lnTo>
+                <a:cubicBezTo>
+                  <a:pt x="562655" y="2802587"/>
+                  <a:pt x="560408" y="2805381"/>
+                  <a:pt x="559367" y="2811129"/>
+                </a:cubicBezTo>
+                <a:cubicBezTo>
+                  <a:pt x="543471" y="2797318"/>
+                  <a:pt x="552020" y="2812773"/>
+                  <a:pt x="550354" y="2830949"/>
+                </a:cubicBezTo>
+                <a:cubicBezTo>
+                  <a:pt x="525292" y="2813553"/>
+                  <a:pt x="531129" y="2868192"/>
+                  <a:pt x="514795" y="2872433"/>
+                </a:cubicBezTo>
+                <a:lnTo>
+                  <a:pt x="509875" y="2923099"/>
+                </a:lnTo>
+                <a:lnTo>
+                  <a:pt x="509577" y="2923197"/>
+                </a:lnTo>
+                <a:cubicBezTo>
+                  <a:pt x="508704" y="2924865"/>
+                  <a:pt x="508038" y="2927556"/>
+                  <a:pt x="507597" y="2931868"/>
+                </a:cubicBezTo>
+                <a:cubicBezTo>
+                  <a:pt x="507524" y="2934019"/>
+                  <a:pt x="507452" y="2936171"/>
+                  <a:pt x="507379" y="2938322"/>
+                </a:cubicBezTo>
+                <a:lnTo>
+                  <a:pt x="504725" y="2954519"/>
+                </a:lnTo>
+                <a:lnTo>
+                  <a:pt x="502018" y="2959643"/>
+                </a:lnTo>
+                <a:lnTo>
+                  <a:pt x="498360" y="2961019"/>
+                </a:lnTo>
+                <a:lnTo>
+                  <a:pt x="498483" y="2962590"/>
+                </a:lnTo>
+                <a:cubicBezTo>
+                  <a:pt x="502388" y="2975027"/>
+                  <a:pt x="510202" y="2980016"/>
+                  <a:pt x="484403" y="2990538"/>
+                </a:cubicBezTo>
+                <a:cubicBezTo>
+                  <a:pt x="489425" y="3018352"/>
+                  <a:pt x="474337" y="3021029"/>
+                  <a:pt x="463075" y="3055956"/>
+                </a:cubicBezTo>
+                <a:cubicBezTo>
+                  <a:pt x="469487" y="3072485"/>
+                  <a:pt x="464165" y="3083955"/>
+                  <a:pt x="455013" y="3094482"/>
+                </a:cubicBezTo>
+                <a:cubicBezTo>
+                  <a:pt x="453131" y="3130054"/>
+                  <a:pt x="437643" y="3160106"/>
+                  <a:pt x="428391" y="3198850"/>
+                </a:cubicBezTo>
+                <a:lnTo>
+                  <a:pt x="401440" y="3307560"/>
+                </a:lnTo>
+                <a:lnTo>
+                  <a:pt x="386076" y="3373943"/>
+                </a:lnTo>
+                <a:cubicBezTo>
+                  <a:pt x="386236" y="3376061"/>
+                  <a:pt x="380537" y="3378856"/>
+                  <a:pt x="374726" y="3381364"/>
+                </a:cubicBezTo>
+                <a:lnTo>
+                  <a:pt x="369145" y="3383729"/>
+                </a:lnTo>
+                <a:lnTo>
+                  <a:pt x="364294" y="3414159"/>
+                </a:lnTo>
+                <a:lnTo>
+                  <a:pt x="366450" y="3436925"/>
+                </a:lnTo>
+                <a:lnTo>
+                  <a:pt x="351743" y="3521619"/>
+                </a:lnTo>
+                <a:lnTo>
+                  <a:pt x="345784" y="3603757"/>
+                </a:lnTo>
+                <a:cubicBezTo>
+                  <a:pt x="345255" y="3619979"/>
+                  <a:pt x="344727" y="3636202"/>
+                  <a:pt x="344198" y="3652424"/>
+                </a:cubicBezTo>
+                <a:lnTo>
+                  <a:pt x="352450" y="3665222"/>
+                </a:lnTo>
+                <a:lnTo>
+                  <a:pt x="342621" y="3700804"/>
+                </a:lnTo>
+                <a:lnTo>
+                  <a:pt x="341514" y="3734774"/>
+                </a:lnTo>
+                <a:cubicBezTo>
+                  <a:pt x="341212" y="3751567"/>
+                  <a:pt x="340909" y="3768360"/>
+                  <a:pt x="340607" y="3785153"/>
+                </a:cubicBezTo>
+                <a:cubicBezTo>
+                  <a:pt x="340640" y="3786161"/>
+                  <a:pt x="340674" y="3787169"/>
+                  <a:pt x="340707" y="3788177"/>
+                </a:cubicBezTo>
+                <a:cubicBezTo>
+                  <a:pt x="340592" y="3791719"/>
+                  <a:pt x="340476" y="3795261"/>
+                  <a:pt x="340361" y="3798803"/>
+                </a:cubicBezTo>
+                <a:cubicBezTo>
+                  <a:pt x="340121" y="3812119"/>
+                  <a:pt x="339882" y="3825434"/>
+                  <a:pt x="339642" y="3838750"/>
+                </a:cubicBezTo>
+                <a:cubicBezTo>
+                  <a:pt x="337363" y="3949044"/>
+                  <a:pt x="361794" y="3960437"/>
+                  <a:pt x="360295" y="4015196"/>
+                </a:cubicBezTo>
+                <a:lnTo>
+                  <a:pt x="339043" y="4052778"/>
+                </a:lnTo>
+                <a:lnTo>
+                  <a:pt x="339343" y="4096257"/>
+                </a:lnTo>
+                <a:cubicBezTo>
+                  <a:pt x="362058" y="4159145"/>
+                  <a:pt x="332404" y="4250479"/>
+                  <a:pt x="340786" y="4321136"/>
+                </a:cubicBezTo>
+                <a:cubicBezTo>
+                  <a:pt x="341421" y="4376624"/>
+                  <a:pt x="344189" y="4407708"/>
+                  <a:pt x="343158" y="4429174"/>
+                </a:cubicBezTo>
+                <a:cubicBezTo>
+                  <a:pt x="340948" y="4436304"/>
+                  <a:pt x="337887" y="4443121"/>
+                  <a:pt x="334599" y="4449938"/>
+                </a:cubicBezTo>
+                <a:lnTo>
+                  <a:pt x="332890" y="4453515"/>
+                </a:lnTo>
+                <a:lnTo>
+                  <a:pt x="331105" y="4467941"/>
+                </a:lnTo>
+                <a:lnTo>
+                  <a:pt x="324289" y="4471861"/>
+                </a:lnTo>
+                <a:lnTo>
+                  <a:pt x="317079" y="4493468"/>
+                </a:lnTo>
+                <a:cubicBezTo>
+                  <a:pt x="315353" y="4501584"/>
+                  <a:pt x="314639" y="4510343"/>
+                  <a:pt x="315557" y="4520067"/>
+                </a:cubicBezTo>
+                <a:cubicBezTo>
+                  <a:pt x="315451" y="4525669"/>
+                  <a:pt x="315346" y="4531270"/>
+                  <a:pt x="315240" y="4536872"/>
+                </a:cubicBezTo>
+                <a:lnTo>
+                  <a:pt x="316200" y="4538297"/>
+                </a:lnTo>
+                <a:cubicBezTo>
+                  <a:pt x="316738" y="4541182"/>
+                  <a:pt x="316785" y="4544563"/>
+                  <a:pt x="317507" y="4547582"/>
+                </a:cubicBezTo>
+                <a:cubicBezTo>
+                  <a:pt x="322716" y="4552468"/>
+                  <a:pt x="324912" y="4582137"/>
+                  <a:pt x="323078" y="4592102"/>
+                </a:cubicBezTo>
+                <a:cubicBezTo>
+                  <a:pt x="314597" y="4619728"/>
+                  <a:pt x="334923" y="4645745"/>
+                  <a:pt x="328722" y="4667914"/>
+                </a:cubicBezTo>
+                <a:cubicBezTo>
+                  <a:pt x="330810" y="4685069"/>
+                  <a:pt x="333803" y="4690356"/>
+                  <a:pt x="335597" y="4695035"/>
+                </a:cubicBezTo>
+                <a:lnTo>
+                  <a:pt x="339485" y="4695979"/>
+                </a:lnTo>
+                <a:lnTo>
+                  <a:pt x="341089" y="4704268"/>
+                </a:lnTo>
+                <a:lnTo>
+                  <a:pt x="342177" y="4706060"/>
+                </a:lnTo>
+                <a:cubicBezTo>
+                  <a:pt x="344268" y="4709474"/>
+                  <a:pt x="346234" y="4712931"/>
+                  <a:pt x="347751" y="4716754"/>
+                </a:cubicBezTo>
+                <a:lnTo>
+                  <a:pt x="344125" y="4764669"/>
+                </a:lnTo>
+                <a:lnTo>
+                  <a:pt x="340188" y="4779386"/>
+                </a:lnTo>
+                <a:lnTo>
+                  <a:pt x="335146" y="4787491"/>
+                </a:lnTo>
+                <a:lnTo>
+                  <a:pt x="319124" y="4843514"/>
+                </a:lnTo>
+                <a:lnTo>
+                  <a:pt x="305956" y="4881505"/>
+                </a:lnTo>
+                <a:lnTo>
+                  <a:pt x="301062" y="4889332"/>
+                </a:lnTo>
+                <a:lnTo>
+                  <a:pt x="302141" y="4899400"/>
+                </a:lnTo>
+                <a:cubicBezTo>
+                  <a:pt x="302767" y="4900706"/>
+                  <a:pt x="303536" y="4901803"/>
+                  <a:pt x="304424" y="4902664"/>
+                </a:cubicBezTo>
+                <a:lnTo>
+                  <a:pt x="293123" y="4932769"/>
+                </a:lnTo>
+                <a:lnTo>
+                  <a:pt x="292275" y="4936482"/>
+                </a:lnTo>
+                <a:lnTo>
+                  <a:pt x="288304" y="4962325"/>
+                </a:lnTo>
+                <a:cubicBezTo>
+                  <a:pt x="288009" y="4988948"/>
+                  <a:pt x="287715" y="5015570"/>
+                  <a:pt x="287420" y="5042193"/>
+                </a:cubicBezTo>
+                <a:cubicBezTo>
+                  <a:pt x="295373" y="5039737"/>
+                  <a:pt x="281659" y="5060438"/>
+                  <a:pt x="287020" y="5065655"/>
+                </a:cubicBezTo>
+                <a:cubicBezTo>
+                  <a:pt x="291675" y="5068928"/>
+                  <a:pt x="288601" y="5075970"/>
+                  <a:pt x="288488" y="5082216"/>
+                </a:cubicBezTo>
+                <a:cubicBezTo>
+                  <a:pt x="292282" y="5088207"/>
+                  <a:pt x="287008" y="5117775"/>
+                  <a:pt x="282763" y="5127114"/>
+                </a:cubicBezTo>
+                <a:cubicBezTo>
+                  <a:pt x="267723" y="5152218"/>
+                  <a:pt x="280799" y="5182399"/>
+                  <a:pt x="269316" y="5202682"/>
+                </a:cubicBezTo>
+                <a:cubicBezTo>
+                  <a:pt x="267050" y="5219969"/>
+                  <a:pt x="268614" y="5225841"/>
+                  <a:pt x="269174" y="5230835"/>
+                </a:cubicBezTo>
+                <a:lnTo>
+                  <a:pt x="272679" y="5232660"/>
+                </a:lnTo>
+                <a:lnTo>
+                  <a:pt x="272160" y="5241150"/>
+                </a:lnTo>
+                <a:lnTo>
+                  <a:pt x="272760" y="5243156"/>
+                </a:lnTo>
+                <a:cubicBezTo>
+                  <a:pt x="273922" y="5246984"/>
+                  <a:pt x="274952" y="5250824"/>
+                  <a:pt x="275462" y="5254919"/>
+                </a:cubicBezTo>
+                <a:cubicBezTo>
+                  <a:pt x="258407" y="5258851"/>
+                  <a:pt x="276976" y="5290392"/>
+                  <a:pt x="262897" y="5286259"/>
+                </a:cubicBezTo>
+                <a:cubicBezTo>
+                  <a:pt x="262724" y="5309439"/>
+                  <a:pt x="239612" y="5337531"/>
+                  <a:pt x="252761" y="5357801"/>
+                </a:cubicBezTo>
+                <a:cubicBezTo>
+                  <a:pt x="248775" y="5392256"/>
+                  <a:pt x="247799" y="5423412"/>
+                  <a:pt x="242360" y="5460080"/>
+                </a:cubicBezTo>
+                <a:cubicBezTo>
+                  <a:pt x="232632" y="5488478"/>
+                  <a:pt x="242025" y="5519143"/>
+                  <a:pt x="229880" y="5539714"/>
+                </a:cubicBezTo>
+                <a:cubicBezTo>
+                  <a:pt x="230558" y="5572454"/>
+                  <a:pt x="222150" y="5613340"/>
+                  <a:pt x="204283" y="5639080"/>
+                </a:cubicBezTo>
+                <a:cubicBezTo>
+                  <a:pt x="201596" y="5674226"/>
+                  <a:pt x="191051" y="5680198"/>
+                  <a:pt x="198948" y="5710958"/>
+                </a:cubicBezTo>
+                <a:cubicBezTo>
+                  <a:pt x="196338" y="5713534"/>
+                  <a:pt x="194185" y="5716550"/>
+                  <a:pt x="192367" y="5719859"/>
+                </a:cubicBezTo>
+                <a:lnTo>
+                  <a:pt x="188035" y="5729935"/>
+                </a:lnTo>
+                <a:lnTo>
+                  <a:pt x="188428" y="5731182"/>
+                </a:lnTo>
+                <a:lnTo>
+                  <a:pt x="181635" y="5753538"/>
+                </a:lnTo>
+                <a:lnTo>
+                  <a:pt x="169744" y="5796307"/>
+                </a:lnTo>
+                <a:lnTo>
+                  <a:pt x="170351" y="5796644"/>
+                </a:lnTo>
+                <a:cubicBezTo>
+                  <a:pt x="171558" y="5797954"/>
+                  <a:pt x="172173" y="5799948"/>
+                  <a:pt x="171559" y="5803435"/>
+                </a:cubicBezTo>
+                <a:cubicBezTo>
+                  <a:pt x="182664" y="5798231"/>
+                  <a:pt x="175075" y="5805646"/>
+                  <a:pt x="172284" y="5816391"/>
+                </a:cubicBezTo>
+                <a:cubicBezTo>
+                  <a:pt x="188911" y="5810703"/>
+                  <a:pt x="174844" y="5841128"/>
+                  <a:pt x="182542" y="5846382"/>
+                </a:cubicBezTo>
+                <a:cubicBezTo>
+                  <a:pt x="180118" y="5854404"/>
+                  <a:pt x="177856" y="5862781"/>
+                  <a:pt x="175877" y="5871336"/>
+                </a:cubicBezTo>
+                <a:lnTo>
+                  <a:pt x="174910" y="5876376"/>
+                </a:lnTo>
+                <a:lnTo>
+                  <a:pt x="175047" y="5876483"/>
+                </a:lnTo>
+                <a:cubicBezTo>
+                  <a:pt x="175167" y="5877594"/>
+                  <a:pt x="174973" y="5879257"/>
+                  <a:pt x="174335" y="5881814"/>
+                </a:cubicBezTo>
+                <a:lnTo>
+                  <a:pt x="171273" y="5895339"/>
+                </a:lnTo>
+                <a:cubicBezTo>
+                  <a:pt x="171401" y="5896476"/>
+                  <a:pt x="171530" y="5897612"/>
+                  <a:pt x="171658" y="5898749"/>
+                </a:cubicBezTo>
+                <a:lnTo>
+                  <a:pt x="174658" y="5919558"/>
+                </a:lnTo>
+                <a:cubicBezTo>
+                  <a:pt x="173958" y="5933601"/>
+                  <a:pt x="171208" y="5962838"/>
+                  <a:pt x="169099" y="5984417"/>
+                </a:cubicBezTo>
+                <a:cubicBezTo>
+                  <a:pt x="162916" y="6005205"/>
+                  <a:pt x="164971" y="6025162"/>
+                  <a:pt x="162007" y="6049043"/>
+                </a:cubicBezTo>
+                <a:cubicBezTo>
+                  <a:pt x="150795" y="6073830"/>
+                  <a:pt x="160091" y="6088483"/>
+                  <a:pt x="156875" y="6114000"/>
+                </a:cubicBezTo>
+                <a:cubicBezTo>
+                  <a:pt x="141597" y="6134477"/>
+                  <a:pt x="163381" y="6133378"/>
+                  <a:pt x="165441" y="6146938"/>
+                </a:cubicBezTo>
+                <a:lnTo>
+                  <a:pt x="165177" y="6150658"/>
+                </a:lnTo>
+                <a:lnTo>
+                  <a:pt x="161772" y="6160011"/>
+                </a:lnTo>
+                <a:lnTo>
+                  <a:pt x="160051" y="6163393"/>
+                </a:lnTo>
+                <a:cubicBezTo>
+                  <a:pt x="159032" y="6165775"/>
+                  <a:pt x="158564" y="6167421"/>
+                  <a:pt x="158473" y="6168628"/>
+                </a:cubicBezTo>
+                <a:cubicBezTo>
+                  <a:pt x="158506" y="6168685"/>
+                  <a:pt x="158540" y="6168742"/>
+                  <a:pt x="158573" y="6168799"/>
+                </a:cubicBezTo>
+                <a:lnTo>
+                  <a:pt x="146463" y="6196671"/>
+                </a:lnTo>
+                <a:cubicBezTo>
+                  <a:pt x="152348" y="6205503"/>
+                  <a:pt x="134460" y="6231012"/>
+                  <a:pt x="150209" y="6232365"/>
+                </a:cubicBezTo>
+                <a:cubicBezTo>
+                  <a:pt x="145821" y="6242321"/>
+                  <a:pt x="137774" y="6246719"/>
+                  <a:pt x="148544" y="6246162"/>
+                </a:cubicBezTo>
+                <a:cubicBezTo>
+                  <a:pt x="147378" y="6249522"/>
+                  <a:pt x="147566" y="6251866"/>
+                  <a:pt x="148403" y="6253754"/>
+                </a:cubicBezTo>
+                <a:lnTo>
+                  <a:pt x="138880" y="6276449"/>
+                </a:lnTo>
+                <a:cubicBezTo>
+                  <a:pt x="138814" y="6277540"/>
+                  <a:pt x="138749" y="6278630"/>
+                  <a:pt x="138683" y="6279721"/>
+                </a:cubicBezTo>
+                <a:lnTo>
+                  <a:pt x="130721" y="6293675"/>
+                </a:lnTo>
+                <a:lnTo>
+                  <a:pt x="120717" y="6313967"/>
+                </a:lnTo>
+                <a:cubicBezTo>
+                  <a:pt x="120758" y="6314457"/>
+                  <a:pt x="120800" y="6314947"/>
+                  <a:pt x="120841" y="6315437"/>
+                </a:cubicBezTo>
+                <a:lnTo>
+                  <a:pt x="115208" y="6324024"/>
+                </a:lnTo>
+                <a:cubicBezTo>
+                  <a:pt x="113007" y="6326672"/>
+                  <a:pt x="103991" y="6364381"/>
+                  <a:pt x="101217" y="6365923"/>
+                </a:cubicBezTo>
+                <a:lnTo>
+                  <a:pt x="74946" y="6556817"/>
+                </a:lnTo>
+                <a:cubicBezTo>
+                  <a:pt x="55357" y="6665926"/>
+                  <a:pt x="35695" y="6744075"/>
+                  <a:pt x="16001" y="6808678"/>
+                </a:cubicBezTo>
+                <a:lnTo>
+                  <a:pt x="0" y="6858000"/>
+                </a:lnTo>
+                <a:lnTo>
+                  <a:pt x="5734864" y="6858000"/>
+                </a:lnTo>
+                <a:lnTo>
+                  <a:pt x="5734864" y="0"/>
+                </a:lnTo>
+                <a:close/>
+              </a:path>
+            </a:pathLst>
+          </a:custGeom>
+          <a:solidFill>
+            <a:srgbClr val="82766A">
+              <a:alpha val="15000"/>
+            </a:srgbClr>
+          </a:solidFill>
+          <a:ln w="12700" cap="flat" cmpd="sng" algn="ctr">
+            <a:noFill/>
+            <a:prstDash val="solid"/>
+            <a:miter lim="800000"/>
+          </a:ln>
+          <a:effectLst/>
+        </p:spPr>
+        <p:style>
+          <a:lnRef idx="2">
+            <a:schemeClr val="accent1">
+              <a:shade val="50000"/>
+            </a:schemeClr>
+          </a:lnRef>
+          <a:fillRef idx="1">
+            <a:schemeClr val="accent1"/>
+          </a:fillRef>
+          <a:effectRef idx="0">
+            <a:schemeClr val="accent1"/>
+          </a:effectRef>
+          <a:fontRef idx="minor">
+            <a:schemeClr val="lt1"/>
+          </a:fontRef>
+        </p:style>
+        <p:txBody>
+          <a:bodyPr wrap="square" rtlCol="0" anchor="ctr">
+            <a:noAutofit/>
+          </a:bodyPr>
+          <a:lstStyle/>
+          <a:p>
+            <a:pPr algn="ctr"/>
+            <a:endParaRPr lang="en-US"/>
+          </a:p>
+        </p:txBody>
+      </p:sp>
+      <p:sp>
+        <p:nvSpPr>
+          <p:cNvPr id="2" name="Title 1">
+            <a:extLst>
+              <a:ext uri="{FF2B5EF4-FFF2-40B4-BE49-F238E27FC236}">
+                <a16:creationId xmlns:a16="http://schemas.microsoft.com/office/drawing/2014/main" id="{EF246B98-9AC8-1731-91BA-EC33F21B2854}"/>
+              </a:ext>
+            </a:extLst>
+          </p:cNvPr>
+          <p:cNvSpPr>
+            <a:spLocks noGrp="1"/>
+          </p:cNvSpPr>
+          <p:nvPr>
+            <p:ph type="title"/>
+          </p:nvPr>
+        </p:nvSpPr>
+        <p:spPr>
+          <a:xfrm>
+            <a:off x="773408" y="992094"/>
+            <a:ext cx="3616913" cy="2795160"/>
+          </a:xfrm>
+        </p:spPr>
+        <p:txBody>
+          <a:bodyPr vert="horz" lIns="91440" tIns="45720" rIns="91440" bIns="45720" rtlCol="0" anchor="b">
+            <a:normAutofit/>
+          </a:bodyPr>
+          <a:lstStyle/>
+          <a:p>
+            <a:pPr algn="ctr"/>
+            <a:r>
+              <a:rPr lang="en-US" kern="1200">
+                <a:solidFill>
+                  <a:schemeClr val="tx1"/>
+                </a:solidFill>
+                <a:latin typeface="+mj-lt"/>
+                <a:ea typeface="+mj-ea"/>
+                <a:cs typeface="+mj-cs"/>
+              </a:rPr>
+              <a:t>Preliminary results</a:t>
+            </a:r>
+          </a:p>
+        </p:txBody>
+      </p:sp>
+      <p:sp>
+        <p:nvSpPr>
+          <p:cNvPr id="3" name="Content Placeholder 2">
+            <a:extLst>
+              <a:ext uri="{FF2B5EF4-FFF2-40B4-BE49-F238E27FC236}">
+                <a16:creationId xmlns:a16="http://schemas.microsoft.com/office/drawing/2014/main" id="{1FF8A667-72FF-F0DD-A8E9-3680D2ED163B}"/>
+              </a:ext>
+            </a:extLst>
+          </p:cNvPr>
+          <p:cNvSpPr>
+            <a:spLocks noGrp="1"/>
+          </p:cNvSpPr>
+          <p:nvPr>
+            <p:ph idx="1"/>
+          </p:nvPr>
+        </p:nvSpPr>
+        <p:spPr>
+          <a:xfrm>
+            <a:off x="996287" y="4121253"/>
+            <a:ext cx="3125337" cy="1136843"/>
+          </a:xfrm>
+        </p:spPr>
+        <p:txBody>
+          <a:bodyPr vert="horz" lIns="91440" tIns="45720" rIns="91440" bIns="45720" rtlCol="0">
+            <a:normAutofit/>
+          </a:bodyPr>
+          <a:lstStyle/>
+          <a:p>
+            <a:pPr marL="0" indent="0" algn="ctr">
+              <a:buNone/>
+            </a:pPr>
+            <a:r>
+              <a:rPr lang="en-US" sz="1800" kern="1200">
+                <a:solidFill>
+                  <a:schemeClr val="tx1"/>
+                </a:solidFill>
+                <a:latin typeface="+mn-lt"/>
+                <a:ea typeface="+mn-ea"/>
+                <a:cs typeface="+mn-cs"/>
+              </a:rPr>
+              <a:t>What proportion of activities occur within 15 minutes?</a:t>
+            </a:r>
+          </a:p>
+        </p:txBody>
+      </p:sp>
+      <p:pic>
+        <p:nvPicPr>
+          <p:cNvPr id="5" name="Picture 4">
+            <a:extLst>
+              <a:ext uri="{FF2B5EF4-FFF2-40B4-BE49-F238E27FC236}">
+                <a16:creationId xmlns:a16="http://schemas.microsoft.com/office/drawing/2014/main" id="{628520E5-8B76-0B19-1B10-529E5F63A36A}"/>
+              </a:ext>
+            </a:extLst>
+          </p:cNvPr>
+          <p:cNvPicPr>
+            <a:picLocks noChangeAspect="1"/>
+          </p:cNvPicPr>
+          <p:nvPr/>
+        </p:nvPicPr>
+        <p:blipFill>
+          <a:blip r:embed="rId2">
+            <a:extLst>
+              <a:ext uri="{28A0092B-C50C-407E-A947-70E740481C1C}">
+                <a14:useLocalDpi xmlns:a14="http://schemas.microsoft.com/office/drawing/2010/main" val="0"/>
+              </a:ext>
+            </a:extLst>
+          </a:blip>
+          <a:stretch>
+            <a:fillRect/>
+          </a:stretch>
+        </p:blipFill>
+        <p:spPr>
+          <a:xfrm>
+            <a:off x="5637443" y="877008"/>
+            <a:ext cx="6726835" cy="4708783"/>
+          </a:xfrm>
+          <a:prstGeom prst="rect">
+            <a:avLst/>
+          </a:prstGeom>
+        </p:spPr>
+      </p:pic>
+    </p:spTree>
+    <p:extLst>
+      <p:ext uri="{BB962C8B-B14F-4D97-AF65-F5344CB8AC3E}">
+        <p14:creationId xmlns:p14="http://schemas.microsoft.com/office/powerpoint/2010/main" val="512293824"/>
+      </p:ext>
+    </p:extLst>
+  </p:cSld>
+  <p:clrMapOvr>
+    <a:masterClrMapping/>
+  </p:clrMapOvr>
+</p:sld>
+</file>
+
+<file path=ppt/slides/slide9.xml><?xml version="1.0" encoding="utf-8"?>
 <p:sld xmlns:a="http://schemas.openxmlformats.org/drawingml/2006/main" xmlns:r="http://schemas.openxmlformats.org/officeDocument/2006/relationships" xmlns:p="http://schemas.openxmlformats.org/presentationml/2006/main">
   <p:cSld>
     <p:spTree>
@@ -10685,7 +17822,7 @@
           <p:cNvPr id="2" name="Title 1">
             <a:extLst>
               <a:ext uri="{FF2B5EF4-FFF2-40B4-BE49-F238E27FC236}">
-                <a16:creationId xmlns:a16="http://schemas.microsoft.com/office/drawing/2014/main" id="{EF246B98-9AC8-1731-91BA-EC33F21B2854}"/>
+                <a16:creationId xmlns:a16="http://schemas.microsoft.com/office/drawing/2014/main" id="{D2AB53E3-DD75-3FA3-4F10-61511F0AD0DD}"/>
               </a:ext>
             </a:extLst>
           </p:cNvPr>
@@ -10696,378 +17833,66 @@
             <p:ph type="title"/>
           </p:nvPr>
         </p:nvSpPr>
-        <p:spPr/>
+        <p:spPr>
+          <a:xfrm rot="16200000">
+            <a:off x="-4071730" y="91364"/>
+            <a:ext cx="10515600" cy="1325563"/>
+          </a:xfrm>
+        </p:spPr>
         <p:txBody>
-          <a:bodyPr/>
+          <a:bodyPr>
+            <a:normAutofit/>
+          </a:bodyPr>
           <a:lstStyle/>
           <a:p>
             <a:r>
-              <a:rPr lang="fr-CH" dirty="0"/>
-              <a:t>Preliminary </a:t>
-            </a:r>
-            <a:r>
-              <a:rPr lang="fr-CH" dirty="0" err="1"/>
-              <a:t>results</a:t>
-            </a:r>
-            <a:endParaRPr lang="fr-CH" dirty="0"/>
+              <a:rPr lang="en-001" b="1" dirty="0"/>
+              <a:t>Accessibility Gap</a:t>
+            </a:r>
+            <a:endParaRPr lang="en-001" dirty="0"/>
           </a:p>
         </p:txBody>
       </p:sp>
-      <p:sp>
-        <p:nvSpPr>
-          <p:cNvPr id="3" name="Content Placeholder 2">
+      <p:pic>
+        <p:nvPicPr>
+          <p:cNvPr id="8" name="Picture 7">
             <a:extLst>
               <a:ext uri="{FF2B5EF4-FFF2-40B4-BE49-F238E27FC236}">
-                <a16:creationId xmlns:a16="http://schemas.microsoft.com/office/drawing/2014/main" id="{1FF8A667-72FF-F0DD-A8E9-3680D2ED163B}"/>
+                <a16:creationId xmlns:a16="http://schemas.microsoft.com/office/drawing/2014/main" id="{826849BE-0450-BC5F-269F-A7C9C7FCB89E}"/>
               </a:ext>
             </a:extLst>
           </p:cNvPr>
-          <p:cNvSpPr>
-            <a:spLocks noGrp="1"/>
-          </p:cNvSpPr>
-          <p:nvPr>
-            <p:ph idx="1"/>
-          </p:nvPr>
-        </p:nvSpPr>
-        <p:spPr/>
-        <p:txBody>
-          <a:bodyPr/>
-          <a:lstStyle/>
-          <a:p>
-            <a:endParaRPr lang="fr-CH" dirty="0"/>
-          </a:p>
-        </p:txBody>
-      </p:sp>
+          <p:cNvPicPr>
+            <a:picLocks noChangeAspect="1"/>
+          </p:cNvPicPr>
+          <p:nvPr/>
+        </p:nvPicPr>
+        <p:blipFill>
+          <a:blip r:embed="rId2">
+            <a:extLst>
+              <a:ext uri="{28A0092B-C50C-407E-A947-70E740481C1C}">
+                <a14:useLocalDpi xmlns:a14="http://schemas.microsoft.com/office/drawing/2010/main" val="0"/>
+              </a:ext>
+            </a:extLst>
+          </a:blip>
+          <a:stretch>
+            <a:fillRect/>
+          </a:stretch>
+        </p:blipFill>
+        <p:spPr>
+          <a:xfrm>
+            <a:off x="1848852" y="475849"/>
+            <a:ext cx="8964922" cy="6133894"/>
+          </a:xfrm>
+          <a:prstGeom prst="rect">
+            <a:avLst/>
+          </a:prstGeom>
+        </p:spPr>
+      </p:pic>
     </p:spTree>
     <p:extLst>
       <p:ext uri="{BB962C8B-B14F-4D97-AF65-F5344CB8AC3E}">
-        <p14:creationId xmlns:p14="http://schemas.microsoft.com/office/powerpoint/2010/main" val="512293824"/>
-      </p:ext>
-    </p:extLst>
-  </p:cSld>
-  <p:clrMapOvr>
-    <a:masterClrMapping/>
-  </p:clrMapOvr>
-</p:sld>
-</file>
-
-<file path=ppt/slides/slide7.xml><?xml version="1.0" encoding="utf-8"?>
-<p:sld xmlns:a="http://schemas.openxmlformats.org/drawingml/2006/main" xmlns:r="http://schemas.openxmlformats.org/officeDocument/2006/relationships" xmlns:p="http://schemas.openxmlformats.org/presentationml/2006/main">
-  <p:cSld>
-    <p:spTree>
-      <p:nvGrpSpPr>
-        <p:cNvPr id="1" name=""/>
-        <p:cNvGrpSpPr/>
-        <p:nvPr/>
-      </p:nvGrpSpPr>
-      <p:grpSpPr>
-        <a:xfrm>
-          <a:off x="0" y="0"/>
-          <a:ext cx="0" cy="0"/>
-          <a:chOff x="0" y="0"/>
-          <a:chExt cx="0" cy="0"/>
-        </a:xfrm>
-      </p:grpSpPr>
-      <p:sp>
-        <p:nvSpPr>
-          <p:cNvPr id="2" name="Title 1">
-            <a:extLst>
-              <a:ext uri="{FF2B5EF4-FFF2-40B4-BE49-F238E27FC236}">
-                <a16:creationId xmlns:a16="http://schemas.microsoft.com/office/drawing/2014/main" id="{229A9C5E-D113-F410-1D52-CFEDFDD68709}"/>
-              </a:ext>
-            </a:extLst>
-          </p:cNvPr>
-          <p:cNvSpPr>
-            <a:spLocks noGrp="1"/>
-          </p:cNvSpPr>
-          <p:nvPr>
-            <p:ph type="title"/>
-          </p:nvPr>
-        </p:nvSpPr>
-        <p:spPr/>
-        <p:txBody>
-          <a:bodyPr/>
-          <a:lstStyle/>
-          <a:p>
-            <a:r>
-              <a:rPr lang="fr-CH" dirty="0"/>
-              <a:t>Challenges and Plan B</a:t>
-            </a:r>
-          </a:p>
-        </p:txBody>
-      </p:sp>
-      <p:sp>
-        <p:nvSpPr>
-          <p:cNvPr id="3" name="Content Placeholder 2">
-            <a:extLst>
-              <a:ext uri="{FF2B5EF4-FFF2-40B4-BE49-F238E27FC236}">
-                <a16:creationId xmlns:a16="http://schemas.microsoft.com/office/drawing/2014/main" id="{DBAEEBF5-C3D9-FA63-1735-E9C2F5C42998}"/>
-              </a:ext>
-            </a:extLst>
-          </p:cNvPr>
-          <p:cNvSpPr>
-            <a:spLocks noGrp="1"/>
-          </p:cNvSpPr>
-          <p:nvPr>
-            <p:ph idx="1"/>
-          </p:nvPr>
-        </p:nvSpPr>
-        <p:spPr/>
-        <p:txBody>
-          <a:bodyPr/>
-          <a:lstStyle/>
-          <a:p>
-            <a:r>
-              <a:rPr lang="fr-CH" dirty="0" err="1"/>
-              <a:t>Integration</a:t>
-            </a:r>
-            <a:r>
-              <a:rPr lang="fr-CH" dirty="0"/>
-              <a:t> of the ZVV time plan </a:t>
-            </a:r>
-          </a:p>
-          <a:p>
-            <a:pPr lvl="1"/>
-            <a:r>
-              <a:rPr lang="fr-CH" dirty="0"/>
-              <a:t>Heavy data set </a:t>
-            </a:r>
-          </a:p>
-          <a:p>
-            <a:pPr lvl="1"/>
-            <a:r>
-              <a:rPr lang="fr-CH" dirty="0"/>
-              <a:t>Add </a:t>
-            </a:r>
-            <a:r>
-              <a:rPr lang="fr-CH" dirty="0" err="1"/>
-              <a:t>unusefull</a:t>
-            </a:r>
-            <a:r>
-              <a:rPr lang="fr-CH" dirty="0"/>
-              <a:t> complication</a:t>
-            </a:r>
-            <a:endParaRPr lang="fr-CH" dirty="0">
-              <a:sym typeface="Wingdings" panose="05000000000000000000" pitchFamily="2" charset="2"/>
-            </a:endParaRPr>
-          </a:p>
-          <a:p>
-            <a:pPr>
-              <a:buFont typeface="Wingdings" panose="05000000000000000000" pitchFamily="2" charset="2"/>
-              <a:buChar char="à"/>
-            </a:pPr>
-            <a:r>
-              <a:rPr lang="fr-CH" dirty="0">
-                <a:sym typeface="Wingdings" panose="05000000000000000000" pitchFamily="2" charset="2"/>
-              </a:rPr>
-              <a:t>Use an estimation of the speed of the public transports (bus and tram) of 15 km/h </a:t>
-            </a:r>
-          </a:p>
-          <a:p>
-            <a:r>
-              <a:rPr lang="fr-CH" dirty="0">
-                <a:sym typeface="Wingdings" panose="05000000000000000000" pitchFamily="2" charset="2"/>
-              </a:rPr>
-              <a:t>Anonymisation of the data</a:t>
-            </a:r>
-          </a:p>
-          <a:p>
-            <a:pPr lvl="1"/>
-            <a:r>
-              <a:rPr lang="fr-CH" dirty="0">
-                <a:sym typeface="Wingdings" panose="05000000000000000000" pitchFamily="2" charset="2"/>
-              </a:rPr>
-              <a:t>With </a:t>
-            </a:r>
-            <a:r>
-              <a:rPr lang="fr-CH" dirty="0" err="1">
-                <a:sym typeface="Wingdings" panose="05000000000000000000" pitchFamily="2" charset="2"/>
-              </a:rPr>
-              <a:t>only</a:t>
-            </a:r>
-            <a:r>
-              <a:rPr lang="fr-CH" dirty="0">
-                <a:sym typeface="Wingdings" panose="05000000000000000000" pitchFamily="2" charset="2"/>
-              </a:rPr>
-              <a:t> a few </a:t>
-            </a:r>
-            <a:r>
-              <a:rPr lang="fr-CH" dirty="0" err="1">
-                <a:sym typeface="Wingdings" panose="05000000000000000000" pitchFamily="2" charset="2"/>
-              </a:rPr>
-              <a:t>trajectories</a:t>
-            </a:r>
-            <a:r>
-              <a:rPr lang="fr-CH" dirty="0">
-                <a:sym typeface="Wingdings" panose="05000000000000000000" pitchFamily="2" charset="2"/>
-              </a:rPr>
-              <a:t>, </a:t>
-            </a:r>
-            <a:r>
-              <a:rPr lang="fr-CH" dirty="0" err="1">
-                <a:sym typeface="Wingdings" panose="05000000000000000000" pitchFamily="2" charset="2"/>
-              </a:rPr>
-              <a:t>it</a:t>
-            </a:r>
-            <a:r>
-              <a:rPr lang="fr-CH" dirty="0">
-                <a:sym typeface="Wingdings" panose="05000000000000000000" pitchFamily="2" charset="2"/>
-              </a:rPr>
-              <a:t> </a:t>
-            </a:r>
-            <a:r>
-              <a:rPr lang="fr-CH" dirty="0" err="1">
-                <a:sym typeface="Wingdings" panose="05000000000000000000" pitchFamily="2" charset="2"/>
-              </a:rPr>
-              <a:t>is</a:t>
-            </a:r>
-            <a:r>
-              <a:rPr lang="fr-CH" dirty="0">
-                <a:sym typeface="Wingdings" panose="05000000000000000000" pitchFamily="2" charset="2"/>
-              </a:rPr>
-              <a:t> possible to </a:t>
-            </a:r>
-            <a:r>
-              <a:rPr lang="fr-CH" dirty="0" err="1">
-                <a:sym typeface="Wingdings" panose="05000000000000000000" pitchFamily="2" charset="2"/>
-              </a:rPr>
-              <a:t>find</a:t>
-            </a:r>
-            <a:r>
-              <a:rPr lang="fr-CH" dirty="0">
-                <a:sym typeface="Wingdings" panose="05000000000000000000" pitchFamily="2" charset="2"/>
-              </a:rPr>
-              <a:t> out </a:t>
-            </a:r>
-            <a:r>
-              <a:rPr lang="fr-CH" dirty="0" err="1">
-                <a:sym typeface="Wingdings" panose="05000000000000000000" pitchFamily="2" charset="2"/>
-              </a:rPr>
-              <a:t>where</a:t>
-            </a:r>
-            <a:r>
-              <a:rPr lang="fr-CH" dirty="0">
-                <a:sym typeface="Wingdings" panose="05000000000000000000" pitchFamily="2" charset="2"/>
-              </a:rPr>
-              <a:t> the </a:t>
-            </a:r>
-            <a:r>
-              <a:rPr lang="fr-CH" dirty="0" err="1">
-                <a:sym typeface="Wingdings" panose="05000000000000000000" pitchFamily="2" charset="2"/>
-              </a:rPr>
-              <a:t>person</a:t>
-            </a:r>
-            <a:r>
-              <a:rPr lang="fr-CH" dirty="0">
-                <a:sym typeface="Wingdings" panose="05000000000000000000" pitchFamily="2" charset="2"/>
-              </a:rPr>
-              <a:t> </a:t>
-            </a:r>
-            <a:r>
-              <a:rPr lang="fr-CH" dirty="0" err="1">
-                <a:sym typeface="Wingdings" panose="05000000000000000000" pitchFamily="2" charset="2"/>
-              </a:rPr>
-              <a:t>lives</a:t>
-            </a:r>
-            <a:r>
-              <a:rPr lang="fr-CH" dirty="0">
-                <a:sym typeface="Wingdings" panose="05000000000000000000" pitchFamily="2" charset="2"/>
-              </a:rPr>
-              <a:t>/</a:t>
-            </a:r>
-            <a:r>
-              <a:rPr lang="fr-CH" dirty="0" err="1">
-                <a:sym typeface="Wingdings" panose="05000000000000000000" pitchFamily="2" charset="2"/>
-              </a:rPr>
-              <a:t>who</a:t>
-            </a:r>
-            <a:r>
-              <a:rPr lang="fr-CH" dirty="0">
-                <a:sym typeface="Wingdings" panose="05000000000000000000" pitchFamily="2" charset="2"/>
-              </a:rPr>
-              <a:t> </a:t>
-            </a:r>
-            <a:r>
-              <a:rPr lang="fr-CH" dirty="0" err="1">
-                <a:sym typeface="Wingdings" panose="05000000000000000000" pitchFamily="2" charset="2"/>
-              </a:rPr>
-              <a:t>they</a:t>
-            </a:r>
-            <a:r>
-              <a:rPr lang="fr-CH" dirty="0">
-                <a:sym typeface="Wingdings" panose="05000000000000000000" pitchFamily="2" charset="2"/>
-              </a:rPr>
-              <a:t> are</a:t>
-            </a:r>
-          </a:p>
-          <a:p>
-            <a:pPr marL="0" indent="0">
-              <a:buNone/>
-            </a:pPr>
-            <a:r>
-              <a:rPr lang="fr-CH" dirty="0">
-                <a:sym typeface="Wingdings" panose="05000000000000000000" pitchFamily="2" charset="2"/>
-              </a:rPr>
-              <a:t> Change the </a:t>
-            </a:r>
-            <a:r>
-              <a:rPr lang="fr-CH" dirty="0" err="1">
-                <a:sym typeface="Wingdings" panose="05000000000000000000" pitchFamily="2" charset="2"/>
-              </a:rPr>
-              <a:t>adress</a:t>
-            </a:r>
-            <a:r>
-              <a:rPr lang="fr-CH" dirty="0">
-                <a:sym typeface="Wingdings" panose="05000000000000000000" pitchFamily="2" charset="2"/>
-              </a:rPr>
-              <a:t> by a few blocks/</a:t>
-            </a:r>
-            <a:r>
-              <a:rPr lang="fr-CH" dirty="0" err="1">
-                <a:sym typeface="Wingdings" panose="05000000000000000000" pitchFamily="2" charset="2"/>
-              </a:rPr>
-              <a:t>streets</a:t>
-            </a:r>
-            <a:r>
-              <a:rPr lang="fr-CH" dirty="0">
-                <a:sym typeface="Wingdings" panose="05000000000000000000" pitchFamily="2" charset="2"/>
-              </a:rPr>
-              <a:t> (but </a:t>
-            </a:r>
-            <a:r>
-              <a:rPr lang="fr-CH" dirty="0" err="1">
-                <a:sym typeface="Wingdings" panose="05000000000000000000" pitchFamily="2" charset="2"/>
-              </a:rPr>
-              <a:t>still</a:t>
-            </a:r>
-            <a:r>
-              <a:rPr lang="fr-CH" dirty="0">
-                <a:sym typeface="Wingdings" panose="05000000000000000000" pitchFamily="2" charset="2"/>
-              </a:rPr>
-              <a:t> not </a:t>
-            </a:r>
-            <a:r>
-              <a:rPr lang="fr-CH" dirty="0" err="1">
-                <a:sym typeface="Wingdings" panose="05000000000000000000" pitchFamily="2" charset="2"/>
-              </a:rPr>
-              <a:t>ideal</a:t>
-            </a:r>
-            <a:r>
-              <a:rPr lang="fr-CH" dirty="0">
-                <a:sym typeface="Wingdings" panose="05000000000000000000" pitchFamily="2" charset="2"/>
-              </a:rPr>
-              <a:t>) </a:t>
-            </a:r>
-          </a:p>
-          <a:p>
-            <a:endParaRPr lang="fr-CH" dirty="0"/>
-          </a:p>
-        </p:txBody>
-      </p:sp>
-    </p:spTree>
-    <p:extLst>
-      <p:ext uri="{BB962C8B-B14F-4D97-AF65-F5344CB8AC3E}">
-        <p14:creationId xmlns:p14="http://schemas.microsoft.com/office/powerpoint/2010/main" val="2357305363"/>
+        <p14:creationId xmlns:p14="http://schemas.microsoft.com/office/powerpoint/2010/main" val="1701537491"/>
       </p:ext>
     </p:extLst>
   </p:cSld>

--- a/The 15-Minute City in Practice.pptx
+++ b/The 15-Minute City in Practice.pptx
@@ -1387,7 +1387,11 @@
           </a:r>
           <a:r>
             <a:rPr lang="fr-CH" sz="2000" dirty="0" err="1"/>
-            <a:t>maps</a:t>
+            <a:t>datasets</a:t>
+          </a:r>
+          <a:r>
+            <a:rPr lang="fr-CH" sz="2000" dirty="0"/>
+            <a:t> </a:t>
           </a:r>
           <a:endParaRPr lang="en-US" sz="2000" dirty="0"/>
         </a:p>
@@ -2260,7 +2264,11 @@
           </a:r>
           <a:r>
             <a:rPr lang="fr-CH" sz="2000" kern="1200" dirty="0" err="1"/>
-            <a:t>maps</a:t>
+            <a:t>datasets</a:t>
+          </a:r>
+          <a:r>
+            <a:rPr lang="fr-CH" sz="2000" kern="1200" dirty="0"/>
+            <a:t> </a:t>
           </a:r>
           <a:endParaRPr lang="en-US" sz="2000" kern="1200" dirty="0"/>
         </a:p>
@@ -14861,7 +14869,7 @@
             <p:ph idx="1"/>
             <p:extLst>
               <p:ext uri="{D42A27DB-BD31-4B8C-83A1-F6EECF244321}">
-                <p14:modId xmlns:p14="http://schemas.microsoft.com/office/powerpoint/2010/main" val="3875943756"/>
+                <p14:modId xmlns:p14="http://schemas.microsoft.com/office/powerpoint/2010/main" val="1434756831"/>
               </p:ext>
             </p:extLst>
           </p:nvPr>
@@ -14976,7 +14984,7 @@
         </p:blipFill>
         <p:spPr>
           <a:xfrm>
-            <a:off x="10593653" y="2956666"/>
+            <a:off x="10613423" y="2992583"/>
             <a:ext cx="730038" cy="730038"/>
           </a:xfrm>
           <a:prstGeom prst="rect">
@@ -15012,7 +15020,115 @@
         </p:blipFill>
         <p:spPr>
           <a:xfrm>
-            <a:off x="10563543" y="3645006"/>
+            <a:off x="10623762" y="3614870"/>
+            <a:ext cx="730038" cy="730038"/>
+          </a:xfrm>
+          <a:prstGeom prst="rect">
+            <a:avLst/>
+          </a:prstGeom>
+        </p:spPr>
+      </p:pic>
+      <p:pic>
+        <p:nvPicPr>
+          <p:cNvPr id="3" name="Graphic 2" descr="Checkbox Ticked with solid fill">
+            <a:extLst>
+              <a:ext uri="{FF2B5EF4-FFF2-40B4-BE49-F238E27FC236}">
+                <a16:creationId xmlns:a16="http://schemas.microsoft.com/office/drawing/2014/main" id="{FA2DE613-F1D5-2989-D88C-8E6AED6156DA}"/>
+              </a:ext>
+            </a:extLst>
+          </p:cNvPr>
+          <p:cNvPicPr>
+            <a:picLocks noChangeAspect="1"/>
+          </p:cNvPicPr>
+          <p:nvPr/>
+        </p:nvPicPr>
+        <p:blipFill>
+          <a:blip>
+            <a:extLst>
+              <a:ext uri="{96DAC541-7B7A-43D3-8B79-37D633B846F1}">
+                <asvg:svgBlip xmlns:asvg="http://schemas.microsoft.com/office/drawing/2016/SVG/main" r:embed="rId7"/>
+              </a:ext>
+            </a:extLst>
+          </a:blip>
+          <a:stretch>
+            <a:fillRect/>
+          </a:stretch>
+        </p:blipFill>
+        <p:spPr>
+          <a:xfrm>
+            <a:off x="10593653" y="4273073"/>
+            <a:ext cx="730038" cy="730038"/>
+          </a:xfrm>
+          <a:prstGeom prst="rect">
+            <a:avLst/>
+          </a:prstGeom>
+        </p:spPr>
+      </p:pic>
+      <p:pic>
+        <p:nvPicPr>
+          <p:cNvPr id="7" name="Graphic 6" descr="Checkbox Ticked with solid fill">
+            <a:extLst>
+              <a:ext uri="{FF2B5EF4-FFF2-40B4-BE49-F238E27FC236}">
+                <a16:creationId xmlns:a16="http://schemas.microsoft.com/office/drawing/2014/main" id="{E1F16737-3E02-BFA5-BEF3-8E01D6A89809}"/>
+              </a:ext>
+            </a:extLst>
+          </p:cNvPr>
+          <p:cNvPicPr>
+            <a:picLocks noChangeAspect="1"/>
+          </p:cNvPicPr>
+          <p:nvPr/>
+        </p:nvPicPr>
+        <p:blipFill>
+          <a:blip>
+            <a:extLst>
+              <a:ext uri="{96DAC541-7B7A-43D3-8B79-37D633B846F1}">
+                <asvg:svgBlip xmlns:asvg="http://schemas.microsoft.com/office/drawing/2016/SVG/main" r:embed="rId7"/>
+              </a:ext>
+            </a:extLst>
+          </a:blip>
+          <a:stretch>
+            <a:fillRect/>
+          </a:stretch>
+        </p:blipFill>
+        <p:spPr>
+          <a:xfrm>
+            <a:off x="10613423" y="4859999"/>
+            <a:ext cx="730038" cy="730038"/>
+          </a:xfrm>
+          <a:prstGeom prst="rect">
+            <a:avLst/>
+          </a:prstGeom>
+        </p:spPr>
+      </p:pic>
+      <p:pic>
+        <p:nvPicPr>
+          <p:cNvPr id="8" name="Graphic 7" descr="Checkbox Ticked with solid fill">
+            <a:extLst>
+              <a:ext uri="{FF2B5EF4-FFF2-40B4-BE49-F238E27FC236}">
+                <a16:creationId xmlns:a16="http://schemas.microsoft.com/office/drawing/2014/main" id="{3E0A8CC6-3214-EF38-9053-422EFD396D2C}"/>
+              </a:ext>
+            </a:extLst>
+          </p:cNvPr>
+          <p:cNvPicPr>
+            <a:picLocks noChangeAspect="1"/>
+          </p:cNvPicPr>
+          <p:nvPr/>
+        </p:nvPicPr>
+        <p:blipFill>
+          <a:blip>
+            <a:extLst>
+              <a:ext uri="{96DAC541-7B7A-43D3-8B79-37D633B846F1}">
+                <asvg:svgBlip xmlns:asvg="http://schemas.microsoft.com/office/drawing/2016/SVG/main" r:embed="rId7"/>
+              </a:ext>
+            </a:extLst>
+          </a:blip>
+          <a:stretch>
+            <a:fillRect/>
+          </a:stretch>
+        </p:blipFill>
+        <p:spPr>
+          <a:xfrm>
+            <a:off x="10613423" y="5488622"/>
             <a:ext cx="730038" cy="730038"/>
           </a:xfrm>
           <a:prstGeom prst="rect">

--- a/The 15-Minute City in Practice.pptx
+++ b/The 15-Minute City in Practice.pptx
@@ -127,6 +127,88 @@
   <p188:author id="{DE3E4DB8-4E12-F18C-200B-095F2E882368}" name="Kern  Lucie" initials="KL" userId="S::kernlu@ethz.ch::73957d06-79f2-4001-a218-8bdcb8f96aaa" providerId="AD"/>
   <p188:author id="{C91F3CF6-149F-06F0-0291-18BB8A7035EF}" name="Noémie Simon" initials="NS" userId="bcf751ccc0c63cc4" providerId="Windows Live"/>
 </p188:authorLst>
+</file>
+
+<file path=ppt/revisionInfo.xml><?xml version="1.0" encoding="utf-8"?>
+<p1510:revInfo xmlns:a="http://schemas.openxmlformats.org/drawingml/2006/main" xmlns:r="http://schemas.openxmlformats.org/officeDocument/2006/relationships" xmlns:p1510="http://schemas.microsoft.com/office/powerpoint/2015/10/main">
+  <p1510:revLst>
+    <p1510:client id="{5E255A67-A6A9-4968-8E92-A1C96BA15CA7}" v="2" dt="2026-06-02T17:30:52.206"/>
+  </p1510:revLst>
+</p1510:revInfo>
+</file>
+
+<file path=ppt/changesInfos/changesInfo1.xml><?xml version="1.0" encoding="utf-8"?>
+<pc:chgInfo xmlns:a="http://schemas.openxmlformats.org/drawingml/2006/main" xmlns:r="http://schemas.openxmlformats.org/officeDocument/2006/relationships" xmlns:ac="http://schemas.microsoft.com/office/drawing/2013/main/command" xmlns:pc="http://schemas.microsoft.com/office/powerpoint/2013/main/command">
+  <pc:docChgLst>
+    <pc:chgData name="Noémie Simon" userId="bcf751ccc0c63cc4" providerId="LiveId" clId="{D8646A5F-B639-4467-90AE-53976C914447}"/>
+    <pc:docChg chg="modSld">
+      <pc:chgData name="Noémie Simon" userId="bcf751ccc0c63cc4" providerId="LiveId" clId="{D8646A5F-B639-4467-90AE-53976C914447}" dt="2026-06-02T17:40:20.969" v="104" actId="729"/>
+      <pc:docMkLst>
+        <pc:docMk/>
+      </pc:docMkLst>
+      <pc:sldChg chg="modSp mod">
+        <pc:chgData name="Noémie Simon" userId="bcf751ccc0c63cc4" providerId="LiveId" clId="{D8646A5F-B639-4467-90AE-53976C914447}" dt="2026-06-02T17:32:45.254" v="101" actId="20577"/>
+        <pc:sldMkLst>
+          <pc:docMk/>
+          <pc:sldMk cId="3359249337" sldId="256"/>
+        </pc:sldMkLst>
+        <pc:spChg chg="mod">
+          <ac:chgData name="Noémie Simon" userId="bcf751ccc0c63cc4" providerId="LiveId" clId="{D8646A5F-B639-4467-90AE-53976C914447}" dt="2026-06-02T17:32:45.254" v="101" actId="20577"/>
+          <ac:spMkLst>
+            <pc:docMk/>
+            <pc:sldMk cId="3359249337" sldId="256"/>
+            <ac:spMk id="2" creationId="{55269C2F-6BFD-EFC2-398D-9FE490AB97CC}"/>
+          </ac:spMkLst>
+        </pc:spChg>
+      </pc:sldChg>
+      <pc:sldChg chg="mod modShow">
+        <pc:chgData name="Noémie Simon" userId="bcf751ccc0c63cc4" providerId="LiveId" clId="{D8646A5F-B639-4467-90AE-53976C914447}" dt="2026-06-02T17:40:20.969" v="104" actId="729"/>
+        <pc:sldMkLst>
+          <pc:docMk/>
+          <pc:sldMk cId="3526247385" sldId="257"/>
+        </pc:sldMkLst>
+      </pc:sldChg>
+      <pc:sldChg chg="mod modShow">
+        <pc:chgData name="Noémie Simon" userId="bcf751ccc0c63cc4" providerId="LiveId" clId="{D8646A5F-B639-4467-90AE-53976C914447}" dt="2026-06-02T17:40:15.898" v="103" actId="729"/>
+        <pc:sldMkLst>
+          <pc:docMk/>
+          <pc:sldMk cId="2296812319" sldId="258"/>
+        </pc:sldMkLst>
+      </pc:sldChg>
+      <pc:sldChg chg="modSp mod">
+        <pc:chgData name="Noémie Simon" userId="bcf751ccc0c63cc4" providerId="LiveId" clId="{D8646A5F-B639-4467-90AE-53976C914447}" dt="2026-06-02T17:40:05.580" v="102" actId="1076"/>
+        <pc:sldMkLst>
+          <pc:docMk/>
+          <pc:sldMk cId="131123478" sldId="266"/>
+        </pc:sldMkLst>
+        <pc:spChg chg="mod">
+          <ac:chgData name="Noémie Simon" userId="bcf751ccc0c63cc4" providerId="LiveId" clId="{D8646A5F-B639-4467-90AE-53976C914447}" dt="2026-06-02T17:30:15.351" v="3" actId="20577"/>
+          <ac:spMkLst>
+            <pc:docMk/>
+            <pc:sldMk cId="131123478" sldId="266"/>
+            <ac:spMk id="11" creationId="{1721DAEC-0A82-6021-A4E5-89B28C221F2F}"/>
+          </ac:spMkLst>
+        </pc:spChg>
+        <pc:spChg chg="mod">
+          <ac:chgData name="Noémie Simon" userId="bcf751ccc0c63cc4" providerId="LiveId" clId="{D8646A5F-B639-4467-90AE-53976C914447}" dt="2026-06-02T17:30:59.299" v="64" actId="20577"/>
+          <ac:spMkLst>
+            <pc:docMk/>
+            <pc:sldMk cId="131123478" sldId="266"/>
+            <ac:spMk id="18" creationId="{214E7150-6D34-BA9C-1FC7-E2FD88FAB998}"/>
+          </ac:spMkLst>
+        </pc:spChg>
+        <pc:spChg chg="mod">
+          <ac:chgData name="Noémie Simon" userId="bcf751ccc0c63cc4" providerId="LiveId" clId="{D8646A5F-B639-4467-90AE-53976C914447}" dt="2026-06-02T17:40:05.580" v="102" actId="1076"/>
+          <ac:spMkLst>
+            <pc:docMk/>
+            <pc:sldMk cId="131123478" sldId="266"/>
+            <ac:spMk id="22" creationId="{4C50DE4D-9766-DAB7-AB84-B23FAE884ECD}"/>
+          </ac:spMkLst>
+        </pc:spChg>
+      </pc:sldChg>
+    </pc:docChg>
+  </pc:docChgLst>
+</pc:chgInfo>
 </file>
 
 <file path=ppt/comments/modernComment_100_C83A13B9.xml><?xml version="1.0" encoding="utf-8"?>
@@ -1629,10 +1711,10 @@
   <dgm:cxnLst>
     <dgm:cxn modelId="{1ECB5511-AEE1-4BBA-B91B-D516215FE7D6}" srcId="{72C74514-7E59-43DD-81F2-44D5759C1824}" destId="{A40C8A38-7AAB-4A1C-B39A-DBED66B60A11}" srcOrd="5" destOrd="0" parTransId="{E5A7B580-C647-42C1-94EA-2AD96FD66632}" sibTransId="{30FCC906-E4C0-41AD-A5E6-88449F9BC921}"/>
     <dgm:cxn modelId="{B039D11B-C065-4DB7-9C3F-9C1F1452DDD1}" srcId="{72C74514-7E59-43DD-81F2-44D5759C1824}" destId="{12C6A796-E05E-4109-83A5-CA6732F07DCC}" srcOrd="0" destOrd="0" parTransId="{A758E241-A4DE-442B-90CA-0C9C5F9396E7}" sibTransId="{13D06279-7FFC-4E91-975B-C5F631451C36}"/>
+    <dgm:cxn modelId="{F3787362-5CE9-48E2-99AE-A2FA95701E60}" srcId="{72C74514-7E59-43DD-81F2-44D5759C1824}" destId="{7157FA5E-C5A4-4039-9621-57EE8A1E448F}" srcOrd="2" destOrd="0" parTransId="{874C9894-94B6-42CC-B8D0-400E1D54079E}" sibTransId="{1E46E158-B5CD-4F93-9646-8137B2D6040A}"/>
     <dgm:cxn modelId="{E5A2F242-6C0F-452E-9348-36AAA3844FB6}" type="presOf" srcId="{59572103-8EAB-4A50-AB21-192D24EA143A}" destId="{97E83598-7549-4D53-BBE1-0E6AEBC831C5}" srcOrd="0" destOrd="0" presId="urn:microsoft.com/office/officeart/2005/8/layout/vList2"/>
+    <dgm:cxn modelId="{CE80F663-3A3B-4D24-B6E6-0C77D0FB47EC}" type="presOf" srcId="{A40C8A38-7AAB-4A1C-B39A-DBED66B60A11}" destId="{4600E2F4-4816-42E1-84E1-9746CD5EE6E1}" srcOrd="0" destOrd="0" presId="urn:microsoft.com/office/officeart/2005/8/layout/vList2"/>
     <dgm:cxn modelId="{95C9FA46-ECF1-4D14-8548-452CDC7D2175}" srcId="{72C74514-7E59-43DD-81F2-44D5759C1824}" destId="{41B0F318-681F-480C-ACBE-4C24B27636D0}" srcOrd="1" destOrd="0" parTransId="{0D659330-D588-4B5E-A5C6-35292AF1DC95}" sibTransId="{207A3D5B-4122-4CE8-B141-67DFCED8E158}"/>
-    <dgm:cxn modelId="{F3787362-5CE9-48E2-99AE-A2FA95701E60}" srcId="{72C74514-7E59-43DD-81F2-44D5759C1824}" destId="{7157FA5E-C5A4-4039-9621-57EE8A1E448F}" srcOrd="2" destOrd="0" parTransId="{874C9894-94B6-42CC-B8D0-400E1D54079E}" sibTransId="{1E46E158-B5CD-4F93-9646-8137B2D6040A}"/>
-    <dgm:cxn modelId="{CE80F663-3A3B-4D24-B6E6-0C77D0FB47EC}" type="presOf" srcId="{A40C8A38-7AAB-4A1C-B39A-DBED66B60A11}" destId="{4600E2F4-4816-42E1-84E1-9746CD5EE6E1}" srcOrd="0" destOrd="0" presId="urn:microsoft.com/office/officeart/2005/8/layout/vList2"/>
     <dgm:cxn modelId="{E714E36B-BA29-4B1C-A5A6-DC818E048543}" type="presOf" srcId="{72C74514-7E59-43DD-81F2-44D5759C1824}" destId="{2DC07872-A69E-402A-96DD-C56028D57122}" srcOrd="0" destOrd="0" presId="urn:microsoft.com/office/officeart/2005/8/layout/vList2"/>
     <dgm:cxn modelId="{676CAB7E-46F8-4503-A039-13561D369C78}" type="presOf" srcId="{12C6A796-E05E-4109-83A5-CA6732F07DCC}" destId="{246B3F6D-7E01-4EA4-AD38-6D0AD826CB2B}" srcOrd="0" destOrd="0" presId="urn:microsoft.com/office/officeart/2005/8/layout/vList2"/>
     <dgm:cxn modelId="{98AFD998-7383-4817-8CB5-6E3ABE5884B8}" type="presOf" srcId="{7157FA5E-C5A4-4039-9621-57EE8A1E448F}" destId="{0226B3E9-17B7-42EC-B955-CDCAEF4B2B67}" srcOrd="0" destOrd="0" presId="urn:microsoft.com/office/officeart/2005/8/layout/vList2"/>
@@ -1681,8 +1763,8 @@
       </dsp:nvSpPr>
       <dsp:spPr>
         <a:xfrm>
-          <a:off x="0" y="5923"/>
-          <a:ext cx="10515600" cy="608851"/>
+          <a:off x="0" y="3160"/>
+          <a:ext cx="10515600" cy="612150"/>
         </a:xfrm>
         <a:prstGeom prst="roundRect">
           <a:avLst/>
@@ -1786,8 +1868,8 @@
         </a:p>
       </dsp:txBody>
       <dsp:txXfrm>
-        <a:off x="29722" y="35645"/>
-        <a:ext cx="10456156" cy="549407"/>
+        <a:off x="29883" y="33043"/>
+        <a:ext cx="10455834" cy="552384"/>
       </dsp:txXfrm>
     </dsp:sp>
     <dsp:sp modelId="{1492B98B-63EB-43A1-8A5D-476D085DE6CB}">
@@ -1797,8 +1879,8 @@
       </dsp:nvSpPr>
       <dsp:spPr>
         <a:xfrm>
-          <a:off x="0" y="624993"/>
-          <a:ext cx="10515600" cy="608851"/>
+          <a:off x="0" y="623214"/>
+          <a:ext cx="10515600" cy="612150"/>
         </a:xfrm>
         <a:prstGeom prst="roundRect">
           <a:avLst/>
@@ -1898,8 +1980,8 @@
         </a:p>
       </dsp:txBody>
       <dsp:txXfrm>
-        <a:off x="29722" y="654715"/>
-        <a:ext cx="10456156" cy="549407"/>
+        <a:off x="29883" y="653097"/>
+        <a:ext cx="10455834" cy="552384"/>
       </dsp:txXfrm>
     </dsp:sp>
     <dsp:sp modelId="{0226B3E9-17B7-42EC-B955-CDCAEF4B2B67}">
@@ -1909,8 +1991,8 @@
       </dsp:nvSpPr>
       <dsp:spPr>
         <a:xfrm>
-          <a:off x="0" y="1248118"/>
-          <a:ext cx="10515600" cy="608851"/>
+          <a:off x="0" y="1246404"/>
+          <a:ext cx="10515600" cy="612150"/>
         </a:xfrm>
         <a:prstGeom prst="roundRect">
           <a:avLst/>
@@ -2010,8 +2092,8 @@
         </a:p>
       </dsp:txBody>
       <dsp:txXfrm>
-        <a:off x="29722" y="1277840"/>
-        <a:ext cx="10456156" cy="549407"/>
+        <a:off x="29883" y="1276287"/>
+        <a:ext cx="10455834" cy="552384"/>
       </dsp:txXfrm>
     </dsp:sp>
     <dsp:sp modelId="{97E83598-7549-4D53-BBE1-0E6AEBC831C5}">
@@ -2021,8 +2103,8 @@
       </dsp:nvSpPr>
       <dsp:spPr>
         <a:xfrm>
-          <a:off x="0" y="1871243"/>
-          <a:ext cx="10515600" cy="608851"/>
+          <a:off x="0" y="1869593"/>
+          <a:ext cx="10515600" cy="612150"/>
         </a:xfrm>
         <a:prstGeom prst="roundRect">
           <a:avLst/>
@@ -2154,8 +2236,8 @@
         </a:p>
       </dsp:txBody>
       <dsp:txXfrm>
-        <a:off x="29722" y="1900965"/>
-        <a:ext cx="10456156" cy="549407"/>
+        <a:off x="29883" y="1899476"/>
+        <a:ext cx="10455834" cy="552384"/>
       </dsp:txXfrm>
     </dsp:sp>
     <dsp:sp modelId="{ED8365DF-6489-4474-AD72-A519E8BD5BF3}">
@@ -2165,8 +2247,8 @@
       </dsp:nvSpPr>
       <dsp:spPr>
         <a:xfrm>
-          <a:off x="0" y="2494368"/>
-          <a:ext cx="10515600" cy="608851"/>
+          <a:off x="0" y="2492783"/>
+          <a:ext cx="10515600" cy="612150"/>
         </a:xfrm>
         <a:prstGeom prst="roundRect">
           <a:avLst/>
@@ -2274,8 +2356,8 @@
         </a:p>
       </dsp:txBody>
       <dsp:txXfrm>
-        <a:off x="29722" y="2524090"/>
-        <a:ext cx="10456156" cy="549407"/>
+        <a:off x="29883" y="2522666"/>
+        <a:ext cx="10455834" cy="552384"/>
       </dsp:txXfrm>
     </dsp:sp>
     <dsp:sp modelId="{4600E2F4-4816-42E1-84E1-9746CD5EE6E1}">
@@ -2285,8 +2367,8 @@
       </dsp:nvSpPr>
       <dsp:spPr>
         <a:xfrm>
-          <a:off x="0" y="3117492"/>
-          <a:ext cx="10515600" cy="608851"/>
+          <a:off x="0" y="3115972"/>
+          <a:ext cx="10515600" cy="612150"/>
         </a:xfrm>
         <a:prstGeom prst="roundRect">
           <a:avLst/>
@@ -2406,8 +2488,8 @@
         </a:p>
       </dsp:txBody>
       <dsp:txXfrm>
-        <a:off x="29722" y="3147214"/>
-        <a:ext cx="10456156" cy="549407"/>
+        <a:off x="29883" y="3145855"/>
+        <a:ext cx="10455834" cy="552384"/>
       </dsp:txXfrm>
     </dsp:sp>
     <dsp:sp modelId="{3DD9623C-BD4B-4DD5-BA45-58C18A024881}">
@@ -2417,8 +2499,8 @@
       </dsp:nvSpPr>
       <dsp:spPr>
         <a:xfrm>
-          <a:off x="0" y="3740617"/>
-          <a:ext cx="10515600" cy="608851"/>
+          <a:off x="0" y="3739162"/>
+          <a:ext cx="10515600" cy="612150"/>
         </a:xfrm>
         <a:prstGeom prst="roundRect">
           <a:avLst/>
@@ -2510,8 +2592,8 @@
         </a:p>
       </dsp:txBody>
       <dsp:txXfrm>
-        <a:off x="29722" y="3770339"/>
-        <a:ext cx="10456156" cy="549407"/>
+        <a:off x="29883" y="3769045"/>
+        <a:ext cx="10455834" cy="552384"/>
       </dsp:txXfrm>
     </dsp:sp>
   </dsp:spTree>
@@ -3868,7 +3950,7 @@
           <a:p>
             <a:fld id="{6DABDDBB-0918-4A38-BFF3-738DBDB6A6F7}" type="datetimeFigureOut">
               <a:rPr lang="fr-CH" smtClean="0"/>
-              <a:t>01.06.26</a:t>
+              <a:t>02.06.2026</a:t>
             </a:fld>
             <a:endParaRPr lang="fr-CH"/>
           </a:p>
@@ -4068,7 +4150,7 @@
           <a:p>
             <a:fld id="{6DABDDBB-0918-4A38-BFF3-738DBDB6A6F7}" type="datetimeFigureOut">
               <a:rPr lang="fr-CH" smtClean="0"/>
-              <a:t>01.06.26</a:t>
+              <a:t>02.06.2026</a:t>
             </a:fld>
             <a:endParaRPr lang="fr-CH"/>
           </a:p>
@@ -4278,7 +4360,7 @@
           <a:p>
             <a:fld id="{6DABDDBB-0918-4A38-BFF3-738DBDB6A6F7}" type="datetimeFigureOut">
               <a:rPr lang="fr-CH" smtClean="0"/>
-              <a:t>01.06.26</a:t>
+              <a:t>02.06.2026</a:t>
             </a:fld>
             <a:endParaRPr lang="fr-CH"/>
           </a:p>
@@ -4478,7 +4560,7 @@
           <a:p>
             <a:fld id="{6DABDDBB-0918-4A38-BFF3-738DBDB6A6F7}" type="datetimeFigureOut">
               <a:rPr lang="fr-CH" smtClean="0"/>
-              <a:t>01.06.26</a:t>
+              <a:t>02.06.2026</a:t>
             </a:fld>
             <a:endParaRPr lang="fr-CH"/>
           </a:p>
@@ -4754,7 +4836,7 @@
           <a:p>
             <a:fld id="{6DABDDBB-0918-4A38-BFF3-738DBDB6A6F7}" type="datetimeFigureOut">
               <a:rPr lang="fr-CH" smtClean="0"/>
-              <a:t>01.06.26</a:t>
+              <a:t>02.06.2026</a:t>
             </a:fld>
             <a:endParaRPr lang="fr-CH"/>
           </a:p>
@@ -5022,7 +5104,7 @@
           <a:p>
             <a:fld id="{6DABDDBB-0918-4A38-BFF3-738DBDB6A6F7}" type="datetimeFigureOut">
               <a:rPr lang="fr-CH" smtClean="0"/>
-              <a:t>01.06.26</a:t>
+              <a:t>02.06.2026</a:t>
             </a:fld>
             <a:endParaRPr lang="fr-CH"/>
           </a:p>
@@ -5437,7 +5519,7 @@
           <a:p>
             <a:fld id="{6DABDDBB-0918-4A38-BFF3-738DBDB6A6F7}" type="datetimeFigureOut">
               <a:rPr lang="fr-CH" smtClean="0"/>
-              <a:t>01.06.26</a:t>
+              <a:t>02.06.2026</a:t>
             </a:fld>
             <a:endParaRPr lang="fr-CH"/>
           </a:p>
@@ -5579,7 +5661,7 @@
           <a:p>
             <a:fld id="{6DABDDBB-0918-4A38-BFF3-738DBDB6A6F7}" type="datetimeFigureOut">
               <a:rPr lang="fr-CH" smtClean="0"/>
-              <a:t>01.06.26</a:t>
+              <a:t>02.06.2026</a:t>
             </a:fld>
             <a:endParaRPr lang="fr-CH"/>
           </a:p>
@@ -5692,7 +5774,7 @@
           <a:p>
             <a:fld id="{6DABDDBB-0918-4A38-BFF3-738DBDB6A6F7}" type="datetimeFigureOut">
               <a:rPr lang="fr-CH" smtClean="0"/>
-              <a:t>01.06.26</a:t>
+              <a:t>02.06.2026</a:t>
             </a:fld>
             <a:endParaRPr lang="fr-CH"/>
           </a:p>
@@ -6005,7 +6087,7 @@
           <a:p>
             <a:fld id="{6DABDDBB-0918-4A38-BFF3-738DBDB6A6F7}" type="datetimeFigureOut">
               <a:rPr lang="fr-CH" smtClean="0"/>
-              <a:t>01.06.26</a:t>
+              <a:t>02.06.2026</a:t>
             </a:fld>
             <a:endParaRPr lang="fr-CH"/>
           </a:p>
@@ -6294,7 +6376,7 @@
           <a:p>
             <a:fld id="{6DABDDBB-0918-4A38-BFF3-738DBDB6A6F7}" type="datetimeFigureOut">
               <a:rPr lang="fr-CH" smtClean="0"/>
-              <a:t>01.06.26</a:t>
+              <a:t>02.06.2026</a:t>
             </a:fld>
             <a:endParaRPr lang="fr-CH"/>
           </a:p>
@@ -6537,7 +6619,7 @@
           <a:p>
             <a:fld id="{6DABDDBB-0918-4A38-BFF3-738DBDB6A6F7}" type="datetimeFigureOut">
               <a:rPr lang="fr-CH" smtClean="0"/>
-              <a:t>01.06.26</a:t>
+              <a:t>02.06.2026</a:t>
             </a:fld>
             <a:endParaRPr lang="fr-CH"/>
           </a:p>
@@ -7071,7 +7153,7 @@
             </a:r>
             <a:r>
               <a:rPr lang="fr-CH" sz="4000" dirty="0" err="1"/>
-              <a:t>Theoretical</a:t>
+              <a:t>theoretical</a:t>
             </a:r>
             <a:r>
               <a:rPr lang="fr-CH" sz="4000" dirty="0"/>
@@ -7079,35 +7161,19 @@
             </a:r>
             <a:r>
               <a:rPr lang="fr-CH" sz="4000" dirty="0" err="1"/>
-              <a:t>Accessibility</a:t>
+              <a:t>accessibility</a:t>
             </a:r>
             <a:r>
               <a:rPr lang="fr-CH" sz="4000" dirty="0"/>
-              <a:t> and </a:t>
+              <a:t> and real </a:t>
             </a:r>
             <a:r>
               <a:rPr lang="fr-CH" sz="4000" dirty="0" err="1"/>
-              <a:t>Actual</a:t>
+              <a:t>mobility</a:t>
             </a:r>
             <a:r>
               <a:rPr lang="fr-CH" sz="4000" dirty="0"/>
-              <a:t> </a:t>
-            </a:r>
-            <a:r>
-              <a:rPr lang="fr-CH" sz="4000" dirty="0" err="1"/>
-              <a:t>Mobility</a:t>
-            </a:r>
-            <a:r>
-              <a:rPr lang="fr-CH" sz="4000" dirty="0"/>
-              <a:t> </a:t>
-            </a:r>
-            <a:r>
-              <a:rPr lang="fr-CH" sz="4000" dirty="0" err="1"/>
-              <a:t>Behavior</a:t>
-            </a:r>
-            <a:r>
-              <a:rPr lang="fr-CH" sz="4000" dirty="0"/>
-              <a:t> in Zurich</a:t>
+              <a:t> patterns in Zurich</a:t>
             </a:r>
           </a:p>
         </p:txBody>
@@ -8129,7 +8195,7 @@
 </file>
 
 <file path=ppt/slides/slide2.xml><?xml version="1.0" encoding="utf-8"?>
-<p:sld xmlns:a="http://schemas.openxmlformats.org/drawingml/2006/main" xmlns:r="http://schemas.openxmlformats.org/officeDocument/2006/relationships" xmlns:p="http://schemas.openxmlformats.org/presentationml/2006/main">
+<p:sld xmlns:a="http://schemas.openxmlformats.org/drawingml/2006/main" xmlns:r="http://schemas.openxmlformats.org/officeDocument/2006/relationships" xmlns:p="http://schemas.openxmlformats.org/presentationml/2006/main" show="0">
   <p:cSld>
     <p:spTree>
       <p:nvGrpSpPr>
@@ -9692,7 +9758,7 @@
 </file>
 
 <file path=ppt/slides/slide3.xml><?xml version="1.0" encoding="utf-8"?>
-<p:sld xmlns:a="http://schemas.openxmlformats.org/drawingml/2006/main" xmlns:r="http://schemas.openxmlformats.org/officeDocument/2006/relationships" xmlns:p="http://schemas.openxmlformats.org/presentationml/2006/main">
+<p:sld xmlns:a="http://schemas.openxmlformats.org/drawingml/2006/main" xmlns:r="http://schemas.openxmlformats.org/officeDocument/2006/relationships" xmlns:p="http://schemas.openxmlformats.org/presentationml/2006/main" show="0">
   <p:cSld>
     <p:bg>
       <p:bgPr>
@@ -12753,27 +12819,39 @@
             </a:r>
             <a:r>
               <a:rPr lang="fr-CH" sz="2200" dirty="0"/>
-              <a:t>Points of </a:t>
+              <a:t>road </a:t>
+            </a:r>
+            <a:r>
+              <a:rPr lang="fr-CH" sz="2200" dirty="0" err="1"/>
+              <a:t>networkt</a:t>
+            </a:r>
+            <a:r>
+              <a:rPr lang="fr-CH" dirty="0"/>
+              <a:t>, </a:t>
+            </a:r>
+            <a:r>
+              <a:rPr lang="fr-CH" sz="2200" dirty="0"/>
+              <a:t>transport infrastructure for </a:t>
+            </a:r>
+            <a:r>
+              <a:rPr lang="fr-CH" sz="2200" dirty="0" err="1"/>
+              <a:t>urban</a:t>
+            </a:r>
+            <a:r>
+              <a:rPr lang="fr-CH" sz="2200" dirty="0"/>
+              <a:t> </a:t>
+            </a:r>
+            <a:r>
+              <a:rPr lang="fr-CH" sz="2200" dirty="0" err="1"/>
+              <a:t>context</a:t>
+            </a:r>
+            <a:r>
+              <a:rPr lang="fr-CH" sz="2200" dirty="0"/>
+              <a:t> and Point of </a:t>
             </a:r>
             <a:r>
               <a:rPr lang="fr-CH" sz="2200" dirty="0" err="1"/>
               <a:t>Interest</a:t>
-            </a:r>
-            <a:r>
-              <a:rPr lang="fr-CH" sz="2200" dirty="0"/>
-              <a:t> and transport infrastructure for </a:t>
-            </a:r>
-            <a:r>
-              <a:rPr lang="fr-CH" sz="2200" dirty="0" err="1"/>
-              <a:t>urban</a:t>
-            </a:r>
-            <a:r>
-              <a:rPr lang="fr-CH" sz="2200" dirty="0"/>
-              <a:t> </a:t>
-            </a:r>
-            <a:r>
-              <a:rPr lang="fr-CH" sz="2200" dirty="0" err="1"/>
-              <a:t>context</a:t>
             </a:r>
             <a:r>
               <a:rPr lang="fr-CH" sz="2200" dirty="0"/>
@@ -12800,7 +12878,7 @@
         </p:nvSpPr>
         <p:spPr>
           <a:xfrm>
-            <a:off x="5730982" y="1560444"/>
+            <a:off x="4551635" y="1418069"/>
             <a:ext cx="3179554" cy="369332"/>
           </a:xfrm>
           <a:prstGeom prst="rect">
@@ -13193,7 +13271,7 @@
           <a:p>
             <a:r>
               <a:rPr lang="fr-CH" sz="2200" dirty="0" err="1"/>
-              <a:t>understand</a:t>
+              <a:t>Understand</a:t>
             </a:r>
             <a:r>
               <a:rPr lang="fr-CH" sz="2200" dirty="0"/>

--- a/The 15-Minute City in Practice.pptx
+++ b/The 15-Minute City in Practice.pptx
@@ -6,16 +6,17 @@
   </p:sldMasterIdLst>
   <p:sldIdLst>
     <p:sldId id="256" r:id="rId2"/>
-    <p:sldId id="258" r:id="rId3"/>
-    <p:sldId id="257" r:id="rId4"/>
-    <p:sldId id="266" r:id="rId5"/>
-    <p:sldId id="259" r:id="rId6"/>
-    <p:sldId id="265" r:id="rId7"/>
-    <p:sldId id="263" r:id="rId8"/>
-    <p:sldId id="261" r:id="rId9"/>
-    <p:sldId id="267" r:id="rId10"/>
-    <p:sldId id="268" r:id="rId11"/>
-    <p:sldId id="262" r:id="rId12"/>
+    <p:sldId id="266" r:id="rId3"/>
+    <p:sldId id="270" r:id="rId4"/>
+    <p:sldId id="263" r:id="rId5"/>
+    <p:sldId id="261" r:id="rId6"/>
+    <p:sldId id="267" r:id="rId7"/>
+    <p:sldId id="268" r:id="rId8"/>
+    <p:sldId id="269" r:id="rId9"/>
+    <p:sldId id="262" r:id="rId10"/>
+    <p:sldId id="258" r:id="rId11"/>
+    <p:sldId id="257" r:id="rId12"/>
+    <p:sldId id="265" r:id="rId13"/>
   </p:sldIdLst>
   <p:sldSz cx="12192000" cy="6858000"/>
   <p:notesSz cx="6858000" cy="9144000"/>
@@ -132,7 +133,7 @@
 <file path=ppt/revisionInfo.xml><?xml version="1.0" encoding="utf-8"?>
 <p1510:revInfo xmlns:a="http://schemas.openxmlformats.org/drawingml/2006/main" xmlns:r="http://schemas.openxmlformats.org/officeDocument/2006/relationships" xmlns:p1510="http://schemas.microsoft.com/office/powerpoint/2015/10/main">
   <p1510:revLst>
-    <p1510:client id="{5E255A67-A6A9-4968-8E92-A1C96BA15CA7}" v="2" dt="2026-06-02T17:30:52.206"/>
+    <p1510:client id="{5E255A67-A6A9-4968-8E92-A1C96BA15CA7}" v="4" dt="2026-06-02T20:47:20.306"/>
   </p1510:revLst>
 </p1510:revInfo>
 </file>
@@ -141,8 +142,8 @@
 <pc:chgInfo xmlns:a="http://schemas.openxmlformats.org/drawingml/2006/main" xmlns:r="http://schemas.openxmlformats.org/officeDocument/2006/relationships" xmlns:ac="http://schemas.microsoft.com/office/drawing/2013/main/command" xmlns:pc="http://schemas.microsoft.com/office/powerpoint/2013/main/command">
   <pc:docChgLst>
     <pc:chgData name="Noémie Simon" userId="bcf751ccc0c63cc4" providerId="LiveId" clId="{D8646A5F-B639-4467-90AE-53976C914447}"/>
-    <pc:docChg chg="modSld">
-      <pc:chgData name="Noémie Simon" userId="bcf751ccc0c63cc4" providerId="LiveId" clId="{D8646A5F-B639-4467-90AE-53976C914447}" dt="2026-06-02T17:40:20.969" v="104" actId="729"/>
+    <pc:docChg chg="custSel addSld delSld modSld sldOrd">
+      <pc:chgData name="Noémie Simon" userId="bcf751ccc0c63cc4" providerId="LiveId" clId="{D8646A5F-B639-4467-90AE-53976C914447}" dt="2026-06-02T20:55:29.016" v="158" actId="27614"/>
       <pc:docMkLst>
         <pc:docMk/>
       </pc:docMkLst>
@@ -161,18 +162,40 @@
           </ac:spMkLst>
         </pc:spChg>
       </pc:sldChg>
-      <pc:sldChg chg="mod modShow">
-        <pc:chgData name="Noémie Simon" userId="bcf751ccc0c63cc4" providerId="LiveId" clId="{D8646A5F-B639-4467-90AE-53976C914447}" dt="2026-06-02T17:40:20.969" v="104" actId="729"/>
+      <pc:sldChg chg="mod ord modShow">
+        <pc:chgData name="Noémie Simon" userId="bcf751ccc0c63cc4" providerId="LiveId" clId="{D8646A5F-B639-4467-90AE-53976C914447}" dt="2026-06-02T20:48:46.207" v="147"/>
         <pc:sldMkLst>
           <pc:docMk/>
           <pc:sldMk cId="3526247385" sldId="257"/>
         </pc:sldMkLst>
       </pc:sldChg>
-      <pc:sldChg chg="mod modShow">
-        <pc:chgData name="Noémie Simon" userId="bcf751ccc0c63cc4" providerId="LiveId" clId="{D8646A5F-B639-4467-90AE-53976C914447}" dt="2026-06-02T17:40:15.898" v="103" actId="729"/>
+      <pc:sldChg chg="mod ord modShow">
+        <pc:chgData name="Noémie Simon" userId="bcf751ccc0c63cc4" providerId="LiveId" clId="{D8646A5F-B639-4467-90AE-53976C914447}" dt="2026-06-02T20:48:39.632" v="145"/>
         <pc:sldMkLst>
           <pc:docMk/>
           <pc:sldMk cId="2296812319" sldId="258"/>
+        </pc:sldMkLst>
+      </pc:sldChg>
+      <pc:sldChg chg="modSp del mod">
+        <pc:chgData name="Noémie Simon" userId="bcf751ccc0c63cc4" providerId="LiveId" clId="{D8646A5F-B639-4467-90AE-53976C914447}" dt="2026-06-02T20:48:20.612" v="143" actId="2696"/>
+        <pc:sldMkLst>
+          <pc:docMk/>
+          <pc:sldMk cId="3809305011" sldId="259"/>
+        </pc:sldMkLst>
+        <pc:spChg chg="mod">
+          <ac:chgData name="Noémie Simon" userId="bcf751ccc0c63cc4" providerId="LiveId" clId="{D8646A5F-B639-4467-90AE-53976C914447}" dt="2026-06-02T20:46:41.495" v="121" actId="21"/>
+          <ac:spMkLst>
+            <pc:docMk/>
+            <pc:sldMk cId="3809305011" sldId="259"/>
+            <ac:spMk id="2" creationId="{3ED5FDDA-FB89-7C42-000C-DFB890DC4FCA}"/>
+          </ac:spMkLst>
+        </pc:spChg>
+      </pc:sldChg>
+      <pc:sldChg chg="mod ord modShow">
+        <pc:chgData name="Noémie Simon" userId="bcf751ccc0c63cc4" providerId="LiveId" clId="{D8646A5F-B639-4467-90AE-53976C914447}" dt="2026-06-02T20:48:51.571" v="149"/>
+        <pc:sldMkLst>
+          <pc:docMk/>
+          <pc:sldMk cId="2129016569" sldId="265"/>
         </pc:sldMkLst>
       </pc:sldChg>
       <pc:sldChg chg="modSp mod">
@@ -203,6 +226,107 @@
             <pc:docMk/>
             <pc:sldMk cId="131123478" sldId="266"/>
             <ac:spMk id="22" creationId="{4C50DE4D-9766-DAB7-AB84-B23FAE884ECD}"/>
+          </ac:spMkLst>
+        </pc:spChg>
+      </pc:sldChg>
+      <pc:sldChg chg="modSp mod">
+        <pc:chgData name="Noémie Simon" userId="bcf751ccc0c63cc4" providerId="LiveId" clId="{D8646A5F-B639-4467-90AE-53976C914447}" dt="2026-06-02T20:54:09.362" v="155" actId="113"/>
+        <pc:sldMkLst>
+          <pc:docMk/>
+          <pc:sldMk cId="3855054443" sldId="268"/>
+        </pc:sldMkLst>
+        <pc:spChg chg="mod">
+          <ac:chgData name="Noémie Simon" userId="bcf751ccc0c63cc4" providerId="LiveId" clId="{D8646A5F-B639-4467-90AE-53976C914447}" dt="2026-06-02T20:54:09.362" v="155" actId="113"/>
+          <ac:spMkLst>
+            <pc:docMk/>
+            <pc:sldMk cId="3855054443" sldId="268"/>
+            <ac:spMk id="2" creationId="{8B6FD0A6-936D-1217-2307-54883D928515}"/>
+          </ac:spMkLst>
+        </pc:spChg>
+      </pc:sldChg>
+      <pc:sldChg chg="addSp delSp modSp new mod ord">
+        <pc:chgData name="Noémie Simon" userId="bcf751ccc0c63cc4" providerId="LiveId" clId="{D8646A5F-B639-4467-90AE-53976C914447}" dt="2026-06-02T20:55:29.016" v="158" actId="27614"/>
+        <pc:sldMkLst>
+          <pc:docMk/>
+          <pc:sldMk cId="2036194352" sldId="269"/>
+        </pc:sldMkLst>
+        <pc:spChg chg="del">
+          <ac:chgData name="Noémie Simon" userId="bcf751ccc0c63cc4" providerId="LiveId" clId="{D8646A5F-B639-4467-90AE-53976C914447}" dt="2026-06-02T20:33:17.488" v="110" actId="22"/>
+          <ac:spMkLst>
+            <pc:docMk/>
+            <pc:sldMk cId="2036194352" sldId="269"/>
+            <ac:spMk id="3" creationId="{8DB6A4F9-AF71-296C-A992-91D54ED70030}"/>
+          </ac:spMkLst>
+        </pc:spChg>
+        <pc:spChg chg="add mod">
+          <ac:chgData name="Noémie Simon" userId="bcf751ccc0c63cc4" providerId="LiveId" clId="{D8646A5F-B639-4467-90AE-53976C914447}" dt="2026-06-02T20:55:16.629" v="156" actId="478"/>
+          <ac:spMkLst>
+            <pc:docMk/>
+            <pc:sldMk cId="2036194352" sldId="269"/>
+            <ac:spMk id="7" creationId="{DCCFBE5E-470E-8AAF-8F23-FDD7777AA6DC}"/>
+          </ac:spMkLst>
+        </pc:spChg>
+        <pc:picChg chg="add del mod ord modCrop">
+          <ac:chgData name="Noémie Simon" userId="bcf751ccc0c63cc4" providerId="LiveId" clId="{D8646A5F-B639-4467-90AE-53976C914447}" dt="2026-06-02T20:55:16.629" v="156" actId="478"/>
+          <ac:picMkLst>
+            <pc:docMk/>
+            <pc:sldMk cId="2036194352" sldId="269"/>
+            <ac:picMk id="5" creationId="{EAF7FBEC-6756-951E-C204-502EE64EC167}"/>
+          </ac:picMkLst>
+        </pc:picChg>
+        <pc:picChg chg="add mod">
+          <ac:chgData name="Noémie Simon" userId="bcf751ccc0c63cc4" providerId="LiveId" clId="{D8646A5F-B639-4467-90AE-53976C914447}" dt="2026-06-02T20:55:29.016" v="158" actId="27614"/>
+          <ac:picMkLst>
+            <pc:docMk/>
+            <pc:sldMk cId="2036194352" sldId="269"/>
+            <ac:picMk id="9" creationId="{2CAB6DAC-E835-6F5C-E5D4-339A9645C7BE}"/>
+          </ac:picMkLst>
+        </pc:picChg>
+      </pc:sldChg>
+      <pc:sldChg chg="addSp delSp modSp new mod modClrScheme chgLayout">
+        <pc:chgData name="Noémie Simon" userId="bcf751ccc0c63cc4" providerId="LiveId" clId="{D8646A5F-B639-4467-90AE-53976C914447}" dt="2026-06-02T20:53:44.779" v="154" actId="207"/>
+        <pc:sldMkLst>
+          <pc:docMk/>
+          <pc:sldMk cId="2745853101" sldId="270"/>
+        </pc:sldMkLst>
+        <pc:spChg chg="del mod ord">
+          <ac:chgData name="Noémie Simon" userId="bcf751ccc0c63cc4" providerId="LiveId" clId="{D8646A5F-B639-4467-90AE-53976C914447}" dt="2026-06-02T20:46:36.389" v="120" actId="700"/>
+          <ac:spMkLst>
+            <pc:docMk/>
+            <pc:sldMk cId="2745853101" sldId="270"/>
+            <ac:spMk id="2" creationId="{358CB85D-264F-AA4D-DF2D-0738DFDDC6BC}"/>
+          </ac:spMkLst>
+        </pc:spChg>
+        <pc:spChg chg="del mod ord">
+          <ac:chgData name="Noémie Simon" userId="bcf751ccc0c63cc4" providerId="LiveId" clId="{D8646A5F-B639-4467-90AE-53976C914447}" dt="2026-06-02T20:46:36.389" v="120" actId="700"/>
+          <ac:spMkLst>
+            <pc:docMk/>
+            <pc:sldMk cId="2745853101" sldId="270"/>
+            <ac:spMk id="3" creationId="{F4598ED5-427D-7F34-541D-59507B9F33C2}"/>
+          </ac:spMkLst>
+        </pc:spChg>
+        <pc:spChg chg="add del mod ord">
+          <ac:chgData name="Noémie Simon" userId="bcf751ccc0c63cc4" providerId="LiveId" clId="{D8646A5F-B639-4467-90AE-53976C914447}" dt="2026-06-02T20:47:52.748" v="138" actId="478"/>
+          <ac:spMkLst>
+            <pc:docMk/>
+            <pc:sldMk cId="2745853101" sldId="270"/>
+            <ac:spMk id="4" creationId="{889D59ED-3880-CB75-910A-D8DD74D777B4}"/>
+          </ac:spMkLst>
+        </pc:spChg>
+        <pc:spChg chg="add mod ord">
+          <ac:chgData name="Noémie Simon" userId="bcf751ccc0c63cc4" providerId="LiveId" clId="{D8646A5F-B639-4467-90AE-53976C914447}" dt="2026-06-02T20:47:57.068" v="139" actId="1076"/>
+          <ac:spMkLst>
+            <pc:docMk/>
+            <pc:sldMk cId="2745853101" sldId="270"/>
+            <ac:spMk id="5" creationId="{E803951D-F116-DC10-6C43-19FFF7456671}"/>
+          </ac:spMkLst>
+        </pc:spChg>
+        <pc:spChg chg="add mod ord">
+          <ac:chgData name="Noémie Simon" userId="bcf751ccc0c63cc4" providerId="LiveId" clId="{D8646A5F-B639-4467-90AE-53976C914447}" dt="2026-06-02T20:53:44.779" v="154" actId="207"/>
+          <ac:spMkLst>
+            <pc:docMk/>
+            <pc:sldMk cId="2745853101" sldId="270"/>
+            <ac:spMk id="6" creationId="{B41B92A7-C4DD-19B5-4CEE-1DEFC7F961BB}"/>
           </ac:spMkLst>
         </pc:spChg>
       </pc:sldChg>
@@ -7766,435 +7890,6 @@
 </file>
 
 <file path=ppt/slides/slide10.xml><?xml version="1.0" encoding="utf-8"?>
-<p:sld xmlns:a="http://schemas.openxmlformats.org/drawingml/2006/main" xmlns:r="http://schemas.openxmlformats.org/officeDocument/2006/relationships" xmlns:p="http://schemas.openxmlformats.org/presentationml/2006/main">
-  <p:cSld>
-    <p:spTree>
-      <p:nvGrpSpPr>
-        <p:cNvPr id="1" name=""/>
-        <p:cNvGrpSpPr/>
-        <p:nvPr/>
-      </p:nvGrpSpPr>
-      <p:grpSpPr>
-        <a:xfrm>
-          <a:off x="0" y="0"/>
-          <a:ext cx="0" cy="0"/>
-          <a:chOff x="0" y="0"/>
-          <a:chExt cx="0" cy="0"/>
-        </a:xfrm>
-      </p:grpSpPr>
-      <p:sp>
-        <p:nvSpPr>
-          <p:cNvPr id="2" name="Title 1">
-            <a:extLst>
-              <a:ext uri="{FF2B5EF4-FFF2-40B4-BE49-F238E27FC236}">
-                <a16:creationId xmlns:a16="http://schemas.microsoft.com/office/drawing/2014/main" id="{8B6FD0A6-936D-1217-2307-54883D928515}"/>
-              </a:ext>
-            </a:extLst>
-          </p:cNvPr>
-          <p:cNvSpPr>
-            <a:spLocks noGrp="1"/>
-          </p:cNvSpPr>
-          <p:nvPr>
-            <p:ph type="title"/>
-          </p:nvPr>
-        </p:nvSpPr>
-        <p:spPr/>
-        <p:txBody>
-          <a:bodyPr>
-            <a:normAutofit/>
-          </a:bodyPr>
-          <a:lstStyle/>
-          <a:p>
-            <a:r>
-              <a:rPr lang="en-001" sz="4000" b="1" dirty="0"/>
-              <a:t>Activities occurring beyond the 15-minute city</a:t>
-            </a:r>
-            <a:endParaRPr lang="en-001" sz="4000" dirty="0"/>
-          </a:p>
-        </p:txBody>
-      </p:sp>
-      <p:pic>
-        <p:nvPicPr>
-          <p:cNvPr id="5" name="Content Placeholder 4">
-            <a:extLst>
-              <a:ext uri="{FF2B5EF4-FFF2-40B4-BE49-F238E27FC236}">
-                <a16:creationId xmlns:a16="http://schemas.microsoft.com/office/drawing/2014/main" id="{0A24CC37-D9A8-59DF-A14B-5BF03F157956}"/>
-              </a:ext>
-            </a:extLst>
-          </p:cNvPr>
-          <p:cNvPicPr>
-            <a:picLocks noGrp="1" noChangeAspect="1"/>
-          </p:cNvPicPr>
-          <p:nvPr>
-            <p:ph idx="1"/>
-          </p:nvPr>
-        </p:nvPicPr>
-        <p:blipFill>
-          <a:blip r:embed="rId2">
-            <a:extLst>
-              <a:ext uri="{28A0092B-C50C-407E-A947-70E740481C1C}">
-                <a14:useLocalDpi xmlns:a14="http://schemas.microsoft.com/office/drawing/2010/main" val="0"/>
-              </a:ext>
-            </a:extLst>
-          </a:blip>
-          <a:srcRect t="11781"/>
-          <a:stretch>
-            <a:fillRect/>
-          </a:stretch>
-        </p:blipFill>
-        <p:spPr>
-          <a:xfrm>
-            <a:off x="1431183" y="1470991"/>
-            <a:ext cx="8726608" cy="5281533"/>
-          </a:xfrm>
-          <a:prstGeom prst="rect">
-            <a:avLst/>
-          </a:prstGeom>
-        </p:spPr>
-      </p:pic>
-    </p:spTree>
-    <p:extLst>
-      <p:ext uri="{BB962C8B-B14F-4D97-AF65-F5344CB8AC3E}">
-        <p14:creationId xmlns:p14="http://schemas.microsoft.com/office/powerpoint/2010/main" val="3855054443"/>
-      </p:ext>
-    </p:extLst>
-  </p:cSld>
-  <p:clrMapOvr>
-    <a:masterClrMapping/>
-  </p:clrMapOvr>
-</p:sld>
-</file>
-
-<file path=ppt/slides/slide11.xml><?xml version="1.0" encoding="utf-8"?>
-<p:sld xmlns:a="http://schemas.openxmlformats.org/drawingml/2006/main" xmlns:r="http://schemas.openxmlformats.org/officeDocument/2006/relationships" xmlns:p="http://schemas.openxmlformats.org/presentationml/2006/main">
-  <p:cSld>
-    <p:spTree>
-      <p:nvGrpSpPr>
-        <p:cNvPr id="1" name=""/>
-        <p:cNvGrpSpPr/>
-        <p:nvPr/>
-      </p:nvGrpSpPr>
-      <p:grpSpPr>
-        <a:xfrm>
-          <a:off x="0" y="0"/>
-          <a:ext cx="0" cy="0"/>
-          <a:chOff x="0" y="0"/>
-          <a:chExt cx="0" cy="0"/>
-        </a:xfrm>
-      </p:grpSpPr>
-      <p:sp>
-        <p:nvSpPr>
-          <p:cNvPr id="2" name="Title 1">
-            <a:extLst>
-              <a:ext uri="{FF2B5EF4-FFF2-40B4-BE49-F238E27FC236}">
-                <a16:creationId xmlns:a16="http://schemas.microsoft.com/office/drawing/2014/main" id="{229A9C5E-D113-F410-1D52-CFEDFDD68709}"/>
-              </a:ext>
-            </a:extLst>
-          </p:cNvPr>
-          <p:cNvSpPr>
-            <a:spLocks noGrp="1"/>
-          </p:cNvSpPr>
-          <p:nvPr>
-            <p:ph type="title"/>
-          </p:nvPr>
-        </p:nvSpPr>
-        <p:spPr/>
-        <p:txBody>
-          <a:bodyPr/>
-          <a:lstStyle/>
-          <a:p>
-            <a:r>
-              <a:rPr lang="fr-CH" dirty="0"/>
-              <a:t>Challenges and Plan B</a:t>
-            </a:r>
-          </a:p>
-        </p:txBody>
-      </p:sp>
-      <p:sp>
-        <p:nvSpPr>
-          <p:cNvPr id="3" name="Content Placeholder 2">
-            <a:extLst>
-              <a:ext uri="{FF2B5EF4-FFF2-40B4-BE49-F238E27FC236}">
-                <a16:creationId xmlns:a16="http://schemas.microsoft.com/office/drawing/2014/main" id="{DBAEEBF5-C3D9-FA63-1735-E9C2F5C42998}"/>
-              </a:ext>
-            </a:extLst>
-          </p:cNvPr>
-          <p:cNvSpPr>
-            <a:spLocks noGrp="1"/>
-          </p:cNvSpPr>
-          <p:nvPr>
-            <p:ph idx="1"/>
-          </p:nvPr>
-        </p:nvSpPr>
-        <p:spPr/>
-        <p:txBody>
-          <a:bodyPr/>
-          <a:lstStyle/>
-          <a:p>
-            <a:r>
-              <a:rPr lang="fr-CH" dirty="0" err="1"/>
-              <a:t>Integration</a:t>
-            </a:r>
-            <a:r>
-              <a:rPr lang="fr-CH" dirty="0"/>
-              <a:t> of the ZVV time plan </a:t>
-            </a:r>
-          </a:p>
-          <a:p>
-            <a:pPr lvl="1"/>
-            <a:r>
-              <a:rPr lang="fr-CH" dirty="0"/>
-              <a:t>Heavy data set </a:t>
-            </a:r>
-          </a:p>
-          <a:p>
-            <a:pPr lvl="1"/>
-            <a:r>
-              <a:rPr lang="fr-CH" dirty="0"/>
-              <a:t>Add </a:t>
-            </a:r>
-            <a:r>
-              <a:rPr lang="fr-CH" dirty="0" err="1"/>
-              <a:t>unusefull</a:t>
-            </a:r>
-            <a:r>
-              <a:rPr lang="fr-CH" dirty="0"/>
-              <a:t> complication</a:t>
-            </a:r>
-            <a:endParaRPr lang="fr-CH" dirty="0">
-              <a:sym typeface="Wingdings" panose="05000000000000000000" pitchFamily="2" charset="2"/>
-            </a:endParaRPr>
-          </a:p>
-          <a:p>
-            <a:pPr>
-              <a:buFont typeface="Wingdings" panose="05000000000000000000" pitchFamily="2" charset="2"/>
-              <a:buChar char="à"/>
-            </a:pPr>
-            <a:r>
-              <a:rPr lang="fr-CH" dirty="0">
-                <a:sym typeface="Wingdings" panose="05000000000000000000" pitchFamily="2" charset="2"/>
-              </a:rPr>
-              <a:t> Use an estimation of the speed of the public transports (bus and tram) of 15 km/h </a:t>
-            </a:r>
-          </a:p>
-          <a:p>
-            <a:r>
-              <a:rPr lang="fr-CH" dirty="0">
-                <a:sym typeface="Wingdings" panose="05000000000000000000" pitchFamily="2" charset="2"/>
-              </a:rPr>
-              <a:t>Anonymisation of the data</a:t>
-            </a:r>
-          </a:p>
-          <a:p>
-            <a:pPr lvl="1"/>
-            <a:r>
-              <a:rPr lang="fr-CH" dirty="0">
-                <a:sym typeface="Wingdings" panose="05000000000000000000" pitchFamily="2" charset="2"/>
-              </a:rPr>
-              <a:t>With </a:t>
-            </a:r>
-            <a:r>
-              <a:rPr lang="fr-CH" dirty="0" err="1">
-                <a:sym typeface="Wingdings" panose="05000000000000000000" pitchFamily="2" charset="2"/>
-              </a:rPr>
-              <a:t>only</a:t>
-            </a:r>
-            <a:r>
-              <a:rPr lang="fr-CH" dirty="0">
-                <a:sym typeface="Wingdings" panose="05000000000000000000" pitchFamily="2" charset="2"/>
-              </a:rPr>
-              <a:t> a few </a:t>
-            </a:r>
-            <a:r>
-              <a:rPr lang="fr-CH" dirty="0" err="1">
-                <a:sym typeface="Wingdings" panose="05000000000000000000" pitchFamily="2" charset="2"/>
-              </a:rPr>
-              <a:t>visited</a:t>
-            </a:r>
-            <a:r>
-              <a:rPr lang="fr-CH" dirty="0">
-                <a:sym typeface="Wingdings" panose="05000000000000000000" pitchFamily="2" charset="2"/>
-              </a:rPr>
-              <a:t> points, </a:t>
-            </a:r>
-            <a:r>
-              <a:rPr lang="fr-CH" dirty="0" err="1">
-                <a:sym typeface="Wingdings" panose="05000000000000000000" pitchFamily="2" charset="2"/>
-              </a:rPr>
-              <a:t>it</a:t>
-            </a:r>
-            <a:r>
-              <a:rPr lang="fr-CH" dirty="0">
-                <a:sym typeface="Wingdings" panose="05000000000000000000" pitchFamily="2" charset="2"/>
-              </a:rPr>
-              <a:t> </a:t>
-            </a:r>
-            <a:r>
-              <a:rPr lang="fr-CH" dirty="0" err="1">
-                <a:sym typeface="Wingdings" panose="05000000000000000000" pitchFamily="2" charset="2"/>
-              </a:rPr>
-              <a:t>is</a:t>
-            </a:r>
-            <a:r>
-              <a:rPr lang="fr-CH" dirty="0">
-                <a:sym typeface="Wingdings" panose="05000000000000000000" pitchFamily="2" charset="2"/>
-              </a:rPr>
-              <a:t> possible to </a:t>
-            </a:r>
-            <a:r>
-              <a:rPr lang="fr-CH" dirty="0" err="1">
-                <a:sym typeface="Wingdings" panose="05000000000000000000" pitchFamily="2" charset="2"/>
-              </a:rPr>
-              <a:t>find</a:t>
-            </a:r>
-            <a:r>
-              <a:rPr lang="fr-CH" dirty="0">
-                <a:sym typeface="Wingdings" panose="05000000000000000000" pitchFamily="2" charset="2"/>
-              </a:rPr>
-              <a:t> out </a:t>
-            </a:r>
-            <a:r>
-              <a:rPr lang="fr-CH" dirty="0" err="1">
-                <a:sym typeface="Wingdings" panose="05000000000000000000" pitchFamily="2" charset="2"/>
-              </a:rPr>
-              <a:t>where</a:t>
-            </a:r>
-            <a:r>
-              <a:rPr lang="fr-CH" dirty="0">
-                <a:sym typeface="Wingdings" panose="05000000000000000000" pitchFamily="2" charset="2"/>
-              </a:rPr>
-              <a:t> the </a:t>
-            </a:r>
-            <a:r>
-              <a:rPr lang="fr-CH" dirty="0" err="1">
-                <a:sym typeface="Wingdings" panose="05000000000000000000" pitchFamily="2" charset="2"/>
-              </a:rPr>
-              <a:t>person</a:t>
-            </a:r>
-            <a:r>
-              <a:rPr lang="fr-CH" dirty="0">
-                <a:sym typeface="Wingdings" panose="05000000000000000000" pitchFamily="2" charset="2"/>
-              </a:rPr>
-              <a:t> </a:t>
-            </a:r>
-            <a:r>
-              <a:rPr lang="fr-CH" dirty="0" err="1">
-                <a:sym typeface="Wingdings" panose="05000000000000000000" pitchFamily="2" charset="2"/>
-              </a:rPr>
-              <a:t>lives</a:t>
-            </a:r>
-            <a:r>
-              <a:rPr lang="fr-CH" dirty="0">
-                <a:sym typeface="Wingdings" panose="05000000000000000000" pitchFamily="2" charset="2"/>
-              </a:rPr>
-              <a:t>/</a:t>
-            </a:r>
-            <a:r>
-              <a:rPr lang="fr-CH" dirty="0" err="1">
-                <a:sym typeface="Wingdings" panose="05000000000000000000" pitchFamily="2" charset="2"/>
-              </a:rPr>
-              <a:t>who</a:t>
-            </a:r>
-            <a:r>
-              <a:rPr lang="fr-CH" dirty="0">
-                <a:sym typeface="Wingdings" panose="05000000000000000000" pitchFamily="2" charset="2"/>
-              </a:rPr>
-              <a:t> </a:t>
-            </a:r>
-            <a:r>
-              <a:rPr lang="fr-CH" dirty="0" err="1">
-                <a:sym typeface="Wingdings" panose="05000000000000000000" pitchFamily="2" charset="2"/>
-              </a:rPr>
-              <a:t>they</a:t>
-            </a:r>
-            <a:r>
-              <a:rPr lang="fr-CH" dirty="0">
-                <a:sym typeface="Wingdings" panose="05000000000000000000" pitchFamily="2" charset="2"/>
-              </a:rPr>
-              <a:t> are</a:t>
-            </a:r>
-          </a:p>
-          <a:p>
-            <a:pPr marL="0" indent="0">
-              <a:buNone/>
-            </a:pPr>
-            <a:r>
-              <a:rPr lang="fr-CH" dirty="0">
-                <a:sym typeface="Wingdings" panose="05000000000000000000" pitchFamily="2" charset="2"/>
-              </a:rPr>
-              <a:t> Change the </a:t>
-            </a:r>
-            <a:r>
-              <a:rPr lang="fr-CH" dirty="0" err="1">
-                <a:sym typeface="Wingdings" panose="05000000000000000000" pitchFamily="2" charset="2"/>
-              </a:rPr>
-              <a:t>adress</a:t>
-            </a:r>
-            <a:r>
-              <a:rPr lang="fr-CH" dirty="0">
-                <a:sym typeface="Wingdings" panose="05000000000000000000" pitchFamily="2" charset="2"/>
-              </a:rPr>
-              <a:t> by a few blocks/</a:t>
-            </a:r>
-            <a:r>
-              <a:rPr lang="fr-CH" dirty="0" err="1">
-                <a:sym typeface="Wingdings" panose="05000000000000000000" pitchFamily="2" charset="2"/>
-              </a:rPr>
-              <a:t>streets</a:t>
-            </a:r>
-            <a:r>
-              <a:rPr lang="fr-CH" dirty="0">
-                <a:sym typeface="Wingdings" panose="05000000000000000000" pitchFamily="2" charset="2"/>
-              </a:rPr>
-              <a:t> (but </a:t>
-            </a:r>
-            <a:r>
-              <a:rPr lang="fr-CH" dirty="0" err="1">
-                <a:sym typeface="Wingdings" panose="05000000000000000000" pitchFamily="2" charset="2"/>
-              </a:rPr>
-              <a:t>still</a:t>
-            </a:r>
-            <a:r>
-              <a:rPr lang="fr-CH" dirty="0">
-                <a:sym typeface="Wingdings" panose="05000000000000000000" pitchFamily="2" charset="2"/>
-              </a:rPr>
-              <a:t> not </a:t>
-            </a:r>
-            <a:r>
-              <a:rPr lang="fr-CH" dirty="0" err="1">
-                <a:sym typeface="Wingdings" panose="05000000000000000000" pitchFamily="2" charset="2"/>
-              </a:rPr>
-              <a:t>ideal</a:t>
-            </a:r>
-            <a:r>
-              <a:rPr lang="fr-CH" dirty="0">
-                <a:sym typeface="Wingdings" panose="05000000000000000000" pitchFamily="2" charset="2"/>
-              </a:rPr>
-              <a:t>) </a:t>
-            </a:r>
-          </a:p>
-          <a:p>
-            <a:pPr marL="0" indent="0">
-              <a:buNone/>
-            </a:pPr>
-            <a:endParaRPr lang="fr-CH" dirty="0"/>
-          </a:p>
-        </p:txBody>
-      </p:sp>
-    </p:spTree>
-    <p:extLst>
-      <p:ext uri="{BB962C8B-B14F-4D97-AF65-F5344CB8AC3E}">
-        <p14:creationId xmlns:p14="http://schemas.microsoft.com/office/powerpoint/2010/main" val="2357305363"/>
-      </p:ext>
-    </p:extLst>
-  </p:cSld>
-  <p:clrMapOvr>
-    <a:masterClrMapping/>
-  </p:clrMapOvr>
-</p:sld>
-</file>
-
-<file path=ppt/slides/slide2.xml><?xml version="1.0" encoding="utf-8"?>
 <p:sld xmlns:a="http://schemas.openxmlformats.org/drawingml/2006/main" xmlns:r="http://schemas.openxmlformats.org/officeDocument/2006/relationships" xmlns:p="http://schemas.openxmlformats.org/presentationml/2006/main" show="0">
   <p:cSld>
     <p:spTree>
@@ -9757,7 +9452,7 @@
 </p:sld>
 </file>
 
-<file path=ppt/slides/slide3.xml><?xml version="1.0" encoding="utf-8"?>
+<file path=ppt/slides/slide11.xml><?xml version="1.0" encoding="utf-8"?>
 <p:sld xmlns:a="http://schemas.openxmlformats.org/drawingml/2006/main" xmlns:r="http://schemas.openxmlformats.org/officeDocument/2006/relationships" xmlns:p="http://schemas.openxmlformats.org/presentationml/2006/main" show="0">
   <p:cSld>
     <p:bg>
@@ -11202,7 +10897,212 @@
 </p:sld>
 </file>
 
-<file path=ppt/slides/slide4.xml><?xml version="1.0" encoding="utf-8"?>
+<file path=ppt/slides/slide12.xml><?xml version="1.0" encoding="utf-8"?>
+<p:sld xmlns:a="http://schemas.openxmlformats.org/drawingml/2006/main" xmlns:r="http://schemas.openxmlformats.org/officeDocument/2006/relationships" xmlns:p="http://schemas.openxmlformats.org/presentationml/2006/main" show="0">
+  <p:cSld>
+    <p:spTree>
+      <p:nvGrpSpPr>
+        <p:cNvPr id="1" name="">
+          <a:extLst>
+            <a:ext uri="{FF2B5EF4-FFF2-40B4-BE49-F238E27FC236}">
+              <a16:creationId xmlns:a16="http://schemas.microsoft.com/office/drawing/2014/main" id="{3D423E1E-BDBE-7890-99F7-75EB4E2501C1}"/>
+            </a:ext>
+          </a:extLst>
+        </p:cNvPr>
+        <p:cNvGrpSpPr/>
+        <p:nvPr/>
+      </p:nvGrpSpPr>
+      <p:grpSpPr>
+        <a:xfrm>
+          <a:off x="0" y="0"/>
+          <a:ext cx="0" cy="0"/>
+          <a:chOff x="0" y="0"/>
+          <a:chExt cx="0" cy="0"/>
+        </a:xfrm>
+      </p:grpSpPr>
+      <p:sp>
+        <p:nvSpPr>
+          <p:cNvPr id="2" name="Title 1">
+            <a:extLst>
+              <a:ext uri="{FF2B5EF4-FFF2-40B4-BE49-F238E27FC236}">
+                <a16:creationId xmlns:a16="http://schemas.microsoft.com/office/drawing/2014/main" id="{F68A396A-E78B-8B83-BCD1-2000A3ACC94E}"/>
+              </a:ext>
+            </a:extLst>
+          </p:cNvPr>
+          <p:cNvSpPr>
+            <a:spLocks noGrp="1"/>
+          </p:cNvSpPr>
+          <p:nvPr>
+            <p:ph type="title"/>
+          </p:nvPr>
+        </p:nvSpPr>
+        <p:spPr>
+          <a:xfrm>
+            <a:off x="838200" y="713312"/>
+            <a:ext cx="4038600" cy="3472607"/>
+          </a:xfrm>
+        </p:spPr>
+        <p:txBody>
+          <a:bodyPr>
+            <a:normAutofit/>
+          </a:bodyPr>
+          <a:lstStyle/>
+          <a:p>
+            <a:r>
+              <a:rPr lang="en-001" dirty="0"/>
+              <a:t>Best Possible Outcome</a:t>
+            </a:r>
+          </a:p>
+        </p:txBody>
+      </p:sp>
+      <p:sp>
+        <p:nvSpPr>
+          <p:cNvPr id="24" name="Content Placeholder 2">
+            <a:extLst>
+              <a:ext uri="{FF2B5EF4-FFF2-40B4-BE49-F238E27FC236}">
+                <a16:creationId xmlns:a16="http://schemas.microsoft.com/office/drawing/2014/main" id="{220A022F-93D1-8C5A-87A5-E8C8242FA292}"/>
+              </a:ext>
+            </a:extLst>
+          </p:cNvPr>
+          <p:cNvSpPr>
+            <a:spLocks noGrp="1"/>
+          </p:cNvSpPr>
+          <p:nvPr>
+            <p:ph idx="1"/>
+          </p:nvPr>
+        </p:nvSpPr>
+        <p:spPr>
+          <a:xfrm>
+            <a:off x="4876801" y="713313"/>
+            <a:ext cx="6477000" cy="3472607"/>
+          </a:xfrm>
+        </p:spPr>
+        <p:txBody>
+          <a:bodyPr anchor="ctr">
+            <a:normAutofit fontScale="92500" lnSpcReduction="10000"/>
+          </a:bodyPr>
+          <a:lstStyle/>
+          <a:p>
+            <a:pPr marL="0" indent="0">
+              <a:buNone/>
+            </a:pPr>
+            <a:r>
+              <a:rPr lang="en-001" sz="3200" dirty="0"/>
+              <a:t>We expect to:</a:t>
+            </a:r>
+          </a:p>
+          <a:p>
+            <a:r>
+              <a:rPr lang="en-001" sz="3200" dirty="0"/>
+              <a:t>Quantify the proportion of local vs non-local activities </a:t>
+            </a:r>
+          </a:p>
+          <a:p>
+            <a:r>
+              <a:rPr lang="en-001" sz="3200" dirty="0"/>
+              <a:t>Identify activity types that exceed the 15-minute threshold </a:t>
+            </a:r>
+          </a:p>
+          <a:p>
+            <a:r>
+              <a:rPr lang="en-001" sz="3200" dirty="0"/>
+              <a:t>Evaluate whether mobility is driven more by accessibility or by personal preferences and habits</a:t>
+            </a:r>
+          </a:p>
+        </p:txBody>
+      </p:sp>
+      <p:sp>
+        <p:nvSpPr>
+          <p:cNvPr id="3" name="Rectangle 2">
+            <a:extLst>
+              <a:ext uri="{FF2B5EF4-FFF2-40B4-BE49-F238E27FC236}">
+                <a16:creationId xmlns:a16="http://schemas.microsoft.com/office/drawing/2014/main" id="{7054B78A-D08B-EF49-5DCE-3E78CEFBEEF3}"/>
+              </a:ext>
+            </a:extLst>
+          </p:cNvPr>
+          <p:cNvSpPr/>
+          <p:nvPr/>
+        </p:nvSpPr>
+        <p:spPr>
+          <a:xfrm>
+            <a:off x="0" y="4795520"/>
+            <a:ext cx="12192000" cy="1561737"/>
+          </a:xfrm>
+          <a:prstGeom prst="rect">
+            <a:avLst/>
+          </a:prstGeom>
+          <a:solidFill>
+            <a:srgbClr val="F4F4F4"/>
+          </a:solidFill>
+          <a:ln>
+            <a:noFill/>
+          </a:ln>
+        </p:spPr>
+        <p:style>
+          <a:lnRef idx="2">
+            <a:schemeClr val="accent1">
+              <a:shade val="15000"/>
+            </a:schemeClr>
+          </a:lnRef>
+          <a:fillRef idx="1">
+            <a:schemeClr val="accent1"/>
+          </a:fillRef>
+          <a:effectRef idx="0">
+            <a:schemeClr val="accent1"/>
+          </a:effectRef>
+          <a:fontRef idx="minor">
+            <a:schemeClr val="lt1"/>
+          </a:fontRef>
+        </p:style>
+        <p:txBody>
+          <a:bodyPr rtlCol="0" anchor="ctr"/>
+          <a:lstStyle/>
+          <a:p>
+            <a:pPr algn="ctr"/>
+            <a:r>
+              <a:rPr lang="en-001" sz="2200" b="1" dirty="0">
+                <a:solidFill>
+                  <a:schemeClr val="tx1"/>
+                </a:solidFill>
+              </a:rPr>
+              <a:t>Hypothesis:</a:t>
+            </a:r>
+            <a:r>
+              <a:rPr lang="en-001" sz="2200" dirty="0">
+                <a:solidFill>
+                  <a:schemeClr val="tx1"/>
+                </a:solidFill>
+              </a:rPr>
+              <a:t> Even in Zurich, many social and professional activities </a:t>
+            </a:r>
+          </a:p>
+          <a:p>
+            <a:pPr algn="ctr"/>
+            <a:r>
+              <a:rPr lang="en-001" sz="2200" dirty="0">
+                <a:solidFill>
+                  <a:schemeClr val="tx1"/>
+                </a:solidFill>
+              </a:rPr>
+              <a:t>occur beyond the theoretically accessible area</a:t>
+            </a:r>
+          </a:p>
+        </p:txBody>
+      </p:sp>
+    </p:spTree>
+    <p:extLst>
+      <p:ext uri="{BB962C8B-B14F-4D97-AF65-F5344CB8AC3E}">
+        <p14:creationId xmlns:p14="http://schemas.microsoft.com/office/powerpoint/2010/main" val="2129016569"/>
+      </p:ext>
+    </p:extLst>
+  </p:cSld>
+  <p:clrMapOvr>
+    <a:masterClrMapping/>
+  </p:clrMapOvr>
+</p:sld>
+</file>
+
+<file path=ppt/slides/slide2.xml><?xml version="1.0" encoding="utf-8"?>
 <p:sld xmlns:a="http://schemas.openxmlformats.org/drawingml/2006/main" xmlns:r="http://schemas.openxmlformats.org/officeDocument/2006/relationships" xmlns:p="http://schemas.openxmlformats.org/presentationml/2006/main">
   <p:cSld>
     <p:spTree>
@@ -13351,17 +13251,9 @@
 </p:sld>
 </file>
 
-<file path=ppt/slides/slide5.xml><?xml version="1.0" encoding="utf-8"?>
+<file path=ppt/slides/slide3.xml><?xml version="1.0" encoding="utf-8"?>
 <p:sld xmlns:a="http://schemas.openxmlformats.org/drawingml/2006/main" xmlns:r="http://schemas.openxmlformats.org/officeDocument/2006/relationships" xmlns:p="http://schemas.openxmlformats.org/presentationml/2006/main">
   <p:cSld>
-    <p:bg>
-      <p:bgPr>
-        <a:solidFill>
-          <a:schemeClr val="bg1"/>
-        </a:solidFill>
-        <a:effectLst/>
-      </p:bgPr>
-    </p:bg>
     <p:spTree>
       <p:nvGrpSpPr>
         <p:cNvPr id="1" name=""/>
@@ -13376,1037 +13268,12 @@
           <a:chExt cx="0" cy="0"/>
         </a:xfrm>
       </p:grpSpPr>
-      <p:sp useBgFill="1">
+      <p:sp>
         <p:nvSpPr>
-          <p:cNvPr id="29" name="Rectangle 28">
+          <p:cNvPr id="5" name="Content Placeholder 4">
             <a:extLst>
               <a:ext uri="{FF2B5EF4-FFF2-40B4-BE49-F238E27FC236}">
-                <a16:creationId xmlns:a16="http://schemas.microsoft.com/office/drawing/2014/main" id="{17718681-A12E-49D6-9925-DD7C68176D61}"/>
-              </a:ext>
-              <a:ext uri="{C183D7F6-B498-43B3-948B-1728B52AA6E4}">
-                <adec:decorative xmlns:adec="http://schemas.microsoft.com/office/drawing/2017/decorative" val="1"/>
-              </a:ext>
-            </a:extLst>
-          </p:cNvPr>
-          <p:cNvSpPr>
-            <a:spLocks noGrp="1" noRot="1" noChangeAspect="1" noMove="1" noResize="1" noEditPoints="1" noAdjustHandles="1" noChangeArrowheads="1" noChangeShapeType="1" noTextEdit="1"/>
-          </p:cNvSpPr>
-          <p:nvPr>
-            <p:extLst>
-              <p:ext uri="{386F3935-93C4-4BCD-93E2-E3B085C9AB24}">
-                <p16:designElem xmlns:p16="http://schemas.microsoft.com/office/powerpoint/2015/main" val="1"/>
-              </p:ext>
-            </p:extLst>
-          </p:nvPr>
-        </p:nvSpPr>
-        <p:spPr>
-          <a:xfrm>
-            <a:off x="0" y="0"/>
-            <a:ext cx="12188952" cy="6858000"/>
-          </a:xfrm>
-          <a:prstGeom prst="rect">
-            <a:avLst/>
-          </a:prstGeom>
-          <a:ln>
-            <a:noFill/>
-          </a:ln>
-        </p:spPr>
-        <p:style>
-          <a:lnRef idx="2">
-            <a:schemeClr val="accent1">
-              <a:shade val="50000"/>
-            </a:schemeClr>
-          </a:lnRef>
-          <a:fillRef idx="1">
-            <a:schemeClr val="accent1"/>
-          </a:fillRef>
-          <a:effectRef idx="0">
-            <a:schemeClr val="accent1"/>
-          </a:effectRef>
-          <a:fontRef idx="minor">
-            <a:schemeClr val="lt1"/>
-          </a:fontRef>
-        </p:style>
-        <p:txBody>
-          <a:bodyPr rtlCol="0" anchor="ctr"/>
-          <a:lstStyle/>
-          <a:p>
-            <a:pPr algn="ctr"/>
-            <a:endParaRPr lang="en-US"/>
-          </a:p>
-        </p:txBody>
-      </p:sp>
-      <p:sp>
-        <p:nvSpPr>
-          <p:cNvPr id="31" name="Freeform: Shape 30">
-            <a:extLst>
-              <a:ext uri="{FF2B5EF4-FFF2-40B4-BE49-F238E27FC236}">
-                <a16:creationId xmlns:a16="http://schemas.microsoft.com/office/drawing/2014/main" id="{FBD77573-9EF2-4C35-8285-A1CF6FBB0EA5}"/>
-              </a:ext>
-              <a:ext uri="{C183D7F6-B498-43B3-948B-1728B52AA6E4}">
-                <adec:decorative xmlns:adec="http://schemas.microsoft.com/office/drawing/2017/decorative" val="1"/>
-              </a:ext>
-            </a:extLst>
-          </p:cNvPr>
-          <p:cNvSpPr>
-            <a:spLocks noGrp="1" noRot="1" noChangeAspect="1" noMove="1" noResize="1" noEditPoints="1" noAdjustHandles="1" noChangeArrowheads="1" noChangeShapeType="1" noTextEdit="1"/>
-          </p:cNvSpPr>
-          <p:nvPr>
-            <p:extLst>
-              <p:ext uri="{386F3935-93C4-4BCD-93E2-E3B085C9AB24}">
-                <p16:designElem xmlns:p16="http://schemas.microsoft.com/office/powerpoint/2015/main" val="1"/>
-              </p:ext>
-            </p:extLst>
-          </p:nvPr>
-        </p:nvSpPr>
-        <p:spPr>
-          <a:xfrm flipH="1">
-            <a:off x="1" y="0"/>
-            <a:ext cx="5511704" cy="6858000"/>
-          </a:xfrm>
-          <a:custGeom>
-            <a:avLst/>
-            <a:gdLst>
-              <a:gd name="connsiteX0" fmla="*/ 5511704 w 5511704"/>
-              <a:gd name="connsiteY0" fmla="*/ 0 h 6886576"/>
-              <a:gd name="connsiteX1" fmla="*/ 1008599 w 5511704"/>
-              <a:gd name="connsiteY1" fmla="*/ 0 h 6886576"/>
-              <a:gd name="connsiteX2" fmla="*/ 1310975 w 5511704"/>
-              <a:gd name="connsiteY2" fmla="*/ 110728 h 6886576"/>
-              <a:gd name="connsiteX3" fmla="*/ 1267362 w 5511704"/>
-              <a:gd name="connsiteY3" fmla="*/ 135731 h 6886576"/>
-              <a:gd name="connsiteX4" fmla="*/ 1005692 w 5511704"/>
-              <a:gd name="connsiteY4" fmla="*/ 71437 h 6886576"/>
-              <a:gd name="connsiteX5" fmla="*/ 953358 w 5511704"/>
-              <a:gd name="connsiteY5" fmla="*/ 89297 h 6886576"/>
-              <a:gd name="connsiteX6" fmla="*/ 979525 w 5511704"/>
-              <a:gd name="connsiteY6" fmla="*/ 164307 h 6886576"/>
-              <a:gd name="connsiteX7" fmla="*/ 1092915 w 5511704"/>
-              <a:gd name="connsiteY7" fmla="*/ 192882 h 6886576"/>
-              <a:gd name="connsiteX8" fmla="*/ 1270270 w 5511704"/>
-              <a:gd name="connsiteY8" fmla="*/ 375047 h 6886576"/>
-              <a:gd name="connsiteX9" fmla="*/ 1002784 w 5511704"/>
-              <a:gd name="connsiteY9" fmla="*/ 353615 h 6886576"/>
-              <a:gd name="connsiteX10" fmla="*/ 956265 w 5511704"/>
-              <a:gd name="connsiteY10" fmla="*/ 396479 h 6886576"/>
-              <a:gd name="connsiteX11" fmla="*/ 938820 w 5511704"/>
-              <a:gd name="connsiteY11" fmla="*/ 453629 h 6886576"/>
-              <a:gd name="connsiteX12" fmla="*/ 860319 w 5511704"/>
-              <a:gd name="connsiteY12" fmla="*/ 360759 h 6886576"/>
-              <a:gd name="connsiteX13" fmla="*/ 793447 w 5511704"/>
-              <a:gd name="connsiteY13" fmla="*/ 335757 h 6886576"/>
-              <a:gd name="connsiteX14" fmla="*/ 773095 w 5511704"/>
-              <a:gd name="connsiteY14" fmla="*/ 417910 h 6886576"/>
-              <a:gd name="connsiteX15" fmla="*/ 834151 w 5511704"/>
-              <a:gd name="connsiteY15" fmla="*/ 507206 h 6886576"/>
-              <a:gd name="connsiteX16" fmla="*/ 996969 w 5511704"/>
-              <a:gd name="connsiteY16" fmla="*/ 560785 h 6886576"/>
-              <a:gd name="connsiteX17" fmla="*/ 822522 w 5511704"/>
-              <a:gd name="connsiteY17" fmla="*/ 560785 h 6886576"/>
-              <a:gd name="connsiteX18" fmla="*/ 621908 w 5511704"/>
-              <a:gd name="connsiteY18" fmla="*/ 525066 h 6886576"/>
-              <a:gd name="connsiteX19" fmla="*/ 409664 w 5511704"/>
-              <a:gd name="connsiteY19" fmla="*/ 535781 h 6886576"/>
-              <a:gd name="connsiteX20" fmla="*/ 209049 w 5511704"/>
-              <a:gd name="connsiteY20" fmla="*/ 464344 h 6886576"/>
-              <a:gd name="connsiteX21" fmla="*/ 5527 w 5511704"/>
-              <a:gd name="connsiteY21" fmla="*/ 467916 h 6886576"/>
-              <a:gd name="connsiteX22" fmla="*/ 906838 w 5511704"/>
-              <a:gd name="connsiteY22" fmla="*/ 914400 h 6886576"/>
-              <a:gd name="connsiteX23" fmla="*/ 863226 w 5511704"/>
-              <a:gd name="connsiteY23" fmla="*/ 925116 h 6886576"/>
-              <a:gd name="connsiteX24" fmla="*/ 805077 w 5511704"/>
-              <a:gd name="connsiteY24" fmla="*/ 953691 h 6886576"/>
-              <a:gd name="connsiteX25" fmla="*/ 848689 w 5511704"/>
-              <a:gd name="connsiteY25" fmla="*/ 1010841 h 6886576"/>
-              <a:gd name="connsiteX26" fmla="*/ 1084193 w 5511704"/>
-              <a:gd name="connsiteY26" fmla="*/ 1117997 h 6886576"/>
-              <a:gd name="connsiteX27" fmla="*/ 1142342 w 5511704"/>
-              <a:gd name="connsiteY27" fmla="*/ 1225153 h 6886576"/>
-              <a:gd name="connsiteX28" fmla="*/ 1069655 w 5511704"/>
-              <a:gd name="connsiteY28" fmla="*/ 1214438 h 6886576"/>
-              <a:gd name="connsiteX29" fmla="*/ 1005692 w 5511704"/>
-              <a:gd name="connsiteY29" fmla="*/ 1235869 h 6886576"/>
-              <a:gd name="connsiteX30" fmla="*/ 1031858 w 5511704"/>
-              <a:gd name="connsiteY30" fmla="*/ 1371600 h 6886576"/>
-              <a:gd name="connsiteX31" fmla="*/ 1366216 w 5511704"/>
-              <a:gd name="connsiteY31" fmla="*/ 1546622 h 6886576"/>
-              <a:gd name="connsiteX32" fmla="*/ 1395290 w 5511704"/>
-              <a:gd name="connsiteY32" fmla="*/ 1603772 h 6886576"/>
-              <a:gd name="connsiteX33" fmla="*/ 1354586 w 5511704"/>
-              <a:gd name="connsiteY33" fmla="*/ 1643063 h 6886576"/>
-              <a:gd name="connsiteX34" fmla="*/ 1247011 w 5511704"/>
-              <a:gd name="connsiteY34" fmla="*/ 1664494 h 6886576"/>
-              <a:gd name="connsiteX35" fmla="*/ 1398198 w 5511704"/>
-              <a:gd name="connsiteY35" fmla="*/ 1857375 h 6886576"/>
-              <a:gd name="connsiteX36" fmla="*/ 1453440 w 5511704"/>
-              <a:gd name="connsiteY36" fmla="*/ 1910954 h 6886576"/>
-              <a:gd name="connsiteX37" fmla="*/ 1549386 w 5511704"/>
-              <a:gd name="connsiteY37" fmla="*/ 1993106 h 6886576"/>
-              <a:gd name="connsiteX38" fmla="*/ 1549386 w 5511704"/>
-              <a:gd name="connsiteY38" fmla="*/ 2021681 h 6886576"/>
-              <a:gd name="connsiteX39" fmla="*/ 1421458 w 5511704"/>
-              <a:gd name="connsiteY39" fmla="*/ 2110978 h 6886576"/>
-              <a:gd name="connsiteX40" fmla="*/ 1188861 w 5511704"/>
-              <a:gd name="connsiteY40" fmla="*/ 2085976 h 6886576"/>
-              <a:gd name="connsiteX41" fmla="*/ 1531941 w 5511704"/>
-              <a:gd name="connsiteY41" fmla="*/ 2218135 h 6886576"/>
-              <a:gd name="connsiteX42" fmla="*/ 421293 w 5511704"/>
-              <a:gd name="connsiteY42" fmla="*/ 1900238 h 6886576"/>
-              <a:gd name="connsiteX43" fmla="*/ 491072 w 5511704"/>
-              <a:gd name="connsiteY43" fmla="*/ 1982391 h 6886576"/>
-              <a:gd name="connsiteX44" fmla="*/ 880671 w 5511704"/>
-              <a:gd name="connsiteY44" fmla="*/ 2200276 h 6886576"/>
-              <a:gd name="connsiteX45" fmla="*/ 991154 w 5511704"/>
-              <a:gd name="connsiteY45" fmla="*/ 2336007 h 6886576"/>
-              <a:gd name="connsiteX46" fmla="*/ 1107453 w 5511704"/>
-              <a:gd name="connsiteY46" fmla="*/ 2411016 h 6886576"/>
-              <a:gd name="connsiteX47" fmla="*/ 1270270 w 5511704"/>
-              <a:gd name="connsiteY47" fmla="*/ 2411016 h 6886576"/>
-              <a:gd name="connsiteX48" fmla="*/ 1386568 w 5511704"/>
-              <a:gd name="connsiteY48" fmla="*/ 2528889 h 6886576"/>
-              <a:gd name="connsiteX49" fmla="*/ 1267362 w 5511704"/>
-              <a:gd name="connsiteY49" fmla="*/ 2553891 h 6886576"/>
-              <a:gd name="connsiteX50" fmla="*/ 1127805 w 5511704"/>
-              <a:gd name="connsiteY50" fmla="*/ 2536032 h 6886576"/>
-              <a:gd name="connsiteX51" fmla="*/ 970802 w 5511704"/>
-              <a:gd name="connsiteY51" fmla="*/ 2575322 h 6886576"/>
-              <a:gd name="connsiteX52" fmla="*/ 825429 w 5511704"/>
-              <a:gd name="connsiteY52" fmla="*/ 2543176 h 6886576"/>
-              <a:gd name="connsiteX53" fmla="*/ 650982 w 5511704"/>
-              <a:gd name="connsiteY53" fmla="*/ 2564607 h 6886576"/>
-              <a:gd name="connsiteX54" fmla="*/ 595740 w 5511704"/>
-              <a:gd name="connsiteY54" fmla="*/ 2703909 h 6886576"/>
-              <a:gd name="connsiteX55" fmla="*/ 578296 w 5511704"/>
-              <a:gd name="connsiteY55" fmla="*/ 2714626 h 6886576"/>
-              <a:gd name="connsiteX56" fmla="*/ 255568 w 5511704"/>
-              <a:gd name="connsiteY56" fmla="*/ 2936081 h 6886576"/>
-              <a:gd name="connsiteX57" fmla="*/ 165437 w 5511704"/>
-              <a:gd name="connsiteY57" fmla="*/ 2953941 h 6886576"/>
-              <a:gd name="connsiteX58" fmla="*/ 697501 w 5511704"/>
-              <a:gd name="connsiteY58" fmla="*/ 3343275 h 6886576"/>
-              <a:gd name="connsiteX59" fmla="*/ 339884 w 5511704"/>
-              <a:gd name="connsiteY59" fmla="*/ 3243263 h 6886576"/>
-              <a:gd name="connsiteX60" fmla="*/ 290458 w 5511704"/>
-              <a:gd name="connsiteY60" fmla="*/ 3407569 h 6886576"/>
-              <a:gd name="connsiteX61" fmla="*/ 459090 w 5511704"/>
-              <a:gd name="connsiteY61" fmla="*/ 3554016 h 6886576"/>
-              <a:gd name="connsiteX62" fmla="*/ 520147 w 5511704"/>
-              <a:gd name="connsiteY62" fmla="*/ 3843338 h 6886576"/>
-              <a:gd name="connsiteX63" fmla="*/ 491072 w 5511704"/>
-              <a:gd name="connsiteY63" fmla="*/ 4107657 h 6886576"/>
-              <a:gd name="connsiteX64" fmla="*/ 418386 w 5511704"/>
-              <a:gd name="connsiteY64" fmla="*/ 4189810 h 6886576"/>
-              <a:gd name="connsiteX65" fmla="*/ 313718 w 5511704"/>
-              <a:gd name="connsiteY65" fmla="*/ 4339829 h 6886576"/>
-              <a:gd name="connsiteX66" fmla="*/ 249753 w 5511704"/>
-              <a:gd name="connsiteY66" fmla="*/ 4432698 h 6886576"/>
-              <a:gd name="connsiteX67" fmla="*/ 25879 w 5511704"/>
-              <a:gd name="connsiteY67" fmla="*/ 4396979 h 6886576"/>
-              <a:gd name="connsiteX68" fmla="*/ 325347 w 5511704"/>
-              <a:gd name="connsiteY68" fmla="*/ 4632722 h 6886576"/>
-              <a:gd name="connsiteX69" fmla="*/ 84029 w 5511704"/>
-              <a:gd name="connsiteY69" fmla="*/ 4604147 h 6886576"/>
-              <a:gd name="connsiteX70" fmla="*/ 5527 w 5511704"/>
-              <a:gd name="connsiteY70" fmla="*/ 4622007 h 6886576"/>
-              <a:gd name="connsiteX71" fmla="*/ 49139 w 5511704"/>
-              <a:gd name="connsiteY71" fmla="*/ 4697016 h 6886576"/>
-              <a:gd name="connsiteX72" fmla="*/ 226494 w 5511704"/>
-              <a:gd name="connsiteY72" fmla="*/ 4825604 h 6886576"/>
-              <a:gd name="connsiteX73" fmla="*/ 592833 w 5511704"/>
-              <a:gd name="connsiteY73" fmla="*/ 5175647 h 6886576"/>
-              <a:gd name="connsiteX74" fmla="*/ 238123 w 5511704"/>
-              <a:gd name="connsiteY74" fmla="*/ 5014913 h 6886576"/>
-              <a:gd name="connsiteX75" fmla="*/ 610278 w 5511704"/>
-              <a:gd name="connsiteY75" fmla="*/ 5375673 h 6886576"/>
-              <a:gd name="connsiteX76" fmla="*/ 691686 w 5511704"/>
-              <a:gd name="connsiteY76" fmla="*/ 5497116 h 6886576"/>
-              <a:gd name="connsiteX77" fmla="*/ 860319 w 5511704"/>
-              <a:gd name="connsiteY77" fmla="*/ 5793582 h 6886576"/>
-              <a:gd name="connsiteX78" fmla="*/ 851597 w 5511704"/>
-              <a:gd name="connsiteY78" fmla="*/ 5825729 h 6886576"/>
-              <a:gd name="connsiteX79" fmla="*/ 659704 w 5511704"/>
-              <a:gd name="connsiteY79" fmla="*/ 5779295 h 6886576"/>
-              <a:gd name="connsiteX80" fmla="*/ 909746 w 5511704"/>
-              <a:gd name="connsiteY80" fmla="*/ 6029326 h 6886576"/>
-              <a:gd name="connsiteX81" fmla="*/ 1168509 w 5511704"/>
-              <a:gd name="connsiteY81" fmla="*/ 6222207 h 6886576"/>
-              <a:gd name="connsiteX82" fmla="*/ 985339 w 5511704"/>
-              <a:gd name="connsiteY82" fmla="*/ 6193632 h 6886576"/>
-              <a:gd name="connsiteX83" fmla="*/ 732391 w 5511704"/>
-              <a:gd name="connsiteY83" fmla="*/ 6082904 h 6886576"/>
-              <a:gd name="connsiteX84" fmla="*/ 645167 w 5511704"/>
-              <a:gd name="connsiteY84" fmla="*/ 6125766 h 6886576"/>
-              <a:gd name="connsiteX85" fmla="*/ 883579 w 5511704"/>
-              <a:gd name="connsiteY85" fmla="*/ 6307932 h 6886576"/>
-              <a:gd name="connsiteX86" fmla="*/ 1020229 w 5511704"/>
-              <a:gd name="connsiteY86" fmla="*/ 6393657 h 6886576"/>
-              <a:gd name="connsiteX87" fmla="*/ 1075471 w 5511704"/>
-              <a:gd name="connsiteY87" fmla="*/ 6457950 h 6886576"/>
-              <a:gd name="connsiteX88" fmla="*/ 1232473 w 5511704"/>
-              <a:gd name="connsiteY88" fmla="*/ 6686551 h 6886576"/>
-              <a:gd name="connsiteX89" fmla="*/ 1592997 w 5511704"/>
-              <a:gd name="connsiteY89" fmla="*/ 6886576 h 6886576"/>
-              <a:gd name="connsiteX90" fmla="*/ 5511704 w 5511704"/>
-              <a:gd name="connsiteY90" fmla="*/ 6886576 h 6886576"/>
-            </a:gdLst>
-            <a:ahLst/>
-            <a:cxnLst>
-              <a:cxn ang="0">
-                <a:pos x="connsiteX0" y="connsiteY0"/>
-              </a:cxn>
-              <a:cxn ang="0">
-                <a:pos x="connsiteX1" y="connsiteY1"/>
-              </a:cxn>
-              <a:cxn ang="0">
-                <a:pos x="connsiteX2" y="connsiteY2"/>
-              </a:cxn>
-              <a:cxn ang="0">
-                <a:pos x="connsiteX3" y="connsiteY3"/>
-              </a:cxn>
-              <a:cxn ang="0">
-                <a:pos x="connsiteX4" y="connsiteY4"/>
-              </a:cxn>
-              <a:cxn ang="0">
-                <a:pos x="connsiteX5" y="connsiteY5"/>
-              </a:cxn>
-              <a:cxn ang="0">
-                <a:pos x="connsiteX6" y="connsiteY6"/>
-              </a:cxn>
-              <a:cxn ang="0">
-                <a:pos x="connsiteX7" y="connsiteY7"/>
-              </a:cxn>
-              <a:cxn ang="0">
-                <a:pos x="connsiteX8" y="connsiteY8"/>
-              </a:cxn>
-              <a:cxn ang="0">
-                <a:pos x="connsiteX9" y="connsiteY9"/>
-              </a:cxn>
-              <a:cxn ang="0">
-                <a:pos x="connsiteX10" y="connsiteY10"/>
-              </a:cxn>
-              <a:cxn ang="0">
-                <a:pos x="connsiteX11" y="connsiteY11"/>
-              </a:cxn>
-              <a:cxn ang="0">
-                <a:pos x="connsiteX12" y="connsiteY12"/>
-              </a:cxn>
-              <a:cxn ang="0">
-                <a:pos x="connsiteX13" y="connsiteY13"/>
-              </a:cxn>
-              <a:cxn ang="0">
-                <a:pos x="connsiteX14" y="connsiteY14"/>
-              </a:cxn>
-              <a:cxn ang="0">
-                <a:pos x="connsiteX15" y="connsiteY15"/>
-              </a:cxn>
-              <a:cxn ang="0">
-                <a:pos x="connsiteX16" y="connsiteY16"/>
-              </a:cxn>
-              <a:cxn ang="0">
-                <a:pos x="connsiteX17" y="connsiteY17"/>
-              </a:cxn>
-              <a:cxn ang="0">
-                <a:pos x="connsiteX18" y="connsiteY18"/>
-              </a:cxn>
-              <a:cxn ang="0">
-                <a:pos x="connsiteX19" y="connsiteY19"/>
-              </a:cxn>
-              <a:cxn ang="0">
-                <a:pos x="connsiteX20" y="connsiteY20"/>
-              </a:cxn>
-              <a:cxn ang="0">
-                <a:pos x="connsiteX21" y="connsiteY21"/>
-              </a:cxn>
-              <a:cxn ang="0">
-                <a:pos x="connsiteX22" y="connsiteY22"/>
-              </a:cxn>
-              <a:cxn ang="0">
-                <a:pos x="connsiteX23" y="connsiteY23"/>
-              </a:cxn>
-              <a:cxn ang="0">
-                <a:pos x="connsiteX24" y="connsiteY24"/>
-              </a:cxn>
-              <a:cxn ang="0">
-                <a:pos x="connsiteX25" y="connsiteY25"/>
-              </a:cxn>
-              <a:cxn ang="0">
-                <a:pos x="connsiteX26" y="connsiteY26"/>
-              </a:cxn>
-              <a:cxn ang="0">
-                <a:pos x="connsiteX27" y="connsiteY27"/>
-              </a:cxn>
-              <a:cxn ang="0">
-                <a:pos x="connsiteX28" y="connsiteY28"/>
-              </a:cxn>
-              <a:cxn ang="0">
-                <a:pos x="connsiteX29" y="connsiteY29"/>
-              </a:cxn>
-              <a:cxn ang="0">
-                <a:pos x="connsiteX30" y="connsiteY30"/>
-              </a:cxn>
-              <a:cxn ang="0">
-                <a:pos x="connsiteX31" y="connsiteY31"/>
-              </a:cxn>
-              <a:cxn ang="0">
-                <a:pos x="connsiteX32" y="connsiteY32"/>
-              </a:cxn>
-              <a:cxn ang="0">
-                <a:pos x="connsiteX33" y="connsiteY33"/>
-              </a:cxn>
-              <a:cxn ang="0">
-                <a:pos x="connsiteX34" y="connsiteY34"/>
-              </a:cxn>
-              <a:cxn ang="0">
-                <a:pos x="connsiteX35" y="connsiteY35"/>
-              </a:cxn>
-              <a:cxn ang="0">
-                <a:pos x="connsiteX36" y="connsiteY36"/>
-              </a:cxn>
-              <a:cxn ang="0">
-                <a:pos x="connsiteX37" y="connsiteY37"/>
-              </a:cxn>
-              <a:cxn ang="0">
-                <a:pos x="connsiteX38" y="connsiteY38"/>
-              </a:cxn>
-              <a:cxn ang="0">
-                <a:pos x="connsiteX39" y="connsiteY39"/>
-              </a:cxn>
-              <a:cxn ang="0">
-                <a:pos x="connsiteX40" y="connsiteY40"/>
-              </a:cxn>
-              <a:cxn ang="0">
-                <a:pos x="connsiteX41" y="connsiteY41"/>
-              </a:cxn>
-              <a:cxn ang="0">
-                <a:pos x="connsiteX42" y="connsiteY42"/>
-              </a:cxn>
-              <a:cxn ang="0">
-                <a:pos x="connsiteX43" y="connsiteY43"/>
-              </a:cxn>
-              <a:cxn ang="0">
-                <a:pos x="connsiteX44" y="connsiteY44"/>
-              </a:cxn>
-              <a:cxn ang="0">
-                <a:pos x="connsiteX45" y="connsiteY45"/>
-              </a:cxn>
-              <a:cxn ang="0">
-                <a:pos x="connsiteX46" y="connsiteY46"/>
-              </a:cxn>
-              <a:cxn ang="0">
-                <a:pos x="connsiteX47" y="connsiteY47"/>
-              </a:cxn>
-              <a:cxn ang="0">
-                <a:pos x="connsiteX48" y="connsiteY48"/>
-              </a:cxn>
-              <a:cxn ang="0">
-                <a:pos x="connsiteX49" y="connsiteY49"/>
-              </a:cxn>
-              <a:cxn ang="0">
-                <a:pos x="connsiteX50" y="connsiteY50"/>
-              </a:cxn>
-              <a:cxn ang="0">
-                <a:pos x="connsiteX51" y="connsiteY51"/>
-              </a:cxn>
-              <a:cxn ang="0">
-                <a:pos x="connsiteX52" y="connsiteY52"/>
-              </a:cxn>
-              <a:cxn ang="0">
-                <a:pos x="connsiteX53" y="connsiteY53"/>
-              </a:cxn>
-              <a:cxn ang="0">
-                <a:pos x="connsiteX54" y="connsiteY54"/>
-              </a:cxn>
-              <a:cxn ang="0">
-                <a:pos x="connsiteX55" y="connsiteY55"/>
-              </a:cxn>
-              <a:cxn ang="0">
-                <a:pos x="connsiteX56" y="connsiteY56"/>
-              </a:cxn>
-              <a:cxn ang="0">
-                <a:pos x="connsiteX57" y="connsiteY57"/>
-              </a:cxn>
-              <a:cxn ang="0">
-                <a:pos x="connsiteX58" y="connsiteY58"/>
-              </a:cxn>
-              <a:cxn ang="0">
-                <a:pos x="connsiteX59" y="connsiteY59"/>
-              </a:cxn>
-              <a:cxn ang="0">
-                <a:pos x="connsiteX60" y="connsiteY60"/>
-              </a:cxn>
-              <a:cxn ang="0">
-                <a:pos x="connsiteX61" y="connsiteY61"/>
-              </a:cxn>
-              <a:cxn ang="0">
-                <a:pos x="connsiteX62" y="connsiteY62"/>
-              </a:cxn>
-              <a:cxn ang="0">
-                <a:pos x="connsiteX63" y="connsiteY63"/>
-              </a:cxn>
-              <a:cxn ang="0">
-                <a:pos x="connsiteX64" y="connsiteY64"/>
-              </a:cxn>
-              <a:cxn ang="0">
-                <a:pos x="connsiteX65" y="connsiteY65"/>
-              </a:cxn>
-              <a:cxn ang="0">
-                <a:pos x="connsiteX66" y="connsiteY66"/>
-              </a:cxn>
-              <a:cxn ang="0">
-                <a:pos x="connsiteX67" y="connsiteY67"/>
-              </a:cxn>
-              <a:cxn ang="0">
-                <a:pos x="connsiteX68" y="connsiteY68"/>
-              </a:cxn>
-              <a:cxn ang="0">
-                <a:pos x="connsiteX69" y="connsiteY69"/>
-              </a:cxn>
-              <a:cxn ang="0">
-                <a:pos x="connsiteX70" y="connsiteY70"/>
-              </a:cxn>
-              <a:cxn ang="0">
-                <a:pos x="connsiteX71" y="connsiteY71"/>
-              </a:cxn>
-              <a:cxn ang="0">
-                <a:pos x="connsiteX72" y="connsiteY72"/>
-              </a:cxn>
-              <a:cxn ang="0">
-                <a:pos x="connsiteX73" y="connsiteY73"/>
-              </a:cxn>
-              <a:cxn ang="0">
-                <a:pos x="connsiteX74" y="connsiteY74"/>
-              </a:cxn>
-              <a:cxn ang="0">
-                <a:pos x="connsiteX75" y="connsiteY75"/>
-              </a:cxn>
-              <a:cxn ang="0">
-                <a:pos x="connsiteX76" y="connsiteY76"/>
-              </a:cxn>
-              <a:cxn ang="0">
-                <a:pos x="connsiteX77" y="connsiteY77"/>
-              </a:cxn>
-              <a:cxn ang="0">
-                <a:pos x="connsiteX78" y="connsiteY78"/>
-              </a:cxn>
-              <a:cxn ang="0">
-                <a:pos x="connsiteX79" y="connsiteY79"/>
-              </a:cxn>
-              <a:cxn ang="0">
-                <a:pos x="connsiteX80" y="connsiteY80"/>
-              </a:cxn>
-              <a:cxn ang="0">
-                <a:pos x="connsiteX81" y="connsiteY81"/>
-              </a:cxn>
-              <a:cxn ang="0">
-                <a:pos x="connsiteX82" y="connsiteY82"/>
-              </a:cxn>
-              <a:cxn ang="0">
-                <a:pos x="connsiteX83" y="connsiteY83"/>
-              </a:cxn>
-              <a:cxn ang="0">
-                <a:pos x="connsiteX84" y="connsiteY84"/>
-              </a:cxn>
-              <a:cxn ang="0">
-                <a:pos x="connsiteX85" y="connsiteY85"/>
-              </a:cxn>
-              <a:cxn ang="0">
-                <a:pos x="connsiteX86" y="connsiteY86"/>
-              </a:cxn>
-              <a:cxn ang="0">
-                <a:pos x="connsiteX87" y="connsiteY87"/>
-              </a:cxn>
-              <a:cxn ang="0">
-                <a:pos x="connsiteX88" y="connsiteY88"/>
-              </a:cxn>
-              <a:cxn ang="0">
-                <a:pos x="connsiteX89" y="connsiteY89"/>
-              </a:cxn>
-              <a:cxn ang="0">
-                <a:pos x="connsiteX90" y="connsiteY90"/>
-              </a:cxn>
-            </a:cxnLst>
-            <a:rect l="l" t="t" r="r" b="b"/>
-            <a:pathLst>
-              <a:path w="5511704" h="6886576">
-                <a:moveTo>
-                  <a:pt x="5511704" y="0"/>
-                </a:moveTo>
-                <a:lnTo>
-                  <a:pt x="1008599" y="0"/>
-                </a:lnTo>
-                <a:cubicBezTo>
-                  <a:pt x="1110360" y="35719"/>
-                  <a:pt x="1209214" y="78581"/>
-                  <a:pt x="1310975" y="110728"/>
-                </a:cubicBezTo>
-                <a:cubicBezTo>
-                  <a:pt x="1296437" y="146447"/>
-                  <a:pt x="1281900" y="139303"/>
-                  <a:pt x="1267362" y="135731"/>
-                </a:cubicBezTo>
-                <a:cubicBezTo>
-                  <a:pt x="1180139" y="121445"/>
-                  <a:pt x="1090008" y="110728"/>
-                  <a:pt x="1005692" y="71437"/>
-                </a:cubicBezTo>
-                <a:cubicBezTo>
-                  <a:pt x="985339" y="64294"/>
-                  <a:pt x="962080" y="64294"/>
-                  <a:pt x="953358" y="89297"/>
-                </a:cubicBezTo>
-                <a:cubicBezTo>
-                  <a:pt x="938820" y="125016"/>
-                  <a:pt x="959172" y="146447"/>
-                  <a:pt x="979525" y="164307"/>
-                </a:cubicBezTo>
-                <a:cubicBezTo>
-                  <a:pt x="1014414" y="196453"/>
-                  <a:pt x="1055118" y="189310"/>
-                  <a:pt x="1092915" y="192882"/>
-                </a:cubicBezTo>
-                <a:cubicBezTo>
-                  <a:pt x="1197583" y="210741"/>
-                  <a:pt x="1247011" y="260747"/>
-                  <a:pt x="1270270" y="375047"/>
-                </a:cubicBezTo>
-                <a:cubicBezTo>
-                  <a:pt x="1180139" y="328613"/>
-                  <a:pt x="1090008" y="385763"/>
-                  <a:pt x="1002784" y="353615"/>
-                </a:cubicBezTo>
-                <a:cubicBezTo>
-                  <a:pt x="979525" y="346472"/>
-                  <a:pt x="944635" y="357188"/>
-                  <a:pt x="956265" y="396479"/>
-                </a:cubicBezTo>
-                <a:cubicBezTo>
-                  <a:pt x="967894" y="432198"/>
-                  <a:pt x="1005692" y="460772"/>
-                  <a:pt x="938820" y="453629"/>
-                </a:cubicBezTo>
-                <a:cubicBezTo>
-                  <a:pt x="889393" y="450056"/>
-                  <a:pt x="874856" y="407194"/>
-                  <a:pt x="860319" y="360759"/>
-                </a:cubicBezTo>
-                <a:cubicBezTo>
-                  <a:pt x="848689" y="335757"/>
-                  <a:pt x="816707" y="321469"/>
-                  <a:pt x="793447" y="335757"/>
-                </a:cubicBezTo>
-                <a:cubicBezTo>
-                  <a:pt x="764373" y="350044"/>
-                  <a:pt x="773095" y="389335"/>
-                  <a:pt x="773095" y="417910"/>
-                </a:cubicBezTo>
-                <a:cubicBezTo>
-                  <a:pt x="770187" y="471488"/>
-                  <a:pt x="793447" y="496491"/>
-                  <a:pt x="834151" y="507206"/>
-                </a:cubicBezTo>
-                <a:cubicBezTo>
-                  <a:pt x="883579" y="521494"/>
-                  <a:pt x="933005" y="539354"/>
-                  <a:pt x="996969" y="560785"/>
-                </a:cubicBezTo>
-                <a:cubicBezTo>
-                  <a:pt x="927190" y="596503"/>
-                  <a:pt x="874856" y="589360"/>
-                  <a:pt x="822522" y="560785"/>
-                </a:cubicBezTo>
-                <a:cubicBezTo>
-                  <a:pt x="758558" y="528637"/>
-                  <a:pt x="674242" y="485775"/>
-                  <a:pt x="621908" y="525066"/>
-                </a:cubicBezTo>
-                <a:cubicBezTo>
-                  <a:pt x="543407" y="582216"/>
-                  <a:pt x="479443" y="546497"/>
-                  <a:pt x="409664" y="535781"/>
-                </a:cubicBezTo>
-                <a:cubicBezTo>
-                  <a:pt x="264290" y="514350"/>
-                  <a:pt x="354422" y="482204"/>
-                  <a:pt x="209049" y="464344"/>
-                </a:cubicBezTo>
-                <a:cubicBezTo>
-                  <a:pt x="150900" y="457200"/>
-                  <a:pt x="89843" y="428625"/>
-                  <a:pt x="5527" y="467916"/>
-                </a:cubicBezTo>
-                <a:cubicBezTo>
-                  <a:pt x="386404" y="675085"/>
-                  <a:pt x="566666" y="660797"/>
-                  <a:pt x="906838" y="914400"/>
-                </a:cubicBezTo>
-                <a:cubicBezTo>
-                  <a:pt x="892301" y="939404"/>
-                  <a:pt x="877764" y="928688"/>
-                  <a:pt x="863226" y="925116"/>
-                </a:cubicBezTo>
-                <a:cubicBezTo>
-                  <a:pt x="839967" y="921544"/>
-                  <a:pt x="810892" y="907256"/>
-                  <a:pt x="805077" y="953691"/>
-                </a:cubicBezTo>
-                <a:cubicBezTo>
-                  <a:pt x="802169" y="989410"/>
-                  <a:pt x="819615" y="1007269"/>
-                  <a:pt x="848689" y="1010841"/>
-                </a:cubicBezTo>
-                <a:cubicBezTo>
-                  <a:pt x="933005" y="1025129"/>
-                  <a:pt x="1008599" y="1075135"/>
-                  <a:pt x="1084193" y="1117997"/>
-                </a:cubicBezTo>
-                <a:cubicBezTo>
-                  <a:pt x="1119082" y="1135857"/>
-                  <a:pt x="1156879" y="1160860"/>
-                  <a:pt x="1142342" y="1225153"/>
-                </a:cubicBezTo>
-                <a:cubicBezTo>
-                  <a:pt x="1113268" y="1243013"/>
-                  <a:pt x="1092915" y="1218009"/>
-                  <a:pt x="1069655" y="1214438"/>
-                </a:cubicBezTo>
-                <a:cubicBezTo>
-                  <a:pt x="1046396" y="1210866"/>
-                  <a:pt x="991154" y="1225153"/>
-                  <a:pt x="1005692" y="1235869"/>
-                </a:cubicBezTo>
-                <a:cubicBezTo>
-                  <a:pt x="1072563" y="1275159"/>
-                  <a:pt x="950450" y="1371600"/>
-                  <a:pt x="1031858" y="1371600"/>
-                </a:cubicBezTo>
-                <a:cubicBezTo>
-                  <a:pt x="1165601" y="1371600"/>
-                  <a:pt x="1238288" y="1543050"/>
-                  <a:pt x="1366216" y="1546622"/>
-                </a:cubicBezTo>
-                <a:cubicBezTo>
-                  <a:pt x="1386568" y="1546622"/>
-                  <a:pt x="1395290" y="1578770"/>
-                  <a:pt x="1395290" y="1603772"/>
-                </a:cubicBezTo>
-                <a:cubicBezTo>
-                  <a:pt x="1395290" y="1635920"/>
-                  <a:pt x="1374939" y="1639491"/>
-                  <a:pt x="1354586" y="1643063"/>
-                </a:cubicBezTo>
-                <a:cubicBezTo>
-                  <a:pt x="1322604" y="1646635"/>
-                  <a:pt x="1287715" y="1603772"/>
-                  <a:pt x="1247011" y="1664494"/>
-                </a:cubicBezTo>
-                <a:cubicBezTo>
-                  <a:pt x="1322604" y="1700213"/>
-                  <a:pt x="1401105" y="1735932"/>
-                  <a:pt x="1398198" y="1857375"/>
-                </a:cubicBezTo>
-                <a:cubicBezTo>
-                  <a:pt x="1398198" y="1889523"/>
-                  <a:pt x="1430180" y="1903810"/>
-                  <a:pt x="1453440" y="1910954"/>
-                </a:cubicBezTo>
-                <a:cubicBezTo>
-                  <a:pt x="1494144" y="1925241"/>
-                  <a:pt x="1526126" y="1946673"/>
-                  <a:pt x="1549386" y="1993106"/>
-                </a:cubicBezTo>
-                <a:cubicBezTo>
-                  <a:pt x="1549386" y="2003822"/>
-                  <a:pt x="1549386" y="2010966"/>
-                  <a:pt x="1549386" y="2021681"/>
-                </a:cubicBezTo>
-                <a:cubicBezTo>
-                  <a:pt x="1543571" y="2132410"/>
-                  <a:pt x="1485422" y="2128838"/>
-                  <a:pt x="1421458" y="2110978"/>
-                </a:cubicBezTo>
-                <a:cubicBezTo>
-                  <a:pt x="1345864" y="2089547"/>
-                  <a:pt x="1270270" y="2046685"/>
-                  <a:pt x="1188861" y="2085976"/>
-                </a:cubicBezTo>
-                <a:cubicBezTo>
-                  <a:pt x="1302252" y="2139554"/>
-                  <a:pt x="1427272" y="2143126"/>
-                  <a:pt x="1531941" y="2218135"/>
-                </a:cubicBezTo>
-                <a:cubicBezTo>
-                  <a:pt x="1142342" y="2232422"/>
-                  <a:pt x="799262" y="1993106"/>
-                  <a:pt x="421293" y="1900238"/>
-                </a:cubicBezTo>
-                <a:cubicBezTo>
-                  <a:pt x="432923" y="1960960"/>
-                  <a:pt x="464905" y="1975247"/>
-                  <a:pt x="491072" y="1982391"/>
-                </a:cubicBezTo>
-                <a:cubicBezTo>
-                  <a:pt x="630630" y="2028825"/>
-                  <a:pt x="752743" y="2121695"/>
-                  <a:pt x="880671" y="2200276"/>
-                </a:cubicBezTo>
-                <a:cubicBezTo>
-                  <a:pt x="933005" y="2232422"/>
-                  <a:pt x="970802" y="2268142"/>
-                  <a:pt x="991154" y="2336007"/>
-                </a:cubicBezTo>
-                <a:cubicBezTo>
-                  <a:pt x="1008599" y="2400300"/>
-                  <a:pt x="1043489" y="2428875"/>
-                  <a:pt x="1107453" y="2411016"/>
-                </a:cubicBezTo>
-                <a:cubicBezTo>
-                  <a:pt x="1159787" y="2396729"/>
-                  <a:pt x="1215029" y="2403873"/>
-                  <a:pt x="1270270" y="2411016"/>
-                </a:cubicBezTo>
-                <a:cubicBezTo>
-                  <a:pt x="1331326" y="2418160"/>
-                  <a:pt x="1401105" y="2489597"/>
-                  <a:pt x="1386568" y="2528889"/>
-                </a:cubicBezTo>
-                <a:cubicBezTo>
-                  <a:pt x="1357494" y="2593182"/>
-                  <a:pt x="1308067" y="2561035"/>
-                  <a:pt x="1267362" y="2553891"/>
-                </a:cubicBezTo>
-                <a:cubicBezTo>
-                  <a:pt x="1217936" y="2546748"/>
-                  <a:pt x="1127805" y="2528889"/>
-                  <a:pt x="1127805" y="2536032"/>
-                </a:cubicBezTo>
-                <a:cubicBezTo>
-                  <a:pt x="1095822" y="2696766"/>
-                  <a:pt x="1023136" y="2575322"/>
-                  <a:pt x="970802" y="2575322"/>
-                </a:cubicBezTo>
-                <a:cubicBezTo>
-                  <a:pt x="921375" y="2575322"/>
-                  <a:pt x="871949" y="2557463"/>
-                  <a:pt x="825429" y="2543176"/>
-                </a:cubicBezTo>
-                <a:cubicBezTo>
-                  <a:pt x="764373" y="2525316"/>
-                  <a:pt x="709132" y="2557463"/>
-                  <a:pt x="650982" y="2564607"/>
-                </a:cubicBezTo>
-                <a:cubicBezTo>
-                  <a:pt x="598648" y="2571751"/>
-                  <a:pt x="627722" y="2664620"/>
-                  <a:pt x="595740" y="2703909"/>
-                </a:cubicBezTo>
-                <a:cubicBezTo>
-                  <a:pt x="589926" y="2714626"/>
-                  <a:pt x="584111" y="2714626"/>
-                  <a:pt x="578296" y="2714626"/>
-                </a:cubicBezTo>
-                <a:cubicBezTo>
-                  <a:pt x="560851" y="2993232"/>
-                  <a:pt x="255568" y="2925366"/>
-                  <a:pt x="255568" y="2936081"/>
-                </a:cubicBezTo>
-                <a:cubicBezTo>
-                  <a:pt x="229401" y="2953941"/>
-                  <a:pt x="197419" y="2911079"/>
-                  <a:pt x="165437" y="2953941"/>
-                </a:cubicBezTo>
-                <a:cubicBezTo>
-                  <a:pt x="302087" y="3150394"/>
-                  <a:pt x="511425" y="3196828"/>
-                  <a:pt x="697501" y="3343275"/>
-                </a:cubicBezTo>
-                <a:cubicBezTo>
-                  <a:pt x="543407" y="3393282"/>
-                  <a:pt x="453275" y="3221832"/>
-                  <a:pt x="339884" y="3243263"/>
-                </a:cubicBezTo>
-                <a:cubicBezTo>
-                  <a:pt x="284643" y="3296842"/>
-                  <a:pt x="450368" y="3382566"/>
-                  <a:pt x="290458" y="3407569"/>
-                </a:cubicBezTo>
-                <a:cubicBezTo>
-                  <a:pt x="360236" y="3454004"/>
-                  <a:pt x="409664" y="3500439"/>
-                  <a:pt x="459090" y="3554016"/>
-                </a:cubicBezTo>
-                <a:cubicBezTo>
-                  <a:pt x="543407" y="3650457"/>
-                  <a:pt x="560851" y="3714751"/>
-                  <a:pt x="520147" y="3843338"/>
-                </a:cubicBezTo>
-                <a:cubicBezTo>
-                  <a:pt x="493979" y="3929063"/>
-                  <a:pt x="456183" y="4007645"/>
-                  <a:pt x="491072" y="4107657"/>
-                </a:cubicBezTo>
-                <a:cubicBezTo>
-                  <a:pt x="514332" y="4175522"/>
-                  <a:pt x="505609" y="4221957"/>
-                  <a:pt x="418386" y="4189810"/>
-                </a:cubicBezTo>
-                <a:cubicBezTo>
-                  <a:pt x="325347" y="4157663"/>
-                  <a:pt x="290458" y="4218386"/>
-                  <a:pt x="313718" y="4339829"/>
-                </a:cubicBezTo>
-                <a:cubicBezTo>
-                  <a:pt x="328254" y="4418410"/>
-                  <a:pt x="313718" y="4443413"/>
-                  <a:pt x="249753" y="4432698"/>
-                </a:cubicBezTo>
-                <a:cubicBezTo>
-                  <a:pt x="179975" y="4421982"/>
-                  <a:pt x="113103" y="4371976"/>
-                  <a:pt x="25879" y="4396979"/>
-                </a:cubicBezTo>
-                <a:cubicBezTo>
-                  <a:pt x="95658" y="4539854"/>
-                  <a:pt x="243939" y="4496991"/>
-                  <a:pt x="325347" y="4632722"/>
-                </a:cubicBezTo>
-                <a:cubicBezTo>
-                  <a:pt x="229401" y="4632722"/>
-                  <a:pt x="153807" y="4632722"/>
-                  <a:pt x="84029" y="4604147"/>
-                </a:cubicBezTo>
-                <a:cubicBezTo>
-                  <a:pt x="54954" y="4593433"/>
-                  <a:pt x="22972" y="4579145"/>
-                  <a:pt x="5527" y="4622007"/>
-                </a:cubicBezTo>
-                <a:cubicBezTo>
-                  <a:pt x="-14826" y="4672014"/>
-                  <a:pt x="25879" y="4689872"/>
-                  <a:pt x="49139" y="4697016"/>
-                </a:cubicBezTo>
-                <a:cubicBezTo>
-                  <a:pt x="116011" y="4722019"/>
-                  <a:pt x="168344" y="4779170"/>
-                  <a:pt x="226494" y="4825604"/>
-                </a:cubicBezTo>
-                <a:cubicBezTo>
-                  <a:pt x="351514" y="4925616"/>
-                  <a:pt x="488165" y="5011341"/>
-                  <a:pt x="592833" y="5175647"/>
-                </a:cubicBezTo>
-                <a:cubicBezTo>
-                  <a:pt x="461997" y="5132785"/>
-                  <a:pt x="363144" y="5032772"/>
-                  <a:pt x="238123" y="5014913"/>
-                </a:cubicBezTo>
-                <a:cubicBezTo>
-                  <a:pt x="345700" y="5164932"/>
-                  <a:pt x="482350" y="5264944"/>
-                  <a:pt x="610278" y="5375673"/>
-                </a:cubicBezTo>
-                <a:cubicBezTo>
-                  <a:pt x="648075" y="5407819"/>
-                  <a:pt x="685872" y="5429250"/>
-                  <a:pt x="691686" y="5497116"/>
-                </a:cubicBezTo>
-                <a:cubicBezTo>
-                  <a:pt x="709132" y="5629276"/>
-                  <a:pt x="755650" y="5736432"/>
-                  <a:pt x="860319" y="5793582"/>
-                </a:cubicBezTo>
-                <a:cubicBezTo>
-                  <a:pt x="860319" y="5793582"/>
-                  <a:pt x="854504" y="5815013"/>
-                  <a:pt x="851597" y="5825729"/>
-                </a:cubicBezTo>
-                <a:cubicBezTo>
-                  <a:pt x="787632" y="5829301"/>
-                  <a:pt x="738206" y="5750720"/>
-                  <a:pt x="659704" y="5779295"/>
-                </a:cubicBezTo>
-                <a:cubicBezTo>
-                  <a:pt x="738206" y="5886451"/>
-                  <a:pt x="802169" y="5979319"/>
-                  <a:pt x="909746" y="6029326"/>
-                </a:cubicBezTo>
-                <a:cubicBezTo>
-                  <a:pt x="996969" y="6068616"/>
-                  <a:pt x="1104545" y="6093620"/>
-                  <a:pt x="1168509" y="6222207"/>
-                </a:cubicBezTo>
-                <a:cubicBezTo>
-                  <a:pt x="1095822" y="6247210"/>
-                  <a:pt x="1040581" y="6215063"/>
-                  <a:pt x="985339" y="6193632"/>
-                </a:cubicBezTo>
-                <a:cubicBezTo>
-                  <a:pt x="901023" y="6157913"/>
-                  <a:pt x="816707" y="6118623"/>
-                  <a:pt x="732391" y="6082904"/>
-                </a:cubicBezTo>
-                <a:cubicBezTo>
-                  <a:pt x="700408" y="6068616"/>
-                  <a:pt x="665519" y="6061472"/>
-                  <a:pt x="645167" y="6125766"/>
-                </a:cubicBezTo>
-                <a:cubicBezTo>
-                  <a:pt x="752743" y="6140053"/>
-                  <a:pt x="816707" y="6225779"/>
-                  <a:pt x="883579" y="6307932"/>
-                </a:cubicBezTo>
-                <a:cubicBezTo>
-                  <a:pt x="921375" y="6354366"/>
-                  <a:pt x="953358" y="6415088"/>
-                  <a:pt x="1020229" y="6393657"/>
-                </a:cubicBezTo>
-                <a:cubicBezTo>
-                  <a:pt x="1055118" y="6382942"/>
-                  <a:pt x="1078378" y="6415088"/>
-                  <a:pt x="1075471" y="6457950"/>
-                </a:cubicBezTo>
-                <a:cubicBezTo>
-                  <a:pt x="1060933" y="6607970"/>
-                  <a:pt x="1145250" y="6657976"/>
-                  <a:pt x="1232473" y="6686551"/>
-                </a:cubicBezTo>
-                <a:cubicBezTo>
-                  <a:pt x="1360401" y="6729413"/>
-                  <a:pt x="1473792" y="6815138"/>
-                  <a:pt x="1592997" y="6886576"/>
-                </a:cubicBezTo>
-                <a:lnTo>
-                  <a:pt x="5511704" y="6886576"/>
-                </a:lnTo>
-                <a:close/>
-              </a:path>
-            </a:pathLst>
-          </a:custGeom>
-          <a:solidFill>
-            <a:schemeClr val="bg2">
-              <a:alpha val="50000"/>
-            </a:schemeClr>
-          </a:solidFill>
-          <a:ln w="32707" cap="flat">
-            <a:noFill/>
-            <a:prstDash val="solid"/>
-            <a:miter/>
-          </a:ln>
-        </p:spPr>
-        <p:txBody>
-          <a:bodyPr rtlCol="0" anchor="ctr"/>
-          <a:lstStyle/>
-          <a:p>
-            <a:endParaRPr lang="en-US" dirty="0"/>
-          </a:p>
-        </p:txBody>
-      </p:sp>
-      <p:sp>
-        <p:nvSpPr>
-          <p:cNvPr id="2" name="Title 1">
-            <a:extLst>
-              <a:ext uri="{FF2B5EF4-FFF2-40B4-BE49-F238E27FC236}">
-                <a16:creationId xmlns:a16="http://schemas.microsoft.com/office/drawing/2014/main" id="{3ED5FDDA-FB89-7C42-000C-DFB890DC4FCA}"/>
+                <a16:creationId xmlns:a16="http://schemas.microsoft.com/office/drawing/2014/main" id="{E803951D-F116-DC10-6C43-19FFF7456671}"/>
               </a:ext>
             </a:extLst>
           </p:cNvPr>
@@ -14414,27 +13281,34 @@
             <a:spLocks noGrp="1"/>
           </p:cNvSpPr>
           <p:nvPr>
-            <p:ph type="title"/>
+            <p:ph sz="half" idx="1"/>
           </p:nvPr>
         </p:nvSpPr>
         <p:spPr>
           <a:xfrm>
-            <a:off x="838200" y="713312"/>
-            <a:ext cx="4038600" cy="5431376"/>
+            <a:off x="1203960" y="2426144"/>
+            <a:ext cx="3907536" cy="1231456"/>
           </a:xfrm>
         </p:spPr>
         <p:txBody>
           <a:bodyPr>
-            <a:normAutofit/>
+            <a:normAutofit lnSpcReduction="10000"/>
           </a:bodyPr>
           <a:lstStyle/>
           <a:p>
-            <a:r>
-              <a:rPr lang="fr-CH" dirty="0" err="1"/>
+            <a:pPr marL="0" indent="0">
+              <a:buNone/>
+            </a:pPr>
+            <a:r>
+              <a:rPr lang="fr-CH" sz="4400" dirty="0" err="1">
+                <a:latin typeface="+mj-lt"/>
+              </a:rPr>
               <a:t>Research</a:t>
             </a:r>
             <a:r>
-              <a:rPr lang="fr-CH" dirty="0"/>
+              <a:rPr lang="fr-CH" sz="4400" dirty="0">
+                <a:latin typeface="+mj-lt"/>
+              </a:rPr>
               <a:t> questions </a:t>
             </a:r>
           </a:p>
@@ -14442,10 +13316,10 @@
       </p:sp>
       <p:sp>
         <p:nvSpPr>
-          <p:cNvPr id="24" name="Content Placeholder 2">
+          <p:cNvPr id="6" name="Content Placeholder 5">
             <a:extLst>
               <a:ext uri="{FF2B5EF4-FFF2-40B4-BE49-F238E27FC236}">
-                <a16:creationId xmlns:a16="http://schemas.microsoft.com/office/drawing/2014/main" id="{D7FDF29B-A281-F3CF-760D-321759BA8581}"/>
+                <a16:creationId xmlns:a16="http://schemas.microsoft.com/office/drawing/2014/main" id="{B41B92A7-C4DD-19B5-4CEE-1DEFC7F961BB}"/>
               </a:ext>
             </a:extLst>
           </p:cNvPr>
@@ -14453,18 +13327,18 @@
             <a:spLocks noGrp="1"/>
           </p:cNvSpPr>
           <p:nvPr>
-            <p:ph idx="1"/>
+            <p:ph sz="half" idx="2"/>
           </p:nvPr>
         </p:nvSpPr>
         <p:spPr>
           <a:xfrm>
-            <a:off x="6095999" y="713313"/>
-            <a:ext cx="5257801" cy="5431376"/>
+            <a:off x="5980176" y="866202"/>
+            <a:ext cx="5181600" cy="5305997"/>
           </a:xfrm>
         </p:spPr>
         <p:txBody>
-          <a:bodyPr anchor="ctr">
-            <a:normAutofit/>
+          <a:bodyPr>
+            <a:normAutofit lnSpcReduction="10000"/>
           </a:bodyPr>
           <a:lstStyle/>
           <a:p>
@@ -14472,71 +13346,79 @@
               <a:buNone/>
             </a:pPr>
             <a:r>
-              <a:rPr lang="fr-CH" sz="3200" dirty="0"/>
-              <a:t>1. </a:t>
-            </a:r>
-            <a:r>
-              <a:rPr lang="fr-CH" sz="3200" dirty="0" err="1"/>
+              <a:rPr lang="fr-CH" sz="3500" dirty="0">
+                <a:solidFill>
+                  <a:srgbClr val="98B2CB"/>
+                </a:solidFill>
+              </a:rPr>
+              <a:t>1.</a:t>
+            </a:r>
+            <a:r>
+              <a:rPr lang="fr-CH" sz="3500" dirty="0"/>
+              <a:t> </a:t>
+            </a:r>
+            <a:r>
+              <a:rPr lang="fr-CH" sz="3500" dirty="0" err="1"/>
               <a:t>What</a:t>
             </a:r>
             <a:r>
-              <a:rPr lang="fr-CH" sz="3200" dirty="0"/>
+              <a:rPr lang="fr-CH" sz="3500" dirty="0"/>
               <a:t> </a:t>
             </a:r>
             <a:r>
-              <a:rPr lang="fr-CH" sz="3200" dirty="0" err="1"/>
+              <a:rPr lang="fr-CH" sz="3500" dirty="0" err="1"/>
               <a:t>share</a:t>
             </a:r>
             <a:r>
-              <a:rPr lang="fr-CH" sz="3200" dirty="0"/>
+              <a:rPr lang="fr-CH" sz="3500" dirty="0"/>
               <a:t> of </a:t>
             </a:r>
             <a:r>
-              <a:rPr lang="fr-CH" sz="3200" dirty="0" err="1"/>
+              <a:rPr lang="fr-CH" sz="3500" dirty="0" err="1"/>
               <a:t>daily</a:t>
             </a:r>
             <a:r>
-              <a:rPr lang="fr-CH" sz="3200" dirty="0"/>
+              <a:rPr lang="fr-CH" sz="3500" dirty="0"/>
               <a:t> </a:t>
             </a:r>
             <a:r>
-              <a:rPr lang="fr-CH" sz="3200" dirty="0" err="1"/>
+              <a:rPr lang="fr-CH" sz="3500" dirty="0" err="1"/>
               <a:t>activities</a:t>
             </a:r>
             <a:r>
-              <a:rPr lang="fr-CH" sz="3200" dirty="0"/>
+              <a:rPr lang="fr-CH" sz="3500" dirty="0"/>
               <a:t> </a:t>
             </a:r>
             <a:r>
-              <a:rPr lang="fr-CH" sz="3200" dirty="0" err="1"/>
+              <a:rPr lang="fr-CH" sz="3500" dirty="0" err="1"/>
               <a:t>occurs</a:t>
             </a:r>
             <a:r>
-              <a:rPr lang="fr-CH" sz="3200" dirty="0"/>
+              <a:rPr lang="fr-CH" sz="3500" dirty="0"/>
               <a:t> </a:t>
             </a:r>
             <a:r>
-              <a:rPr lang="fr-CH" sz="3200" dirty="0" err="1"/>
+              <a:rPr lang="fr-CH" sz="3500" dirty="0" err="1"/>
               <a:t>within</a:t>
             </a:r>
             <a:r>
-              <a:rPr lang="fr-CH" sz="3200" dirty="0"/>
+              <a:rPr lang="fr-CH" sz="3500" dirty="0"/>
               <a:t> 15 minutes </a:t>
             </a:r>
             <a:r>
-              <a:rPr lang="fr-CH" sz="3200" dirty="0" err="1"/>
+              <a:rPr lang="fr-CH" sz="3500" dirty="0" err="1"/>
               <a:t>from</a:t>
             </a:r>
             <a:r>
-              <a:rPr lang="fr-CH" sz="3200" dirty="0"/>
+              <a:rPr lang="fr-CH" sz="3500" dirty="0"/>
               <a:t> home ? (per </a:t>
             </a:r>
             <a:r>
-              <a:rPr lang="fr-CH" sz="3200" dirty="0" err="1"/>
+              <a:rPr lang="fr-CH" sz="3500" dirty="0" err="1"/>
               <a:t>means</a:t>
             </a:r>
             <a:r>
-              <a:rPr lang="fr-CH" sz="3200" dirty="0"/>
+              <a:rPr lang="fr-CH" sz="3500" dirty="0"/>
               <a:t> of transportation)</a:t>
             </a:r>
           </a:p>
@@ -14545,63 +13427,71 @@
               <a:buNone/>
             </a:pPr>
             <a:r>
-              <a:rPr lang="fr-CH" sz="3200" dirty="0"/>
-              <a:t>2. How </a:t>
-            </a:r>
-            <a:r>
-              <a:rPr lang="fr-CH" sz="3200" dirty="0" err="1"/>
+              <a:rPr lang="fr-CH" sz="3500" dirty="0">
+                <a:solidFill>
+                  <a:srgbClr val="98B2CB"/>
+                </a:solidFill>
+              </a:rPr>
+              <a:t>2.</a:t>
+            </a:r>
+            <a:r>
+              <a:rPr lang="fr-CH" sz="3500" dirty="0"/>
+              <a:t> How </a:t>
+            </a:r>
+            <a:r>
+              <a:rPr lang="fr-CH" sz="3500" dirty="0" err="1"/>
               <a:t>does</a:t>
             </a:r>
             <a:r>
-              <a:rPr lang="fr-CH" sz="3200" dirty="0"/>
+              <a:rPr lang="fr-CH" sz="3500" dirty="0"/>
               <a:t> </a:t>
             </a:r>
             <a:r>
-              <a:rPr lang="fr-CH" sz="3200" dirty="0" err="1"/>
+              <a:rPr lang="fr-CH" sz="3500" dirty="0" err="1"/>
               <a:t>actual</a:t>
             </a:r>
             <a:r>
-              <a:rPr lang="fr-CH" sz="3200" dirty="0"/>
+              <a:rPr lang="fr-CH" sz="3500" dirty="0"/>
               <a:t> </a:t>
             </a:r>
             <a:r>
-              <a:rPr lang="fr-CH" sz="3200" dirty="0" err="1"/>
+              <a:rPr lang="fr-CH" sz="3500" dirty="0" err="1"/>
               <a:t>mobility</a:t>
             </a:r>
             <a:r>
-              <a:rPr lang="fr-CH" sz="3200" dirty="0"/>
+              <a:rPr lang="fr-CH" sz="3500" dirty="0"/>
               <a:t> </a:t>
             </a:r>
             <a:r>
-              <a:rPr lang="fr-CH" sz="3200" dirty="0" err="1"/>
+              <a:rPr lang="fr-CH" sz="3500" dirty="0" err="1"/>
               <a:t>differ</a:t>
             </a:r>
             <a:r>
-              <a:rPr lang="fr-CH" sz="3200" dirty="0"/>
+              <a:rPr lang="fr-CH" sz="3500" dirty="0"/>
               <a:t> </a:t>
             </a:r>
             <a:r>
-              <a:rPr lang="fr-CH" sz="3200" dirty="0" err="1"/>
+              <a:rPr lang="fr-CH" sz="3500" dirty="0" err="1"/>
               <a:t>from</a:t>
             </a:r>
             <a:r>
-              <a:rPr lang="fr-CH" sz="3200" dirty="0"/>
+              <a:rPr lang="fr-CH" sz="3500" dirty="0"/>
               <a:t> the </a:t>
             </a:r>
             <a:r>
-              <a:rPr lang="fr-CH" sz="3200" dirty="0" err="1"/>
+              <a:rPr lang="fr-CH" sz="3500" dirty="0" err="1"/>
               <a:t>theoretical</a:t>
             </a:r>
             <a:r>
-              <a:rPr lang="fr-CH" sz="3200" dirty="0"/>
+              <a:rPr lang="fr-CH" sz="3500" dirty="0"/>
               <a:t> </a:t>
             </a:r>
             <a:r>
-              <a:rPr lang="fr-CH" sz="3200" dirty="0" err="1"/>
+              <a:rPr lang="fr-CH" sz="3500" dirty="0" err="1"/>
               <a:t>accessibility</a:t>
             </a:r>
             <a:r>
-              <a:rPr lang="fr-CH" sz="3200" dirty="0"/>
+              <a:rPr lang="fr-CH" sz="3500" dirty="0"/>
               <a:t>? </a:t>
             </a:r>
           </a:p>
@@ -14610,64 +13500,75 @@
               <a:buNone/>
             </a:pPr>
             <a:r>
-              <a:rPr lang="fr-CH" sz="3200" dirty="0"/>
-              <a:t>3. </a:t>
-            </a:r>
-            <a:r>
-              <a:rPr lang="fr-CH" sz="3200" dirty="0" err="1"/>
+              <a:rPr lang="fr-CH" sz="3500" dirty="0">
+                <a:solidFill>
+                  <a:srgbClr val="98B2CB"/>
+                </a:solidFill>
+              </a:rPr>
+              <a:t>3.</a:t>
+            </a:r>
+            <a:r>
+              <a:rPr lang="fr-CH" sz="3500" dirty="0"/>
+              <a:t> </a:t>
+            </a:r>
+            <a:r>
+              <a:rPr lang="fr-CH" sz="3500" dirty="0" err="1"/>
               <a:t>Which</a:t>
             </a:r>
             <a:r>
-              <a:rPr lang="fr-CH" sz="3200" dirty="0"/>
+              <a:rPr lang="fr-CH" sz="3500" dirty="0"/>
               <a:t> types of </a:t>
             </a:r>
             <a:r>
-              <a:rPr lang="fr-CH" sz="3200" dirty="0" err="1"/>
+              <a:rPr lang="fr-CH" sz="3500" dirty="0" err="1"/>
               <a:t>activities</a:t>
             </a:r>
             <a:r>
-              <a:rPr lang="fr-CH" sz="3200" dirty="0"/>
+              <a:rPr lang="fr-CH" sz="3500" dirty="0"/>
               <a:t> </a:t>
             </a:r>
             <a:r>
-              <a:rPr lang="fr-CH" sz="3200" dirty="0" err="1"/>
+              <a:rPr lang="fr-CH" sz="3500" dirty="0" err="1"/>
               <a:t>most</a:t>
             </a:r>
             <a:r>
-              <a:rPr lang="fr-CH" sz="3200" dirty="0"/>
+              <a:rPr lang="fr-CH" sz="3500" dirty="0"/>
               <a:t> </a:t>
             </a:r>
             <a:r>
-              <a:rPr lang="fr-CH" sz="3200" dirty="0" err="1"/>
+              <a:rPr lang="fr-CH" sz="3500" dirty="0" err="1"/>
               <a:t>often</a:t>
             </a:r>
             <a:r>
-              <a:rPr lang="fr-CH" sz="3200" dirty="0"/>
+              <a:rPr lang="fr-CH" sz="3500" dirty="0"/>
               <a:t> </a:t>
             </a:r>
             <a:r>
-              <a:rPr lang="fr-CH" sz="3200" dirty="0" err="1"/>
+              <a:rPr lang="fr-CH" sz="3500" dirty="0" err="1"/>
               <a:t>occur</a:t>
             </a:r>
             <a:r>
-              <a:rPr lang="fr-CH" sz="3200" dirty="0"/>
+              <a:rPr lang="fr-CH" sz="3500" dirty="0"/>
               <a:t> </a:t>
             </a:r>
             <a:r>
-              <a:rPr lang="fr-CH" sz="3200" dirty="0" err="1"/>
+              <a:rPr lang="fr-CH" sz="3500" dirty="0" err="1"/>
               <a:t>beyond</a:t>
             </a:r>
             <a:r>
-              <a:rPr lang="fr-CH" sz="3200" dirty="0"/>
+              <a:rPr lang="fr-CH" sz="3500" dirty="0"/>
               <a:t> a 15‑minute radius?</a:t>
             </a:r>
+          </a:p>
+          <a:p>
+            <a:endParaRPr lang="fr-CH" dirty="0"/>
           </a:p>
         </p:txBody>
       </p:sp>
     </p:spTree>
     <p:extLst>
       <p:ext uri="{BB962C8B-B14F-4D97-AF65-F5344CB8AC3E}">
-        <p14:creationId xmlns:p14="http://schemas.microsoft.com/office/powerpoint/2010/main" val="3809305011"/>
+        <p14:creationId xmlns:p14="http://schemas.microsoft.com/office/powerpoint/2010/main" val="2745853101"/>
       </p:ext>
     </p:extLst>
   </p:cSld>
@@ -14677,212 +13578,7 @@
 </p:sld>
 </file>
 
-<file path=ppt/slides/slide6.xml><?xml version="1.0" encoding="utf-8"?>
-<p:sld xmlns:a="http://schemas.openxmlformats.org/drawingml/2006/main" xmlns:r="http://schemas.openxmlformats.org/officeDocument/2006/relationships" xmlns:p="http://schemas.openxmlformats.org/presentationml/2006/main">
-  <p:cSld>
-    <p:spTree>
-      <p:nvGrpSpPr>
-        <p:cNvPr id="1" name="">
-          <a:extLst>
-            <a:ext uri="{FF2B5EF4-FFF2-40B4-BE49-F238E27FC236}">
-              <a16:creationId xmlns:a16="http://schemas.microsoft.com/office/drawing/2014/main" id="{3D423E1E-BDBE-7890-99F7-75EB4E2501C1}"/>
-            </a:ext>
-          </a:extLst>
-        </p:cNvPr>
-        <p:cNvGrpSpPr/>
-        <p:nvPr/>
-      </p:nvGrpSpPr>
-      <p:grpSpPr>
-        <a:xfrm>
-          <a:off x="0" y="0"/>
-          <a:ext cx="0" cy="0"/>
-          <a:chOff x="0" y="0"/>
-          <a:chExt cx="0" cy="0"/>
-        </a:xfrm>
-      </p:grpSpPr>
-      <p:sp>
-        <p:nvSpPr>
-          <p:cNvPr id="2" name="Title 1">
-            <a:extLst>
-              <a:ext uri="{FF2B5EF4-FFF2-40B4-BE49-F238E27FC236}">
-                <a16:creationId xmlns:a16="http://schemas.microsoft.com/office/drawing/2014/main" id="{F68A396A-E78B-8B83-BCD1-2000A3ACC94E}"/>
-              </a:ext>
-            </a:extLst>
-          </p:cNvPr>
-          <p:cNvSpPr>
-            <a:spLocks noGrp="1"/>
-          </p:cNvSpPr>
-          <p:nvPr>
-            <p:ph type="title"/>
-          </p:nvPr>
-        </p:nvSpPr>
-        <p:spPr>
-          <a:xfrm>
-            <a:off x="838200" y="713312"/>
-            <a:ext cx="4038600" cy="3472607"/>
-          </a:xfrm>
-        </p:spPr>
-        <p:txBody>
-          <a:bodyPr>
-            <a:normAutofit/>
-          </a:bodyPr>
-          <a:lstStyle/>
-          <a:p>
-            <a:r>
-              <a:rPr lang="en-001" dirty="0"/>
-              <a:t>Best Possible Outcome</a:t>
-            </a:r>
-          </a:p>
-        </p:txBody>
-      </p:sp>
-      <p:sp>
-        <p:nvSpPr>
-          <p:cNvPr id="24" name="Content Placeholder 2">
-            <a:extLst>
-              <a:ext uri="{FF2B5EF4-FFF2-40B4-BE49-F238E27FC236}">
-                <a16:creationId xmlns:a16="http://schemas.microsoft.com/office/drawing/2014/main" id="{220A022F-93D1-8C5A-87A5-E8C8242FA292}"/>
-              </a:ext>
-            </a:extLst>
-          </p:cNvPr>
-          <p:cNvSpPr>
-            <a:spLocks noGrp="1"/>
-          </p:cNvSpPr>
-          <p:nvPr>
-            <p:ph idx="1"/>
-          </p:nvPr>
-        </p:nvSpPr>
-        <p:spPr>
-          <a:xfrm>
-            <a:off x="4876801" y="713313"/>
-            <a:ext cx="6477000" cy="3472607"/>
-          </a:xfrm>
-        </p:spPr>
-        <p:txBody>
-          <a:bodyPr anchor="ctr">
-            <a:normAutofit fontScale="92500" lnSpcReduction="10000"/>
-          </a:bodyPr>
-          <a:lstStyle/>
-          <a:p>
-            <a:pPr marL="0" indent="0">
-              <a:buNone/>
-            </a:pPr>
-            <a:r>
-              <a:rPr lang="en-001" sz="3200" dirty="0"/>
-              <a:t>We expect to:</a:t>
-            </a:r>
-          </a:p>
-          <a:p>
-            <a:r>
-              <a:rPr lang="en-001" sz="3200" dirty="0"/>
-              <a:t>Quantify the proportion of local vs non-local activities </a:t>
-            </a:r>
-          </a:p>
-          <a:p>
-            <a:r>
-              <a:rPr lang="en-001" sz="3200" dirty="0"/>
-              <a:t>Identify activity types that exceed the 15-minute threshold </a:t>
-            </a:r>
-          </a:p>
-          <a:p>
-            <a:r>
-              <a:rPr lang="en-001" sz="3200" dirty="0"/>
-              <a:t>Evaluate whether mobility is driven more by accessibility or by personal preferences and habits</a:t>
-            </a:r>
-          </a:p>
-        </p:txBody>
-      </p:sp>
-      <p:sp>
-        <p:nvSpPr>
-          <p:cNvPr id="3" name="Rectangle 2">
-            <a:extLst>
-              <a:ext uri="{FF2B5EF4-FFF2-40B4-BE49-F238E27FC236}">
-                <a16:creationId xmlns:a16="http://schemas.microsoft.com/office/drawing/2014/main" id="{7054B78A-D08B-EF49-5DCE-3E78CEFBEEF3}"/>
-              </a:ext>
-            </a:extLst>
-          </p:cNvPr>
-          <p:cNvSpPr/>
-          <p:nvPr/>
-        </p:nvSpPr>
-        <p:spPr>
-          <a:xfrm>
-            <a:off x="0" y="4795520"/>
-            <a:ext cx="12192000" cy="1561737"/>
-          </a:xfrm>
-          <a:prstGeom prst="rect">
-            <a:avLst/>
-          </a:prstGeom>
-          <a:solidFill>
-            <a:srgbClr val="F4F4F4"/>
-          </a:solidFill>
-          <a:ln>
-            <a:noFill/>
-          </a:ln>
-        </p:spPr>
-        <p:style>
-          <a:lnRef idx="2">
-            <a:schemeClr val="accent1">
-              <a:shade val="15000"/>
-            </a:schemeClr>
-          </a:lnRef>
-          <a:fillRef idx="1">
-            <a:schemeClr val="accent1"/>
-          </a:fillRef>
-          <a:effectRef idx="0">
-            <a:schemeClr val="accent1"/>
-          </a:effectRef>
-          <a:fontRef idx="minor">
-            <a:schemeClr val="lt1"/>
-          </a:fontRef>
-        </p:style>
-        <p:txBody>
-          <a:bodyPr rtlCol="0" anchor="ctr"/>
-          <a:lstStyle/>
-          <a:p>
-            <a:pPr algn="ctr"/>
-            <a:r>
-              <a:rPr lang="en-001" sz="2200" b="1" dirty="0">
-                <a:solidFill>
-                  <a:schemeClr val="tx1"/>
-                </a:solidFill>
-              </a:rPr>
-              <a:t>Hypothesis:</a:t>
-            </a:r>
-            <a:r>
-              <a:rPr lang="en-001" sz="2200" dirty="0">
-                <a:solidFill>
-                  <a:schemeClr val="tx1"/>
-                </a:solidFill>
-              </a:rPr>
-              <a:t> Even in Zurich, many social and professional activities </a:t>
-            </a:r>
-          </a:p>
-          <a:p>
-            <a:pPr algn="ctr"/>
-            <a:r>
-              <a:rPr lang="en-001" sz="2200" dirty="0">
-                <a:solidFill>
-                  <a:schemeClr val="tx1"/>
-                </a:solidFill>
-              </a:rPr>
-              <a:t>occur beyond the theoretically accessible area</a:t>
-            </a:r>
-          </a:p>
-        </p:txBody>
-      </p:sp>
-    </p:spTree>
-    <p:extLst>
-      <p:ext uri="{BB962C8B-B14F-4D97-AF65-F5344CB8AC3E}">
-        <p14:creationId xmlns:p14="http://schemas.microsoft.com/office/powerpoint/2010/main" val="2129016569"/>
-      </p:ext>
-    </p:extLst>
-  </p:cSld>
-  <p:clrMapOvr>
-    <a:masterClrMapping/>
-  </p:clrMapOvr>
-</p:sld>
-</file>
-
-<file path=ppt/slides/slide7.xml><?xml version="1.0" encoding="utf-8"?>
+<file path=ppt/slides/slide4.xml><?xml version="1.0" encoding="utf-8"?>
 <p:sld xmlns:a="http://schemas.openxmlformats.org/drawingml/2006/main" xmlns:r="http://schemas.openxmlformats.org/officeDocument/2006/relationships" xmlns:p="http://schemas.openxmlformats.org/presentationml/2006/main">
   <p:cSld>
     <p:spTree>
@@ -15227,7 +13923,7 @@
 </p:sld>
 </file>
 
-<file path=ppt/slides/slide8.xml><?xml version="1.0" encoding="utf-8"?>
+<file path=ppt/slides/slide5.xml><?xml version="1.0" encoding="utf-8"?>
 <p:sld xmlns:a="http://schemas.openxmlformats.org/drawingml/2006/main" xmlns:r="http://schemas.openxmlformats.org/officeDocument/2006/relationships" xmlns:p="http://schemas.openxmlformats.org/presentationml/2006/main">
   <p:cSld>
     <p:bg>
@@ -17994,7 +16690,7 @@
 </p:sld>
 </file>
 
-<file path=ppt/slides/slide9.xml><?xml version="1.0" encoding="utf-8"?>
+<file path=ppt/slides/slide6.xml><?xml version="1.0" encoding="utf-8"?>
 <p:sld xmlns:a="http://schemas.openxmlformats.org/drawingml/2006/main" xmlns:r="http://schemas.openxmlformats.org/officeDocument/2006/relationships" xmlns:p="http://schemas.openxmlformats.org/presentationml/2006/main">
   <p:cSld>
     <p:spTree>
@@ -18087,6 +16783,544 @@
     <p:extLst>
       <p:ext uri="{BB962C8B-B14F-4D97-AF65-F5344CB8AC3E}">
         <p14:creationId xmlns:p14="http://schemas.microsoft.com/office/powerpoint/2010/main" val="1701537491"/>
+      </p:ext>
+    </p:extLst>
+  </p:cSld>
+  <p:clrMapOvr>
+    <a:masterClrMapping/>
+  </p:clrMapOvr>
+</p:sld>
+</file>
+
+<file path=ppt/slides/slide7.xml><?xml version="1.0" encoding="utf-8"?>
+<p:sld xmlns:a="http://schemas.openxmlformats.org/drawingml/2006/main" xmlns:r="http://schemas.openxmlformats.org/officeDocument/2006/relationships" xmlns:p="http://schemas.openxmlformats.org/presentationml/2006/main">
+  <p:cSld>
+    <p:spTree>
+      <p:nvGrpSpPr>
+        <p:cNvPr id="1" name=""/>
+        <p:cNvGrpSpPr/>
+        <p:nvPr/>
+      </p:nvGrpSpPr>
+      <p:grpSpPr>
+        <a:xfrm>
+          <a:off x="0" y="0"/>
+          <a:ext cx="0" cy="0"/>
+          <a:chOff x="0" y="0"/>
+          <a:chExt cx="0" cy="0"/>
+        </a:xfrm>
+      </p:grpSpPr>
+      <p:sp>
+        <p:nvSpPr>
+          <p:cNvPr id="2" name="Title 1">
+            <a:extLst>
+              <a:ext uri="{FF2B5EF4-FFF2-40B4-BE49-F238E27FC236}">
+                <a16:creationId xmlns:a16="http://schemas.microsoft.com/office/drawing/2014/main" id="{8B6FD0A6-936D-1217-2307-54883D928515}"/>
+              </a:ext>
+            </a:extLst>
+          </p:cNvPr>
+          <p:cNvSpPr>
+            <a:spLocks noGrp="1"/>
+          </p:cNvSpPr>
+          <p:nvPr>
+            <p:ph type="title"/>
+          </p:nvPr>
+        </p:nvSpPr>
+        <p:spPr/>
+        <p:txBody>
+          <a:bodyPr>
+            <a:normAutofit/>
+          </a:bodyPr>
+          <a:lstStyle/>
+          <a:p>
+            <a:r>
+              <a:rPr lang="en-001" sz="4000" dirty="0"/>
+              <a:t>Activities occurring beyond the 15-minute city</a:t>
+            </a:r>
+          </a:p>
+        </p:txBody>
+      </p:sp>
+      <p:pic>
+        <p:nvPicPr>
+          <p:cNvPr id="5" name="Content Placeholder 4">
+            <a:extLst>
+              <a:ext uri="{FF2B5EF4-FFF2-40B4-BE49-F238E27FC236}">
+                <a16:creationId xmlns:a16="http://schemas.microsoft.com/office/drawing/2014/main" id="{0A24CC37-D9A8-59DF-A14B-5BF03F157956}"/>
+              </a:ext>
+            </a:extLst>
+          </p:cNvPr>
+          <p:cNvPicPr>
+            <a:picLocks noGrp="1" noChangeAspect="1"/>
+          </p:cNvPicPr>
+          <p:nvPr>
+            <p:ph idx="1"/>
+          </p:nvPr>
+        </p:nvPicPr>
+        <p:blipFill>
+          <a:blip r:embed="rId2">
+            <a:extLst>
+              <a:ext uri="{28A0092B-C50C-407E-A947-70E740481C1C}">
+                <a14:useLocalDpi xmlns:a14="http://schemas.microsoft.com/office/drawing/2010/main" val="0"/>
+              </a:ext>
+            </a:extLst>
+          </a:blip>
+          <a:srcRect t="11781"/>
+          <a:stretch>
+            <a:fillRect/>
+          </a:stretch>
+        </p:blipFill>
+        <p:spPr>
+          <a:xfrm>
+            <a:off x="1431183" y="1470991"/>
+            <a:ext cx="8726608" cy="5281533"/>
+          </a:xfrm>
+          <a:prstGeom prst="rect">
+            <a:avLst/>
+          </a:prstGeom>
+        </p:spPr>
+      </p:pic>
+    </p:spTree>
+    <p:extLst>
+      <p:ext uri="{BB962C8B-B14F-4D97-AF65-F5344CB8AC3E}">
+        <p14:creationId xmlns:p14="http://schemas.microsoft.com/office/powerpoint/2010/main" val="3855054443"/>
+      </p:ext>
+    </p:extLst>
+  </p:cSld>
+  <p:clrMapOvr>
+    <a:masterClrMapping/>
+  </p:clrMapOvr>
+</p:sld>
+</file>
+
+<file path=ppt/slides/slide8.xml><?xml version="1.0" encoding="utf-8"?>
+<p:sld xmlns:a="http://schemas.openxmlformats.org/drawingml/2006/main" xmlns:r="http://schemas.openxmlformats.org/officeDocument/2006/relationships" xmlns:p="http://schemas.openxmlformats.org/presentationml/2006/main">
+  <p:cSld>
+    <p:spTree>
+      <p:nvGrpSpPr>
+        <p:cNvPr id="1" name=""/>
+        <p:cNvGrpSpPr/>
+        <p:nvPr/>
+      </p:nvGrpSpPr>
+      <p:grpSpPr>
+        <a:xfrm>
+          <a:off x="0" y="0"/>
+          <a:ext cx="0" cy="0"/>
+          <a:chOff x="0" y="0"/>
+          <a:chExt cx="0" cy="0"/>
+        </a:xfrm>
+      </p:grpSpPr>
+      <p:sp>
+        <p:nvSpPr>
+          <p:cNvPr id="2" name="Title 1">
+            <a:extLst>
+              <a:ext uri="{FF2B5EF4-FFF2-40B4-BE49-F238E27FC236}">
+                <a16:creationId xmlns:a16="http://schemas.microsoft.com/office/drawing/2014/main" id="{64BD1728-17B5-5125-78E7-BBA36653063B}"/>
+              </a:ext>
+            </a:extLst>
+          </p:cNvPr>
+          <p:cNvSpPr>
+            <a:spLocks noGrp="1"/>
+          </p:cNvSpPr>
+          <p:nvPr>
+            <p:ph type="title"/>
+          </p:nvPr>
+        </p:nvSpPr>
+        <p:spPr/>
+        <p:txBody>
+          <a:bodyPr/>
+          <a:lstStyle/>
+          <a:p>
+            <a:endParaRPr lang="fr-CH"/>
+          </a:p>
+        </p:txBody>
+      </p:sp>
+      <p:sp>
+        <p:nvSpPr>
+          <p:cNvPr id="7" name="Content Placeholder 6">
+            <a:extLst>
+              <a:ext uri="{FF2B5EF4-FFF2-40B4-BE49-F238E27FC236}">
+                <a16:creationId xmlns:a16="http://schemas.microsoft.com/office/drawing/2014/main" id="{DCCFBE5E-470E-8AAF-8F23-FDD7777AA6DC}"/>
+              </a:ext>
+            </a:extLst>
+          </p:cNvPr>
+          <p:cNvSpPr>
+            <a:spLocks noGrp="1"/>
+          </p:cNvSpPr>
+          <p:nvPr>
+            <p:ph idx="1"/>
+          </p:nvPr>
+        </p:nvSpPr>
+        <p:spPr/>
+        <p:txBody>
+          <a:bodyPr/>
+          <a:lstStyle/>
+          <a:p>
+            <a:endParaRPr lang="fr-CH"/>
+          </a:p>
+        </p:txBody>
+      </p:sp>
+      <p:pic>
+        <p:nvPicPr>
+          <p:cNvPr id="9" name="Picture 8" descr="The image displays a map overlaying various locations in ZURICH, indicating distances for different modes of transportation (walking, cycling, and public transport) from a central point.&#10;&#10;AI-generated content may be incorrect.">
+            <a:extLst>
+              <a:ext uri="{FF2B5EF4-FFF2-40B4-BE49-F238E27FC236}">
+                <a16:creationId xmlns:a16="http://schemas.microsoft.com/office/drawing/2014/main" id="{2CAB6DAC-E835-6F5C-E5D4-339A9645C7BE}"/>
+              </a:ext>
+            </a:extLst>
+          </p:cNvPr>
+          <p:cNvPicPr>
+            <a:picLocks noChangeAspect="1"/>
+          </p:cNvPicPr>
+          <p:nvPr/>
+        </p:nvPicPr>
+        <p:blipFill>
+          <a:blip r:embed="rId2"/>
+          <a:stretch>
+            <a:fillRect/>
+          </a:stretch>
+        </p:blipFill>
+        <p:spPr>
+          <a:xfrm>
+            <a:off x="198120" y="0"/>
+            <a:ext cx="11795760" cy="6858000"/>
+          </a:xfrm>
+          <a:prstGeom prst="rect">
+            <a:avLst/>
+          </a:prstGeom>
+        </p:spPr>
+      </p:pic>
+    </p:spTree>
+    <p:extLst>
+      <p:ext uri="{BB962C8B-B14F-4D97-AF65-F5344CB8AC3E}">
+        <p14:creationId xmlns:p14="http://schemas.microsoft.com/office/powerpoint/2010/main" val="2036194352"/>
+      </p:ext>
+    </p:extLst>
+  </p:cSld>
+  <p:clrMapOvr>
+    <a:masterClrMapping/>
+  </p:clrMapOvr>
+</p:sld>
+</file>
+
+<file path=ppt/slides/slide9.xml><?xml version="1.0" encoding="utf-8"?>
+<p:sld xmlns:a="http://schemas.openxmlformats.org/drawingml/2006/main" xmlns:r="http://schemas.openxmlformats.org/officeDocument/2006/relationships" xmlns:p="http://schemas.openxmlformats.org/presentationml/2006/main">
+  <p:cSld>
+    <p:spTree>
+      <p:nvGrpSpPr>
+        <p:cNvPr id="1" name=""/>
+        <p:cNvGrpSpPr/>
+        <p:nvPr/>
+      </p:nvGrpSpPr>
+      <p:grpSpPr>
+        <a:xfrm>
+          <a:off x="0" y="0"/>
+          <a:ext cx="0" cy="0"/>
+          <a:chOff x="0" y="0"/>
+          <a:chExt cx="0" cy="0"/>
+        </a:xfrm>
+      </p:grpSpPr>
+      <p:sp>
+        <p:nvSpPr>
+          <p:cNvPr id="2" name="Title 1">
+            <a:extLst>
+              <a:ext uri="{FF2B5EF4-FFF2-40B4-BE49-F238E27FC236}">
+                <a16:creationId xmlns:a16="http://schemas.microsoft.com/office/drawing/2014/main" id="{229A9C5E-D113-F410-1D52-CFEDFDD68709}"/>
+              </a:ext>
+            </a:extLst>
+          </p:cNvPr>
+          <p:cNvSpPr>
+            <a:spLocks noGrp="1"/>
+          </p:cNvSpPr>
+          <p:nvPr>
+            <p:ph type="title"/>
+          </p:nvPr>
+        </p:nvSpPr>
+        <p:spPr/>
+        <p:txBody>
+          <a:bodyPr/>
+          <a:lstStyle/>
+          <a:p>
+            <a:r>
+              <a:rPr lang="fr-CH" dirty="0"/>
+              <a:t>Challenges and Plan B</a:t>
+            </a:r>
+          </a:p>
+        </p:txBody>
+      </p:sp>
+      <p:sp>
+        <p:nvSpPr>
+          <p:cNvPr id="3" name="Content Placeholder 2">
+            <a:extLst>
+              <a:ext uri="{FF2B5EF4-FFF2-40B4-BE49-F238E27FC236}">
+                <a16:creationId xmlns:a16="http://schemas.microsoft.com/office/drawing/2014/main" id="{DBAEEBF5-C3D9-FA63-1735-E9C2F5C42998}"/>
+              </a:ext>
+            </a:extLst>
+          </p:cNvPr>
+          <p:cNvSpPr>
+            <a:spLocks noGrp="1"/>
+          </p:cNvSpPr>
+          <p:nvPr>
+            <p:ph idx="1"/>
+          </p:nvPr>
+        </p:nvSpPr>
+        <p:spPr/>
+        <p:txBody>
+          <a:bodyPr/>
+          <a:lstStyle/>
+          <a:p>
+            <a:r>
+              <a:rPr lang="fr-CH" dirty="0" err="1"/>
+              <a:t>Integration</a:t>
+            </a:r>
+            <a:r>
+              <a:rPr lang="fr-CH" dirty="0"/>
+              <a:t> of the ZVV time plan </a:t>
+            </a:r>
+          </a:p>
+          <a:p>
+            <a:pPr lvl="1"/>
+            <a:r>
+              <a:rPr lang="fr-CH" dirty="0"/>
+              <a:t>Heavy data set </a:t>
+            </a:r>
+          </a:p>
+          <a:p>
+            <a:pPr lvl="1"/>
+            <a:r>
+              <a:rPr lang="fr-CH" dirty="0"/>
+              <a:t>Add </a:t>
+            </a:r>
+            <a:r>
+              <a:rPr lang="fr-CH" dirty="0" err="1"/>
+              <a:t>unusefull</a:t>
+            </a:r>
+            <a:r>
+              <a:rPr lang="fr-CH" dirty="0"/>
+              <a:t> complication</a:t>
+            </a:r>
+            <a:endParaRPr lang="fr-CH" dirty="0">
+              <a:sym typeface="Wingdings" panose="05000000000000000000" pitchFamily="2" charset="2"/>
+            </a:endParaRPr>
+          </a:p>
+          <a:p>
+            <a:pPr>
+              <a:buFont typeface="Wingdings" panose="05000000000000000000" pitchFamily="2" charset="2"/>
+              <a:buChar char="à"/>
+            </a:pPr>
+            <a:r>
+              <a:rPr lang="fr-CH" dirty="0">
+                <a:sym typeface="Wingdings" panose="05000000000000000000" pitchFamily="2" charset="2"/>
+              </a:rPr>
+              <a:t> Use an estimation of the speed of the public transports (bus and tram) of 15 km/h </a:t>
+            </a:r>
+          </a:p>
+          <a:p>
+            <a:r>
+              <a:rPr lang="fr-CH" dirty="0">
+                <a:sym typeface="Wingdings" panose="05000000000000000000" pitchFamily="2" charset="2"/>
+              </a:rPr>
+              <a:t>Anonymisation of the data</a:t>
+            </a:r>
+          </a:p>
+          <a:p>
+            <a:pPr lvl="1"/>
+            <a:r>
+              <a:rPr lang="fr-CH" dirty="0">
+                <a:sym typeface="Wingdings" panose="05000000000000000000" pitchFamily="2" charset="2"/>
+              </a:rPr>
+              <a:t>With </a:t>
+            </a:r>
+            <a:r>
+              <a:rPr lang="fr-CH" dirty="0" err="1">
+                <a:sym typeface="Wingdings" panose="05000000000000000000" pitchFamily="2" charset="2"/>
+              </a:rPr>
+              <a:t>only</a:t>
+            </a:r>
+            <a:r>
+              <a:rPr lang="fr-CH" dirty="0">
+                <a:sym typeface="Wingdings" panose="05000000000000000000" pitchFamily="2" charset="2"/>
+              </a:rPr>
+              <a:t> a few </a:t>
+            </a:r>
+            <a:r>
+              <a:rPr lang="fr-CH" dirty="0" err="1">
+                <a:sym typeface="Wingdings" panose="05000000000000000000" pitchFamily="2" charset="2"/>
+              </a:rPr>
+              <a:t>visited</a:t>
+            </a:r>
+            <a:r>
+              <a:rPr lang="fr-CH" dirty="0">
+                <a:sym typeface="Wingdings" panose="05000000000000000000" pitchFamily="2" charset="2"/>
+              </a:rPr>
+              <a:t> points, </a:t>
+            </a:r>
+            <a:r>
+              <a:rPr lang="fr-CH" dirty="0" err="1">
+                <a:sym typeface="Wingdings" panose="05000000000000000000" pitchFamily="2" charset="2"/>
+              </a:rPr>
+              <a:t>it</a:t>
+            </a:r>
+            <a:r>
+              <a:rPr lang="fr-CH" dirty="0">
+                <a:sym typeface="Wingdings" panose="05000000000000000000" pitchFamily="2" charset="2"/>
+              </a:rPr>
+              <a:t> </a:t>
+            </a:r>
+            <a:r>
+              <a:rPr lang="fr-CH" dirty="0" err="1">
+                <a:sym typeface="Wingdings" panose="05000000000000000000" pitchFamily="2" charset="2"/>
+              </a:rPr>
+              <a:t>is</a:t>
+            </a:r>
+            <a:r>
+              <a:rPr lang="fr-CH" dirty="0">
+                <a:sym typeface="Wingdings" panose="05000000000000000000" pitchFamily="2" charset="2"/>
+              </a:rPr>
+              <a:t> possible to </a:t>
+            </a:r>
+            <a:r>
+              <a:rPr lang="fr-CH" dirty="0" err="1">
+                <a:sym typeface="Wingdings" panose="05000000000000000000" pitchFamily="2" charset="2"/>
+              </a:rPr>
+              <a:t>find</a:t>
+            </a:r>
+            <a:r>
+              <a:rPr lang="fr-CH" dirty="0">
+                <a:sym typeface="Wingdings" panose="05000000000000000000" pitchFamily="2" charset="2"/>
+              </a:rPr>
+              <a:t> out </a:t>
+            </a:r>
+            <a:r>
+              <a:rPr lang="fr-CH" dirty="0" err="1">
+                <a:sym typeface="Wingdings" panose="05000000000000000000" pitchFamily="2" charset="2"/>
+              </a:rPr>
+              <a:t>where</a:t>
+            </a:r>
+            <a:r>
+              <a:rPr lang="fr-CH" dirty="0">
+                <a:sym typeface="Wingdings" panose="05000000000000000000" pitchFamily="2" charset="2"/>
+              </a:rPr>
+              <a:t> the </a:t>
+            </a:r>
+            <a:r>
+              <a:rPr lang="fr-CH" dirty="0" err="1">
+                <a:sym typeface="Wingdings" panose="05000000000000000000" pitchFamily="2" charset="2"/>
+              </a:rPr>
+              <a:t>person</a:t>
+            </a:r>
+            <a:r>
+              <a:rPr lang="fr-CH" dirty="0">
+                <a:sym typeface="Wingdings" panose="05000000000000000000" pitchFamily="2" charset="2"/>
+              </a:rPr>
+              <a:t> </a:t>
+            </a:r>
+            <a:r>
+              <a:rPr lang="fr-CH" dirty="0" err="1">
+                <a:sym typeface="Wingdings" panose="05000000000000000000" pitchFamily="2" charset="2"/>
+              </a:rPr>
+              <a:t>lives</a:t>
+            </a:r>
+            <a:r>
+              <a:rPr lang="fr-CH" dirty="0">
+                <a:sym typeface="Wingdings" panose="05000000000000000000" pitchFamily="2" charset="2"/>
+              </a:rPr>
+              <a:t>/</a:t>
+            </a:r>
+            <a:r>
+              <a:rPr lang="fr-CH" dirty="0" err="1">
+                <a:sym typeface="Wingdings" panose="05000000000000000000" pitchFamily="2" charset="2"/>
+              </a:rPr>
+              <a:t>who</a:t>
+            </a:r>
+            <a:r>
+              <a:rPr lang="fr-CH" dirty="0">
+                <a:sym typeface="Wingdings" panose="05000000000000000000" pitchFamily="2" charset="2"/>
+              </a:rPr>
+              <a:t> </a:t>
+            </a:r>
+            <a:r>
+              <a:rPr lang="fr-CH" dirty="0" err="1">
+                <a:sym typeface="Wingdings" panose="05000000000000000000" pitchFamily="2" charset="2"/>
+              </a:rPr>
+              <a:t>they</a:t>
+            </a:r>
+            <a:r>
+              <a:rPr lang="fr-CH" dirty="0">
+                <a:sym typeface="Wingdings" panose="05000000000000000000" pitchFamily="2" charset="2"/>
+              </a:rPr>
+              <a:t> are</a:t>
+            </a:r>
+          </a:p>
+          <a:p>
+            <a:pPr marL="0" indent="0">
+              <a:buNone/>
+            </a:pPr>
+            <a:r>
+              <a:rPr lang="fr-CH" dirty="0">
+                <a:sym typeface="Wingdings" panose="05000000000000000000" pitchFamily="2" charset="2"/>
+              </a:rPr>
+              <a:t> Change the </a:t>
+            </a:r>
+            <a:r>
+              <a:rPr lang="fr-CH" dirty="0" err="1">
+                <a:sym typeface="Wingdings" panose="05000000000000000000" pitchFamily="2" charset="2"/>
+              </a:rPr>
+              <a:t>adress</a:t>
+            </a:r>
+            <a:r>
+              <a:rPr lang="fr-CH" dirty="0">
+                <a:sym typeface="Wingdings" panose="05000000000000000000" pitchFamily="2" charset="2"/>
+              </a:rPr>
+              <a:t> by a few blocks/</a:t>
+            </a:r>
+            <a:r>
+              <a:rPr lang="fr-CH" dirty="0" err="1">
+                <a:sym typeface="Wingdings" panose="05000000000000000000" pitchFamily="2" charset="2"/>
+              </a:rPr>
+              <a:t>streets</a:t>
+            </a:r>
+            <a:r>
+              <a:rPr lang="fr-CH" dirty="0">
+                <a:sym typeface="Wingdings" panose="05000000000000000000" pitchFamily="2" charset="2"/>
+              </a:rPr>
+              <a:t> (but </a:t>
+            </a:r>
+            <a:r>
+              <a:rPr lang="fr-CH" dirty="0" err="1">
+                <a:sym typeface="Wingdings" panose="05000000000000000000" pitchFamily="2" charset="2"/>
+              </a:rPr>
+              <a:t>still</a:t>
+            </a:r>
+            <a:r>
+              <a:rPr lang="fr-CH" dirty="0">
+                <a:sym typeface="Wingdings" panose="05000000000000000000" pitchFamily="2" charset="2"/>
+              </a:rPr>
+              <a:t> not </a:t>
+            </a:r>
+            <a:r>
+              <a:rPr lang="fr-CH" dirty="0" err="1">
+                <a:sym typeface="Wingdings" panose="05000000000000000000" pitchFamily="2" charset="2"/>
+              </a:rPr>
+              <a:t>ideal</a:t>
+            </a:r>
+            <a:r>
+              <a:rPr lang="fr-CH" dirty="0">
+                <a:sym typeface="Wingdings" panose="05000000000000000000" pitchFamily="2" charset="2"/>
+              </a:rPr>
+              <a:t>) </a:t>
+            </a:r>
+          </a:p>
+          <a:p>
+            <a:pPr marL="0" indent="0">
+              <a:buNone/>
+            </a:pPr>
+            <a:endParaRPr lang="fr-CH" dirty="0"/>
+          </a:p>
+        </p:txBody>
+      </p:sp>
+    </p:spTree>
+    <p:extLst>
+      <p:ext uri="{BB962C8B-B14F-4D97-AF65-F5344CB8AC3E}">
+        <p14:creationId xmlns:p14="http://schemas.microsoft.com/office/powerpoint/2010/main" val="2357305363"/>
       </p:ext>
     </p:extLst>
   </p:cSld>

--- a/The 15-Minute City in Practice.pptx
+++ b/The 15-Minute City in Practice.pptx
@@ -9,14 +9,15 @@
     <p:sldId id="266" r:id="rId3"/>
     <p:sldId id="270" r:id="rId4"/>
     <p:sldId id="263" r:id="rId5"/>
-    <p:sldId id="261" r:id="rId6"/>
-    <p:sldId id="267" r:id="rId7"/>
-    <p:sldId id="268" r:id="rId8"/>
-    <p:sldId id="269" r:id="rId9"/>
-    <p:sldId id="262" r:id="rId10"/>
-    <p:sldId id="258" r:id="rId11"/>
-    <p:sldId id="257" r:id="rId12"/>
-    <p:sldId id="265" r:id="rId13"/>
+    <p:sldId id="269" r:id="rId6"/>
+    <p:sldId id="271" r:id="rId7"/>
+    <p:sldId id="261" r:id="rId8"/>
+    <p:sldId id="267" r:id="rId9"/>
+    <p:sldId id="268" r:id="rId10"/>
+    <p:sldId id="262" r:id="rId11"/>
+    <p:sldId id="258" r:id="rId12"/>
+    <p:sldId id="257" r:id="rId13"/>
+    <p:sldId id="265" r:id="rId14"/>
   </p:sldIdLst>
   <p:sldSz cx="12192000" cy="6858000"/>
   <p:notesSz cx="6858000" cy="9144000"/>
@@ -363,7 +364,7 @@
 
 <file path=ppt/comments/modernComment_102_88E6931F.xml><?xml version="1.0" encoding="utf-8"?>
 <p188:cmLst xmlns:a="http://schemas.openxmlformats.org/drawingml/2006/main" xmlns:r="http://schemas.openxmlformats.org/officeDocument/2006/relationships" xmlns:p188="http://schemas.microsoft.com/office/powerpoint/2018/8/main">
-  <p188:cm id="{2097FF87-0BEC-4AA8-BA89-1AD6E5BA5930}" authorId="{C91F3CF6-149F-06F0-0291-18BB8A7035EF}" created="2026-05-31T09:22:57.363">
+  <p188:cm id="{2097FF87-0BEC-4AA8-BA89-1AD6E5BA5930}" authorId="{C91F3CF6-149F-06F0-0291-18BB8A7035EF}" status="resolved" created="2026-05-31T09:22:57.363" complete="100000">
     <pc:sldMkLst xmlns:pc="http://schemas.microsoft.com/office/powerpoint/2013/main/command">
       <pc:docMk/>
       <pc:sldMk cId="2296812319" sldId="258"/>
@@ -375,27 +376,6 @@
         <a:r>
           <a:rPr lang="fr-CH"/>
           <a:t>Not sure what we want to say about the context!?</a:t>
-        </a:r>
-      </a:p>
-    </p188:txBody>
-  </p188:cm>
-</p188:cmLst>
-</file>
-
-<file path=ppt/comments/modernComment_10A_7D0C916.xml><?xml version="1.0" encoding="utf-8"?>
-<p188:cmLst xmlns:a="http://schemas.openxmlformats.org/drawingml/2006/main" xmlns:r="http://schemas.openxmlformats.org/officeDocument/2006/relationships" xmlns:p188="http://schemas.microsoft.com/office/powerpoint/2018/8/main">
-  <p188:cm id="{2741BC7A-6D15-D840-B712-6623240A656C}" authorId="{DE3E4DB8-4E12-F18C-200B-095F2E882368}" created="2026-06-01T12:46:54.639">
-    <pc:sldMkLst xmlns:pc="http://schemas.microsoft.com/office/powerpoint/2013/main/command">
-      <pc:docMk/>
-      <pc:sldMk cId="131123478" sldId="266"/>
-    </pc:sldMkLst>
-    <p188:txBody>
-      <a:bodyPr/>
-      <a:lstStyle/>
-      <a:p>
-        <a:r>
-          <a:rPr lang="en-001"/>
-          <a:t>soit on garde slide 2-3, soit juste slide 4</a:t>
         </a:r>
       </a:p>
     </p188:txBody>
@@ -1835,10 +1815,10 @@
   <dgm:cxnLst>
     <dgm:cxn modelId="{1ECB5511-AEE1-4BBA-B91B-D516215FE7D6}" srcId="{72C74514-7E59-43DD-81F2-44D5759C1824}" destId="{A40C8A38-7AAB-4A1C-B39A-DBED66B60A11}" srcOrd="5" destOrd="0" parTransId="{E5A7B580-C647-42C1-94EA-2AD96FD66632}" sibTransId="{30FCC906-E4C0-41AD-A5E6-88449F9BC921}"/>
     <dgm:cxn modelId="{B039D11B-C065-4DB7-9C3F-9C1F1452DDD1}" srcId="{72C74514-7E59-43DD-81F2-44D5759C1824}" destId="{12C6A796-E05E-4109-83A5-CA6732F07DCC}" srcOrd="0" destOrd="0" parTransId="{A758E241-A4DE-442B-90CA-0C9C5F9396E7}" sibTransId="{13D06279-7FFC-4E91-975B-C5F631451C36}"/>
+    <dgm:cxn modelId="{E5A2F242-6C0F-452E-9348-36AAA3844FB6}" type="presOf" srcId="{59572103-8EAB-4A50-AB21-192D24EA143A}" destId="{97E83598-7549-4D53-BBE1-0E6AEBC831C5}" srcOrd="0" destOrd="0" presId="urn:microsoft.com/office/officeart/2005/8/layout/vList2"/>
+    <dgm:cxn modelId="{95C9FA46-ECF1-4D14-8548-452CDC7D2175}" srcId="{72C74514-7E59-43DD-81F2-44D5759C1824}" destId="{41B0F318-681F-480C-ACBE-4C24B27636D0}" srcOrd="1" destOrd="0" parTransId="{0D659330-D588-4B5E-A5C6-35292AF1DC95}" sibTransId="{207A3D5B-4122-4CE8-B141-67DFCED8E158}"/>
     <dgm:cxn modelId="{F3787362-5CE9-48E2-99AE-A2FA95701E60}" srcId="{72C74514-7E59-43DD-81F2-44D5759C1824}" destId="{7157FA5E-C5A4-4039-9621-57EE8A1E448F}" srcOrd="2" destOrd="0" parTransId="{874C9894-94B6-42CC-B8D0-400E1D54079E}" sibTransId="{1E46E158-B5CD-4F93-9646-8137B2D6040A}"/>
-    <dgm:cxn modelId="{E5A2F242-6C0F-452E-9348-36AAA3844FB6}" type="presOf" srcId="{59572103-8EAB-4A50-AB21-192D24EA143A}" destId="{97E83598-7549-4D53-BBE1-0E6AEBC831C5}" srcOrd="0" destOrd="0" presId="urn:microsoft.com/office/officeart/2005/8/layout/vList2"/>
     <dgm:cxn modelId="{CE80F663-3A3B-4D24-B6E6-0C77D0FB47EC}" type="presOf" srcId="{A40C8A38-7AAB-4A1C-B39A-DBED66B60A11}" destId="{4600E2F4-4816-42E1-84E1-9746CD5EE6E1}" srcOrd="0" destOrd="0" presId="urn:microsoft.com/office/officeart/2005/8/layout/vList2"/>
-    <dgm:cxn modelId="{95C9FA46-ECF1-4D14-8548-452CDC7D2175}" srcId="{72C74514-7E59-43DD-81F2-44D5759C1824}" destId="{41B0F318-681F-480C-ACBE-4C24B27636D0}" srcOrd="1" destOrd="0" parTransId="{0D659330-D588-4B5E-A5C6-35292AF1DC95}" sibTransId="{207A3D5B-4122-4CE8-B141-67DFCED8E158}"/>
     <dgm:cxn modelId="{E714E36B-BA29-4B1C-A5A6-DC818E048543}" type="presOf" srcId="{72C74514-7E59-43DD-81F2-44D5759C1824}" destId="{2DC07872-A69E-402A-96DD-C56028D57122}" srcOrd="0" destOrd="0" presId="urn:microsoft.com/office/officeart/2005/8/layout/vList2"/>
     <dgm:cxn modelId="{676CAB7E-46F8-4503-A039-13561D369C78}" type="presOf" srcId="{12C6A796-E05E-4109-83A5-CA6732F07DCC}" destId="{246B3F6D-7E01-4EA4-AD38-6D0AD826CB2B}" srcOrd="0" destOrd="0" presId="urn:microsoft.com/office/officeart/2005/8/layout/vList2"/>
     <dgm:cxn modelId="{98AFD998-7383-4817-8CB5-6E3ABE5884B8}" type="presOf" srcId="{7157FA5E-C5A4-4039-9621-57EE8A1E448F}" destId="{0226B3E9-17B7-42EC-B955-CDCAEF4B2B67}" srcOrd="0" destOrd="0" presId="urn:microsoft.com/office/officeart/2005/8/layout/vList2"/>
@@ -4074,7 +4054,7 @@
           <a:p>
             <a:fld id="{6DABDDBB-0918-4A38-BFF3-738DBDB6A6F7}" type="datetimeFigureOut">
               <a:rPr lang="fr-CH" smtClean="0"/>
-              <a:t>02.06.2026</a:t>
+              <a:t>03.06.26</a:t>
             </a:fld>
             <a:endParaRPr lang="fr-CH"/>
           </a:p>
@@ -4274,7 +4254,7 @@
           <a:p>
             <a:fld id="{6DABDDBB-0918-4A38-BFF3-738DBDB6A6F7}" type="datetimeFigureOut">
               <a:rPr lang="fr-CH" smtClean="0"/>
-              <a:t>02.06.2026</a:t>
+              <a:t>03.06.26</a:t>
             </a:fld>
             <a:endParaRPr lang="fr-CH"/>
           </a:p>
@@ -4484,7 +4464,7 @@
           <a:p>
             <a:fld id="{6DABDDBB-0918-4A38-BFF3-738DBDB6A6F7}" type="datetimeFigureOut">
               <a:rPr lang="fr-CH" smtClean="0"/>
-              <a:t>02.06.2026</a:t>
+              <a:t>03.06.26</a:t>
             </a:fld>
             <a:endParaRPr lang="fr-CH"/>
           </a:p>
@@ -4684,7 +4664,7 @@
           <a:p>
             <a:fld id="{6DABDDBB-0918-4A38-BFF3-738DBDB6A6F7}" type="datetimeFigureOut">
               <a:rPr lang="fr-CH" smtClean="0"/>
-              <a:t>02.06.2026</a:t>
+              <a:t>03.06.26</a:t>
             </a:fld>
             <a:endParaRPr lang="fr-CH"/>
           </a:p>
@@ -4960,7 +4940,7 @@
           <a:p>
             <a:fld id="{6DABDDBB-0918-4A38-BFF3-738DBDB6A6F7}" type="datetimeFigureOut">
               <a:rPr lang="fr-CH" smtClean="0"/>
-              <a:t>02.06.2026</a:t>
+              <a:t>03.06.26</a:t>
             </a:fld>
             <a:endParaRPr lang="fr-CH"/>
           </a:p>
@@ -5228,7 +5208,7 @@
           <a:p>
             <a:fld id="{6DABDDBB-0918-4A38-BFF3-738DBDB6A6F7}" type="datetimeFigureOut">
               <a:rPr lang="fr-CH" smtClean="0"/>
-              <a:t>02.06.2026</a:t>
+              <a:t>03.06.26</a:t>
             </a:fld>
             <a:endParaRPr lang="fr-CH"/>
           </a:p>
@@ -5643,7 +5623,7 @@
           <a:p>
             <a:fld id="{6DABDDBB-0918-4A38-BFF3-738DBDB6A6F7}" type="datetimeFigureOut">
               <a:rPr lang="fr-CH" smtClean="0"/>
-              <a:t>02.06.2026</a:t>
+              <a:t>03.06.26</a:t>
             </a:fld>
             <a:endParaRPr lang="fr-CH"/>
           </a:p>
@@ -5785,7 +5765,7 @@
           <a:p>
             <a:fld id="{6DABDDBB-0918-4A38-BFF3-738DBDB6A6F7}" type="datetimeFigureOut">
               <a:rPr lang="fr-CH" smtClean="0"/>
-              <a:t>02.06.2026</a:t>
+              <a:t>03.06.26</a:t>
             </a:fld>
             <a:endParaRPr lang="fr-CH"/>
           </a:p>
@@ -5898,7 +5878,7 @@
           <a:p>
             <a:fld id="{6DABDDBB-0918-4A38-BFF3-738DBDB6A6F7}" type="datetimeFigureOut">
               <a:rPr lang="fr-CH" smtClean="0"/>
-              <a:t>02.06.2026</a:t>
+              <a:t>03.06.26</a:t>
             </a:fld>
             <a:endParaRPr lang="fr-CH"/>
           </a:p>
@@ -6211,7 +6191,7 @@
           <a:p>
             <a:fld id="{6DABDDBB-0918-4A38-BFF3-738DBDB6A6F7}" type="datetimeFigureOut">
               <a:rPr lang="fr-CH" smtClean="0"/>
-              <a:t>02.06.2026</a:t>
+              <a:t>03.06.26</a:t>
             </a:fld>
             <a:endParaRPr lang="fr-CH"/>
           </a:p>
@@ -6500,7 +6480,7 @@
           <a:p>
             <a:fld id="{6DABDDBB-0918-4A38-BFF3-738DBDB6A6F7}" type="datetimeFigureOut">
               <a:rPr lang="fr-CH" smtClean="0"/>
-              <a:t>02.06.2026</a:t>
+              <a:t>03.06.26</a:t>
             </a:fld>
             <a:endParaRPr lang="fr-CH"/>
           </a:p>
@@ -6743,7 +6723,7 @@
           <a:p>
             <a:fld id="{6DABDDBB-0918-4A38-BFF3-738DBDB6A6F7}" type="datetimeFigureOut">
               <a:rPr lang="fr-CH" smtClean="0"/>
-              <a:t>02.06.2026</a:t>
+              <a:t>03.06.26</a:t>
             </a:fld>
             <a:endParaRPr lang="fr-CH"/>
           </a:p>
@@ -7890,6 +7870,339 @@
 </file>
 
 <file path=ppt/slides/slide10.xml><?xml version="1.0" encoding="utf-8"?>
+<p:sld xmlns:a="http://schemas.openxmlformats.org/drawingml/2006/main" xmlns:r="http://schemas.openxmlformats.org/officeDocument/2006/relationships" xmlns:p="http://schemas.openxmlformats.org/presentationml/2006/main">
+  <p:cSld>
+    <p:spTree>
+      <p:nvGrpSpPr>
+        <p:cNvPr id="1" name=""/>
+        <p:cNvGrpSpPr/>
+        <p:nvPr/>
+      </p:nvGrpSpPr>
+      <p:grpSpPr>
+        <a:xfrm>
+          <a:off x="0" y="0"/>
+          <a:ext cx="0" cy="0"/>
+          <a:chOff x="0" y="0"/>
+          <a:chExt cx="0" cy="0"/>
+        </a:xfrm>
+      </p:grpSpPr>
+      <p:sp>
+        <p:nvSpPr>
+          <p:cNvPr id="2" name="Title 1">
+            <a:extLst>
+              <a:ext uri="{FF2B5EF4-FFF2-40B4-BE49-F238E27FC236}">
+                <a16:creationId xmlns:a16="http://schemas.microsoft.com/office/drawing/2014/main" id="{229A9C5E-D113-F410-1D52-CFEDFDD68709}"/>
+              </a:ext>
+            </a:extLst>
+          </p:cNvPr>
+          <p:cNvSpPr>
+            <a:spLocks noGrp="1"/>
+          </p:cNvSpPr>
+          <p:nvPr>
+            <p:ph type="title"/>
+          </p:nvPr>
+        </p:nvSpPr>
+        <p:spPr/>
+        <p:txBody>
+          <a:bodyPr/>
+          <a:lstStyle/>
+          <a:p>
+            <a:r>
+              <a:rPr lang="fr-CH" dirty="0"/>
+              <a:t>Challenges and Plan B</a:t>
+            </a:r>
+          </a:p>
+        </p:txBody>
+      </p:sp>
+      <p:sp>
+        <p:nvSpPr>
+          <p:cNvPr id="3" name="Content Placeholder 2">
+            <a:extLst>
+              <a:ext uri="{FF2B5EF4-FFF2-40B4-BE49-F238E27FC236}">
+                <a16:creationId xmlns:a16="http://schemas.microsoft.com/office/drawing/2014/main" id="{DBAEEBF5-C3D9-FA63-1735-E9C2F5C42998}"/>
+              </a:ext>
+            </a:extLst>
+          </p:cNvPr>
+          <p:cNvSpPr>
+            <a:spLocks noGrp="1"/>
+          </p:cNvSpPr>
+          <p:nvPr>
+            <p:ph idx="1"/>
+          </p:nvPr>
+        </p:nvSpPr>
+        <p:spPr/>
+        <p:txBody>
+          <a:bodyPr/>
+          <a:lstStyle/>
+          <a:p>
+            <a:r>
+              <a:rPr lang="fr-CH" dirty="0" err="1"/>
+              <a:t>Integration</a:t>
+            </a:r>
+            <a:r>
+              <a:rPr lang="fr-CH" dirty="0"/>
+              <a:t> of the ZVV time plan </a:t>
+            </a:r>
+          </a:p>
+          <a:p>
+            <a:pPr lvl="1"/>
+            <a:r>
+              <a:rPr lang="fr-CH" dirty="0"/>
+              <a:t>Heavy data set </a:t>
+            </a:r>
+          </a:p>
+          <a:p>
+            <a:pPr lvl="1"/>
+            <a:r>
+              <a:rPr lang="fr-CH" dirty="0"/>
+              <a:t>Add </a:t>
+            </a:r>
+            <a:r>
+              <a:rPr lang="fr-CH" dirty="0" err="1"/>
+              <a:t>unnecessary</a:t>
+            </a:r>
+            <a:r>
+              <a:rPr lang="fr-CH" dirty="0"/>
+              <a:t> </a:t>
+            </a:r>
+            <a:r>
+              <a:rPr lang="fr-CH" dirty="0" err="1"/>
+              <a:t>complexity</a:t>
+            </a:r>
+            <a:endParaRPr lang="fr-CH" dirty="0">
+              <a:sym typeface="Wingdings" panose="05000000000000000000" pitchFamily="2" charset="2"/>
+            </a:endParaRPr>
+          </a:p>
+          <a:p>
+            <a:pPr>
+              <a:buFont typeface="Wingdings" panose="05000000000000000000" pitchFamily="2" charset="2"/>
+              <a:buChar char="à"/>
+            </a:pPr>
+            <a:r>
+              <a:rPr lang="fr-CH" dirty="0">
+                <a:sym typeface="Wingdings" panose="05000000000000000000" pitchFamily="2" charset="2"/>
+              </a:rPr>
+              <a:t> Use an estimation of the speed of the public transports (bus and tram) of 15 km/h </a:t>
+            </a:r>
+          </a:p>
+          <a:p>
+            <a:r>
+              <a:rPr lang="fr-CH" dirty="0">
+                <a:sym typeface="Wingdings" panose="05000000000000000000" pitchFamily="2" charset="2"/>
+              </a:rPr>
+              <a:t>Anonymisation of the data</a:t>
+            </a:r>
+          </a:p>
+          <a:p>
+            <a:pPr lvl="1"/>
+            <a:r>
+              <a:rPr lang="fr-CH" dirty="0">
+                <a:sym typeface="Wingdings" panose="05000000000000000000" pitchFamily="2" charset="2"/>
+              </a:rPr>
+              <a:t>With </a:t>
+            </a:r>
+            <a:r>
+              <a:rPr lang="fr-CH" dirty="0" err="1">
+                <a:sym typeface="Wingdings" panose="05000000000000000000" pitchFamily="2" charset="2"/>
+              </a:rPr>
+              <a:t>only</a:t>
+            </a:r>
+            <a:r>
+              <a:rPr lang="fr-CH" dirty="0">
+                <a:sym typeface="Wingdings" panose="05000000000000000000" pitchFamily="2" charset="2"/>
+              </a:rPr>
+              <a:t> a few </a:t>
+            </a:r>
+            <a:r>
+              <a:rPr lang="fr-CH" dirty="0" err="1">
+                <a:sym typeface="Wingdings" panose="05000000000000000000" pitchFamily="2" charset="2"/>
+              </a:rPr>
+              <a:t>visited</a:t>
+            </a:r>
+            <a:r>
+              <a:rPr lang="fr-CH" dirty="0">
+                <a:sym typeface="Wingdings" panose="05000000000000000000" pitchFamily="2" charset="2"/>
+              </a:rPr>
+              <a:t> points, </a:t>
+            </a:r>
+            <a:r>
+              <a:rPr lang="fr-CH" dirty="0" err="1">
+                <a:sym typeface="Wingdings" panose="05000000000000000000" pitchFamily="2" charset="2"/>
+              </a:rPr>
+              <a:t>it</a:t>
+            </a:r>
+            <a:r>
+              <a:rPr lang="fr-CH" dirty="0">
+                <a:sym typeface="Wingdings" panose="05000000000000000000" pitchFamily="2" charset="2"/>
+              </a:rPr>
+              <a:t> </a:t>
+            </a:r>
+            <a:r>
+              <a:rPr lang="fr-CH" dirty="0" err="1">
+                <a:sym typeface="Wingdings" panose="05000000000000000000" pitchFamily="2" charset="2"/>
+              </a:rPr>
+              <a:t>is</a:t>
+            </a:r>
+            <a:r>
+              <a:rPr lang="fr-CH" dirty="0">
+                <a:sym typeface="Wingdings" panose="05000000000000000000" pitchFamily="2" charset="2"/>
+              </a:rPr>
+              <a:t> possible to </a:t>
+            </a:r>
+            <a:r>
+              <a:rPr lang="fr-CH" dirty="0" err="1">
+                <a:sym typeface="Wingdings" panose="05000000000000000000" pitchFamily="2" charset="2"/>
+              </a:rPr>
+              <a:t>find</a:t>
+            </a:r>
+            <a:r>
+              <a:rPr lang="fr-CH" dirty="0">
+                <a:sym typeface="Wingdings" panose="05000000000000000000" pitchFamily="2" charset="2"/>
+              </a:rPr>
+              <a:t> out </a:t>
+            </a:r>
+            <a:r>
+              <a:rPr lang="fr-CH" dirty="0" err="1">
+                <a:sym typeface="Wingdings" panose="05000000000000000000" pitchFamily="2" charset="2"/>
+              </a:rPr>
+              <a:t>where</a:t>
+            </a:r>
+            <a:r>
+              <a:rPr lang="fr-CH" dirty="0">
+                <a:sym typeface="Wingdings" panose="05000000000000000000" pitchFamily="2" charset="2"/>
+              </a:rPr>
+              <a:t> the </a:t>
+            </a:r>
+            <a:r>
+              <a:rPr lang="fr-CH" dirty="0" err="1">
+                <a:sym typeface="Wingdings" panose="05000000000000000000" pitchFamily="2" charset="2"/>
+              </a:rPr>
+              <a:t>person</a:t>
+            </a:r>
+            <a:r>
+              <a:rPr lang="fr-CH" dirty="0">
+                <a:sym typeface="Wingdings" panose="05000000000000000000" pitchFamily="2" charset="2"/>
+              </a:rPr>
+              <a:t> </a:t>
+            </a:r>
+            <a:r>
+              <a:rPr lang="fr-CH" dirty="0" err="1">
+                <a:sym typeface="Wingdings" panose="05000000000000000000" pitchFamily="2" charset="2"/>
+              </a:rPr>
+              <a:t>lives</a:t>
+            </a:r>
+            <a:r>
+              <a:rPr lang="fr-CH" dirty="0">
+                <a:sym typeface="Wingdings" panose="05000000000000000000" pitchFamily="2" charset="2"/>
+              </a:rPr>
+              <a:t>/</a:t>
+            </a:r>
+            <a:r>
+              <a:rPr lang="fr-CH" dirty="0" err="1">
+                <a:sym typeface="Wingdings" panose="05000000000000000000" pitchFamily="2" charset="2"/>
+              </a:rPr>
+              <a:t>who</a:t>
+            </a:r>
+            <a:r>
+              <a:rPr lang="fr-CH" dirty="0">
+                <a:sym typeface="Wingdings" panose="05000000000000000000" pitchFamily="2" charset="2"/>
+              </a:rPr>
+              <a:t> </a:t>
+            </a:r>
+            <a:r>
+              <a:rPr lang="fr-CH" dirty="0" err="1">
+                <a:sym typeface="Wingdings" panose="05000000000000000000" pitchFamily="2" charset="2"/>
+              </a:rPr>
+              <a:t>they</a:t>
+            </a:r>
+            <a:r>
+              <a:rPr lang="fr-CH" dirty="0">
+                <a:sym typeface="Wingdings" panose="05000000000000000000" pitchFamily="2" charset="2"/>
+              </a:rPr>
+              <a:t> are</a:t>
+            </a:r>
+          </a:p>
+          <a:p>
+            <a:pPr marL="0" indent="0">
+              <a:buNone/>
+            </a:pPr>
+            <a:r>
+              <a:rPr lang="fr-CH" dirty="0">
+                <a:sym typeface="Wingdings" panose="05000000000000000000" pitchFamily="2" charset="2"/>
+              </a:rPr>
+              <a:t> Change the </a:t>
+            </a:r>
+            <a:r>
+              <a:rPr lang="fr-CH" dirty="0" err="1">
+                <a:sym typeface="Wingdings" panose="05000000000000000000" pitchFamily="2" charset="2"/>
+              </a:rPr>
+              <a:t>adress</a:t>
+            </a:r>
+            <a:r>
+              <a:rPr lang="fr-CH" dirty="0">
+                <a:sym typeface="Wingdings" panose="05000000000000000000" pitchFamily="2" charset="2"/>
+              </a:rPr>
+              <a:t> by a few blocks/</a:t>
+            </a:r>
+            <a:r>
+              <a:rPr lang="fr-CH" dirty="0" err="1">
+                <a:sym typeface="Wingdings" panose="05000000000000000000" pitchFamily="2" charset="2"/>
+              </a:rPr>
+              <a:t>streets</a:t>
+            </a:r>
+            <a:r>
+              <a:rPr lang="fr-CH" dirty="0">
+                <a:sym typeface="Wingdings" panose="05000000000000000000" pitchFamily="2" charset="2"/>
+              </a:rPr>
+              <a:t> (but </a:t>
+            </a:r>
+            <a:r>
+              <a:rPr lang="fr-CH" dirty="0" err="1">
+                <a:sym typeface="Wingdings" panose="05000000000000000000" pitchFamily="2" charset="2"/>
+              </a:rPr>
+              <a:t>still</a:t>
+            </a:r>
+            <a:r>
+              <a:rPr lang="fr-CH" dirty="0">
+                <a:sym typeface="Wingdings" panose="05000000000000000000" pitchFamily="2" charset="2"/>
+              </a:rPr>
+              <a:t> not </a:t>
+            </a:r>
+            <a:r>
+              <a:rPr lang="fr-CH" dirty="0" err="1">
+                <a:sym typeface="Wingdings" panose="05000000000000000000" pitchFamily="2" charset="2"/>
+              </a:rPr>
+              <a:t>ideal</a:t>
+            </a:r>
+            <a:r>
+              <a:rPr lang="fr-CH" dirty="0">
+                <a:sym typeface="Wingdings" panose="05000000000000000000" pitchFamily="2" charset="2"/>
+              </a:rPr>
+              <a:t>) </a:t>
+            </a:r>
+          </a:p>
+          <a:p>
+            <a:pPr marL="0" indent="0">
+              <a:buNone/>
+            </a:pPr>
+            <a:endParaRPr lang="fr-CH" dirty="0"/>
+          </a:p>
+        </p:txBody>
+      </p:sp>
+    </p:spTree>
+    <p:extLst>
+      <p:ext uri="{BB962C8B-B14F-4D97-AF65-F5344CB8AC3E}">
+        <p14:creationId xmlns:p14="http://schemas.microsoft.com/office/powerpoint/2010/main" val="2357305363"/>
+      </p:ext>
+    </p:extLst>
+  </p:cSld>
+  <p:clrMapOvr>
+    <a:masterClrMapping/>
+  </p:clrMapOvr>
+</p:sld>
+</file>
+
+<file path=ppt/slides/slide11.xml><?xml version="1.0" encoding="utf-8"?>
 <p:sld xmlns:a="http://schemas.openxmlformats.org/drawingml/2006/main" xmlns:r="http://schemas.openxmlformats.org/officeDocument/2006/relationships" xmlns:p="http://schemas.openxmlformats.org/presentationml/2006/main" show="0">
   <p:cSld>
     <p:spTree>
@@ -9452,7 +9765,7 @@
 </p:sld>
 </file>
 
-<file path=ppt/slides/slide11.xml><?xml version="1.0" encoding="utf-8"?>
+<file path=ppt/slides/slide12.xml><?xml version="1.0" encoding="utf-8"?>
 <p:sld xmlns:a="http://schemas.openxmlformats.org/drawingml/2006/main" xmlns:r="http://schemas.openxmlformats.org/officeDocument/2006/relationships" xmlns:p="http://schemas.openxmlformats.org/presentationml/2006/main" show="0">
   <p:cSld>
     <p:bg>
@@ -10897,7 +11210,7 @@
 </p:sld>
 </file>
 
-<file path=ppt/slides/slide12.xml><?xml version="1.0" encoding="utf-8"?>
+<file path=ppt/slides/slide13.xml><?xml version="1.0" encoding="utf-8"?>
 <p:sld xmlns:a="http://schemas.openxmlformats.org/drawingml/2006/main" xmlns:r="http://schemas.openxmlformats.org/officeDocument/2006/relationships" xmlns:p="http://schemas.openxmlformats.org/presentationml/2006/main" show="0">
   <p:cSld>
     <p:spTree>
@@ -11748,7 +12061,7 @@
             </a:r>
             <a:r>
               <a:rPr lang="en-001" sz="1400" dirty="0">
-                <a:hlinkClick r:id="rId3"/>
+                <a:hlinkClick r:id="rId2"/>
               </a:rPr>
               <a:t>https://doi.org/10.3390/smartcities4010006</a:t>
             </a:r>
@@ -13243,11 +13556,6 @@
   <p:clrMapOvr>
     <a:masterClrMapping/>
   </p:clrMapOvr>
-  <p:extLst>
-    <p:ext uri="{6950BFC3-D8DA-4A85-94F7-54DA5524770B}">
-      <p188:commentRel xmlns:p188="http://schemas.microsoft.com/office/powerpoint/2018/8/main" r:id="rId2"/>
-    </p:ext>
-  </p:extLst>
 </p:sld>
 </file>
 
@@ -13924,6 +14232,1799 @@
 </file>
 
 <file path=ppt/slides/slide5.xml><?xml version="1.0" encoding="utf-8"?>
+<p:sld xmlns:a="http://schemas.openxmlformats.org/drawingml/2006/main" xmlns:r="http://schemas.openxmlformats.org/officeDocument/2006/relationships" xmlns:p="http://schemas.openxmlformats.org/presentationml/2006/main">
+  <p:cSld>
+    <p:spTree>
+      <p:nvGrpSpPr>
+        <p:cNvPr id="1" name=""/>
+        <p:cNvGrpSpPr/>
+        <p:nvPr/>
+      </p:nvGrpSpPr>
+      <p:grpSpPr>
+        <a:xfrm>
+          <a:off x="0" y="0"/>
+          <a:ext cx="0" cy="0"/>
+          <a:chOff x="0" y="0"/>
+          <a:chExt cx="0" cy="0"/>
+        </a:xfrm>
+      </p:grpSpPr>
+      <p:sp>
+        <p:nvSpPr>
+          <p:cNvPr id="2" name="Title 1">
+            <a:extLst>
+              <a:ext uri="{FF2B5EF4-FFF2-40B4-BE49-F238E27FC236}">
+                <a16:creationId xmlns:a16="http://schemas.microsoft.com/office/drawing/2014/main" id="{64BD1728-17B5-5125-78E7-BBA36653063B}"/>
+              </a:ext>
+            </a:extLst>
+          </p:cNvPr>
+          <p:cNvSpPr>
+            <a:spLocks noGrp="1"/>
+          </p:cNvSpPr>
+          <p:nvPr>
+            <p:ph type="title"/>
+          </p:nvPr>
+        </p:nvSpPr>
+        <p:spPr/>
+        <p:txBody>
+          <a:bodyPr/>
+          <a:lstStyle/>
+          <a:p>
+            <a:endParaRPr lang="fr-CH"/>
+          </a:p>
+        </p:txBody>
+      </p:sp>
+      <p:sp>
+        <p:nvSpPr>
+          <p:cNvPr id="7" name="Content Placeholder 6">
+            <a:extLst>
+              <a:ext uri="{FF2B5EF4-FFF2-40B4-BE49-F238E27FC236}">
+                <a16:creationId xmlns:a16="http://schemas.microsoft.com/office/drawing/2014/main" id="{DCCFBE5E-470E-8AAF-8F23-FDD7777AA6DC}"/>
+              </a:ext>
+            </a:extLst>
+          </p:cNvPr>
+          <p:cNvSpPr>
+            <a:spLocks noGrp="1"/>
+          </p:cNvSpPr>
+          <p:nvPr>
+            <p:ph idx="1"/>
+          </p:nvPr>
+        </p:nvSpPr>
+        <p:spPr/>
+        <p:txBody>
+          <a:bodyPr/>
+          <a:lstStyle/>
+          <a:p>
+            <a:endParaRPr lang="fr-CH"/>
+          </a:p>
+        </p:txBody>
+      </p:sp>
+      <p:pic>
+        <p:nvPicPr>
+          <p:cNvPr id="9" name="Picture 8" descr="The image displays a map overlaying various locations in ZURICH, indicating distances for different modes of transportation (walking, cycling, and public transport) from a central point.&#10;&#10;AI-generated content may be incorrect.">
+            <a:extLst>
+              <a:ext uri="{FF2B5EF4-FFF2-40B4-BE49-F238E27FC236}">
+                <a16:creationId xmlns:a16="http://schemas.microsoft.com/office/drawing/2014/main" id="{2CAB6DAC-E835-6F5C-E5D4-339A9645C7BE}"/>
+              </a:ext>
+            </a:extLst>
+          </p:cNvPr>
+          <p:cNvPicPr>
+            <a:picLocks noChangeAspect="1"/>
+          </p:cNvPicPr>
+          <p:nvPr/>
+        </p:nvPicPr>
+        <p:blipFill>
+          <a:blip r:embed="rId2"/>
+          <a:stretch>
+            <a:fillRect/>
+          </a:stretch>
+        </p:blipFill>
+        <p:spPr>
+          <a:xfrm>
+            <a:off x="198120" y="0"/>
+            <a:ext cx="11795760" cy="6858000"/>
+          </a:xfrm>
+          <a:prstGeom prst="rect">
+            <a:avLst/>
+          </a:prstGeom>
+        </p:spPr>
+      </p:pic>
+    </p:spTree>
+    <p:extLst>
+      <p:ext uri="{BB962C8B-B14F-4D97-AF65-F5344CB8AC3E}">
+        <p14:creationId xmlns:p14="http://schemas.microsoft.com/office/powerpoint/2010/main" val="2036194352"/>
+      </p:ext>
+    </p:extLst>
+  </p:cSld>
+  <p:clrMapOvr>
+    <a:masterClrMapping/>
+  </p:clrMapOvr>
+</p:sld>
+</file>
+
+<file path=ppt/slides/slide6.xml><?xml version="1.0" encoding="utf-8"?>
+<p:sld xmlns:a="http://schemas.openxmlformats.org/drawingml/2006/main" xmlns:r="http://schemas.openxmlformats.org/officeDocument/2006/relationships" xmlns:p="http://schemas.openxmlformats.org/presentationml/2006/main" show="0">
+  <p:cSld>
+    <p:spTree>
+      <p:nvGrpSpPr>
+        <p:cNvPr id="1" name=""/>
+        <p:cNvGrpSpPr/>
+        <p:nvPr/>
+      </p:nvGrpSpPr>
+      <p:grpSpPr>
+        <a:xfrm>
+          <a:off x="0" y="0"/>
+          <a:ext cx="0" cy="0"/>
+          <a:chOff x="0" y="0"/>
+          <a:chExt cx="0" cy="0"/>
+        </a:xfrm>
+      </p:grpSpPr>
+      <p:sp>
+        <p:nvSpPr>
+          <p:cNvPr id="2" name="Title 1">
+            <a:extLst>
+              <a:ext uri="{FF2B5EF4-FFF2-40B4-BE49-F238E27FC236}">
+                <a16:creationId xmlns:a16="http://schemas.microsoft.com/office/drawing/2014/main" id="{5916B571-64C7-D483-4259-2AA222E5A467}"/>
+              </a:ext>
+            </a:extLst>
+          </p:cNvPr>
+          <p:cNvSpPr>
+            <a:spLocks noGrp="1"/>
+          </p:cNvSpPr>
+          <p:nvPr>
+            <p:ph type="title"/>
+          </p:nvPr>
+        </p:nvSpPr>
+        <p:spPr/>
+        <p:txBody>
+          <a:bodyPr/>
+          <a:lstStyle/>
+          <a:p>
+            <a:r>
+              <a:rPr lang="en-001" dirty="0"/>
+              <a:t>Activity Classification</a:t>
+            </a:r>
+          </a:p>
+        </p:txBody>
+      </p:sp>
+      <p:graphicFrame>
+        <p:nvGraphicFramePr>
+          <p:cNvPr id="4" name="Content Placeholder 3">
+            <a:extLst>
+              <a:ext uri="{FF2B5EF4-FFF2-40B4-BE49-F238E27FC236}">
+                <a16:creationId xmlns:a16="http://schemas.microsoft.com/office/drawing/2014/main" id="{97F66C15-9C7D-B904-24D4-E5E36631297A}"/>
+              </a:ext>
+            </a:extLst>
+          </p:cNvPr>
+          <p:cNvGraphicFramePr>
+            <a:graphicFrameLocks noGrp="1"/>
+          </p:cNvGraphicFramePr>
+          <p:nvPr>
+            <p:ph idx="1"/>
+          </p:nvPr>
+        </p:nvGraphicFramePr>
+        <p:xfrm>
+          <a:off x="838200" y="1957229"/>
+          <a:ext cx="10515600" cy="4088130"/>
+        </p:xfrm>
+        <a:graphic>
+          <a:graphicData uri="http://schemas.openxmlformats.org/drawingml/2006/table">
+            <a:tbl>
+              <a:tblPr/>
+              <a:tblGrid>
+                <a:gridCol w="5257800">
+                  <a:extLst>
+                    <a:ext uri="{9D8B030D-6E8A-4147-A177-3AD203B41FA5}">
+                      <a16:colId xmlns:a16="http://schemas.microsoft.com/office/drawing/2014/main" val="1217507250"/>
+                    </a:ext>
+                  </a:extLst>
+                </a:gridCol>
+                <a:gridCol w="5257800">
+                  <a:extLst>
+                    <a:ext uri="{9D8B030D-6E8A-4147-A177-3AD203B41FA5}">
+                      <a16:colId xmlns:a16="http://schemas.microsoft.com/office/drawing/2014/main" val="107188581"/>
+                    </a:ext>
+                  </a:extLst>
+                </a:gridCol>
+              </a:tblGrid>
+              <a:tr h="0">
+                <a:tc>
+                  <a:txBody>
+                    <a:bodyPr/>
+                    <a:lstStyle/>
+                    <a:p>
+                      <a:pPr algn="ctr">
+                        <a:buNone/>
+                      </a:pPr>
+                      <a:r>
+                        <a:rPr lang="en-001" b="1">
+                          <a:effectLst/>
+                          <a:latin typeface=".AppleSystemUIFont"/>
+                        </a:rPr>
+                        <a:t>category</a:t>
+                      </a:r>
+                      <a:endParaRPr lang="en-001">
+                        <a:effectLst/>
+                        <a:latin typeface=".AppleSystemUIFont"/>
+                      </a:endParaRPr>
+                    </a:p>
+                  </a:txBody>
+                  <a:tcPr marL="47625" marR="47625" marT="9525" marB="9525">
+                    <a:lnL w="9525" cap="flat" cmpd="sng" algn="ctr">
+                      <a:solidFill>
+                        <a:srgbClr val="9A9A9A"/>
+                      </a:solidFill>
+                      <a:prstDash val="solid"/>
+                      <a:round/>
+                      <a:headEnd type="none" w="med" len="med"/>
+                      <a:tailEnd type="none" w="med" len="med"/>
+                    </a:lnL>
+                    <a:lnR w="9525" cap="flat" cmpd="sng" algn="ctr">
+                      <a:solidFill>
+                        <a:srgbClr val="9A9A9A"/>
+                      </a:solidFill>
+                      <a:prstDash val="solid"/>
+                      <a:round/>
+                      <a:headEnd type="none" w="med" len="med"/>
+                      <a:tailEnd type="none" w="med" len="med"/>
+                    </a:lnR>
+                    <a:lnT w="9525" cap="flat" cmpd="sng" algn="ctr">
+                      <a:solidFill>
+                        <a:srgbClr val="9A9A9A"/>
+                      </a:solidFill>
+                      <a:prstDash val="solid"/>
+                      <a:round/>
+                      <a:headEnd type="none" w="med" len="med"/>
+                      <a:tailEnd type="none" w="med" len="med"/>
+                    </a:lnT>
+                    <a:lnB w="9525" cap="flat" cmpd="sng" algn="ctr">
+                      <a:solidFill>
+                        <a:srgbClr val="9A9A9A"/>
+                      </a:solidFill>
+                      <a:prstDash val="solid"/>
+                      <a:round/>
+                      <a:headEnd type="none" w="med" len="med"/>
+                      <a:tailEnd type="none" w="med" len="med"/>
+                    </a:lnB>
+                    <a:noFill/>
+                  </a:tcPr>
+                </a:tc>
+                <a:tc>
+                  <a:txBody>
+                    <a:bodyPr/>
+                    <a:lstStyle/>
+                    <a:p>
+                      <a:pPr algn="ctr">
+                        <a:buNone/>
+                      </a:pPr>
+                      <a:r>
+                        <a:rPr lang="en-001" b="1">
+                          <a:effectLst/>
+                          <a:latin typeface=".AppleSystemUIFont"/>
+                        </a:rPr>
+                        <a:t>includes</a:t>
+                      </a:r>
+                      <a:endParaRPr lang="en-001">
+                        <a:effectLst/>
+                        <a:latin typeface=".AppleSystemUIFont"/>
+                      </a:endParaRPr>
+                    </a:p>
+                  </a:txBody>
+                  <a:tcPr marL="47625" marR="47625" marT="9525" marB="9525">
+                    <a:lnL w="9525" cap="flat" cmpd="sng" algn="ctr">
+                      <a:solidFill>
+                        <a:srgbClr val="9A9A9A"/>
+                      </a:solidFill>
+                      <a:prstDash val="solid"/>
+                      <a:round/>
+                      <a:headEnd type="none" w="med" len="med"/>
+                      <a:tailEnd type="none" w="med" len="med"/>
+                    </a:lnL>
+                    <a:lnR w="9525" cap="flat" cmpd="sng" algn="ctr">
+                      <a:solidFill>
+                        <a:srgbClr val="9A9A9A"/>
+                      </a:solidFill>
+                      <a:prstDash val="solid"/>
+                      <a:round/>
+                      <a:headEnd type="none" w="med" len="med"/>
+                      <a:tailEnd type="none" w="med" len="med"/>
+                    </a:lnR>
+                    <a:lnT w="9525" cap="flat" cmpd="sng" algn="ctr">
+                      <a:solidFill>
+                        <a:srgbClr val="9A9A9A"/>
+                      </a:solidFill>
+                      <a:prstDash val="solid"/>
+                      <a:round/>
+                      <a:headEnd type="none" w="med" len="med"/>
+                      <a:tailEnd type="none" w="med" len="med"/>
+                    </a:lnT>
+                    <a:lnB w="9525" cap="flat" cmpd="sng" algn="ctr">
+                      <a:solidFill>
+                        <a:srgbClr val="9A9A9A"/>
+                      </a:solidFill>
+                      <a:prstDash val="solid"/>
+                      <a:round/>
+                      <a:headEnd type="none" w="med" len="med"/>
+                      <a:tailEnd type="none" w="med" len="med"/>
+                    </a:lnB>
+                    <a:noFill/>
+                  </a:tcPr>
+                </a:tc>
+                <a:extLst>
+                  <a:ext uri="{0D108BD9-81ED-4DB2-BD59-A6C34878D82A}">
+                    <a16:rowId xmlns:a16="http://schemas.microsoft.com/office/drawing/2014/main" val="1860596659"/>
+                  </a:ext>
+                </a:extLst>
+              </a:tr>
+              <a:tr h="0">
+                <a:tc>
+                  <a:txBody>
+                    <a:bodyPr/>
+                    <a:lstStyle/>
+                    <a:p>
+                      <a:pPr>
+                        <a:buNone/>
+                      </a:pPr>
+                      <a:r>
+                        <a:rPr lang="en-001">
+                          <a:effectLst/>
+                          <a:latin typeface=".AppleSystemUIFont"/>
+                        </a:rPr>
+                        <a:t>transport</a:t>
+                      </a:r>
+                    </a:p>
+                  </a:txBody>
+                  <a:tcPr marL="47625" marR="47625" marT="9525" marB="9525">
+                    <a:lnL w="9525" cap="flat" cmpd="sng" algn="ctr">
+                      <a:solidFill>
+                        <a:srgbClr val="9A9A9A"/>
+                      </a:solidFill>
+                      <a:prstDash val="solid"/>
+                      <a:round/>
+                      <a:headEnd type="none" w="med" len="med"/>
+                      <a:tailEnd type="none" w="med" len="med"/>
+                    </a:lnL>
+                    <a:lnR w="9525" cap="flat" cmpd="sng" algn="ctr">
+                      <a:solidFill>
+                        <a:srgbClr val="9A9A9A"/>
+                      </a:solidFill>
+                      <a:prstDash val="solid"/>
+                      <a:round/>
+                      <a:headEnd type="none" w="med" len="med"/>
+                      <a:tailEnd type="none" w="med" len="med"/>
+                    </a:lnR>
+                    <a:lnT w="9525" cap="flat" cmpd="sng" algn="ctr">
+                      <a:solidFill>
+                        <a:srgbClr val="9A9A9A"/>
+                      </a:solidFill>
+                      <a:prstDash val="solid"/>
+                      <a:round/>
+                      <a:headEnd type="none" w="med" len="med"/>
+                      <a:tailEnd type="none" w="med" len="med"/>
+                    </a:lnT>
+                    <a:lnB w="9525" cap="flat" cmpd="sng" algn="ctr">
+                      <a:solidFill>
+                        <a:srgbClr val="9A9A9A"/>
+                      </a:solidFill>
+                      <a:prstDash val="solid"/>
+                      <a:round/>
+                      <a:headEnd type="none" w="med" len="med"/>
+                      <a:tailEnd type="none" w="med" len="med"/>
+                    </a:lnB>
+                    <a:noFill/>
+                  </a:tcPr>
+                </a:tc>
+                <a:tc>
+                  <a:txBody>
+                    <a:bodyPr/>
+                    <a:lstStyle/>
+                    <a:p>
+                      <a:pPr>
+                        <a:buNone/>
+                      </a:pPr>
+                      <a:r>
+                        <a:rPr lang="en-001">
+                          <a:effectLst/>
+                          <a:latin typeface=".AppleSystemUIFont"/>
+                        </a:rPr>
+                        <a:t>train stations, tram stops, bus stops, airports </a:t>
+                      </a:r>
+                    </a:p>
+                  </a:txBody>
+                  <a:tcPr marL="47625" marR="47625" marT="9525" marB="9525">
+                    <a:lnL w="9525" cap="flat" cmpd="sng" algn="ctr">
+                      <a:solidFill>
+                        <a:srgbClr val="9A9A9A"/>
+                      </a:solidFill>
+                      <a:prstDash val="solid"/>
+                      <a:round/>
+                      <a:headEnd type="none" w="med" len="med"/>
+                      <a:tailEnd type="none" w="med" len="med"/>
+                    </a:lnL>
+                    <a:lnR w="9525" cap="flat" cmpd="sng" algn="ctr">
+                      <a:solidFill>
+                        <a:srgbClr val="9A9A9A"/>
+                      </a:solidFill>
+                      <a:prstDash val="solid"/>
+                      <a:round/>
+                      <a:headEnd type="none" w="med" len="med"/>
+                      <a:tailEnd type="none" w="med" len="med"/>
+                    </a:lnR>
+                    <a:lnT w="9525" cap="flat" cmpd="sng" algn="ctr">
+                      <a:solidFill>
+                        <a:srgbClr val="9A9A9A"/>
+                      </a:solidFill>
+                      <a:prstDash val="solid"/>
+                      <a:round/>
+                      <a:headEnd type="none" w="med" len="med"/>
+                      <a:tailEnd type="none" w="med" len="med"/>
+                    </a:lnT>
+                    <a:lnB w="9525" cap="flat" cmpd="sng" algn="ctr">
+                      <a:solidFill>
+                        <a:srgbClr val="9A9A9A"/>
+                      </a:solidFill>
+                      <a:prstDash val="solid"/>
+                      <a:round/>
+                      <a:headEnd type="none" w="med" len="med"/>
+                      <a:tailEnd type="none" w="med" len="med"/>
+                    </a:lnB>
+                    <a:noFill/>
+                  </a:tcPr>
+                </a:tc>
+                <a:extLst>
+                  <a:ext uri="{0D108BD9-81ED-4DB2-BD59-A6C34878D82A}">
+                    <a16:rowId xmlns:a16="http://schemas.microsoft.com/office/drawing/2014/main" val="1645749010"/>
+                  </a:ext>
+                </a:extLst>
+              </a:tr>
+              <a:tr h="0">
+                <a:tc>
+                  <a:txBody>
+                    <a:bodyPr/>
+                    <a:lstStyle/>
+                    <a:p>
+                      <a:pPr>
+                        <a:buNone/>
+                      </a:pPr>
+                      <a:r>
+                        <a:rPr lang="en-001">
+                          <a:effectLst/>
+                          <a:latin typeface=".AppleSystemUIFont"/>
+                        </a:rPr>
+                        <a:t>home</a:t>
+                      </a:r>
+                    </a:p>
+                  </a:txBody>
+                  <a:tcPr marL="47625" marR="47625" marT="9525" marB="9525">
+                    <a:lnL w="9525" cap="flat" cmpd="sng" algn="ctr">
+                      <a:solidFill>
+                        <a:srgbClr val="9A9A9A"/>
+                      </a:solidFill>
+                      <a:prstDash val="solid"/>
+                      <a:round/>
+                      <a:headEnd type="none" w="med" len="med"/>
+                      <a:tailEnd type="none" w="med" len="med"/>
+                    </a:lnL>
+                    <a:lnR w="9525" cap="flat" cmpd="sng" algn="ctr">
+                      <a:solidFill>
+                        <a:srgbClr val="9A9A9A"/>
+                      </a:solidFill>
+                      <a:prstDash val="solid"/>
+                      <a:round/>
+                      <a:headEnd type="none" w="med" len="med"/>
+                      <a:tailEnd type="none" w="med" len="med"/>
+                    </a:lnR>
+                    <a:lnT w="9525" cap="flat" cmpd="sng" algn="ctr">
+                      <a:solidFill>
+                        <a:srgbClr val="9A9A9A"/>
+                      </a:solidFill>
+                      <a:prstDash val="solid"/>
+                      <a:round/>
+                      <a:headEnd type="none" w="med" len="med"/>
+                      <a:tailEnd type="none" w="med" len="med"/>
+                    </a:lnT>
+                    <a:lnB w="9525" cap="flat" cmpd="sng" algn="ctr">
+                      <a:solidFill>
+                        <a:srgbClr val="9A9A9A"/>
+                      </a:solidFill>
+                      <a:prstDash val="solid"/>
+                      <a:round/>
+                      <a:headEnd type="none" w="med" len="med"/>
+                      <a:tailEnd type="none" w="med" len="med"/>
+                    </a:lnB>
+                    <a:noFill/>
+                  </a:tcPr>
+                </a:tc>
+                <a:tc>
+                  <a:txBody>
+                    <a:bodyPr/>
+                    <a:lstStyle/>
+                    <a:p>
+                      <a:pPr>
+                        <a:buNone/>
+                      </a:pPr>
+                      <a:r>
+                        <a:rPr lang="en-001">
+                          <a:effectLst/>
+                          <a:latin typeface=".AppleSystemUIFont"/>
+                        </a:rPr>
+                        <a:t>residence</a:t>
+                      </a:r>
+                    </a:p>
+                  </a:txBody>
+                  <a:tcPr marL="47625" marR="47625" marT="9525" marB="9525">
+                    <a:lnL w="9525" cap="flat" cmpd="sng" algn="ctr">
+                      <a:solidFill>
+                        <a:srgbClr val="9A9A9A"/>
+                      </a:solidFill>
+                      <a:prstDash val="solid"/>
+                      <a:round/>
+                      <a:headEnd type="none" w="med" len="med"/>
+                      <a:tailEnd type="none" w="med" len="med"/>
+                    </a:lnL>
+                    <a:lnR w="9525" cap="flat" cmpd="sng" algn="ctr">
+                      <a:solidFill>
+                        <a:srgbClr val="9A9A9A"/>
+                      </a:solidFill>
+                      <a:prstDash val="solid"/>
+                      <a:round/>
+                      <a:headEnd type="none" w="med" len="med"/>
+                      <a:tailEnd type="none" w="med" len="med"/>
+                    </a:lnR>
+                    <a:lnT w="9525" cap="flat" cmpd="sng" algn="ctr">
+                      <a:solidFill>
+                        <a:srgbClr val="9A9A9A"/>
+                      </a:solidFill>
+                      <a:prstDash val="solid"/>
+                      <a:round/>
+                      <a:headEnd type="none" w="med" len="med"/>
+                      <a:tailEnd type="none" w="med" len="med"/>
+                    </a:lnT>
+                    <a:lnB w="9525" cap="flat" cmpd="sng" algn="ctr">
+                      <a:solidFill>
+                        <a:srgbClr val="9A9A9A"/>
+                      </a:solidFill>
+                      <a:prstDash val="solid"/>
+                      <a:round/>
+                      <a:headEnd type="none" w="med" len="med"/>
+                      <a:tailEnd type="none" w="med" len="med"/>
+                    </a:lnB>
+                    <a:noFill/>
+                  </a:tcPr>
+                </a:tc>
+                <a:extLst>
+                  <a:ext uri="{0D108BD9-81ED-4DB2-BD59-A6C34878D82A}">
+                    <a16:rowId xmlns:a16="http://schemas.microsoft.com/office/drawing/2014/main" val="3835203348"/>
+                  </a:ext>
+                </a:extLst>
+              </a:tr>
+              <a:tr h="0">
+                <a:tc>
+                  <a:txBody>
+                    <a:bodyPr/>
+                    <a:lstStyle/>
+                    <a:p>
+                      <a:pPr>
+                        <a:buNone/>
+                      </a:pPr>
+                      <a:r>
+                        <a:rPr lang="en-001">
+                          <a:effectLst/>
+                          <a:latin typeface=".AppleSystemUIFont"/>
+                        </a:rPr>
+                        <a:t>education</a:t>
+                      </a:r>
+                    </a:p>
+                  </a:txBody>
+                  <a:tcPr marL="47625" marR="47625" marT="9525" marB="9525">
+                    <a:lnL w="9525" cap="flat" cmpd="sng" algn="ctr">
+                      <a:solidFill>
+                        <a:srgbClr val="9A9A9A"/>
+                      </a:solidFill>
+                      <a:prstDash val="solid"/>
+                      <a:round/>
+                      <a:headEnd type="none" w="med" len="med"/>
+                      <a:tailEnd type="none" w="med" len="med"/>
+                    </a:lnL>
+                    <a:lnR w="9525" cap="flat" cmpd="sng" algn="ctr">
+                      <a:solidFill>
+                        <a:srgbClr val="9A9A9A"/>
+                      </a:solidFill>
+                      <a:prstDash val="solid"/>
+                      <a:round/>
+                      <a:headEnd type="none" w="med" len="med"/>
+                      <a:tailEnd type="none" w="med" len="med"/>
+                    </a:lnR>
+                    <a:lnT w="9525" cap="flat" cmpd="sng" algn="ctr">
+                      <a:solidFill>
+                        <a:srgbClr val="9A9A9A"/>
+                      </a:solidFill>
+                      <a:prstDash val="solid"/>
+                      <a:round/>
+                      <a:headEnd type="none" w="med" len="med"/>
+                      <a:tailEnd type="none" w="med" len="med"/>
+                    </a:lnT>
+                    <a:lnB w="9525" cap="flat" cmpd="sng" algn="ctr">
+                      <a:solidFill>
+                        <a:srgbClr val="9A9A9A"/>
+                      </a:solidFill>
+                      <a:prstDash val="solid"/>
+                      <a:round/>
+                      <a:headEnd type="none" w="med" len="med"/>
+                      <a:tailEnd type="none" w="med" len="med"/>
+                    </a:lnB>
+                    <a:noFill/>
+                  </a:tcPr>
+                </a:tc>
+                <a:tc>
+                  <a:txBody>
+                    <a:bodyPr/>
+                    <a:lstStyle/>
+                    <a:p>
+                      <a:pPr>
+                        <a:buNone/>
+                      </a:pPr>
+                      <a:r>
+                        <a:rPr lang="en-001">
+                          <a:effectLst/>
+                          <a:latin typeface=".AppleSystemUIFont"/>
+                        </a:rPr>
+                        <a:t>university, school</a:t>
+                      </a:r>
+                    </a:p>
+                  </a:txBody>
+                  <a:tcPr marL="47625" marR="47625" marT="9525" marB="9525">
+                    <a:lnL w="9525" cap="flat" cmpd="sng" algn="ctr">
+                      <a:solidFill>
+                        <a:srgbClr val="9A9A9A"/>
+                      </a:solidFill>
+                      <a:prstDash val="solid"/>
+                      <a:round/>
+                      <a:headEnd type="none" w="med" len="med"/>
+                      <a:tailEnd type="none" w="med" len="med"/>
+                    </a:lnL>
+                    <a:lnR w="9525" cap="flat" cmpd="sng" algn="ctr">
+                      <a:solidFill>
+                        <a:srgbClr val="9A9A9A"/>
+                      </a:solidFill>
+                      <a:prstDash val="solid"/>
+                      <a:round/>
+                      <a:headEnd type="none" w="med" len="med"/>
+                      <a:tailEnd type="none" w="med" len="med"/>
+                    </a:lnR>
+                    <a:lnT w="9525" cap="flat" cmpd="sng" algn="ctr">
+                      <a:solidFill>
+                        <a:srgbClr val="9A9A9A"/>
+                      </a:solidFill>
+                      <a:prstDash val="solid"/>
+                      <a:round/>
+                      <a:headEnd type="none" w="med" len="med"/>
+                      <a:tailEnd type="none" w="med" len="med"/>
+                    </a:lnT>
+                    <a:lnB w="9525" cap="flat" cmpd="sng" algn="ctr">
+                      <a:solidFill>
+                        <a:srgbClr val="9A9A9A"/>
+                      </a:solidFill>
+                      <a:prstDash val="solid"/>
+                      <a:round/>
+                      <a:headEnd type="none" w="med" len="med"/>
+                      <a:tailEnd type="none" w="med" len="med"/>
+                    </a:lnB>
+                    <a:noFill/>
+                  </a:tcPr>
+                </a:tc>
+                <a:extLst>
+                  <a:ext uri="{0D108BD9-81ED-4DB2-BD59-A6C34878D82A}">
+                    <a16:rowId xmlns:a16="http://schemas.microsoft.com/office/drawing/2014/main" val="229801274"/>
+                  </a:ext>
+                </a:extLst>
+              </a:tr>
+              <a:tr h="0">
+                <a:tc>
+                  <a:txBody>
+                    <a:bodyPr/>
+                    <a:lstStyle/>
+                    <a:p>
+                      <a:pPr>
+                        <a:buNone/>
+                      </a:pPr>
+                      <a:r>
+                        <a:rPr lang="en-001">
+                          <a:effectLst/>
+                          <a:latin typeface=".AppleSystemUIFont"/>
+                        </a:rPr>
+                        <a:t>work</a:t>
+                      </a:r>
+                    </a:p>
+                  </a:txBody>
+                  <a:tcPr marL="47625" marR="47625" marT="9525" marB="9525">
+                    <a:lnL w="9525" cap="flat" cmpd="sng" algn="ctr">
+                      <a:solidFill>
+                        <a:srgbClr val="9A9A9A"/>
+                      </a:solidFill>
+                      <a:prstDash val="solid"/>
+                      <a:round/>
+                      <a:headEnd type="none" w="med" len="med"/>
+                      <a:tailEnd type="none" w="med" len="med"/>
+                    </a:lnL>
+                    <a:lnR w="9525" cap="flat" cmpd="sng" algn="ctr">
+                      <a:solidFill>
+                        <a:srgbClr val="9A9A9A"/>
+                      </a:solidFill>
+                      <a:prstDash val="solid"/>
+                      <a:round/>
+                      <a:headEnd type="none" w="med" len="med"/>
+                      <a:tailEnd type="none" w="med" len="med"/>
+                    </a:lnR>
+                    <a:lnT w="9525" cap="flat" cmpd="sng" algn="ctr">
+                      <a:solidFill>
+                        <a:srgbClr val="9A9A9A"/>
+                      </a:solidFill>
+                      <a:prstDash val="solid"/>
+                      <a:round/>
+                      <a:headEnd type="none" w="med" len="med"/>
+                      <a:tailEnd type="none" w="med" len="med"/>
+                    </a:lnT>
+                    <a:lnB w="9525" cap="flat" cmpd="sng" algn="ctr">
+                      <a:solidFill>
+                        <a:srgbClr val="9A9A9A"/>
+                      </a:solidFill>
+                      <a:prstDash val="solid"/>
+                      <a:round/>
+                      <a:headEnd type="none" w="med" len="med"/>
+                      <a:tailEnd type="none" w="med" len="med"/>
+                    </a:lnB>
+                    <a:noFill/>
+                  </a:tcPr>
+                </a:tc>
+                <a:tc>
+                  <a:txBody>
+                    <a:bodyPr/>
+                    <a:lstStyle/>
+                    <a:p>
+                      <a:pPr>
+                        <a:buNone/>
+                      </a:pPr>
+                      <a:r>
+                        <a:rPr lang="en-001">
+                          <a:effectLst/>
+                          <a:latin typeface=".AppleSystemUIFont"/>
+                        </a:rPr>
+                        <a:t>workplace</a:t>
+                      </a:r>
+                    </a:p>
+                  </a:txBody>
+                  <a:tcPr marL="47625" marR="47625" marT="9525" marB="9525">
+                    <a:lnL w="9525" cap="flat" cmpd="sng" algn="ctr">
+                      <a:solidFill>
+                        <a:srgbClr val="9A9A9A"/>
+                      </a:solidFill>
+                      <a:prstDash val="solid"/>
+                      <a:round/>
+                      <a:headEnd type="none" w="med" len="med"/>
+                      <a:tailEnd type="none" w="med" len="med"/>
+                    </a:lnL>
+                    <a:lnR w="9525" cap="flat" cmpd="sng" algn="ctr">
+                      <a:solidFill>
+                        <a:srgbClr val="9A9A9A"/>
+                      </a:solidFill>
+                      <a:prstDash val="solid"/>
+                      <a:round/>
+                      <a:headEnd type="none" w="med" len="med"/>
+                      <a:tailEnd type="none" w="med" len="med"/>
+                    </a:lnR>
+                    <a:lnT w="9525" cap="flat" cmpd="sng" algn="ctr">
+                      <a:solidFill>
+                        <a:srgbClr val="9A9A9A"/>
+                      </a:solidFill>
+                      <a:prstDash val="solid"/>
+                      <a:round/>
+                      <a:headEnd type="none" w="med" len="med"/>
+                      <a:tailEnd type="none" w="med" len="med"/>
+                    </a:lnT>
+                    <a:lnB w="9525" cap="flat" cmpd="sng" algn="ctr">
+                      <a:solidFill>
+                        <a:srgbClr val="9A9A9A"/>
+                      </a:solidFill>
+                      <a:prstDash val="solid"/>
+                      <a:round/>
+                      <a:headEnd type="none" w="med" len="med"/>
+                      <a:tailEnd type="none" w="med" len="med"/>
+                    </a:lnB>
+                    <a:noFill/>
+                  </a:tcPr>
+                </a:tc>
+                <a:extLst>
+                  <a:ext uri="{0D108BD9-81ED-4DB2-BD59-A6C34878D82A}">
+                    <a16:rowId xmlns:a16="http://schemas.microsoft.com/office/drawing/2014/main" val="2497260111"/>
+                  </a:ext>
+                </a:extLst>
+              </a:tr>
+              <a:tr h="0">
+                <a:tc>
+                  <a:txBody>
+                    <a:bodyPr/>
+                    <a:lstStyle/>
+                    <a:p>
+                      <a:pPr>
+                        <a:buNone/>
+                      </a:pPr>
+                      <a:r>
+                        <a:rPr lang="en-001">
+                          <a:effectLst/>
+                          <a:latin typeface=".AppleSystemUIFont"/>
+                        </a:rPr>
+                        <a:t>shopping</a:t>
+                      </a:r>
+                    </a:p>
+                  </a:txBody>
+                  <a:tcPr marL="47625" marR="47625" marT="9525" marB="9525">
+                    <a:lnL w="9525" cap="flat" cmpd="sng" algn="ctr">
+                      <a:solidFill>
+                        <a:srgbClr val="9A9A9A"/>
+                      </a:solidFill>
+                      <a:prstDash val="solid"/>
+                      <a:round/>
+                      <a:headEnd type="none" w="med" len="med"/>
+                      <a:tailEnd type="none" w="med" len="med"/>
+                    </a:lnL>
+                    <a:lnR w="9525" cap="flat" cmpd="sng" algn="ctr">
+                      <a:solidFill>
+                        <a:srgbClr val="9A9A9A"/>
+                      </a:solidFill>
+                      <a:prstDash val="solid"/>
+                      <a:round/>
+                      <a:headEnd type="none" w="med" len="med"/>
+                      <a:tailEnd type="none" w="med" len="med"/>
+                    </a:lnR>
+                    <a:lnT w="9525" cap="flat" cmpd="sng" algn="ctr">
+                      <a:solidFill>
+                        <a:srgbClr val="9A9A9A"/>
+                      </a:solidFill>
+                      <a:prstDash val="solid"/>
+                      <a:round/>
+                      <a:headEnd type="none" w="med" len="med"/>
+                      <a:tailEnd type="none" w="med" len="med"/>
+                    </a:lnT>
+                    <a:lnB w="9525" cap="flat" cmpd="sng" algn="ctr">
+                      <a:solidFill>
+                        <a:srgbClr val="9A9A9A"/>
+                      </a:solidFill>
+                      <a:prstDash val="solid"/>
+                      <a:round/>
+                      <a:headEnd type="none" w="med" len="med"/>
+                      <a:tailEnd type="none" w="med" len="med"/>
+                    </a:lnB>
+                    <a:noFill/>
+                  </a:tcPr>
+                </a:tc>
+                <a:tc>
+                  <a:txBody>
+                    <a:bodyPr/>
+                    <a:lstStyle/>
+                    <a:p>
+                      <a:pPr>
+                        <a:buNone/>
+                      </a:pPr>
+                      <a:r>
+                        <a:rPr lang="en-001">
+                          <a:effectLst/>
+                          <a:latin typeface=".AppleSystemUIFont"/>
+                        </a:rPr>
+                        <a:t>supermarket, stores, post office</a:t>
+                      </a:r>
+                    </a:p>
+                  </a:txBody>
+                  <a:tcPr marL="47625" marR="47625" marT="9525" marB="9525">
+                    <a:lnL w="9525" cap="flat" cmpd="sng" algn="ctr">
+                      <a:solidFill>
+                        <a:srgbClr val="9A9A9A"/>
+                      </a:solidFill>
+                      <a:prstDash val="solid"/>
+                      <a:round/>
+                      <a:headEnd type="none" w="med" len="med"/>
+                      <a:tailEnd type="none" w="med" len="med"/>
+                    </a:lnL>
+                    <a:lnR w="9525" cap="flat" cmpd="sng" algn="ctr">
+                      <a:solidFill>
+                        <a:srgbClr val="9A9A9A"/>
+                      </a:solidFill>
+                      <a:prstDash val="solid"/>
+                      <a:round/>
+                      <a:headEnd type="none" w="med" len="med"/>
+                      <a:tailEnd type="none" w="med" len="med"/>
+                    </a:lnR>
+                    <a:lnT w="9525" cap="flat" cmpd="sng" algn="ctr">
+                      <a:solidFill>
+                        <a:srgbClr val="9A9A9A"/>
+                      </a:solidFill>
+                      <a:prstDash val="solid"/>
+                      <a:round/>
+                      <a:headEnd type="none" w="med" len="med"/>
+                      <a:tailEnd type="none" w="med" len="med"/>
+                    </a:lnT>
+                    <a:lnB w="9525" cap="flat" cmpd="sng" algn="ctr">
+                      <a:solidFill>
+                        <a:srgbClr val="9A9A9A"/>
+                      </a:solidFill>
+                      <a:prstDash val="solid"/>
+                      <a:round/>
+                      <a:headEnd type="none" w="med" len="med"/>
+                      <a:tailEnd type="none" w="med" len="med"/>
+                    </a:lnB>
+                    <a:noFill/>
+                  </a:tcPr>
+                </a:tc>
+                <a:extLst>
+                  <a:ext uri="{0D108BD9-81ED-4DB2-BD59-A6C34878D82A}">
+                    <a16:rowId xmlns:a16="http://schemas.microsoft.com/office/drawing/2014/main" val="1082639432"/>
+                  </a:ext>
+                </a:extLst>
+              </a:tr>
+              <a:tr h="0">
+                <a:tc>
+                  <a:txBody>
+                    <a:bodyPr/>
+                    <a:lstStyle/>
+                    <a:p>
+                      <a:pPr>
+                        <a:buNone/>
+                      </a:pPr>
+                      <a:r>
+                        <a:rPr lang="en-001">
+                          <a:effectLst/>
+                          <a:latin typeface=".AppleSystemUIFont"/>
+                        </a:rPr>
+                        <a:t>leisure</a:t>
+                      </a:r>
+                    </a:p>
+                  </a:txBody>
+                  <a:tcPr marL="47625" marR="47625" marT="9525" marB="9525">
+                    <a:lnL w="9525" cap="flat" cmpd="sng" algn="ctr">
+                      <a:solidFill>
+                        <a:srgbClr val="9A9A9A"/>
+                      </a:solidFill>
+                      <a:prstDash val="solid"/>
+                      <a:round/>
+                      <a:headEnd type="none" w="med" len="med"/>
+                      <a:tailEnd type="none" w="med" len="med"/>
+                    </a:lnL>
+                    <a:lnR w="9525" cap="flat" cmpd="sng" algn="ctr">
+                      <a:solidFill>
+                        <a:srgbClr val="9A9A9A"/>
+                      </a:solidFill>
+                      <a:prstDash val="solid"/>
+                      <a:round/>
+                      <a:headEnd type="none" w="med" len="med"/>
+                      <a:tailEnd type="none" w="med" len="med"/>
+                    </a:lnR>
+                    <a:lnT w="9525" cap="flat" cmpd="sng" algn="ctr">
+                      <a:solidFill>
+                        <a:srgbClr val="9A9A9A"/>
+                      </a:solidFill>
+                      <a:prstDash val="solid"/>
+                      <a:round/>
+                      <a:headEnd type="none" w="med" len="med"/>
+                      <a:tailEnd type="none" w="med" len="med"/>
+                    </a:lnT>
+                    <a:lnB w="9525" cap="flat" cmpd="sng" algn="ctr">
+                      <a:solidFill>
+                        <a:srgbClr val="9A9A9A"/>
+                      </a:solidFill>
+                      <a:prstDash val="solid"/>
+                      <a:round/>
+                      <a:headEnd type="none" w="med" len="med"/>
+                      <a:tailEnd type="none" w="med" len="med"/>
+                    </a:lnB>
+                    <a:noFill/>
+                  </a:tcPr>
+                </a:tc>
+                <a:tc>
+                  <a:txBody>
+                    <a:bodyPr/>
+                    <a:lstStyle/>
+                    <a:p>
+                      <a:pPr>
+                        <a:buNone/>
+                      </a:pPr>
+                      <a:r>
+                        <a:rPr lang="en-001">
+                          <a:effectLst/>
+                          <a:latin typeface=".AppleSystemUIFont"/>
+                        </a:rPr>
+                        <a:t>restaurants, bars, cinema, culture</a:t>
+                      </a:r>
+                    </a:p>
+                  </a:txBody>
+                  <a:tcPr marL="47625" marR="47625" marT="9525" marB="9525">
+                    <a:lnL w="9525" cap="flat" cmpd="sng" algn="ctr">
+                      <a:solidFill>
+                        <a:srgbClr val="9A9A9A"/>
+                      </a:solidFill>
+                      <a:prstDash val="solid"/>
+                      <a:round/>
+                      <a:headEnd type="none" w="med" len="med"/>
+                      <a:tailEnd type="none" w="med" len="med"/>
+                    </a:lnL>
+                    <a:lnR w="9525" cap="flat" cmpd="sng" algn="ctr">
+                      <a:solidFill>
+                        <a:srgbClr val="9A9A9A"/>
+                      </a:solidFill>
+                      <a:prstDash val="solid"/>
+                      <a:round/>
+                      <a:headEnd type="none" w="med" len="med"/>
+                      <a:tailEnd type="none" w="med" len="med"/>
+                    </a:lnR>
+                    <a:lnT w="9525" cap="flat" cmpd="sng" algn="ctr">
+                      <a:solidFill>
+                        <a:srgbClr val="9A9A9A"/>
+                      </a:solidFill>
+                      <a:prstDash val="solid"/>
+                      <a:round/>
+                      <a:headEnd type="none" w="med" len="med"/>
+                      <a:tailEnd type="none" w="med" len="med"/>
+                    </a:lnT>
+                    <a:lnB w="9525" cap="flat" cmpd="sng" algn="ctr">
+                      <a:solidFill>
+                        <a:srgbClr val="9A9A9A"/>
+                      </a:solidFill>
+                      <a:prstDash val="solid"/>
+                      <a:round/>
+                      <a:headEnd type="none" w="med" len="med"/>
+                      <a:tailEnd type="none" w="med" len="med"/>
+                    </a:lnB>
+                    <a:noFill/>
+                  </a:tcPr>
+                </a:tc>
+                <a:extLst>
+                  <a:ext uri="{0D108BD9-81ED-4DB2-BD59-A6C34878D82A}">
+                    <a16:rowId xmlns:a16="http://schemas.microsoft.com/office/drawing/2014/main" val="2800928364"/>
+                  </a:ext>
+                </a:extLst>
+              </a:tr>
+              <a:tr h="0">
+                <a:tc>
+                  <a:txBody>
+                    <a:bodyPr/>
+                    <a:lstStyle/>
+                    <a:p>
+                      <a:pPr>
+                        <a:buNone/>
+                      </a:pPr>
+                      <a:r>
+                        <a:rPr lang="en-001">
+                          <a:effectLst/>
+                          <a:latin typeface=".AppleSystemUIFont"/>
+                        </a:rPr>
+                        <a:t>sport</a:t>
+                      </a:r>
+                    </a:p>
+                  </a:txBody>
+                  <a:tcPr marL="47625" marR="47625" marT="9525" marB="9525">
+                    <a:lnL w="9525" cap="flat" cmpd="sng" algn="ctr">
+                      <a:solidFill>
+                        <a:srgbClr val="9A9A9A"/>
+                      </a:solidFill>
+                      <a:prstDash val="solid"/>
+                      <a:round/>
+                      <a:headEnd type="none" w="med" len="med"/>
+                      <a:tailEnd type="none" w="med" len="med"/>
+                    </a:lnL>
+                    <a:lnR w="9525" cap="flat" cmpd="sng" algn="ctr">
+                      <a:solidFill>
+                        <a:srgbClr val="9A9A9A"/>
+                      </a:solidFill>
+                      <a:prstDash val="solid"/>
+                      <a:round/>
+                      <a:headEnd type="none" w="med" len="med"/>
+                      <a:tailEnd type="none" w="med" len="med"/>
+                    </a:lnR>
+                    <a:lnT w="9525" cap="flat" cmpd="sng" algn="ctr">
+                      <a:solidFill>
+                        <a:srgbClr val="9A9A9A"/>
+                      </a:solidFill>
+                      <a:prstDash val="solid"/>
+                      <a:round/>
+                      <a:headEnd type="none" w="med" len="med"/>
+                      <a:tailEnd type="none" w="med" len="med"/>
+                    </a:lnT>
+                    <a:lnB w="9525" cap="flat" cmpd="sng" algn="ctr">
+                      <a:solidFill>
+                        <a:srgbClr val="9A9A9A"/>
+                      </a:solidFill>
+                      <a:prstDash val="solid"/>
+                      <a:round/>
+                      <a:headEnd type="none" w="med" len="med"/>
+                      <a:tailEnd type="none" w="med" len="med"/>
+                    </a:lnB>
+                    <a:noFill/>
+                  </a:tcPr>
+                </a:tc>
+                <a:tc>
+                  <a:txBody>
+                    <a:bodyPr/>
+                    <a:lstStyle/>
+                    <a:p>
+                      <a:pPr>
+                        <a:buNone/>
+                      </a:pPr>
+                      <a:r>
+                        <a:rPr lang="en-001">
+                          <a:effectLst/>
+                          <a:latin typeface=".AppleSystemUIFont"/>
+                        </a:rPr>
+                        <a:t>gym, climbing, swimming</a:t>
+                      </a:r>
+                    </a:p>
+                  </a:txBody>
+                  <a:tcPr marL="47625" marR="47625" marT="9525" marB="9525">
+                    <a:lnL w="9525" cap="flat" cmpd="sng" algn="ctr">
+                      <a:solidFill>
+                        <a:srgbClr val="9A9A9A"/>
+                      </a:solidFill>
+                      <a:prstDash val="solid"/>
+                      <a:round/>
+                      <a:headEnd type="none" w="med" len="med"/>
+                      <a:tailEnd type="none" w="med" len="med"/>
+                    </a:lnL>
+                    <a:lnR w="9525" cap="flat" cmpd="sng" algn="ctr">
+                      <a:solidFill>
+                        <a:srgbClr val="9A9A9A"/>
+                      </a:solidFill>
+                      <a:prstDash val="solid"/>
+                      <a:round/>
+                      <a:headEnd type="none" w="med" len="med"/>
+                      <a:tailEnd type="none" w="med" len="med"/>
+                    </a:lnR>
+                    <a:lnT w="9525" cap="flat" cmpd="sng" algn="ctr">
+                      <a:solidFill>
+                        <a:srgbClr val="9A9A9A"/>
+                      </a:solidFill>
+                      <a:prstDash val="solid"/>
+                      <a:round/>
+                      <a:headEnd type="none" w="med" len="med"/>
+                      <a:tailEnd type="none" w="med" len="med"/>
+                    </a:lnT>
+                    <a:lnB w="9525" cap="flat" cmpd="sng" algn="ctr">
+                      <a:solidFill>
+                        <a:srgbClr val="9A9A9A"/>
+                      </a:solidFill>
+                      <a:prstDash val="solid"/>
+                      <a:round/>
+                      <a:headEnd type="none" w="med" len="med"/>
+                      <a:tailEnd type="none" w="med" len="med"/>
+                    </a:lnB>
+                    <a:noFill/>
+                  </a:tcPr>
+                </a:tc>
+                <a:extLst>
+                  <a:ext uri="{0D108BD9-81ED-4DB2-BD59-A6C34878D82A}">
+                    <a16:rowId xmlns:a16="http://schemas.microsoft.com/office/drawing/2014/main" val="3587844506"/>
+                  </a:ext>
+                </a:extLst>
+              </a:tr>
+              <a:tr h="0">
+                <a:tc>
+                  <a:txBody>
+                    <a:bodyPr/>
+                    <a:lstStyle/>
+                    <a:p>
+                      <a:pPr>
+                        <a:buNone/>
+                      </a:pPr>
+                      <a:r>
+                        <a:rPr lang="en-001">
+                          <a:effectLst/>
+                          <a:latin typeface=".AppleSystemUIFont"/>
+                        </a:rPr>
+                        <a:t>nature</a:t>
+                      </a:r>
+                    </a:p>
+                  </a:txBody>
+                  <a:tcPr marL="47625" marR="47625" marT="9525" marB="9525">
+                    <a:lnL w="9525" cap="flat" cmpd="sng" algn="ctr">
+                      <a:solidFill>
+                        <a:srgbClr val="9A9A9A"/>
+                      </a:solidFill>
+                      <a:prstDash val="solid"/>
+                      <a:round/>
+                      <a:headEnd type="none" w="med" len="med"/>
+                      <a:tailEnd type="none" w="med" len="med"/>
+                    </a:lnL>
+                    <a:lnR w="9525" cap="flat" cmpd="sng" algn="ctr">
+                      <a:solidFill>
+                        <a:srgbClr val="9A9A9A"/>
+                      </a:solidFill>
+                      <a:prstDash val="solid"/>
+                      <a:round/>
+                      <a:headEnd type="none" w="med" len="med"/>
+                      <a:tailEnd type="none" w="med" len="med"/>
+                    </a:lnR>
+                    <a:lnT w="9525" cap="flat" cmpd="sng" algn="ctr">
+                      <a:solidFill>
+                        <a:srgbClr val="9A9A9A"/>
+                      </a:solidFill>
+                      <a:prstDash val="solid"/>
+                      <a:round/>
+                      <a:headEnd type="none" w="med" len="med"/>
+                      <a:tailEnd type="none" w="med" len="med"/>
+                    </a:lnT>
+                    <a:lnB w="9525" cap="flat" cmpd="sng" algn="ctr">
+                      <a:solidFill>
+                        <a:srgbClr val="9A9A9A"/>
+                      </a:solidFill>
+                      <a:prstDash val="solid"/>
+                      <a:round/>
+                      <a:headEnd type="none" w="med" len="med"/>
+                      <a:tailEnd type="none" w="med" len="med"/>
+                    </a:lnB>
+                    <a:noFill/>
+                  </a:tcPr>
+                </a:tc>
+                <a:tc>
+                  <a:txBody>
+                    <a:bodyPr/>
+                    <a:lstStyle/>
+                    <a:p>
+                      <a:pPr>
+                        <a:buNone/>
+                      </a:pPr>
+                      <a:r>
+                        <a:rPr lang="en-001">
+                          <a:effectLst/>
+                          <a:latin typeface=".AppleSystemUIFont"/>
+                        </a:rPr>
+                        <a:t>hikes, parks, mountains</a:t>
+                      </a:r>
+                    </a:p>
+                  </a:txBody>
+                  <a:tcPr marL="47625" marR="47625" marT="9525" marB="9525">
+                    <a:lnL w="9525" cap="flat" cmpd="sng" algn="ctr">
+                      <a:solidFill>
+                        <a:srgbClr val="9A9A9A"/>
+                      </a:solidFill>
+                      <a:prstDash val="solid"/>
+                      <a:round/>
+                      <a:headEnd type="none" w="med" len="med"/>
+                      <a:tailEnd type="none" w="med" len="med"/>
+                    </a:lnL>
+                    <a:lnR w="9525" cap="flat" cmpd="sng" algn="ctr">
+                      <a:solidFill>
+                        <a:srgbClr val="9A9A9A"/>
+                      </a:solidFill>
+                      <a:prstDash val="solid"/>
+                      <a:round/>
+                      <a:headEnd type="none" w="med" len="med"/>
+                      <a:tailEnd type="none" w="med" len="med"/>
+                    </a:lnR>
+                    <a:lnT w="9525" cap="flat" cmpd="sng" algn="ctr">
+                      <a:solidFill>
+                        <a:srgbClr val="9A9A9A"/>
+                      </a:solidFill>
+                      <a:prstDash val="solid"/>
+                      <a:round/>
+                      <a:headEnd type="none" w="med" len="med"/>
+                      <a:tailEnd type="none" w="med" len="med"/>
+                    </a:lnT>
+                    <a:lnB w="9525" cap="flat" cmpd="sng" algn="ctr">
+                      <a:solidFill>
+                        <a:srgbClr val="9A9A9A"/>
+                      </a:solidFill>
+                      <a:prstDash val="solid"/>
+                      <a:round/>
+                      <a:headEnd type="none" w="med" len="med"/>
+                      <a:tailEnd type="none" w="med" len="med"/>
+                    </a:lnB>
+                    <a:noFill/>
+                  </a:tcPr>
+                </a:tc>
+                <a:extLst>
+                  <a:ext uri="{0D108BD9-81ED-4DB2-BD59-A6C34878D82A}">
+                    <a16:rowId xmlns:a16="http://schemas.microsoft.com/office/drawing/2014/main" val="2162029881"/>
+                  </a:ext>
+                </a:extLst>
+              </a:tr>
+              <a:tr h="0">
+                <a:tc>
+                  <a:txBody>
+                    <a:bodyPr/>
+                    <a:lstStyle/>
+                    <a:p>
+                      <a:pPr>
+                        <a:buNone/>
+                      </a:pPr>
+                      <a:r>
+                        <a:rPr lang="en-001">
+                          <a:effectLst/>
+                          <a:latin typeface=".AppleSystemUIFont"/>
+                        </a:rPr>
+                        <a:t>social</a:t>
+                      </a:r>
+                    </a:p>
+                  </a:txBody>
+                  <a:tcPr marL="47625" marR="47625" marT="9525" marB="9525">
+                    <a:lnL w="9525" cap="flat" cmpd="sng" algn="ctr">
+                      <a:solidFill>
+                        <a:srgbClr val="9A9A9A"/>
+                      </a:solidFill>
+                      <a:prstDash val="solid"/>
+                      <a:round/>
+                      <a:headEnd type="none" w="med" len="med"/>
+                      <a:tailEnd type="none" w="med" len="med"/>
+                    </a:lnL>
+                    <a:lnR w="9525" cap="flat" cmpd="sng" algn="ctr">
+                      <a:solidFill>
+                        <a:srgbClr val="9A9A9A"/>
+                      </a:solidFill>
+                      <a:prstDash val="solid"/>
+                      <a:round/>
+                      <a:headEnd type="none" w="med" len="med"/>
+                      <a:tailEnd type="none" w="med" len="med"/>
+                    </a:lnR>
+                    <a:lnT w="9525" cap="flat" cmpd="sng" algn="ctr">
+                      <a:solidFill>
+                        <a:srgbClr val="9A9A9A"/>
+                      </a:solidFill>
+                      <a:prstDash val="solid"/>
+                      <a:round/>
+                      <a:headEnd type="none" w="med" len="med"/>
+                      <a:tailEnd type="none" w="med" len="med"/>
+                    </a:lnT>
+                    <a:lnB w="9525" cap="flat" cmpd="sng" algn="ctr">
+                      <a:solidFill>
+                        <a:srgbClr val="9A9A9A"/>
+                      </a:solidFill>
+                      <a:prstDash val="solid"/>
+                      <a:round/>
+                      <a:headEnd type="none" w="med" len="med"/>
+                      <a:tailEnd type="none" w="med" len="med"/>
+                    </a:lnB>
+                    <a:noFill/>
+                  </a:tcPr>
+                </a:tc>
+                <a:tc>
+                  <a:txBody>
+                    <a:bodyPr/>
+                    <a:lstStyle/>
+                    <a:p>
+                      <a:pPr>
+                        <a:buNone/>
+                      </a:pPr>
+                      <a:r>
+                        <a:rPr lang="en-001">
+                          <a:effectLst/>
+                          <a:latin typeface=".AppleSystemUIFont"/>
+                        </a:rPr>
+                        <a:t>friends/family</a:t>
+                      </a:r>
+                    </a:p>
+                  </a:txBody>
+                  <a:tcPr marL="47625" marR="47625" marT="9525" marB="9525">
+                    <a:lnL w="9525" cap="flat" cmpd="sng" algn="ctr">
+                      <a:solidFill>
+                        <a:srgbClr val="9A9A9A"/>
+                      </a:solidFill>
+                      <a:prstDash val="solid"/>
+                      <a:round/>
+                      <a:headEnd type="none" w="med" len="med"/>
+                      <a:tailEnd type="none" w="med" len="med"/>
+                    </a:lnL>
+                    <a:lnR w="9525" cap="flat" cmpd="sng" algn="ctr">
+                      <a:solidFill>
+                        <a:srgbClr val="9A9A9A"/>
+                      </a:solidFill>
+                      <a:prstDash val="solid"/>
+                      <a:round/>
+                      <a:headEnd type="none" w="med" len="med"/>
+                      <a:tailEnd type="none" w="med" len="med"/>
+                    </a:lnR>
+                    <a:lnT w="9525" cap="flat" cmpd="sng" algn="ctr">
+                      <a:solidFill>
+                        <a:srgbClr val="9A9A9A"/>
+                      </a:solidFill>
+                      <a:prstDash val="solid"/>
+                      <a:round/>
+                      <a:headEnd type="none" w="med" len="med"/>
+                      <a:tailEnd type="none" w="med" len="med"/>
+                    </a:lnT>
+                    <a:lnB w="9525" cap="flat" cmpd="sng" algn="ctr">
+                      <a:solidFill>
+                        <a:srgbClr val="9A9A9A"/>
+                      </a:solidFill>
+                      <a:prstDash val="solid"/>
+                      <a:round/>
+                      <a:headEnd type="none" w="med" len="med"/>
+                      <a:tailEnd type="none" w="med" len="med"/>
+                    </a:lnB>
+                    <a:noFill/>
+                  </a:tcPr>
+                </a:tc>
+                <a:extLst>
+                  <a:ext uri="{0D108BD9-81ED-4DB2-BD59-A6C34878D82A}">
+                    <a16:rowId xmlns:a16="http://schemas.microsoft.com/office/drawing/2014/main" val="167449726"/>
+                  </a:ext>
+                </a:extLst>
+              </a:tr>
+              <a:tr h="0">
+                <a:tc>
+                  <a:txBody>
+                    <a:bodyPr/>
+                    <a:lstStyle/>
+                    <a:p>
+                      <a:pPr>
+                        <a:buNone/>
+                      </a:pPr>
+                      <a:r>
+                        <a:rPr lang="en-001">
+                          <a:effectLst/>
+                          <a:latin typeface=".AppleSystemUIFont"/>
+                        </a:rPr>
+                        <a:t>movement</a:t>
+                      </a:r>
+                    </a:p>
+                  </a:txBody>
+                  <a:tcPr marL="47625" marR="47625" marT="9525" marB="9525">
+                    <a:lnL w="9525" cap="flat" cmpd="sng" algn="ctr">
+                      <a:solidFill>
+                        <a:srgbClr val="9A9A9A"/>
+                      </a:solidFill>
+                      <a:prstDash val="solid"/>
+                      <a:round/>
+                      <a:headEnd type="none" w="med" len="med"/>
+                      <a:tailEnd type="none" w="med" len="med"/>
+                    </a:lnL>
+                    <a:lnR w="9525" cap="flat" cmpd="sng" algn="ctr">
+                      <a:solidFill>
+                        <a:srgbClr val="9A9A9A"/>
+                      </a:solidFill>
+                      <a:prstDash val="solid"/>
+                      <a:round/>
+                      <a:headEnd type="none" w="med" len="med"/>
+                      <a:tailEnd type="none" w="med" len="med"/>
+                    </a:lnR>
+                    <a:lnT w="9525" cap="flat" cmpd="sng" algn="ctr">
+                      <a:solidFill>
+                        <a:srgbClr val="9A9A9A"/>
+                      </a:solidFill>
+                      <a:prstDash val="solid"/>
+                      <a:round/>
+                      <a:headEnd type="none" w="med" len="med"/>
+                      <a:tailEnd type="none" w="med" len="med"/>
+                    </a:lnT>
+                    <a:lnB w="9525" cap="flat" cmpd="sng" algn="ctr">
+                      <a:solidFill>
+                        <a:srgbClr val="9A9A9A"/>
+                      </a:solidFill>
+                      <a:prstDash val="solid"/>
+                      <a:round/>
+                      <a:headEnd type="none" w="med" len="med"/>
+                      <a:tailEnd type="none" w="med" len="med"/>
+                    </a:lnB>
+                    <a:noFill/>
+                  </a:tcPr>
+                </a:tc>
+                <a:tc>
+                  <a:txBody>
+                    <a:bodyPr/>
+                    <a:lstStyle/>
+                    <a:p>
+                      <a:pPr>
+                        <a:buNone/>
+                      </a:pPr>
+                      <a:r>
+                        <a:rPr lang="en-001">
+                          <a:effectLst/>
+                          <a:latin typeface=".AppleSystemUIFont"/>
+                        </a:rPr>
+                        <a:t>No POS ( reclassify to movement as record type instead of visit)</a:t>
+                      </a:r>
+                    </a:p>
+                  </a:txBody>
+                  <a:tcPr marL="47625" marR="47625" marT="9525" marB="9525">
+                    <a:lnL w="9525" cap="flat" cmpd="sng" algn="ctr">
+                      <a:solidFill>
+                        <a:srgbClr val="9A9A9A"/>
+                      </a:solidFill>
+                      <a:prstDash val="solid"/>
+                      <a:round/>
+                      <a:headEnd type="none" w="med" len="med"/>
+                      <a:tailEnd type="none" w="med" len="med"/>
+                    </a:lnL>
+                    <a:lnR w="9525" cap="flat" cmpd="sng" algn="ctr">
+                      <a:solidFill>
+                        <a:srgbClr val="9A9A9A"/>
+                      </a:solidFill>
+                      <a:prstDash val="solid"/>
+                      <a:round/>
+                      <a:headEnd type="none" w="med" len="med"/>
+                      <a:tailEnd type="none" w="med" len="med"/>
+                    </a:lnR>
+                    <a:lnT w="9525" cap="flat" cmpd="sng" algn="ctr">
+                      <a:solidFill>
+                        <a:srgbClr val="9A9A9A"/>
+                      </a:solidFill>
+                      <a:prstDash val="solid"/>
+                      <a:round/>
+                      <a:headEnd type="none" w="med" len="med"/>
+                      <a:tailEnd type="none" w="med" len="med"/>
+                    </a:lnT>
+                    <a:lnB w="9525" cap="flat" cmpd="sng" algn="ctr">
+                      <a:solidFill>
+                        <a:srgbClr val="9A9A9A"/>
+                      </a:solidFill>
+                      <a:prstDash val="solid"/>
+                      <a:round/>
+                      <a:headEnd type="none" w="med" len="med"/>
+                      <a:tailEnd type="none" w="med" len="med"/>
+                    </a:lnB>
+                    <a:noFill/>
+                  </a:tcPr>
+                </a:tc>
+                <a:extLst>
+                  <a:ext uri="{0D108BD9-81ED-4DB2-BD59-A6C34878D82A}">
+                    <a16:rowId xmlns:a16="http://schemas.microsoft.com/office/drawing/2014/main" val="1936953878"/>
+                  </a:ext>
+                </a:extLst>
+              </a:tr>
+              <a:tr h="0">
+                <a:tc>
+                  <a:txBody>
+                    <a:bodyPr/>
+                    <a:lstStyle/>
+                    <a:p>
+                      <a:pPr>
+                        <a:buNone/>
+                      </a:pPr>
+                      <a:r>
+                        <a:rPr lang="en-001">
+                          <a:effectLst/>
+                          <a:latin typeface=".AppleSystemUIFont"/>
+                        </a:rPr>
+                        <a:t>healthcare</a:t>
+                      </a:r>
+                    </a:p>
+                  </a:txBody>
+                  <a:tcPr marL="47625" marR="47625" marT="9525" marB="9525">
+                    <a:lnL w="9525" cap="flat" cmpd="sng" algn="ctr">
+                      <a:solidFill>
+                        <a:srgbClr val="9A9A9A"/>
+                      </a:solidFill>
+                      <a:prstDash val="solid"/>
+                      <a:round/>
+                      <a:headEnd type="none" w="med" len="med"/>
+                      <a:tailEnd type="none" w="med" len="med"/>
+                    </a:lnL>
+                    <a:lnR w="9525" cap="flat" cmpd="sng" algn="ctr">
+                      <a:solidFill>
+                        <a:srgbClr val="9A9A9A"/>
+                      </a:solidFill>
+                      <a:prstDash val="solid"/>
+                      <a:round/>
+                      <a:headEnd type="none" w="med" len="med"/>
+                      <a:tailEnd type="none" w="med" len="med"/>
+                    </a:lnR>
+                    <a:lnT w="9525" cap="flat" cmpd="sng" algn="ctr">
+                      <a:solidFill>
+                        <a:srgbClr val="9A9A9A"/>
+                      </a:solidFill>
+                      <a:prstDash val="solid"/>
+                      <a:round/>
+                      <a:headEnd type="none" w="med" len="med"/>
+                      <a:tailEnd type="none" w="med" len="med"/>
+                    </a:lnT>
+                    <a:lnB w="9525" cap="flat" cmpd="sng" algn="ctr">
+                      <a:solidFill>
+                        <a:srgbClr val="9A9A9A"/>
+                      </a:solidFill>
+                      <a:prstDash val="solid"/>
+                      <a:round/>
+                      <a:headEnd type="none" w="med" len="med"/>
+                      <a:tailEnd type="none" w="med" len="med"/>
+                    </a:lnB>
+                    <a:noFill/>
+                  </a:tcPr>
+                </a:tc>
+                <a:tc>
+                  <a:txBody>
+                    <a:bodyPr/>
+                    <a:lstStyle/>
+                    <a:p>
+                      <a:pPr>
+                        <a:buNone/>
+                      </a:pPr>
+                      <a:r>
+                        <a:rPr lang="en-001">
+                          <a:effectLst/>
+                          <a:latin typeface=".AppleSystemUIFont"/>
+                        </a:rPr>
+                        <a:t>doctor, pharmacy</a:t>
+                      </a:r>
+                    </a:p>
+                  </a:txBody>
+                  <a:tcPr marL="47625" marR="47625" marT="9525" marB="9525">
+                    <a:lnL w="9525" cap="flat" cmpd="sng" algn="ctr">
+                      <a:solidFill>
+                        <a:srgbClr val="9A9A9A"/>
+                      </a:solidFill>
+                      <a:prstDash val="solid"/>
+                      <a:round/>
+                      <a:headEnd type="none" w="med" len="med"/>
+                      <a:tailEnd type="none" w="med" len="med"/>
+                    </a:lnL>
+                    <a:lnR w="9525" cap="flat" cmpd="sng" algn="ctr">
+                      <a:solidFill>
+                        <a:srgbClr val="9A9A9A"/>
+                      </a:solidFill>
+                      <a:prstDash val="solid"/>
+                      <a:round/>
+                      <a:headEnd type="none" w="med" len="med"/>
+                      <a:tailEnd type="none" w="med" len="med"/>
+                    </a:lnR>
+                    <a:lnT w="9525" cap="flat" cmpd="sng" algn="ctr">
+                      <a:solidFill>
+                        <a:srgbClr val="9A9A9A"/>
+                      </a:solidFill>
+                      <a:prstDash val="solid"/>
+                      <a:round/>
+                      <a:headEnd type="none" w="med" len="med"/>
+                      <a:tailEnd type="none" w="med" len="med"/>
+                    </a:lnT>
+                    <a:lnB w="9525" cap="flat" cmpd="sng" algn="ctr">
+                      <a:solidFill>
+                        <a:srgbClr val="9A9A9A"/>
+                      </a:solidFill>
+                      <a:prstDash val="solid"/>
+                      <a:round/>
+                      <a:headEnd type="none" w="med" len="med"/>
+                      <a:tailEnd type="none" w="med" len="med"/>
+                    </a:lnB>
+                    <a:noFill/>
+                  </a:tcPr>
+                </a:tc>
+                <a:extLst>
+                  <a:ext uri="{0D108BD9-81ED-4DB2-BD59-A6C34878D82A}">
+                    <a16:rowId xmlns:a16="http://schemas.microsoft.com/office/drawing/2014/main" val="2405937287"/>
+                  </a:ext>
+                </a:extLst>
+              </a:tr>
+              <a:tr h="0">
+                <a:tc>
+                  <a:txBody>
+                    <a:bodyPr/>
+                    <a:lstStyle/>
+                    <a:p>
+                      <a:pPr>
+                        <a:buNone/>
+                      </a:pPr>
+                      <a:r>
+                        <a:rPr lang="en-001">
+                          <a:effectLst/>
+                          <a:latin typeface=".AppleSystemUIFont"/>
+                        </a:rPr>
+                        <a:t>unknown</a:t>
+                      </a:r>
+                    </a:p>
+                  </a:txBody>
+                  <a:tcPr marL="47625" marR="47625" marT="9525" marB="9525">
+                    <a:lnL w="9525" cap="flat" cmpd="sng" algn="ctr">
+                      <a:solidFill>
+                        <a:srgbClr val="9A9A9A"/>
+                      </a:solidFill>
+                      <a:prstDash val="solid"/>
+                      <a:round/>
+                      <a:headEnd type="none" w="med" len="med"/>
+                      <a:tailEnd type="none" w="med" len="med"/>
+                    </a:lnL>
+                    <a:lnR w="9525" cap="flat" cmpd="sng" algn="ctr">
+                      <a:solidFill>
+                        <a:srgbClr val="9A9A9A"/>
+                      </a:solidFill>
+                      <a:prstDash val="solid"/>
+                      <a:round/>
+                      <a:headEnd type="none" w="med" len="med"/>
+                      <a:tailEnd type="none" w="med" len="med"/>
+                    </a:lnR>
+                    <a:lnT w="9525" cap="flat" cmpd="sng" algn="ctr">
+                      <a:solidFill>
+                        <a:srgbClr val="9A9A9A"/>
+                      </a:solidFill>
+                      <a:prstDash val="solid"/>
+                      <a:round/>
+                      <a:headEnd type="none" w="med" len="med"/>
+                      <a:tailEnd type="none" w="med" len="med"/>
+                    </a:lnT>
+                    <a:lnB w="9525" cap="flat" cmpd="sng" algn="ctr">
+                      <a:solidFill>
+                        <a:srgbClr val="9A9A9A"/>
+                      </a:solidFill>
+                      <a:prstDash val="solid"/>
+                      <a:round/>
+                      <a:headEnd type="none" w="med" len="med"/>
+                      <a:tailEnd type="none" w="med" len="med"/>
+                    </a:lnB>
+                    <a:noFill/>
+                  </a:tcPr>
+                </a:tc>
+                <a:tc>
+                  <a:txBody>
+                    <a:bodyPr/>
+                    <a:lstStyle/>
+                    <a:p>
+                      <a:pPr>
+                        <a:buNone/>
+                      </a:pPr>
+                      <a:r>
+                        <a:rPr lang="en-001" dirty="0">
+                          <a:effectLst/>
+                          <a:latin typeface=".AppleSystemUIFont"/>
+                        </a:rPr>
+                        <a:t>unresolved</a:t>
+                      </a:r>
+                    </a:p>
+                  </a:txBody>
+                  <a:tcPr marL="47625" marR="47625" marT="9525" marB="9525">
+                    <a:lnL w="9525" cap="flat" cmpd="sng" algn="ctr">
+                      <a:solidFill>
+                        <a:srgbClr val="9A9A9A"/>
+                      </a:solidFill>
+                      <a:prstDash val="solid"/>
+                      <a:round/>
+                      <a:headEnd type="none" w="med" len="med"/>
+                      <a:tailEnd type="none" w="med" len="med"/>
+                    </a:lnL>
+                    <a:lnR w="9525" cap="flat" cmpd="sng" algn="ctr">
+                      <a:solidFill>
+                        <a:srgbClr val="9A9A9A"/>
+                      </a:solidFill>
+                      <a:prstDash val="solid"/>
+                      <a:round/>
+                      <a:headEnd type="none" w="med" len="med"/>
+                      <a:tailEnd type="none" w="med" len="med"/>
+                    </a:lnR>
+                    <a:lnT w="9525" cap="flat" cmpd="sng" algn="ctr">
+                      <a:solidFill>
+                        <a:srgbClr val="9A9A9A"/>
+                      </a:solidFill>
+                      <a:prstDash val="solid"/>
+                      <a:round/>
+                      <a:headEnd type="none" w="med" len="med"/>
+                      <a:tailEnd type="none" w="med" len="med"/>
+                    </a:lnT>
+                    <a:lnB w="9525" cap="flat" cmpd="sng" algn="ctr">
+                      <a:solidFill>
+                        <a:srgbClr val="9A9A9A"/>
+                      </a:solidFill>
+                      <a:prstDash val="solid"/>
+                      <a:round/>
+                      <a:headEnd type="none" w="med" len="med"/>
+                      <a:tailEnd type="none" w="med" len="med"/>
+                    </a:lnB>
+                    <a:noFill/>
+                  </a:tcPr>
+                </a:tc>
+                <a:extLst>
+                  <a:ext uri="{0D108BD9-81ED-4DB2-BD59-A6C34878D82A}">
+                    <a16:rowId xmlns:a16="http://schemas.microsoft.com/office/drawing/2014/main" val="287304062"/>
+                  </a:ext>
+                </a:extLst>
+              </a:tr>
+            </a:tbl>
+          </a:graphicData>
+        </a:graphic>
+      </p:graphicFrame>
+    </p:spTree>
+    <p:extLst>
+      <p:ext uri="{BB962C8B-B14F-4D97-AF65-F5344CB8AC3E}">
+        <p14:creationId xmlns:p14="http://schemas.microsoft.com/office/powerpoint/2010/main" val="4100974794"/>
+      </p:ext>
+    </p:extLst>
+  </p:cSld>
+  <p:clrMapOvr>
+    <a:masterClrMapping/>
+  </p:clrMapOvr>
+</p:sld>
+</file>
+
+<file path=ppt/slides/slide7.xml><?xml version="1.0" encoding="utf-8"?>
 <p:sld xmlns:a="http://schemas.openxmlformats.org/drawingml/2006/main" xmlns:r="http://schemas.openxmlformats.org/officeDocument/2006/relationships" xmlns:p="http://schemas.openxmlformats.org/presentationml/2006/main">
   <p:cSld>
     <p:bg>
@@ -16690,7 +18791,7 @@
 </p:sld>
 </file>
 
-<file path=ppt/slides/slide6.xml><?xml version="1.0" encoding="utf-8"?>
+<file path=ppt/slides/slide8.xml><?xml version="1.0" encoding="utf-8"?>
 <p:sld xmlns:a="http://schemas.openxmlformats.org/drawingml/2006/main" xmlns:r="http://schemas.openxmlformats.org/officeDocument/2006/relationships" xmlns:p="http://schemas.openxmlformats.org/presentationml/2006/main">
   <p:cSld>
     <p:spTree>
@@ -16792,7 +18893,7 @@
 </p:sld>
 </file>
 
-<file path=ppt/slides/slide7.xml><?xml version="1.0" encoding="utf-8"?>
+<file path=ppt/slides/slide9.xml><?xml version="1.0" encoding="utf-8"?>
 <p:sld xmlns:a="http://schemas.openxmlformats.org/drawingml/2006/main" xmlns:r="http://schemas.openxmlformats.org/officeDocument/2006/relationships" xmlns:p="http://schemas.openxmlformats.org/presentationml/2006/main">
   <p:cSld>
     <p:spTree>
@@ -16882,445 +18983,6 @@
     <p:extLst>
       <p:ext uri="{BB962C8B-B14F-4D97-AF65-F5344CB8AC3E}">
         <p14:creationId xmlns:p14="http://schemas.microsoft.com/office/powerpoint/2010/main" val="3855054443"/>
-      </p:ext>
-    </p:extLst>
-  </p:cSld>
-  <p:clrMapOvr>
-    <a:masterClrMapping/>
-  </p:clrMapOvr>
-</p:sld>
-</file>
-
-<file path=ppt/slides/slide8.xml><?xml version="1.0" encoding="utf-8"?>
-<p:sld xmlns:a="http://schemas.openxmlformats.org/drawingml/2006/main" xmlns:r="http://schemas.openxmlformats.org/officeDocument/2006/relationships" xmlns:p="http://schemas.openxmlformats.org/presentationml/2006/main">
-  <p:cSld>
-    <p:spTree>
-      <p:nvGrpSpPr>
-        <p:cNvPr id="1" name=""/>
-        <p:cNvGrpSpPr/>
-        <p:nvPr/>
-      </p:nvGrpSpPr>
-      <p:grpSpPr>
-        <a:xfrm>
-          <a:off x="0" y="0"/>
-          <a:ext cx="0" cy="0"/>
-          <a:chOff x="0" y="0"/>
-          <a:chExt cx="0" cy="0"/>
-        </a:xfrm>
-      </p:grpSpPr>
-      <p:sp>
-        <p:nvSpPr>
-          <p:cNvPr id="2" name="Title 1">
-            <a:extLst>
-              <a:ext uri="{FF2B5EF4-FFF2-40B4-BE49-F238E27FC236}">
-                <a16:creationId xmlns:a16="http://schemas.microsoft.com/office/drawing/2014/main" id="{64BD1728-17B5-5125-78E7-BBA36653063B}"/>
-              </a:ext>
-            </a:extLst>
-          </p:cNvPr>
-          <p:cNvSpPr>
-            <a:spLocks noGrp="1"/>
-          </p:cNvSpPr>
-          <p:nvPr>
-            <p:ph type="title"/>
-          </p:nvPr>
-        </p:nvSpPr>
-        <p:spPr/>
-        <p:txBody>
-          <a:bodyPr/>
-          <a:lstStyle/>
-          <a:p>
-            <a:endParaRPr lang="fr-CH"/>
-          </a:p>
-        </p:txBody>
-      </p:sp>
-      <p:sp>
-        <p:nvSpPr>
-          <p:cNvPr id="7" name="Content Placeholder 6">
-            <a:extLst>
-              <a:ext uri="{FF2B5EF4-FFF2-40B4-BE49-F238E27FC236}">
-                <a16:creationId xmlns:a16="http://schemas.microsoft.com/office/drawing/2014/main" id="{DCCFBE5E-470E-8AAF-8F23-FDD7777AA6DC}"/>
-              </a:ext>
-            </a:extLst>
-          </p:cNvPr>
-          <p:cNvSpPr>
-            <a:spLocks noGrp="1"/>
-          </p:cNvSpPr>
-          <p:nvPr>
-            <p:ph idx="1"/>
-          </p:nvPr>
-        </p:nvSpPr>
-        <p:spPr/>
-        <p:txBody>
-          <a:bodyPr/>
-          <a:lstStyle/>
-          <a:p>
-            <a:endParaRPr lang="fr-CH"/>
-          </a:p>
-        </p:txBody>
-      </p:sp>
-      <p:pic>
-        <p:nvPicPr>
-          <p:cNvPr id="9" name="Picture 8" descr="The image displays a map overlaying various locations in ZURICH, indicating distances for different modes of transportation (walking, cycling, and public transport) from a central point.&#10;&#10;AI-generated content may be incorrect.">
-            <a:extLst>
-              <a:ext uri="{FF2B5EF4-FFF2-40B4-BE49-F238E27FC236}">
-                <a16:creationId xmlns:a16="http://schemas.microsoft.com/office/drawing/2014/main" id="{2CAB6DAC-E835-6F5C-E5D4-339A9645C7BE}"/>
-              </a:ext>
-            </a:extLst>
-          </p:cNvPr>
-          <p:cNvPicPr>
-            <a:picLocks noChangeAspect="1"/>
-          </p:cNvPicPr>
-          <p:nvPr/>
-        </p:nvPicPr>
-        <p:blipFill>
-          <a:blip r:embed="rId2"/>
-          <a:stretch>
-            <a:fillRect/>
-          </a:stretch>
-        </p:blipFill>
-        <p:spPr>
-          <a:xfrm>
-            <a:off x="198120" y="0"/>
-            <a:ext cx="11795760" cy="6858000"/>
-          </a:xfrm>
-          <a:prstGeom prst="rect">
-            <a:avLst/>
-          </a:prstGeom>
-        </p:spPr>
-      </p:pic>
-    </p:spTree>
-    <p:extLst>
-      <p:ext uri="{BB962C8B-B14F-4D97-AF65-F5344CB8AC3E}">
-        <p14:creationId xmlns:p14="http://schemas.microsoft.com/office/powerpoint/2010/main" val="2036194352"/>
-      </p:ext>
-    </p:extLst>
-  </p:cSld>
-  <p:clrMapOvr>
-    <a:masterClrMapping/>
-  </p:clrMapOvr>
-</p:sld>
-</file>
-
-<file path=ppt/slides/slide9.xml><?xml version="1.0" encoding="utf-8"?>
-<p:sld xmlns:a="http://schemas.openxmlformats.org/drawingml/2006/main" xmlns:r="http://schemas.openxmlformats.org/officeDocument/2006/relationships" xmlns:p="http://schemas.openxmlformats.org/presentationml/2006/main">
-  <p:cSld>
-    <p:spTree>
-      <p:nvGrpSpPr>
-        <p:cNvPr id="1" name=""/>
-        <p:cNvGrpSpPr/>
-        <p:nvPr/>
-      </p:nvGrpSpPr>
-      <p:grpSpPr>
-        <a:xfrm>
-          <a:off x="0" y="0"/>
-          <a:ext cx="0" cy="0"/>
-          <a:chOff x="0" y="0"/>
-          <a:chExt cx="0" cy="0"/>
-        </a:xfrm>
-      </p:grpSpPr>
-      <p:sp>
-        <p:nvSpPr>
-          <p:cNvPr id="2" name="Title 1">
-            <a:extLst>
-              <a:ext uri="{FF2B5EF4-FFF2-40B4-BE49-F238E27FC236}">
-                <a16:creationId xmlns:a16="http://schemas.microsoft.com/office/drawing/2014/main" id="{229A9C5E-D113-F410-1D52-CFEDFDD68709}"/>
-              </a:ext>
-            </a:extLst>
-          </p:cNvPr>
-          <p:cNvSpPr>
-            <a:spLocks noGrp="1"/>
-          </p:cNvSpPr>
-          <p:nvPr>
-            <p:ph type="title"/>
-          </p:nvPr>
-        </p:nvSpPr>
-        <p:spPr/>
-        <p:txBody>
-          <a:bodyPr/>
-          <a:lstStyle/>
-          <a:p>
-            <a:r>
-              <a:rPr lang="fr-CH" dirty="0"/>
-              <a:t>Challenges and Plan B</a:t>
-            </a:r>
-          </a:p>
-        </p:txBody>
-      </p:sp>
-      <p:sp>
-        <p:nvSpPr>
-          <p:cNvPr id="3" name="Content Placeholder 2">
-            <a:extLst>
-              <a:ext uri="{FF2B5EF4-FFF2-40B4-BE49-F238E27FC236}">
-                <a16:creationId xmlns:a16="http://schemas.microsoft.com/office/drawing/2014/main" id="{DBAEEBF5-C3D9-FA63-1735-E9C2F5C42998}"/>
-              </a:ext>
-            </a:extLst>
-          </p:cNvPr>
-          <p:cNvSpPr>
-            <a:spLocks noGrp="1"/>
-          </p:cNvSpPr>
-          <p:nvPr>
-            <p:ph idx="1"/>
-          </p:nvPr>
-        </p:nvSpPr>
-        <p:spPr/>
-        <p:txBody>
-          <a:bodyPr/>
-          <a:lstStyle/>
-          <a:p>
-            <a:r>
-              <a:rPr lang="fr-CH" dirty="0" err="1"/>
-              <a:t>Integration</a:t>
-            </a:r>
-            <a:r>
-              <a:rPr lang="fr-CH" dirty="0"/>
-              <a:t> of the ZVV time plan </a:t>
-            </a:r>
-          </a:p>
-          <a:p>
-            <a:pPr lvl="1"/>
-            <a:r>
-              <a:rPr lang="fr-CH" dirty="0"/>
-              <a:t>Heavy data set </a:t>
-            </a:r>
-          </a:p>
-          <a:p>
-            <a:pPr lvl="1"/>
-            <a:r>
-              <a:rPr lang="fr-CH" dirty="0"/>
-              <a:t>Add </a:t>
-            </a:r>
-            <a:r>
-              <a:rPr lang="fr-CH" dirty="0" err="1"/>
-              <a:t>unusefull</a:t>
-            </a:r>
-            <a:r>
-              <a:rPr lang="fr-CH" dirty="0"/>
-              <a:t> complication</a:t>
-            </a:r>
-            <a:endParaRPr lang="fr-CH" dirty="0">
-              <a:sym typeface="Wingdings" panose="05000000000000000000" pitchFamily="2" charset="2"/>
-            </a:endParaRPr>
-          </a:p>
-          <a:p>
-            <a:pPr>
-              <a:buFont typeface="Wingdings" panose="05000000000000000000" pitchFamily="2" charset="2"/>
-              <a:buChar char="à"/>
-            </a:pPr>
-            <a:r>
-              <a:rPr lang="fr-CH" dirty="0">
-                <a:sym typeface="Wingdings" panose="05000000000000000000" pitchFamily="2" charset="2"/>
-              </a:rPr>
-              <a:t> Use an estimation of the speed of the public transports (bus and tram) of 15 km/h </a:t>
-            </a:r>
-          </a:p>
-          <a:p>
-            <a:r>
-              <a:rPr lang="fr-CH" dirty="0">
-                <a:sym typeface="Wingdings" panose="05000000000000000000" pitchFamily="2" charset="2"/>
-              </a:rPr>
-              <a:t>Anonymisation of the data</a:t>
-            </a:r>
-          </a:p>
-          <a:p>
-            <a:pPr lvl="1"/>
-            <a:r>
-              <a:rPr lang="fr-CH" dirty="0">
-                <a:sym typeface="Wingdings" panose="05000000000000000000" pitchFamily="2" charset="2"/>
-              </a:rPr>
-              <a:t>With </a:t>
-            </a:r>
-            <a:r>
-              <a:rPr lang="fr-CH" dirty="0" err="1">
-                <a:sym typeface="Wingdings" panose="05000000000000000000" pitchFamily="2" charset="2"/>
-              </a:rPr>
-              <a:t>only</a:t>
-            </a:r>
-            <a:r>
-              <a:rPr lang="fr-CH" dirty="0">
-                <a:sym typeface="Wingdings" panose="05000000000000000000" pitchFamily="2" charset="2"/>
-              </a:rPr>
-              <a:t> a few </a:t>
-            </a:r>
-            <a:r>
-              <a:rPr lang="fr-CH" dirty="0" err="1">
-                <a:sym typeface="Wingdings" panose="05000000000000000000" pitchFamily="2" charset="2"/>
-              </a:rPr>
-              <a:t>visited</a:t>
-            </a:r>
-            <a:r>
-              <a:rPr lang="fr-CH" dirty="0">
-                <a:sym typeface="Wingdings" panose="05000000000000000000" pitchFamily="2" charset="2"/>
-              </a:rPr>
-              <a:t> points, </a:t>
-            </a:r>
-            <a:r>
-              <a:rPr lang="fr-CH" dirty="0" err="1">
-                <a:sym typeface="Wingdings" panose="05000000000000000000" pitchFamily="2" charset="2"/>
-              </a:rPr>
-              <a:t>it</a:t>
-            </a:r>
-            <a:r>
-              <a:rPr lang="fr-CH" dirty="0">
-                <a:sym typeface="Wingdings" panose="05000000000000000000" pitchFamily="2" charset="2"/>
-              </a:rPr>
-              <a:t> </a:t>
-            </a:r>
-            <a:r>
-              <a:rPr lang="fr-CH" dirty="0" err="1">
-                <a:sym typeface="Wingdings" panose="05000000000000000000" pitchFamily="2" charset="2"/>
-              </a:rPr>
-              <a:t>is</a:t>
-            </a:r>
-            <a:r>
-              <a:rPr lang="fr-CH" dirty="0">
-                <a:sym typeface="Wingdings" panose="05000000000000000000" pitchFamily="2" charset="2"/>
-              </a:rPr>
-              <a:t> possible to </a:t>
-            </a:r>
-            <a:r>
-              <a:rPr lang="fr-CH" dirty="0" err="1">
-                <a:sym typeface="Wingdings" panose="05000000000000000000" pitchFamily="2" charset="2"/>
-              </a:rPr>
-              <a:t>find</a:t>
-            </a:r>
-            <a:r>
-              <a:rPr lang="fr-CH" dirty="0">
-                <a:sym typeface="Wingdings" panose="05000000000000000000" pitchFamily="2" charset="2"/>
-              </a:rPr>
-              <a:t> out </a:t>
-            </a:r>
-            <a:r>
-              <a:rPr lang="fr-CH" dirty="0" err="1">
-                <a:sym typeface="Wingdings" panose="05000000000000000000" pitchFamily="2" charset="2"/>
-              </a:rPr>
-              <a:t>where</a:t>
-            </a:r>
-            <a:r>
-              <a:rPr lang="fr-CH" dirty="0">
-                <a:sym typeface="Wingdings" panose="05000000000000000000" pitchFamily="2" charset="2"/>
-              </a:rPr>
-              <a:t> the </a:t>
-            </a:r>
-            <a:r>
-              <a:rPr lang="fr-CH" dirty="0" err="1">
-                <a:sym typeface="Wingdings" panose="05000000000000000000" pitchFamily="2" charset="2"/>
-              </a:rPr>
-              <a:t>person</a:t>
-            </a:r>
-            <a:r>
-              <a:rPr lang="fr-CH" dirty="0">
-                <a:sym typeface="Wingdings" panose="05000000000000000000" pitchFamily="2" charset="2"/>
-              </a:rPr>
-              <a:t> </a:t>
-            </a:r>
-            <a:r>
-              <a:rPr lang="fr-CH" dirty="0" err="1">
-                <a:sym typeface="Wingdings" panose="05000000000000000000" pitchFamily="2" charset="2"/>
-              </a:rPr>
-              <a:t>lives</a:t>
-            </a:r>
-            <a:r>
-              <a:rPr lang="fr-CH" dirty="0">
-                <a:sym typeface="Wingdings" panose="05000000000000000000" pitchFamily="2" charset="2"/>
-              </a:rPr>
-              <a:t>/</a:t>
-            </a:r>
-            <a:r>
-              <a:rPr lang="fr-CH" dirty="0" err="1">
-                <a:sym typeface="Wingdings" panose="05000000000000000000" pitchFamily="2" charset="2"/>
-              </a:rPr>
-              <a:t>who</a:t>
-            </a:r>
-            <a:r>
-              <a:rPr lang="fr-CH" dirty="0">
-                <a:sym typeface="Wingdings" panose="05000000000000000000" pitchFamily="2" charset="2"/>
-              </a:rPr>
-              <a:t> </a:t>
-            </a:r>
-            <a:r>
-              <a:rPr lang="fr-CH" dirty="0" err="1">
-                <a:sym typeface="Wingdings" panose="05000000000000000000" pitchFamily="2" charset="2"/>
-              </a:rPr>
-              <a:t>they</a:t>
-            </a:r>
-            <a:r>
-              <a:rPr lang="fr-CH" dirty="0">
-                <a:sym typeface="Wingdings" panose="05000000000000000000" pitchFamily="2" charset="2"/>
-              </a:rPr>
-              <a:t> are</a:t>
-            </a:r>
-          </a:p>
-          <a:p>
-            <a:pPr marL="0" indent="0">
-              <a:buNone/>
-            </a:pPr>
-            <a:r>
-              <a:rPr lang="fr-CH" dirty="0">
-                <a:sym typeface="Wingdings" panose="05000000000000000000" pitchFamily="2" charset="2"/>
-              </a:rPr>
-              <a:t> Change the </a:t>
-            </a:r>
-            <a:r>
-              <a:rPr lang="fr-CH" dirty="0" err="1">
-                <a:sym typeface="Wingdings" panose="05000000000000000000" pitchFamily="2" charset="2"/>
-              </a:rPr>
-              <a:t>adress</a:t>
-            </a:r>
-            <a:r>
-              <a:rPr lang="fr-CH" dirty="0">
-                <a:sym typeface="Wingdings" panose="05000000000000000000" pitchFamily="2" charset="2"/>
-              </a:rPr>
-              <a:t> by a few blocks/</a:t>
-            </a:r>
-            <a:r>
-              <a:rPr lang="fr-CH" dirty="0" err="1">
-                <a:sym typeface="Wingdings" panose="05000000000000000000" pitchFamily="2" charset="2"/>
-              </a:rPr>
-              <a:t>streets</a:t>
-            </a:r>
-            <a:r>
-              <a:rPr lang="fr-CH" dirty="0">
-                <a:sym typeface="Wingdings" panose="05000000000000000000" pitchFamily="2" charset="2"/>
-              </a:rPr>
-              <a:t> (but </a:t>
-            </a:r>
-            <a:r>
-              <a:rPr lang="fr-CH" dirty="0" err="1">
-                <a:sym typeface="Wingdings" panose="05000000000000000000" pitchFamily="2" charset="2"/>
-              </a:rPr>
-              <a:t>still</a:t>
-            </a:r>
-            <a:r>
-              <a:rPr lang="fr-CH" dirty="0">
-                <a:sym typeface="Wingdings" panose="05000000000000000000" pitchFamily="2" charset="2"/>
-              </a:rPr>
-              <a:t> not </a:t>
-            </a:r>
-            <a:r>
-              <a:rPr lang="fr-CH" dirty="0" err="1">
-                <a:sym typeface="Wingdings" panose="05000000000000000000" pitchFamily="2" charset="2"/>
-              </a:rPr>
-              <a:t>ideal</a:t>
-            </a:r>
-            <a:r>
-              <a:rPr lang="fr-CH" dirty="0">
-                <a:sym typeface="Wingdings" panose="05000000000000000000" pitchFamily="2" charset="2"/>
-              </a:rPr>
-              <a:t>) </a:t>
-            </a:r>
-          </a:p>
-          <a:p>
-            <a:pPr marL="0" indent="0">
-              <a:buNone/>
-            </a:pPr>
-            <a:endParaRPr lang="fr-CH" dirty="0"/>
-          </a:p>
-        </p:txBody>
-      </p:sp>
-    </p:spTree>
-    <p:extLst>
-      <p:ext uri="{BB962C8B-B14F-4D97-AF65-F5344CB8AC3E}">
-        <p14:creationId xmlns:p14="http://schemas.microsoft.com/office/powerpoint/2010/main" val="2357305363"/>
       </p:ext>
     </p:extLst>
   </p:cSld>

--- a/The 15-Minute City in Practice.pptx
+++ b/The 15-Minute City in Practice.pptx
@@ -334,32 +334,6 @@
     </pc:docChg>
   </pc:docChgLst>
 </pc:chgInfo>
-</file>
-
-<file path=ppt/comments/modernComment_100_C83A13B9.xml><?xml version="1.0" encoding="utf-8"?>
-<p188:cmLst xmlns:a="http://schemas.openxmlformats.org/drawingml/2006/main" xmlns:r="http://schemas.openxmlformats.org/officeDocument/2006/relationships" xmlns:p188="http://schemas.microsoft.com/office/powerpoint/2018/8/main">
-  <p188:cm id="{D96A257B-1C8E-E748-A2DE-938E634E31F0}" authorId="{DE3E4DB8-4E12-F18C-200B-095F2E882368}" created="2026-06-01T12:49:13.102">
-    <pc:sldMkLst xmlns:pc="http://schemas.microsoft.com/office/powerpoint/2013/main/command">
-      <pc:docMk/>
-      <pc:sldMk cId="3359249337" sldId="256"/>
-    </pc:sldMkLst>
-    <p188:txBody>
-      <a:bodyPr/>
-      <a:lstStyle/>
-      <a:p>
-        <a:r>
-          <a:rPr lang="en-001"/>
-          <a:t>new suggestion for poetic and attention grabbing title how Patrick loves them : Close Enough to Reach, Far Enough to Go
-Exploring the Gap Between Accessibility and Mobility in Zurich 
-The Places We Could Go and the Places We Do
-Comparing Theoretical Accessibility and Real Mobility Patterns in Zurich
-Between Opportunity and Movement
-Testing the 15-Minute City Through GPS Trajectories in Zurich </a:t>
-        </a:r>
-      </a:p>
-    </p188:txBody>
-  </p188:cm>
-</p188:cmLst>
 </file>
 
 <file path=ppt/comments/modernComment_102_88E6931F.xml><?xml version="1.0" encoding="utf-8"?>
@@ -1715,6 +1689,114 @@
         </a:p>
       </dgm:t>
     </dgm:pt>
+    <dgm:pt modelId="{71B775CA-F13C-7340-ABCF-22506AE4849F}">
+      <dgm:prSet custT="1"/>
+      <dgm:spPr/>
+      <dgm:t>
+        <a:bodyPr/>
+        <a:lstStyle/>
+        <a:p>
+          <a:r>
+            <a:rPr lang="en-US" sz="2000" dirty="0"/>
+            <a:t>Activity Classification Model - ground truth</a:t>
+          </a:r>
+        </a:p>
+      </dgm:t>
+    </dgm:pt>
+    <dgm:pt modelId="{CB70B5DD-8FAB-0B48-9150-B598DB007B62}" type="parTrans" cxnId="{BEE2BFC1-235B-3C4D-974E-5B9B26E3F54B}">
+      <dgm:prSet/>
+      <dgm:spPr/>
+      <dgm:t>
+        <a:bodyPr/>
+        <a:lstStyle/>
+        <a:p>
+          <a:endParaRPr lang="en-US"/>
+        </a:p>
+      </dgm:t>
+    </dgm:pt>
+    <dgm:pt modelId="{47A69B99-4CDE-2F4D-9AA0-2FBDA88A9EE3}" type="sibTrans" cxnId="{BEE2BFC1-235B-3C4D-974E-5B9B26E3F54B}">
+      <dgm:prSet/>
+      <dgm:spPr/>
+      <dgm:t>
+        <a:bodyPr/>
+        <a:lstStyle/>
+        <a:p>
+          <a:endParaRPr lang="en-US"/>
+        </a:p>
+      </dgm:t>
+    </dgm:pt>
+    <dgm:pt modelId="{B6047393-ED44-B540-9E08-5BD8BA526CAA}">
+      <dgm:prSet custT="1"/>
+      <dgm:spPr/>
+      <dgm:t>
+        <a:bodyPr/>
+        <a:lstStyle/>
+        <a:p>
+          <a:r>
+            <a:rPr lang="en-US" sz="2000" dirty="0"/>
+            <a:t>Eventually add an isochrone with different speed</a:t>
+          </a:r>
+        </a:p>
+      </dgm:t>
+    </dgm:pt>
+    <dgm:pt modelId="{B08BF4FD-C5FE-5845-824F-2141B1C98759}" type="parTrans" cxnId="{D9C9CEB5-9B77-FB46-BE23-01550C850EA4}">
+      <dgm:prSet/>
+      <dgm:spPr/>
+      <dgm:t>
+        <a:bodyPr/>
+        <a:lstStyle/>
+        <a:p>
+          <a:endParaRPr lang="en-US"/>
+        </a:p>
+      </dgm:t>
+    </dgm:pt>
+    <dgm:pt modelId="{2D99C50B-6557-C946-8937-D85E69C5B5B5}" type="sibTrans" cxnId="{D9C9CEB5-9B77-FB46-BE23-01550C850EA4}">
+      <dgm:prSet/>
+      <dgm:spPr/>
+      <dgm:t>
+        <a:bodyPr/>
+        <a:lstStyle/>
+        <a:p>
+          <a:endParaRPr lang="en-US"/>
+        </a:p>
+      </dgm:t>
+    </dgm:pt>
+    <dgm:pt modelId="{E27D3E73-9AE1-6C47-BAD3-BF0CFC501738}">
+      <dgm:prSet phldrT="[Text]" custT="1"/>
+      <dgm:spPr/>
+      <dgm:t>
+        <a:bodyPr/>
+        <a:lstStyle/>
+        <a:p>
+          <a:r>
+            <a:rPr lang="en-US" sz="2000" dirty="0"/>
+            <a:t>Processing of the POI (KDE)</a:t>
+          </a:r>
+        </a:p>
+      </dgm:t>
+    </dgm:pt>
+    <dgm:pt modelId="{A210493B-3982-9440-87DC-195EBDD2ED0B}" type="parTrans" cxnId="{90A815D3-AFC3-A445-84C3-F6174DA6B35A}">
+      <dgm:prSet/>
+      <dgm:spPr/>
+      <dgm:t>
+        <a:bodyPr/>
+        <a:lstStyle/>
+        <a:p>
+          <a:endParaRPr lang="en-US"/>
+        </a:p>
+      </dgm:t>
+    </dgm:pt>
+    <dgm:pt modelId="{7CAAB2BB-E0C5-194E-BEC4-E75D02848448}" type="sibTrans" cxnId="{90A815D3-AFC3-A445-84C3-F6174DA6B35A}">
+      <dgm:prSet/>
+      <dgm:spPr/>
+      <dgm:t>
+        <a:bodyPr/>
+        <a:lstStyle/>
+        <a:p>
+          <a:endParaRPr lang="en-US"/>
+        </a:p>
+      </dgm:t>
+    </dgm:pt>
     <dgm:pt modelId="{2DC07872-A69E-402A-96DD-C56028D57122}" type="pres">
       <dgm:prSet presAssocID="{72C74514-7E59-43DD-81F2-44D5759C1824}" presName="linear" presStyleCnt="0">
         <dgm:presLayoutVars>
@@ -1725,7 +1807,7 @@
       <dgm:spPr/>
     </dgm:pt>
     <dgm:pt modelId="{246B3F6D-7E01-4EA4-AD38-6D0AD826CB2B}" type="pres">
-      <dgm:prSet presAssocID="{12C6A796-E05E-4109-83A5-CA6732F07DCC}" presName="parentText" presStyleLbl="node1" presStyleIdx="0" presStyleCnt="7" custLinFactNeighborX="-573" custLinFactNeighborY="28403">
+      <dgm:prSet presAssocID="{12C6A796-E05E-4109-83A5-CA6732F07DCC}" presName="parentText" presStyleLbl="node1" presStyleIdx="0" presStyleCnt="10" custLinFactY="-28812" custLinFactNeighborX="-2617" custLinFactNeighborY="-100000">
         <dgm:presLayoutVars>
           <dgm:chMax val="0"/>
           <dgm:bulletEnabled val="1"/>
@@ -1738,7 +1820,7 @@
       <dgm:spPr/>
     </dgm:pt>
     <dgm:pt modelId="{1492B98B-63EB-43A1-8A5D-476D085DE6CB}" type="pres">
-      <dgm:prSet presAssocID="{41B0F318-681F-480C-ACBE-4C24B27636D0}" presName="parentText" presStyleLbl="node1" presStyleIdx="1" presStyleCnt="7">
+      <dgm:prSet presAssocID="{41B0F318-681F-480C-ACBE-4C24B27636D0}" presName="parentText" presStyleLbl="node1" presStyleIdx="1" presStyleCnt="10">
         <dgm:presLayoutVars>
           <dgm:chMax val="0"/>
           <dgm:bulletEnabled val="1"/>
@@ -1751,7 +1833,7 @@
       <dgm:spPr/>
     </dgm:pt>
     <dgm:pt modelId="{0226B3E9-17B7-42EC-B955-CDCAEF4B2B67}" type="pres">
-      <dgm:prSet presAssocID="{7157FA5E-C5A4-4039-9621-57EE8A1E448F}" presName="parentText" presStyleLbl="node1" presStyleIdx="2" presStyleCnt="7">
+      <dgm:prSet presAssocID="{7157FA5E-C5A4-4039-9621-57EE8A1E448F}" presName="parentText" presStyleLbl="node1" presStyleIdx="2" presStyleCnt="10">
         <dgm:presLayoutVars>
           <dgm:chMax val="0"/>
           <dgm:bulletEnabled val="1"/>
@@ -1763,8 +1845,21 @@
       <dgm:prSet presAssocID="{1E46E158-B5CD-4F93-9646-8137B2D6040A}" presName="spacer" presStyleCnt="0"/>
       <dgm:spPr/>
     </dgm:pt>
+    <dgm:pt modelId="{924973F7-934D-8F47-94DA-08F7A44621FE}" type="pres">
+      <dgm:prSet presAssocID="{E27D3E73-9AE1-6C47-BAD3-BF0CFC501738}" presName="parentText" presStyleLbl="node1" presStyleIdx="3" presStyleCnt="10">
+        <dgm:presLayoutVars>
+          <dgm:chMax val="0"/>
+          <dgm:bulletEnabled val="1"/>
+        </dgm:presLayoutVars>
+      </dgm:prSet>
+      <dgm:spPr/>
+    </dgm:pt>
+    <dgm:pt modelId="{595DCBCB-55EB-824A-969B-8B5CA54CB345}" type="pres">
+      <dgm:prSet presAssocID="{7CAAB2BB-E0C5-194E-BEC4-E75D02848448}" presName="spacer" presStyleCnt="0"/>
+      <dgm:spPr/>
+    </dgm:pt>
     <dgm:pt modelId="{97E83598-7549-4D53-BBE1-0E6AEBC831C5}" type="pres">
-      <dgm:prSet presAssocID="{59572103-8EAB-4A50-AB21-192D24EA143A}" presName="parentText" presStyleLbl="node1" presStyleIdx="3" presStyleCnt="7">
+      <dgm:prSet presAssocID="{59572103-8EAB-4A50-AB21-192D24EA143A}" presName="parentText" presStyleLbl="node1" presStyleIdx="4" presStyleCnt="10">
         <dgm:presLayoutVars>
           <dgm:chMax val="0"/>
           <dgm:bulletEnabled val="1"/>
@@ -1776,8 +1871,21 @@
       <dgm:prSet presAssocID="{8E8FBB87-05BE-4819-88DE-3D62EAC3E751}" presName="spacer" presStyleCnt="0"/>
       <dgm:spPr/>
     </dgm:pt>
+    <dgm:pt modelId="{A25B77B8-1FA0-264E-8C79-E12498181616}" type="pres">
+      <dgm:prSet presAssocID="{71B775CA-F13C-7340-ABCF-22506AE4849F}" presName="parentText" presStyleLbl="node1" presStyleIdx="5" presStyleCnt="10">
+        <dgm:presLayoutVars>
+          <dgm:chMax val="0"/>
+          <dgm:bulletEnabled val="1"/>
+        </dgm:presLayoutVars>
+      </dgm:prSet>
+      <dgm:spPr/>
+    </dgm:pt>
+    <dgm:pt modelId="{DC809B77-B6AF-8946-A167-E05E337134F9}" type="pres">
+      <dgm:prSet presAssocID="{47A69B99-4CDE-2F4D-9AA0-2FBDA88A9EE3}" presName="spacer" presStyleCnt="0"/>
+      <dgm:spPr/>
+    </dgm:pt>
     <dgm:pt modelId="{ED8365DF-6489-4474-AD72-A519E8BD5BF3}" type="pres">
-      <dgm:prSet presAssocID="{4B1E9948-2C1F-48C7-9BF9-20B8B7DAEB5F}" presName="parentText" presStyleLbl="node1" presStyleIdx="4" presStyleCnt="7">
+      <dgm:prSet presAssocID="{4B1E9948-2C1F-48C7-9BF9-20B8B7DAEB5F}" presName="parentText" presStyleLbl="node1" presStyleIdx="6" presStyleCnt="10">
         <dgm:presLayoutVars>
           <dgm:chMax val="0"/>
           <dgm:bulletEnabled val="1"/>
@@ -1790,7 +1898,7 @@
       <dgm:spPr/>
     </dgm:pt>
     <dgm:pt modelId="{4600E2F4-4816-42E1-84E1-9746CD5EE6E1}" type="pres">
-      <dgm:prSet presAssocID="{A40C8A38-7AAB-4A1C-B39A-DBED66B60A11}" presName="parentText" presStyleLbl="node1" presStyleIdx="5" presStyleCnt="7">
+      <dgm:prSet presAssocID="{A40C8A38-7AAB-4A1C-B39A-DBED66B60A11}" presName="parentText" presStyleLbl="node1" presStyleIdx="7" presStyleCnt="10">
         <dgm:presLayoutVars>
           <dgm:chMax val="0"/>
           <dgm:bulletEnabled val="1"/>
@@ -1803,7 +1911,20 @@
       <dgm:spPr/>
     </dgm:pt>
     <dgm:pt modelId="{3DD9623C-BD4B-4DD5-BA45-58C18A024881}" type="pres">
-      <dgm:prSet presAssocID="{9C10C83C-4CC6-4F15-8AF1-7FD6A002DF74}" presName="parentText" presStyleLbl="node1" presStyleIdx="6" presStyleCnt="7">
+      <dgm:prSet presAssocID="{9C10C83C-4CC6-4F15-8AF1-7FD6A002DF74}" presName="parentText" presStyleLbl="node1" presStyleIdx="8" presStyleCnt="10">
+        <dgm:presLayoutVars>
+          <dgm:chMax val="0"/>
+          <dgm:bulletEnabled val="1"/>
+        </dgm:presLayoutVars>
+      </dgm:prSet>
+      <dgm:spPr/>
+    </dgm:pt>
+    <dgm:pt modelId="{18D79174-C840-9B4D-AC32-09D4BC63B51F}" type="pres">
+      <dgm:prSet presAssocID="{9D13E348-B2C6-429B-8C6A-041A56D697BD}" presName="spacer" presStyleCnt="0"/>
+      <dgm:spPr/>
+    </dgm:pt>
+    <dgm:pt modelId="{47EF09D4-BA96-8E4E-9C02-848C91969397}" type="pres">
+      <dgm:prSet presAssocID="{B6047393-ED44-B540-9E08-5BD8BA526CAA}" presName="parentText" presStyleLbl="node1" presStyleIdx="9" presStyleCnt="10">
         <dgm:presLayoutVars>
           <dgm:chMax val="0"/>
           <dgm:bulletEnabled val="1"/>
@@ -1813,34 +1934,46 @@
     </dgm:pt>
   </dgm:ptLst>
   <dgm:cxnLst>
-    <dgm:cxn modelId="{1ECB5511-AEE1-4BBA-B91B-D516215FE7D6}" srcId="{72C74514-7E59-43DD-81F2-44D5759C1824}" destId="{A40C8A38-7AAB-4A1C-B39A-DBED66B60A11}" srcOrd="5" destOrd="0" parTransId="{E5A7B580-C647-42C1-94EA-2AD96FD66632}" sibTransId="{30FCC906-E4C0-41AD-A5E6-88449F9BC921}"/>
+    <dgm:cxn modelId="{A8E50C03-6576-244E-ADDE-A889F885F89B}" type="presOf" srcId="{12C6A796-E05E-4109-83A5-CA6732F07DCC}" destId="{246B3F6D-7E01-4EA4-AD38-6D0AD826CB2B}" srcOrd="0" destOrd="0" presId="urn:microsoft.com/office/officeart/2005/8/layout/vList2"/>
+    <dgm:cxn modelId="{1ECB5511-AEE1-4BBA-B91B-D516215FE7D6}" srcId="{72C74514-7E59-43DD-81F2-44D5759C1824}" destId="{A40C8A38-7AAB-4A1C-B39A-DBED66B60A11}" srcOrd="7" destOrd="0" parTransId="{E5A7B580-C647-42C1-94EA-2AD96FD66632}" sibTransId="{30FCC906-E4C0-41AD-A5E6-88449F9BC921}"/>
     <dgm:cxn modelId="{B039D11B-C065-4DB7-9C3F-9C1F1452DDD1}" srcId="{72C74514-7E59-43DD-81F2-44D5759C1824}" destId="{12C6A796-E05E-4109-83A5-CA6732F07DCC}" srcOrd="0" destOrd="0" parTransId="{A758E241-A4DE-442B-90CA-0C9C5F9396E7}" sibTransId="{13D06279-7FFC-4E91-975B-C5F631451C36}"/>
-    <dgm:cxn modelId="{E5A2F242-6C0F-452E-9348-36AAA3844FB6}" type="presOf" srcId="{59572103-8EAB-4A50-AB21-192D24EA143A}" destId="{97E83598-7549-4D53-BBE1-0E6AEBC831C5}" srcOrd="0" destOrd="0" presId="urn:microsoft.com/office/officeart/2005/8/layout/vList2"/>
     <dgm:cxn modelId="{95C9FA46-ECF1-4D14-8548-452CDC7D2175}" srcId="{72C74514-7E59-43DD-81F2-44D5759C1824}" destId="{41B0F318-681F-480C-ACBE-4C24B27636D0}" srcOrd="1" destOrd="0" parTransId="{0D659330-D588-4B5E-A5C6-35292AF1DC95}" sibTransId="{207A3D5B-4122-4CE8-B141-67DFCED8E158}"/>
+    <dgm:cxn modelId="{DB0B575B-38EC-9E4B-AA78-FAEA8F6ED7A4}" type="presOf" srcId="{A40C8A38-7AAB-4A1C-B39A-DBED66B60A11}" destId="{4600E2F4-4816-42E1-84E1-9746CD5EE6E1}" srcOrd="0" destOrd="0" presId="urn:microsoft.com/office/officeart/2005/8/layout/vList2"/>
     <dgm:cxn modelId="{F3787362-5CE9-48E2-99AE-A2FA95701E60}" srcId="{72C74514-7E59-43DD-81F2-44D5759C1824}" destId="{7157FA5E-C5A4-4039-9621-57EE8A1E448F}" srcOrd="2" destOrd="0" parTransId="{874C9894-94B6-42CC-B8D0-400E1D54079E}" sibTransId="{1E46E158-B5CD-4F93-9646-8137B2D6040A}"/>
-    <dgm:cxn modelId="{CE80F663-3A3B-4D24-B6E6-0C77D0FB47EC}" type="presOf" srcId="{A40C8A38-7AAB-4A1C-B39A-DBED66B60A11}" destId="{4600E2F4-4816-42E1-84E1-9746CD5EE6E1}" srcOrd="0" destOrd="0" presId="urn:microsoft.com/office/officeart/2005/8/layout/vList2"/>
+    <dgm:cxn modelId="{735CFF62-1B1A-4748-9F22-EAA80AE47065}" type="presOf" srcId="{E27D3E73-9AE1-6C47-BAD3-BF0CFC501738}" destId="{924973F7-934D-8F47-94DA-08F7A44621FE}" srcOrd="0" destOrd="0" presId="urn:microsoft.com/office/officeart/2005/8/layout/vList2"/>
+    <dgm:cxn modelId="{AA027D6A-3333-A445-9BBD-E27C58DF0311}" type="presOf" srcId="{B6047393-ED44-B540-9E08-5BD8BA526CAA}" destId="{47EF09D4-BA96-8E4E-9C02-848C91969397}" srcOrd="0" destOrd="0" presId="urn:microsoft.com/office/officeart/2005/8/layout/vList2"/>
     <dgm:cxn modelId="{E714E36B-BA29-4B1C-A5A6-DC818E048543}" type="presOf" srcId="{72C74514-7E59-43DD-81F2-44D5759C1824}" destId="{2DC07872-A69E-402A-96DD-C56028D57122}" srcOrd="0" destOrd="0" presId="urn:microsoft.com/office/officeart/2005/8/layout/vList2"/>
-    <dgm:cxn modelId="{676CAB7E-46F8-4503-A039-13561D369C78}" type="presOf" srcId="{12C6A796-E05E-4109-83A5-CA6732F07DCC}" destId="{246B3F6D-7E01-4EA4-AD38-6D0AD826CB2B}" srcOrd="0" destOrd="0" presId="urn:microsoft.com/office/officeart/2005/8/layout/vList2"/>
-    <dgm:cxn modelId="{98AFD998-7383-4817-8CB5-6E3ABE5884B8}" type="presOf" srcId="{7157FA5E-C5A4-4039-9621-57EE8A1E448F}" destId="{0226B3E9-17B7-42EC-B955-CDCAEF4B2B67}" srcOrd="0" destOrd="0" presId="urn:microsoft.com/office/officeart/2005/8/layout/vList2"/>
-    <dgm:cxn modelId="{327CA09F-05CE-4202-9582-3D4D816260FB}" srcId="{72C74514-7E59-43DD-81F2-44D5759C1824}" destId="{4B1E9948-2C1F-48C7-9BF9-20B8B7DAEB5F}" srcOrd="4" destOrd="0" parTransId="{209C82A6-A847-4401-95BD-B70D8C180633}" sibTransId="{E55ED0DF-D70F-4199-A2A4-04EB4B2367CB}"/>
-    <dgm:cxn modelId="{D1A120A2-3773-4B16-A081-9D5685568011}" type="presOf" srcId="{4B1E9948-2C1F-48C7-9BF9-20B8B7DAEB5F}" destId="{ED8365DF-6489-4474-AD72-A519E8BD5BF3}" srcOrd="0" destOrd="0" presId="urn:microsoft.com/office/officeart/2005/8/layout/vList2"/>
-    <dgm:cxn modelId="{0CE97AC5-ABE1-4091-9C68-7930E305F93D}" type="presOf" srcId="{9C10C83C-4CC6-4F15-8AF1-7FD6A002DF74}" destId="{3DD9623C-BD4B-4DD5-BA45-58C18A024881}" srcOrd="0" destOrd="0" presId="urn:microsoft.com/office/officeart/2005/8/layout/vList2"/>
-    <dgm:cxn modelId="{484203CC-9915-4598-B3DC-D317ECE99FF9}" type="presOf" srcId="{41B0F318-681F-480C-ACBE-4C24B27636D0}" destId="{1492B98B-63EB-43A1-8A5D-476D085DE6CB}" srcOrd="0" destOrd="0" presId="urn:microsoft.com/office/officeart/2005/8/layout/vList2"/>
-    <dgm:cxn modelId="{2037D8ED-C68E-4416-A81A-988785FE4213}" srcId="{72C74514-7E59-43DD-81F2-44D5759C1824}" destId="{9C10C83C-4CC6-4F15-8AF1-7FD6A002DF74}" srcOrd="6" destOrd="0" parTransId="{94AAFD55-CB7E-4451-A6C0-1C474555A3A7}" sibTransId="{9D13E348-B2C6-429B-8C6A-041A56D697BD}"/>
-    <dgm:cxn modelId="{8BEE4CFB-C7E5-4B83-9139-EA0C3E2FA37B}" srcId="{72C74514-7E59-43DD-81F2-44D5759C1824}" destId="{59572103-8EAB-4A50-AB21-192D24EA143A}" srcOrd="3" destOrd="0" parTransId="{B2F725CF-E266-4785-A60F-B2DFB20F05FF}" sibTransId="{8E8FBB87-05BE-4819-88DE-3D62EAC3E751}"/>
-    <dgm:cxn modelId="{1C2DFA0A-42E7-4CFD-9079-26EDE112FEA2}" type="presParOf" srcId="{2DC07872-A69E-402A-96DD-C56028D57122}" destId="{246B3F6D-7E01-4EA4-AD38-6D0AD826CB2B}" srcOrd="0" destOrd="0" presId="urn:microsoft.com/office/officeart/2005/8/layout/vList2"/>
-    <dgm:cxn modelId="{4E0527D0-2581-42EA-9113-11C15978913A}" type="presParOf" srcId="{2DC07872-A69E-402A-96DD-C56028D57122}" destId="{41FFD712-3018-4F8A-87A9-F9938E32B3BA}" srcOrd="1" destOrd="0" presId="urn:microsoft.com/office/officeart/2005/8/layout/vList2"/>
-    <dgm:cxn modelId="{963CA133-4267-4FD0-9C33-9C1E2022D06D}" type="presParOf" srcId="{2DC07872-A69E-402A-96DD-C56028D57122}" destId="{1492B98B-63EB-43A1-8A5D-476D085DE6CB}" srcOrd="2" destOrd="0" presId="urn:microsoft.com/office/officeart/2005/8/layout/vList2"/>
-    <dgm:cxn modelId="{C8B643D3-18B9-47A7-BE97-FE6696DDB36C}" type="presParOf" srcId="{2DC07872-A69E-402A-96DD-C56028D57122}" destId="{98513353-E4E7-475B-B9F1-9C2D00380F56}" srcOrd="3" destOrd="0" presId="urn:microsoft.com/office/officeart/2005/8/layout/vList2"/>
-    <dgm:cxn modelId="{D9871862-C74D-4C10-A979-8065D7835294}" type="presParOf" srcId="{2DC07872-A69E-402A-96DD-C56028D57122}" destId="{0226B3E9-17B7-42EC-B955-CDCAEF4B2B67}" srcOrd="4" destOrd="0" presId="urn:microsoft.com/office/officeart/2005/8/layout/vList2"/>
-    <dgm:cxn modelId="{E1658604-B125-4EAB-9524-0467F3D418E9}" type="presParOf" srcId="{2DC07872-A69E-402A-96DD-C56028D57122}" destId="{D3DEECF9-42A9-48EF-A0C8-AF0D7F16E2EA}" srcOrd="5" destOrd="0" presId="urn:microsoft.com/office/officeart/2005/8/layout/vList2"/>
-    <dgm:cxn modelId="{48513E78-8140-4294-818F-12E544F4AA28}" type="presParOf" srcId="{2DC07872-A69E-402A-96DD-C56028D57122}" destId="{97E83598-7549-4D53-BBE1-0E6AEBC831C5}" srcOrd="6" destOrd="0" presId="urn:microsoft.com/office/officeart/2005/8/layout/vList2"/>
-    <dgm:cxn modelId="{55AE8177-46A0-4C10-8236-B1CEABEDF7E5}" type="presParOf" srcId="{2DC07872-A69E-402A-96DD-C56028D57122}" destId="{8D81D927-B2FA-4A4B-B2D0-10300F7337DE}" srcOrd="7" destOrd="0" presId="urn:microsoft.com/office/officeart/2005/8/layout/vList2"/>
-    <dgm:cxn modelId="{AD8B4F1F-C96C-49B9-9064-ED74B11306E1}" type="presParOf" srcId="{2DC07872-A69E-402A-96DD-C56028D57122}" destId="{ED8365DF-6489-4474-AD72-A519E8BD5BF3}" srcOrd="8" destOrd="0" presId="urn:microsoft.com/office/officeart/2005/8/layout/vList2"/>
-    <dgm:cxn modelId="{DA08E024-C7EE-4C11-8FD6-87761953B78B}" type="presParOf" srcId="{2DC07872-A69E-402A-96DD-C56028D57122}" destId="{0DA84FBE-DDCE-42A0-A858-D691D521C2ED}" srcOrd="9" destOrd="0" presId="urn:microsoft.com/office/officeart/2005/8/layout/vList2"/>
-    <dgm:cxn modelId="{ABCCB9E7-5916-40CA-A657-8E7447B7116B}" type="presParOf" srcId="{2DC07872-A69E-402A-96DD-C56028D57122}" destId="{4600E2F4-4816-42E1-84E1-9746CD5EE6E1}" srcOrd="10" destOrd="0" presId="urn:microsoft.com/office/officeart/2005/8/layout/vList2"/>
-    <dgm:cxn modelId="{5A4F766A-DDAC-4755-85EA-69D89DCF6A19}" type="presParOf" srcId="{2DC07872-A69E-402A-96DD-C56028D57122}" destId="{166791EB-AD0F-434E-8229-A35C8F8D8F23}" srcOrd="11" destOrd="0" presId="urn:microsoft.com/office/officeart/2005/8/layout/vList2"/>
-    <dgm:cxn modelId="{34D42594-0F56-4F41-AD6C-AF86F21609E7}" type="presParOf" srcId="{2DC07872-A69E-402A-96DD-C56028D57122}" destId="{3DD9623C-BD4B-4DD5-BA45-58C18A024881}" srcOrd="12" destOrd="0" presId="urn:microsoft.com/office/officeart/2005/8/layout/vList2"/>
+    <dgm:cxn modelId="{5147CD80-432B-8D48-A913-2878ACEA3B1C}" type="presOf" srcId="{4B1E9948-2C1F-48C7-9BF9-20B8B7DAEB5F}" destId="{ED8365DF-6489-4474-AD72-A519E8BD5BF3}" srcOrd="0" destOrd="0" presId="urn:microsoft.com/office/officeart/2005/8/layout/vList2"/>
+    <dgm:cxn modelId="{D4955F99-B932-3F40-8BA7-7308DD0903CB}" type="presOf" srcId="{59572103-8EAB-4A50-AB21-192D24EA143A}" destId="{97E83598-7549-4D53-BBE1-0E6AEBC831C5}" srcOrd="0" destOrd="0" presId="urn:microsoft.com/office/officeart/2005/8/layout/vList2"/>
+    <dgm:cxn modelId="{327CA09F-05CE-4202-9582-3D4D816260FB}" srcId="{72C74514-7E59-43DD-81F2-44D5759C1824}" destId="{4B1E9948-2C1F-48C7-9BF9-20B8B7DAEB5F}" srcOrd="6" destOrd="0" parTransId="{209C82A6-A847-4401-95BD-B70D8C180633}" sibTransId="{E55ED0DF-D70F-4199-A2A4-04EB4B2367CB}"/>
+    <dgm:cxn modelId="{8977B2A9-2C79-1B47-B674-3329529502EC}" type="presOf" srcId="{71B775CA-F13C-7340-ABCF-22506AE4849F}" destId="{A25B77B8-1FA0-264E-8C79-E12498181616}" srcOrd="0" destOrd="0" presId="urn:microsoft.com/office/officeart/2005/8/layout/vList2"/>
+    <dgm:cxn modelId="{D9C9CEB5-9B77-FB46-BE23-01550C850EA4}" srcId="{72C74514-7E59-43DD-81F2-44D5759C1824}" destId="{B6047393-ED44-B540-9E08-5BD8BA526CAA}" srcOrd="9" destOrd="0" parTransId="{B08BF4FD-C5FE-5845-824F-2141B1C98759}" sibTransId="{2D99C50B-6557-C946-8937-D85E69C5B5B5}"/>
+    <dgm:cxn modelId="{BEE2BFC1-235B-3C4D-974E-5B9B26E3F54B}" srcId="{72C74514-7E59-43DD-81F2-44D5759C1824}" destId="{71B775CA-F13C-7340-ABCF-22506AE4849F}" srcOrd="5" destOrd="0" parTransId="{CB70B5DD-8FAB-0B48-9150-B598DB007B62}" sibTransId="{47A69B99-4CDE-2F4D-9AA0-2FBDA88A9EE3}"/>
+    <dgm:cxn modelId="{90A815D3-AFC3-A445-84C3-F6174DA6B35A}" srcId="{72C74514-7E59-43DD-81F2-44D5759C1824}" destId="{E27D3E73-9AE1-6C47-BAD3-BF0CFC501738}" srcOrd="3" destOrd="0" parTransId="{A210493B-3982-9440-87DC-195EBDD2ED0B}" sibTransId="{7CAAB2BB-E0C5-194E-BEC4-E75D02848448}"/>
+    <dgm:cxn modelId="{2CE692DE-5701-8A41-BFC5-847B67CA208C}" type="presOf" srcId="{7157FA5E-C5A4-4039-9621-57EE8A1E448F}" destId="{0226B3E9-17B7-42EC-B955-CDCAEF4B2B67}" srcOrd="0" destOrd="0" presId="urn:microsoft.com/office/officeart/2005/8/layout/vList2"/>
+    <dgm:cxn modelId="{2A004FDF-9DD2-7149-9B7C-C0908A9CA191}" type="presOf" srcId="{9C10C83C-4CC6-4F15-8AF1-7FD6A002DF74}" destId="{3DD9623C-BD4B-4DD5-BA45-58C18A024881}" srcOrd="0" destOrd="0" presId="urn:microsoft.com/office/officeart/2005/8/layout/vList2"/>
+    <dgm:cxn modelId="{2037D8ED-C68E-4416-A81A-988785FE4213}" srcId="{72C74514-7E59-43DD-81F2-44D5759C1824}" destId="{9C10C83C-4CC6-4F15-8AF1-7FD6A002DF74}" srcOrd="8" destOrd="0" parTransId="{94AAFD55-CB7E-4451-A6C0-1C474555A3A7}" sibTransId="{9D13E348-B2C6-429B-8C6A-041A56D697BD}"/>
+    <dgm:cxn modelId="{8BEE4CFB-C7E5-4B83-9139-EA0C3E2FA37B}" srcId="{72C74514-7E59-43DD-81F2-44D5759C1824}" destId="{59572103-8EAB-4A50-AB21-192D24EA143A}" srcOrd="4" destOrd="0" parTransId="{B2F725CF-E266-4785-A60F-B2DFB20F05FF}" sibTransId="{8E8FBB87-05BE-4819-88DE-3D62EAC3E751}"/>
+    <dgm:cxn modelId="{B1C6C8FB-8675-4041-B002-56D8F33C465E}" type="presOf" srcId="{41B0F318-681F-480C-ACBE-4C24B27636D0}" destId="{1492B98B-63EB-43A1-8A5D-476D085DE6CB}" srcOrd="0" destOrd="0" presId="urn:microsoft.com/office/officeart/2005/8/layout/vList2"/>
+    <dgm:cxn modelId="{57347091-4787-8541-9232-EF2646FF29F6}" type="presParOf" srcId="{2DC07872-A69E-402A-96DD-C56028D57122}" destId="{246B3F6D-7E01-4EA4-AD38-6D0AD826CB2B}" srcOrd="0" destOrd="0" presId="urn:microsoft.com/office/officeart/2005/8/layout/vList2"/>
+    <dgm:cxn modelId="{98447257-939B-9544-A610-1B88BC57E629}" type="presParOf" srcId="{2DC07872-A69E-402A-96DD-C56028D57122}" destId="{41FFD712-3018-4F8A-87A9-F9938E32B3BA}" srcOrd="1" destOrd="0" presId="urn:microsoft.com/office/officeart/2005/8/layout/vList2"/>
+    <dgm:cxn modelId="{D4B1A4E7-D81D-3C46-9B89-64109DEE4807}" type="presParOf" srcId="{2DC07872-A69E-402A-96DD-C56028D57122}" destId="{1492B98B-63EB-43A1-8A5D-476D085DE6CB}" srcOrd="2" destOrd="0" presId="urn:microsoft.com/office/officeart/2005/8/layout/vList2"/>
+    <dgm:cxn modelId="{F3E3A71A-19B5-D941-AA1B-4FDACDAE17AA}" type="presParOf" srcId="{2DC07872-A69E-402A-96DD-C56028D57122}" destId="{98513353-E4E7-475B-B9F1-9C2D00380F56}" srcOrd="3" destOrd="0" presId="urn:microsoft.com/office/officeart/2005/8/layout/vList2"/>
+    <dgm:cxn modelId="{4409C388-253E-B245-86BE-E10720E4C928}" type="presParOf" srcId="{2DC07872-A69E-402A-96DD-C56028D57122}" destId="{0226B3E9-17B7-42EC-B955-CDCAEF4B2B67}" srcOrd="4" destOrd="0" presId="urn:microsoft.com/office/officeart/2005/8/layout/vList2"/>
+    <dgm:cxn modelId="{21B2337E-2DFE-BB4C-B1F7-B3A390786CE5}" type="presParOf" srcId="{2DC07872-A69E-402A-96DD-C56028D57122}" destId="{D3DEECF9-42A9-48EF-A0C8-AF0D7F16E2EA}" srcOrd="5" destOrd="0" presId="urn:microsoft.com/office/officeart/2005/8/layout/vList2"/>
+    <dgm:cxn modelId="{BCA3A538-3C65-8F4C-9B68-C8C186D11FF8}" type="presParOf" srcId="{2DC07872-A69E-402A-96DD-C56028D57122}" destId="{924973F7-934D-8F47-94DA-08F7A44621FE}" srcOrd="6" destOrd="0" presId="urn:microsoft.com/office/officeart/2005/8/layout/vList2"/>
+    <dgm:cxn modelId="{77886754-CE25-A748-B740-C4194E284654}" type="presParOf" srcId="{2DC07872-A69E-402A-96DD-C56028D57122}" destId="{595DCBCB-55EB-824A-969B-8B5CA54CB345}" srcOrd="7" destOrd="0" presId="urn:microsoft.com/office/officeart/2005/8/layout/vList2"/>
+    <dgm:cxn modelId="{6D7B46EB-AFD1-544F-8178-B972C0448FE3}" type="presParOf" srcId="{2DC07872-A69E-402A-96DD-C56028D57122}" destId="{97E83598-7549-4D53-BBE1-0E6AEBC831C5}" srcOrd="8" destOrd="0" presId="urn:microsoft.com/office/officeart/2005/8/layout/vList2"/>
+    <dgm:cxn modelId="{5989C136-2C8B-FB48-84FE-45CF8DDD2863}" type="presParOf" srcId="{2DC07872-A69E-402A-96DD-C56028D57122}" destId="{8D81D927-B2FA-4A4B-B2D0-10300F7337DE}" srcOrd="9" destOrd="0" presId="urn:microsoft.com/office/officeart/2005/8/layout/vList2"/>
+    <dgm:cxn modelId="{0C32E564-D526-E740-894C-0F7F063B1EED}" type="presParOf" srcId="{2DC07872-A69E-402A-96DD-C56028D57122}" destId="{A25B77B8-1FA0-264E-8C79-E12498181616}" srcOrd="10" destOrd="0" presId="urn:microsoft.com/office/officeart/2005/8/layout/vList2"/>
+    <dgm:cxn modelId="{83514BDE-BA7D-4E45-A596-BF1852ADA6FB}" type="presParOf" srcId="{2DC07872-A69E-402A-96DD-C56028D57122}" destId="{DC809B77-B6AF-8946-A167-E05E337134F9}" srcOrd="11" destOrd="0" presId="urn:microsoft.com/office/officeart/2005/8/layout/vList2"/>
+    <dgm:cxn modelId="{502191B6-68ED-1E49-9A93-D863143D14F4}" type="presParOf" srcId="{2DC07872-A69E-402A-96DD-C56028D57122}" destId="{ED8365DF-6489-4474-AD72-A519E8BD5BF3}" srcOrd="12" destOrd="0" presId="urn:microsoft.com/office/officeart/2005/8/layout/vList2"/>
+    <dgm:cxn modelId="{0FE1C878-2870-054D-9802-AA09EC6DE038}" type="presParOf" srcId="{2DC07872-A69E-402A-96DD-C56028D57122}" destId="{0DA84FBE-DDCE-42A0-A858-D691D521C2ED}" srcOrd="13" destOrd="0" presId="urn:microsoft.com/office/officeart/2005/8/layout/vList2"/>
+    <dgm:cxn modelId="{7174D82C-EA10-4E47-BE07-6CBCF9322FD8}" type="presParOf" srcId="{2DC07872-A69E-402A-96DD-C56028D57122}" destId="{4600E2F4-4816-42E1-84E1-9746CD5EE6E1}" srcOrd="14" destOrd="0" presId="urn:microsoft.com/office/officeart/2005/8/layout/vList2"/>
+    <dgm:cxn modelId="{11A00048-ECF4-EE4E-B29C-E76DC21981E5}" type="presParOf" srcId="{2DC07872-A69E-402A-96DD-C56028D57122}" destId="{166791EB-AD0F-434E-8229-A35C8F8D8F23}" srcOrd="15" destOrd="0" presId="urn:microsoft.com/office/officeart/2005/8/layout/vList2"/>
+    <dgm:cxn modelId="{EBBD8A04-3B19-5041-BAC9-C71491CD17A0}" type="presParOf" srcId="{2DC07872-A69E-402A-96DD-C56028D57122}" destId="{3DD9623C-BD4B-4DD5-BA45-58C18A024881}" srcOrd="16" destOrd="0" presId="urn:microsoft.com/office/officeart/2005/8/layout/vList2"/>
+    <dgm:cxn modelId="{F13E6725-BD65-FC46-BBB1-9E209636569F}" type="presParOf" srcId="{2DC07872-A69E-402A-96DD-C56028D57122}" destId="{18D79174-C840-9B4D-AC32-09D4BC63B51F}" srcOrd="17" destOrd="0" presId="urn:microsoft.com/office/officeart/2005/8/layout/vList2"/>
+    <dgm:cxn modelId="{58A7D36F-1795-884D-ADBD-E243368B0979}" type="presParOf" srcId="{2DC07872-A69E-402A-96DD-C56028D57122}" destId="{47EF09D4-BA96-8E4E-9C02-848C91969397}" srcOrd="18" destOrd="0" presId="urn:microsoft.com/office/officeart/2005/8/layout/vList2"/>
   </dgm:cxnLst>
   <dgm:bg/>
   <dgm:whole/>
@@ -1867,8 +2000,8 @@
       </dsp:nvSpPr>
       <dsp:spPr>
         <a:xfrm>
-          <a:off x="0" y="3160"/>
-          <a:ext cx="10515600" cy="612150"/>
+          <a:off x="0" y="0"/>
+          <a:ext cx="11487396" cy="423757"/>
         </a:xfrm>
         <a:prstGeom prst="roundRect">
           <a:avLst/>
@@ -1972,8 +2105,8 @@
         </a:p>
       </dsp:txBody>
       <dsp:txXfrm>
-        <a:off x="29883" y="33043"/>
-        <a:ext cx="10455834" cy="552384"/>
+        <a:off x="20686" y="20686"/>
+        <a:ext cx="11446024" cy="382385"/>
       </dsp:txXfrm>
     </dsp:sp>
     <dsp:sp modelId="{1492B98B-63EB-43A1-8A5D-476D085DE6CB}">
@@ -1983,8 +2116,8 @@
       </dsp:nvSpPr>
       <dsp:spPr>
         <a:xfrm>
-          <a:off x="0" y="623214"/>
-          <a:ext cx="10515600" cy="612150"/>
+          <a:off x="0" y="436783"/>
+          <a:ext cx="11487396" cy="423757"/>
         </a:xfrm>
         <a:prstGeom prst="roundRect">
           <a:avLst/>
@@ -2084,8 +2217,8 @@
         </a:p>
       </dsp:txBody>
       <dsp:txXfrm>
-        <a:off x="29883" y="653097"/>
-        <a:ext cx="10455834" cy="552384"/>
+        <a:off x="20686" y="457469"/>
+        <a:ext cx="11446024" cy="382385"/>
       </dsp:txXfrm>
     </dsp:sp>
     <dsp:sp modelId="{0226B3E9-17B7-42EC-B955-CDCAEF4B2B67}">
@@ -2095,8 +2228,8 @@
       </dsp:nvSpPr>
       <dsp:spPr>
         <a:xfrm>
-          <a:off x="0" y="1246404"/>
-          <a:ext cx="10515600" cy="612150"/>
+          <a:off x="0" y="873070"/>
+          <a:ext cx="11487396" cy="423757"/>
         </a:xfrm>
         <a:prstGeom prst="roundRect">
           <a:avLst/>
@@ -2196,19 +2329,19 @@
         </a:p>
       </dsp:txBody>
       <dsp:txXfrm>
-        <a:off x="29883" y="1276287"/>
-        <a:ext cx="10455834" cy="552384"/>
+        <a:off x="20686" y="893756"/>
+        <a:ext cx="11446024" cy="382385"/>
       </dsp:txXfrm>
     </dsp:sp>
-    <dsp:sp modelId="{97E83598-7549-4D53-BBE1-0E6AEBC831C5}">
+    <dsp:sp modelId="{924973F7-934D-8F47-94DA-08F7A44621FE}">
       <dsp:nvSpPr>
         <dsp:cNvPr id="0" name=""/>
         <dsp:cNvSpPr/>
       </dsp:nvSpPr>
       <dsp:spPr>
         <a:xfrm>
-          <a:off x="0" y="1869593"/>
-          <a:ext cx="10515600" cy="612150"/>
+          <a:off x="0" y="1309358"/>
+          <a:ext cx="11487396" cy="423757"/>
         </a:xfrm>
         <a:prstGeom prst="roundRect">
           <a:avLst/>
@@ -2239,6 +2372,105 @@
             </a:gs>
             <a:gs pos="100000">
               <a:schemeClr val="accent5">
+                <a:hueOff val="0"/>
+                <a:satOff val="0"/>
+                <a:lumOff val="0"/>
+                <a:alphaOff val="0"/>
+                <a:lumMod val="99000"/>
+                <a:satMod val="120000"/>
+                <a:shade val="78000"/>
+              </a:schemeClr>
+            </a:gs>
+          </a:gsLst>
+          <a:lin ang="5400000" scaled="0"/>
+        </a:gradFill>
+        <a:ln>
+          <a:noFill/>
+        </a:ln>
+        <a:effectLst/>
+      </dsp:spPr>
+      <dsp:style>
+        <a:lnRef idx="0">
+          <a:scrgbClr r="0" g="0" b="0"/>
+        </a:lnRef>
+        <a:fillRef idx="3">
+          <a:scrgbClr r="0" g="0" b="0"/>
+        </a:fillRef>
+        <a:effectRef idx="2">
+          <a:scrgbClr r="0" g="0" b="0"/>
+        </a:effectRef>
+        <a:fontRef idx="minor">
+          <a:schemeClr val="lt1"/>
+        </a:fontRef>
+      </dsp:style>
+      <dsp:txBody>
+        <a:bodyPr spcFirstLastPara="0" vert="horz" wrap="square" lIns="76200" tIns="76200" rIns="76200" bIns="76200" numCol="1" spcCol="1270" anchor="ctr" anchorCtr="0">
+          <a:noAutofit/>
+        </a:bodyPr>
+        <a:lstStyle/>
+        <a:p>
+          <a:pPr marL="0" lvl="0" indent="0" algn="l" defTabSz="889000">
+            <a:lnSpc>
+              <a:spcPct val="90000"/>
+            </a:lnSpc>
+            <a:spcBef>
+              <a:spcPct val="0"/>
+            </a:spcBef>
+            <a:spcAft>
+              <a:spcPct val="35000"/>
+            </a:spcAft>
+            <a:buNone/>
+          </a:pPr>
+          <a:r>
+            <a:rPr lang="en-US" sz="2000" kern="1200" dirty="0"/>
+            <a:t>Processing of the POI (KDE)</a:t>
+          </a:r>
+        </a:p>
+      </dsp:txBody>
+      <dsp:txXfrm>
+        <a:off x="20686" y="1330044"/>
+        <a:ext cx="11446024" cy="382385"/>
+      </dsp:txXfrm>
+    </dsp:sp>
+    <dsp:sp modelId="{97E83598-7549-4D53-BBE1-0E6AEBC831C5}">
+      <dsp:nvSpPr>
+        <dsp:cNvPr id="0" name=""/>
+        <dsp:cNvSpPr/>
+      </dsp:nvSpPr>
+      <dsp:spPr>
+        <a:xfrm>
+          <a:off x="0" y="1745646"/>
+          <a:ext cx="11487396" cy="423757"/>
+        </a:xfrm>
+        <a:prstGeom prst="roundRect">
+          <a:avLst/>
+        </a:prstGeom>
+        <a:gradFill rotWithShape="0">
+          <a:gsLst>
+            <a:gs pos="0">
+              <a:schemeClr val="accent6">
+                <a:hueOff val="0"/>
+                <a:satOff val="0"/>
+                <a:lumOff val="0"/>
+                <a:alphaOff val="0"/>
+                <a:satMod val="103000"/>
+                <a:lumMod val="102000"/>
+                <a:tint val="94000"/>
+              </a:schemeClr>
+            </a:gs>
+            <a:gs pos="50000">
+              <a:schemeClr val="accent6">
+                <a:hueOff val="0"/>
+                <a:satOff val="0"/>
+                <a:lumOff val="0"/>
+                <a:alphaOff val="0"/>
+                <a:satMod val="110000"/>
+                <a:lumMod val="100000"/>
+                <a:shade val="100000"/>
+              </a:schemeClr>
+            </a:gs>
+            <a:gs pos="100000">
+              <a:schemeClr val="accent6">
                 <a:hueOff val="0"/>
                 <a:satOff val="0"/>
                 <a:lumOff val="0"/>
@@ -2340,19 +2572,19 @@
         </a:p>
       </dsp:txBody>
       <dsp:txXfrm>
-        <a:off x="29883" y="1899476"/>
-        <a:ext cx="10455834" cy="552384"/>
+        <a:off x="20686" y="1766332"/>
+        <a:ext cx="11446024" cy="382385"/>
       </dsp:txXfrm>
     </dsp:sp>
-    <dsp:sp modelId="{ED8365DF-6489-4474-AD72-A519E8BD5BF3}">
+    <dsp:sp modelId="{A25B77B8-1FA0-264E-8C79-E12498181616}">
       <dsp:nvSpPr>
         <dsp:cNvPr id="0" name=""/>
         <dsp:cNvSpPr/>
       </dsp:nvSpPr>
       <dsp:spPr>
         <a:xfrm>
-          <a:off x="0" y="2492783"/>
-          <a:ext cx="10515600" cy="612150"/>
+          <a:off x="0" y="2181933"/>
+          <a:ext cx="11487396" cy="423757"/>
         </a:xfrm>
         <a:prstGeom prst="roundRect">
           <a:avLst/>
@@ -2360,7 +2592,7 @@
         <a:gradFill rotWithShape="0">
           <a:gsLst>
             <a:gs pos="0">
-              <a:schemeClr val="accent6">
+              <a:schemeClr val="accent2">
                 <a:hueOff val="0"/>
                 <a:satOff val="0"/>
                 <a:lumOff val="0"/>
@@ -2371,7 +2603,7 @@
               </a:schemeClr>
             </a:gs>
             <a:gs pos="50000">
-              <a:schemeClr val="accent6">
+              <a:schemeClr val="accent2">
                 <a:hueOff val="0"/>
                 <a:satOff val="0"/>
                 <a:lumOff val="0"/>
@@ -2382,7 +2614,106 @@
               </a:schemeClr>
             </a:gs>
             <a:gs pos="100000">
-              <a:schemeClr val="accent6">
+              <a:schemeClr val="accent2">
+                <a:hueOff val="0"/>
+                <a:satOff val="0"/>
+                <a:lumOff val="0"/>
+                <a:alphaOff val="0"/>
+                <a:lumMod val="99000"/>
+                <a:satMod val="120000"/>
+                <a:shade val="78000"/>
+              </a:schemeClr>
+            </a:gs>
+          </a:gsLst>
+          <a:lin ang="5400000" scaled="0"/>
+        </a:gradFill>
+        <a:ln>
+          <a:noFill/>
+        </a:ln>
+        <a:effectLst/>
+      </dsp:spPr>
+      <dsp:style>
+        <a:lnRef idx="0">
+          <a:scrgbClr r="0" g="0" b="0"/>
+        </a:lnRef>
+        <a:fillRef idx="3">
+          <a:scrgbClr r="0" g="0" b="0"/>
+        </a:fillRef>
+        <a:effectRef idx="2">
+          <a:scrgbClr r="0" g="0" b="0"/>
+        </a:effectRef>
+        <a:fontRef idx="minor">
+          <a:schemeClr val="lt1"/>
+        </a:fontRef>
+      </dsp:style>
+      <dsp:txBody>
+        <a:bodyPr spcFirstLastPara="0" vert="horz" wrap="square" lIns="76200" tIns="76200" rIns="76200" bIns="76200" numCol="1" spcCol="1270" anchor="ctr" anchorCtr="0">
+          <a:noAutofit/>
+        </a:bodyPr>
+        <a:lstStyle/>
+        <a:p>
+          <a:pPr marL="0" lvl="0" indent="0" algn="l" defTabSz="889000">
+            <a:lnSpc>
+              <a:spcPct val="90000"/>
+            </a:lnSpc>
+            <a:spcBef>
+              <a:spcPct val="0"/>
+            </a:spcBef>
+            <a:spcAft>
+              <a:spcPct val="35000"/>
+            </a:spcAft>
+            <a:buNone/>
+          </a:pPr>
+          <a:r>
+            <a:rPr lang="en-US" sz="2000" kern="1200" dirty="0"/>
+            <a:t>Activity Classification Model - ground truth</a:t>
+          </a:r>
+        </a:p>
+      </dsp:txBody>
+      <dsp:txXfrm>
+        <a:off x="20686" y="2202619"/>
+        <a:ext cx="11446024" cy="382385"/>
+      </dsp:txXfrm>
+    </dsp:sp>
+    <dsp:sp modelId="{ED8365DF-6489-4474-AD72-A519E8BD5BF3}">
+      <dsp:nvSpPr>
+        <dsp:cNvPr id="0" name=""/>
+        <dsp:cNvSpPr/>
+      </dsp:nvSpPr>
+      <dsp:spPr>
+        <a:xfrm>
+          <a:off x="0" y="2618221"/>
+          <a:ext cx="11487396" cy="423757"/>
+        </a:xfrm>
+        <a:prstGeom prst="roundRect">
+          <a:avLst/>
+        </a:prstGeom>
+        <a:gradFill rotWithShape="0">
+          <a:gsLst>
+            <a:gs pos="0">
+              <a:schemeClr val="accent3">
+                <a:hueOff val="0"/>
+                <a:satOff val="0"/>
+                <a:lumOff val="0"/>
+                <a:alphaOff val="0"/>
+                <a:satMod val="103000"/>
+                <a:lumMod val="102000"/>
+                <a:tint val="94000"/>
+              </a:schemeClr>
+            </a:gs>
+            <a:gs pos="50000">
+              <a:schemeClr val="accent3">
+                <a:hueOff val="0"/>
+                <a:satOff val="0"/>
+                <a:lumOff val="0"/>
+                <a:alphaOff val="0"/>
+                <a:satMod val="110000"/>
+                <a:lumMod val="100000"/>
+                <a:shade val="100000"/>
+              </a:schemeClr>
+            </a:gs>
+            <a:gs pos="100000">
+              <a:schemeClr val="accent3">
                 <a:hueOff val="0"/>
                 <a:satOff val="0"/>
                 <a:lumOff val="0"/>
@@ -2460,8 +2791,8 @@
         </a:p>
       </dsp:txBody>
       <dsp:txXfrm>
-        <a:off x="29883" y="2522666"/>
-        <a:ext cx="10455834" cy="552384"/>
+        <a:off x="20686" y="2638907"/>
+        <a:ext cx="11446024" cy="382385"/>
       </dsp:txXfrm>
     </dsp:sp>
     <dsp:sp modelId="{4600E2F4-4816-42E1-84E1-9746CD5EE6E1}">
@@ -2471,8 +2802,8 @@
       </dsp:nvSpPr>
       <dsp:spPr>
         <a:xfrm>
-          <a:off x="0" y="3115972"/>
-          <a:ext cx="10515600" cy="612150"/>
+          <a:off x="0" y="3054509"/>
+          <a:ext cx="11487396" cy="423757"/>
         </a:xfrm>
         <a:prstGeom prst="roundRect">
           <a:avLst/>
@@ -2480,7 +2811,7 @@
         <a:gradFill rotWithShape="0">
           <a:gsLst>
             <a:gs pos="0">
-              <a:schemeClr val="accent2">
+              <a:schemeClr val="accent4">
                 <a:hueOff val="0"/>
                 <a:satOff val="0"/>
                 <a:lumOff val="0"/>
@@ -2491,7 +2822,7 @@
               </a:schemeClr>
             </a:gs>
             <a:gs pos="50000">
-              <a:schemeClr val="accent2">
+              <a:schemeClr val="accent4">
                 <a:hueOff val="0"/>
                 <a:satOff val="0"/>
                 <a:lumOff val="0"/>
@@ -2502,7 +2833,7 @@
               </a:schemeClr>
             </a:gs>
             <a:gs pos="100000">
-              <a:schemeClr val="accent2">
+              <a:schemeClr val="accent4">
                 <a:hueOff val="0"/>
                 <a:satOff val="0"/>
                 <a:lumOff val="0"/>
@@ -2592,8 +2923,8 @@
         </a:p>
       </dsp:txBody>
       <dsp:txXfrm>
-        <a:off x="29883" y="3145855"/>
-        <a:ext cx="10455834" cy="552384"/>
+        <a:off x="20686" y="3075195"/>
+        <a:ext cx="11446024" cy="382385"/>
       </dsp:txXfrm>
     </dsp:sp>
     <dsp:sp modelId="{3DD9623C-BD4B-4DD5-BA45-58C18A024881}">
@@ -2603,8 +2934,8 @@
       </dsp:nvSpPr>
       <dsp:spPr>
         <a:xfrm>
-          <a:off x="0" y="3739162"/>
-          <a:ext cx="10515600" cy="612150"/>
+          <a:off x="0" y="3490796"/>
+          <a:ext cx="11487396" cy="423757"/>
         </a:xfrm>
         <a:prstGeom prst="roundRect">
           <a:avLst/>
@@ -2612,7 +2943,7 @@
         <a:gradFill rotWithShape="0">
           <a:gsLst>
             <a:gs pos="0">
-              <a:schemeClr val="accent3">
+              <a:schemeClr val="accent5">
                 <a:hueOff val="0"/>
                 <a:satOff val="0"/>
                 <a:lumOff val="0"/>
@@ -2623,7 +2954,7 @@
               </a:schemeClr>
             </a:gs>
             <a:gs pos="50000">
-              <a:schemeClr val="accent3">
+              <a:schemeClr val="accent5">
                 <a:hueOff val="0"/>
                 <a:satOff val="0"/>
                 <a:lumOff val="0"/>
@@ -2634,7 +2965,7 @@
               </a:schemeClr>
             </a:gs>
             <a:gs pos="100000">
-              <a:schemeClr val="accent3">
+              <a:schemeClr val="accent5">
                 <a:hueOff val="0"/>
                 <a:satOff val="0"/>
                 <a:lumOff val="0"/>
@@ -2696,8 +3027,107 @@
         </a:p>
       </dsp:txBody>
       <dsp:txXfrm>
-        <a:off x="29883" y="3769045"/>
-        <a:ext cx="10455834" cy="552384"/>
+        <a:off x="20686" y="3511482"/>
+        <a:ext cx="11446024" cy="382385"/>
+      </dsp:txXfrm>
+    </dsp:sp>
+    <dsp:sp modelId="{47EF09D4-BA96-8E4E-9C02-848C91969397}">
+      <dsp:nvSpPr>
+        <dsp:cNvPr id="0" name=""/>
+        <dsp:cNvSpPr/>
+      </dsp:nvSpPr>
+      <dsp:spPr>
+        <a:xfrm>
+          <a:off x="0" y="3927084"/>
+          <a:ext cx="11487396" cy="423757"/>
+        </a:xfrm>
+        <a:prstGeom prst="roundRect">
+          <a:avLst/>
+        </a:prstGeom>
+        <a:gradFill rotWithShape="0">
+          <a:gsLst>
+            <a:gs pos="0">
+              <a:schemeClr val="accent6">
+                <a:hueOff val="0"/>
+                <a:satOff val="0"/>
+                <a:lumOff val="0"/>
+                <a:alphaOff val="0"/>
+                <a:satMod val="103000"/>
+                <a:lumMod val="102000"/>
+                <a:tint val="94000"/>
+              </a:schemeClr>
+            </a:gs>
+            <a:gs pos="50000">
+              <a:schemeClr val="accent6">
+                <a:hueOff val="0"/>
+                <a:satOff val="0"/>
+                <a:lumOff val="0"/>
+                <a:alphaOff val="0"/>
+                <a:satMod val="110000"/>
+                <a:lumMod val="100000"/>
+                <a:shade val="100000"/>
+              </a:schemeClr>
+            </a:gs>
+            <a:gs pos="100000">
+              <a:schemeClr val="accent6">
+                <a:hueOff val="0"/>
+                <a:satOff val="0"/>
+                <a:lumOff val="0"/>
+                <a:alphaOff val="0"/>
+                <a:lumMod val="99000"/>
+                <a:satMod val="120000"/>
+                <a:shade val="78000"/>
+              </a:schemeClr>
+            </a:gs>
+          </a:gsLst>
+          <a:lin ang="5400000" scaled="0"/>
+        </a:gradFill>
+        <a:ln>
+          <a:noFill/>
+        </a:ln>
+        <a:effectLst/>
+      </dsp:spPr>
+      <dsp:style>
+        <a:lnRef idx="0">
+          <a:scrgbClr r="0" g="0" b="0"/>
+        </a:lnRef>
+        <a:fillRef idx="3">
+          <a:scrgbClr r="0" g="0" b="0"/>
+        </a:fillRef>
+        <a:effectRef idx="2">
+          <a:scrgbClr r="0" g="0" b="0"/>
+        </a:effectRef>
+        <a:fontRef idx="minor">
+          <a:schemeClr val="lt1"/>
+        </a:fontRef>
+      </dsp:style>
+      <dsp:txBody>
+        <a:bodyPr spcFirstLastPara="0" vert="horz" wrap="square" lIns="76200" tIns="76200" rIns="76200" bIns="76200" numCol="1" spcCol="1270" anchor="ctr" anchorCtr="0">
+          <a:noAutofit/>
+        </a:bodyPr>
+        <a:lstStyle/>
+        <a:p>
+          <a:pPr marL="0" lvl="0" indent="0" algn="l" defTabSz="889000">
+            <a:lnSpc>
+              <a:spcPct val="90000"/>
+            </a:lnSpc>
+            <a:spcBef>
+              <a:spcPct val="0"/>
+            </a:spcBef>
+            <a:spcAft>
+              <a:spcPct val="35000"/>
+            </a:spcAft>
+            <a:buNone/>
+          </a:pPr>
+          <a:r>
+            <a:rPr lang="en-US" sz="2000" kern="1200" dirty="0"/>
+            <a:t>Eventually add an isochrone with different speed</a:t>
+          </a:r>
+        </a:p>
+      </dsp:txBody>
+      <dsp:txXfrm>
+        <a:off x="20686" y="3947770"/>
+        <a:ext cx="11446024" cy="382385"/>
       </dsp:txXfrm>
     </dsp:sp>
   </dsp:spTree>
@@ -7355,7 +7785,7 @@
           <p:nvPr/>
         </p:nvPicPr>
         <p:blipFill>
-          <a:blip r:embed="rId3">
+          <a:blip r:embed="rId2">
             <a:extLst>
               <a:ext uri="{28A0092B-C50C-407E-A947-70E740481C1C}">
                 <a14:useLocalDpi xmlns:a14="http://schemas.microsoft.com/office/drawing/2010/main" val="0"/>
@@ -7861,11 +8291,6 @@
   <p:clrMapOvr>
     <a:masterClrMapping/>
   </p:clrMapOvr>
-  <p:extLst>
-    <p:ext uri="{6950BFC3-D8DA-4A85-94F7-54DA5524770B}">
-      <p188:commentRel xmlns:p188="http://schemas.microsoft.com/office/powerpoint/2018/8/main" r:id="rId2"/>
-    </p:ext>
-  </p:extLst>
 </p:sld>
 </file>
 
@@ -7935,12 +8360,23 @@
           <a:bodyPr/>
           <a:lstStyle/>
           <a:p>
-            <a:r>
-              <a:rPr lang="fr-CH" dirty="0" err="1"/>
+            <a:pPr marL="0" indent="0">
+              <a:buNone/>
+            </a:pPr>
+            <a:r>
+              <a:rPr lang="fr-CH" dirty="0" err="1">
+                <a:solidFill>
+                  <a:srgbClr val="98B2CB"/>
+                </a:solidFill>
+              </a:rPr>
               <a:t>Integration</a:t>
             </a:r>
             <a:r>
-              <a:rPr lang="fr-CH" dirty="0"/>
+              <a:rPr lang="fr-CH" dirty="0">
+                <a:solidFill>
+                  <a:srgbClr val="98B2CB"/>
+                </a:solidFill>
+              </a:rPr>
               <a:t> of the ZVV time plan </a:t>
             </a:r>
           </a:p>
@@ -7986,8 +8422,14 @@
             </a:r>
           </a:p>
           <a:p>
+            <a:pPr marL="0" indent="0">
+              <a:buNone/>
+            </a:pPr>
             <a:r>
               <a:rPr lang="fr-CH" dirty="0">
+                <a:solidFill>
+                  <a:srgbClr val="98B2CB"/>
+                </a:solidFill>
                 <a:sym typeface="Wingdings" panose="05000000000000000000" pitchFamily="2" charset="2"/>
               </a:rPr>
               <a:t>Anonymisation of the data</a:t>
@@ -13951,14 +14393,14 @@
             <p:ph idx="1"/>
             <p:extLst>
               <p:ext uri="{D42A27DB-BD31-4B8C-83A1-F6EECF244321}">
-                <p14:modId xmlns:p14="http://schemas.microsoft.com/office/powerpoint/2010/main" val="1434756831"/>
+                <p14:modId xmlns:p14="http://schemas.microsoft.com/office/powerpoint/2010/main" val="1145489638"/>
               </p:ext>
             </p:extLst>
           </p:nvPr>
         </p:nvGraphicFramePr>
         <p:xfrm>
-          <a:off x="838200" y="1825625"/>
-          <a:ext cx="10515600" cy="4351338"/>
+          <a:off x="257299" y="1588119"/>
+          <a:ext cx="11487397" cy="4351338"/>
         </p:xfrm>
         <a:graphic>
           <a:graphicData uri="http://schemas.openxmlformats.org/drawingml/2006/diagram">
@@ -13966,42 +14408,6 @@
           </a:graphicData>
         </a:graphic>
       </p:graphicFrame>
-      <p:pic>
-        <p:nvPicPr>
-          <p:cNvPr id="12" name="Graphic 11" descr="Checkbox Ticked with solid fill">
-            <a:extLst>
-              <a:ext uri="{FF2B5EF4-FFF2-40B4-BE49-F238E27FC236}">
-                <a16:creationId xmlns:a16="http://schemas.microsoft.com/office/drawing/2014/main" id="{A3023F9A-E358-3DBF-913D-70EF311A1529}"/>
-              </a:ext>
-            </a:extLst>
-          </p:cNvPr>
-          <p:cNvPicPr>
-            <a:picLocks noChangeAspect="1"/>
-          </p:cNvPicPr>
-          <p:nvPr/>
-        </p:nvPicPr>
-        <p:blipFill>
-          <a:blip>
-            <a:extLst>
-              <a:ext uri="{96DAC541-7B7A-43D3-8B79-37D633B846F1}">
-                <asvg:svgBlip xmlns:asvg="http://schemas.microsoft.com/office/drawing/2016/SVG/main" r:embed="rId7"/>
-              </a:ext>
-            </a:extLst>
-          </a:blip>
-          <a:stretch>
-            <a:fillRect/>
-          </a:stretch>
-        </p:blipFill>
-        <p:spPr>
-          <a:xfrm>
-            <a:off x="10613423" y="2370297"/>
-            <a:ext cx="730038" cy="730038"/>
-          </a:xfrm>
-          <a:prstGeom prst="rect">
-            <a:avLst/>
-          </a:prstGeom>
-        </p:spPr>
-      </p:pic>
       <p:pic>
         <p:nvPicPr>
           <p:cNvPr id="4" name="Graphic 3" descr="Checkbox Ticked with solid fill">
@@ -14030,8 +14436,8 @@
         </p:blipFill>
         <p:spPr>
           <a:xfrm>
-            <a:off x="10623762" y="1783928"/>
-            <a:ext cx="730038" cy="730038"/>
+            <a:off x="11199615" y="1588119"/>
+            <a:ext cx="493686" cy="493686"/>
           </a:xfrm>
           <a:prstGeom prst="rect">
             <a:avLst/>
@@ -14040,10 +14446,10 @@
       </p:pic>
       <p:pic>
         <p:nvPicPr>
-          <p:cNvPr id="5" name="Graphic 4" descr="Checkbox Ticked with solid fill">
+          <p:cNvPr id="9" name="Graphic 8" descr="Checkbox Ticked with solid fill">
             <a:extLst>
               <a:ext uri="{FF2B5EF4-FFF2-40B4-BE49-F238E27FC236}">
-                <a16:creationId xmlns:a16="http://schemas.microsoft.com/office/drawing/2014/main" id="{65FA58BF-3231-B8D6-4E08-A8E836ED05BD}"/>
+                <a16:creationId xmlns:a16="http://schemas.microsoft.com/office/drawing/2014/main" id="{BA0593B1-A44A-3CB2-2BC5-9328627EDE26}"/>
               </a:ext>
             </a:extLst>
           </p:cNvPr>
@@ -14066,8 +14472,8 @@
         </p:blipFill>
         <p:spPr>
           <a:xfrm>
-            <a:off x="10613423" y="2992583"/>
-            <a:ext cx="730038" cy="730038"/>
+            <a:off x="11199615" y="1986852"/>
+            <a:ext cx="493686" cy="493686"/>
           </a:xfrm>
           <a:prstGeom prst="rect">
             <a:avLst/>
@@ -14076,10 +14482,10 @@
       </p:pic>
       <p:pic>
         <p:nvPicPr>
-          <p:cNvPr id="6" name="Graphic 5" descr="Checkbox Ticked with solid fill">
+          <p:cNvPr id="11" name="Graphic 10" descr="Checkbox Ticked with solid fill">
             <a:extLst>
               <a:ext uri="{FF2B5EF4-FFF2-40B4-BE49-F238E27FC236}">
-                <a16:creationId xmlns:a16="http://schemas.microsoft.com/office/drawing/2014/main" id="{68B16695-A7DE-7F0A-7798-7A04FB9C77BE}"/>
+                <a16:creationId xmlns:a16="http://schemas.microsoft.com/office/drawing/2014/main" id="{880A0908-A9F2-47C2-2799-232D227DC9C4}"/>
               </a:ext>
             </a:extLst>
           </p:cNvPr>
@@ -14102,8 +14508,8 @@
         </p:blipFill>
         <p:spPr>
           <a:xfrm>
-            <a:off x="10623762" y="3614870"/>
-            <a:ext cx="730038" cy="730038"/>
+            <a:off x="11199615" y="2419996"/>
+            <a:ext cx="493686" cy="493686"/>
           </a:xfrm>
           <a:prstGeom prst="rect">
             <a:avLst/>
@@ -14112,10 +14518,10 @@
       </p:pic>
       <p:pic>
         <p:nvPicPr>
-          <p:cNvPr id="3" name="Graphic 2" descr="Checkbox Ticked with solid fill">
+          <p:cNvPr id="17" name="Graphic 16" descr="Checkbox Ticked with solid fill">
             <a:extLst>
               <a:ext uri="{FF2B5EF4-FFF2-40B4-BE49-F238E27FC236}">
-                <a16:creationId xmlns:a16="http://schemas.microsoft.com/office/drawing/2014/main" id="{FA2DE613-F1D5-2989-D88C-8E6AED6156DA}"/>
+                <a16:creationId xmlns:a16="http://schemas.microsoft.com/office/drawing/2014/main" id="{69F89AA4-1D43-74EB-8B59-6A4C58FA3ACC}"/>
               </a:ext>
             </a:extLst>
           </p:cNvPr>
@@ -14138,8 +14544,8 @@
         </p:blipFill>
         <p:spPr>
           <a:xfrm>
-            <a:off x="10593653" y="4273073"/>
-            <a:ext cx="730038" cy="730038"/>
+            <a:off x="11199615" y="3270102"/>
+            <a:ext cx="493686" cy="493686"/>
           </a:xfrm>
           <a:prstGeom prst="rect">
             <a:avLst/>
@@ -14148,10 +14554,10 @@
       </p:pic>
       <p:pic>
         <p:nvPicPr>
-          <p:cNvPr id="7" name="Graphic 6" descr="Checkbox Ticked with solid fill">
+          <p:cNvPr id="19" name="Graphic 18" descr="Checkbox Ticked with solid fill">
             <a:extLst>
               <a:ext uri="{FF2B5EF4-FFF2-40B4-BE49-F238E27FC236}">
-                <a16:creationId xmlns:a16="http://schemas.microsoft.com/office/drawing/2014/main" id="{E1F16737-3E02-BFA5-BEF3-8E01D6A89809}"/>
+                <a16:creationId xmlns:a16="http://schemas.microsoft.com/office/drawing/2014/main" id="{F102AEA0-0F61-0B4A-CD3B-9C44DBE5AF17}"/>
               </a:ext>
             </a:extLst>
           </p:cNvPr>
@@ -14174,8 +14580,8 @@
         </p:blipFill>
         <p:spPr>
           <a:xfrm>
-            <a:off x="10613423" y="4859999"/>
-            <a:ext cx="730038" cy="730038"/>
+            <a:off x="11199615" y="4191161"/>
+            <a:ext cx="493686" cy="493686"/>
           </a:xfrm>
           <a:prstGeom prst="rect">
             <a:avLst/>
@@ -14184,10 +14590,10 @@
       </p:pic>
       <p:pic>
         <p:nvPicPr>
-          <p:cNvPr id="8" name="Graphic 7" descr="Checkbox Ticked with solid fill">
+          <p:cNvPr id="20" name="Graphic 19" descr="Checkbox Ticked with solid fill">
             <a:extLst>
               <a:ext uri="{FF2B5EF4-FFF2-40B4-BE49-F238E27FC236}">
-                <a16:creationId xmlns:a16="http://schemas.microsoft.com/office/drawing/2014/main" id="{3E0A8CC6-3214-EF38-9053-422EFD396D2C}"/>
+                <a16:creationId xmlns:a16="http://schemas.microsoft.com/office/drawing/2014/main" id="{785F3BEE-0B67-EA87-B45C-91FEBEEA3866}"/>
               </a:ext>
             </a:extLst>
           </p:cNvPr>
@@ -14210,8 +14616,44 @@
         </p:blipFill>
         <p:spPr>
           <a:xfrm>
-            <a:off x="10613423" y="5488622"/>
-            <a:ext cx="730038" cy="730038"/>
+            <a:off x="11199615" y="4589894"/>
+            <a:ext cx="493686" cy="493686"/>
+          </a:xfrm>
+          <a:prstGeom prst="rect">
+            <a:avLst/>
+          </a:prstGeom>
+        </p:spPr>
+      </p:pic>
+      <p:pic>
+        <p:nvPicPr>
+          <p:cNvPr id="21" name="Graphic 20" descr="Checkbox Ticked with solid fill">
+            <a:extLst>
+              <a:ext uri="{FF2B5EF4-FFF2-40B4-BE49-F238E27FC236}">
+                <a16:creationId xmlns:a16="http://schemas.microsoft.com/office/drawing/2014/main" id="{71FC3F3B-E77A-C798-ACE3-C9878A1FC046}"/>
+              </a:ext>
+            </a:extLst>
+          </p:cNvPr>
+          <p:cNvPicPr>
+            <a:picLocks noChangeAspect="1"/>
+          </p:cNvPicPr>
+          <p:nvPr/>
+        </p:nvPicPr>
+        <p:blipFill>
+          <a:blip>
+            <a:extLst>
+              <a:ext uri="{96DAC541-7B7A-43D3-8B79-37D633B846F1}">
+                <asvg:svgBlip xmlns:asvg="http://schemas.microsoft.com/office/drawing/2016/SVG/main" r:embed="rId7"/>
+              </a:ext>
+            </a:extLst>
+          </a:blip>
+          <a:stretch>
+            <a:fillRect/>
+          </a:stretch>
+        </p:blipFill>
+        <p:spPr>
+          <a:xfrm>
+            <a:off x="11199615" y="5023038"/>
+            <a:ext cx="493686" cy="493686"/>
           </a:xfrm>
           <a:prstGeom prst="rect">
             <a:avLst/>
@@ -18684,7 +19126,7 @@
           <a:p>
             <a:pPr algn="ctr"/>
             <a:r>
-              <a:rPr lang="en-US" kern="1200">
+              <a:rPr lang="en-US" kern="1200" dirty="0">
                 <a:solidFill>
                   <a:schemeClr val="tx1"/>
                 </a:solidFill>
@@ -18729,7 +19171,7 @@
               <a:buNone/>
             </a:pPr>
             <a:r>
-              <a:rPr lang="en-US" sz="1800" kern="1200">
+              <a:rPr lang="en-US" sz="1800" kern="1200" dirty="0">
                 <a:solidFill>
                   <a:schemeClr val="tx1"/>
                 </a:solidFill>
@@ -18825,9 +19267,9 @@
           </p:nvPr>
         </p:nvSpPr>
         <p:spPr>
-          <a:xfrm rot="16200000">
-            <a:off x="-4071730" y="91364"/>
-            <a:ext cx="10515600" cy="1325563"/>
+          <a:xfrm>
+            <a:off x="350281" y="362053"/>
+            <a:ext cx="4772374" cy="923331"/>
           </a:xfrm>
         </p:spPr>
         <p:txBody>
@@ -18837,10 +19279,9 @@
           <a:lstStyle/>
           <a:p>
             <a:r>
-              <a:rPr lang="en-001" b="1" dirty="0"/>
+              <a:rPr lang="en-001" sz="2800" dirty="0"/>
               <a:t>Accessibility Gap</a:t>
             </a:r>
-            <a:endParaRPr lang="en-001" dirty="0"/>
           </a:p>
         </p:txBody>
       </p:sp>
@@ -18872,7 +19313,7 @@
         </p:blipFill>
         <p:spPr>
           <a:xfrm>
-            <a:off x="1848852" y="475849"/>
+            <a:off x="3227078" y="362053"/>
             <a:ext cx="8964922" cy="6133894"/>
           </a:xfrm>
           <a:prstGeom prst="rect">
@@ -18880,6 +19321,98 @@
           </a:prstGeom>
         </p:spPr>
       </p:pic>
+      <p:sp>
+        <p:nvSpPr>
+          <p:cNvPr id="4" name="TextBox 3">
+            <a:extLst>
+              <a:ext uri="{FF2B5EF4-FFF2-40B4-BE49-F238E27FC236}">
+                <a16:creationId xmlns:a16="http://schemas.microsoft.com/office/drawing/2014/main" id="{A925C2D4-CDB6-BAF2-C575-7E79A09D7F3E}"/>
+              </a:ext>
+            </a:extLst>
+          </p:cNvPr>
+          <p:cNvSpPr txBox="1"/>
+          <p:nvPr/>
+        </p:nvSpPr>
+        <p:spPr>
+          <a:xfrm>
+            <a:off x="350281" y="1285384"/>
+            <a:ext cx="2876797" cy="923330"/>
+          </a:xfrm>
+          <a:prstGeom prst="rect">
+            <a:avLst/>
+          </a:prstGeom>
+          <a:noFill/>
+        </p:spPr>
+        <p:txBody>
+          <a:bodyPr wrap="square">
+            <a:spAutoFit/>
+          </a:bodyPr>
+          <a:lstStyle/>
+          <a:p>
+            <a:r>
+              <a:rPr lang="fr-CH" sz="1800" dirty="0"/>
+              <a:t>How </a:t>
+            </a:r>
+            <a:r>
+              <a:rPr lang="fr-CH" sz="1800" dirty="0" err="1"/>
+              <a:t>does</a:t>
+            </a:r>
+            <a:r>
+              <a:rPr lang="fr-CH" sz="1800" dirty="0"/>
+              <a:t> </a:t>
+            </a:r>
+            <a:r>
+              <a:rPr lang="fr-CH" sz="1800" dirty="0" err="1"/>
+              <a:t>actual</a:t>
+            </a:r>
+            <a:r>
+              <a:rPr lang="fr-CH" sz="1800" dirty="0"/>
+              <a:t> </a:t>
+            </a:r>
+            <a:r>
+              <a:rPr lang="fr-CH" sz="1800" dirty="0" err="1"/>
+              <a:t>mobility</a:t>
+            </a:r>
+            <a:r>
+              <a:rPr lang="fr-CH" sz="1800" dirty="0"/>
+              <a:t> </a:t>
+            </a:r>
+            <a:r>
+              <a:rPr lang="fr-CH" sz="1800" dirty="0" err="1"/>
+              <a:t>differ</a:t>
+            </a:r>
+            <a:r>
+              <a:rPr lang="fr-CH" sz="1800" dirty="0"/>
+              <a:t> </a:t>
+            </a:r>
+            <a:r>
+              <a:rPr lang="fr-CH" sz="1800" dirty="0" err="1"/>
+              <a:t>from</a:t>
+            </a:r>
+            <a:r>
+              <a:rPr lang="fr-CH" sz="1800" dirty="0"/>
+              <a:t> the </a:t>
+            </a:r>
+            <a:r>
+              <a:rPr lang="fr-CH" sz="1800" dirty="0" err="1"/>
+              <a:t>theoretical</a:t>
+            </a:r>
+            <a:r>
+              <a:rPr lang="fr-CH" sz="1800" dirty="0"/>
+              <a:t> </a:t>
+            </a:r>
+            <a:r>
+              <a:rPr lang="fr-CH" sz="1800" dirty="0" err="1"/>
+              <a:t>accessibility</a:t>
+            </a:r>
+            <a:r>
+              <a:rPr lang="fr-CH" sz="1800" dirty="0"/>
+              <a:t>? </a:t>
+            </a:r>
+            <a:endParaRPr lang="en-001" dirty="0"/>
+          </a:p>
+        </p:txBody>
+      </p:sp>
     </p:spTree>
     <p:extLst>
       <p:ext uri="{BB962C8B-B14F-4D97-AF65-F5344CB8AC3E}">
@@ -18926,7 +19459,12 @@
             <p:ph type="title"/>
           </p:nvPr>
         </p:nvSpPr>
-        <p:spPr/>
+        <p:spPr>
+          <a:xfrm>
+            <a:off x="446314" y="329499"/>
+            <a:ext cx="11654641" cy="1325563"/>
+          </a:xfrm>
+        </p:spPr>
         <p:txBody>
           <a:bodyPr>
             <a:normAutofit/>
@@ -18934,8 +19472,8 @@
           <a:lstStyle/>
           <a:p>
             <a:r>
-              <a:rPr lang="en-001" sz="4000" dirty="0"/>
-              <a:t>Activities occurring beyond the 15-minute city</a:t>
+              <a:rPr lang="en-001" sz="3200" dirty="0"/>
+              <a:t>Types of activities occurring beyond the 15-minute city</a:t>
             </a:r>
           </a:p>
         </p:txBody>

--- a/The 15-Minute City in Practice.pptx
+++ b/The 15-Minute City in Practice.pptx
@@ -134,6 +134,7 @@
 <file path=ppt/revisionInfo.xml><?xml version="1.0" encoding="utf-8"?>
 <p1510:revInfo xmlns:a="http://schemas.openxmlformats.org/drawingml/2006/main" xmlns:r="http://schemas.openxmlformats.org/officeDocument/2006/relationships" xmlns:p1510="http://schemas.microsoft.com/office/powerpoint/2015/10/main">
   <p1510:revLst>
+    <p1510:client id="{5A2F72B6-F6B7-4782-BBB8-21E9C6031B42}" v="1" dt="2026-06-03T07:10:50.218"/>
     <p1510:client id="{5E255A67-A6A9-4968-8E92-A1C96BA15CA7}" v="4" dt="2026-06-02T20:47:20.306"/>
   </p1510:revLst>
 </p1510:revInfo>
@@ -144,7 +145,7 @@
   <pc:docChgLst>
     <pc:chgData name="Noémie Simon" userId="bcf751ccc0c63cc4" providerId="LiveId" clId="{D8646A5F-B639-4467-90AE-53976C914447}"/>
     <pc:docChg chg="custSel addSld delSld modSld sldOrd">
-      <pc:chgData name="Noémie Simon" userId="bcf751ccc0c63cc4" providerId="LiveId" clId="{D8646A5F-B639-4467-90AE-53976C914447}" dt="2026-06-02T20:55:29.016" v="158" actId="27614"/>
+      <pc:chgData name="Noémie Simon" userId="bcf751ccc0c63cc4" providerId="LiveId" clId="{D8646A5F-B639-4467-90AE-53976C914447}" dt="2026-06-03T07:15:41.060" v="469" actId="27636"/>
       <pc:docMkLst>
         <pc:docMk/>
       </pc:docMkLst>
@@ -189,6 +190,21 @@
             <pc:docMk/>
             <pc:sldMk cId="3809305011" sldId="259"/>
             <ac:spMk id="2" creationId="{3ED5FDDA-FB89-7C42-000C-DFB890DC4FCA}"/>
+          </ac:spMkLst>
+        </pc:spChg>
+      </pc:sldChg>
+      <pc:sldChg chg="modSp mod">
+        <pc:chgData name="Noémie Simon" userId="bcf751ccc0c63cc4" providerId="LiveId" clId="{D8646A5F-B639-4467-90AE-53976C914447}" dt="2026-06-03T07:15:41.060" v="469" actId="27636"/>
+        <pc:sldMkLst>
+          <pc:docMk/>
+          <pc:sldMk cId="2357305363" sldId="262"/>
+        </pc:sldMkLst>
+        <pc:spChg chg="mod">
+          <ac:chgData name="Noémie Simon" userId="bcf751ccc0c63cc4" providerId="LiveId" clId="{D8646A5F-B639-4467-90AE-53976C914447}" dt="2026-06-03T07:15:41.060" v="469" actId="27636"/>
+          <ac:spMkLst>
+            <pc:docMk/>
+            <pc:sldMk cId="2357305363" sldId="262"/>
+            <ac:spMk id="3" creationId="{DBAEEBF5-C3D9-FA63-1735-E9C2F5C42998}"/>
           </ac:spMkLst>
         </pc:spChg>
       </pc:sldChg>
@@ -1937,10 +1953,10 @@
     <dgm:cxn modelId="{A8E50C03-6576-244E-ADDE-A889F885F89B}" type="presOf" srcId="{12C6A796-E05E-4109-83A5-CA6732F07DCC}" destId="{246B3F6D-7E01-4EA4-AD38-6D0AD826CB2B}" srcOrd="0" destOrd="0" presId="urn:microsoft.com/office/officeart/2005/8/layout/vList2"/>
     <dgm:cxn modelId="{1ECB5511-AEE1-4BBA-B91B-D516215FE7D6}" srcId="{72C74514-7E59-43DD-81F2-44D5759C1824}" destId="{A40C8A38-7AAB-4A1C-B39A-DBED66B60A11}" srcOrd="7" destOrd="0" parTransId="{E5A7B580-C647-42C1-94EA-2AD96FD66632}" sibTransId="{30FCC906-E4C0-41AD-A5E6-88449F9BC921}"/>
     <dgm:cxn modelId="{B039D11B-C065-4DB7-9C3F-9C1F1452DDD1}" srcId="{72C74514-7E59-43DD-81F2-44D5759C1824}" destId="{12C6A796-E05E-4109-83A5-CA6732F07DCC}" srcOrd="0" destOrd="0" parTransId="{A758E241-A4DE-442B-90CA-0C9C5F9396E7}" sibTransId="{13D06279-7FFC-4E91-975B-C5F631451C36}"/>
-    <dgm:cxn modelId="{95C9FA46-ECF1-4D14-8548-452CDC7D2175}" srcId="{72C74514-7E59-43DD-81F2-44D5759C1824}" destId="{41B0F318-681F-480C-ACBE-4C24B27636D0}" srcOrd="1" destOrd="0" parTransId="{0D659330-D588-4B5E-A5C6-35292AF1DC95}" sibTransId="{207A3D5B-4122-4CE8-B141-67DFCED8E158}"/>
     <dgm:cxn modelId="{DB0B575B-38EC-9E4B-AA78-FAEA8F6ED7A4}" type="presOf" srcId="{A40C8A38-7AAB-4A1C-B39A-DBED66B60A11}" destId="{4600E2F4-4816-42E1-84E1-9746CD5EE6E1}" srcOrd="0" destOrd="0" presId="urn:microsoft.com/office/officeart/2005/8/layout/vList2"/>
     <dgm:cxn modelId="{F3787362-5CE9-48E2-99AE-A2FA95701E60}" srcId="{72C74514-7E59-43DD-81F2-44D5759C1824}" destId="{7157FA5E-C5A4-4039-9621-57EE8A1E448F}" srcOrd="2" destOrd="0" parTransId="{874C9894-94B6-42CC-B8D0-400E1D54079E}" sibTransId="{1E46E158-B5CD-4F93-9646-8137B2D6040A}"/>
     <dgm:cxn modelId="{735CFF62-1B1A-4748-9F22-EAA80AE47065}" type="presOf" srcId="{E27D3E73-9AE1-6C47-BAD3-BF0CFC501738}" destId="{924973F7-934D-8F47-94DA-08F7A44621FE}" srcOrd="0" destOrd="0" presId="urn:microsoft.com/office/officeart/2005/8/layout/vList2"/>
+    <dgm:cxn modelId="{95C9FA46-ECF1-4D14-8548-452CDC7D2175}" srcId="{72C74514-7E59-43DD-81F2-44D5759C1824}" destId="{41B0F318-681F-480C-ACBE-4C24B27636D0}" srcOrd="1" destOrd="0" parTransId="{0D659330-D588-4B5E-A5C6-35292AF1DC95}" sibTransId="{207A3D5B-4122-4CE8-B141-67DFCED8E158}"/>
     <dgm:cxn modelId="{AA027D6A-3333-A445-9BBD-E27C58DF0311}" type="presOf" srcId="{B6047393-ED44-B540-9E08-5BD8BA526CAA}" destId="{47EF09D4-BA96-8E4E-9C02-848C91969397}" srcOrd="0" destOrd="0" presId="urn:microsoft.com/office/officeart/2005/8/layout/vList2"/>
     <dgm:cxn modelId="{E714E36B-BA29-4B1C-A5A6-DC818E048543}" type="presOf" srcId="{72C74514-7E59-43DD-81F2-44D5759C1824}" destId="{2DC07872-A69E-402A-96DD-C56028D57122}" srcOrd="0" destOrd="0" presId="urn:microsoft.com/office/officeart/2005/8/layout/vList2"/>
     <dgm:cxn modelId="{5147CD80-432B-8D48-A913-2878ACEA3B1C}" type="presOf" srcId="{4B1E9948-2C1F-48C7-9BF9-20B8B7DAEB5F}" destId="{ED8365DF-6489-4474-AD72-A519E8BD5BF3}" srcOrd="0" destOrd="0" presId="urn:microsoft.com/office/officeart/2005/8/layout/vList2"/>
@@ -2001,7 +2017,7 @@
       <dsp:spPr>
         <a:xfrm>
           <a:off x="0" y="0"/>
-          <a:ext cx="11487396" cy="423757"/>
+          <a:ext cx="11487396" cy="423736"/>
         </a:xfrm>
         <a:prstGeom prst="roundRect">
           <a:avLst/>
@@ -2105,8 +2121,8 @@
         </a:p>
       </dsp:txBody>
       <dsp:txXfrm>
-        <a:off x="20686" y="20686"/>
-        <a:ext cx="11446024" cy="382385"/>
+        <a:off x="20685" y="20685"/>
+        <a:ext cx="11446026" cy="382366"/>
       </dsp:txXfrm>
     </dsp:sp>
     <dsp:sp modelId="{1492B98B-63EB-43A1-8A5D-476D085DE6CB}">
@@ -2116,8 +2132,8 @@
       </dsp:nvSpPr>
       <dsp:spPr>
         <a:xfrm>
-          <a:off x="0" y="436783"/>
-          <a:ext cx="11487396" cy="423757"/>
+          <a:off x="0" y="437262"/>
+          <a:ext cx="11487396" cy="423736"/>
         </a:xfrm>
         <a:prstGeom prst="roundRect">
           <a:avLst/>
@@ -2217,8 +2233,8 @@
         </a:p>
       </dsp:txBody>
       <dsp:txXfrm>
-        <a:off x="20686" y="457469"/>
-        <a:ext cx="11446024" cy="382385"/>
+        <a:off x="20685" y="457947"/>
+        <a:ext cx="11446026" cy="382366"/>
       </dsp:txXfrm>
     </dsp:sp>
     <dsp:sp modelId="{0226B3E9-17B7-42EC-B955-CDCAEF4B2B67}">
@@ -2228,8 +2244,8 @@
       </dsp:nvSpPr>
       <dsp:spPr>
         <a:xfrm>
-          <a:off x="0" y="873070"/>
-          <a:ext cx="11487396" cy="423757"/>
+          <a:off x="0" y="873416"/>
+          <a:ext cx="11487396" cy="423736"/>
         </a:xfrm>
         <a:prstGeom prst="roundRect">
           <a:avLst/>
@@ -2329,8 +2345,8 @@
         </a:p>
       </dsp:txBody>
       <dsp:txXfrm>
-        <a:off x="20686" y="893756"/>
-        <a:ext cx="11446024" cy="382385"/>
+        <a:off x="20685" y="894101"/>
+        <a:ext cx="11446026" cy="382366"/>
       </dsp:txXfrm>
     </dsp:sp>
     <dsp:sp modelId="{924973F7-934D-8F47-94DA-08F7A44621FE}">
@@ -2340,8 +2356,8 @@
       </dsp:nvSpPr>
       <dsp:spPr>
         <a:xfrm>
-          <a:off x="0" y="1309358"/>
-          <a:ext cx="11487396" cy="423757"/>
+          <a:off x="0" y="1309570"/>
+          <a:ext cx="11487396" cy="423736"/>
         </a:xfrm>
         <a:prstGeom prst="roundRect">
           <a:avLst/>
@@ -2428,8 +2444,8 @@
         </a:p>
       </dsp:txBody>
       <dsp:txXfrm>
-        <a:off x="20686" y="1330044"/>
-        <a:ext cx="11446024" cy="382385"/>
+        <a:off x="20685" y="1330255"/>
+        <a:ext cx="11446026" cy="382366"/>
       </dsp:txXfrm>
     </dsp:sp>
     <dsp:sp modelId="{97E83598-7549-4D53-BBE1-0E6AEBC831C5}">
@@ -2439,8 +2455,8 @@
       </dsp:nvSpPr>
       <dsp:spPr>
         <a:xfrm>
-          <a:off x="0" y="1745646"/>
-          <a:ext cx="11487396" cy="423757"/>
+          <a:off x="0" y="1745723"/>
+          <a:ext cx="11487396" cy="423736"/>
         </a:xfrm>
         <a:prstGeom prst="roundRect">
           <a:avLst/>
@@ -2572,8 +2588,8 @@
         </a:p>
       </dsp:txBody>
       <dsp:txXfrm>
-        <a:off x="20686" y="1766332"/>
-        <a:ext cx="11446024" cy="382385"/>
+        <a:off x="20685" y="1766408"/>
+        <a:ext cx="11446026" cy="382366"/>
       </dsp:txXfrm>
     </dsp:sp>
     <dsp:sp modelId="{A25B77B8-1FA0-264E-8C79-E12498181616}">
@@ -2583,8 +2599,8 @@
       </dsp:nvSpPr>
       <dsp:spPr>
         <a:xfrm>
-          <a:off x="0" y="2181933"/>
-          <a:ext cx="11487396" cy="423757"/>
+          <a:off x="0" y="2181877"/>
+          <a:ext cx="11487396" cy="423736"/>
         </a:xfrm>
         <a:prstGeom prst="roundRect">
           <a:avLst/>
@@ -2671,8 +2687,8 @@
         </a:p>
       </dsp:txBody>
       <dsp:txXfrm>
-        <a:off x="20686" y="2202619"/>
-        <a:ext cx="11446024" cy="382385"/>
+        <a:off x="20685" y="2202562"/>
+        <a:ext cx="11446026" cy="382366"/>
       </dsp:txXfrm>
     </dsp:sp>
     <dsp:sp modelId="{ED8365DF-6489-4474-AD72-A519E8BD5BF3}">
@@ -2682,8 +2698,8 @@
       </dsp:nvSpPr>
       <dsp:spPr>
         <a:xfrm>
-          <a:off x="0" y="2618221"/>
-          <a:ext cx="11487396" cy="423757"/>
+          <a:off x="0" y="2618031"/>
+          <a:ext cx="11487396" cy="423736"/>
         </a:xfrm>
         <a:prstGeom prst="roundRect">
           <a:avLst/>
@@ -2791,8 +2807,8 @@
         </a:p>
       </dsp:txBody>
       <dsp:txXfrm>
-        <a:off x="20686" y="2638907"/>
-        <a:ext cx="11446024" cy="382385"/>
+        <a:off x="20685" y="2638716"/>
+        <a:ext cx="11446026" cy="382366"/>
       </dsp:txXfrm>
     </dsp:sp>
     <dsp:sp modelId="{4600E2F4-4816-42E1-84E1-9746CD5EE6E1}">
@@ -2802,8 +2818,8 @@
       </dsp:nvSpPr>
       <dsp:spPr>
         <a:xfrm>
-          <a:off x="0" y="3054509"/>
-          <a:ext cx="11487396" cy="423757"/>
+          <a:off x="0" y="3054185"/>
+          <a:ext cx="11487396" cy="423736"/>
         </a:xfrm>
         <a:prstGeom prst="roundRect">
           <a:avLst/>
@@ -2923,8 +2939,8 @@
         </a:p>
       </dsp:txBody>
       <dsp:txXfrm>
-        <a:off x="20686" y="3075195"/>
-        <a:ext cx="11446024" cy="382385"/>
+        <a:off x="20685" y="3074870"/>
+        <a:ext cx="11446026" cy="382366"/>
       </dsp:txXfrm>
     </dsp:sp>
     <dsp:sp modelId="{3DD9623C-BD4B-4DD5-BA45-58C18A024881}">
@@ -2934,8 +2950,8 @@
       </dsp:nvSpPr>
       <dsp:spPr>
         <a:xfrm>
-          <a:off x="0" y="3490796"/>
-          <a:ext cx="11487396" cy="423757"/>
+          <a:off x="0" y="3490338"/>
+          <a:ext cx="11487396" cy="423736"/>
         </a:xfrm>
         <a:prstGeom prst="roundRect">
           <a:avLst/>
@@ -3027,8 +3043,8 @@
         </a:p>
       </dsp:txBody>
       <dsp:txXfrm>
-        <a:off x="20686" y="3511482"/>
-        <a:ext cx="11446024" cy="382385"/>
+        <a:off x="20685" y="3511023"/>
+        <a:ext cx="11446026" cy="382366"/>
       </dsp:txXfrm>
     </dsp:sp>
     <dsp:sp modelId="{47EF09D4-BA96-8E4E-9C02-848C91969397}">
@@ -3038,8 +3054,8 @@
       </dsp:nvSpPr>
       <dsp:spPr>
         <a:xfrm>
-          <a:off x="0" y="3927084"/>
-          <a:ext cx="11487396" cy="423757"/>
+          <a:off x="0" y="3926492"/>
+          <a:ext cx="11487396" cy="423736"/>
         </a:xfrm>
         <a:prstGeom prst="roundRect">
           <a:avLst/>
@@ -3126,8 +3142,8 @@
         </a:p>
       </dsp:txBody>
       <dsp:txXfrm>
-        <a:off x="20686" y="3947770"/>
-        <a:ext cx="11446024" cy="382385"/>
+        <a:off x="20685" y="3947177"/>
+        <a:ext cx="11446026" cy="382366"/>
       </dsp:txXfrm>
     </dsp:sp>
   </dsp:spTree>
@@ -4484,7 +4500,7 @@
           <a:p>
             <a:fld id="{6DABDDBB-0918-4A38-BFF3-738DBDB6A6F7}" type="datetimeFigureOut">
               <a:rPr lang="fr-CH" smtClean="0"/>
-              <a:t>03.06.26</a:t>
+              <a:t>03.06.2026</a:t>
             </a:fld>
             <a:endParaRPr lang="fr-CH"/>
           </a:p>
@@ -4684,7 +4700,7 @@
           <a:p>
             <a:fld id="{6DABDDBB-0918-4A38-BFF3-738DBDB6A6F7}" type="datetimeFigureOut">
               <a:rPr lang="fr-CH" smtClean="0"/>
-              <a:t>03.06.26</a:t>
+              <a:t>03.06.2026</a:t>
             </a:fld>
             <a:endParaRPr lang="fr-CH"/>
           </a:p>
@@ -4894,7 +4910,7 @@
           <a:p>
             <a:fld id="{6DABDDBB-0918-4A38-BFF3-738DBDB6A6F7}" type="datetimeFigureOut">
               <a:rPr lang="fr-CH" smtClean="0"/>
-              <a:t>03.06.26</a:t>
+              <a:t>03.06.2026</a:t>
             </a:fld>
             <a:endParaRPr lang="fr-CH"/>
           </a:p>
@@ -5094,7 +5110,7 @@
           <a:p>
             <a:fld id="{6DABDDBB-0918-4A38-BFF3-738DBDB6A6F7}" type="datetimeFigureOut">
               <a:rPr lang="fr-CH" smtClean="0"/>
-              <a:t>03.06.26</a:t>
+              <a:t>03.06.2026</a:t>
             </a:fld>
             <a:endParaRPr lang="fr-CH"/>
           </a:p>
@@ -5370,7 +5386,7 @@
           <a:p>
             <a:fld id="{6DABDDBB-0918-4A38-BFF3-738DBDB6A6F7}" type="datetimeFigureOut">
               <a:rPr lang="fr-CH" smtClean="0"/>
-              <a:t>03.06.26</a:t>
+              <a:t>03.06.2026</a:t>
             </a:fld>
             <a:endParaRPr lang="fr-CH"/>
           </a:p>
@@ -5638,7 +5654,7 @@
           <a:p>
             <a:fld id="{6DABDDBB-0918-4A38-BFF3-738DBDB6A6F7}" type="datetimeFigureOut">
               <a:rPr lang="fr-CH" smtClean="0"/>
-              <a:t>03.06.26</a:t>
+              <a:t>03.06.2026</a:t>
             </a:fld>
             <a:endParaRPr lang="fr-CH"/>
           </a:p>
@@ -6053,7 +6069,7 @@
           <a:p>
             <a:fld id="{6DABDDBB-0918-4A38-BFF3-738DBDB6A6F7}" type="datetimeFigureOut">
               <a:rPr lang="fr-CH" smtClean="0"/>
-              <a:t>03.06.26</a:t>
+              <a:t>03.06.2026</a:t>
             </a:fld>
             <a:endParaRPr lang="fr-CH"/>
           </a:p>
@@ -6195,7 +6211,7 @@
           <a:p>
             <a:fld id="{6DABDDBB-0918-4A38-BFF3-738DBDB6A6F7}" type="datetimeFigureOut">
               <a:rPr lang="fr-CH" smtClean="0"/>
-              <a:t>03.06.26</a:t>
+              <a:t>03.06.2026</a:t>
             </a:fld>
             <a:endParaRPr lang="fr-CH"/>
           </a:p>
@@ -6308,7 +6324,7 @@
           <a:p>
             <a:fld id="{6DABDDBB-0918-4A38-BFF3-738DBDB6A6F7}" type="datetimeFigureOut">
               <a:rPr lang="fr-CH" smtClean="0"/>
-              <a:t>03.06.26</a:t>
+              <a:t>03.06.2026</a:t>
             </a:fld>
             <a:endParaRPr lang="fr-CH"/>
           </a:p>
@@ -6621,7 +6637,7 @@
           <a:p>
             <a:fld id="{6DABDDBB-0918-4A38-BFF3-738DBDB6A6F7}" type="datetimeFigureOut">
               <a:rPr lang="fr-CH" smtClean="0"/>
-              <a:t>03.06.26</a:t>
+              <a:t>03.06.2026</a:t>
             </a:fld>
             <a:endParaRPr lang="fr-CH"/>
           </a:p>
@@ -6910,7 +6926,7 @@
           <a:p>
             <a:fld id="{6DABDDBB-0918-4A38-BFF3-738DBDB6A6F7}" type="datetimeFigureOut">
               <a:rPr lang="fr-CH" smtClean="0"/>
-              <a:t>03.06.26</a:t>
+              <a:t>03.06.2026</a:t>
             </a:fld>
             <a:endParaRPr lang="fr-CH"/>
           </a:p>
@@ -7153,7 +7169,7 @@
           <a:p>
             <a:fld id="{6DABDDBB-0918-4A38-BFF3-738DBDB6A6F7}" type="datetimeFigureOut">
               <a:rPr lang="fr-CH" smtClean="0"/>
-              <a:t>03.06.26</a:t>
+              <a:t>03.06.2026</a:t>
             </a:fld>
             <a:endParaRPr lang="fr-CH"/>
           </a:p>
@@ -8355,9 +8371,16 @@
             <p:ph idx="1"/>
           </p:nvPr>
         </p:nvSpPr>
-        <p:spPr/>
+        <p:spPr>
+          <a:xfrm>
+            <a:off x="838200" y="1581912"/>
+            <a:ext cx="11058144" cy="4595051"/>
+          </a:xfrm>
+        </p:spPr>
         <p:txBody>
-          <a:bodyPr/>
+          <a:bodyPr>
+            <a:normAutofit fontScale="85000" lnSpcReduction="10000"/>
+          </a:bodyPr>
           <a:lstStyle/>
           <a:p>
             <a:pPr marL="0" indent="0">
@@ -8565,14 +8588,15 @@
             </a:r>
           </a:p>
           <a:p>
-            <a:pPr marL="0" indent="0">
-              <a:buNone/>
+            <a:pPr>
+              <a:buFont typeface="Wingdings" panose="05000000000000000000" pitchFamily="2" charset="2"/>
+              <a:buChar char="à"/>
             </a:pPr>
             <a:r>
               <a:rPr lang="fr-CH" dirty="0">
                 <a:sym typeface="Wingdings" panose="05000000000000000000" pitchFamily="2" charset="2"/>
               </a:rPr>
-              <a:t> Change the </a:t>
+              <a:t>Change the </a:t>
             </a:r>
             <a:r>
               <a:rPr lang="fr-CH" dirty="0" err="1">
@@ -8621,6 +8645,117 @@
                 <a:sym typeface="Wingdings" panose="05000000000000000000" pitchFamily="2" charset="2"/>
               </a:rPr>
               <a:t>) </a:t>
+            </a:r>
+          </a:p>
+          <a:p>
+            <a:pPr marL="0" indent="0">
+              <a:buNone/>
+            </a:pPr>
+            <a:r>
+              <a:rPr lang="fr-CH" dirty="0">
+                <a:solidFill>
+                  <a:srgbClr val="98B2CB"/>
+                </a:solidFill>
+                <a:sym typeface="Wingdings" panose="05000000000000000000" pitchFamily="2" charset="2"/>
+              </a:rPr>
+              <a:t>POI </a:t>
+            </a:r>
+            <a:r>
+              <a:rPr lang="fr-CH" dirty="0" err="1">
+                <a:solidFill>
+                  <a:srgbClr val="98B2CB"/>
+                </a:solidFill>
+                <a:sym typeface="Wingdings" panose="05000000000000000000" pitchFamily="2" charset="2"/>
+              </a:rPr>
+              <a:t>interpretation</a:t>
+            </a:r>
+            <a:r>
+              <a:rPr lang="fr-CH" dirty="0">
+                <a:solidFill>
+                  <a:srgbClr val="98B2CB"/>
+                </a:solidFill>
+                <a:sym typeface="Wingdings" panose="05000000000000000000" pitchFamily="2" charset="2"/>
+              </a:rPr>
+              <a:t> and </a:t>
+            </a:r>
+            <a:r>
+              <a:rPr lang="fr-CH" dirty="0" err="1">
+                <a:solidFill>
+                  <a:srgbClr val="98B2CB"/>
+                </a:solidFill>
+                <a:sym typeface="Wingdings" panose="05000000000000000000" pitchFamily="2" charset="2"/>
+              </a:rPr>
+              <a:t>accuracy</a:t>
+            </a:r>
+            <a:endParaRPr lang="fr-CH" dirty="0">
+              <a:solidFill>
+                <a:srgbClr val="98B2CB"/>
+              </a:solidFill>
+              <a:sym typeface="Wingdings" panose="05000000000000000000" pitchFamily="2" charset="2"/>
+            </a:endParaRPr>
+          </a:p>
+          <a:p>
+            <a:pPr lvl="1"/>
+            <a:r>
+              <a:rPr lang="fr-CH" dirty="0" err="1">
+                <a:sym typeface="Wingdings" panose="05000000000000000000" pitchFamily="2" charset="2"/>
+              </a:rPr>
+              <a:t>Difficult</a:t>
+            </a:r>
+            <a:r>
+              <a:rPr lang="fr-CH">
+                <a:sym typeface="Wingdings" panose="05000000000000000000" pitchFamily="2" charset="2"/>
+              </a:rPr>
+              <a:t> </a:t>
+            </a:r>
+            <a:r>
+              <a:rPr lang="en-US">
+                <a:sym typeface="Wingdings" panose="05000000000000000000" pitchFamily="2" charset="2"/>
+              </a:rPr>
+              <a:t>to </a:t>
+            </a:r>
+            <a:r>
+              <a:rPr lang="en-US" dirty="0">
+                <a:sym typeface="Wingdings" panose="05000000000000000000" pitchFamily="2" charset="2"/>
+              </a:rPr>
+              <a:t>assess how accurate the POI data are, and the data take a long time to load.</a:t>
+            </a:r>
+            <a:endParaRPr lang="fr-CH" dirty="0">
+              <a:sym typeface="Wingdings" panose="05000000000000000000" pitchFamily="2" charset="2"/>
+            </a:endParaRPr>
+          </a:p>
+          <a:p>
+            <a:pPr marL="0" indent="0">
+              <a:buNone/>
+            </a:pPr>
+            <a:r>
+              <a:rPr lang="fr-CH" dirty="0">
+                <a:sym typeface="Wingdings" panose="05000000000000000000" pitchFamily="2" charset="2"/>
+              </a:rPr>
+              <a:t> Need for validation and </a:t>
+            </a:r>
+            <a:r>
+              <a:rPr lang="fr-CH" dirty="0" err="1">
+                <a:sym typeface="Wingdings" panose="05000000000000000000" pitchFamily="2" charset="2"/>
+              </a:rPr>
+              <a:t>processing</a:t>
+            </a:r>
+            <a:r>
+              <a:rPr lang="fr-CH" dirty="0">
+                <a:sym typeface="Wingdings" panose="05000000000000000000" pitchFamily="2" charset="2"/>
+              </a:rPr>
+              <a:t> </a:t>
+            </a:r>
+          </a:p>
+          <a:p>
+            <a:pPr marL="0" indent="0">
+              <a:buNone/>
+            </a:pPr>
+            <a:r>
+              <a:rPr lang="fr-CH" dirty="0">
+                <a:sym typeface="Wingdings" panose="05000000000000000000" pitchFamily="2" charset="2"/>
+              </a:rPr>
+              <a:t>	</a:t>
             </a:r>
           </a:p>
           <a:p>

--- a/The 15-Minute City in Practice.pptx
+++ b/The 15-Minute City in Practice.pptx
@@ -1953,10 +1953,10 @@
     <dgm:cxn modelId="{A8E50C03-6576-244E-ADDE-A889F885F89B}" type="presOf" srcId="{12C6A796-E05E-4109-83A5-CA6732F07DCC}" destId="{246B3F6D-7E01-4EA4-AD38-6D0AD826CB2B}" srcOrd="0" destOrd="0" presId="urn:microsoft.com/office/officeart/2005/8/layout/vList2"/>
     <dgm:cxn modelId="{1ECB5511-AEE1-4BBA-B91B-D516215FE7D6}" srcId="{72C74514-7E59-43DD-81F2-44D5759C1824}" destId="{A40C8A38-7AAB-4A1C-B39A-DBED66B60A11}" srcOrd="7" destOrd="0" parTransId="{E5A7B580-C647-42C1-94EA-2AD96FD66632}" sibTransId="{30FCC906-E4C0-41AD-A5E6-88449F9BC921}"/>
     <dgm:cxn modelId="{B039D11B-C065-4DB7-9C3F-9C1F1452DDD1}" srcId="{72C74514-7E59-43DD-81F2-44D5759C1824}" destId="{12C6A796-E05E-4109-83A5-CA6732F07DCC}" srcOrd="0" destOrd="0" parTransId="{A758E241-A4DE-442B-90CA-0C9C5F9396E7}" sibTransId="{13D06279-7FFC-4E91-975B-C5F631451C36}"/>
+    <dgm:cxn modelId="{95C9FA46-ECF1-4D14-8548-452CDC7D2175}" srcId="{72C74514-7E59-43DD-81F2-44D5759C1824}" destId="{41B0F318-681F-480C-ACBE-4C24B27636D0}" srcOrd="1" destOrd="0" parTransId="{0D659330-D588-4B5E-A5C6-35292AF1DC95}" sibTransId="{207A3D5B-4122-4CE8-B141-67DFCED8E158}"/>
     <dgm:cxn modelId="{DB0B575B-38EC-9E4B-AA78-FAEA8F6ED7A4}" type="presOf" srcId="{A40C8A38-7AAB-4A1C-B39A-DBED66B60A11}" destId="{4600E2F4-4816-42E1-84E1-9746CD5EE6E1}" srcOrd="0" destOrd="0" presId="urn:microsoft.com/office/officeart/2005/8/layout/vList2"/>
     <dgm:cxn modelId="{F3787362-5CE9-48E2-99AE-A2FA95701E60}" srcId="{72C74514-7E59-43DD-81F2-44D5759C1824}" destId="{7157FA5E-C5A4-4039-9621-57EE8A1E448F}" srcOrd="2" destOrd="0" parTransId="{874C9894-94B6-42CC-B8D0-400E1D54079E}" sibTransId="{1E46E158-B5CD-4F93-9646-8137B2D6040A}"/>
     <dgm:cxn modelId="{735CFF62-1B1A-4748-9F22-EAA80AE47065}" type="presOf" srcId="{E27D3E73-9AE1-6C47-BAD3-BF0CFC501738}" destId="{924973F7-934D-8F47-94DA-08F7A44621FE}" srcOrd="0" destOrd="0" presId="urn:microsoft.com/office/officeart/2005/8/layout/vList2"/>
-    <dgm:cxn modelId="{95C9FA46-ECF1-4D14-8548-452CDC7D2175}" srcId="{72C74514-7E59-43DD-81F2-44D5759C1824}" destId="{41B0F318-681F-480C-ACBE-4C24B27636D0}" srcOrd="1" destOrd="0" parTransId="{0D659330-D588-4B5E-A5C6-35292AF1DC95}" sibTransId="{207A3D5B-4122-4CE8-B141-67DFCED8E158}"/>
     <dgm:cxn modelId="{AA027D6A-3333-A445-9BBD-E27C58DF0311}" type="presOf" srcId="{B6047393-ED44-B540-9E08-5BD8BA526CAA}" destId="{47EF09D4-BA96-8E4E-9C02-848C91969397}" srcOrd="0" destOrd="0" presId="urn:microsoft.com/office/officeart/2005/8/layout/vList2"/>
     <dgm:cxn modelId="{E714E36B-BA29-4B1C-A5A6-DC818E048543}" type="presOf" srcId="{72C74514-7E59-43DD-81F2-44D5759C1824}" destId="{2DC07872-A69E-402A-96DD-C56028D57122}" srcOrd="0" destOrd="0" presId="urn:microsoft.com/office/officeart/2005/8/layout/vList2"/>
     <dgm:cxn modelId="{5147CD80-432B-8D48-A913-2878ACEA3B1C}" type="presOf" srcId="{4B1E9948-2C1F-48C7-9BF9-20B8B7DAEB5F}" destId="{ED8365DF-6489-4474-AD72-A519E8BD5BF3}" srcOrd="0" destOrd="0" presId="urn:microsoft.com/office/officeart/2005/8/layout/vList2"/>
@@ -4500,7 +4500,7 @@
           <a:p>
             <a:fld id="{6DABDDBB-0918-4A38-BFF3-738DBDB6A6F7}" type="datetimeFigureOut">
               <a:rPr lang="fr-CH" smtClean="0"/>
-              <a:t>03.06.2026</a:t>
+              <a:t>03.06.26</a:t>
             </a:fld>
             <a:endParaRPr lang="fr-CH"/>
           </a:p>
@@ -4700,7 +4700,7 @@
           <a:p>
             <a:fld id="{6DABDDBB-0918-4A38-BFF3-738DBDB6A6F7}" type="datetimeFigureOut">
               <a:rPr lang="fr-CH" smtClean="0"/>
-              <a:t>03.06.2026</a:t>
+              <a:t>03.06.26</a:t>
             </a:fld>
             <a:endParaRPr lang="fr-CH"/>
           </a:p>
@@ -4910,7 +4910,7 @@
           <a:p>
             <a:fld id="{6DABDDBB-0918-4A38-BFF3-738DBDB6A6F7}" type="datetimeFigureOut">
               <a:rPr lang="fr-CH" smtClean="0"/>
-              <a:t>03.06.2026</a:t>
+              <a:t>03.06.26</a:t>
             </a:fld>
             <a:endParaRPr lang="fr-CH"/>
           </a:p>
@@ -5110,7 +5110,7 @@
           <a:p>
             <a:fld id="{6DABDDBB-0918-4A38-BFF3-738DBDB6A6F7}" type="datetimeFigureOut">
               <a:rPr lang="fr-CH" smtClean="0"/>
-              <a:t>03.06.2026</a:t>
+              <a:t>03.06.26</a:t>
             </a:fld>
             <a:endParaRPr lang="fr-CH"/>
           </a:p>
@@ -5386,7 +5386,7 @@
           <a:p>
             <a:fld id="{6DABDDBB-0918-4A38-BFF3-738DBDB6A6F7}" type="datetimeFigureOut">
               <a:rPr lang="fr-CH" smtClean="0"/>
-              <a:t>03.06.2026</a:t>
+              <a:t>03.06.26</a:t>
             </a:fld>
             <a:endParaRPr lang="fr-CH"/>
           </a:p>
@@ -5654,7 +5654,7 @@
           <a:p>
             <a:fld id="{6DABDDBB-0918-4A38-BFF3-738DBDB6A6F7}" type="datetimeFigureOut">
               <a:rPr lang="fr-CH" smtClean="0"/>
-              <a:t>03.06.2026</a:t>
+              <a:t>03.06.26</a:t>
             </a:fld>
             <a:endParaRPr lang="fr-CH"/>
           </a:p>
@@ -6069,7 +6069,7 @@
           <a:p>
             <a:fld id="{6DABDDBB-0918-4A38-BFF3-738DBDB6A6F7}" type="datetimeFigureOut">
               <a:rPr lang="fr-CH" smtClean="0"/>
-              <a:t>03.06.2026</a:t>
+              <a:t>03.06.26</a:t>
             </a:fld>
             <a:endParaRPr lang="fr-CH"/>
           </a:p>
@@ -6211,7 +6211,7 @@
           <a:p>
             <a:fld id="{6DABDDBB-0918-4A38-BFF3-738DBDB6A6F7}" type="datetimeFigureOut">
               <a:rPr lang="fr-CH" smtClean="0"/>
-              <a:t>03.06.2026</a:t>
+              <a:t>03.06.26</a:t>
             </a:fld>
             <a:endParaRPr lang="fr-CH"/>
           </a:p>
@@ -6324,7 +6324,7 @@
           <a:p>
             <a:fld id="{6DABDDBB-0918-4A38-BFF3-738DBDB6A6F7}" type="datetimeFigureOut">
               <a:rPr lang="fr-CH" smtClean="0"/>
-              <a:t>03.06.2026</a:t>
+              <a:t>03.06.26</a:t>
             </a:fld>
             <a:endParaRPr lang="fr-CH"/>
           </a:p>
@@ -6637,7 +6637,7 @@
           <a:p>
             <a:fld id="{6DABDDBB-0918-4A38-BFF3-738DBDB6A6F7}" type="datetimeFigureOut">
               <a:rPr lang="fr-CH" smtClean="0"/>
-              <a:t>03.06.2026</a:t>
+              <a:t>03.06.26</a:t>
             </a:fld>
             <a:endParaRPr lang="fr-CH"/>
           </a:p>
@@ -6926,7 +6926,7 @@
           <a:p>
             <a:fld id="{6DABDDBB-0918-4A38-BFF3-738DBDB6A6F7}" type="datetimeFigureOut">
               <a:rPr lang="fr-CH" smtClean="0"/>
-              <a:t>03.06.2026</a:t>
+              <a:t>03.06.26</a:t>
             </a:fld>
             <a:endParaRPr lang="fr-CH"/>
           </a:p>
@@ -7169,7 +7169,7 @@
           <a:p>
             <a:fld id="{6DABDDBB-0918-4A38-BFF3-738DBDB6A6F7}" type="datetimeFigureOut">
               <a:rPr lang="fr-CH" smtClean="0"/>
-              <a:t>03.06.2026</a:t>
+              <a:t>03.06.26</a:t>
             </a:fld>
             <a:endParaRPr lang="fr-CH"/>
           </a:p>
@@ -19420,42 +19420,6 @@
           </a:p>
         </p:txBody>
       </p:sp>
-      <p:pic>
-        <p:nvPicPr>
-          <p:cNvPr id="8" name="Picture 7">
-            <a:extLst>
-              <a:ext uri="{FF2B5EF4-FFF2-40B4-BE49-F238E27FC236}">
-                <a16:creationId xmlns:a16="http://schemas.microsoft.com/office/drawing/2014/main" id="{826849BE-0450-BC5F-269F-A7C9C7FCB89E}"/>
-              </a:ext>
-            </a:extLst>
-          </p:cNvPr>
-          <p:cNvPicPr>
-            <a:picLocks noChangeAspect="1"/>
-          </p:cNvPicPr>
-          <p:nvPr/>
-        </p:nvPicPr>
-        <p:blipFill>
-          <a:blip r:embed="rId2">
-            <a:extLst>
-              <a:ext uri="{28A0092B-C50C-407E-A947-70E740481C1C}">
-                <a14:useLocalDpi xmlns:a14="http://schemas.microsoft.com/office/drawing/2010/main" val="0"/>
-              </a:ext>
-            </a:extLst>
-          </a:blip>
-          <a:stretch>
-            <a:fillRect/>
-          </a:stretch>
-        </p:blipFill>
-        <p:spPr>
-          <a:xfrm>
-            <a:off x="3227078" y="362053"/>
-            <a:ext cx="8964922" cy="6133894"/>
-          </a:xfrm>
-          <a:prstGeom prst="rect">
-            <a:avLst/>
-          </a:prstGeom>
-        </p:spPr>
-      </p:pic>
       <p:sp>
         <p:nvSpPr>
           <p:cNvPr id="4" name="TextBox 3">
@@ -19548,6 +19512,42 @@
           </a:p>
         </p:txBody>
       </p:sp>
+      <p:pic>
+        <p:nvPicPr>
+          <p:cNvPr id="5" name="Picture 4">
+            <a:extLst>
+              <a:ext uri="{FF2B5EF4-FFF2-40B4-BE49-F238E27FC236}">
+                <a16:creationId xmlns:a16="http://schemas.microsoft.com/office/drawing/2014/main" id="{934DCE53-468B-0812-3DF9-3A7AE4BCB90B}"/>
+              </a:ext>
+            </a:extLst>
+          </p:cNvPr>
+          <p:cNvPicPr>
+            <a:picLocks noChangeAspect="1"/>
+          </p:cNvPicPr>
+          <p:nvPr/>
+        </p:nvPicPr>
+        <p:blipFill>
+          <a:blip r:embed="rId2">
+            <a:extLst>
+              <a:ext uri="{28A0092B-C50C-407E-A947-70E740481C1C}">
+                <a14:useLocalDpi xmlns:a14="http://schemas.microsoft.com/office/drawing/2010/main" val="0"/>
+              </a:ext>
+            </a:extLst>
+          </a:blip>
+          <a:stretch>
+            <a:fillRect/>
+          </a:stretch>
+        </p:blipFill>
+        <p:spPr>
+          <a:xfrm>
+            <a:off x="3227078" y="449587"/>
+            <a:ext cx="8722750" cy="5539348"/>
+          </a:xfrm>
+          <a:prstGeom prst="rect">
+            <a:avLst/>
+          </a:prstGeom>
+        </p:spPr>
+      </p:pic>
     </p:spTree>
     <p:extLst>
       <p:ext uri="{BB962C8B-B14F-4D97-AF65-F5344CB8AC3E}">
